--- a/Deliverables/Presentation1.pptx
+++ b/Deliverables/Presentation1.pptx
@@ -8,12 +8,18 @@
     <p:sldId id="256" r:id="rId2"/>
     <p:sldId id="257" r:id="rId3"/>
     <p:sldId id="258" r:id="rId4"/>
-    <p:sldId id="264" r:id="rId5"/>
-    <p:sldId id="259" r:id="rId6"/>
-    <p:sldId id="260" r:id="rId7"/>
-    <p:sldId id="261" r:id="rId8"/>
-    <p:sldId id="262" r:id="rId9"/>
-    <p:sldId id="263" r:id="rId10"/>
+    <p:sldId id="265" r:id="rId5"/>
+    <p:sldId id="266" r:id="rId6"/>
+    <p:sldId id="267" r:id="rId7"/>
+    <p:sldId id="268" r:id="rId8"/>
+    <p:sldId id="270" r:id="rId9"/>
+    <p:sldId id="260" r:id="rId10"/>
+    <p:sldId id="272" r:id="rId11"/>
+    <p:sldId id="261" r:id="rId12"/>
+    <p:sldId id="262" r:id="rId13"/>
+    <p:sldId id="269" r:id="rId14"/>
+    <p:sldId id="263" r:id="rId15"/>
+    <p:sldId id="271" r:id="rId16"/>
   </p:sldIdLst>
   <p:sldSz cx="12192000" cy="6858000"/>
   <p:notesSz cx="6858000" cy="9144000"/>
@@ -123,7 +129,7 @@
 <file path=ppt/revisionInfo.xml><?xml version="1.0" encoding="utf-8"?>
 <p1510:revInfo xmlns:a="http://schemas.openxmlformats.org/drawingml/2006/main" xmlns:r="http://schemas.openxmlformats.org/officeDocument/2006/relationships" xmlns:p1510="http://schemas.microsoft.com/office/powerpoint/2015/10/main">
   <p1510:revLst>
-    <p1510:client id="{EADFFEA0-CC63-45EF-97E4-5A80CDB68182}" v="11" dt="2026-09-15T16:17:28.695"/>
+    <p1510:client id="{EADFFEA0-CC63-45EF-97E4-5A80CDB68182}" v="21" dt="2026-09-15T17:37:22.721"/>
   </p1510:revLst>
 </p1510:revInfo>
 </file>
@@ -132,53 +138,117 @@
 <pc:chgInfo xmlns:a="http://schemas.openxmlformats.org/drawingml/2006/main" xmlns:r="http://schemas.openxmlformats.org/officeDocument/2006/relationships" xmlns:ac="http://schemas.microsoft.com/office/drawing/2013/main/command" xmlns:pc="http://schemas.microsoft.com/office/powerpoint/2013/main/command">
   <pc:docChgLst>
     <pc:chgData name="Steve Mutrux" userId="4fa98d0c-dc66-4728-b09b-a88e22e95094" providerId="ADAL" clId="{421BD283-33D8-4C6C-821F-71755E863FA2}"/>
-    <pc:docChg chg="addSld delSld modSld">
-      <pc:chgData name="Steve Mutrux" userId="4fa98d0c-dc66-4728-b09b-a88e22e95094" providerId="ADAL" clId="{421BD283-33D8-4C6C-821F-71755E863FA2}" dt="2026-09-15T16:17:28.694" v="10"/>
+    <pc:docChg chg="undo custSel addSld delSld modSld sldOrd">
+      <pc:chgData name="Steve Mutrux" userId="4fa98d0c-dc66-4728-b09b-a88e22e95094" providerId="ADAL" clId="{421BD283-33D8-4C6C-821F-71755E863FA2}" dt="2026-09-15T17:37:27.581" v="270" actId="20577"/>
       <pc:docMkLst>
         <pc:docMk/>
       </pc:docMkLst>
-      <pc:sldChg chg="addSp modSp">
-        <pc:chgData name="Steve Mutrux" userId="4fa98d0c-dc66-4728-b09b-a88e22e95094" providerId="ADAL" clId="{421BD283-33D8-4C6C-821F-71755E863FA2}" dt="2026-09-15T16:05:55.235" v="0" actId="767"/>
+      <pc:sldChg chg="addSp modSp mod">
+        <pc:chgData name="Steve Mutrux" userId="4fa98d0c-dc66-4728-b09b-a88e22e95094" providerId="ADAL" clId="{421BD283-33D8-4C6C-821F-71755E863FA2}" dt="2026-09-15T17:24:15.655" v="135" actId="403"/>
         <pc:sldMkLst>
           <pc:docMk/>
           <pc:sldMk cId="1072592071" sldId="256"/>
         </pc:sldMkLst>
         <pc:spChg chg="add mod">
-          <ac:chgData name="Steve Mutrux" userId="4fa98d0c-dc66-4728-b09b-a88e22e95094" providerId="ADAL" clId="{421BD283-33D8-4C6C-821F-71755E863FA2}" dt="2026-09-15T16:05:55.235" v="0" actId="767"/>
+          <ac:chgData name="Steve Mutrux" userId="4fa98d0c-dc66-4728-b09b-a88e22e95094" providerId="ADAL" clId="{421BD283-33D8-4C6C-821F-71755E863FA2}" dt="2026-09-15T17:24:02.469" v="111" actId="1076"/>
           <ac:spMkLst>
             <pc:docMk/>
             <pc:sldMk cId="1072592071" sldId="256"/>
             <ac:spMk id="2" creationId="{C4BB3A72-2E59-9C09-7249-7E3E1BB3A04A}"/>
           </ac:spMkLst>
         </pc:spChg>
+        <pc:spChg chg="add mod">
+          <ac:chgData name="Steve Mutrux" userId="4fa98d0c-dc66-4728-b09b-a88e22e95094" providerId="ADAL" clId="{421BD283-33D8-4C6C-821F-71755E863FA2}" dt="2026-09-15T17:22:28.853" v="69" actId="20577"/>
+          <ac:spMkLst>
+            <pc:docMk/>
+            <pc:sldMk cId="1072592071" sldId="256"/>
+            <ac:spMk id="4" creationId="{9545E1D1-BA2D-1F66-1768-113A11E038CF}"/>
+          </ac:spMkLst>
+        </pc:spChg>
+        <pc:spChg chg="add mod">
+          <ac:chgData name="Steve Mutrux" userId="4fa98d0c-dc66-4728-b09b-a88e22e95094" providerId="ADAL" clId="{421BD283-33D8-4C6C-821F-71755E863FA2}" dt="2026-09-15T17:24:15.655" v="135" actId="403"/>
+          <ac:spMkLst>
+            <pc:docMk/>
+            <pc:sldMk cId="1072592071" sldId="256"/>
+            <ac:spMk id="6" creationId="{B8539E16-0F45-D3AC-D91C-F90D2BA57BA2}"/>
+          </ac:spMkLst>
+        </pc:spChg>
       </pc:sldChg>
-      <pc:sldChg chg="add">
-        <pc:chgData name="Steve Mutrux" userId="4fa98d0c-dc66-4728-b09b-a88e22e95094" providerId="ADAL" clId="{421BD283-33D8-4C6C-821F-71755E863FA2}" dt="2026-09-15T16:06:00.933" v="1"/>
+      <pc:sldChg chg="modSp add mod">
+        <pc:chgData name="Steve Mutrux" userId="4fa98d0c-dc66-4728-b09b-a88e22e95094" providerId="ADAL" clId="{421BD283-33D8-4C6C-821F-71755E863FA2}" dt="2026-09-15T17:22:42.549" v="76" actId="20577"/>
         <pc:sldMkLst>
           <pc:docMk/>
           <pc:sldMk cId="2816041415" sldId="257"/>
         </pc:sldMkLst>
+        <pc:spChg chg="mod">
+          <ac:chgData name="Steve Mutrux" userId="4fa98d0c-dc66-4728-b09b-a88e22e95094" providerId="ADAL" clId="{421BD283-33D8-4C6C-821F-71755E863FA2}" dt="2026-09-15T17:22:42.549" v="76" actId="20577"/>
+          <ac:spMkLst>
+            <pc:docMk/>
+            <pc:sldMk cId="2816041415" sldId="257"/>
+            <ac:spMk id="2" creationId="{46678232-D860-76CE-77D5-D9F21C5850EF}"/>
+          </ac:spMkLst>
+        </pc:spChg>
       </pc:sldChg>
-      <pc:sldChg chg="add">
-        <pc:chgData name="Steve Mutrux" userId="4fa98d0c-dc66-4728-b09b-a88e22e95094" providerId="ADAL" clId="{421BD283-33D8-4C6C-821F-71755E863FA2}" dt="2026-09-15T16:06:01.139" v="2"/>
+      <pc:sldChg chg="addSp delSp modSp add mod">
+        <pc:chgData name="Steve Mutrux" userId="4fa98d0c-dc66-4728-b09b-a88e22e95094" providerId="ADAL" clId="{421BD283-33D8-4C6C-821F-71755E863FA2}" dt="2026-09-15T17:36:24.997" v="255" actId="20577"/>
         <pc:sldMkLst>
           <pc:docMk/>
           <pc:sldMk cId="518144185" sldId="258"/>
         </pc:sldMkLst>
+        <pc:spChg chg="mod">
+          <ac:chgData name="Steve Mutrux" userId="4fa98d0c-dc66-4728-b09b-a88e22e95094" providerId="ADAL" clId="{421BD283-33D8-4C6C-821F-71755E863FA2}" dt="2026-09-15T17:36:24.997" v="255" actId="20577"/>
+          <ac:spMkLst>
+            <pc:docMk/>
+            <pc:sldMk cId="518144185" sldId="258"/>
+            <ac:spMk id="2" creationId="{C7943069-6591-7336-398B-719327BAD466}"/>
+          </ac:spMkLst>
+        </pc:spChg>
+        <pc:spChg chg="add del">
+          <ac:chgData name="Steve Mutrux" userId="4fa98d0c-dc66-4728-b09b-a88e22e95094" providerId="ADAL" clId="{421BD283-33D8-4C6C-821F-71755E863FA2}" dt="2026-09-15T17:23:02.164" v="89" actId="22"/>
+          <ac:spMkLst>
+            <pc:docMk/>
+            <pc:sldMk cId="518144185" sldId="258"/>
+            <ac:spMk id="4" creationId="{2BF38305-4E94-805E-6DF4-E584E9A7D528}"/>
+          </ac:spMkLst>
+        </pc:spChg>
+        <pc:spChg chg="add del">
+          <ac:chgData name="Steve Mutrux" userId="4fa98d0c-dc66-4728-b09b-a88e22e95094" providerId="ADAL" clId="{421BD283-33D8-4C6C-821F-71755E863FA2}" dt="2026-09-15T17:23:02.015" v="88" actId="22"/>
+          <ac:spMkLst>
+            <pc:docMk/>
+            <pc:sldMk cId="518144185" sldId="258"/>
+            <ac:spMk id="6" creationId="{C11197FF-9241-4E98-1F23-6A6849A7C448}"/>
+          </ac:spMkLst>
+        </pc:spChg>
       </pc:sldChg>
-      <pc:sldChg chg="add">
-        <pc:chgData name="Steve Mutrux" userId="4fa98d0c-dc66-4728-b09b-a88e22e95094" providerId="ADAL" clId="{421BD283-33D8-4C6C-821F-71755E863FA2}" dt="2026-09-15T16:06:01.305" v="3"/>
+      <pc:sldChg chg="modSp add del mod">
+        <pc:chgData name="Steve Mutrux" userId="4fa98d0c-dc66-4728-b09b-a88e22e95094" providerId="ADAL" clId="{421BD283-33D8-4C6C-821F-71755E863FA2}" dt="2026-09-15T17:33:19.095" v="206" actId="47"/>
         <pc:sldMkLst>
           <pc:docMk/>
           <pc:sldMk cId="2746681985" sldId="259"/>
         </pc:sldMkLst>
+        <pc:spChg chg="mod">
+          <ac:chgData name="Steve Mutrux" userId="4fa98d0c-dc66-4728-b09b-a88e22e95094" providerId="ADAL" clId="{421BD283-33D8-4C6C-821F-71755E863FA2}" dt="2026-09-15T17:24:30.924" v="143" actId="20577"/>
+          <ac:spMkLst>
+            <pc:docMk/>
+            <pc:sldMk cId="2746681985" sldId="259"/>
+            <ac:spMk id="2" creationId="{46FCA733-7FA2-BB2D-AC86-FA58306C8D48}"/>
+          </ac:spMkLst>
+        </pc:spChg>
       </pc:sldChg>
-      <pc:sldChg chg="add">
-        <pc:chgData name="Steve Mutrux" userId="4fa98d0c-dc66-4728-b09b-a88e22e95094" providerId="ADAL" clId="{421BD283-33D8-4C6C-821F-71755E863FA2}" dt="2026-09-15T16:06:01.441" v="4"/>
+      <pc:sldChg chg="modSp add mod">
+        <pc:chgData name="Steve Mutrux" userId="4fa98d0c-dc66-4728-b09b-a88e22e95094" providerId="ADAL" clId="{421BD283-33D8-4C6C-821F-71755E863FA2}" dt="2026-09-15T17:37:27.581" v="270" actId="20577"/>
         <pc:sldMkLst>
           <pc:docMk/>
           <pc:sldMk cId="3444687766" sldId="260"/>
         </pc:sldMkLst>
+        <pc:spChg chg="mod">
+          <ac:chgData name="Steve Mutrux" userId="4fa98d0c-dc66-4728-b09b-a88e22e95094" providerId="ADAL" clId="{421BD283-33D8-4C6C-821F-71755E863FA2}" dt="2026-09-15T17:37:27.581" v="270" actId="20577"/>
+          <ac:spMkLst>
+            <pc:docMk/>
+            <pc:sldMk cId="3444687766" sldId="260"/>
+            <ac:spMk id="2" creationId="{002E2CC7-570D-FDB3-3281-85D5D28B2E70}"/>
+          </ac:spMkLst>
+        </pc:spChg>
       </pc:sldChg>
       <pc:sldChg chg="add">
         <pc:chgData name="Steve Mutrux" userId="4fa98d0c-dc66-4728-b09b-a88e22e95094" providerId="ADAL" clId="{421BD283-33D8-4C6C-821F-71755E863FA2}" dt="2026-09-15T16:06:01.576" v="5"/>
@@ -201,18 +271,130 @@
           <pc:sldMk cId="2229155277" sldId="263"/>
         </pc:sldMkLst>
       </pc:sldChg>
-      <pc:sldChg chg="add">
-        <pc:chgData name="Steve Mutrux" userId="4fa98d0c-dc66-4728-b09b-a88e22e95094" providerId="ADAL" clId="{421BD283-33D8-4C6C-821F-71755E863FA2}" dt="2026-09-15T16:17:24.122" v="8"/>
+      <pc:sldChg chg="addSp modSp add del mod ord">
+        <pc:chgData name="Steve Mutrux" userId="4fa98d0c-dc66-4728-b09b-a88e22e95094" providerId="ADAL" clId="{421BD283-33D8-4C6C-821F-71755E863FA2}" dt="2026-09-15T17:32:59.196" v="205" actId="47"/>
         <pc:sldMkLst>
           <pc:docMk/>
           <pc:sldMk cId="3784798508" sldId="264"/>
         </pc:sldMkLst>
+        <pc:graphicFrameChg chg="add mod modGraphic">
+          <ac:chgData name="Steve Mutrux" userId="4fa98d0c-dc66-4728-b09b-a88e22e95094" providerId="ADAL" clId="{421BD283-33D8-4C6C-821F-71755E863FA2}" dt="2026-09-15T17:26:50.371" v="149" actId="21"/>
+          <ac:graphicFrameMkLst>
+            <pc:docMk/>
+            <pc:sldMk cId="3784798508" sldId="264"/>
+            <ac:graphicFrameMk id="3" creationId="{FA98907C-FF05-F27C-6580-F7DFB5B2FA79}"/>
+          </ac:graphicFrameMkLst>
+        </pc:graphicFrameChg>
+      </pc:sldChg>
+      <pc:sldChg chg="modSp add mod">
+        <pc:chgData name="Steve Mutrux" userId="4fa98d0c-dc66-4728-b09b-a88e22e95094" providerId="ADAL" clId="{421BD283-33D8-4C6C-821F-71755E863FA2}" dt="2026-09-15T17:23:10.459" v="97" actId="20577"/>
+        <pc:sldMkLst>
+          <pc:docMk/>
+          <pc:sldMk cId="2553109476" sldId="265"/>
+        </pc:sldMkLst>
+        <pc:spChg chg="mod">
+          <ac:chgData name="Steve Mutrux" userId="4fa98d0c-dc66-4728-b09b-a88e22e95094" providerId="ADAL" clId="{421BD283-33D8-4C6C-821F-71755E863FA2}" dt="2026-09-15T17:23:10.459" v="97" actId="20577"/>
+          <ac:spMkLst>
+            <pc:docMk/>
+            <pc:sldMk cId="2553109476" sldId="265"/>
+            <ac:spMk id="2" creationId="{9019CA75-AE86-96E8-F266-96497A23FD87}"/>
+          </ac:spMkLst>
+        </pc:spChg>
       </pc:sldChg>
       <pc:sldChg chg="add del">
         <pc:chgData name="Steve Mutrux" userId="4fa98d0c-dc66-4728-b09b-a88e22e95094" providerId="ADAL" clId="{421BD283-33D8-4C6C-821F-71755E863FA2}" dt="2026-09-15T16:17:28.694" v="10"/>
         <pc:sldMkLst>
           <pc:docMk/>
           <pc:sldMk cId="3540047338" sldId="265"/>
+        </pc:sldMkLst>
+      </pc:sldChg>
+      <pc:sldChg chg="modSp add mod">
+        <pc:chgData name="Steve Mutrux" userId="4fa98d0c-dc66-4728-b09b-a88e22e95094" providerId="ADAL" clId="{421BD283-33D8-4C6C-821F-71755E863FA2}" dt="2026-09-15T17:23:15.745" v="102" actId="20577"/>
+        <pc:sldMkLst>
+          <pc:docMk/>
+          <pc:sldMk cId="353601395" sldId="266"/>
+        </pc:sldMkLst>
+        <pc:spChg chg="mod">
+          <ac:chgData name="Steve Mutrux" userId="4fa98d0c-dc66-4728-b09b-a88e22e95094" providerId="ADAL" clId="{421BD283-33D8-4C6C-821F-71755E863FA2}" dt="2026-09-15T17:23:15.745" v="102" actId="20577"/>
+          <ac:spMkLst>
+            <pc:docMk/>
+            <pc:sldMk cId="353601395" sldId="266"/>
+            <ac:spMk id="2" creationId="{F8626D69-4F4F-76B2-E4FB-EA5B5DF367A4}"/>
+          </ac:spMkLst>
+        </pc:spChg>
+      </pc:sldChg>
+      <pc:sldChg chg="modSp add mod">
+        <pc:chgData name="Steve Mutrux" userId="4fa98d0c-dc66-4728-b09b-a88e22e95094" providerId="ADAL" clId="{421BD283-33D8-4C6C-821F-71755E863FA2}" dt="2026-09-15T17:23:21.176" v="106" actId="20577"/>
+        <pc:sldMkLst>
+          <pc:docMk/>
+          <pc:sldMk cId="557364214" sldId="267"/>
+        </pc:sldMkLst>
+        <pc:spChg chg="mod">
+          <ac:chgData name="Steve Mutrux" userId="4fa98d0c-dc66-4728-b09b-a88e22e95094" providerId="ADAL" clId="{421BD283-33D8-4C6C-821F-71755E863FA2}" dt="2026-09-15T17:23:21.176" v="106" actId="20577"/>
+          <ac:spMkLst>
+            <pc:docMk/>
+            <pc:sldMk cId="557364214" sldId="267"/>
+            <ac:spMk id="2" creationId="{394BDA26-D74C-5390-5839-09EEB9016D38}"/>
+          </ac:spMkLst>
+        </pc:spChg>
+      </pc:sldChg>
+      <pc:sldChg chg="modSp add mod">
+        <pc:chgData name="Steve Mutrux" userId="4fa98d0c-dc66-4728-b09b-a88e22e95094" providerId="ADAL" clId="{421BD283-33D8-4C6C-821F-71755E863FA2}" dt="2026-09-15T17:23:24.232" v="110" actId="20577"/>
+        <pc:sldMkLst>
+          <pc:docMk/>
+          <pc:sldMk cId="3893094920" sldId="268"/>
+        </pc:sldMkLst>
+        <pc:spChg chg="mod">
+          <ac:chgData name="Steve Mutrux" userId="4fa98d0c-dc66-4728-b09b-a88e22e95094" providerId="ADAL" clId="{421BD283-33D8-4C6C-821F-71755E863FA2}" dt="2026-09-15T17:23:24.232" v="110" actId="20577"/>
+          <ac:spMkLst>
+            <pc:docMk/>
+            <pc:sldMk cId="3893094920" sldId="268"/>
+            <ac:spMk id="2" creationId="{5745D002-DA86-69FC-73CA-295EFFA512FA}"/>
+          </ac:spMkLst>
+        </pc:spChg>
+      </pc:sldChg>
+      <pc:sldChg chg="modSp add mod">
+        <pc:chgData name="Steve Mutrux" userId="4fa98d0c-dc66-4728-b09b-a88e22e95094" providerId="ADAL" clId="{421BD283-33D8-4C6C-821F-71755E863FA2}" dt="2026-09-15T17:27:49.740" v="195" actId="20577"/>
+        <pc:sldMkLst>
+          <pc:docMk/>
+          <pc:sldMk cId="1755182162" sldId="269"/>
+        </pc:sldMkLst>
+        <pc:spChg chg="mod">
+          <ac:chgData name="Steve Mutrux" userId="4fa98d0c-dc66-4728-b09b-a88e22e95094" providerId="ADAL" clId="{421BD283-33D8-4C6C-821F-71755E863FA2}" dt="2026-09-15T17:27:49.740" v="195" actId="20577"/>
+          <ac:spMkLst>
+            <pc:docMk/>
+            <pc:sldMk cId="1755182162" sldId="269"/>
+            <ac:spMk id="2" creationId="{98899C46-9E05-9DC8-C426-2C65F1A4E528}"/>
+          </ac:spMkLst>
+        </pc:spChg>
+      </pc:sldChg>
+      <pc:sldChg chg="add ord">
+        <pc:chgData name="Steve Mutrux" userId="4fa98d0c-dc66-4728-b09b-a88e22e95094" providerId="ADAL" clId="{421BD283-33D8-4C6C-821F-71755E863FA2}" dt="2026-09-15T17:36:45.854" v="257"/>
+        <pc:sldMkLst>
+          <pc:docMk/>
+          <pc:sldMk cId="2049535269" sldId="270"/>
+        </pc:sldMkLst>
+      </pc:sldChg>
+      <pc:sldChg chg="modSp add mod">
+        <pc:chgData name="Steve Mutrux" userId="4fa98d0c-dc66-4728-b09b-a88e22e95094" providerId="ADAL" clId="{421BD283-33D8-4C6C-821F-71755E863FA2}" dt="2026-09-15T17:35:47.186" v="210" actId="20577"/>
+        <pc:sldMkLst>
+          <pc:docMk/>
+          <pc:sldMk cId="1557603729" sldId="271"/>
+        </pc:sldMkLst>
+        <pc:spChg chg="mod">
+          <ac:chgData name="Steve Mutrux" userId="4fa98d0c-dc66-4728-b09b-a88e22e95094" providerId="ADAL" clId="{421BD283-33D8-4C6C-821F-71755E863FA2}" dt="2026-09-15T17:35:47.186" v="210" actId="20577"/>
+          <ac:spMkLst>
+            <pc:docMk/>
+            <pc:sldMk cId="1557603729" sldId="271"/>
+            <ac:spMk id="2" creationId="{5B048899-C536-5880-E201-0706C75C8AF2}"/>
+          </ac:spMkLst>
+        </pc:spChg>
+      </pc:sldChg>
+      <pc:sldChg chg="add">
+        <pc:chgData name="Steve Mutrux" userId="4fa98d0c-dc66-4728-b09b-a88e22e95094" providerId="ADAL" clId="{421BD283-33D8-4C6C-821F-71755E863FA2}" dt="2026-09-15T17:37:22.720" v="258"/>
+        <pc:sldMkLst>
+          <pc:docMk/>
+          <pc:sldMk cId="1194673410" sldId="272"/>
         </pc:sldMkLst>
       </pc:sldChg>
     </pc:docChg>
@@ -3469,8 +3651,8 @@
         </p:nvSpPr>
         <p:spPr>
           <a:xfrm>
-            <a:off x="4506686" y="2759529"/>
-            <a:ext cx="606256" cy="369332"/>
+            <a:off x="4694464" y="1240972"/>
+            <a:ext cx="2551789" cy="369332"/>
           </a:xfrm>
           <a:prstGeom prst="rect">
             <a:avLst/>
@@ -3485,7 +3667,77 @@
           <a:p>
             <a:r>
               <a:rPr lang="en-CA" dirty="0"/>
-              <a:t>Title</a:t>
+              <a:t>Crossfire NCR Overhaul</a:t>
+            </a:r>
+          </a:p>
+        </p:txBody>
+      </p:sp>
+      <p:sp>
+        <p:nvSpPr>
+          <p:cNvPr id="4" name="TextBox 3">
+            <a:extLst>
+              <a:ext uri="{FF2B5EF4-FFF2-40B4-BE49-F238E27FC236}">
+                <a16:creationId xmlns:a16="http://schemas.microsoft.com/office/drawing/2014/main" id="{9545E1D1-BA2D-1F66-1768-113A11E038CF}"/>
+              </a:ext>
+            </a:extLst>
+          </p:cNvPr>
+          <p:cNvSpPr txBox="1"/>
+          <p:nvPr/>
+        </p:nvSpPr>
+        <p:spPr>
+          <a:xfrm>
+            <a:off x="4585607" y="5344886"/>
+            <a:ext cx="3184846" cy="369332"/>
+          </a:xfrm>
+          <a:prstGeom prst="rect">
+            <a:avLst/>
+          </a:prstGeom>
+          <a:noFill/>
+        </p:spPr>
+        <p:txBody>
+          <a:bodyPr wrap="none" rtlCol="0">
+            <a:spAutoFit/>
+          </a:bodyPr>
+          <a:lstStyle/>
+          <a:p>
+            <a:r>
+              <a:rPr lang="en-CA" dirty="0"/>
+              <a:t>Powered by Adestria Solutions</a:t>
+            </a:r>
+          </a:p>
+        </p:txBody>
+      </p:sp>
+      <p:sp>
+        <p:nvSpPr>
+          <p:cNvPr id="6" name="TextBox 5">
+            <a:extLst>
+              <a:ext uri="{FF2B5EF4-FFF2-40B4-BE49-F238E27FC236}">
+                <a16:creationId xmlns:a16="http://schemas.microsoft.com/office/drawing/2014/main" id="{B8539E16-0F45-D3AC-D91C-F90D2BA57BA2}"/>
+              </a:ext>
+            </a:extLst>
+          </p:cNvPr>
+          <p:cNvSpPr txBox="1"/>
+          <p:nvPr/>
+        </p:nvSpPr>
+        <p:spPr>
+          <a:xfrm>
+            <a:off x="4694463" y="3244334"/>
+            <a:ext cx="4104713" cy="707886"/>
+          </a:xfrm>
+          <a:prstGeom prst="rect">
+            <a:avLst/>
+          </a:prstGeom>
+          <a:noFill/>
+        </p:spPr>
+        <p:txBody>
+          <a:bodyPr wrap="none" rtlCol="0">
+            <a:spAutoFit/>
+          </a:bodyPr>
+          <a:lstStyle/>
+          <a:p>
+            <a:r>
+              <a:rPr lang="en-CA" sz="4000" dirty="0"/>
+              <a:t>Name of software</a:t>
             </a:r>
           </a:p>
         </p:txBody>
@@ -3494,6 +3746,432 @@
     <p:extLst>
       <p:ext uri="{BB962C8B-B14F-4D97-AF65-F5344CB8AC3E}">
         <p14:creationId xmlns:p14="http://schemas.microsoft.com/office/powerpoint/2010/main" val="1072592071"/>
+      </p:ext>
+    </p:extLst>
+  </p:cSld>
+  <p:clrMapOvr>
+    <a:masterClrMapping/>
+  </p:clrMapOvr>
+</p:sld>
+</file>
+
+<file path=ppt/slides/slide10.xml><?xml version="1.0" encoding="utf-8"?>
+<p:sld xmlns:a="http://schemas.openxmlformats.org/drawingml/2006/main" xmlns:r="http://schemas.openxmlformats.org/officeDocument/2006/relationships" xmlns:p="http://schemas.openxmlformats.org/presentationml/2006/main">
+  <p:cSld>
+    <p:spTree>
+      <p:nvGrpSpPr>
+        <p:cNvPr id="1" name="">
+          <a:extLst>
+            <a:ext uri="{FF2B5EF4-FFF2-40B4-BE49-F238E27FC236}">
+              <a16:creationId xmlns:a16="http://schemas.microsoft.com/office/drawing/2014/main" id="{61ECC437-54A6-6B8E-6E0E-B726DD8CE5C2}"/>
+            </a:ext>
+          </a:extLst>
+        </p:cNvPr>
+        <p:cNvGrpSpPr/>
+        <p:nvPr/>
+      </p:nvGrpSpPr>
+      <p:grpSpPr>
+        <a:xfrm>
+          <a:off x="0" y="0"/>
+          <a:ext cx="0" cy="0"/>
+          <a:chOff x="0" y="0"/>
+          <a:chExt cx="0" cy="0"/>
+        </a:xfrm>
+      </p:grpSpPr>
+      <p:sp>
+        <p:nvSpPr>
+          <p:cNvPr id="2" name="TextBox 1">
+            <a:extLst>
+              <a:ext uri="{FF2B5EF4-FFF2-40B4-BE49-F238E27FC236}">
+                <a16:creationId xmlns:a16="http://schemas.microsoft.com/office/drawing/2014/main" id="{939024A9-D0D1-B303-54D7-9B51CE76A009}"/>
+              </a:ext>
+            </a:extLst>
+          </p:cNvPr>
+          <p:cNvSpPr txBox="1"/>
+          <p:nvPr/>
+        </p:nvSpPr>
+        <p:spPr>
+          <a:xfrm>
+            <a:off x="4506686" y="2759529"/>
+            <a:ext cx="1497974" cy="369332"/>
+          </a:xfrm>
+          <a:prstGeom prst="rect">
+            <a:avLst/>
+          </a:prstGeom>
+          <a:noFill/>
+        </p:spPr>
+        <p:txBody>
+          <a:bodyPr wrap="none" rtlCol="0">
+            <a:spAutoFit/>
+          </a:bodyPr>
+          <a:lstStyle/>
+          <a:p>
+            <a:r>
+              <a:rPr lang="en-CA" dirty="0"/>
+              <a:t>Competitor 1</a:t>
+            </a:r>
+          </a:p>
+        </p:txBody>
+      </p:sp>
+    </p:spTree>
+    <p:extLst>
+      <p:ext uri="{BB962C8B-B14F-4D97-AF65-F5344CB8AC3E}">
+        <p14:creationId xmlns:p14="http://schemas.microsoft.com/office/powerpoint/2010/main" val="1194673410"/>
+      </p:ext>
+    </p:extLst>
+  </p:cSld>
+  <p:clrMapOvr>
+    <a:masterClrMapping/>
+  </p:clrMapOvr>
+</p:sld>
+</file>
+
+<file path=ppt/slides/slide11.xml><?xml version="1.0" encoding="utf-8"?>
+<p:sld xmlns:a="http://schemas.openxmlformats.org/drawingml/2006/main" xmlns:r="http://schemas.openxmlformats.org/officeDocument/2006/relationships" xmlns:p="http://schemas.openxmlformats.org/presentationml/2006/main">
+  <p:cSld>
+    <p:spTree>
+      <p:nvGrpSpPr>
+        <p:cNvPr id="1" name="">
+          <a:extLst>
+            <a:ext uri="{FF2B5EF4-FFF2-40B4-BE49-F238E27FC236}">
+              <a16:creationId xmlns:a16="http://schemas.microsoft.com/office/drawing/2014/main" id="{FCD78032-0C9A-7338-75C4-3A981F48951F}"/>
+            </a:ext>
+          </a:extLst>
+        </p:cNvPr>
+        <p:cNvGrpSpPr/>
+        <p:nvPr/>
+      </p:nvGrpSpPr>
+      <p:grpSpPr>
+        <a:xfrm>
+          <a:off x="0" y="0"/>
+          <a:ext cx="0" cy="0"/>
+          <a:chOff x="0" y="0"/>
+          <a:chExt cx="0" cy="0"/>
+        </a:xfrm>
+      </p:grpSpPr>
+      <p:sp>
+        <p:nvSpPr>
+          <p:cNvPr id="2" name="TextBox 1">
+            <a:extLst>
+              <a:ext uri="{FF2B5EF4-FFF2-40B4-BE49-F238E27FC236}">
+                <a16:creationId xmlns:a16="http://schemas.microsoft.com/office/drawing/2014/main" id="{EB45249E-3CD1-3B49-F9CF-AF33CD9279A1}"/>
+              </a:ext>
+            </a:extLst>
+          </p:cNvPr>
+          <p:cNvSpPr txBox="1"/>
+          <p:nvPr/>
+        </p:nvSpPr>
+        <p:spPr>
+          <a:xfrm>
+            <a:off x="4506686" y="2759529"/>
+            <a:ext cx="1497974" cy="369332"/>
+          </a:xfrm>
+          <a:prstGeom prst="rect">
+            <a:avLst/>
+          </a:prstGeom>
+          <a:noFill/>
+        </p:spPr>
+        <p:txBody>
+          <a:bodyPr wrap="none" rtlCol="0">
+            <a:spAutoFit/>
+          </a:bodyPr>
+          <a:lstStyle/>
+          <a:p>
+            <a:r>
+              <a:rPr lang="en-CA" dirty="0"/>
+              <a:t>Competitor 2</a:t>
+            </a:r>
+          </a:p>
+        </p:txBody>
+      </p:sp>
+    </p:spTree>
+    <p:extLst>
+      <p:ext uri="{BB962C8B-B14F-4D97-AF65-F5344CB8AC3E}">
+        <p14:creationId xmlns:p14="http://schemas.microsoft.com/office/powerpoint/2010/main" val="4190029259"/>
+      </p:ext>
+    </p:extLst>
+  </p:cSld>
+  <p:clrMapOvr>
+    <a:masterClrMapping/>
+  </p:clrMapOvr>
+</p:sld>
+</file>
+
+<file path=ppt/slides/slide12.xml><?xml version="1.0" encoding="utf-8"?>
+<p:sld xmlns:a="http://schemas.openxmlformats.org/drawingml/2006/main" xmlns:r="http://schemas.openxmlformats.org/officeDocument/2006/relationships" xmlns:p="http://schemas.openxmlformats.org/presentationml/2006/main">
+  <p:cSld>
+    <p:spTree>
+      <p:nvGrpSpPr>
+        <p:cNvPr id="1" name="">
+          <a:extLst>
+            <a:ext uri="{FF2B5EF4-FFF2-40B4-BE49-F238E27FC236}">
+              <a16:creationId xmlns:a16="http://schemas.microsoft.com/office/drawing/2014/main" id="{DA253801-181C-62EA-D428-47B4C6AEBA5C}"/>
+            </a:ext>
+          </a:extLst>
+        </p:cNvPr>
+        <p:cNvGrpSpPr/>
+        <p:nvPr/>
+      </p:nvGrpSpPr>
+      <p:grpSpPr>
+        <a:xfrm>
+          <a:off x="0" y="0"/>
+          <a:ext cx="0" cy="0"/>
+          <a:chOff x="0" y="0"/>
+          <a:chExt cx="0" cy="0"/>
+        </a:xfrm>
+      </p:grpSpPr>
+      <p:sp>
+        <p:nvSpPr>
+          <p:cNvPr id="2" name="TextBox 1">
+            <a:extLst>
+              <a:ext uri="{FF2B5EF4-FFF2-40B4-BE49-F238E27FC236}">
+                <a16:creationId xmlns:a16="http://schemas.microsoft.com/office/drawing/2014/main" id="{FB7C1DAA-388D-15E8-746C-4763F989A8BD}"/>
+              </a:ext>
+            </a:extLst>
+          </p:cNvPr>
+          <p:cNvSpPr txBox="1"/>
+          <p:nvPr/>
+        </p:nvSpPr>
+        <p:spPr>
+          <a:xfrm>
+            <a:off x="4506686" y="2759529"/>
+            <a:ext cx="1414170" cy="369332"/>
+          </a:xfrm>
+          <a:prstGeom prst="rect">
+            <a:avLst/>
+          </a:prstGeom>
+          <a:noFill/>
+        </p:spPr>
+        <p:txBody>
+          <a:bodyPr wrap="none" rtlCol="0">
+            <a:spAutoFit/>
+          </a:bodyPr>
+          <a:lstStyle/>
+          <a:p>
+            <a:r>
+              <a:rPr lang="en-CA" dirty="0"/>
+              <a:t>Our solution</a:t>
+            </a:r>
+          </a:p>
+        </p:txBody>
+      </p:sp>
+    </p:spTree>
+    <p:extLst>
+      <p:ext uri="{BB962C8B-B14F-4D97-AF65-F5344CB8AC3E}">
+        <p14:creationId xmlns:p14="http://schemas.microsoft.com/office/powerpoint/2010/main" val="1179066660"/>
+      </p:ext>
+    </p:extLst>
+  </p:cSld>
+  <p:clrMapOvr>
+    <a:masterClrMapping/>
+  </p:clrMapOvr>
+</p:sld>
+</file>
+
+<file path=ppt/slides/slide13.xml><?xml version="1.0" encoding="utf-8"?>
+<p:sld xmlns:a="http://schemas.openxmlformats.org/drawingml/2006/main" xmlns:r="http://schemas.openxmlformats.org/officeDocument/2006/relationships" xmlns:p="http://schemas.openxmlformats.org/presentationml/2006/main">
+  <p:cSld>
+    <p:spTree>
+      <p:nvGrpSpPr>
+        <p:cNvPr id="1" name="">
+          <a:extLst>
+            <a:ext uri="{FF2B5EF4-FFF2-40B4-BE49-F238E27FC236}">
+              <a16:creationId xmlns:a16="http://schemas.microsoft.com/office/drawing/2014/main" id="{C43AE2C6-1245-E0DC-4C07-4F3FF637473E}"/>
+            </a:ext>
+          </a:extLst>
+        </p:cNvPr>
+        <p:cNvGrpSpPr/>
+        <p:nvPr/>
+      </p:nvGrpSpPr>
+      <p:grpSpPr>
+        <a:xfrm>
+          <a:off x="0" y="0"/>
+          <a:ext cx="0" cy="0"/>
+          <a:chOff x="0" y="0"/>
+          <a:chExt cx="0" cy="0"/>
+        </a:xfrm>
+      </p:grpSpPr>
+      <p:sp>
+        <p:nvSpPr>
+          <p:cNvPr id="2" name="TextBox 1">
+            <a:extLst>
+              <a:ext uri="{FF2B5EF4-FFF2-40B4-BE49-F238E27FC236}">
+                <a16:creationId xmlns:a16="http://schemas.microsoft.com/office/drawing/2014/main" id="{98899C46-9E05-9DC8-C426-2C65F1A4E528}"/>
+              </a:ext>
+            </a:extLst>
+          </p:cNvPr>
+          <p:cNvSpPr txBox="1"/>
+          <p:nvPr/>
+        </p:nvSpPr>
+        <p:spPr>
+          <a:xfrm>
+            <a:off x="4506686" y="2759529"/>
+            <a:ext cx="4857292" cy="369332"/>
+          </a:xfrm>
+          <a:prstGeom prst="rect">
+            <a:avLst/>
+          </a:prstGeom>
+          <a:noFill/>
+        </p:spPr>
+        <p:txBody>
+          <a:bodyPr wrap="none" rtlCol="0">
+            <a:spAutoFit/>
+          </a:bodyPr>
+          <a:lstStyle/>
+          <a:p>
+            <a:r>
+              <a:rPr lang="en-CA" dirty="0"/>
+              <a:t>Comparison table between us and competitors</a:t>
+            </a:r>
+          </a:p>
+        </p:txBody>
+      </p:sp>
+    </p:spTree>
+    <p:extLst>
+      <p:ext uri="{BB962C8B-B14F-4D97-AF65-F5344CB8AC3E}">
+        <p14:creationId xmlns:p14="http://schemas.microsoft.com/office/powerpoint/2010/main" val="1755182162"/>
+      </p:ext>
+    </p:extLst>
+  </p:cSld>
+  <p:clrMapOvr>
+    <a:masterClrMapping/>
+  </p:clrMapOvr>
+</p:sld>
+</file>
+
+<file path=ppt/slides/slide14.xml><?xml version="1.0" encoding="utf-8"?>
+<p:sld xmlns:a="http://schemas.openxmlformats.org/drawingml/2006/main" xmlns:r="http://schemas.openxmlformats.org/officeDocument/2006/relationships" xmlns:p="http://schemas.openxmlformats.org/presentationml/2006/main">
+  <p:cSld>
+    <p:spTree>
+      <p:nvGrpSpPr>
+        <p:cNvPr id="1" name="">
+          <a:extLst>
+            <a:ext uri="{FF2B5EF4-FFF2-40B4-BE49-F238E27FC236}">
+              <a16:creationId xmlns:a16="http://schemas.microsoft.com/office/drawing/2014/main" id="{BF56D546-8404-1906-1836-C08924CB8B1E}"/>
+            </a:ext>
+          </a:extLst>
+        </p:cNvPr>
+        <p:cNvGrpSpPr/>
+        <p:nvPr/>
+      </p:nvGrpSpPr>
+      <p:grpSpPr>
+        <a:xfrm>
+          <a:off x="0" y="0"/>
+          <a:ext cx="0" cy="0"/>
+          <a:chOff x="0" y="0"/>
+          <a:chExt cx="0" cy="0"/>
+        </a:xfrm>
+      </p:grpSpPr>
+      <p:sp>
+        <p:nvSpPr>
+          <p:cNvPr id="2" name="TextBox 1">
+            <a:extLst>
+              <a:ext uri="{FF2B5EF4-FFF2-40B4-BE49-F238E27FC236}">
+                <a16:creationId xmlns:a16="http://schemas.microsoft.com/office/drawing/2014/main" id="{9E689793-48BC-E89A-D94F-DE97837489B8}"/>
+              </a:ext>
+            </a:extLst>
+          </p:cNvPr>
+          <p:cNvSpPr txBox="1"/>
+          <p:nvPr/>
+        </p:nvSpPr>
+        <p:spPr>
+          <a:xfrm>
+            <a:off x="4506686" y="2759529"/>
+            <a:ext cx="638316" cy="369332"/>
+          </a:xfrm>
+          <a:prstGeom prst="rect">
+            <a:avLst/>
+          </a:prstGeom>
+          <a:noFill/>
+        </p:spPr>
+        <p:txBody>
+          <a:bodyPr wrap="none" rtlCol="0">
+            <a:spAutoFit/>
+          </a:bodyPr>
+          <a:lstStyle/>
+          <a:p>
+            <a:r>
+              <a:rPr lang="en-CA" dirty="0"/>
+              <a:t>Q&amp;A</a:t>
+            </a:r>
+          </a:p>
+        </p:txBody>
+      </p:sp>
+    </p:spTree>
+    <p:extLst>
+      <p:ext uri="{BB962C8B-B14F-4D97-AF65-F5344CB8AC3E}">
+        <p14:creationId xmlns:p14="http://schemas.microsoft.com/office/powerpoint/2010/main" val="2229155277"/>
+      </p:ext>
+    </p:extLst>
+  </p:cSld>
+  <p:clrMapOvr>
+    <a:masterClrMapping/>
+  </p:clrMapOvr>
+</p:sld>
+</file>
+
+<file path=ppt/slides/slide15.xml><?xml version="1.0" encoding="utf-8"?>
+<p:sld xmlns:a="http://schemas.openxmlformats.org/drawingml/2006/main" xmlns:r="http://schemas.openxmlformats.org/officeDocument/2006/relationships" xmlns:p="http://schemas.openxmlformats.org/presentationml/2006/main">
+  <p:cSld>
+    <p:spTree>
+      <p:nvGrpSpPr>
+        <p:cNvPr id="1" name="">
+          <a:extLst>
+            <a:ext uri="{FF2B5EF4-FFF2-40B4-BE49-F238E27FC236}">
+              <a16:creationId xmlns:a16="http://schemas.microsoft.com/office/drawing/2014/main" id="{D906F22D-BE40-925B-D0B4-154AD0607E50}"/>
+            </a:ext>
+          </a:extLst>
+        </p:cNvPr>
+        <p:cNvGrpSpPr/>
+        <p:nvPr/>
+      </p:nvGrpSpPr>
+      <p:grpSpPr>
+        <a:xfrm>
+          <a:off x="0" y="0"/>
+          <a:ext cx="0" cy="0"/>
+          <a:chOff x="0" y="0"/>
+          <a:chExt cx="0" cy="0"/>
+        </a:xfrm>
+      </p:grpSpPr>
+      <p:sp>
+        <p:nvSpPr>
+          <p:cNvPr id="2" name="TextBox 1">
+            <a:extLst>
+              <a:ext uri="{FF2B5EF4-FFF2-40B4-BE49-F238E27FC236}">
+                <a16:creationId xmlns:a16="http://schemas.microsoft.com/office/drawing/2014/main" id="{5B048899-C536-5880-E201-0706C75C8AF2}"/>
+              </a:ext>
+            </a:extLst>
+          </p:cNvPr>
+          <p:cNvSpPr txBox="1"/>
+          <p:nvPr/>
+        </p:nvSpPr>
+        <p:spPr>
+          <a:xfrm>
+            <a:off x="4506686" y="2759529"/>
+            <a:ext cx="569387" cy="369332"/>
+          </a:xfrm>
+          <a:prstGeom prst="rect">
+            <a:avLst/>
+          </a:prstGeom>
+          <a:noFill/>
+        </p:spPr>
+        <p:txBody>
+          <a:bodyPr wrap="none" rtlCol="0">
+            <a:spAutoFit/>
+          </a:bodyPr>
+          <a:lstStyle/>
+          <a:p>
+            <a:r>
+              <a:rPr lang="en-CA" dirty="0"/>
+              <a:t>End</a:t>
+            </a:r>
+          </a:p>
+        </p:txBody>
+      </p:sp>
+    </p:spTree>
+    <p:extLst>
+      <p:ext uri="{BB962C8B-B14F-4D97-AF65-F5344CB8AC3E}">
+        <p14:creationId xmlns:p14="http://schemas.microsoft.com/office/powerpoint/2010/main" val="1557603729"/>
       </p:ext>
     </p:extLst>
   </p:cSld>
@@ -3541,7 +4219,7 @@
         <p:spPr>
           <a:xfrm>
             <a:off x="4506686" y="2759529"/>
-            <a:ext cx="918841" cy="369332"/>
+            <a:ext cx="1542410" cy="369332"/>
           </a:xfrm>
           <a:prstGeom prst="rect">
             <a:avLst/>
@@ -3556,7 +4234,7 @@
           <a:p>
             <a:r>
               <a:rPr lang="en-CA" dirty="0"/>
-              <a:t>Outline</a:t>
+              <a:t>Outline of ppt</a:t>
             </a:r>
           </a:p>
         </p:txBody>
@@ -3612,7 +4290,7 @@
         <p:spPr>
           <a:xfrm>
             <a:off x="4506686" y="2759529"/>
-            <a:ext cx="2325060" cy="369332"/>
+            <a:ext cx="4246740" cy="369332"/>
           </a:xfrm>
           <a:prstGeom prst="rect">
             <a:avLst/>
@@ -3627,7 +4305,7 @@
           <a:p>
             <a:r>
               <a:rPr lang="en-CA" dirty="0"/>
-              <a:t>Personal introduction</a:t>
+              <a:t>Adestria (mission and vision statements)</a:t>
             </a:r>
           </a:p>
         </p:txBody>
@@ -3653,7 +4331,7 @@
         <p:cNvPr id="1" name="">
           <a:extLst>
             <a:ext uri="{FF2B5EF4-FFF2-40B4-BE49-F238E27FC236}">
-              <a16:creationId xmlns:a16="http://schemas.microsoft.com/office/drawing/2014/main" id="{2E1AEAF2-400D-BA16-8BAC-F23629C2DB95}"/>
+              <a16:creationId xmlns:a16="http://schemas.microsoft.com/office/drawing/2014/main" id="{C122A0C9-65FB-0BB9-F809-2285D9EF1456}"/>
             </a:ext>
           </a:extLst>
         </p:cNvPr>
@@ -3673,7 +4351,7 @@
           <p:cNvPr id="2" name="TextBox 1">
             <a:extLst>
               <a:ext uri="{FF2B5EF4-FFF2-40B4-BE49-F238E27FC236}">
-                <a16:creationId xmlns:a16="http://schemas.microsoft.com/office/drawing/2014/main" id="{6DFAE124-B322-9E43-E7BF-0BE56F574010}"/>
+                <a16:creationId xmlns:a16="http://schemas.microsoft.com/office/drawing/2014/main" id="{9019CA75-AE86-96E8-F266-96497A23FD87}"/>
               </a:ext>
             </a:extLst>
           </p:cNvPr>
@@ -3683,7 +4361,7 @@
         <p:spPr>
           <a:xfrm>
             <a:off x="4506686" y="2759529"/>
-            <a:ext cx="724878" cy="369332"/>
+            <a:ext cx="619978" cy="369332"/>
           </a:xfrm>
           <a:prstGeom prst="rect">
             <a:avLst/>
@@ -3697,17 +4375,16 @@
           <a:lstStyle/>
           <a:p>
             <a:r>
-              <a:rPr lang="en-CA"/>
-              <a:t>WBS:</a:t>
-            </a:r>
-            <a:endParaRPr lang="en-CA" dirty="0"/>
+              <a:rPr lang="en-CA" dirty="0"/>
+              <a:t>Jack</a:t>
+            </a:r>
           </a:p>
         </p:txBody>
       </p:sp>
     </p:spTree>
     <p:extLst>
       <p:ext uri="{BB962C8B-B14F-4D97-AF65-F5344CB8AC3E}">
-        <p14:creationId xmlns:p14="http://schemas.microsoft.com/office/powerpoint/2010/main" val="3784798508"/>
+        <p14:creationId xmlns:p14="http://schemas.microsoft.com/office/powerpoint/2010/main" val="2553109476"/>
       </p:ext>
     </p:extLst>
   </p:cSld>
@@ -3725,7 +4402,7 @@
         <p:cNvPr id="1" name="">
           <a:extLst>
             <a:ext uri="{FF2B5EF4-FFF2-40B4-BE49-F238E27FC236}">
-              <a16:creationId xmlns:a16="http://schemas.microsoft.com/office/drawing/2014/main" id="{830E9771-B342-44C8-683F-A2E3AD852D71}"/>
+              <a16:creationId xmlns:a16="http://schemas.microsoft.com/office/drawing/2014/main" id="{43FE8BA0-BBF8-10C0-6994-E8DD39E92BAF}"/>
             </a:ext>
           </a:extLst>
         </p:cNvPr>
@@ -3745,7 +4422,7 @@
           <p:cNvPr id="2" name="TextBox 1">
             <a:extLst>
               <a:ext uri="{FF2B5EF4-FFF2-40B4-BE49-F238E27FC236}">
-                <a16:creationId xmlns:a16="http://schemas.microsoft.com/office/drawing/2014/main" id="{46FCA733-7FA2-BB2D-AC86-FA58306C8D48}"/>
+                <a16:creationId xmlns:a16="http://schemas.microsoft.com/office/drawing/2014/main" id="{F8626D69-4F4F-76B2-E4FB-EA5B5DF367A4}"/>
               </a:ext>
             </a:extLst>
           </p:cNvPr>
@@ -3755,7 +4432,7 @@
         <p:spPr>
           <a:xfrm>
             <a:off x="4506686" y="2759529"/>
-            <a:ext cx="1548244" cy="369332"/>
+            <a:ext cx="724878" cy="369332"/>
           </a:xfrm>
           <a:prstGeom prst="rect">
             <a:avLst/>
@@ -3770,7 +4447,7 @@
           <a:p>
             <a:r>
               <a:rPr lang="en-CA" dirty="0"/>
-              <a:t>Project needs</a:t>
+              <a:t>Kayla</a:t>
             </a:r>
           </a:p>
         </p:txBody>
@@ -3778,7 +4455,7 @@
     </p:spTree>
     <p:extLst>
       <p:ext uri="{BB962C8B-B14F-4D97-AF65-F5344CB8AC3E}">
-        <p14:creationId xmlns:p14="http://schemas.microsoft.com/office/powerpoint/2010/main" val="2746681985"/>
+        <p14:creationId xmlns:p14="http://schemas.microsoft.com/office/powerpoint/2010/main" val="353601395"/>
       </p:ext>
     </p:extLst>
   </p:cSld>
@@ -3789,6 +4466,219 @@
 </file>
 
 <file path=ppt/slides/slide6.xml><?xml version="1.0" encoding="utf-8"?>
+<p:sld xmlns:a="http://schemas.openxmlformats.org/drawingml/2006/main" xmlns:r="http://schemas.openxmlformats.org/officeDocument/2006/relationships" xmlns:p="http://schemas.openxmlformats.org/presentationml/2006/main">
+  <p:cSld>
+    <p:spTree>
+      <p:nvGrpSpPr>
+        <p:cNvPr id="1" name="">
+          <a:extLst>
+            <a:ext uri="{FF2B5EF4-FFF2-40B4-BE49-F238E27FC236}">
+              <a16:creationId xmlns:a16="http://schemas.microsoft.com/office/drawing/2014/main" id="{1D8A2DB1-0972-ADB0-6F1C-CFF63DA48888}"/>
+            </a:ext>
+          </a:extLst>
+        </p:cNvPr>
+        <p:cNvGrpSpPr/>
+        <p:nvPr/>
+      </p:nvGrpSpPr>
+      <p:grpSpPr>
+        <a:xfrm>
+          <a:off x="0" y="0"/>
+          <a:ext cx="0" cy="0"/>
+          <a:chOff x="0" y="0"/>
+          <a:chExt cx="0" cy="0"/>
+        </a:xfrm>
+      </p:grpSpPr>
+      <p:sp>
+        <p:nvSpPr>
+          <p:cNvPr id="2" name="TextBox 1">
+            <a:extLst>
+              <a:ext uri="{FF2B5EF4-FFF2-40B4-BE49-F238E27FC236}">
+                <a16:creationId xmlns:a16="http://schemas.microsoft.com/office/drawing/2014/main" id="{394BDA26-D74C-5390-5839-09EEB9016D38}"/>
+              </a:ext>
+            </a:extLst>
+          </p:cNvPr>
+          <p:cNvSpPr txBox="1"/>
+          <p:nvPr/>
+        </p:nvSpPr>
+        <p:spPr>
+          <a:xfrm>
+            <a:off x="4506686" y="2759529"/>
+            <a:ext cx="623889" cy="369332"/>
+          </a:xfrm>
+          <a:prstGeom prst="rect">
+            <a:avLst/>
+          </a:prstGeom>
+          <a:noFill/>
+        </p:spPr>
+        <p:txBody>
+          <a:bodyPr wrap="none" rtlCol="0">
+            <a:spAutoFit/>
+          </a:bodyPr>
+          <a:lstStyle/>
+          <a:p>
+            <a:r>
+              <a:rPr lang="en-CA" dirty="0"/>
+              <a:t>Edin</a:t>
+            </a:r>
+          </a:p>
+        </p:txBody>
+      </p:sp>
+    </p:spTree>
+    <p:extLst>
+      <p:ext uri="{BB962C8B-B14F-4D97-AF65-F5344CB8AC3E}">
+        <p14:creationId xmlns:p14="http://schemas.microsoft.com/office/powerpoint/2010/main" val="557364214"/>
+      </p:ext>
+    </p:extLst>
+  </p:cSld>
+  <p:clrMapOvr>
+    <a:masterClrMapping/>
+  </p:clrMapOvr>
+</p:sld>
+</file>
+
+<file path=ppt/slides/slide7.xml><?xml version="1.0" encoding="utf-8"?>
+<p:sld xmlns:a="http://schemas.openxmlformats.org/drawingml/2006/main" xmlns:r="http://schemas.openxmlformats.org/officeDocument/2006/relationships" xmlns:p="http://schemas.openxmlformats.org/presentationml/2006/main">
+  <p:cSld>
+    <p:spTree>
+      <p:nvGrpSpPr>
+        <p:cNvPr id="1" name="">
+          <a:extLst>
+            <a:ext uri="{FF2B5EF4-FFF2-40B4-BE49-F238E27FC236}">
+              <a16:creationId xmlns:a16="http://schemas.microsoft.com/office/drawing/2014/main" id="{A73C37E5-8D7F-1E15-21B2-AFA56ED8C014}"/>
+            </a:ext>
+          </a:extLst>
+        </p:cNvPr>
+        <p:cNvGrpSpPr/>
+        <p:nvPr/>
+      </p:nvGrpSpPr>
+      <p:grpSpPr>
+        <a:xfrm>
+          <a:off x="0" y="0"/>
+          <a:ext cx="0" cy="0"/>
+          <a:chOff x="0" y="0"/>
+          <a:chExt cx="0" cy="0"/>
+        </a:xfrm>
+      </p:grpSpPr>
+      <p:sp>
+        <p:nvSpPr>
+          <p:cNvPr id="2" name="TextBox 1">
+            <a:extLst>
+              <a:ext uri="{FF2B5EF4-FFF2-40B4-BE49-F238E27FC236}">
+                <a16:creationId xmlns:a16="http://schemas.microsoft.com/office/drawing/2014/main" id="{5745D002-DA86-69FC-73CA-295EFFA512FA}"/>
+              </a:ext>
+            </a:extLst>
+          </p:cNvPr>
+          <p:cNvSpPr txBox="1"/>
+          <p:nvPr/>
+        </p:nvSpPr>
+        <p:spPr>
+          <a:xfrm>
+            <a:off x="4506686" y="2759529"/>
+            <a:ext cx="614464" cy="369332"/>
+          </a:xfrm>
+          <a:prstGeom prst="rect">
+            <a:avLst/>
+          </a:prstGeom>
+          <a:noFill/>
+        </p:spPr>
+        <p:txBody>
+          <a:bodyPr wrap="none" rtlCol="0">
+            <a:spAutoFit/>
+          </a:bodyPr>
+          <a:lstStyle/>
+          <a:p>
+            <a:r>
+              <a:rPr lang="en-CA" dirty="0"/>
+              <a:t>Jake</a:t>
+            </a:r>
+          </a:p>
+        </p:txBody>
+      </p:sp>
+    </p:spTree>
+    <p:extLst>
+      <p:ext uri="{BB962C8B-B14F-4D97-AF65-F5344CB8AC3E}">
+        <p14:creationId xmlns:p14="http://schemas.microsoft.com/office/powerpoint/2010/main" val="3893094920"/>
+      </p:ext>
+    </p:extLst>
+  </p:cSld>
+  <p:clrMapOvr>
+    <a:masterClrMapping/>
+  </p:clrMapOvr>
+</p:sld>
+</file>
+
+<file path=ppt/slides/slide8.xml><?xml version="1.0" encoding="utf-8"?>
+<p:sld xmlns:a="http://schemas.openxmlformats.org/drawingml/2006/main" xmlns:r="http://schemas.openxmlformats.org/officeDocument/2006/relationships" xmlns:p="http://schemas.openxmlformats.org/presentationml/2006/main">
+  <p:cSld>
+    <p:spTree>
+      <p:nvGrpSpPr>
+        <p:cNvPr id="1" name="">
+          <a:extLst>
+            <a:ext uri="{FF2B5EF4-FFF2-40B4-BE49-F238E27FC236}">
+              <a16:creationId xmlns:a16="http://schemas.microsoft.com/office/drawing/2014/main" id="{011A953A-22D6-6436-41E8-4509452EB9A0}"/>
+            </a:ext>
+          </a:extLst>
+        </p:cNvPr>
+        <p:cNvGrpSpPr/>
+        <p:nvPr/>
+      </p:nvGrpSpPr>
+      <p:grpSpPr>
+        <a:xfrm>
+          <a:off x="0" y="0"/>
+          <a:ext cx="0" cy="0"/>
+          <a:chOff x="0" y="0"/>
+          <a:chExt cx="0" cy="0"/>
+        </a:xfrm>
+      </p:grpSpPr>
+      <p:sp>
+        <p:nvSpPr>
+          <p:cNvPr id="2" name="TextBox 1">
+            <a:extLst>
+              <a:ext uri="{FF2B5EF4-FFF2-40B4-BE49-F238E27FC236}">
+                <a16:creationId xmlns:a16="http://schemas.microsoft.com/office/drawing/2014/main" id="{28A7DA79-A174-410A-3A18-3A2891D7BA9C}"/>
+              </a:ext>
+            </a:extLst>
+          </p:cNvPr>
+          <p:cNvSpPr txBox="1"/>
+          <p:nvPr/>
+        </p:nvSpPr>
+        <p:spPr>
+          <a:xfrm>
+            <a:off x="4506686" y="2759529"/>
+            <a:ext cx="734047" cy="369332"/>
+          </a:xfrm>
+          <a:prstGeom prst="rect">
+            <a:avLst/>
+          </a:prstGeom>
+          <a:noFill/>
+        </p:spPr>
+        <p:txBody>
+          <a:bodyPr wrap="none" rtlCol="0">
+            <a:spAutoFit/>
+          </a:bodyPr>
+          <a:lstStyle/>
+          <a:p>
+            <a:r>
+              <a:rPr lang="en-CA" dirty="0"/>
+              <a:t>Steve</a:t>
+            </a:r>
+          </a:p>
+        </p:txBody>
+      </p:sp>
+    </p:spTree>
+    <p:extLst>
+      <p:ext uri="{BB962C8B-B14F-4D97-AF65-F5344CB8AC3E}">
+        <p14:creationId xmlns:p14="http://schemas.microsoft.com/office/powerpoint/2010/main" val="2049535269"/>
+      </p:ext>
+    </p:extLst>
+  </p:cSld>
+  <p:clrMapOvr>
+    <a:masterClrMapping/>
+  </p:clrMapOvr>
+</p:sld>
+</file>
+
+<file path=ppt/slides/slide9.xml><?xml version="1.0" encoding="utf-8"?>
 <p:sld xmlns:a="http://schemas.openxmlformats.org/drawingml/2006/main" xmlns:r="http://schemas.openxmlformats.org/officeDocument/2006/relationships" xmlns:p="http://schemas.openxmlformats.org/presentationml/2006/main">
   <p:cSld>
     <p:spTree>
@@ -3826,7 +4716,7 @@
         <p:spPr>
           <a:xfrm>
             <a:off x="4506686" y="2759529"/>
-            <a:ext cx="1497974" cy="369332"/>
+            <a:ext cx="1441420" cy="369332"/>
           </a:xfrm>
           <a:prstGeom prst="rect">
             <a:avLst/>
@@ -3840,9 +4730,10 @@
           <a:lstStyle/>
           <a:p>
             <a:r>
-              <a:rPr lang="en-CA" dirty="0"/>
-              <a:t>Competitor 1</a:t>
-            </a:r>
+              <a:rPr lang="en-CA"/>
+              <a:t>Client needs</a:t>
+            </a:r>
+            <a:endParaRPr lang="en-CA" dirty="0"/>
           </a:p>
         </p:txBody>
       </p:sp>
@@ -3850,219 +4741,6 @@
     <p:extLst>
       <p:ext uri="{BB962C8B-B14F-4D97-AF65-F5344CB8AC3E}">
         <p14:creationId xmlns:p14="http://schemas.microsoft.com/office/powerpoint/2010/main" val="3444687766"/>
-      </p:ext>
-    </p:extLst>
-  </p:cSld>
-  <p:clrMapOvr>
-    <a:masterClrMapping/>
-  </p:clrMapOvr>
-</p:sld>
-</file>
-
-<file path=ppt/slides/slide7.xml><?xml version="1.0" encoding="utf-8"?>
-<p:sld xmlns:a="http://schemas.openxmlformats.org/drawingml/2006/main" xmlns:r="http://schemas.openxmlformats.org/officeDocument/2006/relationships" xmlns:p="http://schemas.openxmlformats.org/presentationml/2006/main">
-  <p:cSld>
-    <p:spTree>
-      <p:nvGrpSpPr>
-        <p:cNvPr id="1" name="">
-          <a:extLst>
-            <a:ext uri="{FF2B5EF4-FFF2-40B4-BE49-F238E27FC236}">
-              <a16:creationId xmlns:a16="http://schemas.microsoft.com/office/drawing/2014/main" id="{FCD78032-0C9A-7338-75C4-3A981F48951F}"/>
-            </a:ext>
-          </a:extLst>
-        </p:cNvPr>
-        <p:cNvGrpSpPr/>
-        <p:nvPr/>
-      </p:nvGrpSpPr>
-      <p:grpSpPr>
-        <a:xfrm>
-          <a:off x="0" y="0"/>
-          <a:ext cx="0" cy="0"/>
-          <a:chOff x="0" y="0"/>
-          <a:chExt cx="0" cy="0"/>
-        </a:xfrm>
-      </p:grpSpPr>
-      <p:sp>
-        <p:nvSpPr>
-          <p:cNvPr id="2" name="TextBox 1">
-            <a:extLst>
-              <a:ext uri="{FF2B5EF4-FFF2-40B4-BE49-F238E27FC236}">
-                <a16:creationId xmlns:a16="http://schemas.microsoft.com/office/drawing/2014/main" id="{EB45249E-3CD1-3B49-F9CF-AF33CD9279A1}"/>
-              </a:ext>
-            </a:extLst>
-          </p:cNvPr>
-          <p:cNvSpPr txBox="1"/>
-          <p:nvPr/>
-        </p:nvSpPr>
-        <p:spPr>
-          <a:xfrm>
-            <a:off x="4506686" y="2759529"/>
-            <a:ext cx="1497974" cy="369332"/>
-          </a:xfrm>
-          <a:prstGeom prst="rect">
-            <a:avLst/>
-          </a:prstGeom>
-          <a:noFill/>
-        </p:spPr>
-        <p:txBody>
-          <a:bodyPr wrap="none" rtlCol="0">
-            <a:spAutoFit/>
-          </a:bodyPr>
-          <a:lstStyle/>
-          <a:p>
-            <a:r>
-              <a:rPr lang="en-CA" dirty="0"/>
-              <a:t>Competitor 2</a:t>
-            </a:r>
-          </a:p>
-        </p:txBody>
-      </p:sp>
-    </p:spTree>
-    <p:extLst>
-      <p:ext uri="{BB962C8B-B14F-4D97-AF65-F5344CB8AC3E}">
-        <p14:creationId xmlns:p14="http://schemas.microsoft.com/office/powerpoint/2010/main" val="4190029259"/>
-      </p:ext>
-    </p:extLst>
-  </p:cSld>
-  <p:clrMapOvr>
-    <a:masterClrMapping/>
-  </p:clrMapOvr>
-</p:sld>
-</file>
-
-<file path=ppt/slides/slide8.xml><?xml version="1.0" encoding="utf-8"?>
-<p:sld xmlns:a="http://schemas.openxmlformats.org/drawingml/2006/main" xmlns:r="http://schemas.openxmlformats.org/officeDocument/2006/relationships" xmlns:p="http://schemas.openxmlformats.org/presentationml/2006/main">
-  <p:cSld>
-    <p:spTree>
-      <p:nvGrpSpPr>
-        <p:cNvPr id="1" name="">
-          <a:extLst>
-            <a:ext uri="{FF2B5EF4-FFF2-40B4-BE49-F238E27FC236}">
-              <a16:creationId xmlns:a16="http://schemas.microsoft.com/office/drawing/2014/main" id="{DA253801-181C-62EA-D428-47B4C6AEBA5C}"/>
-            </a:ext>
-          </a:extLst>
-        </p:cNvPr>
-        <p:cNvGrpSpPr/>
-        <p:nvPr/>
-      </p:nvGrpSpPr>
-      <p:grpSpPr>
-        <a:xfrm>
-          <a:off x="0" y="0"/>
-          <a:ext cx="0" cy="0"/>
-          <a:chOff x="0" y="0"/>
-          <a:chExt cx="0" cy="0"/>
-        </a:xfrm>
-      </p:grpSpPr>
-      <p:sp>
-        <p:nvSpPr>
-          <p:cNvPr id="2" name="TextBox 1">
-            <a:extLst>
-              <a:ext uri="{FF2B5EF4-FFF2-40B4-BE49-F238E27FC236}">
-                <a16:creationId xmlns:a16="http://schemas.microsoft.com/office/drawing/2014/main" id="{FB7C1DAA-388D-15E8-746C-4763F989A8BD}"/>
-              </a:ext>
-            </a:extLst>
-          </p:cNvPr>
-          <p:cNvSpPr txBox="1"/>
-          <p:nvPr/>
-        </p:nvSpPr>
-        <p:spPr>
-          <a:xfrm>
-            <a:off x="4506686" y="2759529"/>
-            <a:ext cx="1414170" cy="369332"/>
-          </a:xfrm>
-          <a:prstGeom prst="rect">
-            <a:avLst/>
-          </a:prstGeom>
-          <a:noFill/>
-        </p:spPr>
-        <p:txBody>
-          <a:bodyPr wrap="none" rtlCol="0">
-            <a:spAutoFit/>
-          </a:bodyPr>
-          <a:lstStyle/>
-          <a:p>
-            <a:r>
-              <a:rPr lang="en-CA" dirty="0"/>
-              <a:t>Our solution</a:t>
-            </a:r>
-          </a:p>
-        </p:txBody>
-      </p:sp>
-    </p:spTree>
-    <p:extLst>
-      <p:ext uri="{BB962C8B-B14F-4D97-AF65-F5344CB8AC3E}">
-        <p14:creationId xmlns:p14="http://schemas.microsoft.com/office/powerpoint/2010/main" val="1179066660"/>
-      </p:ext>
-    </p:extLst>
-  </p:cSld>
-  <p:clrMapOvr>
-    <a:masterClrMapping/>
-  </p:clrMapOvr>
-</p:sld>
-</file>
-
-<file path=ppt/slides/slide9.xml><?xml version="1.0" encoding="utf-8"?>
-<p:sld xmlns:a="http://schemas.openxmlformats.org/drawingml/2006/main" xmlns:r="http://schemas.openxmlformats.org/officeDocument/2006/relationships" xmlns:p="http://schemas.openxmlformats.org/presentationml/2006/main">
-  <p:cSld>
-    <p:spTree>
-      <p:nvGrpSpPr>
-        <p:cNvPr id="1" name="">
-          <a:extLst>
-            <a:ext uri="{FF2B5EF4-FFF2-40B4-BE49-F238E27FC236}">
-              <a16:creationId xmlns:a16="http://schemas.microsoft.com/office/drawing/2014/main" id="{BF56D546-8404-1906-1836-C08924CB8B1E}"/>
-            </a:ext>
-          </a:extLst>
-        </p:cNvPr>
-        <p:cNvGrpSpPr/>
-        <p:nvPr/>
-      </p:nvGrpSpPr>
-      <p:grpSpPr>
-        <a:xfrm>
-          <a:off x="0" y="0"/>
-          <a:ext cx="0" cy="0"/>
-          <a:chOff x="0" y="0"/>
-          <a:chExt cx="0" cy="0"/>
-        </a:xfrm>
-      </p:grpSpPr>
-      <p:sp>
-        <p:nvSpPr>
-          <p:cNvPr id="2" name="TextBox 1">
-            <a:extLst>
-              <a:ext uri="{FF2B5EF4-FFF2-40B4-BE49-F238E27FC236}">
-                <a16:creationId xmlns:a16="http://schemas.microsoft.com/office/drawing/2014/main" id="{9E689793-48BC-E89A-D94F-DE97837489B8}"/>
-              </a:ext>
-            </a:extLst>
-          </p:cNvPr>
-          <p:cNvSpPr txBox="1"/>
-          <p:nvPr/>
-        </p:nvSpPr>
-        <p:spPr>
-          <a:xfrm>
-            <a:off x="4506686" y="2759529"/>
-            <a:ext cx="638316" cy="369332"/>
-          </a:xfrm>
-          <a:prstGeom prst="rect">
-            <a:avLst/>
-          </a:prstGeom>
-          <a:noFill/>
-        </p:spPr>
-        <p:txBody>
-          <a:bodyPr wrap="none" rtlCol="0">
-            <a:spAutoFit/>
-          </a:bodyPr>
-          <a:lstStyle/>
-          <a:p>
-            <a:r>
-              <a:rPr lang="en-CA" dirty="0"/>
-              <a:t>Q&amp;A</a:t>
-            </a:r>
-          </a:p>
-        </p:txBody>
-      </p:sp>
-    </p:spTree>
-    <p:extLst>
-      <p:ext uri="{BB962C8B-B14F-4D97-AF65-F5344CB8AC3E}">
-        <p14:creationId xmlns:p14="http://schemas.microsoft.com/office/powerpoint/2010/main" val="2229155277"/>
       </p:ext>
     </p:extLst>
   </p:cSld>

--- a/Deliverables/Presentation1.pptx
+++ b/Deliverables/Presentation1.pptx
@@ -129,7 +129,7 @@
 <file path=ppt/revisionInfo.xml><?xml version="1.0" encoding="utf-8"?>
 <p1510:revInfo xmlns:a="http://schemas.openxmlformats.org/drawingml/2006/main" xmlns:r="http://schemas.openxmlformats.org/officeDocument/2006/relationships" xmlns:p1510="http://schemas.microsoft.com/office/powerpoint/2015/10/main">
   <p1510:revLst>
-    <p1510:client id="{EADFFEA0-CC63-45EF-97E4-5A80CDB68182}" v="21" dt="2026-09-15T17:37:22.721"/>
+    <p1510:client id="{EADFFEA0-CC63-45EF-97E4-5A80CDB68182}" v="22" dt="2026-09-15T18:05:34.469"/>
   </p1510:revLst>
 </p1510:revInfo>
 </file>
@@ -139,7 +139,7 @@
   <pc:docChgLst>
     <pc:chgData name="Steve Mutrux" userId="4fa98d0c-dc66-4728-b09b-a88e22e95094" providerId="ADAL" clId="{421BD283-33D8-4C6C-821F-71755E863FA2}"/>
     <pc:docChg chg="undo custSel addSld delSld modSld sldOrd">
-      <pc:chgData name="Steve Mutrux" userId="4fa98d0c-dc66-4728-b09b-a88e22e95094" providerId="ADAL" clId="{421BD283-33D8-4C6C-821F-71755E863FA2}" dt="2026-09-15T17:37:27.581" v="270" actId="20577"/>
+      <pc:chgData name="Steve Mutrux" userId="4fa98d0c-dc66-4728-b09b-a88e22e95094" providerId="ADAL" clId="{421BD283-33D8-4C6C-821F-71755E863FA2}" dt="2026-09-15T18:03:14.809" v="439" actId="20577"/>
       <pc:docMkLst>
         <pc:docMk/>
       </pc:docMkLst>
@@ -286,8 +286,8 @@
           </ac:graphicFrameMkLst>
         </pc:graphicFrameChg>
       </pc:sldChg>
-      <pc:sldChg chg="modSp add mod">
-        <pc:chgData name="Steve Mutrux" userId="4fa98d0c-dc66-4728-b09b-a88e22e95094" providerId="ADAL" clId="{421BD283-33D8-4C6C-821F-71755E863FA2}" dt="2026-09-15T17:23:10.459" v="97" actId="20577"/>
+      <pc:sldChg chg="addSp modSp add mod">
+        <pc:chgData name="Steve Mutrux" userId="4fa98d0c-dc66-4728-b09b-a88e22e95094" providerId="ADAL" clId="{421BD283-33D8-4C6C-821F-71755E863FA2}" dt="2026-09-15T17:56:25.658" v="313" actId="1076"/>
         <pc:sldMkLst>
           <pc:docMk/>
           <pc:sldMk cId="2553109476" sldId="265"/>
@@ -300,6 +300,14 @@
             <ac:spMk id="2" creationId="{9019CA75-AE86-96E8-F266-96497A23FD87}"/>
           </ac:spMkLst>
         </pc:spChg>
+        <pc:spChg chg="add mod">
+          <ac:chgData name="Steve Mutrux" userId="4fa98d0c-dc66-4728-b09b-a88e22e95094" providerId="ADAL" clId="{421BD283-33D8-4C6C-821F-71755E863FA2}" dt="2026-09-15T17:56:25.658" v="313" actId="1076"/>
+          <ac:spMkLst>
+            <pc:docMk/>
+            <pc:sldMk cId="2553109476" sldId="265"/>
+            <ac:spMk id="4" creationId="{487D995F-8AAC-6993-74EB-723E6B5C0BFF}"/>
+          </ac:spMkLst>
+        </pc:spChg>
       </pc:sldChg>
       <pc:sldChg chg="add del">
         <pc:chgData name="Steve Mutrux" userId="4fa98d0c-dc66-4728-b09b-a88e22e95094" providerId="ADAL" clId="{421BD283-33D8-4C6C-821F-71755E863FA2}" dt="2026-09-15T16:17:28.694" v="10"/>
@@ -308,8 +316,8 @@
           <pc:sldMk cId="3540047338" sldId="265"/>
         </pc:sldMkLst>
       </pc:sldChg>
-      <pc:sldChg chg="modSp add mod">
-        <pc:chgData name="Steve Mutrux" userId="4fa98d0c-dc66-4728-b09b-a88e22e95094" providerId="ADAL" clId="{421BD283-33D8-4C6C-821F-71755E863FA2}" dt="2026-09-15T17:23:15.745" v="102" actId="20577"/>
+      <pc:sldChg chg="addSp modSp add mod">
+        <pc:chgData name="Steve Mutrux" userId="4fa98d0c-dc66-4728-b09b-a88e22e95094" providerId="ADAL" clId="{421BD283-33D8-4C6C-821F-71755E863FA2}" dt="2026-09-15T17:56:28.856" v="314" actId="22"/>
         <pc:sldMkLst>
           <pc:docMk/>
           <pc:sldMk cId="353601395" sldId="266"/>
@@ -322,9 +330,17 @@
             <ac:spMk id="2" creationId="{F8626D69-4F4F-76B2-E4FB-EA5B5DF367A4}"/>
           </ac:spMkLst>
         </pc:spChg>
+        <pc:spChg chg="add">
+          <ac:chgData name="Steve Mutrux" userId="4fa98d0c-dc66-4728-b09b-a88e22e95094" providerId="ADAL" clId="{421BD283-33D8-4C6C-821F-71755E863FA2}" dt="2026-09-15T17:56:28.856" v="314" actId="22"/>
+          <ac:spMkLst>
+            <pc:docMk/>
+            <pc:sldMk cId="353601395" sldId="266"/>
+            <ac:spMk id="4" creationId="{62300D51-2B10-B557-82F3-8A6662DF3624}"/>
+          </ac:spMkLst>
+        </pc:spChg>
       </pc:sldChg>
-      <pc:sldChg chg="modSp add mod">
-        <pc:chgData name="Steve Mutrux" userId="4fa98d0c-dc66-4728-b09b-a88e22e95094" providerId="ADAL" clId="{421BD283-33D8-4C6C-821F-71755E863FA2}" dt="2026-09-15T17:23:21.176" v="106" actId="20577"/>
+      <pc:sldChg chg="addSp modSp add mod">
+        <pc:chgData name="Steve Mutrux" userId="4fa98d0c-dc66-4728-b09b-a88e22e95094" providerId="ADAL" clId="{421BD283-33D8-4C6C-821F-71755E863FA2}" dt="2026-09-15T17:56:29.473" v="315" actId="22"/>
         <pc:sldMkLst>
           <pc:docMk/>
           <pc:sldMk cId="557364214" sldId="267"/>
@@ -337,9 +353,17 @@
             <ac:spMk id="2" creationId="{394BDA26-D74C-5390-5839-09EEB9016D38}"/>
           </ac:spMkLst>
         </pc:spChg>
+        <pc:spChg chg="add">
+          <ac:chgData name="Steve Mutrux" userId="4fa98d0c-dc66-4728-b09b-a88e22e95094" providerId="ADAL" clId="{421BD283-33D8-4C6C-821F-71755E863FA2}" dt="2026-09-15T17:56:29.473" v="315" actId="22"/>
+          <ac:spMkLst>
+            <pc:docMk/>
+            <pc:sldMk cId="557364214" sldId="267"/>
+            <ac:spMk id="4" creationId="{D33647DA-DFAA-FEB8-E5A2-61DBE5F52AC1}"/>
+          </ac:spMkLst>
+        </pc:spChg>
       </pc:sldChg>
-      <pc:sldChg chg="modSp add mod">
-        <pc:chgData name="Steve Mutrux" userId="4fa98d0c-dc66-4728-b09b-a88e22e95094" providerId="ADAL" clId="{421BD283-33D8-4C6C-821F-71755E863FA2}" dt="2026-09-15T17:23:24.232" v="110" actId="20577"/>
+      <pc:sldChg chg="addSp modSp add mod">
+        <pc:chgData name="Steve Mutrux" userId="4fa98d0c-dc66-4728-b09b-a88e22e95094" providerId="ADAL" clId="{421BD283-33D8-4C6C-821F-71755E863FA2}" dt="2026-09-15T17:56:29.987" v="316" actId="22"/>
         <pc:sldMkLst>
           <pc:docMk/>
           <pc:sldMk cId="3893094920" sldId="268"/>
@@ -350,6 +374,14 @@
             <pc:docMk/>
             <pc:sldMk cId="3893094920" sldId="268"/>
             <ac:spMk id="2" creationId="{5745D002-DA86-69FC-73CA-295EFFA512FA}"/>
+          </ac:spMkLst>
+        </pc:spChg>
+        <pc:spChg chg="add">
+          <ac:chgData name="Steve Mutrux" userId="4fa98d0c-dc66-4728-b09b-a88e22e95094" providerId="ADAL" clId="{421BD283-33D8-4C6C-821F-71755E863FA2}" dt="2026-09-15T17:56:29.987" v="316" actId="22"/>
+          <ac:spMkLst>
+            <pc:docMk/>
+            <pc:sldMk cId="3893094920" sldId="268"/>
+            <ac:spMk id="4" creationId="{417B9F22-9B70-7974-674D-300CF5BE5CE0}"/>
           </ac:spMkLst>
         </pc:spChg>
       </pc:sldChg>
@@ -368,12 +400,20 @@
           </ac:spMkLst>
         </pc:spChg>
       </pc:sldChg>
-      <pc:sldChg chg="add ord">
-        <pc:chgData name="Steve Mutrux" userId="4fa98d0c-dc66-4728-b09b-a88e22e95094" providerId="ADAL" clId="{421BD283-33D8-4C6C-821F-71755E863FA2}" dt="2026-09-15T17:36:45.854" v="257"/>
+      <pc:sldChg chg="addSp modSp add mod ord">
+        <pc:chgData name="Steve Mutrux" userId="4fa98d0c-dc66-4728-b09b-a88e22e95094" providerId="ADAL" clId="{421BD283-33D8-4C6C-821F-71755E863FA2}" dt="2026-09-15T18:03:14.809" v="439" actId="20577"/>
         <pc:sldMkLst>
           <pc:docMk/>
           <pc:sldMk cId="2049535269" sldId="270"/>
         </pc:sldMkLst>
+        <pc:spChg chg="add mod">
+          <ac:chgData name="Steve Mutrux" userId="4fa98d0c-dc66-4728-b09b-a88e22e95094" providerId="ADAL" clId="{421BD283-33D8-4C6C-821F-71755E863FA2}" dt="2026-09-15T18:03:14.809" v="439" actId="20577"/>
+          <ac:spMkLst>
+            <pc:docMk/>
+            <pc:sldMk cId="2049535269" sldId="270"/>
+            <ac:spMk id="4" creationId="{93D1B975-23AA-D332-2B01-31BE712CDC3A}"/>
+          </ac:spMkLst>
+        </pc:spChg>
       </pc:sldChg>
       <pc:sldChg chg="modSp add mod">
         <pc:chgData name="Steve Mutrux" userId="4fa98d0c-dc66-4728-b09b-a88e22e95094" providerId="ADAL" clId="{421BD283-33D8-4C6C-821F-71755E863FA2}" dt="2026-09-15T17:35:47.186" v="210" actId="20577"/>
@@ -4381,6 +4421,65 @@
           </a:p>
         </p:txBody>
       </p:sp>
+      <p:sp>
+        <p:nvSpPr>
+          <p:cNvPr id="4" name="TextBox 3">
+            <a:extLst>
+              <a:ext uri="{FF2B5EF4-FFF2-40B4-BE49-F238E27FC236}">
+                <a16:creationId xmlns:a16="http://schemas.microsoft.com/office/drawing/2014/main" id="{487D995F-8AAC-6993-74EB-723E6B5C0BFF}"/>
+              </a:ext>
+            </a:extLst>
+          </p:cNvPr>
+          <p:cNvSpPr txBox="1"/>
+          <p:nvPr/>
+        </p:nvSpPr>
+        <p:spPr>
+          <a:xfrm>
+            <a:off x="4407954" y="3267475"/>
+            <a:ext cx="2050818" cy="923330"/>
+          </a:xfrm>
+          <a:prstGeom prst="rect">
+            <a:avLst/>
+          </a:prstGeom>
+          <a:noFill/>
+        </p:spPr>
+        <p:txBody>
+          <a:bodyPr wrap="none" rtlCol="0">
+            <a:spAutoFit/>
+          </a:bodyPr>
+          <a:lstStyle/>
+          <a:p>
+            <a:pPr marL="285750" indent="-285750">
+              <a:buFontTx/>
+              <a:buChar char="-"/>
+            </a:pPr>
+            <a:r>
+              <a:rPr lang="en-CA" dirty="0"/>
+              <a:t>Past experience</a:t>
+            </a:r>
+          </a:p>
+          <a:p>
+            <a:pPr marL="285750" indent="-285750">
+              <a:buFontTx/>
+              <a:buChar char="-"/>
+            </a:pPr>
+            <a:r>
+              <a:rPr lang="en-CA" dirty="0"/>
+              <a:t>Role</a:t>
+            </a:r>
+          </a:p>
+          <a:p>
+            <a:pPr marL="285750" indent="-285750">
+              <a:buFontTx/>
+              <a:buChar char="-"/>
+            </a:pPr>
+            <a:r>
+              <a:rPr lang="en-CA" dirty="0"/>
+              <a:t>Expectations</a:t>
+            </a:r>
+          </a:p>
+        </p:txBody>
+      </p:sp>
     </p:spTree>
     <p:extLst>
       <p:ext uri="{BB962C8B-B14F-4D97-AF65-F5344CB8AC3E}">
@@ -4452,6 +4551,65 @@
           </a:p>
         </p:txBody>
       </p:sp>
+      <p:sp>
+        <p:nvSpPr>
+          <p:cNvPr id="4" name="TextBox 3">
+            <a:extLst>
+              <a:ext uri="{FF2B5EF4-FFF2-40B4-BE49-F238E27FC236}">
+                <a16:creationId xmlns:a16="http://schemas.microsoft.com/office/drawing/2014/main" id="{62300D51-2B10-B557-82F3-8A6662DF3624}"/>
+              </a:ext>
+            </a:extLst>
+          </p:cNvPr>
+          <p:cNvSpPr txBox="1"/>
+          <p:nvPr/>
+        </p:nvSpPr>
+        <p:spPr>
+          <a:xfrm>
+            <a:off x="4407954" y="3267475"/>
+            <a:ext cx="2050818" cy="923330"/>
+          </a:xfrm>
+          <a:prstGeom prst="rect">
+            <a:avLst/>
+          </a:prstGeom>
+          <a:noFill/>
+        </p:spPr>
+        <p:txBody>
+          <a:bodyPr wrap="none" rtlCol="0">
+            <a:spAutoFit/>
+          </a:bodyPr>
+          <a:lstStyle/>
+          <a:p>
+            <a:pPr marL="285750" indent="-285750">
+              <a:buFontTx/>
+              <a:buChar char="-"/>
+            </a:pPr>
+            <a:r>
+              <a:rPr lang="en-CA" dirty="0"/>
+              <a:t>Past experience</a:t>
+            </a:r>
+          </a:p>
+          <a:p>
+            <a:pPr marL="285750" indent="-285750">
+              <a:buFontTx/>
+              <a:buChar char="-"/>
+            </a:pPr>
+            <a:r>
+              <a:rPr lang="en-CA" dirty="0"/>
+              <a:t>Role</a:t>
+            </a:r>
+          </a:p>
+          <a:p>
+            <a:pPr marL="285750" indent="-285750">
+              <a:buFontTx/>
+              <a:buChar char="-"/>
+            </a:pPr>
+            <a:r>
+              <a:rPr lang="en-CA" dirty="0"/>
+              <a:t>Expectations</a:t>
+            </a:r>
+          </a:p>
+        </p:txBody>
+      </p:sp>
     </p:spTree>
     <p:extLst>
       <p:ext uri="{BB962C8B-B14F-4D97-AF65-F5344CB8AC3E}">
@@ -4523,6 +4681,65 @@
           </a:p>
         </p:txBody>
       </p:sp>
+      <p:sp>
+        <p:nvSpPr>
+          <p:cNvPr id="4" name="TextBox 3">
+            <a:extLst>
+              <a:ext uri="{FF2B5EF4-FFF2-40B4-BE49-F238E27FC236}">
+                <a16:creationId xmlns:a16="http://schemas.microsoft.com/office/drawing/2014/main" id="{D33647DA-DFAA-FEB8-E5A2-61DBE5F52AC1}"/>
+              </a:ext>
+            </a:extLst>
+          </p:cNvPr>
+          <p:cNvSpPr txBox="1"/>
+          <p:nvPr/>
+        </p:nvSpPr>
+        <p:spPr>
+          <a:xfrm>
+            <a:off x="4407954" y="3267475"/>
+            <a:ext cx="2050818" cy="923330"/>
+          </a:xfrm>
+          <a:prstGeom prst="rect">
+            <a:avLst/>
+          </a:prstGeom>
+          <a:noFill/>
+        </p:spPr>
+        <p:txBody>
+          <a:bodyPr wrap="none" rtlCol="0">
+            <a:spAutoFit/>
+          </a:bodyPr>
+          <a:lstStyle/>
+          <a:p>
+            <a:pPr marL="285750" indent="-285750">
+              <a:buFontTx/>
+              <a:buChar char="-"/>
+            </a:pPr>
+            <a:r>
+              <a:rPr lang="en-CA" dirty="0"/>
+              <a:t>Past experience</a:t>
+            </a:r>
+          </a:p>
+          <a:p>
+            <a:pPr marL="285750" indent="-285750">
+              <a:buFontTx/>
+              <a:buChar char="-"/>
+            </a:pPr>
+            <a:r>
+              <a:rPr lang="en-CA" dirty="0"/>
+              <a:t>Role</a:t>
+            </a:r>
+          </a:p>
+          <a:p>
+            <a:pPr marL="285750" indent="-285750">
+              <a:buFontTx/>
+              <a:buChar char="-"/>
+            </a:pPr>
+            <a:r>
+              <a:rPr lang="en-CA" dirty="0"/>
+              <a:t>Expectations</a:t>
+            </a:r>
+          </a:p>
+        </p:txBody>
+      </p:sp>
     </p:spTree>
     <p:extLst>
       <p:ext uri="{BB962C8B-B14F-4D97-AF65-F5344CB8AC3E}">
@@ -4594,6 +4811,65 @@
           </a:p>
         </p:txBody>
       </p:sp>
+      <p:sp>
+        <p:nvSpPr>
+          <p:cNvPr id="4" name="TextBox 3">
+            <a:extLst>
+              <a:ext uri="{FF2B5EF4-FFF2-40B4-BE49-F238E27FC236}">
+                <a16:creationId xmlns:a16="http://schemas.microsoft.com/office/drawing/2014/main" id="{417B9F22-9B70-7974-674D-300CF5BE5CE0}"/>
+              </a:ext>
+            </a:extLst>
+          </p:cNvPr>
+          <p:cNvSpPr txBox="1"/>
+          <p:nvPr/>
+        </p:nvSpPr>
+        <p:spPr>
+          <a:xfrm>
+            <a:off x="4407954" y="3267475"/>
+            <a:ext cx="2050818" cy="923330"/>
+          </a:xfrm>
+          <a:prstGeom prst="rect">
+            <a:avLst/>
+          </a:prstGeom>
+          <a:noFill/>
+        </p:spPr>
+        <p:txBody>
+          <a:bodyPr wrap="none" rtlCol="0">
+            <a:spAutoFit/>
+          </a:bodyPr>
+          <a:lstStyle/>
+          <a:p>
+            <a:pPr marL="285750" indent="-285750">
+              <a:buFontTx/>
+              <a:buChar char="-"/>
+            </a:pPr>
+            <a:r>
+              <a:rPr lang="en-CA" dirty="0"/>
+              <a:t>Past experience</a:t>
+            </a:r>
+          </a:p>
+          <a:p>
+            <a:pPr marL="285750" indent="-285750">
+              <a:buFontTx/>
+              <a:buChar char="-"/>
+            </a:pPr>
+            <a:r>
+              <a:rPr lang="en-CA" dirty="0"/>
+              <a:t>Role</a:t>
+            </a:r>
+          </a:p>
+          <a:p>
+            <a:pPr marL="285750" indent="-285750">
+              <a:buFontTx/>
+              <a:buChar char="-"/>
+            </a:pPr>
+            <a:r>
+              <a:rPr lang="en-CA" dirty="0"/>
+              <a:t>Expectations</a:t>
+            </a:r>
+          </a:p>
+        </p:txBody>
+      </p:sp>
     </p:spTree>
     <p:extLst>
       <p:ext uri="{BB962C8B-B14F-4D97-AF65-F5344CB8AC3E}">
@@ -4665,6 +4941,65 @@
           </a:p>
         </p:txBody>
       </p:sp>
+      <p:sp>
+        <p:nvSpPr>
+          <p:cNvPr id="4" name="TextBox 3">
+            <a:extLst>
+              <a:ext uri="{FF2B5EF4-FFF2-40B4-BE49-F238E27FC236}">
+                <a16:creationId xmlns:a16="http://schemas.microsoft.com/office/drawing/2014/main" id="{93D1B975-23AA-D332-2B01-31BE712CDC3A}"/>
+              </a:ext>
+            </a:extLst>
+          </p:cNvPr>
+          <p:cNvSpPr txBox="1"/>
+          <p:nvPr/>
+        </p:nvSpPr>
+        <p:spPr>
+          <a:xfrm>
+            <a:off x="4407954" y="3267475"/>
+            <a:ext cx="9100376" cy="923330"/>
+          </a:xfrm>
+          <a:prstGeom prst="rect">
+            <a:avLst/>
+          </a:prstGeom>
+          <a:noFill/>
+        </p:spPr>
+        <p:txBody>
+          <a:bodyPr wrap="none" rtlCol="0">
+            <a:spAutoFit/>
+          </a:bodyPr>
+          <a:lstStyle/>
+          <a:p>
+            <a:pPr marL="285750" indent="-285750">
+              <a:buFontTx/>
+              <a:buChar char="-"/>
+            </a:pPr>
+            <a:r>
+              <a:rPr lang="en-CA" dirty="0"/>
+              <a:t>Studied at Brock University, 3 years web dev experience, 1 year embedded firmware dev</a:t>
+            </a:r>
+          </a:p>
+          <a:p>
+            <a:pPr marL="285750" indent="-285750">
+              <a:buFontTx/>
+              <a:buChar char="-"/>
+            </a:pPr>
+            <a:r>
+              <a:rPr lang="en-CA" dirty="0"/>
+              <a:t>Role</a:t>
+            </a:r>
+          </a:p>
+          <a:p>
+            <a:pPr marL="285750" indent="-285750">
+              <a:buFontTx/>
+              <a:buChar char="-"/>
+            </a:pPr>
+            <a:r>
+              <a:rPr lang="en-CA" dirty="0"/>
+              <a:t>Expectations to get out of this</a:t>
+            </a:r>
+          </a:p>
+        </p:txBody>
+      </p:sp>
     </p:spTree>
     <p:extLst>
       <p:ext uri="{BB962C8B-B14F-4D97-AF65-F5344CB8AC3E}">
@@ -4730,10 +5065,9 @@
           <a:lstStyle/>
           <a:p>
             <a:r>
-              <a:rPr lang="en-CA"/>
+              <a:rPr lang="en-CA" dirty="0"/>
               <a:t>Client needs</a:t>
             </a:r>
-            <a:endParaRPr lang="en-CA" dirty="0"/>
           </a:p>
         </p:txBody>
       </p:sp>
@@ -4753,24 +5087,24 @@
 <file path=ppt/theme/theme1.xml><?xml version="1.0" encoding="utf-8"?>
 <a:theme xmlns:a="http://schemas.openxmlformats.org/drawingml/2006/main" name="Office Theme">
   <a:themeElements>
-    <a:clrScheme name="Office">
+    <a:clrScheme name="Adestria - Prog 1180">
       <a:dk1>
-        <a:sysClr val="windowText" lastClr="000000"/>
+        <a:srgbClr val="042239"/>
       </a:dk1>
       <a:lt1>
-        <a:sysClr val="window" lastClr="FFFFFF"/>
+        <a:srgbClr val="DBE9F7"/>
       </a:lt1>
       <a:dk2>
-        <a:srgbClr val="0E2841"/>
+        <a:srgbClr val="021320"/>
       </a:dk2>
       <a:lt2>
         <a:srgbClr val="E8E8E8"/>
       </a:lt2>
       <a:accent1>
-        <a:srgbClr val="156082"/>
+        <a:srgbClr val="8B130D"/>
       </a:accent1>
       <a:accent2>
-        <a:srgbClr val="E97132"/>
+        <a:srgbClr val="152B32"/>
       </a:accent2>
       <a:accent3>
         <a:srgbClr val="196B24"/>

--- a/Deliverables/Presentation1.pptx
+++ b/Deliverables/Presentation1.pptx
@@ -129,7 +129,7 @@
 <file path=ppt/revisionInfo.xml><?xml version="1.0" encoding="utf-8"?>
 <p1510:revInfo xmlns:a="http://schemas.openxmlformats.org/drawingml/2006/main" xmlns:r="http://schemas.openxmlformats.org/officeDocument/2006/relationships" xmlns:p1510="http://schemas.microsoft.com/office/powerpoint/2015/10/main">
   <p1510:revLst>
-    <p1510:client id="{EADFFEA0-CC63-45EF-97E4-5A80CDB68182}" v="22" dt="2026-09-15T18:05:34.469"/>
+    <p1510:client id="{EADFFEA0-CC63-45EF-97E4-5A80CDB68182}" v="24" dt="2026-09-15T18:22:47.122"/>
   </p1510:revLst>
 </p1510:revInfo>
 </file>
@@ -139,7 +139,7 @@
   <pc:docChgLst>
     <pc:chgData name="Steve Mutrux" userId="4fa98d0c-dc66-4728-b09b-a88e22e95094" providerId="ADAL" clId="{421BD283-33D8-4C6C-821F-71755E863FA2}"/>
     <pc:docChg chg="undo custSel addSld delSld modSld sldOrd">
-      <pc:chgData name="Steve Mutrux" userId="4fa98d0c-dc66-4728-b09b-a88e22e95094" providerId="ADAL" clId="{421BD283-33D8-4C6C-821F-71755E863FA2}" dt="2026-09-15T18:03:14.809" v="439" actId="20577"/>
+      <pc:chgData name="Steve Mutrux" userId="4fa98d0c-dc66-4728-b09b-a88e22e95094" providerId="ADAL" clId="{421BD283-33D8-4C6C-821F-71755E863FA2}" dt="2026-09-15T18:30:11.896" v="704" actId="20577"/>
       <pc:docMkLst>
         <pc:docMk/>
       </pc:docMkLst>
@@ -190,7 +190,7 @@
         </pc:spChg>
       </pc:sldChg>
       <pc:sldChg chg="addSp delSp modSp add mod">
-        <pc:chgData name="Steve Mutrux" userId="4fa98d0c-dc66-4728-b09b-a88e22e95094" providerId="ADAL" clId="{421BD283-33D8-4C6C-821F-71755E863FA2}" dt="2026-09-15T17:36:24.997" v="255" actId="20577"/>
+        <pc:chgData name="Steve Mutrux" userId="4fa98d0c-dc66-4728-b09b-a88e22e95094" providerId="ADAL" clId="{421BD283-33D8-4C6C-821F-71755E863FA2}" dt="2026-09-15T18:17:27.356" v="599" actId="14100"/>
         <pc:sldMkLst>
           <pc:docMk/>
           <pc:sldMk cId="518144185" sldId="258"/>
@@ -209,6 +209,14 @@
             <pc:docMk/>
             <pc:sldMk cId="518144185" sldId="258"/>
             <ac:spMk id="4" creationId="{2BF38305-4E94-805E-6DF4-E584E9A7D528}"/>
+          </ac:spMkLst>
+        </pc:spChg>
+        <pc:spChg chg="add mod">
+          <ac:chgData name="Steve Mutrux" userId="4fa98d0c-dc66-4728-b09b-a88e22e95094" providerId="ADAL" clId="{421BD283-33D8-4C6C-821F-71755E863FA2}" dt="2026-09-15T18:17:27.356" v="599" actId="14100"/>
+          <ac:spMkLst>
+            <pc:docMk/>
+            <pc:sldMk cId="518144185" sldId="258"/>
+            <ac:spMk id="4" creationId="{4179717D-B637-2B0D-B9EF-712078DD12DB}"/>
           </ac:spMkLst>
         </pc:spChg>
         <pc:spChg chg="add del">
@@ -287,7 +295,7 @@
         </pc:graphicFrameChg>
       </pc:sldChg>
       <pc:sldChg chg="addSp modSp add mod">
-        <pc:chgData name="Steve Mutrux" userId="4fa98d0c-dc66-4728-b09b-a88e22e95094" providerId="ADAL" clId="{421BD283-33D8-4C6C-821F-71755E863FA2}" dt="2026-09-15T17:56:25.658" v="313" actId="1076"/>
+        <pc:chgData name="Steve Mutrux" userId="4fa98d0c-dc66-4728-b09b-a88e22e95094" providerId="ADAL" clId="{421BD283-33D8-4C6C-821F-71755E863FA2}" dt="2026-09-15T18:30:11.896" v="704" actId="20577"/>
         <pc:sldMkLst>
           <pc:docMk/>
           <pc:sldMk cId="2553109476" sldId="265"/>
@@ -308,6 +316,14 @@
             <ac:spMk id="4" creationId="{487D995F-8AAC-6993-74EB-723E6B5C0BFF}"/>
           </ac:spMkLst>
         </pc:spChg>
+        <pc:spChg chg="add mod">
+          <ac:chgData name="Steve Mutrux" userId="4fa98d0c-dc66-4728-b09b-a88e22e95094" providerId="ADAL" clId="{421BD283-33D8-4C6C-821F-71755E863FA2}" dt="2026-09-15T18:30:11.896" v="704" actId="20577"/>
+          <ac:spMkLst>
+            <pc:docMk/>
+            <pc:sldMk cId="2553109476" sldId="265"/>
+            <ac:spMk id="5" creationId="{CC915FDB-49B9-2B7E-78DD-B03D9C91E7BB}"/>
+          </ac:spMkLst>
+        </pc:spChg>
       </pc:sldChg>
       <pc:sldChg chg="add del">
         <pc:chgData name="Steve Mutrux" userId="4fa98d0c-dc66-4728-b09b-a88e22e95094" providerId="ADAL" clId="{421BD283-33D8-4C6C-821F-71755E863FA2}" dt="2026-09-15T16:17:28.694" v="10"/>
@@ -317,7 +333,7 @@
         </pc:sldMkLst>
       </pc:sldChg>
       <pc:sldChg chg="addSp modSp add mod">
-        <pc:chgData name="Steve Mutrux" userId="4fa98d0c-dc66-4728-b09b-a88e22e95094" providerId="ADAL" clId="{421BD283-33D8-4C6C-821F-71755E863FA2}" dt="2026-09-15T17:56:28.856" v="314" actId="22"/>
+        <pc:chgData name="Steve Mutrux" userId="4fa98d0c-dc66-4728-b09b-a88e22e95094" providerId="ADAL" clId="{421BD283-33D8-4C6C-821F-71755E863FA2}" dt="2026-09-15T18:28:05.969" v="656" actId="2710"/>
         <pc:sldMkLst>
           <pc:docMk/>
           <pc:sldMk cId="353601395" sldId="266"/>
@@ -338,9 +354,17 @@
             <ac:spMk id="4" creationId="{62300D51-2B10-B557-82F3-8A6662DF3624}"/>
           </ac:spMkLst>
         </pc:spChg>
+        <pc:spChg chg="add mod">
+          <ac:chgData name="Steve Mutrux" userId="4fa98d0c-dc66-4728-b09b-a88e22e95094" providerId="ADAL" clId="{421BD283-33D8-4C6C-821F-71755E863FA2}" dt="2026-09-15T18:28:05.969" v="656" actId="2710"/>
+          <ac:spMkLst>
+            <pc:docMk/>
+            <pc:sldMk cId="353601395" sldId="266"/>
+            <ac:spMk id="5" creationId="{F48311E2-530A-88F3-A0F2-5F0110403BE1}"/>
+          </ac:spMkLst>
+        </pc:spChg>
       </pc:sldChg>
       <pc:sldChg chg="addSp modSp add mod">
-        <pc:chgData name="Steve Mutrux" userId="4fa98d0c-dc66-4728-b09b-a88e22e95094" providerId="ADAL" clId="{421BD283-33D8-4C6C-821F-71755E863FA2}" dt="2026-09-15T17:56:29.473" v="315" actId="22"/>
+        <pc:chgData name="Steve Mutrux" userId="4fa98d0c-dc66-4728-b09b-a88e22e95094" providerId="ADAL" clId="{421BD283-33D8-4C6C-821F-71755E863FA2}" dt="2026-09-15T18:28:10.064" v="657" actId="2710"/>
         <pc:sldMkLst>
           <pc:docMk/>
           <pc:sldMk cId="557364214" sldId="267"/>
@@ -361,9 +385,17 @@
             <ac:spMk id="4" creationId="{D33647DA-DFAA-FEB8-E5A2-61DBE5F52AC1}"/>
           </ac:spMkLst>
         </pc:spChg>
+        <pc:spChg chg="add mod">
+          <ac:chgData name="Steve Mutrux" userId="4fa98d0c-dc66-4728-b09b-a88e22e95094" providerId="ADAL" clId="{421BD283-33D8-4C6C-821F-71755E863FA2}" dt="2026-09-15T18:28:10.064" v="657" actId="2710"/>
+          <ac:spMkLst>
+            <pc:docMk/>
+            <pc:sldMk cId="557364214" sldId="267"/>
+            <ac:spMk id="5" creationId="{12223178-2D4D-92AC-AE08-E324647AB193}"/>
+          </ac:spMkLst>
+        </pc:spChg>
       </pc:sldChg>
       <pc:sldChg chg="addSp modSp add mod">
-        <pc:chgData name="Steve Mutrux" userId="4fa98d0c-dc66-4728-b09b-a88e22e95094" providerId="ADAL" clId="{421BD283-33D8-4C6C-821F-71755E863FA2}" dt="2026-09-15T17:56:29.987" v="316" actId="22"/>
+        <pc:chgData name="Steve Mutrux" userId="4fa98d0c-dc66-4728-b09b-a88e22e95094" providerId="ADAL" clId="{421BD283-33D8-4C6C-821F-71755E863FA2}" dt="2026-09-15T18:28:13.983" v="658" actId="2710"/>
         <pc:sldMkLst>
           <pc:docMk/>
           <pc:sldMk cId="3893094920" sldId="268"/>
@@ -376,12 +408,20 @@
             <ac:spMk id="2" creationId="{5745D002-DA86-69FC-73CA-295EFFA512FA}"/>
           </ac:spMkLst>
         </pc:spChg>
-        <pc:spChg chg="add">
-          <ac:chgData name="Steve Mutrux" userId="4fa98d0c-dc66-4728-b09b-a88e22e95094" providerId="ADAL" clId="{421BD283-33D8-4C6C-821F-71755E863FA2}" dt="2026-09-15T17:56:29.987" v="316" actId="22"/>
+        <pc:spChg chg="add mod">
+          <ac:chgData name="Steve Mutrux" userId="4fa98d0c-dc66-4728-b09b-a88e22e95094" providerId="ADAL" clId="{421BD283-33D8-4C6C-821F-71755E863FA2}" dt="2026-09-15T18:09:18.852" v="595"/>
           <ac:spMkLst>
             <pc:docMk/>
             <pc:sldMk cId="3893094920" sldId="268"/>
             <ac:spMk id="4" creationId="{417B9F22-9B70-7974-674D-300CF5BE5CE0}"/>
+          </ac:spMkLst>
+        </pc:spChg>
+        <pc:spChg chg="add mod">
+          <ac:chgData name="Steve Mutrux" userId="4fa98d0c-dc66-4728-b09b-a88e22e95094" providerId="ADAL" clId="{421BD283-33D8-4C6C-821F-71755E863FA2}" dt="2026-09-15T18:28:13.983" v="658" actId="2710"/>
+          <ac:spMkLst>
+            <pc:docMk/>
+            <pc:sldMk cId="3893094920" sldId="268"/>
+            <ac:spMk id="5" creationId="{3F61CD58-FAF9-4198-A045-50D19461C2D1}"/>
           </ac:spMkLst>
         </pc:spChg>
       </pc:sldChg>
@@ -400,14 +440,30 @@
           </ac:spMkLst>
         </pc:spChg>
       </pc:sldChg>
-      <pc:sldChg chg="addSp modSp add mod ord">
-        <pc:chgData name="Steve Mutrux" userId="4fa98d0c-dc66-4728-b09b-a88e22e95094" providerId="ADAL" clId="{421BD283-33D8-4C6C-821F-71755E863FA2}" dt="2026-09-15T18:03:14.809" v="439" actId="20577"/>
+      <pc:sldChg chg="addSp delSp modSp add mod ord">
+        <pc:chgData name="Steve Mutrux" userId="4fa98d0c-dc66-4728-b09b-a88e22e95094" providerId="ADAL" clId="{421BD283-33D8-4C6C-821F-71755E863FA2}" dt="2026-09-15T18:28:18.737" v="659" actId="2710"/>
         <pc:sldMkLst>
           <pc:docMk/>
           <pc:sldMk cId="2049535269" sldId="270"/>
         </pc:sldMkLst>
+        <pc:spChg chg="mod">
+          <ac:chgData name="Steve Mutrux" userId="4fa98d0c-dc66-4728-b09b-a88e22e95094" providerId="ADAL" clId="{421BD283-33D8-4C6C-821F-71755E863FA2}" dt="2026-09-15T18:28:18.737" v="659" actId="2710"/>
+          <ac:spMkLst>
+            <pc:docMk/>
+            <pc:sldMk cId="2049535269" sldId="270"/>
+            <ac:spMk id="2" creationId="{28A7DA79-A174-410A-3A18-3A2891D7BA9C}"/>
+          </ac:spMkLst>
+        </pc:spChg>
+        <pc:spChg chg="add del mod">
+          <ac:chgData name="Steve Mutrux" userId="4fa98d0c-dc66-4728-b09b-a88e22e95094" providerId="ADAL" clId="{421BD283-33D8-4C6C-821F-71755E863FA2}" dt="2026-09-15T18:22:48.964" v="602" actId="478"/>
+          <ac:spMkLst>
+            <pc:docMk/>
+            <pc:sldMk cId="2049535269" sldId="270"/>
+            <ac:spMk id="3" creationId="{96714B1E-886B-EC76-37F9-55D406CB28A0}"/>
+          </ac:spMkLst>
+        </pc:spChg>
         <pc:spChg chg="add mod">
-          <ac:chgData name="Steve Mutrux" userId="4fa98d0c-dc66-4728-b09b-a88e22e95094" providerId="ADAL" clId="{421BD283-33D8-4C6C-821F-71755E863FA2}" dt="2026-09-15T18:03:14.809" v="439" actId="20577"/>
+          <ac:chgData name="Steve Mutrux" userId="4fa98d0c-dc66-4728-b09b-a88e22e95094" providerId="ADAL" clId="{421BD283-33D8-4C6C-821F-71755E863FA2}" dt="2026-09-15T18:23:22.995" v="608" actId="14100"/>
           <ac:spMkLst>
             <pc:docMk/>
             <pc:sldMk cId="2049535269" sldId="270"/>
@@ -4350,6 +4406,45 @@
           </a:p>
         </p:txBody>
       </p:sp>
+      <p:sp>
+        <p:nvSpPr>
+          <p:cNvPr id="4" name="TextBox 3">
+            <a:extLst>
+              <a:ext uri="{FF2B5EF4-FFF2-40B4-BE49-F238E27FC236}">
+                <a16:creationId xmlns:a16="http://schemas.microsoft.com/office/drawing/2014/main" id="{4179717D-B637-2B0D-B9EF-712078DD12DB}"/>
+              </a:ext>
+            </a:extLst>
+          </p:cNvPr>
+          <p:cNvSpPr txBox="1"/>
+          <p:nvPr/>
+        </p:nvSpPr>
+        <p:spPr>
+          <a:xfrm>
+            <a:off x="3048680" y="3128861"/>
+            <a:ext cx="6723969" cy="3139321"/>
+          </a:xfrm>
+          <a:prstGeom prst="rect">
+            <a:avLst/>
+          </a:prstGeom>
+          <a:noFill/>
+        </p:spPr>
+        <p:txBody>
+          <a:bodyPr wrap="square">
+            <a:spAutoFit/>
+          </a:bodyPr>
+          <a:lstStyle/>
+          <a:p>
+            <a:r>
+              <a:rPr lang="en-CA" sz="1800" b="0" i="0" dirty="0">
+                <a:effectLst/>
+                <a:latin typeface="+mn-lt"/>
+              </a:rPr>
+              <a:t>Mission At Adestria, we create, develop, and implement dependable software solutions that address practical issues. We empower companies to confidently expand operations, enhance customer experience, and streamline their online presence through responsive front end design, clean architecture, and efficient back end systems. Vision To be a trustworthy technology partner with a reputation for creative software development, accessible digital design, and technical accuracy. By transforming complex requirements into accessible, and valuable user experiences, we hope to impact the direction of online and application systems in the future.</a:t>
+            </a:r>
+            <a:endParaRPr lang="en-CA" dirty="0"/>
+          </a:p>
+        </p:txBody>
+      </p:sp>
     </p:spTree>
     <p:extLst>
       <p:ext uri="{BB962C8B-B14F-4D97-AF65-F5344CB8AC3E}">
@@ -4480,6 +4575,173 @@
           </a:p>
         </p:txBody>
       </p:sp>
+      <p:sp>
+        <p:nvSpPr>
+          <p:cNvPr id="5" name="TextBox 4">
+            <a:extLst>
+              <a:ext uri="{FF2B5EF4-FFF2-40B4-BE49-F238E27FC236}">
+                <a16:creationId xmlns:a16="http://schemas.microsoft.com/office/drawing/2014/main" id="{CC915FDB-49B9-2B7E-78DD-B03D9C91E7BB}"/>
+              </a:ext>
+            </a:extLst>
+          </p:cNvPr>
+          <p:cNvSpPr txBox="1"/>
+          <p:nvPr/>
+        </p:nvSpPr>
+        <p:spPr>
+          <a:xfrm>
+            <a:off x="440111" y="376344"/>
+            <a:ext cx="1588897" cy="5997476"/>
+          </a:xfrm>
+          <a:prstGeom prst="rect">
+            <a:avLst/>
+          </a:prstGeom>
+          <a:noFill/>
+        </p:spPr>
+        <p:txBody>
+          <a:bodyPr wrap="none" rtlCol="0">
+            <a:spAutoFit/>
+          </a:bodyPr>
+          <a:lstStyle/>
+          <a:p>
+            <a:pPr>
+              <a:lnSpc>
+                <a:spcPct val="200000"/>
+              </a:lnSpc>
+            </a:pPr>
+            <a:r>
+              <a:rPr lang="en-CA" sz="2800" dirty="0">
+                <a:latin typeface="Kumbh Sans" pitchFamily="2" charset="0"/>
+                <a:cs typeface="Kumbh Sans" pitchFamily="2" charset="0"/>
+              </a:rPr>
+              <a:t>Adestria</a:t>
+            </a:r>
+          </a:p>
+          <a:p>
+            <a:pPr>
+              <a:lnSpc>
+                <a:spcPct val="200000"/>
+              </a:lnSpc>
+            </a:pPr>
+            <a:r>
+              <a:rPr lang="en-CA" sz="2800" dirty="0">
+                <a:latin typeface="Kumbh Sans" pitchFamily="2" charset="0"/>
+                <a:cs typeface="Kumbh Sans" pitchFamily="2" charset="0"/>
+              </a:rPr>
+              <a:t>    Jack</a:t>
+            </a:r>
+          </a:p>
+          <a:p>
+            <a:pPr>
+              <a:lnSpc>
+                <a:spcPct val="200000"/>
+              </a:lnSpc>
+            </a:pPr>
+            <a:r>
+              <a:rPr lang="en-CA" sz="2800" dirty="0">
+                <a:solidFill>
+                  <a:schemeClr val="tx1">
+                    <a:lumMod val="25000"/>
+                    <a:lumOff val="75000"/>
+                  </a:schemeClr>
+                </a:solidFill>
+                <a:latin typeface="Kumbh Sans" pitchFamily="2" charset="0"/>
+                <a:cs typeface="Kumbh Sans" pitchFamily="2" charset="0"/>
+              </a:rPr>
+              <a:t>    Kayla</a:t>
+            </a:r>
+          </a:p>
+          <a:p>
+            <a:pPr>
+              <a:lnSpc>
+                <a:spcPct val="200000"/>
+              </a:lnSpc>
+            </a:pPr>
+            <a:r>
+              <a:rPr lang="en-CA" sz="2800" dirty="0">
+                <a:solidFill>
+                  <a:schemeClr val="tx1">
+                    <a:lumMod val="25000"/>
+                    <a:lumOff val="75000"/>
+                  </a:schemeClr>
+                </a:solidFill>
+                <a:latin typeface="Kumbh Sans" pitchFamily="2" charset="0"/>
+                <a:cs typeface="Kumbh Sans" pitchFamily="2" charset="0"/>
+              </a:rPr>
+              <a:t>    Edin</a:t>
+            </a:r>
+          </a:p>
+          <a:p>
+            <a:pPr>
+              <a:lnSpc>
+                <a:spcPct val="200000"/>
+              </a:lnSpc>
+            </a:pPr>
+            <a:r>
+              <a:rPr lang="en-CA" sz="2800" dirty="0">
+                <a:solidFill>
+                  <a:schemeClr val="tx1">
+                    <a:lumMod val="25000"/>
+                    <a:lumOff val="75000"/>
+                  </a:schemeClr>
+                </a:solidFill>
+                <a:latin typeface="Kumbh Sans" pitchFamily="2" charset="0"/>
+                <a:cs typeface="Kumbh Sans" pitchFamily="2" charset="0"/>
+              </a:rPr>
+              <a:t>    Jake</a:t>
+            </a:r>
+          </a:p>
+          <a:p>
+            <a:pPr>
+              <a:lnSpc>
+                <a:spcPct val="200000"/>
+              </a:lnSpc>
+            </a:pPr>
+            <a:r>
+              <a:rPr lang="en-CA" sz="2800" dirty="0">
+                <a:solidFill>
+                  <a:schemeClr val="tx1">
+                    <a:lumMod val="25000"/>
+                    <a:lumOff val="75000"/>
+                  </a:schemeClr>
+                </a:solidFill>
+                <a:latin typeface="Kumbh Sans" pitchFamily="2" charset="0"/>
+                <a:cs typeface="Kumbh Sans" pitchFamily="2" charset="0"/>
+              </a:rPr>
+              <a:t>    Steve</a:t>
+            </a:r>
+          </a:p>
+          <a:p>
+            <a:pPr>
+              <a:lnSpc>
+                <a:spcPct val="200000"/>
+              </a:lnSpc>
+            </a:pPr>
+            <a:r>
+              <a:rPr lang="en-CA" sz="2800">
+                <a:solidFill>
+                  <a:schemeClr val="tx1">
+                    <a:lumMod val="25000"/>
+                    <a:lumOff val="75000"/>
+                  </a:schemeClr>
+                </a:solidFill>
+                <a:latin typeface="Kumbh Sans" pitchFamily="2" charset="0"/>
+                <a:cs typeface="Kumbh Sans" pitchFamily="2" charset="0"/>
+              </a:rPr>
+              <a:t>Project</a:t>
+            </a:r>
+            <a:endParaRPr lang="en-CA" sz="2800" dirty="0">
+              <a:solidFill>
+                <a:schemeClr val="tx1">
+                  <a:lumMod val="25000"/>
+                  <a:lumOff val="75000"/>
+                </a:schemeClr>
+              </a:solidFill>
+              <a:latin typeface="Kumbh Sans" pitchFamily="2" charset="0"/>
+              <a:cs typeface="Kumbh Sans" pitchFamily="2" charset="0"/>
+            </a:endParaRPr>
+          </a:p>
+        </p:txBody>
+      </p:sp>
     </p:spTree>
     <p:extLst>
       <p:ext uri="{BB962C8B-B14F-4D97-AF65-F5344CB8AC3E}">
@@ -4610,6 +4872,129 @@
           </a:p>
         </p:txBody>
       </p:sp>
+      <p:sp>
+        <p:nvSpPr>
+          <p:cNvPr id="5" name="TextBox 4">
+            <a:extLst>
+              <a:ext uri="{FF2B5EF4-FFF2-40B4-BE49-F238E27FC236}">
+                <a16:creationId xmlns:a16="http://schemas.microsoft.com/office/drawing/2014/main" id="{F48311E2-530A-88F3-A0F2-5F0110403BE1}"/>
+              </a:ext>
+            </a:extLst>
+          </p:cNvPr>
+          <p:cNvSpPr txBox="1"/>
+          <p:nvPr/>
+        </p:nvSpPr>
+        <p:spPr>
+          <a:xfrm>
+            <a:off x="480933" y="0"/>
+            <a:ext cx="1144865" cy="4273927"/>
+          </a:xfrm>
+          <a:prstGeom prst="rect">
+            <a:avLst/>
+          </a:prstGeom>
+          <a:noFill/>
+        </p:spPr>
+        <p:txBody>
+          <a:bodyPr wrap="none" rtlCol="0">
+            <a:spAutoFit/>
+          </a:bodyPr>
+          <a:lstStyle/>
+          <a:p>
+            <a:pPr>
+              <a:lnSpc>
+                <a:spcPct val="200000"/>
+              </a:lnSpc>
+            </a:pPr>
+            <a:r>
+              <a:rPr lang="en-CA" sz="2800" dirty="0">
+                <a:solidFill>
+                  <a:schemeClr val="tx1">
+                    <a:lumMod val="25000"/>
+                    <a:lumOff val="75000"/>
+                  </a:schemeClr>
+                </a:solidFill>
+                <a:latin typeface="Kumbh Sans" pitchFamily="2" charset="0"/>
+                <a:cs typeface="Kumbh Sans" pitchFamily="2" charset="0"/>
+              </a:rPr>
+              <a:t>Jack</a:t>
+            </a:r>
+          </a:p>
+          <a:p>
+            <a:pPr>
+              <a:lnSpc>
+                <a:spcPct val="200000"/>
+              </a:lnSpc>
+            </a:pPr>
+            <a:r>
+              <a:rPr lang="en-CA" sz="2800" dirty="0">
+                <a:latin typeface="Kumbh Sans" pitchFamily="2" charset="0"/>
+                <a:cs typeface="Kumbh Sans" pitchFamily="2" charset="0"/>
+              </a:rPr>
+              <a:t>Kayla</a:t>
+            </a:r>
+          </a:p>
+          <a:p>
+            <a:pPr>
+              <a:lnSpc>
+                <a:spcPct val="200000"/>
+              </a:lnSpc>
+            </a:pPr>
+            <a:r>
+              <a:rPr lang="en-CA" sz="2800" dirty="0">
+                <a:solidFill>
+                  <a:schemeClr val="tx1">
+                    <a:lumMod val="25000"/>
+                    <a:lumOff val="75000"/>
+                  </a:schemeClr>
+                </a:solidFill>
+                <a:latin typeface="Kumbh Sans" pitchFamily="2" charset="0"/>
+                <a:cs typeface="Kumbh Sans" pitchFamily="2" charset="0"/>
+              </a:rPr>
+              <a:t>Edin</a:t>
+            </a:r>
+          </a:p>
+          <a:p>
+            <a:pPr>
+              <a:lnSpc>
+                <a:spcPct val="200000"/>
+              </a:lnSpc>
+            </a:pPr>
+            <a:r>
+              <a:rPr lang="en-CA" sz="2800" dirty="0">
+                <a:solidFill>
+                  <a:schemeClr val="tx1">
+                    <a:lumMod val="25000"/>
+                    <a:lumOff val="75000"/>
+                  </a:schemeClr>
+                </a:solidFill>
+                <a:latin typeface="Kumbh Sans" pitchFamily="2" charset="0"/>
+                <a:cs typeface="Kumbh Sans" pitchFamily="2" charset="0"/>
+              </a:rPr>
+              <a:t>Jake</a:t>
+            </a:r>
+          </a:p>
+          <a:p>
+            <a:pPr>
+              <a:lnSpc>
+                <a:spcPct val="200000"/>
+              </a:lnSpc>
+            </a:pPr>
+            <a:r>
+              <a:rPr lang="en-CA" sz="2800" dirty="0">
+                <a:solidFill>
+                  <a:schemeClr val="tx1">
+                    <a:lumMod val="25000"/>
+                    <a:lumOff val="75000"/>
+                  </a:schemeClr>
+                </a:solidFill>
+                <a:latin typeface="Kumbh Sans" pitchFamily="2" charset="0"/>
+                <a:cs typeface="Kumbh Sans" pitchFamily="2" charset="0"/>
+              </a:rPr>
+              <a:t>Steve</a:t>
+            </a:r>
+          </a:p>
+        </p:txBody>
+      </p:sp>
     </p:spTree>
     <p:extLst>
       <p:ext uri="{BB962C8B-B14F-4D97-AF65-F5344CB8AC3E}">
@@ -4740,6 +5125,129 @@
           </a:p>
         </p:txBody>
       </p:sp>
+      <p:sp>
+        <p:nvSpPr>
+          <p:cNvPr id="5" name="TextBox 4">
+            <a:extLst>
+              <a:ext uri="{FF2B5EF4-FFF2-40B4-BE49-F238E27FC236}">
+                <a16:creationId xmlns:a16="http://schemas.microsoft.com/office/drawing/2014/main" id="{12223178-2D4D-92AC-AE08-E324647AB193}"/>
+              </a:ext>
+            </a:extLst>
+          </p:cNvPr>
+          <p:cNvSpPr txBox="1"/>
+          <p:nvPr/>
+        </p:nvSpPr>
+        <p:spPr>
+          <a:xfrm>
+            <a:off x="480933" y="0"/>
+            <a:ext cx="1144865" cy="4273927"/>
+          </a:xfrm>
+          <a:prstGeom prst="rect">
+            <a:avLst/>
+          </a:prstGeom>
+          <a:noFill/>
+        </p:spPr>
+        <p:txBody>
+          <a:bodyPr wrap="none" rtlCol="0">
+            <a:spAutoFit/>
+          </a:bodyPr>
+          <a:lstStyle/>
+          <a:p>
+            <a:pPr>
+              <a:lnSpc>
+                <a:spcPct val="200000"/>
+              </a:lnSpc>
+            </a:pPr>
+            <a:r>
+              <a:rPr lang="en-CA" sz="2800" dirty="0">
+                <a:solidFill>
+                  <a:schemeClr val="tx1">
+                    <a:lumMod val="25000"/>
+                    <a:lumOff val="75000"/>
+                  </a:schemeClr>
+                </a:solidFill>
+                <a:latin typeface="Kumbh Sans" pitchFamily="2" charset="0"/>
+                <a:cs typeface="Kumbh Sans" pitchFamily="2" charset="0"/>
+              </a:rPr>
+              <a:t>Jack</a:t>
+            </a:r>
+          </a:p>
+          <a:p>
+            <a:pPr>
+              <a:lnSpc>
+                <a:spcPct val="200000"/>
+              </a:lnSpc>
+            </a:pPr>
+            <a:r>
+              <a:rPr lang="en-CA" sz="2800" dirty="0">
+                <a:solidFill>
+                  <a:schemeClr val="tx1">
+                    <a:lumMod val="25000"/>
+                    <a:lumOff val="75000"/>
+                  </a:schemeClr>
+                </a:solidFill>
+                <a:latin typeface="Kumbh Sans" pitchFamily="2" charset="0"/>
+                <a:cs typeface="Kumbh Sans" pitchFamily="2" charset="0"/>
+              </a:rPr>
+              <a:t>Kayla</a:t>
+            </a:r>
+          </a:p>
+          <a:p>
+            <a:pPr>
+              <a:lnSpc>
+                <a:spcPct val="200000"/>
+              </a:lnSpc>
+            </a:pPr>
+            <a:r>
+              <a:rPr lang="en-CA" sz="2800" dirty="0">
+                <a:latin typeface="Kumbh Sans" pitchFamily="2" charset="0"/>
+                <a:cs typeface="Kumbh Sans" pitchFamily="2" charset="0"/>
+              </a:rPr>
+              <a:t>Edin</a:t>
+            </a:r>
+          </a:p>
+          <a:p>
+            <a:pPr>
+              <a:lnSpc>
+                <a:spcPct val="200000"/>
+              </a:lnSpc>
+            </a:pPr>
+            <a:r>
+              <a:rPr lang="en-CA" sz="2800" dirty="0">
+                <a:solidFill>
+                  <a:schemeClr val="tx1">
+                    <a:lumMod val="25000"/>
+                    <a:lumOff val="75000"/>
+                  </a:schemeClr>
+                </a:solidFill>
+                <a:latin typeface="Kumbh Sans" pitchFamily="2" charset="0"/>
+                <a:cs typeface="Kumbh Sans" pitchFamily="2" charset="0"/>
+              </a:rPr>
+              <a:t>Jake</a:t>
+            </a:r>
+          </a:p>
+          <a:p>
+            <a:pPr>
+              <a:lnSpc>
+                <a:spcPct val="200000"/>
+              </a:lnSpc>
+            </a:pPr>
+            <a:r>
+              <a:rPr lang="en-CA" sz="2800" dirty="0">
+                <a:solidFill>
+                  <a:schemeClr val="tx1">
+                    <a:lumMod val="25000"/>
+                    <a:lumOff val="75000"/>
+                  </a:schemeClr>
+                </a:solidFill>
+                <a:latin typeface="Kumbh Sans" pitchFamily="2" charset="0"/>
+                <a:cs typeface="Kumbh Sans" pitchFamily="2" charset="0"/>
+              </a:rPr>
+              <a:t>Steve</a:t>
+            </a:r>
+          </a:p>
+        </p:txBody>
+      </p:sp>
     </p:spTree>
     <p:extLst>
       <p:ext uri="{BB962C8B-B14F-4D97-AF65-F5344CB8AC3E}">
@@ -4826,7 +5334,7 @@
         <p:spPr>
           <a:xfrm>
             <a:off x="4407954" y="3267475"/>
-            <a:ext cx="2050818" cy="923330"/>
+            <a:ext cx="3404137" cy="923330"/>
           </a:xfrm>
           <a:prstGeom prst="rect">
             <a:avLst/>
@@ -4865,7 +5373,130 @@
             </a:pPr>
             <a:r>
               <a:rPr lang="en-CA" dirty="0"/>
-              <a:t>Expectations</a:t>
+              <a:t>Expectations to get out of this</a:t>
+            </a:r>
+          </a:p>
+        </p:txBody>
+      </p:sp>
+      <p:sp>
+        <p:nvSpPr>
+          <p:cNvPr id="5" name="TextBox 4">
+            <a:extLst>
+              <a:ext uri="{FF2B5EF4-FFF2-40B4-BE49-F238E27FC236}">
+                <a16:creationId xmlns:a16="http://schemas.microsoft.com/office/drawing/2014/main" id="{3F61CD58-FAF9-4198-A045-50D19461C2D1}"/>
+              </a:ext>
+            </a:extLst>
+          </p:cNvPr>
+          <p:cNvSpPr txBox="1"/>
+          <p:nvPr/>
+        </p:nvSpPr>
+        <p:spPr>
+          <a:xfrm>
+            <a:off x="480933" y="0"/>
+            <a:ext cx="1144865" cy="4273927"/>
+          </a:xfrm>
+          <a:prstGeom prst="rect">
+            <a:avLst/>
+          </a:prstGeom>
+          <a:noFill/>
+        </p:spPr>
+        <p:txBody>
+          <a:bodyPr wrap="none" rtlCol="0">
+            <a:spAutoFit/>
+          </a:bodyPr>
+          <a:lstStyle/>
+          <a:p>
+            <a:pPr>
+              <a:lnSpc>
+                <a:spcPct val="200000"/>
+              </a:lnSpc>
+            </a:pPr>
+            <a:r>
+              <a:rPr lang="en-CA" sz="2800" dirty="0">
+                <a:solidFill>
+                  <a:schemeClr val="tx1">
+                    <a:lumMod val="25000"/>
+                    <a:lumOff val="75000"/>
+                  </a:schemeClr>
+                </a:solidFill>
+                <a:latin typeface="Kumbh Sans" pitchFamily="2" charset="0"/>
+                <a:cs typeface="Kumbh Sans" pitchFamily="2" charset="0"/>
+              </a:rPr>
+              <a:t>Jack</a:t>
+            </a:r>
+          </a:p>
+          <a:p>
+            <a:pPr>
+              <a:lnSpc>
+                <a:spcPct val="200000"/>
+              </a:lnSpc>
+            </a:pPr>
+            <a:r>
+              <a:rPr lang="en-CA" sz="2800" dirty="0">
+                <a:solidFill>
+                  <a:schemeClr val="tx1">
+                    <a:lumMod val="25000"/>
+                    <a:lumOff val="75000"/>
+                  </a:schemeClr>
+                </a:solidFill>
+                <a:latin typeface="Kumbh Sans" pitchFamily="2" charset="0"/>
+                <a:cs typeface="Kumbh Sans" pitchFamily="2" charset="0"/>
+              </a:rPr>
+              <a:t>Kayla</a:t>
+            </a:r>
+          </a:p>
+          <a:p>
+            <a:pPr>
+              <a:lnSpc>
+                <a:spcPct val="200000"/>
+              </a:lnSpc>
+            </a:pPr>
+            <a:r>
+              <a:rPr lang="en-CA" sz="2800" dirty="0">
+                <a:solidFill>
+                  <a:schemeClr val="tx1">
+                    <a:lumMod val="25000"/>
+                    <a:lumOff val="75000"/>
+                  </a:schemeClr>
+                </a:solidFill>
+                <a:latin typeface="Kumbh Sans" pitchFamily="2" charset="0"/>
+                <a:cs typeface="Kumbh Sans" pitchFamily="2" charset="0"/>
+              </a:rPr>
+              <a:t>Edin</a:t>
+            </a:r>
+          </a:p>
+          <a:p>
+            <a:pPr>
+              <a:lnSpc>
+                <a:spcPct val="200000"/>
+              </a:lnSpc>
+            </a:pPr>
+            <a:r>
+              <a:rPr lang="en-CA" sz="2800" dirty="0">
+                <a:latin typeface="Kumbh Sans" pitchFamily="2" charset="0"/>
+                <a:cs typeface="Kumbh Sans" pitchFamily="2" charset="0"/>
+              </a:rPr>
+              <a:t>Jake</a:t>
+            </a:r>
+          </a:p>
+          <a:p>
+            <a:pPr>
+              <a:lnSpc>
+                <a:spcPct val="200000"/>
+              </a:lnSpc>
+            </a:pPr>
+            <a:r>
+              <a:rPr lang="en-CA" sz="2800" dirty="0">
+                <a:solidFill>
+                  <a:schemeClr val="tx1">
+                    <a:lumMod val="25000"/>
+                    <a:lumOff val="75000"/>
+                  </a:schemeClr>
+                </a:solidFill>
+                <a:latin typeface="Kumbh Sans" pitchFamily="2" charset="0"/>
+                <a:cs typeface="Kumbh Sans" pitchFamily="2" charset="0"/>
+              </a:rPr>
+              <a:t>Steve</a:t>
             </a:r>
           </a:p>
         </p:txBody>
@@ -4920,8 +5551,8 @@
         </p:nvSpPr>
         <p:spPr>
           <a:xfrm>
-            <a:off x="4506686" y="2759529"/>
-            <a:ext cx="734047" cy="369332"/>
+            <a:off x="480933" y="0"/>
+            <a:ext cx="1144865" cy="4273927"/>
           </a:xfrm>
           <a:prstGeom prst="rect">
             <a:avLst/>
@@ -4934,8 +5565,96 @@
           </a:bodyPr>
           <a:lstStyle/>
           <a:p>
-            <a:r>
-              <a:rPr lang="en-CA" dirty="0"/>
+            <a:pPr>
+              <a:lnSpc>
+                <a:spcPct val="200000"/>
+              </a:lnSpc>
+            </a:pPr>
+            <a:r>
+              <a:rPr lang="en-CA" sz="2800" dirty="0">
+                <a:solidFill>
+                  <a:schemeClr val="tx1">
+                    <a:lumMod val="25000"/>
+                    <a:lumOff val="75000"/>
+                  </a:schemeClr>
+                </a:solidFill>
+                <a:latin typeface="Kumbh Sans" pitchFamily="2" charset="0"/>
+                <a:cs typeface="Kumbh Sans" pitchFamily="2" charset="0"/>
+              </a:rPr>
+              <a:t>Jack</a:t>
+            </a:r>
+          </a:p>
+          <a:p>
+            <a:pPr>
+              <a:lnSpc>
+                <a:spcPct val="200000"/>
+              </a:lnSpc>
+            </a:pPr>
+            <a:r>
+              <a:rPr lang="en-CA" sz="2800" dirty="0">
+                <a:solidFill>
+                  <a:schemeClr val="tx1">
+                    <a:lumMod val="25000"/>
+                    <a:lumOff val="75000"/>
+                  </a:schemeClr>
+                </a:solidFill>
+                <a:latin typeface="Kumbh Sans" pitchFamily="2" charset="0"/>
+                <a:cs typeface="Kumbh Sans" pitchFamily="2" charset="0"/>
+              </a:rPr>
+              <a:t>Kayla</a:t>
+            </a:r>
+          </a:p>
+          <a:p>
+            <a:pPr>
+              <a:lnSpc>
+                <a:spcPct val="200000"/>
+              </a:lnSpc>
+            </a:pPr>
+            <a:r>
+              <a:rPr lang="en-CA" sz="2800" dirty="0">
+                <a:solidFill>
+                  <a:schemeClr val="tx1">
+                    <a:lumMod val="25000"/>
+                    <a:lumOff val="75000"/>
+                  </a:schemeClr>
+                </a:solidFill>
+                <a:latin typeface="Kumbh Sans" pitchFamily="2" charset="0"/>
+                <a:cs typeface="Kumbh Sans" pitchFamily="2" charset="0"/>
+              </a:rPr>
+              <a:t>Edin</a:t>
+            </a:r>
+          </a:p>
+          <a:p>
+            <a:pPr>
+              <a:lnSpc>
+                <a:spcPct val="200000"/>
+              </a:lnSpc>
+            </a:pPr>
+            <a:r>
+              <a:rPr lang="en-CA" sz="2800" dirty="0">
+                <a:solidFill>
+                  <a:schemeClr val="tx1">
+                    <a:lumMod val="25000"/>
+                    <a:lumOff val="75000"/>
+                  </a:schemeClr>
+                </a:solidFill>
+                <a:latin typeface="Kumbh Sans" pitchFamily="2" charset="0"/>
+                <a:cs typeface="Kumbh Sans" pitchFamily="2" charset="0"/>
+              </a:rPr>
+              <a:t>Jake</a:t>
+            </a:r>
+          </a:p>
+          <a:p>
+            <a:pPr>
+              <a:lnSpc>
+                <a:spcPct val="200000"/>
+              </a:lnSpc>
+            </a:pPr>
+            <a:r>
+              <a:rPr lang="en-CA" sz="2800" dirty="0">
+                <a:latin typeface="Kumbh Sans" pitchFamily="2" charset="0"/>
+                <a:cs typeface="Kumbh Sans" pitchFamily="2" charset="0"/>
+              </a:rPr>
               <a:t>Steve</a:t>
             </a:r>
           </a:p>
@@ -4955,8 +5674,8 @@
         </p:nvSpPr>
         <p:spPr>
           <a:xfrm>
-            <a:off x="4407954" y="3267475"/>
-            <a:ext cx="9100376" cy="923330"/>
+            <a:off x="4163786" y="3429000"/>
+            <a:ext cx="7705357" cy="1200329"/>
           </a:xfrm>
           <a:prstGeom prst="rect">
             <a:avLst/>
@@ -4964,7 +5683,7 @@
           <a:noFill/>
         </p:spPr>
         <p:txBody>
-          <a:bodyPr wrap="none" rtlCol="0">
+          <a:bodyPr wrap="square" rtlCol="0">
             <a:spAutoFit/>
           </a:bodyPr>
           <a:lstStyle/>
@@ -4974,8 +5693,11 @@
               <a:buChar char="-"/>
             </a:pPr>
             <a:r>
-              <a:rPr lang="en-CA" dirty="0"/>
-              <a:t>Studied at Brock University, 3 years web dev experience, 1 year embedded firmware dev</a:t>
+              <a:rPr lang="en-CA" dirty="0">
+                <a:latin typeface="Kumbh Sans" pitchFamily="2" charset="0"/>
+                <a:cs typeface="Kumbh Sans" pitchFamily="2" charset="0"/>
+              </a:rPr>
+              <a:t>Studied Comp Sci at Brock University, 3 years web dev experience, 1 year embedded firmware dev</a:t>
             </a:r>
           </a:p>
           <a:p>
@@ -4984,8 +5706,11 @@
               <a:buChar char="-"/>
             </a:pPr>
             <a:r>
-              <a:rPr lang="en-CA" dirty="0"/>
-              <a:t>Role</a:t>
+              <a:rPr lang="en-CA" dirty="0">
+                <a:latin typeface="Kumbh Sans" pitchFamily="2" charset="0"/>
+                <a:cs typeface="Kumbh Sans" pitchFamily="2" charset="0"/>
+              </a:rPr>
+              <a:t>Admin person, making ppt, compiling doc package, …</a:t>
             </a:r>
           </a:p>
           <a:p>
@@ -4994,8 +5719,11 @@
               <a:buChar char="-"/>
             </a:pPr>
             <a:r>
-              <a:rPr lang="en-CA" dirty="0"/>
-              <a:t>Expectations to get out of this</a:t>
+              <a:rPr lang="en-CA" dirty="0">
+                <a:latin typeface="Kumbh Sans" pitchFamily="2" charset="0"/>
+                <a:cs typeface="Kumbh Sans" pitchFamily="2" charset="0"/>
+              </a:rPr>
+              <a:t>Learning to let other take the wheel and grow in their own domain</a:t>
             </a:r>
           </a:p>
         </p:txBody>

--- a/Deliverables/Presentation1.pptx
+++ b/Deliverables/Presentation1.pptx
@@ -4,22 +4,26 @@
   <p:sldMasterIdLst>
     <p:sldMasterId id="2147483648" r:id="rId1"/>
   </p:sldMasterIdLst>
+  <p:notesMasterIdLst>
+    <p:notesMasterId r:id="rId18"/>
+  </p:notesMasterIdLst>
   <p:sldIdLst>
     <p:sldId id="256" r:id="rId2"/>
     <p:sldId id="257" r:id="rId3"/>
     <p:sldId id="258" r:id="rId4"/>
-    <p:sldId id="265" r:id="rId5"/>
-    <p:sldId id="266" r:id="rId6"/>
-    <p:sldId id="267" r:id="rId7"/>
-    <p:sldId id="268" r:id="rId8"/>
-    <p:sldId id="270" r:id="rId9"/>
-    <p:sldId id="260" r:id="rId10"/>
-    <p:sldId id="272" r:id="rId11"/>
-    <p:sldId id="261" r:id="rId12"/>
-    <p:sldId id="262" r:id="rId13"/>
-    <p:sldId id="269" r:id="rId14"/>
-    <p:sldId id="263" r:id="rId15"/>
-    <p:sldId id="271" r:id="rId16"/>
+    <p:sldId id="274" r:id="rId5"/>
+    <p:sldId id="273" r:id="rId6"/>
+    <p:sldId id="266" r:id="rId7"/>
+    <p:sldId id="267" r:id="rId8"/>
+    <p:sldId id="268" r:id="rId9"/>
+    <p:sldId id="270" r:id="rId10"/>
+    <p:sldId id="260" r:id="rId11"/>
+    <p:sldId id="272" r:id="rId12"/>
+    <p:sldId id="261" r:id="rId13"/>
+    <p:sldId id="262" r:id="rId14"/>
+    <p:sldId id="269" r:id="rId15"/>
+    <p:sldId id="263" r:id="rId16"/>
+    <p:sldId id="271" r:id="rId17"/>
   </p:sldIdLst>
   <p:sldSz cx="12192000" cy="6858000"/>
   <p:notesSz cx="6858000" cy="9144000"/>
@@ -129,7 +133,7 @@
 <file path=ppt/revisionInfo.xml><?xml version="1.0" encoding="utf-8"?>
 <p1510:revInfo xmlns:a="http://schemas.openxmlformats.org/drawingml/2006/main" xmlns:r="http://schemas.openxmlformats.org/officeDocument/2006/relationships" xmlns:p1510="http://schemas.microsoft.com/office/powerpoint/2015/10/main">
   <p1510:revLst>
-    <p1510:client id="{EADFFEA0-CC63-45EF-97E4-5A80CDB68182}" v="24" dt="2026-09-15T18:22:47.122"/>
+    <p1510:client id="{EADFFEA0-CC63-45EF-97E4-5A80CDB68182}" v="660" dt="2026-09-16T02:47:48.323"/>
   </p1510:revLst>
 </p1510:revInfo>
 </file>
@@ -139,18 +143,18 @@
   <pc:docChgLst>
     <pc:chgData name="Steve Mutrux" userId="4fa98d0c-dc66-4728-b09b-a88e22e95094" providerId="ADAL" clId="{421BD283-33D8-4C6C-821F-71755E863FA2}"/>
     <pc:docChg chg="undo custSel addSld delSld modSld sldOrd">
-      <pc:chgData name="Steve Mutrux" userId="4fa98d0c-dc66-4728-b09b-a88e22e95094" providerId="ADAL" clId="{421BD283-33D8-4C6C-821F-71755E863FA2}" dt="2026-09-15T18:30:11.896" v="704" actId="20577"/>
+      <pc:chgData name="Steve Mutrux" userId="4fa98d0c-dc66-4728-b09b-a88e22e95094" providerId="ADAL" clId="{421BD283-33D8-4C6C-821F-71755E863FA2}" dt="2026-09-16T02:47:48.323" v="3073"/>
       <pc:docMkLst>
         <pc:docMk/>
       </pc:docMkLst>
       <pc:sldChg chg="addSp modSp mod">
-        <pc:chgData name="Steve Mutrux" userId="4fa98d0c-dc66-4728-b09b-a88e22e95094" providerId="ADAL" clId="{421BD283-33D8-4C6C-821F-71755E863FA2}" dt="2026-09-15T17:24:15.655" v="135" actId="403"/>
+        <pc:chgData name="Steve Mutrux" userId="4fa98d0c-dc66-4728-b09b-a88e22e95094" providerId="ADAL" clId="{421BD283-33D8-4C6C-821F-71755E863FA2}" dt="2026-09-16T00:47:37.043" v="924" actId="2711"/>
         <pc:sldMkLst>
           <pc:docMk/>
           <pc:sldMk cId="1072592071" sldId="256"/>
         </pc:sldMkLst>
         <pc:spChg chg="add mod">
-          <ac:chgData name="Steve Mutrux" userId="4fa98d0c-dc66-4728-b09b-a88e22e95094" providerId="ADAL" clId="{421BD283-33D8-4C6C-821F-71755E863FA2}" dt="2026-09-15T17:24:02.469" v="111" actId="1076"/>
+          <ac:chgData name="Steve Mutrux" userId="4fa98d0c-dc66-4728-b09b-a88e22e95094" providerId="ADAL" clId="{421BD283-33D8-4C6C-821F-71755E863FA2}" dt="2026-09-16T00:47:37.043" v="924" actId="2711"/>
           <ac:spMkLst>
             <pc:docMk/>
             <pc:sldMk cId="1072592071" sldId="256"/>
@@ -158,7 +162,7 @@
           </ac:spMkLst>
         </pc:spChg>
         <pc:spChg chg="add mod">
-          <ac:chgData name="Steve Mutrux" userId="4fa98d0c-dc66-4728-b09b-a88e22e95094" providerId="ADAL" clId="{421BD283-33D8-4C6C-821F-71755E863FA2}" dt="2026-09-15T17:22:28.853" v="69" actId="20577"/>
+          <ac:chgData name="Steve Mutrux" userId="4fa98d0c-dc66-4728-b09b-a88e22e95094" providerId="ADAL" clId="{421BD283-33D8-4C6C-821F-71755E863FA2}" dt="2026-09-16T00:47:37.043" v="924" actId="2711"/>
           <ac:spMkLst>
             <pc:docMk/>
             <pc:sldMk cId="1072592071" sldId="256"/>
@@ -166,7 +170,7 @@
           </ac:spMkLst>
         </pc:spChg>
         <pc:spChg chg="add mod">
-          <ac:chgData name="Steve Mutrux" userId="4fa98d0c-dc66-4728-b09b-a88e22e95094" providerId="ADAL" clId="{421BD283-33D8-4C6C-821F-71755E863FA2}" dt="2026-09-15T17:24:15.655" v="135" actId="403"/>
+          <ac:chgData name="Steve Mutrux" userId="4fa98d0c-dc66-4728-b09b-a88e22e95094" providerId="ADAL" clId="{421BD283-33D8-4C6C-821F-71755E863FA2}" dt="2026-09-16T00:47:37.043" v="924" actId="2711"/>
           <ac:spMkLst>
             <pc:docMk/>
             <pc:sldMk cId="1072592071" sldId="256"/>
@@ -174,29 +178,141 @@
           </ac:spMkLst>
         </pc:spChg>
       </pc:sldChg>
-      <pc:sldChg chg="modSp add mod">
-        <pc:chgData name="Steve Mutrux" userId="4fa98d0c-dc66-4728-b09b-a88e22e95094" providerId="ADAL" clId="{421BD283-33D8-4C6C-821F-71755E863FA2}" dt="2026-09-15T17:22:42.549" v="76" actId="20577"/>
+      <pc:sldChg chg="addSp delSp modSp add mod addAnim delAnim modAnim">
+        <pc:chgData name="Steve Mutrux" userId="4fa98d0c-dc66-4728-b09b-a88e22e95094" providerId="ADAL" clId="{421BD283-33D8-4C6C-821F-71755E863FA2}" dt="2026-09-16T02:36:33.111" v="3040" actId="167"/>
         <pc:sldMkLst>
           <pc:docMk/>
           <pc:sldMk cId="2816041415" sldId="257"/>
         </pc:sldMkLst>
-        <pc:spChg chg="mod">
-          <ac:chgData name="Steve Mutrux" userId="4fa98d0c-dc66-4728-b09b-a88e22e95094" providerId="ADAL" clId="{421BD283-33D8-4C6C-821F-71755E863FA2}" dt="2026-09-15T17:22:42.549" v="76" actId="20577"/>
+        <pc:spChg chg="del mod">
+          <ac:chgData name="Steve Mutrux" userId="4fa98d0c-dc66-4728-b09b-a88e22e95094" providerId="ADAL" clId="{421BD283-33D8-4C6C-821F-71755E863FA2}" dt="2026-09-16T00:46:31.976" v="922" actId="478"/>
           <ac:spMkLst>
             <pc:docMk/>
             <pc:sldMk cId="2816041415" sldId="257"/>
             <ac:spMk id="2" creationId="{46678232-D860-76CE-77D5-D9F21C5850EF}"/>
           </ac:spMkLst>
         </pc:spChg>
+        <pc:spChg chg="add mod ord">
+          <ac:chgData name="Steve Mutrux" userId="4fa98d0c-dc66-4728-b09b-a88e22e95094" providerId="ADAL" clId="{421BD283-33D8-4C6C-821F-71755E863FA2}" dt="2026-09-16T01:22:14.992" v="2244" actId="207"/>
+          <ac:spMkLst>
+            <pc:docMk/>
+            <pc:sldMk cId="2816041415" sldId="257"/>
+            <ac:spMk id="4" creationId="{FF2203D6-CADD-8886-994B-15E5019085A9}"/>
+          </ac:spMkLst>
+        </pc:spChg>
+        <pc:spChg chg="add del mod">
+          <ac:chgData name="Steve Mutrux" userId="4fa98d0c-dc66-4728-b09b-a88e22e95094" providerId="ADAL" clId="{421BD283-33D8-4C6C-821F-71755E863FA2}" dt="2026-09-16T01:03:58.801" v="1038" actId="478"/>
+          <ac:spMkLst>
+            <pc:docMk/>
+            <pc:sldMk cId="2816041415" sldId="257"/>
+            <ac:spMk id="6" creationId="{C410810D-A989-74D7-F0EB-6BE5858E3F6A}"/>
+          </ac:spMkLst>
+        </pc:spChg>
+        <pc:spChg chg="add del mod">
+          <ac:chgData name="Steve Mutrux" userId="4fa98d0c-dc66-4728-b09b-a88e22e95094" providerId="ADAL" clId="{421BD283-33D8-4C6C-821F-71755E863FA2}" dt="2026-09-16T01:03:18.802" v="1036" actId="478"/>
+          <ac:spMkLst>
+            <pc:docMk/>
+            <pc:sldMk cId="2816041415" sldId="257"/>
+            <ac:spMk id="7" creationId="{3261E8B8-4A5D-BECA-1304-E8332AAE561A}"/>
+          </ac:spMkLst>
+        </pc:spChg>
+        <pc:spChg chg="add del mod topLvl">
+          <ac:chgData name="Steve Mutrux" userId="4fa98d0c-dc66-4728-b09b-a88e22e95094" providerId="ADAL" clId="{421BD283-33D8-4C6C-821F-71755E863FA2}" dt="2026-09-16T01:11:16.400" v="1106" actId="478"/>
+          <ac:spMkLst>
+            <pc:docMk/>
+            <pc:sldMk cId="2816041415" sldId="257"/>
+            <ac:spMk id="9" creationId="{FAEF5536-44D2-9012-9C74-2886C3A8524B}"/>
+          </ac:spMkLst>
+        </pc:spChg>
+        <pc:spChg chg="add del mod topLvl">
+          <ac:chgData name="Steve Mutrux" userId="4fa98d0c-dc66-4728-b09b-a88e22e95094" providerId="ADAL" clId="{421BD283-33D8-4C6C-821F-71755E863FA2}" dt="2026-09-16T01:11:14.839" v="1105" actId="478"/>
+          <ac:spMkLst>
+            <pc:docMk/>
+            <pc:sldMk cId="2816041415" sldId="257"/>
+            <ac:spMk id="11" creationId="{E786029E-8D13-42CC-AFB7-93C737CF5FB5}"/>
+          </ac:spMkLst>
+        </pc:spChg>
+        <pc:spChg chg="add del mod topLvl">
+          <ac:chgData name="Steve Mutrux" userId="4fa98d0c-dc66-4728-b09b-a88e22e95094" providerId="ADAL" clId="{421BD283-33D8-4C6C-821F-71755E863FA2}" dt="2026-09-16T01:11:14.839" v="1105" actId="478"/>
+          <ac:spMkLst>
+            <pc:docMk/>
+            <pc:sldMk cId="2816041415" sldId="257"/>
+            <ac:spMk id="13" creationId="{68683EA2-9224-6664-E087-6B86DAA4A1C0}"/>
+          </ac:spMkLst>
+        </pc:spChg>
+        <pc:spChg chg="add mod ord">
+          <ac:chgData name="Steve Mutrux" userId="4fa98d0c-dc66-4728-b09b-a88e22e95094" providerId="ADAL" clId="{421BD283-33D8-4C6C-821F-71755E863FA2}" dt="2026-09-16T01:20:48.412" v="2238" actId="167"/>
+          <ac:spMkLst>
+            <pc:docMk/>
+            <pc:sldMk cId="2816041415" sldId="257"/>
+            <ac:spMk id="16" creationId="{E7FE4CEB-5AA4-EF36-A0B3-5685A99F5358}"/>
+          </ac:spMkLst>
+        </pc:spChg>
+        <pc:spChg chg="add mod ord">
+          <ac:chgData name="Steve Mutrux" userId="4fa98d0c-dc66-4728-b09b-a88e22e95094" providerId="ADAL" clId="{421BD283-33D8-4C6C-821F-71755E863FA2}" dt="2026-09-16T02:36:33.111" v="3040" actId="167"/>
+          <ac:spMkLst>
+            <pc:docMk/>
+            <pc:sldMk cId="2816041415" sldId="257"/>
+            <ac:spMk id="19" creationId="{34355EF9-B8A3-1336-E2F3-0B95B2A432A6}"/>
+          </ac:spMkLst>
+        </pc:spChg>
+        <pc:spChg chg="add mod ord">
+          <ac:chgData name="Steve Mutrux" userId="4fa98d0c-dc66-4728-b09b-a88e22e95094" providerId="ADAL" clId="{421BD283-33D8-4C6C-821F-71755E863FA2}" dt="2026-09-16T02:36:33.111" v="3040" actId="167"/>
+          <ac:spMkLst>
+            <pc:docMk/>
+            <pc:sldMk cId="2816041415" sldId="257"/>
+            <ac:spMk id="20" creationId="{DD92669B-838F-D70A-6EF1-1E0A6BF88610}"/>
+          </ac:spMkLst>
+        </pc:spChg>
+        <pc:spChg chg="mod">
+          <ac:chgData name="Steve Mutrux" userId="4fa98d0c-dc66-4728-b09b-a88e22e95094" providerId="ADAL" clId="{421BD283-33D8-4C6C-821F-71755E863FA2}" dt="2026-09-16T02:34:58.503" v="3038"/>
+          <ac:spMkLst>
+            <pc:docMk/>
+            <pc:sldMk cId="2816041415" sldId="257"/>
+            <ac:spMk id="22" creationId="{28445EF8-00CC-87D9-26BB-9E18F9E91452}"/>
+          </ac:spMkLst>
+        </pc:spChg>
+        <pc:spChg chg="mod">
+          <ac:chgData name="Steve Mutrux" userId="4fa98d0c-dc66-4728-b09b-a88e22e95094" providerId="ADAL" clId="{421BD283-33D8-4C6C-821F-71755E863FA2}" dt="2026-09-16T02:34:58.503" v="3038"/>
+          <ac:spMkLst>
+            <pc:docMk/>
+            <pc:sldMk cId="2816041415" sldId="257"/>
+            <ac:spMk id="23" creationId="{176D123C-D1BA-0ED2-97EC-22EB453DDF2F}"/>
+          </ac:spMkLst>
+        </pc:spChg>
+        <pc:grpChg chg="add del mod">
+          <ac:chgData name="Steve Mutrux" userId="4fa98d0c-dc66-4728-b09b-a88e22e95094" providerId="ADAL" clId="{421BD283-33D8-4C6C-821F-71755E863FA2}" dt="2026-09-16T01:06:19.504" v="1065" actId="165"/>
+          <ac:grpSpMkLst>
+            <pc:docMk/>
+            <pc:sldMk cId="2816041415" sldId="257"/>
+            <ac:grpSpMk id="14" creationId="{73DF0394-079E-F5AC-B018-B56745238E9B}"/>
+          </ac:grpSpMkLst>
+        </pc:grpChg>
+        <pc:grpChg chg="add mod ord">
+          <ac:chgData name="Steve Mutrux" userId="4fa98d0c-dc66-4728-b09b-a88e22e95094" providerId="ADAL" clId="{421BD283-33D8-4C6C-821F-71755E863FA2}" dt="2026-09-16T02:36:33.111" v="3040" actId="167"/>
+          <ac:grpSpMkLst>
+            <pc:docMk/>
+            <pc:sldMk cId="2816041415" sldId="257"/>
+            <ac:grpSpMk id="21" creationId="{3060A56E-49FC-5A8D-CD76-4DB949309083}"/>
+          </ac:grpSpMkLst>
+        </pc:grpChg>
+        <pc:picChg chg="add del mod ord">
+          <ac:chgData name="Steve Mutrux" userId="4fa98d0c-dc66-4728-b09b-a88e22e95094" providerId="ADAL" clId="{421BD283-33D8-4C6C-821F-71755E863FA2}" dt="2026-09-16T01:17:45.228" v="2220" actId="167"/>
+          <ac:picMkLst>
+            <pc:docMk/>
+            <pc:sldMk cId="2816041415" sldId="257"/>
+            <ac:picMk id="18" creationId="{564AEA62-7416-399A-3D15-3B47A683A141}"/>
+          </ac:picMkLst>
+        </pc:picChg>
       </pc:sldChg>
-      <pc:sldChg chg="addSp delSp modSp add mod">
-        <pc:chgData name="Steve Mutrux" userId="4fa98d0c-dc66-4728-b09b-a88e22e95094" providerId="ADAL" clId="{421BD283-33D8-4C6C-821F-71755E863FA2}" dt="2026-09-15T18:17:27.356" v="599" actId="14100"/>
+      <pc:sldChg chg="addSp delSp modSp add mod modAnim modNotesTx">
+        <pc:chgData name="Steve Mutrux" userId="4fa98d0c-dc66-4728-b09b-a88e22e95094" providerId="ADAL" clId="{421BD283-33D8-4C6C-821F-71755E863FA2}" dt="2026-09-16T02:47:48.323" v="3073"/>
         <pc:sldMkLst>
           <pc:docMk/>
           <pc:sldMk cId="518144185" sldId="258"/>
         </pc:sldMkLst>
-        <pc:spChg chg="mod">
-          <ac:chgData name="Steve Mutrux" userId="4fa98d0c-dc66-4728-b09b-a88e22e95094" providerId="ADAL" clId="{421BD283-33D8-4C6C-821F-71755E863FA2}" dt="2026-09-15T17:36:24.997" v="255" actId="20577"/>
+        <pc:spChg chg="del mod">
+          <ac:chgData name="Steve Mutrux" userId="4fa98d0c-dc66-4728-b09b-a88e22e95094" providerId="ADAL" clId="{421BD283-33D8-4C6C-821F-71755E863FA2}" dt="2026-09-16T00:46:35.289" v="923" actId="478"/>
           <ac:spMkLst>
             <pc:docMk/>
             <pc:sldMk cId="518144185" sldId="258"/>
@@ -211,12 +327,20 @@
             <ac:spMk id="4" creationId="{2BF38305-4E94-805E-6DF4-E584E9A7D528}"/>
           </ac:spMkLst>
         </pc:spChg>
-        <pc:spChg chg="add mod">
-          <ac:chgData name="Steve Mutrux" userId="4fa98d0c-dc66-4728-b09b-a88e22e95094" providerId="ADAL" clId="{421BD283-33D8-4C6C-821F-71755E863FA2}" dt="2026-09-15T18:17:27.356" v="599" actId="14100"/>
+        <pc:spChg chg="add del mod ord">
+          <ac:chgData name="Steve Mutrux" userId="4fa98d0c-dc66-4728-b09b-a88e22e95094" providerId="ADAL" clId="{421BD283-33D8-4C6C-821F-71755E863FA2}" dt="2026-09-16T01:41:19.114" v="2580"/>
           <ac:spMkLst>
             <pc:docMk/>
             <pc:sldMk cId="518144185" sldId="258"/>
             <ac:spMk id="4" creationId="{4179717D-B637-2B0D-B9EF-712078DD12DB}"/>
+          </ac:spMkLst>
+        </pc:spChg>
+        <pc:spChg chg="add mod">
+          <ac:chgData name="Steve Mutrux" userId="4fa98d0c-dc66-4728-b09b-a88e22e95094" providerId="ADAL" clId="{421BD283-33D8-4C6C-821F-71755E863FA2}" dt="2026-09-16T00:47:48.017" v="925" actId="2711"/>
+          <ac:spMkLst>
+            <pc:docMk/>
+            <pc:sldMk cId="518144185" sldId="258"/>
+            <ac:spMk id="5" creationId="{DB1A1787-4F3B-4026-9478-2D29155C7AD4}"/>
           </ac:spMkLst>
         </pc:spChg>
         <pc:spChg chg="add del">
@@ -227,6 +351,134 @@
             <ac:spMk id="6" creationId="{C11197FF-9241-4E98-1F23-6A6849A7C448}"/>
           </ac:spMkLst>
         </pc:spChg>
+        <pc:spChg chg="add del mod">
+          <ac:chgData name="Steve Mutrux" userId="4fa98d0c-dc66-4728-b09b-a88e22e95094" providerId="ADAL" clId="{421BD283-33D8-4C6C-821F-71755E863FA2}" dt="2026-09-16T01:32:58.829" v="2270" actId="478"/>
+          <ac:spMkLst>
+            <pc:docMk/>
+            <pc:sldMk cId="518144185" sldId="258"/>
+            <ac:spMk id="6" creationId="{F30D305D-9660-BFE0-D543-CD5D129E965D}"/>
+          </ac:spMkLst>
+        </pc:spChg>
+        <pc:spChg chg="add del mod">
+          <ac:chgData name="Steve Mutrux" userId="4fa98d0c-dc66-4728-b09b-a88e22e95094" providerId="ADAL" clId="{421BD283-33D8-4C6C-821F-71755E863FA2}" dt="2026-09-16T01:34:24.418" v="2280" actId="478"/>
+          <ac:spMkLst>
+            <pc:docMk/>
+            <pc:sldMk cId="518144185" sldId="258"/>
+            <ac:spMk id="8" creationId="{4420A185-84EB-DED9-0C78-E7C60A358624}"/>
+          </ac:spMkLst>
+        </pc:spChg>
+        <pc:spChg chg="add mod">
+          <ac:chgData name="Steve Mutrux" userId="4fa98d0c-dc66-4728-b09b-a88e22e95094" providerId="ADAL" clId="{421BD283-33D8-4C6C-821F-71755E863FA2}" dt="2026-09-16T01:44:44.516" v="2607" actId="20577"/>
+          <ac:spMkLst>
+            <pc:docMk/>
+            <pc:sldMk cId="518144185" sldId="258"/>
+            <ac:spMk id="9" creationId="{574F826F-7902-4E9C-ECB9-9D31F725526B}"/>
+          </ac:spMkLst>
+        </pc:spChg>
+        <pc:spChg chg="add mod ord">
+          <ac:chgData name="Steve Mutrux" userId="4fa98d0c-dc66-4728-b09b-a88e22e95094" providerId="ADAL" clId="{421BD283-33D8-4C6C-821F-71755E863FA2}" dt="2026-09-16T02:24:50.756" v="2974" actId="14100"/>
+          <ac:spMkLst>
+            <pc:docMk/>
+            <pc:sldMk cId="518144185" sldId="258"/>
+            <ac:spMk id="11" creationId="{1353A151-D3BF-5598-8C13-D8ED000AD618}"/>
+          </ac:spMkLst>
+        </pc:spChg>
+        <pc:spChg chg="add mod">
+          <ac:chgData name="Steve Mutrux" userId="4fa98d0c-dc66-4728-b09b-a88e22e95094" providerId="ADAL" clId="{421BD283-33D8-4C6C-821F-71755E863FA2}" dt="2026-09-16T01:39:02.101" v="2460" actId="164"/>
+          <ac:spMkLst>
+            <pc:docMk/>
+            <pc:sldMk cId="518144185" sldId="258"/>
+            <ac:spMk id="12" creationId="{D51500F2-78D7-CFFA-80E0-405242AA7A53}"/>
+          </ac:spMkLst>
+        </pc:spChg>
+        <pc:spChg chg="add mod ord">
+          <ac:chgData name="Steve Mutrux" userId="4fa98d0c-dc66-4728-b09b-a88e22e95094" providerId="ADAL" clId="{421BD283-33D8-4C6C-821F-71755E863FA2}" dt="2026-09-16T01:39:38.134" v="2571" actId="207"/>
+          <ac:spMkLst>
+            <pc:docMk/>
+            <pc:sldMk cId="518144185" sldId="258"/>
+            <ac:spMk id="13" creationId="{12E49B19-956E-922D-815D-8303E8A1343F}"/>
+          </ac:spMkLst>
+        </pc:spChg>
+        <pc:spChg chg="add del mod">
+          <ac:chgData name="Steve Mutrux" userId="4fa98d0c-dc66-4728-b09b-a88e22e95094" providerId="ADAL" clId="{421BD283-33D8-4C6C-821F-71755E863FA2}" dt="2026-09-16T01:46:37.054" v="2657" actId="21"/>
+          <ac:spMkLst>
+            <pc:docMk/>
+            <pc:sldMk cId="518144185" sldId="258"/>
+            <ac:spMk id="15" creationId="{44A84756-8249-7168-7DA3-B3CFCE071452}"/>
+          </ac:spMkLst>
+        </pc:spChg>
+        <pc:spChg chg="add del mod">
+          <ac:chgData name="Steve Mutrux" userId="4fa98d0c-dc66-4728-b09b-a88e22e95094" providerId="ADAL" clId="{421BD283-33D8-4C6C-821F-71755E863FA2}" dt="2026-09-16T01:46:37.054" v="2657" actId="21"/>
+          <ac:spMkLst>
+            <pc:docMk/>
+            <pc:sldMk cId="518144185" sldId="258"/>
+            <ac:spMk id="17" creationId="{AC29BAEA-85E2-CE44-DFD8-33264295EAFB}"/>
+          </ac:spMkLst>
+        </pc:spChg>
+        <pc:spChg chg="add mod">
+          <ac:chgData name="Steve Mutrux" userId="4fa98d0c-dc66-4728-b09b-a88e22e95094" providerId="ADAL" clId="{421BD283-33D8-4C6C-821F-71755E863FA2}" dt="2026-09-16T02:07:30.283" v="2884" actId="1076"/>
+          <ac:spMkLst>
+            <pc:docMk/>
+            <pc:sldMk cId="518144185" sldId="258"/>
+            <ac:spMk id="18" creationId="{C6B1A604-7C77-14AF-238D-D7A8CCEFB2B3}"/>
+          </ac:spMkLst>
+        </pc:spChg>
+        <pc:spChg chg="add mod">
+          <ac:chgData name="Steve Mutrux" userId="4fa98d0c-dc66-4728-b09b-a88e22e95094" providerId="ADAL" clId="{421BD283-33D8-4C6C-821F-71755E863FA2}" dt="2026-09-16T02:07:30.283" v="2884" actId="1076"/>
+          <ac:spMkLst>
+            <pc:docMk/>
+            <pc:sldMk cId="518144185" sldId="258"/>
+            <ac:spMk id="19" creationId="{4A0CC54C-E406-43A5-B3FC-71C942466F46}"/>
+          </ac:spMkLst>
+        </pc:spChg>
+        <pc:spChg chg="add mod">
+          <ac:chgData name="Steve Mutrux" userId="4fa98d0c-dc66-4728-b09b-a88e22e95094" providerId="ADAL" clId="{421BD283-33D8-4C6C-821F-71755E863FA2}" dt="2026-09-16T02:07:30.283" v="2884" actId="1076"/>
+          <ac:spMkLst>
+            <pc:docMk/>
+            <pc:sldMk cId="518144185" sldId="258"/>
+            <ac:spMk id="20" creationId="{CCFAD389-EE71-B68B-7904-B518B60423D2}"/>
+          </ac:spMkLst>
+        </pc:spChg>
+        <pc:spChg chg="add mod">
+          <ac:chgData name="Steve Mutrux" userId="4fa98d0c-dc66-4728-b09b-a88e22e95094" providerId="ADAL" clId="{421BD283-33D8-4C6C-821F-71755E863FA2}" dt="2026-09-16T02:07:30.283" v="2884" actId="1076"/>
+          <ac:spMkLst>
+            <pc:docMk/>
+            <pc:sldMk cId="518144185" sldId="258"/>
+            <ac:spMk id="21" creationId="{AD65F9A4-3D9F-CADB-4D37-DD80B4615F45}"/>
+          </ac:spMkLst>
+        </pc:spChg>
+        <pc:spChg chg="add mod">
+          <ac:chgData name="Steve Mutrux" userId="4fa98d0c-dc66-4728-b09b-a88e22e95094" providerId="ADAL" clId="{421BD283-33D8-4C6C-821F-71755E863FA2}" dt="2026-09-16T02:07:30.283" v="2884" actId="1076"/>
+          <ac:spMkLst>
+            <pc:docMk/>
+            <pc:sldMk cId="518144185" sldId="258"/>
+            <ac:spMk id="22" creationId="{12F11FF0-1BF1-6CC5-4631-D4121454A724}"/>
+          </ac:spMkLst>
+        </pc:spChg>
+        <pc:spChg chg="add mod">
+          <ac:chgData name="Steve Mutrux" userId="4fa98d0c-dc66-4728-b09b-a88e22e95094" providerId="ADAL" clId="{421BD283-33D8-4C6C-821F-71755E863FA2}" dt="2026-09-16T02:07:30.283" v="2884" actId="1076"/>
+          <ac:spMkLst>
+            <pc:docMk/>
+            <pc:sldMk cId="518144185" sldId="258"/>
+            <ac:spMk id="23" creationId="{407BEB45-41C6-4289-92A8-7E218F7F8701}"/>
+          </ac:spMkLst>
+        </pc:spChg>
+        <pc:spChg chg="add mod">
+          <ac:chgData name="Steve Mutrux" userId="4fa98d0c-dc66-4728-b09b-a88e22e95094" providerId="ADAL" clId="{421BD283-33D8-4C6C-821F-71755E863FA2}" dt="2026-09-16T02:07:30.283" v="2884" actId="1076"/>
+          <ac:spMkLst>
+            <pc:docMk/>
+            <pc:sldMk cId="518144185" sldId="258"/>
+            <ac:spMk id="24" creationId="{943D9693-4F65-1A39-4384-D3D500B08D4A}"/>
+          </ac:spMkLst>
+        </pc:spChg>
+        <pc:grpChg chg="add mod">
+          <ac:chgData name="Steve Mutrux" userId="4fa98d0c-dc66-4728-b09b-a88e22e95094" providerId="ADAL" clId="{421BD283-33D8-4C6C-821F-71755E863FA2}" dt="2026-09-16T01:39:07.436" v="2462" actId="1076"/>
+          <ac:grpSpMkLst>
+            <pc:docMk/>
+            <pc:sldMk cId="518144185" sldId="258"/>
+            <ac:grpSpMk id="14" creationId="{8A8268A5-D4AB-506C-B03C-108E6F28747B}"/>
+          </ac:grpSpMkLst>
+        </pc:grpChg>
       </pc:sldChg>
       <pc:sldChg chg="modSp add del mod">
         <pc:chgData name="Steve Mutrux" userId="4fa98d0c-dc66-4728-b09b-a88e22e95094" providerId="ADAL" clId="{421BD283-33D8-4C6C-821F-71755E863FA2}" dt="2026-09-15T17:33:19.095" v="206" actId="47"/>
@@ -243,41 +495,121 @@
           </ac:spMkLst>
         </pc:spChg>
       </pc:sldChg>
-      <pc:sldChg chg="modSp add mod">
-        <pc:chgData name="Steve Mutrux" userId="4fa98d0c-dc66-4728-b09b-a88e22e95094" providerId="ADAL" clId="{421BD283-33D8-4C6C-821F-71755E863FA2}" dt="2026-09-15T17:37:27.581" v="270" actId="20577"/>
+      <pc:sldChg chg="addSp delSp modSp add mod">
+        <pc:chgData name="Steve Mutrux" userId="4fa98d0c-dc66-4728-b09b-a88e22e95094" providerId="ADAL" clId="{421BD283-33D8-4C6C-821F-71755E863FA2}" dt="2026-09-16T00:46:15.741" v="916" actId="478"/>
         <pc:sldMkLst>
           <pc:docMk/>
           <pc:sldMk cId="3444687766" sldId="260"/>
         </pc:sldMkLst>
-        <pc:spChg chg="mod">
-          <ac:chgData name="Steve Mutrux" userId="4fa98d0c-dc66-4728-b09b-a88e22e95094" providerId="ADAL" clId="{421BD283-33D8-4C6C-821F-71755E863FA2}" dt="2026-09-15T17:37:27.581" v="270" actId="20577"/>
+        <pc:spChg chg="del mod">
+          <ac:chgData name="Steve Mutrux" userId="4fa98d0c-dc66-4728-b09b-a88e22e95094" providerId="ADAL" clId="{421BD283-33D8-4C6C-821F-71755E863FA2}" dt="2026-09-16T00:46:15.741" v="916" actId="478"/>
           <ac:spMkLst>
             <pc:docMk/>
             <pc:sldMk cId="3444687766" sldId="260"/>
             <ac:spMk id="2" creationId="{002E2CC7-570D-FDB3-3281-85D5D28B2E70}"/>
           </ac:spMkLst>
         </pc:spChg>
+        <pc:spChg chg="add mod">
+          <ac:chgData name="Steve Mutrux" userId="4fa98d0c-dc66-4728-b09b-a88e22e95094" providerId="ADAL" clId="{421BD283-33D8-4C6C-821F-71755E863FA2}" dt="2026-09-16T00:45:21.601" v="904" actId="207"/>
+          <ac:spMkLst>
+            <pc:docMk/>
+            <pc:sldMk cId="3444687766" sldId="260"/>
+            <ac:spMk id="4" creationId="{42765858-AB49-C69A-CA41-8F00663B3404}"/>
+          </ac:spMkLst>
+        </pc:spChg>
       </pc:sldChg>
-      <pc:sldChg chg="add">
-        <pc:chgData name="Steve Mutrux" userId="4fa98d0c-dc66-4728-b09b-a88e22e95094" providerId="ADAL" clId="{421BD283-33D8-4C6C-821F-71755E863FA2}" dt="2026-09-15T16:06:01.576" v="5"/>
+      <pc:sldChg chg="addSp delSp modSp add mod">
+        <pc:chgData name="Steve Mutrux" userId="4fa98d0c-dc66-4728-b09b-a88e22e95094" providerId="ADAL" clId="{421BD283-33D8-4C6C-821F-71755E863FA2}" dt="2026-09-16T00:46:11.904" v="914" actId="478"/>
         <pc:sldMkLst>
           <pc:docMk/>
           <pc:sldMk cId="4190029259" sldId="261"/>
         </pc:sldMkLst>
+        <pc:spChg chg="del">
+          <ac:chgData name="Steve Mutrux" userId="4fa98d0c-dc66-4728-b09b-a88e22e95094" providerId="ADAL" clId="{421BD283-33D8-4C6C-821F-71755E863FA2}" dt="2026-09-16T00:46:11.904" v="914" actId="478"/>
+          <ac:spMkLst>
+            <pc:docMk/>
+            <pc:sldMk cId="4190029259" sldId="261"/>
+            <ac:spMk id="2" creationId="{EB45249E-3CD1-3B49-F9CF-AF33CD9279A1}"/>
+          </ac:spMkLst>
+        </pc:spChg>
+        <pc:spChg chg="add del">
+          <ac:chgData name="Steve Mutrux" userId="4fa98d0c-dc66-4728-b09b-a88e22e95094" providerId="ADAL" clId="{421BD283-33D8-4C6C-821F-71755E863FA2}" dt="2026-09-16T00:42:24.116" v="855" actId="478"/>
+          <ac:spMkLst>
+            <pc:docMk/>
+            <pc:sldMk cId="4190029259" sldId="261"/>
+            <ac:spMk id="4" creationId="{86ABD23B-52C3-0A87-E606-1F99B12A92D7}"/>
+          </ac:spMkLst>
+        </pc:spChg>
+        <pc:spChg chg="add mod">
+          <ac:chgData name="Steve Mutrux" userId="4fa98d0c-dc66-4728-b09b-a88e22e95094" providerId="ADAL" clId="{421BD283-33D8-4C6C-821F-71755E863FA2}" dt="2026-09-16T00:45:46.853" v="908" actId="207"/>
+          <ac:spMkLst>
+            <pc:docMk/>
+            <pc:sldMk cId="4190029259" sldId="261"/>
+            <ac:spMk id="6" creationId="{C26F907F-3A16-3C95-A3C0-1A0D83238263}"/>
+          </ac:spMkLst>
+        </pc:spChg>
       </pc:sldChg>
-      <pc:sldChg chg="add">
-        <pc:chgData name="Steve Mutrux" userId="4fa98d0c-dc66-4728-b09b-a88e22e95094" providerId="ADAL" clId="{421BD283-33D8-4C6C-821F-71755E863FA2}" dt="2026-09-15T16:06:01.711" v="6"/>
+      <pc:sldChg chg="addSp delSp modSp add mod">
+        <pc:chgData name="Steve Mutrux" userId="4fa98d0c-dc66-4728-b09b-a88e22e95094" providerId="ADAL" clId="{421BD283-33D8-4C6C-821F-71755E863FA2}" dt="2026-09-16T00:46:09.571" v="913" actId="478"/>
         <pc:sldMkLst>
           <pc:docMk/>
           <pc:sldMk cId="1179066660" sldId="262"/>
         </pc:sldMkLst>
+        <pc:spChg chg="del">
+          <ac:chgData name="Steve Mutrux" userId="4fa98d0c-dc66-4728-b09b-a88e22e95094" providerId="ADAL" clId="{421BD283-33D8-4C6C-821F-71755E863FA2}" dt="2026-09-16T00:46:09.571" v="913" actId="478"/>
+          <ac:spMkLst>
+            <pc:docMk/>
+            <pc:sldMk cId="1179066660" sldId="262"/>
+            <ac:spMk id="2" creationId="{FB7C1DAA-388D-15E8-746C-4763F989A8BD}"/>
+          </ac:spMkLst>
+        </pc:spChg>
+        <pc:spChg chg="add del">
+          <ac:chgData name="Steve Mutrux" userId="4fa98d0c-dc66-4728-b09b-a88e22e95094" providerId="ADAL" clId="{421BD283-33D8-4C6C-821F-71755E863FA2}" dt="2026-09-16T00:42:27.997" v="857" actId="478"/>
+          <ac:spMkLst>
+            <pc:docMk/>
+            <pc:sldMk cId="1179066660" sldId="262"/>
+            <ac:spMk id="4" creationId="{454DAE8C-0239-F0A4-BA7E-4FE0FF2D9897}"/>
+          </ac:spMkLst>
+        </pc:spChg>
+        <pc:spChg chg="add mod">
+          <ac:chgData name="Steve Mutrux" userId="4fa98d0c-dc66-4728-b09b-a88e22e95094" providerId="ADAL" clId="{421BD283-33D8-4C6C-821F-71755E863FA2}" dt="2026-09-16T00:45:53.311" v="910" actId="207"/>
+          <ac:spMkLst>
+            <pc:docMk/>
+            <pc:sldMk cId="1179066660" sldId="262"/>
+            <ac:spMk id="6" creationId="{0CDADB92-84C5-A652-539F-1C8F5047D3A6}"/>
+          </ac:spMkLst>
+        </pc:spChg>
       </pc:sldChg>
-      <pc:sldChg chg="add">
-        <pc:chgData name="Steve Mutrux" userId="4fa98d0c-dc66-4728-b09b-a88e22e95094" providerId="ADAL" clId="{421BD283-33D8-4C6C-821F-71755E863FA2}" dt="2026-09-15T16:06:52.778" v="7"/>
+      <pc:sldChg chg="addSp delSp modSp add mod">
+        <pc:chgData name="Steve Mutrux" userId="4fa98d0c-dc66-4728-b09b-a88e22e95094" providerId="ADAL" clId="{421BD283-33D8-4C6C-821F-71755E863FA2}" dt="2026-09-16T00:46:05.458" v="912" actId="207"/>
         <pc:sldMkLst>
           <pc:docMk/>
           <pc:sldMk cId="2229155277" sldId="263"/>
         </pc:sldMkLst>
+        <pc:spChg chg="del">
+          <ac:chgData name="Steve Mutrux" userId="4fa98d0c-dc66-4728-b09b-a88e22e95094" providerId="ADAL" clId="{421BD283-33D8-4C6C-821F-71755E863FA2}" dt="2026-09-16T00:43:06.714" v="871" actId="478"/>
+          <ac:spMkLst>
+            <pc:docMk/>
+            <pc:sldMk cId="2229155277" sldId="263"/>
+            <ac:spMk id="2" creationId="{9E689793-48BC-E89A-D94F-DE97837489B8}"/>
+          </ac:spMkLst>
+        </pc:spChg>
+        <pc:spChg chg="add del">
+          <ac:chgData name="Steve Mutrux" userId="4fa98d0c-dc66-4728-b09b-a88e22e95094" providerId="ADAL" clId="{421BD283-33D8-4C6C-821F-71755E863FA2}" dt="2026-09-16T00:42:33.831" v="861" actId="478"/>
+          <ac:spMkLst>
+            <pc:docMk/>
+            <pc:sldMk cId="2229155277" sldId="263"/>
+            <ac:spMk id="4" creationId="{202A19DB-42DD-70EE-502D-F38B63917B61}"/>
+          </ac:spMkLst>
+        </pc:spChg>
+        <pc:spChg chg="add mod">
+          <ac:chgData name="Steve Mutrux" userId="4fa98d0c-dc66-4728-b09b-a88e22e95094" providerId="ADAL" clId="{421BD283-33D8-4C6C-821F-71755E863FA2}" dt="2026-09-16T00:46:05.458" v="912" actId="207"/>
+          <ac:spMkLst>
+            <pc:docMk/>
+            <pc:sldMk cId="2229155277" sldId="263"/>
+            <ac:spMk id="6" creationId="{3781749F-2DE4-6052-FCC1-9E1C1554116A}"/>
+          </ac:spMkLst>
+        </pc:spChg>
       </pc:sldChg>
       <pc:sldChg chg="addSp modSp add del mod ord">
         <pc:chgData name="Steve Mutrux" userId="4fa98d0c-dc66-4728-b09b-a88e22e95094" providerId="ADAL" clId="{421BD283-33D8-4C6C-821F-71755E863FA2}" dt="2026-09-15T17:32:59.196" v="205" actId="47"/>
@@ -294,34 +626,90 @@
           </ac:graphicFrameMkLst>
         </pc:graphicFrameChg>
       </pc:sldChg>
-      <pc:sldChg chg="addSp modSp add mod">
-        <pc:chgData name="Steve Mutrux" userId="4fa98d0c-dc66-4728-b09b-a88e22e95094" providerId="ADAL" clId="{421BD283-33D8-4C6C-821F-71755E863FA2}" dt="2026-09-15T18:30:11.896" v="704" actId="20577"/>
+      <pc:sldChg chg="addSp delSp modSp add del mod addAnim delAnim modAnim">
+        <pc:chgData name="Steve Mutrux" userId="4fa98d0c-dc66-4728-b09b-a88e22e95094" providerId="ADAL" clId="{421BD283-33D8-4C6C-821F-71755E863FA2}" dt="2026-09-16T02:08:34.656" v="2886" actId="47"/>
         <pc:sldMkLst>
           <pc:docMk/>
           <pc:sldMk cId="2553109476" sldId="265"/>
         </pc:sldMkLst>
-        <pc:spChg chg="mod">
-          <ac:chgData name="Steve Mutrux" userId="4fa98d0c-dc66-4728-b09b-a88e22e95094" providerId="ADAL" clId="{421BD283-33D8-4C6C-821F-71755E863FA2}" dt="2026-09-15T17:23:10.459" v="97" actId="20577"/>
+        <pc:spChg chg="del mod">
+          <ac:chgData name="Steve Mutrux" userId="4fa98d0c-dc66-4728-b09b-a88e22e95094" providerId="ADAL" clId="{421BD283-33D8-4C6C-821F-71755E863FA2}" dt="2026-09-16T00:46:27.819" v="920" actId="478"/>
           <ac:spMkLst>
             <pc:docMk/>
             <pc:sldMk cId="2553109476" sldId="265"/>
             <ac:spMk id="2" creationId="{9019CA75-AE86-96E8-F266-96497A23FD87}"/>
           </ac:spMkLst>
         </pc:spChg>
-        <pc:spChg chg="add mod">
-          <ac:chgData name="Steve Mutrux" userId="4fa98d0c-dc66-4728-b09b-a88e22e95094" providerId="ADAL" clId="{421BD283-33D8-4C6C-821F-71755E863FA2}" dt="2026-09-15T17:56:25.658" v="313" actId="1076"/>
+        <pc:spChg chg="add del mod">
+          <ac:chgData name="Steve Mutrux" userId="4fa98d0c-dc66-4728-b09b-a88e22e95094" providerId="ADAL" clId="{421BD283-33D8-4C6C-821F-71755E863FA2}" dt="2026-09-16T01:46:29.971" v="2655" actId="478"/>
           <ac:spMkLst>
             <pc:docMk/>
             <pc:sldMk cId="2553109476" sldId="265"/>
             <ac:spMk id="4" creationId="{487D995F-8AAC-6993-74EB-723E6B5C0BFF}"/>
           </ac:spMkLst>
         </pc:spChg>
-        <pc:spChg chg="add mod">
-          <ac:chgData name="Steve Mutrux" userId="4fa98d0c-dc66-4728-b09b-a88e22e95094" providerId="ADAL" clId="{421BD283-33D8-4C6C-821F-71755E863FA2}" dt="2026-09-15T18:30:11.896" v="704" actId="20577"/>
+        <pc:spChg chg="add del mod">
+          <ac:chgData name="Steve Mutrux" userId="4fa98d0c-dc66-4728-b09b-a88e22e95094" providerId="ADAL" clId="{421BD283-33D8-4C6C-821F-71755E863FA2}" dt="2026-09-16T01:46:31.802" v="2656" actId="478"/>
           <ac:spMkLst>
             <pc:docMk/>
             <pc:sldMk cId="2553109476" sldId="265"/>
             <ac:spMk id="5" creationId="{CC915FDB-49B9-2B7E-78DD-B03D9C91E7BB}"/>
+          </ac:spMkLst>
+        </pc:spChg>
+        <pc:spChg chg="add mod">
+          <ac:chgData name="Steve Mutrux" userId="4fa98d0c-dc66-4728-b09b-a88e22e95094" providerId="ADAL" clId="{421BD283-33D8-4C6C-821F-71755E863FA2}" dt="2026-09-16T01:48:58.599" v="2674" actId="1076"/>
+          <ac:spMkLst>
+            <pc:docMk/>
+            <pc:sldMk cId="2553109476" sldId="265"/>
+            <ac:spMk id="6" creationId="{61D39F87-CA97-9841-1740-3A707FCB0820}"/>
+          </ac:spMkLst>
+        </pc:spChg>
+        <pc:spChg chg="add mod">
+          <ac:chgData name="Steve Mutrux" userId="4fa98d0c-dc66-4728-b09b-a88e22e95094" providerId="ADAL" clId="{421BD283-33D8-4C6C-821F-71755E863FA2}" dt="2026-09-16T01:48:58.599" v="2674" actId="1076"/>
+          <ac:spMkLst>
+            <pc:docMk/>
+            <pc:sldMk cId="2553109476" sldId="265"/>
+            <ac:spMk id="8" creationId="{D2CAF332-5168-1014-A2BD-160BABC51106}"/>
+          </ac:spMkLst>
+        </pc:spChg>
+        <pc:spChg chg="add mod">
+          <ac:chgData name="Steve Mutrux" userId="4fa98d0c-dc66-4728-b09b-a88e22e95094" providerId="ADAL" clId="{421BD283-33D8-4C6C-821F-71755E863FA2}" dt="2026-09-16T02:05:29.497" v="2880" actId="1076"/>
+          <ac:spMkLst>
+            <pc:docMk/>
+            <pc:sldMk cId="2553109476" sldId="265"/>
+            <ac:spMk id="9" creationId="{C08C61C3-61B5-0EF2-19EE-F7A6E4779A21}"/>
+          </ac:spMkLst>
+        </pc:spChg>
+        <pc:spChg chg="add mod">
+          <ac:chgData name="Steve Mutrux" userId="4fa98d0c-dc66-4728-b09b-a88e22e95094" providerId="ADAL" clId="{421BD283-33D8-4C6C-821F-71755E863FA2}" dt="2026-09-16T02:05:29.497" v="2880" actId="1076"/>
+          <ac:spMkLst>
+            <pc:docMk/>
+            <pc:sldMk cId="2553109476" sldId="265"/>
+            <ac:spMk id="11" creationId="{EFE92541-AAEA-62B9-4C58-46C0C2B56148}"/>
+          </ac:spMkLst>
+        </pc:spChg>
+        <pc:spChg chg="add mod">
+          <ac:chgData name="Steve Mutrux" userId="4fa98d0c-dc66-4728-b09b-a88e22e95094" providerId="ADAL" clId="{421BD283-33D8-4C6C-821F-71755E863FA2}" dt="2026-09-16T02:05:29.497" v="2880" actId="1076"/>
+          <ac:spMkLst>
+            <pc:docMk/>
+            <pc:sldMk cId="2553109476" sldId="265"/>
+            <ac:spMk id="13" creationId="{C70B50C0-42DE-9FB3-0CDD-78007CFF07ED}"/>
+          </ac:spMkLst>
+        </pc:spChg>
+        <pc:spChg chg="add mod">
+          <ac:chgData name="Steve Mutrux" userId="4fa98d0c-dc66-4728-b09b-a88e22e95094" providerId="ADAL" clId="{421BD283-33D8-4C6C-821F-71755E863FA2}" dt="2026-09-16T02:05:29.497" v="2880" actId="1076"/>
+          <ac:spMkLst>
+            <pc:docMk/>
+            <pc:sldMk cId="2553109476" sldId="265"/>
+            <ac:spMk id="15" creationId="{37045FA2-1A16-FF5A-C8E5-885FD071F442}"/>
+          </ac:spMkLst>
+        </pc:spChg>
+        <pc:spChg chg="add mod">
+          <ac:chgData name="Steve Mutrux" userId="4fa98d0c-dc66-4728-b09b-a88e22e95094" providerId="ADAL" clId="{421BD283-33D8-4C6C-821F-71755E863FA2}" dt="2026-09-16T02:05:29.497" v="2880" actId="1076"/>
+          <ac:spMkLst>
+            <pc:docMk/>
+            <pc:sldMk cId="2553109476" sldId="265"/>
+            <ac:spMk id="17" creationId="{23F0DB1B-0A97-0CF7-C61A-82BBCBC2417E}"/>
           </ac:spMkLst>
         </pc:spChg>
       </pc:sldChg>
@@ -332,76 +720,92 @@
           <pc:sldMk cId="3540047338" sldId="265"/>
         </pc:sldMkLst>
       </pc:sldChg>
-      <pc:sldChg chg="addSp modSp add mod">
-        <pc:chgData name="Steve Mutrux" userId="4fa98d0c-dc66-4728-b09b-a88e22e95094" providerId="ADAL" clId="{421BD283-33D8-4C6C-821F-71755E863FA2}" dt="2026-09-15T18:28:05.969" v="656" actId="2710"/>
+      <pc:sldChg chg="addSp delSp modSp add mod">
+        <pc:chgData name="Steve Mutrux" userId="4fa98d0c-dc66-4728-b09b-a88e22e95094" providerId="ADAL" clId="{421BD283-33D8-4C6C-821F-71755E863FA2}" dt="2026-09-16T00:48:53.540" v="932" actId="207"/>
         <pc:sldMkLst>
           <pc:docMk/>
           <pc:sldMk cId="353601395" sldId="266"/>
         </pc:sldMkLst>
-        <pc:spChg chg="mod">
-          <ac:chgData name="Steve Mutrux" userId="4fa98d0c-dc66-4728-b09b-a88e22e95094" providerId="ADAL" clId="{421BD283-33D8-4C6C-821F-71755E863FA2}" dt="2026-09-15T17:23:15.745" v="102" actId="20577"/>
+        <pc:spChg chg="del mod">
+          <ac:chgData name="Steve Mutrux" userId="4fa98d0c-dc66-4728-b09b-a88e22e95094" providerId="ADAL" clId="{421BD283-33D8-4C6C-821F-71755E863FA2}" dt="2026-09-16T00:46:26.334" v="919" actId="478"/>
           <ac:spMkLst>
             <pc:docMk/>
             <pc:sldMk cId="353601395" sldId="266"/>
             <ac:spMk id="2" creationId="{F8626D69-4F4F-76B2-E4FB-EA5B5DF367A4}"/>
           </ac:spMkLst>
         </pc:spChg>
-        <pc:spChg chg="add">
-          <ac:chgData name="Steve Mutrux" userId="4fa98d0c-dc66-4728-b09b-a88e22e95094" providerId="ADAL" clId="{421BD283-33D8-4C6C-821F-71755E863FA2}" dt="2026-09-15T17:56:28.856" v="314" actId="22"/>
+        <pc:spChg chg="add mod">
+          <ac:chgData name="Steve Mutrux" userId="4fa98d0c-dc66-4728-b09b-a88e22e95094" providerId="ADAL" clId="{421BD283-33D8-4C6C-821F-71755E863FA2}" dt="2026-09-16T00:47:55.663" v="927" actId="2711"/>
           <ac:spMkLst>
             <pc:docMk/>
             <pc:sldMk cId="353601395" sldId="266"/>
             <ac:spMk id="4" creationId="{62300D51-2B10-B557-82F3-8A6662DF3624}"/>
           </ac:spMkLst>
         </pc:spChg>
-        <pc:spChg chg="add mod">
-          <ac:chgData name="Steve Mutrux" userId="4fa98d0c-dc66-4728-b09b-a88e22e95094" providerId="ADAL" clId="{421BD283-33D8-4C6C-821F-71755E863FA2}" dt="2026-09-15T18:28:05.969" v="656" actId="2710"/>
+        <pc:spChg chg="add del mod">
+          <ac:chgData name="Steve Mutrux" userId="4fa98d0c-dc66-4728-b09b-a88e22e95094" providerId="ADAL" clId="{421BD283-33D8-4C6C-821F-71755E863FA2}" dt="2026-09-16T00:36:14.750" v="705" actId="478"/>
           <ac:spMkLst>
             <pc:docMk/>
             <pc:sldMk cId="353601395" sldId="266"/>
             <ac:spMk id="5" creationId="{F48311E2-530A-88F3-A0F2-5F0110403BE1}"/>
           </ac:spMkLst>
         </pc:spChg>
+        <pc:spChg chg="add mod">
+          <ac:chgData name="Steve Mutrux" userId="4fa98d0c-dc66-4728-b09b-a88e22e95094" providerId="ADAL" clId="{421BD283-33D8-4C6C-821F-71755E863FA2}" dt="2026-09-16T00:48:53.540" v="932" actId="207"/>
+          <ac:spMkLst>
+            <pc:docMk/>
+            <pc:sldMk cId="353601395" sldId="266"/>
+            <ac:spMk id="6" creationId="{DB957D48-6A7C-B8E3-25B3-448F0B786932}"/>
+          </ac:spMkLst>
+        </pc:spChg>
       </pc:sldChg>
-      <pc:sldChg chg="addSp modSp add mod">
-        <pc:chgData name="Steve Mutrux" userId="4fa98d0c-dc66-4728-b09b-a88e22e95094" providerId="ADAL" clId="{421BD283-33D8-4C6C-821F-71755E863FA2}" dt="2026-09-15T18:28:10.064" v="657" actId="2710"/>
+      <pc:sldChg chg="addSp delSp modSp add mod">
+        <pc:chgData name="Steve Mutrux" userId="4fa98d0c-dc66-4728-b09b-a88e22e95094" providerId="ADAL" clId="{421BD283-33D8-4C6C-821F-71755E863FA2}" dt="2026-09-16T00:48:56.149" v="933" actId="207"/>
         <pc:sldMkLst>
           <pc:docMk/>
           <pc:sldMk cId="557364214" sldId="267"/>
         </pc:sldMkLst>
-        <pc:spChg chg="mod">
-          <ac:chgData name="Steve Mutrux" userId="4fa98d0c-dc66-4728-b09b-a88e22e95094" providerId="ADAL" clId="{421BD283-33D8-4C6C-821F-71755E863FA2}" dt="2026-09-15T17:23:21.176" v="106" actId="20577"/>
+        <pc:spChg chg="del mod">
+          <ac:chgData name="Steve Mutrux" userId="4fa98d0c-dc66-4728-b09b-a88e22e95094" providerId="ADAL" clId="{421BD283-33D8-4C6C-821F-71755E863FA2}" dt="2026-09-16T00:46:24.274" v="918" actId="478"/>
           <ac:spMkLst>
             <pc:docMk/>
             <pc:sldMk cId="557364214" sldId="267"/>
             <ac:spMk id="2" creationId="{394BDA26-D74C-5390-5839-09EEB9016D38}"/>
           </ac:spMkLst>
         </pc:spChg>
-        <pc:spChg chg="add">
-          <ac:chgData name="Steve Mutrux" userId="4fa98d0c-dc66-4728-b09b-a88e22e95094" providerId="ADAL" clId="{421BD283-33D8-4C6C-821F-71755E863FA2}" dt="2026-09-15T17:56:29.473" v="315" actId="22"/>
+        <pc:spChg chg="add mod">
+          <ac:chgData name="Steve Mutrux" userId="4fa98d0c-dc66-4728-b09b-a88e22e95094" providerId="ADAL" clId="{421BD283-33D8-4C6C-821F-71755E863FA2}" dt="2026-09-16T00:48:02.005" v="929" actId="2711"/>
           <ac:spMkLst>
             <pc:docMk/>
             <pc:sldMk cId="557364214" sldId="267"/>
             <ac:spMk id="4" creationId="{D33647DA-DFAA-FEB8-E5A2-61DBE5F52AC1}"/>
           </ac:spMkLst>
         </pc:spChg>
-        <pc:spChg chg="add mod">
-          <ac:chgData name="Steve Mutrux" userId="4fa98d0c-dc66-4728-b09b-a88e22e95094" providerId="ADAL" clId="{421BD283-33D8-4C6C-821F-71755E863FA2}" dt="2026-09-15T18:28:10.064" v="657" actId="2710"/>
+        <pc:spChg chg="add del mod">
+          <ac:chgData name="Steve Mutrux" userId="4fa98d0c-dc66-4728-b09b-a88e22e95094" providerId="ADAL" clId="{421BD283-33D8-4C6C-821F-71755E863FA2}" dt="2026-09-16T00:36:25.032" v="707" actId="478"/>
           <ac:spMkLst>
             <pc:docMk/>
             <pc:sldMk cId="557364214" sldId="267"/>
             <ac:spMk id="5" creationId="{12223178-2D4D-92AC-AE08-E324647AB193}"/>
           </ac:spMkLst>
         </pc:spChg>
+        <pc:spChg chg="add mod">
+          <ac:chgData name="Steve Mutrux" userId="4fa98d0c-dc66-4728-b09b-a88e22e95094" providerId="ADAL" clId="{421BD283-33D8-4C6C-821F-71755E863FA2}" dt="2026-09-16T00:48:56.149" v="933" actId="207"/>
+          <ac:spMkLst>
+            <pc:docMk/>
+            <pc:sldMk cId="557364214" sldId="267"/>
+            <ac:spMk id="6" creationId="{4B417B1F-4D76-94E6-39D5-BE8719071E14}"/>
+          </ac:spMkLst>
+        </pc:spChg>
       </pc:sldChg>
-      <pc:sldChg chg="addSp modSp add mod">
-        <pc:chgData name="Steve Mutrux" userId="4fa98d0c-dc66-4728-b09b-a88e22e95094" providerId="ADAL" clId="{421BD283-33D8-4C6C-821F-71755E863FA2}" dt="2026-09-15T18:28:13.983" v="658" actId="2710"/>
+      <pc:sldChg chg="addSp delSp modSp add mod">
+        <pc:chgData name="Steve Mutrux" userId="4fa98d0c-dc66-4728-b09b-a88e22e95094" providerId="ADAL" clId="{421BD283-33D8-4C6C-821F-71755E863FA2}" dt="2026-09-16T00:48:58.410" v="934" actId="207"/>
         <pc:sldMkLst>
           <pc:docMk/>
           <pc:sldMk cId="3893094920" sldId="268"/>
         </pc:sldMkLst>
-        <pc:spChg chg="mod">
-          <ac:chgData name="Steve Mutrux" userId="4fa98d0c-dc66-4728-b09b-a88e22e95094" providerId="ADAL" clId="{421BD283-33D8-4C6C-821F-71755E863FA2}" dt="2026-09-15T17:23:24.232" v="110" actId="20577"/>
+        <pc:spChg chg="del mod">
+          <ac:chgData name="Steve Mutrux" userId="4fa98d0c-dc66-4728-b09b-a88e22e95094" providerId="ADAL" clId="{421BD283-33D8-4C6C-821F-71755E863FA2}" dt="2026-09-16T00:46:20.737" v="917" actId="478"/>
           <ac:spMkLst>
             <pc:docMk/>
             <pc:sldMk cId="3893094920" sldId="268"/>
@@ -409,45 +813,77 @@
           </ac:spMkLst>
         </pc:spChg>
         <pc:spChg chg="add mod">
-          <ac:chgData name="Steve Mutrux" userId="4fa98d0c-dc66-4728-b09b-a88e22e95094" providerId="ADAL" clId="{421BD283-33D8-4C6C-821F-71755E863FA2}" dt="2026-09-15T18:09:18.852" v="595"/>
+          <ac:chgData name="Steve Mutrux" userId="4fa98d0c-dc66-4728-b09b-a88e22e95094" providerId="ADAL" clId="{421BD283-33D8-4C6C-821F-71755E863FA2}" dt="2026-09-16T00:48:05.837" v="930" actId="2711"/>
           <ac:spMkLst>
             <pc:docMk/>
             <pc:sldMk cId="3893094920" sldId="268"/>
             <ac:spMk id="4" creationId="{417B9F22-9B70-7974-674D-300CF5BE5CE0}"/>
           </ac:spMkLst>
         </pc:spChg>
-        <pc:spChg chg="add mod">
-          <ac:chgData name="Steve Mutrux" userId="4fa98d0c-dc66-4728-b09b-a88e22e95094" providerId="ADAL" clId="{421BD283-33D8-4C6C-821F-71755E863FA2}" dt="2026-09-15T18:28:13.983" v="658" actId="2710"/>
+        <pc:spChg chg="add del mod">
+          <ac:chgData name="Steve Mutrux" userId="4fa98d0c-dc66-4728-b09b-a88e22e95094" providerId="ADAL" clId="{421BD283-33D8-4C6C-821F-71755E863FA2}" dt="2026-09-16T00:39:05.901" v="726" actId="478"/>
           <ac:spMkLst>
             <pc:docMk/>
             <pc:sldMk cId="3893094920" sldId="268"/>
             <ac:spMk id="5" creationId="{3F61CD58-FAF9-4198-A045-50D19461C2D1}"/>
           </ac:spMkLst>
         </pc:spChg>
+        <pc:spChg chg="add mod">
+          <ac:chgData name="Steve Mutrux" userId="4fa98d0c-dc66-4728-b09b-a88e22e95094" providerId="ADAL" clId="{421BD283-33D8-4C6C-821F-71755E863FA2}" dt="2026-09-16T00:48:58.410" v="934" actId="207"/>
+          <ac:spMkLst>
+            <pc:docMk/>
+            <pc:sldMk cId="3893094920" sldId="268"/>
+            <ac:spMk id="6" creationId="{963CB6CA-9071-0ED2-6369-CCD22B4D6B1D}"/>
+          </ac:spMkLst>
+        </pc:spChg>
       </pc:sldChg>
-      <pc:sldChg chg="modSp add mod">
-        <pc:chgData name="Steve Mutrux" userId="4fa98d0c-dc66-4728-b09b-a88e22e95094" providerId="ADAL" clId="{421BD283-33D8-4C6C-821F-71755E863FA2}" dt="2026-09-15T17:27:49.740" v="195" actId="20577"/>
+      <pc:sldChg chg="addSp delSp modSp add mod">
+        <pc:chgData name="Steve Mutrux" userId="4fa98d0c-dc66-4728-b09b-a88e22e95094" providerId="ADAL" clId="{421BD283-33D8-4C6C-821F-71755E863FA2}" dt="2026-09-16T01:32:55.280" v="2269" actId="14100"/>
         <pc:sldMkLst>
           <pc:docMk/>
           <pc:sldMk cId="1755182162" sldId="269"/>
         </pc:sldMkLst>
-        <pc:spChg chg="mod">
-          <ac:chgData name="Steve Mutrux" userId="4fa98d0c-dc66-4728-b09b-a88e22e95094" providerId="ADAL" clId="{421BD283-33D8-4C6C-821F-71755E863FA2}" dt="2026-09-15T17:27:49.740" v="195" actId="20577"/>
+        <pc:spChg chg="del mod">
+          <ac:chgData name="Steve Mutrux" userId="4fa98d0c-dc66-4728-b09b-a88e22e95094" providerId="ADAL" clId="{421BD283-33D8-4C6C-821F-71755E863FA2}" dt="2026-09-16T00:43:08.967" v="872" actId="478"/>
           <ac:spMkLst>
             <pc:docMk/>
             <pc:sldMk cId="1755182162" sldId="269"/>
             <ac:spMk id="2" creationId="{98899C46-9E05-9DC8-C426-2C65F1A4E528}"/>
           </ac:spMkLst>
         </pc:spChg>
+        <pc:spChg chg="add del">
+          <ac:chgData name="Steve Mutrux" userId="4fa98d0c-dc66-4728-b09b-a88e22e95094" providerId="ADAL" clId="{421BD283-33D8-4C6C-821F-71755E863FA2}" dt="2026-09-16T00:42:30.834" v="859" actId="478"/>
+          <ac:spMkLst>
+            <pc:docMk/>
+            <pc:sldMk cId="1755182162" sldId="269"/>
+            <ac:spMk id="4" creationId="{9D074477-3D77-AC6D-5F95-C6900C660E61}"/>
+          </ac:spMkLst>
+        </pc:spChg>
+        <pc:spChg chg="add mod">
+          <ac:chgData name="Steve Mutrux" userId="4fa98d0c-dc66-4728-b09b-a88e22e95094" providerId="ADAL" clId="{421BD283-33D8-4C6C-821F-71755E863FA2}" dt="2026-09-16T00:46:00.079" v="911" actId="207"/>
+          <ac:spMkLst>
+            <pc:docMk/>
+            <pc:sldMk cId="1755182162" sldId="269"/>
+            <ac:spMk id="6" creationId="{DE0AABFC-72E2-9D06-FC3C-5D2C8EFA51D3}"/>
+          </ac:spMkLst>
+        </pc:spChg>
+        <pc:spChg chg="add mod">
+          <ac:chgData name="Steve Mutrux" userId="4fa98d0c-dc66-4728-b09b-a88e22e95094" providerId="ADAL" clId="{421BD283-33D8-4C6C-821F-71755E863FA2}" dt="2026-09-16T01:32:55.280" v="2269" actId="14100"/>
+          <ac:spMkLst>
+            <pc:docMk/>
+            <pc:sldMk cId="1755182162" sldId="269"/>
+            <ac:spMk id="8" creationId="{99DF9151-06C6-FF03-633D-97C04C35ADF6}"/>
+          </ac:spMkLst>
+        </pc:spChg>
       </pc:sldChg>
       <pc:sldChg chg="addSp delSp modSp add mod ord">
-        <pc:chgData name="Steve Mutrux" userId="4fa98d0c-dc66-4728-b09b-a88e22e95094" providerId="ADAL" clId="{421BD283-33D8-4C6C-821F-71755E863FA2}" dt="2026-09-15T18:28:18.737" v="659" actId="2710"/>
+        <pc:chgData name="Steve Mutrux" userId="4fa98d0c-dc66-4728-b09b-a88e22e95094" providerId="ADAL" clId="{421BD283-33D8-4C6C-821F-71755E863FA2}" dt="2026-09-16T00:49:00.986" v="935" actId="207"/>
         <pc:sldMkLst>
           <pc:docMk/>
           <pc:sldMk cId="2049535269" sldId="270"/>
         </pc:sldMkLst>
-        <pc:spChg chg="mod">
-          <ac:chgData name="Steve Mutrux" userId="4fa98d0c-dc66-4728-b09b-a88e22e95094" providerId="ADAL" clId="{421BD283-33D8-4C6C-821F-71755E863FA2}" dt="2026-09-15T18:28:18.737" v="659" actId="2710"/>
+        <pc:spChg chg="del mod">
+          <ac:chgData name="Steve Mutrux" userId="4fa98d0c-dc66-4728-b09b-a88e22e95094" providerId="ADAL" clId="{421BD283-33D8-4C6C-821F-71755E863FA2}" dt="2026-09-16T00:39:08.755" v="728" actId="478"/>
           <ac:spMkLst>
             <pc:docMk/>
             <pc:sldMk cId="2049535269" sldId="270"/>
@@ -470,15 +906,23 @@
             <ac:spMk id="4" creationId="{93D1B975-23AA-D332-2B01-31BE712CDC3A}"/>
           </ac:spMkLst>
         </pc:spChg>
+        <pc:spChg chg="add mod">
+          <ac:chgData name="Steve Mutrux" userId="4fa98d0c-dc66-4728-b09b-a88e22e95094" providerId="ADAL" clId="{421BD283-33D8-4C6C-821F-71755E863FA2}" dt="2026-09-16T00:49:00.986" v="935" actId="207"/>
+          <ac:spMkLst>
+            <pc:docMk/>
+            <pc:sldMk cId="2049535269" sldId="270"/>
+            <ac:spMk id="5" creationId="{C0C4D05C-8AD1-4702-C50E-A96CC6F600F5}"/>
+          </ac:spMkLst>
+        </pc:spChg>
       </pc:sldChg>
-      <pc:sldChg chg="modSp add mod">
-        <pc:chgData name="Steve Mutrux" userId="4fa98d0c-dc66-4728-b09b-a88e22e95094" providerId="ADAL" clId="{421BD283-33D8-4C6C-821F-71755E863FA2}" dt="2026-09-15T17:35:47.186" v="210" actId="20577"/>
+      <pc:sldChg chg="delSp modSp add mod">
+        <pc:chgData name="Steve Mutrux" userId="4fa98d0c-dc66-4728-b09b-a88e22e95094" providerId="ADAL" clId="{421BD283-33D8-4C6C-821F-71755E863FA2}" dt="2026-09-16T00:43:04.454" v="870" actId="478"/>
         <pc:sldMkLst>
           <pc:docMk/>
           <pc:sldMk cId="1557603729" sldId="271"/>
         </pc:sldMkLst>
-        <pc:spChg chg="mod">
-          <ac:chgData name="Steve Mutrux" userId="4fa98d0c-dc66-4728-b09b-a88e22e95094" providerId="ADAL" clId="{421BD283-33D8-4C6C-821F-71755E863FA2}" dt="2026-09-15T17:35:47.186" v="210" actId="20577"/>
+        <pc:spChg chg="del mod">
+          <ac:chgData name="Steve Mutrux" userId="4fa98d0c-dc66-4728-b09b-a88e22e95094" providerId="ADAL" clId="{421BD283-33D8-4C6C-821F-71755E863FA2}" dt="2026-09-16T00:43:04.454" v="870" actId="478"/>
           <ac:spMkLst>
             <pc:docMk/>
             <pc:sldMk cId="1557603729" sldId="271"/>
@@ -486,16 +930,824 @@
           </ac:spMkLst>
         </pc:spChg>
       </pc:sldChg>
-      <pc:sldChg chg="add">
-        <pc:chgData name="Steve Mutrux" userId="4fa98d0c-dc66-4728-b09b-a88e22e95094" providerId="ADAL" clId="{421BD283-33D8-4C6C-821F-71755E863FA2}" dt="2026-09-15T17:37:22.720" v="258"/>
+      <pc:sldChg chg="addSp delSp modSp add mod">
+        <pc:chgData name="Steve Mutrux" userId="4fa98d0c-dc66-4728-b09b-a88e22e95094" providerId="ADAL" clId="{421BD283-33D8-4C6C-821F-71755E863FA2}" dt="2026-09-16T00:46:14.001" v="915" actId="478"/>
         <pc:sldMkLst>
           <pc:docMk/>
           <pc:sldMk cId="1194673410" sldId="272"/>
         </pc:sldMkLst>
+        <pc:spChg chg="del">
+          <ac:chgData name="Steve Mutrux" userId="4fa98d0c-dc66-4728-b09b-a88e22e95094" providerId="ADAL" clId="{421BD283-33D8-4C6C-821F-71755E863FA2}" dt="2026-09-16T00:46:14.001" v="915" actId="478"/>
+          <ac:spMkLst>
+            <pc:docMk/>
+            <pc:sldMk cId="1194673410" sldId="272"/>
+            <ac:spMk id="2" creationId="{939024A9-D0D1-B303-54D7-9B51CE76A009}"/>
+          </ac:spMkLst>
+        </pc:spChg>
+        <pc:spChg chg="add del mod">
+          <ac:chgData name="Steve Mutrux" userId="4fa98d0c-dc66-4728-b09b-a88e22e95094" providerId="ADAL" clId="{421BD283-33D8-4C6C-821F-71755E863FA2}" dt="2026-09-16T00:42:19.867" v="853" actId="478"/>
+          <ac:spMkLst>
+            <pc:docMk/>
+            <pc:sldMk cId="1194673410" sldId="272"/>
+            <ac:spMk id="4" creationId="{64A8FB32-00B1-B038-6ABD-C376D8B9CD8A}"/>
+          </ac:spMkLst>
+        </pc:spChg>
+        <pc:spChg chg="add del">
+          <ac:chgData name="Steve Mutrux" userId="4fa98d0c-dc66-4728-b09b-a88e22e95094" providerId="ADAL" clId="{421BD283-33D8-4C6C-821F-71755E863FA2}" dt="2026-09-16T00:39:13.953" v="733" actId="22"/>
+          <ac:spMkLst>
+            <pc:docMk/>
+            <pc:sldMk cId="1194673410" sldId="272"/>
+            <ac:spMk id="6" creationId="{6B180316-7B74-BE2C-6203-1CA10C2658DF}"/>
+          </ac:spMkLst>
+        </pc:spChg>
+        <pc:spChg chg="add mod">
+          <ac:chgData name="Steve Mutrux" userId="4fa98d0c-dc66-4728-b09b-a88e22e95094" providerId="ADAL" clId="{421BD283-33D8-4C6C-821F-71755E863FA2}" dt="2026-09-16T00:45:38.256" v="906" actId="207"/>
+          <ac:spMkLst>
+            <pc:docMk/>
+            <pc:sldMk cId="1194673410" sldId="272"/>
+            <ac:spMk id="8" creationId="{6D7F7FB9-948B-2F04-F5F0-3961BF3B13D4}"/>
+          </ac:spMkLst>
+        </pc:spChg>
+      </pc:sldChg>
+      <pc:sldChg chg="addSp modSp add mod modAnim">
+        <pc:chgData name="Steve Mutrux" userId="4fa98d0c-dc66-4728-b09b-a88e22e95094" providerId="ADAL" clId="{421BD283-33D8-4C6C-821F-71755E863FA2}" dt="2026-09-16T02:45:05.721" v="3071"/>
+        <pc:sldMkLst>
+          <pc:docMk/>
+          <pc:sldMk cId="3925825761" sldId="273"/>
+        </pc:sldMkLst>
+        <pc:spChg chg="add mod ord">
+          <ac:chgData name="Steve Mutrux" userId="4fa98d0c-dc66-4728-b09b-a88e22e95094" providerId="ADAL" clId="{421BD283-33D8-4C6C-821F-71755E863FA2}" dt="2026-09-16T02:41:14.688" v="3048" actId="1036"/>
+          <ac:spMkLst>
+            <pc:docMk/>
+            <pc:sldMk cId="3925825761" sldId="273"/>
+            <ac:spMk id="2" creationId="{ADAD1B22-E98A-1F1C-0E10-FBB0D4FDB4E7}"/>
+          </ac:spMkLst>
+        </pc:spChg>
+        <pc:spChg chg="add mod">
+          <ac:chgData name="Steve Mutrux" userId="4fa98d0c-dc66-4728-b09b-a88e22e95094" providerId="ADAL" clId="{421BD283-33D8-4C6C-821F-71755E863FA2}" dt="2026-09-16T02:40:09.382" v="3044"/>
+          <ac:spMkLst>
+            <pc:docMk/>
+            <pc:sldMk cId="3925825761" sldId="273"/>
+            <ac:spMk id="3" creationId="{3509C406-746C-2D41-7411-CAD9A5B245CC}"/>
+          </ac:spMkLst>
+        </pc:spChg>
+        <pc:spChg chg="mod">
+          <ac:chgData name="Steve Mutrux" userId="4fa98d0c-dc66-4728-b09b-a88e22e95094" providerId="ADAL" clId="{421BD283-33D8-4C6C-821F-71755E863FA2}" dt="2026-09-16T02:40:09.382" v="3044"/>
+          <ac:spMkLst>
+            <pc:docMk/>
+            <pc:sldMk cId="3925825761" sldId="273"/>
+            <ac:spMk id="7" creationId="{13E83B4C-D3F0-0B41-2951-5D1ED5B07CF7}"/>
+          </ac:spMkLst>
+        </pc:spChg>
+        <pc:spChg chg="mod">
+          <ac:chgData name="Steve Mutrux" userId="4fa98d0c-dc66-4728-b09b-a88e22e95094" providerId="ADAL" clId="{421BD283-33D8-4C6C-821F-71755E863FA2}" dt="2026-09-16T02:40:09.382" v="3044"/>
+          <ac:spMkLst>
+            <pc:docMk/>
+            <pc:sldMk cId="3925825761" sldId="273"/>
+            <ac:spMk id="8" creationId="{89B9FE66-22FF-D079-0855-0C0B63B4511F}"/>
+          </ac:spMkLst>
+        </pc:spChg>
+        <pc:spChg chg="mod">
+          <ac:chgData name="Steve Mutrux" userId="4fa98d0c-dc66-4728-b09b-a88e22e95094" providerId="ADAL" clId="{421BD283-33D8-4C6C-821F-71755E863FA2}" dt="2026-09-16T02:40:09.382" v="3044"/>
+          <ac:spMkLst>
+            <pc:docMk/>
+            <pc:sldMk cId="3925825761" sldId="273"/>
+            <ac:spMk id="10" creationId="{66B2A3DE-2865-9335-0D82-30F2149DAC1B}"/>
+          </ac:spMkLst>
+        </pc:spChg>
+        <pc:spChg chg="mod">
+          <ac:chgData name="Steve Mutrux" userId="4fa98d0c-dc66-4728-b09b-a88e22e95094" providerId="ADAL" clId="{421BD283-33D8-4C6C-821F-71755E863FA2}" dt="2026-09-16T02:40:09.382" v="3044"/>
+          <ac:spMkLst>
+            <pc:docMk/>
+            <pc:sldMk cId="3925825761" sldId="273"/>
+            <ac:spMk id="11" creationId="{E025BE1E-2CB8-69B3-6BA0-3467CFC07D78}"/>
+          </ac:spMkLst>
+        </pc:spChg>
+        <pc:grpChg chg="add mod ord">
+          <ac:chgData name="Steve Mutrux" userId="4fa98d0c-dc66-4728-b09b-a88e22e95094" providerId="ADAL" clId="{421BD283-33D8-4C6C-821F-71755E863FA2}" dt="2026-09-16T02:41:14.688" v="3048" actId="1036"/>
+          <ac:grpSpMkLst>
+            <pc:docMk/>
+            <pc:sldMk cId="3925825761" sldId="273"/>
+            <ac:grpSpMk id="6" creationId="{BE8F80B6-389F-2079-3028-3EE34EBC6005}"/>
+          </ac:grpSpMkLst>
+        </pc:grpChg>
+        <pc:grpChg chg="add mod ord">
+          <ac:chgData name="Steve Mutrux" userId="4fa98d0c-dc66-4728-b09b-a88e22e95094" providerId="ADAL" clId="{421BD283-33D8-4C6C-821F-71755E863FA2}" dt="2026-09-16T02:41:14.688" v="3048" actId="1036"/>
+          <ac:grpSpMkLst>
+            <pc:docMk/>
+            <pc:sldMk cId="3925825761" sldId="273"/>
+            <ac:grpSpMk id="9" creationId="{DC473272-EA6A-3325-C544-CA6A24D4FC9E}"/>
+          </ac:grpSpMkLst>
+        </pc:grpChg>
+      </pc:sldChg>
+      <pc:sldChg chg="addSp delSp modSp add mod delAnim modAnim modNotesTx">
+        <pc:chgData name="Steve Mutrux" userId="4fa98d0c-dc66-4728-b09b-a88e22e95094" providerId="ADAL" clId="{421BD283-33D8-4C6C-821F-71755E863FA2}" dt="2026-09-16T02:46:57.028" v="3072"/>
+        <pc:sldMkLst>
+          <pc:docMk/>
+          <pc:sldMk cId="859702855" sldId="274"/>
+        </pc:sldMkLst>
+        <pc:spChg chg="add ord">
+          <ac:chgData name="Steve Mutrux" userId="4fa98d0c-dc66-4728-b09b-a88e22e95094" providerId="ADAL" clId="{421BD283-33D8-4C6C-821F-71755E863FA2}" dt="2026-09-16T02:09:26.719" v="2900" actId="167"/>
+          <ac:spMkLst>
+            <pc:docMk/>
+            <pc:sldMk cId="859702855" sldId="274"/>
+            <ac:spMk id="3" creationId="{E708DE89-EBCB-3EDF-87C7-829832B351D2}"/>
+          </ac:spMkLst>
+        </pc:spChg>
+        <pc:spChg chg="mod">
+          <ac:chgData name="Steve Mutrux" userId="4fa98d0c-dc66-4728-b09b-a88e22e95094" providerId="ADAL" clId="{421BD283-33D8-4C6C-821F-71755E863FA2}" dt="2026-09-16T02:23:54.813" v="2963"/>
+          <ac:spMkLst>
+            <pc:docMk/>
+            <pc:sldMk cId="859702855" sldId="274"/>
+            <ac:spMk id="6" creationId="{A9B1EA98-EB40-4CB6-A104-255865A5740D}"/>
+          </ac:spMkLst>
+        </pc:spChg>
+        <pc:spChg chg="mod">
+          <ac:chgData name="Steve Mutrux" userId="4fa98d0c-dc66-4728-b09b-a88e22e95094" providerId="ADAL" clId="{421BD283-33D8-4C6C-821F-71755E863FA2}" dt="2026-09-16T02:24:34.127" v="2970" actId="1035"/>
+          <ac:spMkLst>
+            <pc:docMk/>
+            <pc:sldMk cId="859702855" sldId="274"/>
+            <ac:spMk id="7" creationId="{B4A8BA7C-8C7E-202C-DF5F-646269DBFFF3}"/>
+          </ac:spMkLst>
+        </pc:spChg>
+        <pc:spChg chg="ord">
+          <ac:chgData name="Steve Mutrux" userId="4fa98d0c-dc66-4728-b09b-a88e22e95094" providerId="ADAL" clId="{421BD283-33D8-4C6C-821F-71755E863FA2}" dt="2026-09-16T02:11:51.270" v="2916" actId="167"/>
+          <ac:spMkLst>
+            <pc:docMk/>
+            <pc:sldMk cId="859702855" sldId="274"/>
+            <ac:spMk id="9" creationId="{0488ED9F-6438-678E-E4DD-BB6D15FDBB1D}"/>
+          </ac:spMkLst>
+        </pc:spChg>
+        <pc:spChg chg="mod ord">
+          <ac:chgData name="Steve Mutrux" userId="4fa98d0c-dc66-4728-b09b-a88e22e95094" providerId="ADAL" clId="{421BD283-33D8-4C6C-821F-71755E863FA2}" dt="2026-09-16T02:24:47.014" v="2973" actId="14100"/>
+          <ac:spMkLst>
+            <pc:docMk/>
+            <pc:sldMk cId="859702855" sldId="274"/>
+            <ac:spMk id="11" creationId="{01FD20CE-420D-5D93-0EE6-EC9658D1E720}"/>
+          </ac:spMkLst>
+        </pc:spChg>
+        <pc:spChg chg="del mod">
+          <ac:chgData name="Steve Mutrux" userId="4fa98d0c-dc66-4728-b09b-a88e22e95094" providerId="ADAL" clId="{421BD283-33D8-4C6C-821F-71755E863FA2}" dt="2026-09-16T02:08:39.108" v="2889" actId="478"/>
+          <ac:spMkLst>
+            <pc:docMk/>
+            <pc:sldMk cId="859702855" sldId="274"/>
+            <ac:spMk id="18" creationId="{3288F7ED-2806-9B1F-B32B-CB7C59B37C2B}"/>
+          </ac:spMkLst>
+        </pc:spChg>
+        <pc:spChg chg="del">
+          <ac:chgData name="Steve Mutrux" userId="4fa98d0c-dc66-4728-b09b-a88e22e95094" providerId="ADAL" clId="{421BD283-33D8-4C6C-821F-71755E863FA2}" dt="2026-09-16T02:08:41.758" v="2892" actId="478"/>
+          <ac:spMkLst>
+            <pc:docMk/>
+            <pc:sldMk cId="859702855" sldId="274"/>
+            <ac:spMk id="19" creationId="{C94A94E7-DDB7-3325-1AEA-1A201F538B5C}"/>
+          </ac:spMkLst>
+        </pc:spChg>
+        <pc:spChg chg="del">
+          <ac:chgData name="Steve Mutrux" userId="4fa98d0c-dc66-4728-b09b-a88e22e95094" providerId="ADAL" clId="{421BD283-33D8-4C6C-821F-71755E863FA2}" dt="2026-09-16T02:08:41.051" v="2891" actId="478"/>
+          <ac:spMkLst>
+            <pc:docMk/>
+            <pc:sldMk cId="859702855" sldId="274"/>
+            <ac:spMk id="20" creationId="{5980DB84-AECE-13E2-9066-0C115732599E}"/>
+          </ac:spMkLst>
+        </pc:spChg>
+        <pc:spChg chg="del">
+          <ac:chgData name="Steve Mutrux" userId="4fa98d0c-dc66-4728-b09b-a88e22e95094" providerId="ADAL" clId="{421BD283-33D8-4C6C-821F-71755E863FA2}" dt="2026-09-16T02:08:43.032" v="2893" actId="478"/>
+          <ac:spMkLst>
+            <pc:docMk/>
+            <pc:sldMk cId="859702855" sldId="274"/>
+            <ac:spMk id="21" creationId="{095E80ED-3582-BEB8-866C-476BD40548A5}"/>
+          </ac:spMkLst>
+        </pc:spChg>
+        <pc:spChg chg="del">
+          <ac:chgData name="Steve Mutrux" userId="4fa98d0c-dc66-4728-b09b-a88e22e95094" providerId="ADAL" clId="{421BD283-33D8-4C6C-821F-71755E863FA2}" dt="2026-09-16T02:08:44.321" v="2895" actId="478"/>
+          <ac:spMkLst>
+            <pc:docMk/>
+            <pc:sldMk cId="859702855" sldId="274"/>
+            <ac:spMk id="22" creationId="{C2BB10E2-8380-7431-56F7-929B0BDA422C}"/>
+          </ac:spMkLst>
+        </pc:spChg>
+        <pc:spChg chg="del">
+          <ac:chgData name="Steve Mutrux" userId="4fa98d0c-dc66-4728-b09b-a88e22e95094" providerId="ADAL" clId="{421BD283-33D8-4C6C-821F-71755E863FA2}" dt="2026-09-16T02:08:40.108" v="2890" actId="478"/>
+          <ac:spMkLst>
+            <pc:docMk/>
+            <pc:sldMk cId="859702855" sldId="274"/>
+            <ac:spMk id="23" creationId="{B456D9DD-B0E7-2CC1-7A73-32F948777BEE}"/>
+          </ac:spMkLst>
+        </pc:spChg>
+        <pc:spChg chg="del">
+          <ac:chgData name="Steve Mutrux" userId="4fa98d0c-dc66-4728-b09b-a88e22e95094" providerId="ADAL" clId="{421BD283-33D8-4C6C-821F-71755E863FA2}" dt="2026-09-16T02:08:43.717" v="2894" actId="478"/>
+          <ac:spMkLst>
+            <pc:docMk/>
+            <pc:sldMk cId="859702855" sldId="274"/>
+            <ac:spMk id="24" creationId="{E1864E2E-F8F9-C970-D221-B315584E2BE0}"/>
+          </ac:spMkLst>
+        </pc:spChg>
+        <pc:grpChg chg="add mod">
+          <ac:chgData name="Steve Mutrux" userId="4fa98d0c-dc66-4728-b09b-a88e22e95094" providerId="ADAL" clId="{421BD283-33D8-4C6C-821F-71755E863FA2}" dt="2026-09-16T02:24:39.846" v="2972" actId="1035"/>
+          <ac:grpSpMkLst>
+            <pc:docMk/>
+            <pc:sldMk cId="859702855" sldId="274"/>
+            <ac:grpSpMk id="4" creationId="{9BD9A52F-41BC-38EA-E934-69D56F8B495C}"/>
+          </ac:grpSpMkLst>
+        </pc:grpChg>
+        <pc:grpChg chg="ord">
+          <ac:chgData name="Steve Mutrux" userId="4fa98d0c-dc66-4728-b09b-a88e22e95094" providerId="ADAL" clId="{421BD283-33D8-4C6C-821F-71755E863FA2}" dt="2026-09-16T02:11:51.270" v="2916" actId="167"/>
+          <ac:grpSpMkLst>
+            <pc:docMk/>
+            <pc:sldMk cId="859702855" sldId="274"/>
+            <ac:grpSpMk id="14" creationId="{09FF16B3-5309-D404-0771-DCF26DB503B5}"/>
+          </ac:grpSpMkLst>
+        </pc:grpChg>
       </pc:sldChg>
     </pc:docChg>
   </pc:docChgLst>
 </pc:chgInfo>
+</file>
+
+<file path=ppt/notesMasters/notesMaster1.xml><?xml version="1.0" encoding="utf-8"?>
+<p:notesMaster xmlns:a="http://schemas.openxmlformats.org/drawingml/2006/main" xmlns:r="http://schemas.openxmlformats.org/officeDocument/2006/relationships" xmlns:p="http://schemas.openxmlformats.org/presentationml/2006/main">
+  <p:cSld>
+    <p:bg>
+      <p:bgRef idx="1001">
+        <a:schemeClr val="bg1"/>
+      </p:bgRef>
+    </p:bg>
+    <p:spTree>
+      <p:nvGrpSpPr>
+        <p:cNvPr id="1" name=""/>
+        <p:cNvGrpSpPr/>
+        <p:nvPr/>
+      </p:nvGrpSpPr>
+      <p:grpSpPr>
+        <a:xfrm>
+          <a:off x="0" y="0"/>
+          <a:ext cx="0" cy="0"/>
+          <a:chOff x="0" y="0"/>
+          <a:chExt cx="0" cy="0"/>
+        </a:xfrm>
+      </p:grpSpPr>
+      <p:sp>
+        <p:nvSpPr>
+          <p:cNvPr id="2" name="Header Placeholder 1"/>
+          <p:cNvSpPr>
+            <a:spLocks noGrp="1"/>
+          </p:cNvSpPr>
+          <p:nvPr>
+            <p:ph type="hdr" sz="quarter"/>
+          </p:nvPr>
+        </p:nvSpPr>
+        <p:spPr>
+          <a:xfrm>
+            <a:off x="0" y="0"/>
+            <a:ext cx="2971800" cy="458788"/>
+          </a:xfrm>
+          <a:prstGeom prst="rect">
+            <a:avLst/>
+          </a:prstGeom>
+        </p:spPr>
+        <p:txBody>
+          <a:bodyPr vert="horz" lIns="91440" tIns="45720" rIns="91440" bIns="45720" rtlCol="0"/>
+          <a:lstStyle>
+            <a:lvl1pPr algn="l">
+              <a:defRPr sz="1200"/>
+            </a:lvl1pPr>
+          </a:lstStyle>
+          <a:p>
+            <a:endParaRPr lang="en-CA"/>
+          </a:p>
+        </p:txBody>
+      </p:sp>
+      <p:sp>
+        <p:nvSpPr>
+          <p:cNvPr id="3" name="Date Placeholder 2"/>
+          <p:cNvSpPr>
+            <a:spLocks noGrp="1"/>
+          </p:cNvSpPr>
+          <p:nvPr>
+            <p:ph type="dt" idx="1"/>
+          </p:nvPr>
+        </p:nvSpPr>
+        <p:spPr>
+          <a:xfrm>
+            <a:off x="3884613" y="0"/>
+            <a:ext cx="2971800" cy="458788"/>
+          </a:xfrm>
+          <a:prstGeom prst="rect">
+            <a:avLst/>
+          </a:prstGeom>
+        </p:spPr>
+        <p:txBody>
+          <a:bodyPr vert="horz" lIns="91440" tIns="45720" rIns="91440" bIns="45720" rtlCol="0"/>
+          <a:lstStyle>
+            <a:lvl1pPr algn="r">
+              <a:defRPr sz="1200"/>
+            </a:lvl1pPr>
+          </a:lstStyle>
+          <a:p>
+            <a:fld id="{30F4E063-30EE-4103-AD49-D9727BB8755E}" type="datetimeFigureOut">
+              <a:rPr lang="en-CA" smtClean="0"/>
+              <a:t>2026-09-15</a:t>
+            </a:fld>
+            <a:endParaRPr lang="en-CA"/>
+          </a:p>
+        </p:txBody>
+      </p:sp>
+      <p:sp>
+        <p:nvSpPr>
+          <p:cNvPr id="4" name="Slide Image Placeholder 3"/>
+          <p:cNvSpPr>
+            <a:spLocks noGrp="1" noRot="1" noChangeAspect="1"/>
+          </p:cNvSpPr>
+          <p:nvPr>
+            <p:ph type="sldImg" idx="2"/>
+          </p:nvPr>
+        </p:nvSpPr>
+        <p:spPr>
+          <a:xfrm>
+            <a:off x="685800" y="1143000"/>
+            <a:ext cx="5486400" cy="3086100"/>
+          </a:xfrm>
+          <a:prstGeom prst="rect">
+            <a:avLst/>
+          </a:prstGeom>
+          <a:noFill/>
+          <a:ln w="12700">
+            <a:solidFill>
+              <a:prstClr val="black"/>
+            </a:solidFill>
+          </a:ln>
+        </p:spPr>
+        <p:txBody>
+          <a:bodyPr vert="horz" lIns="91440" tIns="45720" rIns="91440" bIns="45720" rtlCol="0" anchor="ctr"/>
+          <a:lstStyle/>
+          <a:p>
+            <a:endParaRPr lang="en-CA"/>
+          </a:p>
+        </p:txBody>
+      </p:sp>
+      <p:sp>
+        <p:nvSpPr>
+          <p:cNvPr id="5" name="Notes Placeholder 4"/>
+          <p:cNvSpPr>
+            <a:spLocks noGrp="1"/>
+          </p:cNvSpPr>
+          <p:nvPr>
+            <p:ph type="body" sz="quarter" idx="3"/>
+          </p:nvPr>
+        </p:nvSpPr>
+        <p:spPr>
+          <a:xfrm>
+            <a:off x="685800" y="4400550"/>
+            <a:ext cx="5486400" cy="3600450"/>
+          </a:xfrm>
+          <a:prstGeom prst="rect">
+            <a:avLst/>
+          </a:prstGeom>
+        </p:spPr>
+        <p:txBody>
+          <a:bodyPr vert="horz" lIns="91440" tIns="45720" rIns="91440" bIns="45720" rtlCol="0"/>
+          <a:lstStyle/>
+          <a:p>
+            <a:pPr lvl="0"/>
+            <a:r>
+              <a:rPr lang="en-US"/>
+              <a:t>Click to edit Master text styles</a:t>
+            </a:r>
+          </a:p>
+          <a:p>
+            <a:pPr lvl="1"/>
+            <a:r>
+              <a:rPr lang="en-US"/>
+              <a:t>Second level</a:t>
+            </a:r>
+          </a:p>
+          <a:p>
+            <a:pPr lvl="2"/>
+            <a:r>
+              <a:rPr lang="en-US"/>
+              <a:t>Third level</a:t>
+            </a:r>
+          </a:p>
+          <a:p>
+            <a:pPr lvl="3"/>
+            <a:r>
+              <a:rPr lang="en-US"/>
+              <a:t>Fourth level</a:t>
+            </a:r>
+          </a:p>
+          <a:p>
+            <a:pPr lvl="4"/>
+            <a:r>
+              <a:rPr lang="en-US"/>
+              <a:t>Fifth level</a:t>
+            </a:r>
+            <a:endParaRPr lang="en-CA"/>
+          </a:p>
+        </p:txBody>
+      </p:sp>
+      <p:sp>
+        <p:nvSpPr>
+          <p:cNvPr id="6" name="Footer Placeholder 5"/>
+          <p:cNvSpPr>
+            <a:spLocks noGrp="1"/>
+          </p:cNvSpPr>
+          <p:nvPr>
+            <p:ph type="ftr" sz="quarter" idx="4"/>
+          </p:nvPr>
+        </p:nvSpPr>
+        <p:spPr>
+          <a:xfrm>
+            <a:off x="0" y="8685213"/>
+            <a:ext cx="2971800" cy="458787"/>
+          </a:xfrm>
+          <a:prstGeom prst="rect">
+            <a:avLst/>
+          </a:prstGeom>
+        </p:spPr>
+        <p:txBody>
+          <a:bodyPr vert="horz" lIns="91440" tIns="45720" rIns="91440" bIns="45720" rtlCol="0" anchor="b"/>
+          <a:lstStyle>
+            <a:lvl1pPr algn="l">
+              <a:defRPr sz="1200"/>
+            </a:lvl1pPr>
+          </a:lstStyle>
+          <a:p>
+            <a:endParaRPr lang="en-CA"/>
+          </a:p>
+        </p:txBody>
+      </p:sp>
+      <p:sp>
+        <p:nvSpPr>
+          <p:cNvPr id="7" name="Slide Number Placeholder 6"/>
+          <p:cNvSpPr>
+            <a:spLocks noGrp="1"/>
+          </p:cNvSpPr>
+          <p:nvPr>
+            <p:ph type="sldNum" sz="quarter" idx="5"/>
+          </p:nvPr>
+        </p:nvSpPr>
+        <p:spPr>
+          <a:xfrm>
+            <a:off x="3884613" y="8685213"/>
+            <a:ext cx="2971800" cy="458787"/>
+          </a:xfrm>
+          <a:prstGeom prst="rect">
+            <a:avLst/>
+          </a:prstGeom>
+        </p:spPr>
+        <p:txBody>
+          <a:bodyPr vert="horz" lIns="91440" tIns="45720" rIns="91440" bIns="45720" rtlCol="0" anchor="b"/>
+          <a:lstStyle>
+            <a:lvl1pPr algn="r">
+              <a:defRPr sz="1200"/>
+            </a:lvl1pPr>
+          </a:lstStyle>
+          <a:p>
+            <a:fld id="{47B22D95-B55A-456E-B882-ED519B72F1D2}" type="slidenum">
+              <a:rPr lang="en-CA" smtClean="0"/>
+              <a:t>‹#›</a:t>
+            </a:fld>
+            <a:endParaRPr lang="en-CA"/>
+          </a:p>
+        </p:txBody>
+      </p:sp>
+    </p:spTree>
+    <p:extLst>
+      <p:ext uri="{BB962C8B-B14F-4D97-AF65-F5344CB8AC3E}">
+        <p14:creationId xmlns:p14="http://schemas.microsoft.com/office/powerpoint/2010/main" val="3728577123"/>
+      </p:ext>
+    </p:extLst>
+  </p:cSld>
+  <p:clrMap bg1="lt1" tx1="dk1" bg2="lt2" tx2="dk2" accent1="accent1" accent2="accent2" accent3="accent3" accent4="accent4" accent5="accent5" accent6="accent6" hlink="hlink" folHlink="folHlink"/>
+  <p:notesStyle>
+    <a:lvl1pPr marL="0" algn="l" defTabSz="914400" rtl="0" eaLnBrk="1" latinLnBrk="0" hangingPunct="1">
+      <a:defRPr sz="1200" kern="1200">
+        <a:solidFill>
+          <a:schemeClr val="tx1"/>
+        </a:solidFill>
+        <a:latin typeface="+mn-lt"/>
+        <a:ea typeface="+mn-ea"/>
+        <a:cs typeface="+mn-cs"/>
+      </a:defRPr>
+    </a:lvl1pPr>
+    <a:lvl2pPr marL="457200" algn="l" defTabSz="914400" rtl="0" eaLnBrk="1" latinLnBrk="0" hangingPunct="1">
+      <a:defRPr sz="1200" kern="1200">
+        <a:solidFill>
+          <a:schemeClr val="tx1"/>
+        </a:solidFill>
+        <a:latin typeface="+mn-lt"/>
+        <a:ea typeface="+mn-ea"/>
+        <a:cs typeface="+mn-cs"/>
+      </a:defRPr>
+    </a:lvl2pPr>
+    <a:lvl3pPr marL="914400" algn="l" defTabSz="914400" rtl="0" eaLnBrk="1" latinLnBrk="0" hangingPunct="1">
+      <a:defRPr sz="1200" kern="1200">
+        <a:solidFill>
+          <a:schemeClr val="tx1"/>
+        </a:solidFill>
+        <a:latin typeface="+mn-lt"/>
+        <a:ea typeface="+mn-ea"/>
+        <a:cs typeface="+mn-cs"/>
+      </a:defRPr>
+    </a:lvl3pPr>
+    <a:lvl4pPr marL="1371600" algn="l" defTabSz="914400" rtl="0" eaLnBrk="1" latinLnBrk="0" hangingPunct="1">
+      <a:defRPr sz="1200" kern="1200">
+        <a:solidFill>
+          <a:schemeClr val="tx1"/>
+        </a:solidFill>
+        <a:latin typeface="+mn-lt"/>
+        <a:ea typeface="+mn-ea"/>
+        <a:cs typeface="+mn-cs"/>
+      </a:defRPr>
+    </a:lvl4pPr>
+    <a:lvl5pPr marL="1828800" algn="l" defTabSz="914400" rtl="0" eaLnBrk="1" latinLnBrk="0" hangingPunct="1">
+      <a:defRPr sz="1200" kern="1200">
+        <a:solidFill>
+          <a:schemeClr val="tx1"/>
+        </a:solidFill>
+        <a:latin typeface="+mn-lt"/>
+        <a:ea typeface="+mn-ea"/>
+        <a:cs typeface="+mn-cs"/>
+      </a:defRPr>
+    </a:lvl5pPr>
+    <a:lvl6pPr marL="2286000" algn="l" defTabSz="914400" rtl="0" eaLnBrk="1" latinLnBrk="0" hangingPunct="1">
+      <a:defRPr sz="1200" kern="1200">
+        <a:solidFill>
+          <a:schemeClr val="tx1"/>
+        </a:solidFill>
+        <a:latin typeface="+mn-lt"/>
+        <a:ea typeface="+mn-ea"/>
+        <a:cs typeface="+mn-cs"/>
+      </a:defRPr>
+    </a:lvl6pPr>
+    <a:lvl7pPr marL="2743200" algn="l" defTabSz="914400" rtl="0" eaLnBrk="1" latinLnBrk="0" hangingPunct="1">
+      <a:defRPr sz="1200" kern="1200">
+        <a:solidFill>
+          <a:schemeClr val="tx1"/>
+        </a:solidFill>
+        <a:latin typeface="+mn-lt"/>
+        <a:ea typeface="+mn-ea"/>
+        <a:cs typeface="+mn-cs"/>
+      </a:defRPr>
+    </a:lvl7pPr>
+    <a:lvl8pPr marL="3200400" algn="l" defTabSz="914400" rtl="0" eaLnBrk="1" latinLnBrk="0" hangingPunct="1">
+      <a:defRPr sz="1200" kern="1200">
+        <a:solidFill>
+          <a:schemeClr val="tx1"/>
+        </a:solidFill>
+        <a:latin typeface="+mn-lt"/>
+        <a:ea typeface="+mn-ea"/>
+        <a:cs typeface="+mn-cs"/>
+      </a:defRPr>
+    </a:lvl8pPr>
+    <a:lvl9pPr marL="3657600" algn="l" defTabSz="914400" rtl="0" eaLnBrk="1" latinLnBrk="0" hangingPunct="1">
+      <a:defRPr sz="1200" kern="1200">
+        <a:solidFill>
+          <a:schemeClr val="tx1"/>
+        </a:solidFill>
+        <a:latin typeface="+mn-lt"/>
+        <a:ea typeface="+mn-ea"/>
+        <a:cs typeface="+mn-cs"/>
+      </a:defRPr>
+    </a:lvl9pPr>
+  </p:notesStyle>
+</p:notesMaster>
+</file>
+
+<file path=ppt/notesSlides/notesSlide1.xml><?xml version="1.0" encoding="utf-8"?>
+<p:notes xmlns:a="http://schemas.openxmlformats.org/drawingml/2006/main" xmlns:r="http://schemas.openxmlformats.org/officeDocument/2006/relationships" xmlns:p="http://schemas.openxmlformats.org/presentationml/2006/main">
+  <p:cSld>
+    <p:spTree>
+      <p:nvGrpSpPr>
+        <p:cNvPr id="1" name=""/>
+        <p:cNvGrpSpPr/>
+        <p:nvPr/>
+      </p:nvGrpSpPr>
+      <p:grpSpPr>
+        <a:xfrm>
+          <a:off x="0" y="0"/>
+          <a:ext cx="0" cy="0"/>
+          <a:chOff x="0" y="0"/>
+          <a:chExt cx="0" cy="0"/>
+        </a:xfrm>
+      </p:grpSpPr>
+      <p:sp>
+        <p:nvSpPr>
+          <p:cNvPr id="2" name="Slide Image Placeholder 1"/>
+          <p:cNvSpPr>
+            <a:spLocks noGrp="1" noRot="1" noChangeAspect="1"/>
+          </p:cNvSpPr>
+          <p:nvPr>
+            <p:ph type="sldImg"/>
+          </p:nvPr>
+        </p:nvSpPr>
+        <p:spPr/>
+      </p:sp>
+      <p:sp>
+        <p:nvSpPr>
+          <p:cNvPr id="3" name="Notes Placeholder 2"/>
+          <p:cNvSpPr>
+            <a:spLocks noGrp="1"/>
+          </p:cNvSpPr>
+          <p:nvPr>
+            <p:ph type="body" idx="1"/>
+          </p:nvPr>
+        </p:nvSpPr>
+        <p:spPr/>
+        <p:txBody>
+          <a:bodyPr/>
+          <a:lstStyle/>
+          <a:p>
+            <a:r>
+              <a:rPr lang="en-CA" sz="1200" b="0" i="0" dirty="0">
+                <a:effectLst/>
+                <a:latin typeface="Kumbh Sans" pitchFamily="2" charset="0"/>
+                <a:cs typeface="Kumbh Sans" pitchFamily="2" charset="0"/>
+              </a:rPr>
+              <a:t>Mission: At Adestria, we create, develop, and implement dependable software solutions that address practical issues. We empower companies to confidently expand operations, enhance customer experience, and streamline their online presence through responsive front end design, clean architecture, and efficient back end systems. </a:t>
+            </a:r>
+          </a:p>
+          <a:p>
+            <a:pPr marL="0" marR="0" lvl="0" indent="0" algn="l" defTabSz="914400" rtl="0" eaLnBrk="1" fontAlgn="auto" latinLnBrk="0" hangingPunct="1">
+              <a:lnSpc>
+                <a:spcPct val="100000"/>
+              </a:lnSpc>
+              <a:spcBef>
+                <a:spcPts val="0"/>
+              </a:spcBef>
+              <a:spcAft>
+                <a:spcPts val="0"/>
+              </a:spcAft>
+              <a:buClrTx/>
+              <a:buSzTx/>
+              <a:buFontTx/>
+              <a:buNone/>
+              <a:tabLst/>
+              <a:defRPr/>
+            </a:pPr>
+            <a:r>
+              <a:rPr lang="en-CA" sz="1200" b="0" i="0" dirty="0">
+                <a:effectLst/>
+                <a:latin typeface="Kumbh Sans" pitchFamily="2" charset="0"/>
+                <a:cs typeface="Kumbh Sans" pitchFamily="2" charset="0"/>
+              </a:rPr>
+              <a:t>Vision: To be a trustworthy technology partner with a reputation for creative software development, accessible digital design, and technical accuracy. By transforming complex requirements into accessible, and valuable user experiences, we hope to impact the direction of online and application systems in the future.</a:t>
+            </a:r>
+            <a:endParaRPr lang="en-CA" dirty="0">
+              <a:latin typeface="Kumbh Sans" pitchFamily="2" charset="0"/>
+              <a:cs typeface="Kumbh Sans" pitchFamily="2" charset="0"/>
+            </a:endParaRPr>
+          </a:p>
+          <a:p>
+            <a:endParaRPr lang="en-CA" dirty="0"/>
+          </a:p>
+        </p:txBody>
+      </p:sp>
+      <p:sp>
+        <p:nvSpPr>
+          <p:cNvPr id="4" name="Slide Number Placeholder 3"/>
+          <p:cNvSpPr>
+            <a:spLocks noGrp="1"/>
+          </p:cNvSpPr>
+          <p:nvPr>
+            <p:ph type="sldNum" sz="quarter" idx="5"/>
+          </p:nvPr>
+        </p:nvSpPr>
+        <p:spPr/>
+        <p:txBody>
+          <a:bodyPr/>
+          <a:lstStyle/>
+          <a:p>
+            <a:fld id="{47B22D95-B55A-456E-B882-ED519B72F1D2}" type="slidenum">
+              <a:rPr lang="en-CA" smtClean="0"/>
+              <a:t>3</a:t>
+            </a:fld>
+            <a:endParaRPr lang="en-CA"/>
+          </a:p>
+        </p:txBody>
+      </p:sp>
+    </p:spTree>
+    <p:extLst>
+      <p:ext uri="{BB962C8B-B14F-4D97-AF65-F5344CB8AC3E}">
+        <p14:creationId xmlns:p14="http://schemas.microsoft.com/office/powerpoint/2010/main" val="2462459054"/>
+      </p:ext>
+    </p:extLst>
+  </p:cSld>
+  <p:clrMapOvr>
+    <a:masterClrMapping/>
+  </p:clrMapOvr>
+</p:notes>
+</file>
+
+<file path=ppt/notesSlides/notesSlide2.xml><?xml version="1.0" encoding="utf-8"?>
+<p:notes xmlns:a="http://schemas.openxmlformats.org/drawingml/2006/main" xmlns:r="http://schemas.openxmlformats.org/officeDocument/2006/relationships" xmlns:p="http://schemas.openxmlformats.org/presentationml/2006/main">
+  <p:cSld>
+    <p:spTree>
+      <p:nvGrpSpPr>
+        <p:cNvPr id="1" name="">
+          <a:extLst>
+            <a:ext uri="{FF2B5EF4-FFF2-40B4-BE49-F238E27FC236}">
+              <a16:creationId xmlns:a16="http://schemas.microsoft.com/office/drawing/2014/main" id="{4A2046C7-5826-457D-CC6E-5C7C0412DA61}"/>
+            </a:ext>
+          </a:extLst>
+        </p:cNvPr>
+        <p:cNvGrpSpPr/>
+        <p:nvPr/>
+      </p:nvGrpSpPr>
+      <p:grpSpPr>
+        <a:xfrm>
+          <a:off x="0" y="0"/>
+          <a:ext cx="0" cy="0"/>
+          <a:chOff x="0" y="0"/>
+          <a:chExt cx="0" cy="0"/>
+        </a:xfrm>
+      </p:grpSpPr>
+      <p:sp>
+        <p:nvSpPr>
+          <p:cNvPr id="2" name="Slide Image Placeholder 1">
+            <a:extLst>
+              <a:ext uri="{FF2B5EF4-FFF2-40B4-BE49-F238E27FC236}">
+                <a16:creationId xmlns:a16="http://schemas.microsoft.com/office/drawing/2014/main" id="{13DF7611-1A04-365D-0C6B-6A686BF48168}"/>
+              </a:ext>
+            </a:extLst>
+          </p:cNvPr>
+          <p:cNvSpPr>
+            <a:spLocks noGrp="1" noRot="1" noChangeAspect="1"/>
+          </p:cNvSpPr>
+          <p:nvPr>
+            <p:ph type="sldImg"/>
+          </p:nvPr>
+        </p:nvSpPr>
+        <p:spPr/>
+      </p:sp>
+      <p:sp>
+        <p:nvSpPr>
+          <p:cNvPr id="3" name="Notes Placeholder 2">
+            <a:extLst>
+              <a:ext uri="{FF2B5EF4-FFF2-40B4-BE49-F238E27FC236}">
+                <a16:creationId xmlns:a16="http://schemas.microsoft.com/office/drawing/2014/main" id="{BEF9CBDF-A7C8-77CA-B4BB-AE4F75E5F22E}"/>
+              </a:ext>
+            </a:extLst>
+          </p:cNvPr>
+          <p:cNvSpPr>
+            <a:spLocks noGrp="1"/>
+          </p:cNvSpPr>
+          <p:nvPr>
+            <p:ph type="body" idx="1"/>
+          </p:nvPr>
+        </p:nvSpPr>
+        <p:spPr/>
+        <p:txBody>
+          <a:bodyPr/>
+          <a:lstStyle/>
+          <a:p>
+            <a:r>
+              <a:rPr lang="en-CA" dirty="0"/>
+              <a:t>Blurb about Jack</a:t>
+            </a:r>
+          </a:p>
+        </p:txBody>
+      </p:sp>
+      <p:sp>
+        <p:nvSpPr>
+          <p:cNvPr id="4" name="Slide Number Placeholder 3">
+            <a:extLst>
+              <a:ext uri="{FF2B5EF4-FFF2-40B4-BE49-F238E27FC236}">
+                <a16:creationId xmlns:a16="http://schemas.microsoft.com/office/drawing/2014/main" id="{F8C3E0DF-3FE2-CE6A-2AE1-C89C81560A2E}"/>
+              </a:ext>
+            </a:extLst>
+          </p:cNvPr>
+          <p:cNvSpPr>
+            <a:spLocks noGrp="1"/>
+          </p:cNvSpPr>
+          <p:nvPr>
+            <p:ph type="sldNum" sz="quarter" idx="5"/>
+          </p:nvPr>
+        </p:nvSpPr>
+        <p:spPr/>
+        <p:txBody>
+          <a:bodyPr/>
+          <a:lstStyle/>
+          <a:p>
+            <a:fld id="{47B22D95-B55A-456E-B882-ED519B72F1D2}" type="slidenum">
+              <a:rPr lang="en-CA" smtClean="0"/>
+              <a:t>4</a:t>
+            </a:fld>
+            <a:endParaRPr lang="en-CA"/>
+          </a:p>
+        </p:txBody>
+      </p:sp>
+    </p:spTree>
+    <p:extLst>
+      <p:ext uri="{BB962C8B-B14F-4D97-AF65-F5344CB8AC3E}">
+        <p14:creationId xmlns:p14="http://schemas.microsoft.com/office/powerpoint/2010/main" val="3642970906"/>
+      </p:ext>
+    </p:extLst>
+  </p:cSld>
+  <p:clrMapOvr>
+    <a:masterClrMapping/>
+  </p:clrMapOvr>
+</p:notes>
 </file>
 
 <file path=ppt/slideLayouts/slideLayout1.xml><?xml version="1.0" encoding="utf-8"?>
@@ -3748,7 +5000,7 @@
         <p:spPr>
           <a:xfrm>
             <a:off x="4694464" y="1240972"/>
-            <a:ext cx="2551789" cy="369332"/>
+            <a:ext cx="2754280" cy="369332"/>
           </a:xfrm>
           <a:prstGeom prst="rect">
             <a:avLst/>
@@ -3762,7 +5014,10 @@
           <a:lstStyle/>
           <a:p>
             <a:r>
-              <a:rPr lang="en-CA" dirty="0"/>
+              <a:rPr lang="en-CA" dirty="0">
+                <a:latin typeface="Kumbh Sans" pitchFamily="2" charset="0"/>
+                <a:cs typeface="Kumbh Sans" pitchFamily="2" charset="0"/>
+              </a:rPr>
               <a:t>Crossfire NCR Overhaul</a:t>
             </a:r>
           </a:p>
@@ -3783,7 +5038,7 @@
         <p:spPr>
           <a:xfrm>
             <a:off x="4585607" y="5344886"/>
-            <a:ext cx="3184846" cy="369332"/>
+            <a:ext cx="3462807" cy="369332"/>
           </a:xfrm>
           <a:prstGeom prst="rect">
             <a:avLst/>
@@ -3797,7 +5052,10 @@
           <a:lstStyle/>
           <a:p>
             <a:r>
-              <a:rPr lang="en-CA" dirty="0"/>
+              <a:rPr lang="en-CA" dirty="0">
+                <a:latin typeface="Kumbh Sans" pitchFamily="2" charset="0"/>
+                <a:cs typeface="Kumbh Sans" pitchFamily="2" charset="0"/>
+              </a:rPr>
               <a:t>Powered by Adestria Solutions</a:t>
             </a:r>
           </a:p>
@@ -3818,7 +5076,7 @@
         <p:spPr>
           <a:xfrm>
             <a:off x="4694463" y="3244334"/>
-            <a:ext cx="4104713" cy="707886"/>
+            <a:ext cx="4466287" cy="707886"/>
           </a:xfrm>
           <a:prstGeom prst="rect">
             <a:avLst/>
@@ -3832,7 +5090,10 @@
           <a:lstStyle/>
           <a:p>
             <a:r>
-              <a:rPr lang="en-CA" sz="4000" dirty="0"/>
+              <a:rPr lang="en-CA" sz="4000" dirty="0">
+                <a:latin typeface="Kumbh Sans" pitchFamily="2" charset="0"/>
+                <a:cs typeface="Kumbh Sans" pitchFamily="2" charset="0"/>
+              </a:rPr>
               <a:t>Name of software</a:t>
             </a:r>
           </a:p>
@@ -3852,6 +5113,215 @@
 </file>
 
 <file path=ppt/slides/slide10.xml><?xml version="1.0" encoding="utf-8"?>
+<p:sld xmlns:a="http://schemas.openxmlformats.org/drawingml/2006/main" xmlns:r="http://schemas.openxmlformats.org/officeDocument/2006/relationships" xmlns:p="http://schemas.openxmlformats.org/presentationml/2006/main">
+  <p:cSld>
+    <p:spTree>
+      <p:nvGrpSpPr>
+        <p:cNvPr id="1" name="">
+          <a:extLst>
+            <a:ext uri="{FF2B5EF4-FFF2-40B4-BE49-F238E27FC236}">
+              <a16:creationId xmlns:a16="http://schemas.microsoft.com/office/drawing/2014/main" id="{7031C921-2922-BE23-8C94-1233CD6D7FF7}"/>
+            </a:ext>
+          </a:extLst>
+        </p:cNvPr>
+        <p:cNvGrpSpPr/>
+        <p:nvPr/>
+      </p:nvGrpSpPr>
+      <p:grpSpPr>
+        <a:xfrm>
+          <a:off x="0" y="0"/>
+          <a:ext cx="0" cy="0"/>
+          <a:chOff x="0" y="0"/>
+          <a:chExt cx="0" cy="0"/>
+        </a:xfrm>
+      </p:grpSpPr>
+      <p:sp>
+        <p:nvSpPr>
+          <p:cNvPr id="4" name="TextBox 3">
+            <a:extLst>
+              <a:ext uri="{FF2B5EF4-FFF2-40B4-BE49-F238E27FC236}">
+                <a16:creationId xmlns:a16="http://schemas.microsoft.com/office/drawing/2014/main" id="{42765858-AB49-C69A-CA41-8F00663B3404}"/>
+              </a:ext>
+            </a:extLst>
+          </p:cNvPr>
+          <p:cNvSpPr txBox="1"/>
+          <p:nvPr/>
+        </p:nvSpPr>
+        <p:spPr>
+          <a:xfrm>
+            <a:off x="440111" y="376344"/>
+            <a:ext cx="2563522" cy="5997476"/>
+          </a:xfrm>
+          <a:prstGeom prst="rect">
+            <a:avLst/>
+          </a:prstGeom>
+          <a:noFill/>
+        </p:spPr>
+        <p:txBody>
+          <a:bodyPr wrap="none" rtlCol="0">
+            <a:spAutoFit/>
+          </a:bodyPr>
+          <a:lstStyle/>
+          <a:p>
+            <a:pPr>
+              <a:lnSpc>
+                <a:spcPct val="200000"/>
+              </a:lnSpc>
+            </a:pPr>
+            <a:r>
+              <a:rPr lang="en-CA" sz="2800" dirty="0">
+                <a:solidFill>
+                  <a:schemeClr val="tx1">
+                    <a:lumMod val="25000"/>
+                    <a:lumOff val="75000"/>
+                  </a:schemeClr>
+                </a:solidFill>
+                <a:latin typeface="Kumbh Sans" pitchFamily="2" charset="0"/>
+                <a:cs typeface="Kumbh Sans" pitchFamily="2" charset="0"/>
+              </a:rPr>
+              <a:t>Adestria</a:t>
+            </a:r>
+          </a:p>
+          <a:p>
+            <a:pPr>
+              <a:lnSpc>
+                <a:spcPct val="200000"/>
+              </a:lnSpc>
+            </a:pPr>
+            <a:r>
+              <a:rPr lang="en-CA" sz="2800" dirty="0">
+                <a:latin typeface="Kumbh Sans" pitchFamily="2" charset="0"/>
+                <a:cs typeface="Kumbh Sans" pitchFamily="2" charset="0"/>
+              </a:rPr>
+              <a:t>Project</a:t>
+            </a:r>
+          </a:p>
+          <a:p>
+            <a:pPr>
+              <a:lnSpc>
+                <a:spcPct val="200000"/>
+              </a:lnSpc>
+            </a:pPr>
+            <a:r>
+              <a:rPr lang="en-CA" sz="2800" dirty="0">
+                <a:solidFill>
+                  <a:schemeClr val="tx1">
+                    <a:lumMod val="25000"/>
+                    <a:lumOff val="75000"/>
+                  </a:schemeClr>
+                </a:solidFill>
+                <a:latin typeface="Kumbh Sans" pitchFamily="2" charset="0"/>
+                <a:cs typeface="Kumbh Sans" pitchFamily="2" charset="0"/>
+              </a:rPr>
+              <a:t>    Existing </a:t>
+            </a:r>
+          </a:p>
+          <a:p>
+            <a:r>
+              <a:rPr lang="en-CA" sz="2800" dirty="0">
+                <a:solidFill>
+                  <a:schemeClr val="tx1">
+                    <a:lumMod val="25000"/>
+                    <a:lumOff val="75000"/>
+                  </a:schemeClr>
+                </a:solidFill>
+                <a:latin typeface="Kumbh Sans" pitchFamily="2" charset="0"/>
+                <a:cs typeface="Kumbh Sans" pitchFamily="2" charset="0"/>
+              </a:rPr>
+              <a:t>    Solutions</a:t>
+            </a:r>
+          </a:p>
+          <a:p>
+            <a:pPr>
+              <a:lnSpc>
+                <a:spcPct val="200000"/>
+              </a:lnSpc>
+            </a:pPr>
+            <a:r>
+              <a:rPr lang="en-CA" sz="2800" dirty="0">
+                <a:solidFill>
+                  <a:schemeClr val="tx1">
+                    <a:lumMod val="25000"/>
+                    <a:lumOff val="75000"/>
+                  </a:schemeClr>
+                </a:solidFill>
+                <a:latin typeface="Kumbh Sans" pitchFamily="2" charset="0"/>
+                <a:cs typeface="Kumbh Sans" pitchFamily="2" charset="0"/>
+              </a:rPr>
+              <a:t>    Custom</a:t>
+            </a:r>
+          </a:p>
+          <a:p>
+            <a:r>
+              <a:rPr lang="en-CA" sz="2800" dirty="0">
+                <a:solidFill>
+                  <a:schemeClr val="tx1">
+                    <a:lumMod val="25000"/>
+                    <a:lumOff val="75000"/>
+                  </a:schemeClr>
+                </a:solidFill>
+                <a:latin typeface="Kumbh Sans" pitchFamily="2" charset="0"/>
+                <a:cs typeface="Kumbh Sans" pitchFamily="2" charset="0"/>
+              </a:rPr>
+              <a:t>    Solution</a:t>
+            </a:r>
+          </a:p>
+          <a:p>
+            <a:pPr>
+              <a:lnSpc>
+                <a:spcPct val="200000"/>
+              </a:lnSpc>
+            </a:pPr>
+            <a:r>
+              <a:rPr lang="en-CA" sz="2800" dirty="0">
+                <a:solidFill>
+                  <a:schemeClr val="tx1">
+                    <a:lumMod val="25000"/>
+                    <a:lumOff val="75000"/>
+                  </a:schemeClr>
+                </a:solidFill>
+                <a:latin typeface="Kumbh Sans" pitchFamily="2" charset="0"/>
+                <a:cs typeface="Kumbh Sans" pitchFamily="2" charset="0"/>
+              </a:rPr>
+              <a:t>    Comparison</a:t>
+            </a:r>
+          </a:p>
+          <a:p>
+            <a:pPr>
+              <a:lnSpc>
+                <a:spcPct val="200000"/>
+              </a:lnSpc>
+            </a:pPr>
+            <a:r>
+              <a:rPr lang="en-CA" sz="2800" dirty="0">
+                <a:solidFill>
+                  <a:schemeClr val="tx1">
+                    <a:lumMod val="25000"/>
+                    <a:lumOff val="75000"/>
+                  </a:schemeClr>
+                </a:solidFill>
+                <a:latin typeface="Kumbh Sans" pitchFamily="2" charset="0"/>
+                <a:cs typeface="Kumbh Sans" pitchFamily="2" charset="0"/>
+              </a:rPr>
+              <a:t>Q &amp; A</a:t>
+            </a:r>
+          </a:p>
+        </p:txBody>
+      </p:sp>
+    </p:spTree>
+    <p:extLst>
+      <p:ext uri="{BB962C8B-B14F-4D97-AF65-F5344CB8AC3E}">
+        <p14:creationId xmlns:p14="http://schemas.microsoft.com/office/powerpoint/2010/main" val="3444687766"/>
+      </p:ext>
+    </p:extLst>
+  </p:cSld>
+  <p:clrMapOvr>
+    <a:masterClrMapping/>
+  </p:clrMapOvr>
+</p:sld>
+</file>
+
+<file path=ppt/slides/slide11.xml><?xml version="1.0" encoding="utf-8"?>
 <p:sld xmlns:a="http://schemas.openxmlformats.org/drawingml/2006/main" xmlns:r="http://schemas.openxmlformats.org/officeDocument/2006/relationships" xmlns:p="http://schemas.openxmlformats.org/presentationml/2006/main">
   <p:cSld>
     <p:spTree>
@@ -3876,10 +5346,10 @@
       </p:grpSpPr>
       <p:sp>
         <p:nvSpPr>
-          <p:cNvPr id="2" name="TextBox 1">
+          <p:cNvPr id="8" name="TextBox 7">
             <a:extLst>
               <a:ext uri="{FF2B5EF4-FFF2-40B4-BE49-F238E27FC236}">
-                <a16:creationId xmlns:a16="http://schemas.microsoft.com/office/drawing/2014/main" id="{939024A9-D0D1-B303-54D7-9B51CE76A009}"/>
+                <a16:creationId xmlns:a16="http://schemas.microsoft.com/office/drawing/2014/main" id="{6D7F7FB9-948B-2F04-F5F0-3961BF3B13D4}"/>
               </a:ext>
             </a:extLst>
           </p:cNvPr>
@@ -3888,8 +5358,8 @@
         </p:nvSpPr>
         <p:spPr>
           <a:xfrm>
-            <a:off x="4506686" y="2759529"/>
-            <a:ext cx="1497974" cy="369332"/>
+            <a:off x="440111" y="376344"/>
+            <a:ext cx="2563522" cy="5997476"/>
           </a:xfrm>
           <a:prstGeom prst="rect">
             <a:avLst/>
@@ -3902,9 +5372,148 @@
           </a:bodyPr>
           <a:lstStyle/>
           <a:p>
-            <a:r>
-              <a:rPr lang="en-CA" dirty="0"/>
-              <a:t>Competitor 1</a:t>
+            <a:pPr>
+              <a:lnSpc>
+                <a:spcPct val="200000"/>
+              </a:lnSpc>
+            </a:pPr>
+            <a:r>
+              <a:rPr lang="en-CA" sz="2800" dirty="0">
+                <a:solidFill>
+                  <a:schemeClr val="tx1">
+                    <a:lumMod val="25000"/>
+                    <a:lumOff val="75000"/>
+                  </a:schemeClr>
+                </a:solidFill>
+                <a:latin typeface="Kumbh Sans" pitchFamily="2" charset="0"/>
+                <a:cs typeface="Kumbh Sans" pitchFamily="2" charset="0"/>
+              </a:rPr>
+              <a:t>Adestria</a:t>
+            </a:r>
+          </a:p>
+          <a:p>
+            <a:pPr>
+              <a:lnSpc>
+                <a:spcPct val="200000"/>
+              </a:lnSpc>
+            </a:pPr>
+            <a:r>
+              <a:rPr lang="en-CA" sz="2800" dirty="0">
+                <a:latin typeface="Kumbh Sans" pitchFamily="2" charset="0"/>
+                <a:cs typeface="Kumbh Sans" pitchFamily="2" charset="0"/>
+              </a:rPr>
+              <a:t>Project</a:t>
+            </a:r>
+          </a:p>
+          <a:p>
+            <a:pPr>
+              <a:lnSpc>
+                <a:spcPct val="200000"/>
+              </a:lnSpc>
+            </a:pPr>
+            <a:r>
+              <a:rPr lang="en-CA" sz="2800" dirty="0">
+                <a:solidFill>
+                  <a:schemeClr val="tx1">
+                    <a:lumMod val="25000"/>
+                    <a:lumOff val="75000"/>
+                  </a:schemeClr>
+                </a:solidFill>
+                <a:latin typeface="Kumbh Sans" pitchFamily="2" charset="0"/>
+                <a:cs typeface="Kumbh Sans" pitchFamily="2" charset="0"/>
+              </a:rPr>
+              <a:t>    Situation</a:t>
+            </a:r>
+          </a:p>
+          <a:p>
+            <a:pPr>
+              <a:lnSpc>
+                <a:spcPct val="200000"/>
+              </a:lnSpc>
+            </a:pPr>
+            <a:r>
+              <a:rPr lang="en-CA" sz="2800" dirty="0">
+                <a:solidFill>
+                  <a:schemeClr val="tx1">
+                    <a:lumMod val="25000"/>
+                    <a:lumOff val="75000"/>
+                  </a:schemeClr>
+                </a:solidFill>
+                <a:latin typeface="Kumbh Sans" pitchFamily="2" charset="0"/>
+                <a:cs typeface="Kumbh Sans" pitchFamily="2" charset="0"/>
+              </a:rPr>
+              <a:t>    </a:t>
+            </a:r>
+            <a:r>
+              <a:rPr lang="en-CA" sz="2800" dirty="0">
+                <a:latin typeface="Kumbh Sans" pitchFamily="2" charset="0"/>
+                <a:cs typeface="Kumbh Sans" pitchFamily="2" charset="0"/>
+              </a:rPr>
+              <a:t>Existing </a:t>
+            </a:r>
+          </a:p>
+          <a:p>
+            <a:r>
+              <a:rPr lang="en-CA" sz="2800" dirty="0">
+                <a:latin typeface="Kumbh Sans" pitchFamily="2" charset="0"/>
+                <a:cs typeface="Kumbh Sans" pitchFamily="2" charset="0"/>
+              </a:rPr>
+              <a:t>    Solutions</a:t>
+            </a:r>
+          </a:p>
+          <a:p>
+            <a:pPr>
+              <a:lnSpc>
+                <a:spcPct val="200000"/>
+              </a:lnSpc>
+            </a:pPr>
+            <a:r>
+              <a:rPr lang="en-CA" sz="2800" dirty="0">
+                <a:solidFill>
+                  <a:schemeClr val="tx1">
+                    <a:lumMod val="25000"/>
+                    <a:lumOff val="75000"/>
+                  </a:schemeClr>
+                </a:solidFill>
+                <a:latin typeface="Kumbh Sans" pitchFamily="2" charset="0"/>
+                <a:cs typeface="Kumbh Sans" pitchFamily="2" charset="0"/>
+              </a:rPr>
+              <a:t>    Custom</a:t>
+            </a:r>
+          </a:p>
+          <a:p>
+            <a:r>
+              <a:rPr lang="en-CA" sz="2800" dirty="0">
+                <a:solidFill>
+                  <a:schemeClr val="tx1">
+                    <a:lumMod val="25000"/>
+                    <a:lumOff val="75000"/>
+                  </a:schemeClr>
+                </a:solidFill>
+                <a:latin typeface="Kumbh Sans" pitchFamily="2" charset="0"/>
+                <a:cs typeface="Kumbh Sans" pitchFamily="2" charset="0"/>
+              </a:rPr>
+              <a:t>    Solution</a:t>
+            </a:r>
+          </a:p>
+          <a:p>
+            <a:pPr>
+              <a:lnSpc>
+                <a:spcPct val="200000"/>
+              </a:lnSpc>
+            </a:pPr>
+            <a:r>
+              <a:rPr lang="en-CA" sz="2800" dirty="0">
+                <a:solidFill>
+                  <a:schemeClr val="tx1">
+                    <a:lumMod val="25000"/>
+                    <a:lumOff val="75000"/>
+                  </a:schemeClr>
+                </a:solidFill>
+                <a:latin typeface="Kumbh Sans" pitchFamily="2" charset="0"/>
+                <a:cs typeface="Kumbh Sans" pitchFamily="2" charset="0"/>
+              </a:rPr>
+              <a:t>    Comparison</a:t>
             </a:r>
           </a:p>
         </p:txBody>
@@ -3922,7 +5531,7 @@
 </p:sld>
 </file>
 
-<file path=ppt/slides/slide11.xml><?xml version="1.0" encoding="utf-8"?>
+<file path=ppt/slides/slide12.xml><?xml version="1.0" encoding="utf-8"?>
 <p:sld xmlns:a="http://schemas.openxmlformats.org/drawingml/2006/main" xmlns:r="http://schemas.openxmlformats.org/officeDocument/2006/relationships" xmlns:p="http://schemas.openxmlformats.org/presentationml/2006/main">
   <p:cSld>
     <p:spTree>
@@ -3947,10 +5556,10 @@
       </p:grpSpPr>
       <p:sp>
         <p:nvSpPr>
-          <p:cNvPr id="2" name="TextBox 1">
+          <p:cNvPr id="6" name="TextBox 5">
             <a:extLst>
               <a:ext uri="{FF2B5EF4-FFF2-40B4-BE49-F238E27FC236}">
-                <a16:creationId xmlns:a16="http://schemas.microsoft.com/office/drawing/2014/main" id="{EB45249E-3CD1-3B49-F9CF-AF33CD9279A1}"/>
+                <a16:creationId xmlns:a16="http://schemas.microsoft.com/office/drawing/2014/main" id="{C26F907F-3A16-3C95-A3C0-1A0D83238263}"/>
               </a:ext>
             </a:extLst>
           </p:cNvPr>
@@ -3959,8 +5568,8 @@
         </p:nvSpPr>
         <p:spPr>
           <a:xfrm>
-            <a:off x="4506686" y="2759529"/>
-            <a:ext cx="1497974" cy="369332"/>
+            <a:off x="440111" y="376344"/>
+            <a:ext cx="2563522" cy="5997476"/>
           </a:xfrm>
           <a:prstGeom prst="rect">
             <a:avLst/>
@@ -3973,9 +5582,148 @@
           </a:bodyPr>
           <a:lstStyle/>
           <a:p>
-            <a:r>
-              <a:rPr lang="en-CA" dirty="0"/>
-              <a:t>Competitor 2</a:t>
+            <a:pPr>
+              <a:lnSpc>
+                <a:spcPct val="200000"/>
+              </a:lnSpc>
+            </a:pPr>
+            <a:r>
+              <a:rPr lang="en-CA" sz="2800" dirty="0">
+                <a:solidFill>
+                  <a:schemeClr val="tx1">
+                    <a:lumMod val="25000"/>
+                    <a:lumOff val="75000"/>
+                  </a:schemeClr>
+                </a:solidFill>
+                <a:latin typeface="Kumbh Sans" pitchFamily="2" charset="0"/>
+                <a:cs typeface="Kumbh Sans" pitchFamily="2" charset="0"/>
+              </a:rPr>
+              <a:t>Adestria</a:t>
+            </a:r>
+          </a:p>
+          <a:p>
+            <a:pPr>
+              <a:lnSpc>
+                <a:spcPct val="200000"/>
+              </a:lnSpc>
+            </a:pPr>
+            <a:r>
+              <a:rPr lang="en-CA" sz="2800" dirty="0">
+                <a:latin typeface="Kumbh Sans" pitchFamily="2" charset="0"/>
+                <a:cs typeface="Kumbh Sans" pitchFamily="2" charset="0"/>
+              </a:rPr>
+              <a:t>Project</a:t>
+            </a:r>
+          </a:p>
+          <a:p>
+            <a:pPr>
+              <a:lnSpc>
+                <a:spcPct val="200000"/>
+              </a:lnSpc>
+            </a:pPr>
+            <a:r>
+              <a:rPr lang="en-CA" sz="2800" dirty="0">
+                <a:solidFill>
+                  <a:schemeClr val="tx1">
+                    <a:lumMod val="25000"/>
+                    <a:lumOff val="75000"/>
+                  </a:schemeClr>
+                </a:solidFill>
+                <a:latin typeface="Kumbh Sans" pitchFamily="2" charset="0"/>
+                <a:cs typeface="Kumbh Sans" pitchFamily="2" charset="0"/>
+              </a:rPr>
+              <a:t>    Situation</a:t>
+            </a:r>
+          </a:p>
+          <a:p>
+            <a:pPr>
+              <a:lnSpc>
+                <a:spcPct val="200000"/>
+              </a:lnSpc>
+            </a:pPr>
+            <a:r>
+              <a:rPr lang="en-CA" sz="2800" dirty="0">
+                <a:solidFill>
+                  <a:schemeClr val="tx1">
+                    <a:lumMod val="25000"/>
+                    <a:lumOff val="75000"/>
+                  </a:schemeClr>
+                </a:solidFill>
+                <a:latin typeface="Kumbh Sans" pitchFamily="2" charset="0"/>
+                <a:cs typeface="Kumbh Sans" pitchFamily="2" charset="0"/>
+              </a:rPr>
+              <a:t>    </a:t>
+            </a:r>
+            <a:r>
+              <a:rPr lang="en-CA" sz="2800" dirty="0">
+                <a:latin typeface="Kumbh Sans" pitchFamily="2" charset="0"/>
+                <a:cs typeface="Kumbh Sans" pitchFamily="2" charset="0"/>
+              </a:rPr>
+              <a:t>Existing </a:t>
+            </a:r>
+          </a:p>
+          <a:p>
+            <a:r>
+              <a:rPr lang="en-CA" sz="2800" dirty="0">
+                <a:latin typeface="Kumbh Sans" pitchFamily="2" charset="0"/>
+                <a:cs typeface="Kumbh Sans" pitchFamily="2" charset="0"/>
+              </a:rPr>
+              <a:t>    Solutions</a:t>
+            </a:r>
+          </a:p>
+          <a:p>
+            <a:pPr>
+              <a:lnSpc>
+                <a:spcPct val="200000"/>
+              </a:lnSpc>
+            </a:pPr>
+            <a:r>
+              <a:rPr lang="en-CA" sz="2800" dirty="0">
+                <a:solidFill>
+                  <a:schemeClr val="tx1">
+                    <a:lumMod val="25000"/>
+                    <a:lumOff val="75000"/>
+                  </a:schemeClr>
+                </a:solidFill>
+                <a:latin typeface="Kumbh Sans" pitchFamily="2" charset="0"/>
+                <a:cs typeface="Kumbh Sans" pitchFamily="2" charset="0"/>
+              </a:rPr>
+              <a:t>    Custom</a:t>
+            </a:r>
+          </a:p>
+          <a:p>
+            <a:r>
+              <a:rPr lang="en-CA" sz="2800" dirty="0">
+                <a:solidFill>
+                  <a:schemeClr val="tx1">
+                    <a:lumMod val="25000"/>
+                    <a:lumOff val="75000"/>
+                  </a:schemeClr>
+                </a:solidFill>
+                <a:latin typeface="Kumbh Sans" pitchFamily="2" charset="0"/>
+                <a:cs typeface="Kumbh Sans" pitchFamily="2" charset="0"/>
+              </a:rPr>
+              <a:t>    Solution</a:t>
+            </a:r>
+          </a:p>
+          <a:p>
+            <a:pPr>
+              <a:lnSpc>
+                <a:spcPct val="200000"/>
+              </a:lnSpc>
+            </a:pPr>
+            <a:r>
+              <a:rPr lang="en-CA" sz="2800" dirty="0">
+                <a:solidFill>
+                  <a:schemeClr val="tx1">
+                    <a:lumMod val="25000"/>
+                    <a:lumOff val="75000"/>
+                  </a:schemeClr>
+                </a:solidFill>
+                <a:latin typeface="Kumbh Sans" pitchFamily="2" charset="0"/>
+                <a:cs typeface="Kumbh Sans" pitchFamily="2" charset="0"/>
+              </a:rPr>
+              <a:t>    Comparison</a:t>
             </a:r>
           </a:p>
         </p:txBody>
@@ -3993,7 +5741,7 @@
 </p:sld>
 </file>
 
-<file path=ppt/slides/slide12.xml><?xml version="1.0" encoding="utf-8"?>
+<file path=ppt/slides/slide13.xml><?xml version="1.0" encoding="utf-8"?>
 <p:sld xmlns:a="http://schemas.openxmlformats.org/drawingml/2006/main" xmlns:r="http://schemas.openxmlformats.org/officeDocument/2006/relationships" xmlns:p="http://schemas.openxmlformats.org/presentationml/2006/main">
   <p:cSld>
     <p:spTree>
@@ -4018,10 +5766,10 @@
       </p:grpSpPr>
       <p:sp>
         <p:nvSpPr>
-          <p:cNvPr id="2" name="TextBox 1">
+          <p:cNvPr id="6" name="TextBox 5">
             <a:extLst>
               <a:ext uri="{FF2B5EF4-FFF2-40B4-BE49-F238E27FC236}">
-                <a16:creationId xmlns:a16="http://schemas.microsoft.com/office/drawing/2014/main" id="{FB7C1DAA-388D-15E8-746C-4763F989A8BD}"/>
+                <a16:creationId xmlns:a16="http://schemas.microsoft.com/office/drawing/2014/main" id="{0CDADB92-84C5-A652-539F-1C8F5047D3A6}"/>
               </a:ext>
             </a:extLst>
           </p:cNvPr>
@@ -4030,8 +5778,8 @@
         </p:nvSpPr>
         <p:spPr>
           <a:xfrm>
-            <a:off x="4506686" y="2759529"/>
-            <a:ext cx="1414170" cy="369332"/>
+            <a:off x="440111" y="376344"/>
+            <a:ext cx="2563522" cy="5997476"/>
           </a:xfrm>
           <a:prstGeom prst="rect">
             <a:avLst/>
@@ -4044,9 +5792,148 @@
           </a:bodyPr>
           <a:lstStyle/>
           <a:p>
-            <a:r>
-              <a:rPr lang="en-CA" dirty="0"/>
-              <a:t>Our solution</a:t>
+            <a:pPr>
+              <a:lnSpc>
+                <a:spcPct val="200000"/>
+              </a:lnSpc>
+            </a:pPr>
+            <a:r>
+              <a:rPr lang="en-CA" sz="2800" dirty="0">
+                <a:solidFill>
+                  <a:schemeClr val="tx1">
+                    <a:lumMod val="25000"/>
+                    <a:lumOff val="75000"/>
+                  </a:schemeClr>
+                </a:solidFill>
+                <a:latin typeface="Kumbh Sans" pitchFamily="2" charset="0"/>
+                <a:cs typeface="Kumbh Sans" pitchFamily="2" charset="0"/>
+              </a:rPr>
+              <a:t>Adestria</a:t>
+            </a:r>
+          </a:p>
+          <a:p>
+            <a:pPr>
+              <a:lnSpc>
+                <a:spcPct val="200000"/>
+              </a:lnSpc>
+            </a:pPr>
+            <a:r>
+              <a:rPr lang="en-CA" sz="2800" dirty="0">
+                <a:latin typeface="Kumbh Sans" pitchFamily="2" charset="0"/>
+                <a:cs typeface="Kumbh Sans" pitchFamily="2" charset="0"/>
+              </a:rPr>
+              <a:t>Project</a:t>
+            </a:r>
+          </a:p>
+          <a:p>
+            <a:pPr>
+              <a:lnSpc>
+                <a:spcPct val="200000"/>
+              </a:lnSpc>
+            </a:pPr>
+            <a:r>
+              <a:rPr lang="en-CA" sz="2800" dirty="0">
+                <a:solidFill>
+                  <a:schemeClr val="tx1">
+                    <a:lumMod val="25000"/>
+                    <a:lumOff val="75000"/>
+                  </a:schemeClr>
+                </a:solidFill>
+                <a:latin typeface="Kumbh Sans" pitchFamily="2" charset="0"/>
+                <a:cs typeface="Kumbh Sans" pitchFamily="2" charset="0"/>
+              </a:rPr>
+              <a:t>    Situation</a:t>
+            </a:r>
+          </a:p>
+          <a:p>
+            <a:pPr>
+              <a:lnSpc>
+                <a:spcPct val="200000"/>
+              </a:lnSpc>
+            </a:pPr>
+            <a:r>
+              <a:rPr lang="en-CA" sz="2800" dirty="0">
+                <a:solidFill>
+                  <a:schemeClr val="tx1">
+                    <a:lumMod val="25000"/>
+                    <a:lumOff val="75000"/>
+                  </a:schemeClr>
+                </a:solidFill>
+                <a:latin typeface="Kumbh Sans" pitchFamily="2" charset="0"/>
+                <a:cs typeface="Kumbh Sans" pitchFamily="2" charset="0"/>
+              </a:rPr>
+              <a:t>    Existing </a:t>
+            </a:r>
+          </a:p>
+          <a:p>
+            <a:r>
+              <a:rPr lang="en-CA" sz="2800" dirty="0">
+                <a:solidFill>
+                  <a:schemeClr val="tx1">
+                    <a:lumMod val="25000"/>
+                    <a:lumOff val="75000"/>
+                  </a:schemeClr>
+                </a:solidFill>
+                <a:latin typeface="Kumbh Sans" pitchFamily="2" charset="0"/>
+                <a:cs typeface="Kumbh Sans" pitchFamily="2" charset="0"/>
+              </a:rPr>
+              <a:t>    Solutions</a:t>
+            </a:r>
+          </a:p>
+          <a:p>
+            <a:pPr>
+              <a:lnSpc>
+                <a:spcPct val="200000"/>
+              </a:lnSpc>
+            </a:pPr>
+            <a:r>
+              <a:rPr lang="en-CA" sz="2800" dirty="0">
+                <a:solidFill>
+                  <a:schemeClr val="tx1">
+                    <a:lumMod val="25000"/>
+                    <a:lumOff val="75000"/>
+                  </a:schemeClr>
+                </a:solidFill>
+                <a:latin typeface="Kumbh Sans" pitchFamily="2" charset="0"/>
+                <a:cs typeface="Kumbh Sans" pitchFamily="2" charset="0"/>
+              </a:rPr>
+              <a:t>    </a:t>
+            </a:r>
+            <a:r>
+              <a:rPr lang="en-CA" sz="2800" dirty="0">
+                <a:latin typeface="Kumbh Sans" pitchFamily="2" charset="0"/>
+                <a:cs typeface="Kumbh Sans" pitchFamily="2" charset="0"/>
+              </a:rPr>
+              <a:t>Custom</a:t>
+            </a:r>
+          </a:p>
+          <a:p>
+            <a:r>
+              <a:rPr lang="en-CA" sz="2800" dirty="0">
+                <a:latin typeface="Kumbh Sans" pitchFamily="2" charset="0"/>
+                <a:cs typeface="Kumbh Sans" pitchFamily="2" charset="0"/>
+              </a:rPr>
+              <a:t>    Solution</a:t>
+            </a:r>
+          </a:p>
+          <a:p>
+            <a:pPr>
+              <a:lnSpc>
+                <a:spcPct val="200000"/>
+              </a:lnSpc>
+            </a:pPr>
+            <a:r>
+              <a:rPr lang="en-CA" sz="2800" dirty="0">
+                <a:solidFill>
+                  <a:schemeClr val="tx1">
+                    <a:lumMod val="25000"/>
+                    <a:lumOff val="75000"/>
+                  </a:schemeClr>
+                </a:solidFill>
+                <a:latin typeface="Kumbh Sans" pitchFamily="2" charset="0"/>
+                <a:cs typeface="Kumbh Sans" pitchFamily="2" charset="0"/>
+              </a:rPr>
+              <a:t>    Comparison</a:t>
             </a:r>
           </a:p>
         </p:txBody>
@@ -4064,7 +5951,7 @@
 </p:sld>
 </file>
 
-<file path=ppt/slides/slide13.xml><?xml version="1.0" encoding="utf-8"?>
+<file path=ppt/slides/slide14.xml><?xml version="1.0" encoding="utf-8"?>
 <p:sld xmlns:a="http://schemas.openxmlformats.org/drawingml/2006/main" xmlns:r="http://schemas.openxmlformats.org/officeDocument/2006/relationships" xmlns:p="http://schemas.openxmlformats.org/presentationml/2006/main">
   <p:cSld>
     <p:spTree>
@@ -4089,10 +5976,10 @@
       </p:grpSpPr>
       <p:sp>
         <p:nvSpPr>
-          <p:cNvPr id="2" name="TextBox 1">
+          <p:cNvPr id="6" name="TextBox 5">
             <a:extLst>
               <a:ext uri="{FF2B5EF4-FFF2-40B4-BE49-F238E27FC236}">
-                <a16:creationId xmlns:a16="http://schemas.microsoft.com/office/drawing/2014/main" id="{98899C46-9E05-9DC8-C426-2C65F1A4E528}"/>
+                <a16:creationId xmlns:a16="http://schemas.microsoft.com/office/drawing/2014/main" id="{DE0AABFC-72E2-9D06-FC3C-5D2C8EFA51D3}"/>
               </a:ext>
             </a:extLst>
           </p:cNvPr>
@@ -4101,8 +5988,8 @@
         </p:nvSpPr>
         <p:spPr>
           <a:xfrm>
-            <a:off x="4506686" y="2759529"/>
-            <a:ext cx="4857292" cy="369332"/>
+            <a:off x="440111" y="376344"/>
+            <a:ext cx="2563522" cy="5997476"/>
           </a:xfrm>
           <a:prstGeom prst="rect">
             <a:avLst/>
@@ -4115,10 +6002,201 @@
           </a:bodyPr>
           <a:lstStyle/>
           <a:p>
-            <a:r>
-              <a:rPr lang="en-CA" dirty="0"/>
-              <a:t>Comparison table between us and competitors</a:t>
-            </a:r>
+            <a:pPr>
+              <a:lnSpc>
+                <a:spcPct val="200000"/>
+              </a:lnSpc>
+            </a:pPr>
+            <a:r>
+              <a:rPr lang="en-CA" sz="2800" dirty="0">
+                <a:solidFill>
+                  <a:schemeClr val="tx1">
+                    <a:lumMod val="25000"/>
+                    <a:lumOff val="75000"/>
+                  </a:schemeClr>
+                </a:solidFill>
+                <a:latin typeface="Kumbh Sans" pitchFamily="2" charset="0"/>
+                <a:cs typeface="Kumbh Sans" pitchFamily="2" charset="0"/>
+              </a:rPr>
+              <a:t>Adestria</a:t>
+            </a:r>
+          </a:p>
+          <a:p>
+            <a:pPr>
+              <a:lnSpc>
+                <a:spcPct val="200000"/>
+              </a:lnSpc>
+            </a:pPr>
+            <a:r>
+              <a:rPr lang="en-CA" sz="2800" dirty="0">
+                <a:latin typeface="Kumbh Sans" pitchFamily="2" charset="0"/>
+                <a:cs typeface="Kumbh Sans" pitchFamily="2" charset="0"/>
+              </a:rPr>
+              <a:t>Project</a:t>
+            </a:r>
+          </a:p>
+          <a:p>
+            <a:pPr>
+              <a:lnSpc>
+                <a:spcPct val="200000"/>
+              </a:lnSpc>
+            </a:pPr>
+            <a:r>
+              <a:rPr lang="en-CA" sz="2800" dirty="0">
+                <a:solidFill>
+                  <a:schemeClr val="tx1">
+                    <a:lumMod val="25000"/>
+                    <a:lumOff val="75000"/>
+                  </a:schemeClr>
+                </a:solidFill>
+                <a:latin typeface="Kumbh Sans" pitchFamily="2" charset="0"/>
+                <a:cs typeface="Kumbh Sans" pitchFamily="2" charset="0"/>
+              </a:rPr>
+              <a:t>    Situation</a:t>
+            </a:r>
+          </a:p>
+          <a:p>
+            <a:pPr>
+              <a:lnSpc>
+                <a:spcPct val="200000"/>
+              </a:lnSpc>
+            </a:pPr>
+            <a:r>
+              <a:rPr lang="en-CA" sz="2800" dirty="0">
+                <a:solidFill>
+                  <a:schemeClr val="tx1">
+                    <a:lumMod val="25000"/>
+                    <a:lumOff val="75000"/>
+                  </a:schemeClr>
+                </a:solidFill>
+                <a:latin typeface="Kumbh Sans" pitchFamily="2" charset="0"/>
+                <a:cs typeface="Kumbh Sans" pitchFamily="2" charset="0"/>
+              </a:rPr>
+              <a:t>    Existing </a:t>
+            </a:r>
+          </a:p>
+          <a:p>
+            <a:r>
+              <a:rPr lang="en-CA" sz="2800" dirty="0">
+                <a:solidFill>
+                  <a:schemeClr val="tx1">
+                    <a:lumMod val="25000"/>
+                    <a:lumOff val="75000"/>
+                  </a:schemeClr>
+                </a:solidFill>
+                <a:latin typeface="Kumbh Sans" pitchFamily="2" charset="0"/>
+                <a:cs typeface="Kumbh Sans" pitchFamily="2" charset="0"/>
+              </a:rPr>
+              <a:t>    Solutions</a:t>
+            </a:r>
+          </a:p>
+          <a:p>
+            <a:pPr>
+              <a:lnSpc>
+                <a:spcPct val="200000"/>
+              </a:lnSpc>
+            </a:pPr>
+            <a:r>
+              <a:rPr lang="en-CA" sz="2800" dirty="0">
+                <a:solidFill>
+                  <a:schemeClr val="tx1">
+                    <a:lumMod val="25000"/>
+                    <a:lumOff val="75000"/>
+                  </a:schemeClr>
+                </a:solidFill>
+                <a:latin typeface="Kumbh Sans" pitchFamily="2" charset="0"/>
+                <a:cs typeface="Kumbh Sans" pitchFamily="2" charset="0"/>
+              </a:rPr>
+              <a:t>    Custom</a:t>
+            </a:r>
+          </a:p>
+          <a:p>
+            <a:r>
+              <a:rPr lang="en-CA" sz="2800" dirty="0">
+                <a:solidFill>
+                  <a:schemeClr val="tx1">
+                    <a:lumMod val="25000"/>
+                    <a:lumOff val="75000"/>
+                  </a:schemeClr>
+                </a:solidFill>
+                <a:latin typeface="Kumbh Sans" pitchFamily="2" charset="0"/>
+                <a:cs typeface="Kumbh Sans" pitchFamily="2" charset="0"/>
+              </a:rPr>
+              <a:t>    Solution</a:t>
+            </a:r>
+          </a:p>
+          <a:p>
+            <a:pPr>
+              <a:lnSpc>
+                <a:spcPct val="200000"/>
+              </a:lnSpc>
+            </a:pPr>
+            <a:r>
+              <a:rPr lang="en-CA" sz="2800" dirty="0">
+                <a:solidFill>
+                  <a:schemeClr val="tx1">
+                    <a:lumMod val="25000"/>
+                    <a:lumOff val="75000"/>
+                  </a:schemeClr>
+                </a:solidFill>
+                <a:latin typeface="Kumbh Sans" pitchFamily="2" charset="0"/>
+                <a:cs typeface="Kumbh Sans" pitchFamily="2" charset="0"/>
+              </a:rPr>
+              <a:t>    </a:t>
+            </a:r>
+            <a:r>
+              <a:rPr lang="en-CA" sz="2800" dirty="0">
+                <a:latin typeface="Kumbh Sans" pitchFamily="2" charset="0"/>
+                <a:cs typeface="Kumbh Sans" pitchFamily="2" charset="0"/>
+              </a:rPr>
+              <a:t>Comparison</a:t>
+            </a:r>
+          </a:p>
+        </p:txBody>
+      </p:sp>
+      <p:sp>
+        <p:nvSpPr>
+          <p:cNvPr id="8" name="Rectangle 7">
+            <a:extLst>
+              <a:ext uri="{FF2B5EF4-FFF2-40B4-BE49-F238E27FC236}">
+                <a16:creationId xmlns:a16="http://schemas.microsoft.com/office/drawing/2014/main" id="{99DF9151-06C6-FF03-633D-97C04C35ADF6}"/>
+              </a:ext>
+            </a:extLst>
+          </p:cNvPr>
+          <p:cNvSpPr/>
+          <p:nvPr/>
+        </p:nvSpPr>
+        <p:spPr>
+          <a:xfrm>
+            <a:off x="3003633" y="576263"/>
+            <a:ext cx="8607342" cy="5695950"/>
+          </a:xfrm>
+          <a:prstGeom prst="rect">
+            <a:avLst/>
+          </a:prstGeom>
+        </p:spPr>
+        <p:style>
+          <a:lnRef idx="2">
+            <a:schemeClr val="accent1">
+              <a:shade val="15000"/>
+            </a:schemeClr>
+          </a:lnRef>
+          <a:fillRef idx="1">
+            <a:schemeClr val="accent1"/>
+          </a:fillRef>
+          <a:effectRef idx="0">
+            <a:schemeClr val="accent1"/>
+          </a:effectRef>
+          <a:fontRef idx="minor">
+            <a:schemeClr val="lt1"/>
+          </a:fontRef>
+        </p:style>
+        <p:txBody>
+          <a:bodyPr rtlCol="0" anchor="ctr"/>
+          <a:lstStyle/>
+          <a:p>
+            <a:pPr algn="ctr"/>
+            <a:endParaRPr lang="en-CA"/>
           </a:p>
         </p:txBody>
       </p:sp>
@@ -4135,7 +6213,7 @@
 </p:sld>
 </file>
 
-<file path=ppt/slides/slide14.xml><?xml version="1.0" encoding="utf-8"?>
+<file path=ppt/slides/slide15.xml><?xml version="1.0" encoding="utf-8"?>
 <p:sld xmlns:a="http://schemas.openxmlformats.org/drawingml/2006/main" xmlns:r="http://schemas.openxmlformats.org/officeDocument/2006/relationships" xmlns:p="http://schemas.openxmlformats.org/presentationml/2006/main">
   <p:cSld>
     <p:spTree>
@@ -4160,10 +6238,10 @@
       </p:grpSpPr>
       <p:sp>
         <p:nvSpPr>
-          <p:cNvPr id="2" name="TextBox 1">
+          <p:cNvPr id="6" name="TextBox 5">
             <a:extLst>
               <a:ext uri="{FF2B5EF4-FFF2-40B4-BE49-F238E27FC236}">
-                <a16:creationId xmlns:a16="http://schemas.microsoft.com/office/drawing/2014/main" id="{9E689793-48BC-E89A-D94F-DE97837489B8}"/>
+                <a16:creationId xmlns:a16="http://schemas.microsoft.com/office/drawing/2014/main" id="{3781749F-2DE4-6052-FCC1-9E1C1554116A}"/>
               </a:ext>
             </a:extLst>
           </p:cNvPr>
@@ -4172,8 +6250,8 @@
         </p:nvSpPr>
         <p:spPr>
           <a:xfrm>
-            <a:off x="4506686" y="2759529"/>
-            <a:ext cx="638316" cy="369332"/>
+            <a:off x="440111" y="376344"/>
+            <a:ext cx="1588897" cy="2550378"/>
           </a:xfrm>
           <a:prstGeom prst="rect">
             <a:avLst/>
@@ -4186,9 +6264,57 @@
           </a:bodyPr>
           <a:lstStyle/>
           <a:p>
-            <a:r>
-              <a:rPr lang="en-CA" dirty="0"/>
-              <a:t>Q&amp;A</a:t>
+            <a:pPr>
+              <a:lnSpc>
+                <a:spcPct val="200000"/>
+              </a:lnSpc>
+            </a:pPr>
+            <a:r>
+              <a:rPr lang="en-CA" sz="2800" dirty="0">
+                <a:solidFill>
+                  <a:schemeClr val="tx1">
+                    <a:lumMod val="25000"/>
+                    <a:lumOff val="75000"/>
+                  </a:schemeClr>
+                </a:solidFill>
+                <a:latin typeface="Kumbh Sans" pitchFamily="2" charset="0"/>
+                <a:cs typeface="Kumbh Sans" pitchFamily="2" charset="0"/>
+              </a:rPr>
+              <a:t>Adestria</a:t>
+            </a:r>
+          </a:p>
+          <a:p>
+            <a:pPr>
+              <a:lnSpc>
+                <a:spcPct val="200000"/>
+              </a:lnSpc>
+            </a:pPr>
+            <a:r>
+              <a:rPr lang="en-CA" sz="2800" dirty="0">
+                <a:solidFill>
+                  <a:schemeClr val="tx1">
+                    <a:lumMod val="25000"/>
+                    <a:lumOff val="75000"/>
+                  </a:schemeClr>
+                </a:solidFill>
+                <a:latin typeface="Kumbh Sans" pitchFamily="2" charset="0"/>
+                <a:cs typeface="Kumbh Sans" pitchFamily="2" charset="0"/>
+              </a:rPr>
+              <a:t>Project</a:t>
+            </a:r>
+          </a:p>
+          <a:p>
+            <a:pPr>
+              <a:lnSpc>
+                <a:spcPct val="200000"/>
+              </a:lnSpc>
+            </a:pPr>
+            <a:r>
+              <a:rPr lang="en-CA" sz="2800" dirty="0">
+                <a:latin typeface="Kumbh Sans" pitchFamily="2" charset="0"/>
+                <a:cs typeface="Kumbh Sans" pitchFamily="2" charset="0"/>
+              </a:rPr>
+              <a:t>Q &amp; A</a:t>
             </a:r>
           </a:p>
         </p:txBody>
@@ -4206,7 +6332,7 @@
 </p:sld>
 </file>
 
-<file path=ppt/slides/slide15.xml><?xml version="1.0" encoding="utf-8"?>
+<file path=ppt/slides/slide16.xml><?xml version="1.0" encoding="utf-8"?>
 <p:sld xmlns:a="http://schemas.openxmlformats.org/drawingml/2006/main" xmlns:r="http://schemas.openxmlformats.org/officeDocument/2006/relationships" xmlns:p="http://schemas.openxmlformats.org/presentationml/2006/main">
   <p:cSld>
     <p:spTree>
@@ -4229,41 +6355,6 @@
           <a:chExt cx="0" cy="0"/>
         </a:xfrm>
       </p:grpSpPr>
-      <p:sp>
-        <p:nvSpPr>
-          <p:cNvPr id="2" name="TextBox 1">
-            <a:extLst>
-              <a:ext uri="{FF2B5EF4-FFF2-40B4-BE49-F238E27FC236}">
-                <a16:creationId xmlns:a16="http://schemas.microsoft.com/office/drawing/2014/main" id="{5B048899-C536-5880-E201-0706C75C8AF2}"/>
-              </a:ext>
-            </a:extLst>
-          </p:cNvPr>
-          <p:cNvSpPr txBox="1"/>
-          <p:nvPr/>
-        </p:nvSpPr>
-        <p:spPr>
-          <a:xfrm>
-            <a:off x="4506686" y="2759529"/>
-            <a:ext cx="569387" cy="369332"/>
-          </a:xfrm>
-          <a:prstGeom prst="rect">
-            <a:avLst/>
-          </a:prstGeom>
-          <a:noFill/>
-        </p:spPr>
-        <p:txBody>
-          <a:bodyPr wrap="none" rtlCol="0">
-            <a:spAutoFit/>
-          </a:bodyPr>
-          <a:lstStyle/>
-          <a:p>
-            <a:r>
-              <a:rPr lang="en-CA" dirty="0"/>
-              <a:t>End</a:t>
-            </a:r>
-          </a:p>
-        </p:txBody>
-      </p:sp>
     </p:spTree>
     <p:extLst>
       <p:ext uri="{BB962C8B-B14F-4D97-AF65-F5344CB8AC3E}">
@@ -4302,10 +6393,258 @@
       </p:grpSpPr>
       <p:sp>
         <p:nvSpPr>
-          <p:cNvPr id="2" name="TextBox 1">
+          <p:cNvPr id="19" name="Rectangle: Rounded Corners 18">
             <a:extLst>
               <a:ext uri="{FF2B5EF4-FFF2-40B4-BE49-F238E27FC236}">
-                <a16:creationId xmlns:a16="http://schemas.microsoft.com/office/drawing/2014/main" id="{46678232-D860-76CE-77D5-D9F21C5850EF}"/>
+                <a16:creationId xmlns:a16="http://schemas.microsoft.com/office/drawing/2014/main" id="{34355EF9-B8A3-1336-E2F3-0B95B2A432A6}"/>
+              </a:ext>
+            </a:extLst>
+          </p:cNvPr>
+          <p:cNvSpPr/>
+          <p:nvPr/>
+        </p:nvSpPr>
+        <p:spPr>
+          <a:xfrm>
+            <a:off x="331872" y="585786"/>
+            <a:ext cx="2887578" cy="714377"/>
+          </a:xfrm>
+          <a:prstGeom prst="roundRect">
+            <a:avLst>
+              <a:gd name="adj" fmla="val 11544"/>
+            </a:avLst>
+          </a:prstGeom>
+          <a:solidFill>
+            <a:schemeClr val="bg1">
+              <a:lumMod val="90000"/>
+            </a:schemeClr>
+          </a:solidFill>
+          <a:ln>
+            <a:noFill/>
+          </a:ln>
+        </p:spPr>
+        <p:style>
+          <a:lnRef idx="2">
+            <a:schemeClr val="accent1">
+              <a:shade val="15000"/>
+            </a:schemeClr>
+          </a:lnRef>
+          <a:fillRef idx="1">
+            <a:schemeClr val="accent1"/>
+          </a:fillRef>
+          <a:effectRef idx="0">
+            <a:schemeClr val="accent1"/>
+          </a:effectRef>
+          <a:fontRef idx="minor">
+            <a:schemeClr val="lt1"/>
+          </a:fontRef>
+        </p:style>
+        <p:txBody>
+          <a:bodyPr rtlCol="0" anchor="ctr"/>
+          <a:lstStyle/>
+          <a:p>
+            <a:pPr algn="ctr"/>
+            <a:endParaRPr lang="en-CA"/>
+          </a:p>
+        </p:txBody>
+      </p:sp>
+      <p:sp>
+        <p:nvSpPr>
+          <p:cNvPr id="20" name="Rectangle: Rounded Corners 19">
+            <a:extLst>
+              <a:ext uri="{FF2B5EF4-FFF2-40B4-BE49-F238E27FC236}">
+                <a16:creationId xmlns:a16="http://schemas.microsoft.com/office/drawing/2014/main" id="{DD92669B-838F-D70A-6EF1-1E0A6BF88610}"/>
+              </a:ext>
+            </a:extLst>
+          </p:cNvPr>
+          <p:cNvSpPr/>
+          <p:nvPr/>
+        </p:nvSpPr>
+        <p:spPr>
+          <a:xfrm>
+            <a:off x="3003634" y="585786"/>
+            <a:ext cx="8559716" cy="5686427"/>
+          </a:xfrm>
+          <a:prstGeom prst="roundRect">
+            <a:avLst>
+              <a:gd name="adj" fmla="val 2513"/>
+            </a:avLst>
+          </a:prstGeom>
+          <a:solidFill>
+            <a:schemeClr val="bg1">
+              <a:lumMod val="90000"/>
+            </a:schemeClr>
+          </a:solidFill>
+          <a:ln>
+            <a:noFill/>
+          </a:ln>
+        </p:spPr>
+        <p:style>
+          <a:lnRef idx="2">
+            <a:schemeClr val="accent1">
+              <a:shade val="15000"/>
+            </a:schemeClr>
+          </a:lnRef>
+          <a:fillRef idx="1">
+            <a:schemeClr val="accent1"/>
+          </a:fillRef>
+          <a:effectRef idx="0">
+            <a:schemeClr val="accent1"/>
+          </a:effectRef>
+          <a:fontRef idx="minor">
+            <a:schemeClr val="lt1"/>
+          </a:fontRef>
+        </p:style>
+        <p:txBody>
+          <a:bodyPr rtlCol="0" anchor="ctr"/>
+          <a:lstStyle/>
+          <a:p>
+            <a:pPr algn="ctr"/>
+            <a:endParaRPr lang="en-CA" dirty="0"/>
+          </a:p>
+        </p:txBody>
+      </p:sp>
+      <p:grpSp>
+        <p:nvGrpSpPr>
+          <p:cNvPr id="21" name="Group 20">
+            <a:extLst>
+              <a:ext uri="{FF2B5EF4-FFF2-40B4-BE49-F238E27FC236}">
+                <a16:creationId xmlns:a16="http://schemas.microsoft.com/office/drawing/2014/main" id="{3060A56E-49FC-5A8D-CD76-4DB949309083}"/>
+              </a:ext>
+            </a:extLst>
+          </p:cNvPr>
+          <p:cNvGrpSpPr/>
+          <p:nvPr/>
+        </p:nvGrpSpPr>
+        <p:grpSpPr>
+          <a:xfrm>
+            <a:off x="2703597" y="1300163"/>
+            <a:ext cx="300037" cy="300038"/>
+            <a:chOff x="1234559" y="4745831"/>
+            <a:chExt cx="300037" cy="300038"/>
+          </a:xfrm>
+        </p:grpSpPr>
+        <p:sp>
+          <p:nvSpPr>
+            <p:cNvPr id="22" name="Rectangle 21">
+              <a:extLst>
+                <a:ext uri="{FF2B5EF4-FFF2-40B4-BE49-F238E27FC236}">
+                  <a16:creationId xmlns:a16="http://schemas.microsoft.com/office/drawing/2014/main" id="{28445EF8-00CC-87D9-26BB-9E18F9E91452}"/>
+                </a:ext>
+              </a:extLst>
+            </p:cNvPr>
+            <p:cNvSpPr/>
+            <p:nvPr/>
+          </p:nvSpPr>
+          <p:spPr>
+            <a:xfrm>
+              <a:off x="1234559" y="4745832"/>
+              <a:ext cx="300037" cy="300037"/>
+            </a:xfrm>
+            <a:prstGeom prst="rect">
+              <a:avLst/>
+            </a:prstGeom>
+            <a:gradFill flip="none" rotWithShape="1">
+              <a:gsLst>
+                <a:gs pos="68000">
+                  <a:schemeClr val="bg1"/>
+                </a:gs>
+                <a:gs pos="83000">
+                  <a:schemeClr val="bg1">
+                    <a:lumMod val="90000"/>
+                  </a:schemeClr>
+                </a:gs>
+              </a:gsLst>
+              <a:lin ang="18900000" scaled="1"/>
+              <a:tileRect/>
+            </a:gradFill>
+            <a:ln>
+              <a:noFill/>
+            </a:ln>
+          </p:spPr>
+          <p:style>
+            <a:lnRef idx="2">
+              <a:schemeClr val="accent1">
+                <a:shade val="15000"/>
+              </a:schemeClr>
+            </a:lnRef>
+            <a:fillRef idx="1">
+              <a:schemeClr val="accent1"/>
+            </a:fillRef>
+            <a:effectRef idx="0">
+              <a:schemeClr val="accent1"/>
+            </a:effectRef>
+            <a:fontRef idx="minor">
+              <a:schemeClr val="lt1"/>
+            </a:fontRef>
+          </p:style>
+          <p:txBody>
+            <a:bodyPr rtlCol="0" anchor="ctr"/>
+            <a:lstStyle/>
+            <a:p>
+              <a:pPr algn="ctr"/>
+              <a:endParaRPr lang="en-CA" dirty="0"/>
+            </a:p>
+          </p:txBody>
+        </p:sp>
+        <p:sp>
+          <p:nvSpPr>
+            <p:cNvPr id="23" name="Oval 22">
+              <a:extLst>
+                <a:ext uri="{FF2B5EF4-FFF2-40B4-BE49-F238E27FC236}">
+                  <a16:creationId xmlns:a16="http://schemas.microsoft.com/office/drawing/2014/main" id="{176D123C-D1BA-0ED2-97EC-22EB453DDF2F}"/>
+                </a:ext>
+              </a:extLst>
+            </p:cNvPr>
+            <p:cNvSpPr/>
+            <p:nvPr/>
+          </p:nvSpPr>
+          <p:spPr>
+            <a:xfrm>
+              <a:off x="1234559" y="4745831"/>
+              <a:ext cx="300036" cy="300037"/>
+            </a:xfrm>
+            <a:prstGeom prst="ellipse">
+              <a:avLst/>
+            </a:prstGeom>
+            <a:solidFill>
+              <a:schemeClr val="bg1"/>
+            </a:solidFill>
+            <a:ln>
+              <a:noFill/>
+            </a:ln>
+          </p:spPr>
+          <p:style>
+            <a:lnRef idx="2">
+              <a:schemeClr val="accent1">
+                <a:shade val="15000"/>
+              </a:schemeClr>
+            </a:lnRef>
+            <a:fillRef idx="1">
+              <a:schemeClr val="accent1"/>
+            </a:fillRef>
+            <a:effectRef idx="0">
+              <a:schemeClr val="accent1"/>
+            </a:effectRef>
+            <a:fontRef idx="minor">
+              <a:schemeClr val="lt1"/>
+            </a:fontRef>
+          </p:style>
+          <p:txBody>
+            <a:bodyPr rtlCol="0" anchor="ctr"/>
+            <a:lstStyle/>
+            <a:p>
+              <a:pPr algn="ctr"/>
+              <a:endParaRPr lang="en-CA"/>
+            </a:p>
+          </p:txBody>
+        </p:sp>
+      </p:grpSp>
+      <p:sp>
+        <p:nvSpPr>
+          <p:cNvPr id="16" name="TextBox 15">
+            <a:extLst>
+              <a:ext uri="{FF2B5EF4-FFF2-40B4-BE49-F238E27FC236}">
+                <a16:creationId xmlns:a16="http://schemas.microsoft.com/office/drawing/2014/main" id="{E7FE4CEB-5AA4-EF36-A0B3-5685A99F5358}"/>
               </a:ext>
             </a:extLst>
           </p:cNvPr>
@@ -4314,8 +6653,113 @@
         </p:nvSpPr>
         <p:spPr>
           <a:xfrm>
-            <a:off x="4506686" y="2759529"/>
-            <a:ext cx="1542410" cy="369332"/>
+            <a:off x="5301551" y="2153811"/>
+            <a:ext cx="1588897" cy="2550378"/>
+          </a:xfrm>
+          <a:prstGeom prst="rect">
+            <a:avLst/>
+          </a:prstGeom>
+          <a:solidFill>
+            <a:schemeClr val="bg1"/>
+          </a:solidFill>
+        </p:spPr>
+        <p:txBody>
+          <a:bodyPr wrap="none" rtlCol="0">
+            <a:spAutoFit/>
+          </a:bodyPr>
+          <a:lstStyle/>
+          <a:p>
+            <a:pPr>
+              <a:lnSpc>
+                <a:spcPct val="200000"/>
+              </a:lnSpc>
+            </a:pPr>
+            <a:r>
+              <a:rPr lang="en-CA" sz="2800" dirty="0">
+                <a:latin typeface="Kumbh Sans" pitchFamily="2" charset="0"/>
+                <a:cs typeface="Kumbh Sans" pitchFamily="2" charset="0"/>
+              </a:rPr>
+              <a:t>Adestria</a:t>
+            </a:r>
+          </a:p>
+          <a:p>
+            <a:pPr>
+              <a:lnSpc>
+                <a:spcPct val="200000"/>
+              </a:lnSpc>
+            </a:pPr>
+            <a:r>
+              <a:rPr lang="en-CA" sz="2800" dirty="0">
+                <a:latin typeface="Kumbh Sans" pitchFamily="2" charset="0"/>
+                <a:cs typeface="Kumbh Sans" pitchFamily="2" charset="0"/>
+              </a:rPr>
+              <a:t>Project</a:t>
+            </a:r>
+          </a:p>
+          <a:p>
+            <a:pPr>
+              <a:lnSpc>
+                <a:spcPct val="200000"/>
+              </a:lnSpc>
+            </a:pPr>
+            <a:r>
+              <a:rPr lang="en-CA" sz="2800" dirty="0">
+                <a:latin typeface="Kumbh Sans" pitchFamily="2" charset="0"/>
+                <a:cs typeface="Kumbh Sans" pitchFamily="2" charset="0"/>
+              </a:rPr>
+              <a:t>Q &amp; A</a:t>
+            </a:r>
+          </a:p>
+        </p:txBody>
+      </p:sp>
+      <p:pic>
+        <p:nvPicPr>
+          <p:cNvPr id="18" name="Picture 17">
+            <a:extLst>
+              <a:ext uri="{FF2B5EF4-FFF2-40B4-BE49-F238E27FC236}">
+                <a16:creationId xmlns:a16="http://schemas.microsoft.com/office/drawing/2014/main" id="{564AEA62-7416-399A-3D15-3B47A683A141}"/>
+              </a:ext>
+            </a:extLst>
+          </p:cNvPr>
+          <p:cNvPicPr>
+            <a:picLocks noChangeAspect="1"/>
+          </p:cNvPicPr>
+          <p:nvPr/>
+        </p:nvPicPr>
+        <p:blipFill>
+          <a:blip r:embed="rId2">
+            <a:alphaModFix/>
+          </a:blip>
+          <a:stretch>
+            <a:fillRect/>
+          </a:stretch>
+        </p:blipFill>
+        <p:spPr>
+          <a:xfrm>
+            <a:off x="5028041" y="2219325"/>
+            <a:ext cx="2006815" cy="2650331"/>
+          </a:xfrm>
+          <a:prstGeom prst="rect">
+            <a:avLst/>
+          </a:prstGeom>
+        </p:spPr>
+      </p:pic>
+      <p:sp>
+        <p:nvSpPr>
+          <p:cNvPr id="4" name="TextBox 3">
+            <a:extLst>
+              <a:ext uri="{FF2B5EF4-FFF2-40B4-BE49-F238E27FC236}">
+                <a16:creationId xmlns:a16="http://schemas.microsoft.com/office/drawing/2014/main" id="{FF2203D6-CADD-8886-994B-15E5019085A9}"/>
+              </a:ext>
+            </a:extLst>
+          </p:cNvPr>
+          <p:cNvSpPr txBox="1"/>
+          <p:nvPr/>
+        </p:nvSpPr>
+        <p:spPr>
+          <a:xfrm>
+            <a:off x="440111" y="376344"/>
+            <a:ext cx="1588897" cy="2550378"/>
           </a:xfrm>
           <a:prstGeom prst="rect">
             <a:avLst/>
@@ -4328,10 +6772,62 @@
           </a:bodyPr>
           <a:lstStyle/>
           <a:p>
-            <a:r>
-              <a:rPr lang="en-CA" dirty="0"/>
-              <a:t>Outline of ppt</a:t>
-            </a:r>
+            <a:pPr>
+              <a:lnSpc>
+                <a:spcPct val="200000"/>
+              </a:lnSpc>
+            </a:pPr>
+            <a:r>
+              <a:rPr lang="en-CA" sz="2800" dirty="0">
+                <a:latin typeface="Kumbh Sans" pitchFamily="2" charset="0"/>
+                <a:cs typeface="Kumbh Sans" pitchFamily="2" charset="0"/>
+              </a:rPr>
+              <a:t>Adestria</a:t>
+            </a:r>
+          </a:p>
+          <a:p>
+            <a:pPr>
+              <a:lnSpc>
+                <a:spcPct val="200000"/>
+              </a:lnSpc>
+            </a:pPr>
+            <a:r>
+              <a:rPr lang="en-CA" sz="2800" dirty="0">
+                <a:solidFill>
+                  <a:schemeClr val="tx1">
+                    <a:lumMod val="25000"/>
+                    <a:lumOff val="75000"/>
+                  </a:schemeClr>
+                </a:solidFill>
+                <a:latin typeface="Kumbh Sans" pitchFamily="2" charset="0"/>
+                <a:cs typeface="Kumbh Sans" pitchFamily="2" charset="0"/>
+              </a:rPr>
+              <a:t>Project</a:t>
+            </a:r>
+          </a:p>
+          <a:p>
+            <a:pPr>
+              <a:lnSpc>
+                <a:spcPct val="200000"/>
+              </a:lnSpc>
+            </a:pPr>
+            <a:r>
+              <a:rPr lang="en-CA" sz="2800" dirty="0">
+                <a:solidFill>
+                  <a:schemeClr val="tx1">
+                    <a:lumMod val="25000"/>
+                    <a:lumOff val="75000"/>
+                  </a:schemeClr>
+                </a:solidFill>
+                <a:latin typeface="Kumbh Sans" pitchFamily="2" charset="0"/>
+                <a:cs typeface="Kumbh Sans" pitchFamily="2" charset="0"/>
+              </a:rPr>
+              <a:t>Q &amp; A</a:t>
+            </a:r>
+            <a:endParaRPr lang="en-CA" sz="2800" dirty="0">
+              <a:latin typeface="Kumbh Sans" pitchFamily="2" charset="0"/>
+              <a:cs typeface="Kumbh Sans" pitchFamily="2" charset="0"/>
+            </a:endParaRPr>
           </a:p>
         </p:txBody>
       </p:sp>
@@ -4345,6 +6841,922 @@
   <p:clrMapOvr>
     <a:masterClrMapping/>
   </p:clrMapOvr>
+  <p:timing>
+    <p:tnLst>
+      <p:par>
+        <p:cTn id="1" dur="indefinite" restart="never" nodeType="tmRoot">
+          <p:childTnLst>
+            <p:seq concurrent="1" nextAc="seek">
+              <p:cTn id="2" dur="indefinite" nodeType="mainSeq">
+                <p:childTnLst>
+                  <p:par>
+                    <p:cTn id="3" fill="hold">
+                      <p:stCondLst>
+                        <p:cond delay="indefinite"/>
+                      </p:stCondLst>
+                      <p:childTnLst>
+                        <p:par>
+                          <p:cTn id="4" fill="hold">
+                            <p:stCondLst>
+                              <p:cond delay="0"/>
+                            </p:stCondLst>
+                            <p:childTnLst>
+                              <p:par>
+                                <p:cTn id="5" presetID="10" presetClass="entr" presetSubtype="0" fill="hold" nodeType="clickEffect">
+                                  <p:stCondLst>
+                                    <p:cond delay="0"/>
+                                  </p:stCondLst>
+                                  <p:childTnLst>
+                                    <p:set>
+                                      <p:cBhvr>
+                                        <p:cTn id="6" dur="1" fill="hold">
+                                          <p:stCondLst>
+                                            <p:cond delay="0"/>
+                                          </p:stCondLst>
+                                        </p:cTn>
+                                        <p:tgtEl>
+                                          <p:spTgt spid="16">
+                                            <p:txEl>
+                                              <p:pRg st="0" end="0"/>
+                                            </p:txEl>
+                                          </p:spTgt>
+                                        </p:tgtEl>
+                                        <p:attrNameLst>
+                                          <p:attrName>style.visibility</p:attrName>
+                                        </p:attrNameLst>
+                                      </p:cBhvr>
+                                      <p:to>
+                                        <p:strVal val="visible"/>
+                                      </p:to>
+                                    </p:set>
+                                    <p:animEffect transition="in" filter="fade">
+                                      <p:cBhvr>
+                                        <p:cTn id="7" dur="500"/>
+                                        <p:tgtEl>
+                                          <p:spTgt spid="16">
+                                            <p:txEl>
+                                              <p:pRg st="0" end="0"/>
+                                            </p:txEl>
+                                          </p:spTgt>
+                                        </p:tgtEl>
+                                      </p:cBhvr>
+                                    </p:animEffect>
+                                  </p:childTnLst>
+                                </p:cTn>
+                              </p:par>
+                            </p:childTnLst>
+                          </p:cTn>
+                        </p:par>
+                      </p:childTnLst>
+                    </p:cTn>
+                  </p:par>
+                  <p:par>
+                    <p:cTn id="8" fill="hold">
+                      <p:stCondLst>
+                        <p:cond delay="indefinite"/>
+                      </p:stCondLst>
+                      <p:childTnLst>
+                        <p:par>
+                          <p:cTn id="9" fill="hold">
+                            <p:stCondLst>
+                              <p:cond delay="0"/>
+                            </p:stCondLst>
+                            <p:childTnLst>
+                              <p:par>
+                                <p:cTn id="10" presetID="10" presetClass="entr" presetSubtype="0" fill="hold" nodeType="clickEffect">
+                                  <p:stCondLst>
+                                    <p:cond delay="0"/>
+                                  </p:stCondLst>
+                                  <p:childTnLst>
+                                    <p:set>
+                                      <p:cBhvr>
+                                        <p:cTn id="11" dur="1" fill="hold">
+                                          <p:stCondLst>
+                                            <p:cond delay="0"/>
+                                          </p:stCondLst>
+                                        </p:cTn>
+                                        <p:tgtEl>
+                                          <p:spTgt spid="16">
+                                            <p:txEl>
+                                              <p:pRg st="1" end="1"/>
+                                            </p:txEl>
+                                          </p:spTgt>
+                                        </p:tgtEl>
+                                        <p:attrNameLst>
+                                          <p:attrName>style.visibility</p:attrName>
+                                        </p:attrNameLst>
+                                      </p:cBhvr>
+                                      <p:to>
+                                        <p:strVal val="visible"/>
+                                      </p:to>
+                                    </p:set>
+                                    <p:animEffect transition="in" filter="fade">
+                                      <p:cBhvr>
+                                        <p:cTn id="12" dur="500"/>
+                                        <p:tgtEl>
+                                          <p:spTgt spid="16">
+                                            <p:txEl>
+                                              <p:pRg st="1" end="1"/>
+                                            </p:txEl>
+                                          </p:spTgt>
+                                        </p:tgtEl>
+                                      </p:cBhvr>
+                                    </p:animEffect>
+                                  </p:childTnLst>
+                                </p:cTn>
+                              </p:par>
+                              <p:par>
+                                <p:cTn id="13" presetID="19" presetClass="emph" presetSubtype="0" fill="hold" nodeType="withEffect">
+                                  <p:stCondLst>
+                                    <p:cond delay="0"/>
+                                  </p:stCondLst>
+                                  <p:childTnLst>
+                                    <p:animClr clrSpc="rgb" dir="cw">
+                                      <p:cBhvr override="childStyle">
+                                        <p:cTn id="14" dur="500" fill="hold"/>
+                                        <p:tgtEl>
+                                          <p:spTgt spid="16">
+                                            <p:txEl>
+                                              <p:pRg st="0" end="0"/>
+                                            </p:txEl>
+                                          </p:spTgt>
+                                        </p:tgtEl>
+                                        <p:attrNameLst>
+                                          <p:attrName>style.color</p:attrName>
+                                        </p:attrNameLst>
+                                      </p:cBhvr>
+                                      <p:to>
+                                        <a:srgbClr val="96CDF8"/>
+                                      </p:to>
+                                    </p:animClr>
+                                    <p:animClr clrSpc="rgb" dir="cw">
+                                      <p:cBhvr>
+                                        <p:cTn id="15" dur="500" fill="hold"/>
+                                        <p:tgtEl>
+                                          <p:spTgt spid="16">
+                                            <p:txEl>
+                                              <p:pRg st="0" end="0"/>
+                                            </p:txEl>
+                                          </p:spTgt>
+                                        </p:tgtEl>
+                                        <p:attrNameLst>
+                                          <p:attrName>fillcolor</p:attrName>
+                                        </p:attrNameLst>
+                                      </p:cBhvr>
+                                      <p:to>
+                                        <a:srgbClr val="96CDF8"/>
+                                      </p:to>
+                                    </p:animClr>
+                                    <p:set>
+                                      <p:cBhvr>
+                                        <p:cTn id="16" dur="500" fill="hold"/>
+                                        <p:tgtEl>
+                                          <p:spTgt spid="16">
+                                            <p:txEl>
+                                              <p:pRg st="0" end="0"/>
+                                            </p:txEl>
+                                          </p:spTgt>
+                                        </p:tgtEl>
+                                        <p:attrNameLst>
+                                          <p:attrName>fill.type</p:attrName>
+                                        </p:attrNameLst>
+                                      </p:cBhvr>
+                                      <p:to>
+                                        <p:strVal val="solid"/>
+                                      </p:to>
+                                    </p:set>
+                                    <p:set>
+                                      <p:cBhvr>
+                                        <p:cTn id="17" dur="500" fill="hold"/>
+                                        <p:tgtEl>
+                                          <p:spTgt spid="16">
+                                            <p:txEl>
+                                              <p:pRg st="0" end="0"/>
+                                            </p:txEl>
+                                          </p:spTgt>
+                                        </p:tgtEl>
+                                        <p:attrNameLst>
+                                          <p:attrName>fill.on</p:attrName>
+                                        </p:attrNameLst>
+                                      </p:cBhvr>
+                                      <p:to>
+                                        <p:strVal val="true"/>
+                                      </p:to>
+                                    </p:set>
+                                  </p:childTnLst>
+                                </p:cTn>
+                              </p:par>
+                            </p:childTnLst>
+                          </p:cTn>
+                        </p:par>
+                      </p:childTnLst>
+                    </p:cTn>
+                  </p:par>
+                  <p:par>
+                    <p:cTn id="18" fill="hold">
+                      <p:stCondLst>
+                        <p:cond delay="indefinite"/>
+                      </p:stCondLst>
+                      <p:childTnLst>
+                        <p:par>
+                          <p:cTn id="19" fill="hold">
+                            <p:stCondLst>
+                              <p:cond delay="0"/>
+                            </p:stCondLst>
+                            <p:childTnLst>
+                              <p:par>
+                                <p:cTn id="20" presetID="10" presetClass="entr" presetSubtype="0" fill="hold" nodeType="clickEffect">
+                                  <p:stCondLst>
+                                    <p:cond delay="0"/>
+                                  </p:stCondLst>
+                                  <p:childTnLst>
+                                    <p:set>
+                                      <p:cBhvr>
+                                        <p:cTn id="21" dur="1" fill="hold">
+                                          <p:stCondLst>
+                                            <p:cond delay="0"/>
+                                          </p:stCondLst>
+                                        </p:cTn>
+                                        <p:tgtEl>
+                                          <p:spTgt spid="16">
+                                            <p:txEl>
+                                              <p:pRg st="2" end="2"/>
+                                            </p:txEl>
+                                          </p:spTgt>
+                                        </p:tgtEl>
+                                        <p:attrNameLst>
+                                          <p:attrName>style.visibility</p:attrName>
+                                        </p:attrNameLst>
+                                      </p:cBhvr>
+                                      <p:to>
+                                        <p:strVal val="visible"/>
+                                      </p:to>
+                                    </p:set>
+                                    <p:animEffect transition="in" filter="fade">
+                                      <p:cBhvr>
+                                        <p:cTn id="22" dur="500"/>
+                                        <p:tgtEl>
+                                          <p:spTgt spid="16">
+                                            <p:txEl>
+                                              <p:pRg st="2" end="2"/>
+                                            </p:txEl>
+                                          </p:spTgt>
+                                        </p:tgtEl>
+                                      </p:cBhvr>
+                                    </p:animEffect>
+                                  </p:childTnLst>
+                                </p:cTn>
+                              </p:par>
+                              <p:par>
+                                <p:cTn id="23" presetID="19" presetClass="emph" presetSubtype="0" fill="hold" nodeType="withEffect">
+                                  <p:stCondLst>
+                                    <p:cond delay="0"/>
+                                  </p:stCondLst>
+                                  <p:childTnLst>
+                                    <p:animClr clrSpc="rgb" dir="cw">
+                                      <p:cBhvr override="childStyle">
+                                        <p:cTn id="24" dur="500" fill="hold"/>
+                                        <p:tgtEl>
+                                          <p:spTgt spid="16">
+                                            <p:txEl>
+                                              <p:pRg st="1" end="1"/>
+                                            </p:txEl>
+                                          </p:spTgt>
+                                        </p:tgtEl>
+                                        <p:attrNameLst>
+                                          <p:attrName>style.color</p:attrName>
+                                        </p:attrNameLst>
+                                      </p:cBhvr>
+                                      <p:to>
+                                        <a:srgbClr val="96CDF8"/>
+                                      </p:to>
+                                    </p:animClr>
+                                    <p:animClr clrSpc="rgb" dir="cw">
+                                      <p:cBhvr>
+                                        <p:cTn id="25" dur="500" fill="hold"/>
+                                        <p:tgtEl>
+                                          <p:spTgt spid="16">
+                                            <p:txEl>
+                                              <p:pRg st="1" end="1"/>
+                                            </p:txEl>
+                                          </p:spTgt>
+                                        </p:tgtEl>
+                                        <p:attrNameLst>
+                                          <p:attrName>fillcolor</p:attrName>
+                                        </p:attrNameLst>
+                                      </p:cBhvr>
+                                      <p:to>
+                                        <a:srgbClr val="96CDF8"/>
+                                      </p:to>
+                                    </p:animClr>
+                                    <p:set>
+                                      <p:cBhvr>
+                                        <p:cTn id="26" dur="500" fill="hold"/>
+                                        <p:tgtEl>
+                                          <p:spTgt spid="16">
+                                            <p:txEl>
+                                              <p:pRg st="1" end="1"/>
+                                            </p:txEl>
+                                          </p:spTgt>
+                                        </p:tgtEl>
+                                        <p:attrNameLst>
+                                          <p:attrName>fill.type</p:attrName>
+                                        </p:attrNameLst>
+                                      </p:cBhvr>
+                                      <p:to>
+                                        <p:strVal val="solid"/>
+                                      </p:to>
+                                    </p:set>
+                                    <p:set>
+                                      <p:cBhvr>
+                                        <p:cTn id="27" dur="500" fill="hold"/>
+                                        <p:tgtEl>
+                                          <p:spTgt spid="16">
+                                            <p:txEl>
+                                              <p:pRg st="1" end="1"/>
+                                            </p:txEl>
+                                          </p:spTgt>
+                                        </p:tgtEl>
+                                        <p:attrNameLst>
+                                          <p:attrName>fill.on</p:attrName>
+                                        </p:attrNameLst>
+                                      </p:cBhvr>
+                                      <p:to>
+                                        <p:strVal val="true"/>
+                                      </p:to>
+                                    </p:set>
+                                  </p:childTnLst>
+                                </p:cTn>
+                              </p:par>
+                            </p:childTnLst>
+                          </p:cTn>
+                        </p:par>
+                      </p:childTnLst>
+                    </p:cTn>
+                  </p:par>
+                  <p:par>
+                    <p:cTn id="28" fill="hold">
+                      <p:stCondLst>
+                        <p:cond delay="indefinite"/>
+                      </p:stCondLst>
+                      <p:childTnLst>
+                        <p:par>
+                          <p:cTn id="29" fill="hold">
+                            <p:stCondLst>
+                              <p:cond delay="0"/>
+                            </p:stCondLst>
+                            <p:childTnLst>
+                              <p:par>
+                                <p:cTn id="30" presetID="19" presetClass="emph" presetSubtype="0" fill="hold" nodeType="clickEffect">
+                                  <p:stCondLst>
+                                    <p:cond delay="0"/>
+                                  </p:stCondLst>
+                                  <p:childTnLst>
+                                    <p:animClr clrSpc="rgb" dir="cw">
+                                      <p:cBhvr override="childStyle">
+                                        <p:cTn id="31" dur="500" fill="hold"/>
+                                        <p:tgtEl>
+                                          <p:spTgt spid="16">
+                                            <p:txEl>
+                                              <p:pRg st="2" end="2"/>
+                                            </p:txEl>
+                                          </p:spTgt>
+                                        </p:tgtEl>
+                                        <p:attrNameLst>
+                                          <p:attrName>style.color</p:attrName>
+                                        </p:attrNameLst>
+                                      </p:cBhvr>
+                                      <p:to>
+                                        <a:srgbClr val="96CDF8"/>
+                                      </p:to>
+                                    </p:animClr>
+                                    <p:animClr clrSpc="rgb" dir="cw">
+                                      <p:cBhvr>
+                                        <p:cTn id="32" dur="500" fill="hold"/>
+                                        <p:tgtEl>
+                                          <p:spTgt spid="16">
+                                            <p:txEl>
+                                              <p:pRg st="2" end="2"/>
+                                            </p:txEl>
+                                          </p:spTgt>
+                                        </p:tgtEl>
+                                        <p:attrNameLst>
+                                          <p:attrName>fillcolor</p:attrName>
+                                        </p:attrNameLst>
+                                      </p:cBhvr>
+                                      <p:to>
+                                        <a:srgbClr val="96CDF8"/>
+                                      </p:to>
+                                    </p:animClr>
+                                    <p:set>
+                                      <p:cBhvr>
+                                        <p:cTn id="33" dur="500" fill="hold"/>
+                                        <p:tgtEl>
+                                          <p:spTgt spid="16">
+                                            <p:txEl>
+                                              <p:pRg st="2" end="2"/>
+                                            </p:txEl>
+                                          </p:spTgt>
+                                        </p:tgtEl>
+                                        <p:attrNameLst>
+                                          <p:attrName>fill.type</p:attrName>
+                                        </p:attrNameLst>
+                                      </p:cBhvr>
+                                      <p:to>
+                                        <p:strVal val="solid"/>
+                                      </p:to>
+                                    </p:set>
+                                    <p:set>
+                                      <p:cBhvr>
+                                        <p:cTn id="34" dur="500" fill="hold"/>
+                                        <p:tgtEl>
+                                          <p:spTgt spid="16">
+                                            <p:txEl>
+                                              <p:pRg st="2" end="2"/>
+                                            </p:txEl>
+                                          </p:spTgt>
+                                        </p:tgtEl>
+                                        <p:attrNameLst>
+                                          <p:attrName>fill.on</p:attrName>
+                                        </p:attrNameLst>
+                                      </p:cBhvr>
+                                      <p:to>
+                                        <p:strVal val="true"/>
+                                      </p:to>
+                                    </p:set>
+                                  </p:childTnLst>
+                                </p:cTn>
+                              </p:par>
+                              <p:par>
+                                <p:cTn id="35" presetID="10" presetClass="entr" presetSubtype="0" fill="hold" nodeType="withEffect">
+                                  <p:stCondLst>
+                                    <p:cond delay="0"/>
+                                  </p:stCondLst>
+                                  <p:childTnLst>
+                                    <p:set>
+                                      <p:cBhvr>
+                                        <p:cTn id="36" dur="1" fill="hold">
+                                          <p:stCondLst>
+                                            <p:cond delay="0"/>
+                                          </p:stCondLst>
+                                        </p:cTn>
+                                        <p:tgtEl>
+                                          <p:spTgt spid="18"/>
+                                        </p:tgtEl>
+                                        <p:attrNameLst>
+                                          <p:attrName>style.visibility</p:attrName>
+                                        </p:attrNameLst>
+                                      </p:cBhvr>
+                                      <p:to>
+                                        <p:strVal val="visible"/>
+                                      </p:to>
+                                    </p:set>
+                                    <p:animEffect transition="in" filter="fade">
+                                      <p:cBhvr>
+                                        <p:cTn id="37" dur="500"/>
+                                        <p:tgtEl>
+                                          <p:spTgt spid="18"/>
+                                        </p:tgtEl>
+                                      </p:cBhvr>
+                                    </p:animEffect>
+                                  </p:childTnLst>
+                                </p:cTn>
+                              </p:par>
+                              <p:par>
+                                <p:cTn id="38" presetID="10" presetClass="exit" presetSubtype="0" fill="hold" grpId="0" nodeType="withEffect">
+                                  <p:stCondLst>
+                                    <p:cond delay="0"/>
+                                  </p:stCondLst>
+                                  <p:childTnLst>
+                                    <p:animEffect transition="out" filter="fade">
+                                      <p:cBhvr>
+                                        <p:cTn id="39" dur="500"/>
+                                        <p:tgtEl>
+                                          <p:spTgt spid="16">
+                                            <p:txEl>
+                                              <p:pRg st="0" end="0"/>
+                                            </p:txEl>
+                                          </p:spTgt>
+                                        </p:tgtEl>
+                                      </p:cBhvr>
+                                    </p:animEffect>
+                                    <p:set>
+                                      <p:cBhvr>
+                                        <p:cTn id="40" dur="1" fill="hold">
+                                          <p:stCondLst>
+                                            <p:cond delay="499"/>
+                                          </p:stCondLst>
+                                        </p:cTn>
+                                        <p:tgtEl>
+                                          <p:spTgt spid="16">
+                                            <p:txEl>
+                                              <p:pRg st="0" end="0"/>
+                                            </p:txEl>
+                                          </p:spTgt>
+                                        </p:tgtEl>
+                                        <p:attrNameLst>
+                                          <p:attrName>style.visibility</p:attrName>
+                                        </p:attrNameLst>
+                                      </p:cBhvr>
+                                      <p:to>
+                                        <p:strVal val="hidden"/>
+                                      </p:to>
+                                    </p:set>
+                                  </p:childTnLst>
+                                </p:cTn>
+                              </p:par>
+                              <p:par>
+                                <p:cTn id="41" presetID="10" presetClass="exit" presetSubtype="0" fill="hold" grpId="0" nodeType="withEffect">
+                                  <p:stCondLst>
+                                    <p:cond delay="0"/>
+                                  </p:stCondLst>
+                                  <p:childTnLst>
+                                    <p:animEffect transition="out" filter="fade">
+                                      <p:cBhvr>
+                                        <p:cTn id="42" dur="500"/>
+                                        <p:tgtEl>
+                                          <p:spTgt spid="16">
+                                            <p:txEl>
+                                              <p:pRg st="1" end="1"/>
+                                            </p:txEl>
+                                          </p:spTgt>
+                                        </p:tgtEl>
+                                      </p:cBhvr>
+                                    </p:animEffect>
+                                    <p:set>
+                                      <p:cBhvr>
+                                        <p:cTn id="43" dur="1" fill="hold">
+                                          <p:stCondLst>
+                                            <p:cond delay="499"/>
+                                          </p:stCondLst>
+                                        </p:cTn>
+                                        <p:tgtEl>
+                                          <p:spTgt spid="16">
+                                            <p:txEl>
+                                              <p:pRg st="1" end="1"/>
+                                            </p:txEl>
+                                          </p:spTgt>
+                                        </p:tgtEl>
+                                        <p:attrNameLst>
+                                          <p:attrName>style.visibility</p:attrName>
+                                        </p:attrNameLst>
+                                      </p:cBhvr>
+                                      <p:to>
+                                        <p:strVal val="hidden"/>
+                                      </p:to>
+                                    </p:set>
+                                  </p:childTnLst>
+                                </p:cTn>
+                              </p:par>
+                              <p:par>
+                                <p:cTn id="44" presetID="10" presetClass="exit" presetSubtype="0" fill="hold" grpId="0" nodeType="withEffect">
+                                  <p:stCondLst>
+                                    <p:cond delay="0"/>
+                                  </p:stCondLst>
+                                  <p:childTnLst>
+                                    <p:animEffect transition="out" filter="fade">
+                                      <p:cBhvr>
+                                        <p:cTn id="45" dur="500"/>
+                                        <p:tgtEl>
+                                          <p:spTgt spid="16">
+                                            <p:txEl>
+                                              <p:pRg st="2" end="2"/>
+                                            </p:txEl>
+                                          </p:spTgt>
+                                        </p:tgtEl>
+                                      </p:cBhvr>
+                                    </p:animEffect>
+                                    <p:set>
+                                      <p:cBhvr>
+                                        <p:cTn id="46" dur="1" fill="hold">
+                                          <p:stCondLst>
+                                            <p:cond delay="499"/>
+                                          </p:stCondLst>
+                                        </p:cTn>
+                                        <p:tgtEl>
+                                          <p:spTgt spid="16">
+                                            <p:txEl>
+                                              <p:pRg st="2" end="2"/>
+                                            </p:txEl>
+                                          </p:spTgt>
+                                        </p:tgtEl>
+                                        <p:attrNameLst>
+                                          <p:attrName>style.visibility</p:attrName>
+                                        </p:attrNameLst>
+                                      </p:cBhvr>
+                                      <p:to>
+                                        <p:strVal val="hidden"/>
+                                      </p:to>
+                                    </p:set>
+                                  </p:childTnLst>
+                                </p:cTn>
+                              </p:par>
+                              <p:par>
+                                <p:cTn id="47" presetID="10" presetClass="exit" presetSubtype="0" fill="hold" grpId="0" nodeType="withEffect">
+                                  <p:stCondLst>
+                                    <p:cond delay="0"/>
+                                  </p:stCondLst>
+                                  <p:childTnLst>
+                                    <p:animEffect transition="out" filter="fade">
+                                      <p:cBhvr>
+                                        <p:cTn id="48" dur="500"/>
+                                        <p:tgtEl>
+                                          <p:spTgt spid="16">
+                                            <p:bg/>
+                                          </p:spTgt>
+                                        </p:tgtEl>
+                                      </p:cBhvr>
+                                    </p:animEffect>
+                                    <p:set>
+                                      <p:cBhvr>
+                                        <p:cTn id="49" dur="1" fill="hold">
+                                          <p:stCondLst>
+                                            <p:cond delay="499"/>
+                                          </p:stCondLst>
+                                        </p:cTn>
+                                        <p:tgtEl>
+                                          <p:spTgt spid="16">
+                                            <p:bg/>
+                                          </p:spTgt>
+                                        </p:tgtEl>
+                                        <p:attrNameLst>
+                                          <p:attrName>style.visibility</p:attrName>
+                                        </p:attrNameLst>
+                                      </p:cBhvr>
+                                      <p:to>
+                                        <p:strVal val="hidden"/>
+                                      </p:to>
+                                    </p:set>
+                                  </p:childTnLst>
+                                </p:cTn>
+                              </p:par>
+                            </p:childTnLst>
+                          </p:cTn>
+                        </p:par>
+                        <p:par>
+                          <p:cTn id="50" fill="hold">
+                            <p:stCondLst>
+                              <p:cond delay="500"/>
+                            </p:stCondLst>
+                            <p:childTnLst>
+                              <p:par>
+                                <p:cTn id="51" presetID="42" presetClass="path" presetSubtype="0" accel="20000" decel="75000" fill="hold" nodeType="afterEffect">
+                                  <p:stCondLst>
+                                    <p:cond delay="0"/>
+                                  </p:stCondLst>
+                                  <p:childTnLst>
+                                    <p:animMotion origin="layout" path="M -1.45833E-6 3.33333E-6 L -0.39857 -0.25949 " pathEditMode="relative" rAng="0" ptsTypes="AA">
+                                      <p:cBhvr>
+                                        <p:cTn id="52" dur="2000" fill="hold"/>
+                                        <p:tgtEl>
+                                          <p:spTgt spid="18"/>
+                                        </p:tgtEl>
+                                        <p:attrNameLst>
+                                          <p:attrName>ppt_x</p:attrName>
+                                          <p:attrName>ppt_y</p:attrName>
+                                        </p:attrNameLst>
+                                      </p:cBhvr>
+                                      <p:rCtr x="-19935" y="-12986"/>
+                                    </p:animMotion>
+                                  </p:childTnLst>
+                                </p:cTn>
+                              </p:par>
+                            </p:childTnLst>
+                          </p:cTn>
+                        </p:par>
+                        <p:par>
+                          <p:cTn id="53" fill="hold">
+                            <p:stCondLst>
+                              <p:cond delay="2500"/>
+                            </p:stCondLst>
+                            <p:childTnLst>
+                              <p:par>
+                                <p:cTn id="54" presetID="10" presetClass="entr" presetSubtype="0" fill="hold" grpId="0" nodeType="afterEffect">
+                                  <p:stCondLst>
+                                    <p:cond delay="0"/>
+                                  </p:stCondLst>
+                                  <p:childTnLst>
+                                    <p:set>
+                                      <p:cBhvr>
+                                        <p:cTn id="55" dur="1" fill="hold">
+                                          <p:stCondLst>
+                                            <p:cond delay="0"/>
+                                          </p:stCondLst>
+                                        </p:cTn>
+                                        <p:tgtEl>
+                                          <p:spTgt spid="4"/>
+                                        </p:tgtEl>
+                                        <p:attrNameLst>
+                                          <p:attrName>style.visibility</p:attrName>
+                                        </p:attrNameLst>
+                                      </p:cBhvr>
+                                      <p:to>
+                                        <p:strVal val="visible"/>
+                                      </p:to>
+                                    </p:set>
+                                    <p:animEffect transition="in" filter="fade">
+                                      <p:cBhvr>
+                                        <p:cTn id="56" dur="500"/>
+                                        <p:tgtEl>
+                                          <p:spTgt spid="4"/>
+                                        </p:tgtEl>
+                                      </p:cBhvr>
+                                    </p:animEffect>
+                                  </p:childTnLst>
+                                </p:cTn>
+                              </p:par>
+                            </p:childTnLst>
+                          </p:cTn>
+                        </p:par>
+                        <p:par>
+                          <p:cTn id="57" fill="hold">
+                            <p:stCondLst>
+                              <p:cond delay="3000"/>
+                            </p:stCondLst>
+                            <p:childTnLst>
+                              <p:par>
+                                <p:cTn id="58" presetID="10" presetClass="exit" presetSubtype="0" fill="hold" nodeType="afterEffect">
+                                  <p:stCondLst>
+                                    <p:cond delay="0"/>
+                                  </p:stCondLst>
+                                  <p:childTnLst>
+                                    <p:animEffect transition="out" filter="fade">
+                                      <p:cBhvr>
+                                        <p:cTn id="59" dur="500"/>
+                                        <p:tgtEl>
+                                          <p:spTgt spid="18"/>
+                                        </p:tgtEl>
+                                      </p:cBhvr>
+                                    </p:animEffect>
+                                    <p:set>
+                                      <p:cBhvr>
+                                        <p:cTn id="60" dur="1" fill="hold">
+                                          <p:stCondLst>
+                                            <p:cond delay="499"/>
+                                          </p:stCondLst>
+                                        </p:cTn>
+                                        <p:tgtEl>
+                                          <p:spTgt spid="18"/>
+                                        </p:tgtEl>
+                                        <p:attrNameLst>
+                                          <p:attrName>style.visibility</p:attrName>
+                                        </p:attrNameLst>
+                                      </p:cBhvr>
+                                      <p:to>
+                                        <p:strVal val="hidden"/>
+                                      </p:to>
+                                    </p:set>
+                                  </p:childTnLst>
+                                </p:cTn>
+                              </p:par>
+                            </p:childTnLst>
+                          </p:cTn>
+                        </p:par>
+                        <p:par>
+                          <p:cTn id="61" fill="hold">
+                            <p:stCondLst>
+                              <p:cond delay="3500"/>
+                            </p:stCondLst>
+                            <p:childTnLst>
+                              <p:par>
+                                <p:cTn id="62" presetID="10" presetClass="entr" presetSubtype="0" fill="hold" grpId="0" nodeType="afterEffect">
+                                  <p:stCondLst>
+                                    <p:cond delay="0"/>
+                                  </p:stCondLst>
+                                  <p:childTnLst>
+                                    <p:set>
+                                      <p:cBhvr>
+                                        <p:cTn id="63" dur="1" fill="hold">
+                                          <p:stCondLst>
+                                            <p:cond delay="0"/>
+                                          </p:stCondLst>
+                                        </p:cTn>
+                                        <p:tgtEl>
+                                          <p:spTgt spid="20"/>
+                                        </p:tgtEl>
+                                        <p:attrNameLst>
+                                          <p:attrName>style.visibility</p:attrName>
+                                        </p:attrNameLst>
+                                      </p:cBhvr>
+                                      <p:to>
+                                        <p:strVal val="visible"/>
+                                      </p:to>
+                                    </p:set>
+                                    <p:animEffect transition="in" filter="fade">
+                                      <p:cBhvr>
+                                        <p:cTn id="64" dur="500"/>
+                                        <p:tgtEl>
+                                          <p:spTgt spid="20"/>
+                                        </p:tgtEl>
+                                      </p:cBhvr>
+                                    </p:animEffect>
+                                  </p:childTnLst>
+                                </p:cTn>
+                              </p:par>
+                              <p:par>
+                                <p:cTn id="65" presetID="10" presetClass="entr" presetSubtype="0" fill="hold" grpId="0" nodeType="withEffect">
+                                  <p:stCondLst>
+                                    <p:cond delay="0"/>
+                                  </p:stCondLst>
+                                  <p:childTnLst>
+                                    <p:set>
+                                      <p:cBhvr>
+                                        <p:cTn id="66" dur="1" fill="hold">
+                                          <p:stCondLst>
+                                            <p:cond delay="0"/>
+                                          </p:stCondLst>
+                                        </p:cTn>
+                                        <p:tgtEl>
+                                          <p:spTgt spid="19"/>
+                                        </p:tgtEl>
+                                        <p:attrNameLst>
+                                          <p:attrName>style.visibility</p:attrName>
+                                        </p:attrNameLst>
+                                      </p:cBhvr>
+                                      <p:to>
+                                        <p:strVal val="visible"/>
+                                      </p:to>
+                                    </p:set>
+                                    <p:animEffect transition="in" filter="fade">
+                                      <p:cBhvr>
+                                        <p:cTn id="67" dur="500"/>
+                                        <p:tgtEl>
+                                          <p:spTgt spid="19"/>
+                                        </p:tgtEl>
+                                      </p:cBhvr>
+                                    </p:animEffect>
+                                  </p:childTnLst>
+                                </p:cTn>
+                              </p:par>
+                              <p:par>
+                                <p:cTn id="68" presetID="10" presetClass="entr" presetSubtype="0" fill="hold" nodeType="withEffect">
+                                  <p:stCondLst>
+                                    <p:cond delay="0"/>
+                                  </p:stCondLst>
+                                  <p:childTnLst>
+                                    <p:set>
+                                      <p:cBhvr>
+                                        <p:cTn id="69" dur="1" fill="hold">
+                                          <p:stCondLst>
+                                            <p:cond delay="0"/>
+                                          </p:stCondLst>
+                                        </p:cTn>
+                                        <p:tgtEl>
+                                          <p:spTgt spid="21"/>
+                                        </p:tgtEl>
+                                        <p:attrNameLst>
+                                          <p:attrName>style.visibility</p:attrName>
+                                        </p:attrNameLst>
+                                      </p:cBhvr>
+                                      <p:to>
+                                        <p:strVal val="visible"/>
+                                      </p:to>
+                                    </p:set>
+                                    <p:animEffect transition="in" filter="fade">
+                                      <p:cBhvr>
+                                        <p:cTn id="70" dur="500"/>
+                                        <p:tgtEl>
+                                          <p:spTgt spid="21"/>
+                                        </p:tgtEl>
+                                      </p:cBhvr>
+                                    </p:animEffect>
+                                  </p:childTnLst>
+                                </p:cTn>
+                              </p:par>
+                            </p:childTnLst>
+                          </p:cTn>
+                        </p:par>
+                      </p:childTnLst>
+                    </p:cTn>
+                  </p:par>
+                </p:childTnLst>
+              </p:cTn>
+              <p:prevCondLst>
+                <p:cond evt="onPrev" delay="0">
+                  <p:tgtEl>
+                    <p:sldTgt/>
+                  </p:tgtEl>
+                </p:cond>
+              </p:prevCondLst>
+              <p:nextCondLst>
+                <p:cond evt="onNext" delay="0">
+                  <p:tgtEl>
+                    <p:sldTgt/>
+                  </p:tgtEl>
+                </p:cond>
+              </p:nextCondLst>
+            </p:seq>
+          </p:childTnLst>
+        </p:cTn>
+      </p:par>
+    </p:tnLst>
+    <p:bldLst>
+      <p:bldP spid="19" grpId="0" animBg="1"/>
+      <p:bldP spid="20" grpId="0" animBg="1"/>
+      <p:bldP spid="16" grpId="0" build="allAtOnce" animBg="1"/>
+      <p:bldP spid="4" grpId="0" animBg="1"/>
+    </p:bldLst>
+  </p:timing>
 </p:sld>
 </file>
 
@@ -4373,10 +7785,66 @@
       </p:grpSpPr>
       <p:sp>
         <p:nvSpPr>
-          <p:cNvPr id="2" name="TextBox 1">
+          <p:cNvPr id="11" name="Rectangle: Rounded Corners 10">
             <a:extLst>
               <a:ext uri="{FF2B5EF4-FFF2-40B4-BE49-F238E27FC236}">
-                <a16:creationId xmlns:a16="http://schemas.microsoft.com/office/drawing/2014/main" id="{C7943069-6591-7336-398B-719327BAD466}"/>
+                <a16:creationId xmlns:a16="http://schemas.microsoft.com/office/drawing/2014/main" id="{1353A151-D3BF-5598-8C13-D8ED000AD618}"/>
+              </a:ext>
+            </a:extLst>
+          </p:cNvPr>
+          <p:cNvSpPr/>
+          <p:nvPr/>
+        </p:nvSpPr>
+        <p:spPr>
+          <a:xfrm>
+            <a:off x="331872" y="585786"/>
+            <a:ext cx="2887578" cy="714377"/>
+          </a:xfrm>
+          <a:prstGeom prst="roundRect">
+            <a:avLst>
+              <a:gd name="adj" fmla="val 11544"/>
+            </a:avLst>
+          </a:prstGeom>
+          <a:solidFill>
+            <a:schemeClr val="bg1">
+              <a:lumMod val="90000"/>
+            </a:schemeClr>
+          </a:solidFill>
+          <a:ln>
+            <a:noFill/>
+          </a:ln>
+        </p:spPr>
+        <p:style>
+          <a:lnRef idx="2">
+            <a:schemeClr val="accent1">
+              <a:shade val="15000"/>
+            </a:schemeClr>
+          </a:lnRef>
+          <a:fillRef idx="1">
+            <a:schemeClr val="accent1"/>
+          </a:fillRef>
+          <a:effectRef idx="0">
+            <a:schemeClr val="accent1"/>
+          </a:effectRef>
+          <a:fontRef idx="minor">
+            <a:schemeClr val="lt1"/>
+          </a:fontRef>
+        </p:style>
+        <p:txBody>
+          <a:bodyPr rtlCol="0" anchor="ctr"/>
+          <a:lstStyle/>
+          <a:p>
+            <a:pPr algn="ctr"/>
+            <a:endParaRPr lang="en-CA"/>
+          </a:p>
+        </p:txBody>
+      </p:sp>
+      <p:sp>
+        <p:nvSpPr>
+          <p:cNvPr id="5" name="TextBox 4">
+            <a:extLst>
+              <a:ext uri="{FF2B5EF4-FFF2-40B4-BE49-F238E27FC236}">
+                <a16:creationId xmlns:a16="http://schemas.microsoft.com/office/drawing/2014/main" id="{DB1A1787-4F3B-4026-9478-2D29155C7AD4}"/>
               </a:ext>
             </a:extLst>
           </p:cNvPr>
@@ -4385,8 +7853,8 @@
         </p:nvSpPr>
         <p:spPr>
           <a:xfrm>
-            <a:off x="4506686" y="2759529"/>
-            <a:ext cx="4246740" cy="369332"/>
+            <a:off x="440111" y="376344"/>
+            <a:ext cx="1588897" cy="2550378"/>
           </a:xfrm>
           <a:prstGeom prst="rect">
             <a:avLst/>
@@ -4399,19 +7867,273 @@
           </a:bodyPr>
           <a:lstStyle/>
           <a:p>
-            <a:r>
-              <a:rPr lang="en-CA" dirty="0"/>
-              <a:t>Adestria (mission and vision statements)</a:t>
-            </a:r>
+            <a:pPr>
+              <a:lnSpc>
+                <a:spcPct val="200000"/>
+              </a:lnSpc>
+            </a:pPr>
+            <a:r>
+              <a:rPr lang="en-CA" sz="2800" dirty="0">
+                <a:latin typeface="Kumbh Sans" pitchFamily="2" charset="0"/>
+                <a:cs typeface="Kumbh Sans" pitchFamily="2" charset="0"/>
+              </a:rPr>
+              <a:t>Adestria</a:t>
+            </a:r>
+            <a:endParaRPr lang="en-CA" sz="2800" dirty="0">
+              <a:solidFill>
+                <a:schemeClr val="tx1">
+                  <a:lumMod val="25000"/>
+                  <a:lumOff val="75000"/>
+                </a:schemeClr>
+              </a:solidFill>
+              <a:latin typeface="Kumbh Sans" pitchFamily="2" charset="0"/>
+              <a:cs typeface="Kumbh Sans" pitchFamily="2" charset="0"/>
+            </a:endParaRPr>
+          </a:p>
+          <a:p>
+            <a:pPr>
+              <a:lnSpc>
+                <a:spcPct val="200000"/>
+              </a:lnSpc>
+            </a:pPr>
+            <a:r>
+              <a:rPr lang="en-CA" sz="2800" dirty="0">
+                <a:solidFill>
+                  <a:schemeClr val="tx1">
+                    <a:lumMod val="25000"/>
+                    <a:lumOff val="75000"/>
+                  </a:schemeClr>
+                </a:solidFill>
+                <a:latin typeface="Kumbh Sans" pitchFamily="2" charset="0"/>
+                <a:cs typeface="Kumbh Sans" pitchFamily="2" charset="0"/>
+              </a:rPr>
+              <a:t>Project</a:t>
+            </a:r>
+          </a:p>
+          <a:p>
+            <a:pPr>
+              <a:lnSpc>
+                <a:spcPct val="200000"/>
+              </a:lnSpc>
+            </a:pPr>
+            <a:r>
+              <a:rPr lang="en-CA" sz="2800" dirty="0">
+                <a:solidFill>
+                  <a:schemeClr val="tx1">
+                    <a:lumMod val="25000"/>
+                    <a:lumOff val="75000"/>
+                  </a:schemeClr>
+                </a:solidFill>
+                <a:latin typeface="Kumbh Sans" pitchFamily="2" charset="0"/>
+                <a:cs typeface="Kumbh Sans" pitchFamily="2" charset="0"/>
+              </a:rPr>
+              <a:t>Q &amp; A</a:t>
+            </a:r>
+            <a:endParaRPr lang="en-CA" sz="2800" dirty="0">
+              <a:latin typeface="Kumbh Sans" pitchFamily="2" charset="0"/>
+              <a:cs typeface="Kumbh Sans" pitchFamily="2" charset="0"/>
+            </a:endParaRPr>
           </a:p>
         </p:txBody>
       </p:sp>
       <p:sp>
         <p:nvSpPr>
-          <p:cNvPr id="4" name="TextBox 3">
+          <p:cNvPr id="9" name="Rectangle: Rounded Corners 8">
             <a:extLst>
               <a:ext uri="{FF2B5EF4-FFF2-40B4-BE49-F238E27FC236}">
-                <a16:creationId xmlns:a16="http://schemas.microsoft.com/office/drawing/2014/main" id="{4179717D-B637-2B0D-B9EF-712078DD12DB}"/>
+                <a16:creationId xmlns:a16="http://schemas.microsoft.com/office/drawing/2014/main" id="{574F826F-7902-4E9C-ECB9-9D31F725526B}"/>
+              </a:ext>
+            </a:extLst>
+          </p:cNvPr>
+          <p:cNvSpPr/>
+          <p:nvPr/>
+        </p:nvSpPr>
+        <p:spPr>
+          <a:xfrm>
+            <a:off x="3003634" y="585786"/>
+            <a:ext cx="8559716" cy="5686427"/>
+          </a:xfrm>
+          <a:prstGeom prst="roundRect">
+            <a:avLst>
+              <a:gd name="adj" fmla="val 2513"/>
+            </a:avLst>
+          </a:prstGeom>
+          <a:solidFill>
+            <a:schemeClr val="bg1">
+              <a:lumMod val="90000"/>
+            </a:schemeClr>
+          </a:solidFill>
+          <a:ln>
+            <a:noFill/>
+          </a:ln>
+        </p:spPr>
+        <p:style>
+          <a:lnRef idx="2">
+            <a:schemeClr val="accent1">
+              <a:shade val="15000"/>
+            </a:schemeClr>
+          </a:lnRef>
+          <a:fillRef idx="1">
+            <a:schemeClr val="accent1"/>
+          </a:fillRef>
+          <a:effectRef idx="0">
+            <a:schemeClr val="accent1"/>
+          </a:effectRef>
+          <a:fontRef idx="minor">
+            <a:schemeClr val="lt1"/>
+          </a:fontRef>
+        </p:style>
+        <p:txBody>
+          <a:bodyPr rtlCol="0" anchor="ctr"/>
+          <a:lstStyle/>
+          <a:p>
+            <a:pPr algn="ctr"/>
+            <a:endParaRPr lang="en-CA" dirty="0"/>
+          </a:p>
+        </p:txBody>
+      </p:sp>
+      <p:grpSp>
+        <p:nvGrpSpPr>
+          <p:cNvPr id="14" name="Group 13">
+            <a:extLst>
+              <a:ext uri="{FF2B5EF4-FFF2-40B4-BE49-F238E27FC236}">
+                <a16:creationId xmlns:a16="http://schemas.microsoft.com/office/drawing/2014/main" id="{8A8268A5-D4AB-506C-B03C-108E6F28747B}"/>
+              </a:ext>
+            </a:extLst>
+          </p:cNvPr>
+          <p:cNvGrpSpPr/>
+          <p:nvPr/>
+        </p:nvGrpSpPr>
+        <p:grpSpPr>
+          <a:xfrm>
+            <a:off x="2703597" y="1300163"/>
+            <a:ext cx="300037" cy="300038"/>
+            <a:chOff x="1234559" y="4745831"/>
+            <a:chExt cx="300037" cy="300038"/>
+          </a:xfrm>
+        </p:grpSpPr>
+        <p:sp>
+          <p:nvSpPr>
+            <p:cNvPr id="13" name="Rectangle 12">
+              <a:extLst>
+                <a:ext uri="{FF2B5EF4-FFF2-40B4-BE49-F238E27FC236}">
+                  <a16:creationId xmlns:a16="http://schemas.microsoft.com/office/drawing/2014/main" id="{12E49B19-956E-922D-815D-8303E8A1343F}"/>
+                </a:ext>
+              </a:extLst>
+            </p:cNvPr>
+            <p:cNvSpPr/>
+            <p:nvPr/>
+          </p:nvSpPr>
+          <p:spPr>
+            <a:xfrm>
+              <a:off x="1234559" y="4745832"/>
+              <a:ext cx="300037" cy="300037"/>
+            </a:xfrm>
+            <a:prstGeom prst="rect">
+              <a:avLst/>
+            </a:prstGeom>
+            <a:gradFill flip="none" rotWithShape="1">
+              <a:gsLst>
+                <a:gs pos="68000">
+                  <a:schemeClr val="bg1"/>
+                </a:gs>
+                <a:gs pos="83000">
+                  <a:schemeClr val="bg1">
+                    <a:lumMod val="90000"/>
+                  </a:schemeClr>
+                </a:gs>
+              </a:gsLst>
+              <a:lin ang="18900000" scaled="1"/>
+              <a:tileRect/>
+            </a:gradFill>
+            <a:ln>
+              <a:noFill/>
+            </a:ln>
+          </p:spPr>
+          <p:style>
+            <a:lnRef idx="2">
+              <a:schemeClr val="accent1">
+                <a:shade val="15000"/>
+              </a:schemeClr>
+            </a:lnRef>
+            <a:fillRef idx="1">
+              <a:schemeClr val="accent1"/>
+            </a:fillRef>
+            <a:effectRef idx="0">
+              <a:schemeClr val="accent1"/>
+            </a:effectRef>
+            <a:fontRef idx="minor">
+              <a:schemeClr val="lt1"/>
+            </a:fontRef>
+          </p:style>
+          <p:txBody>
+            <a:bodyPr rtlCol="0" anchor="ctr"/>
+            <a:lstStyle/>
+            <a:p>
+              <a:pPr algn="ctr"/>
+              <a:endParaRPr lang="en-CA" dirty="0"/>
+            </a:p>
+          </p:txBody>
+        </p:sp>
+        <p:sp>
+          <p:nvSpPr>
+            <p:cNvPr id="12" name="Oval 11">
+              <a:extLst>
+                <a:ext uri="{FF2B5EF4-FFF2-40B4-BE49-F238E27FC236}">
+                  <a16:creationId xmlns:a16="http://schemas.microsoft.com/office/drawing/2014/main" id="{D51500F2-78D7-CFFA-80E0-405242AA7A53}"/>
+                </a:ext>
+              </a:extLst>
+            </p:cNvPr>
+            <p:cNvSpPr/>
+            <p:nvPr/>
+          </p:nvSpPr>
+          <p:spPr>
+            <a:xfrm>
+              <a:off x="1234559" y="4745831"/>
+              <a:ext cx="300036" cy="300037"/>
+            </a:xfrm>
+            <a:prstGeom prst="ellipse">
+              <a:avLst/>
+            </a:prstGeom>
+            <a:solidFill>
+              <a:schemeClr val="bg1"/>
+            </a:solidFill>
+            <a:ln>
+              <a:noFill/>
+            </a:ln>
+          </p:spPr>
+          <p:style>
+            <a:lnRef idx="2">
+              <a:schemeClr val="accent1">
+                <a:shade val="15000"/>
+              </a:schemeClr>
+            </a:lnRef>
+            <a:fillRef idx="1">
+              <a:schemeClr val="accent1"/>
+            </a:fillRef>
+            <a:effectRef idx="0">
+              <a:schemeClr val="accent1"/>
+            </a:effectRef>
+            <a:fontRef idx="minor">
+              <a:schemeClr val="lt1"/>
+            </a:fontRef>
+          </p:style>
+          <p:txBody>
+            <a:bodyPr rtlCol="0" anchor="ctr"/>
+            <a:lstStyle/>
+            <a:p>
+              <a:pPr algn="ctr"/>
+              <a:endParaRPr lang="en-CA"/>
+            </a:p>
+          </p:txBody>
+        </p:sp>
+      </p:grpSp>
+      <p:sp>
+        <p:nvSpPr>
+          <p:cNvPr id="18" name="TextBox 17">
+            <a:extLst>
+              <a:ext uri="{FF2B5EF4-FFF2-40B4-BE49-F238E27FC236}">
+                <a16:creationId xmlns:a16="http://schemas.microsoft.com/office/drawing/2014/main" id="{C6B1A604-7C77-14AF-238D-D7A8CCEFB2B3}"/>
               </a:ext>
             </a:extLst>
           </p:cNvPr>
@@ -4420,8 +8142,8 @@
         </p:nvSpPr>
         <p:spPr>
           <a:xfrm>
-            <a:off x="3048680" y="3128861"/>
-            <a:ext cx="6723969" cy="3139321"/>
+            <a:off x="5416550" y="3199884"/>
+            <a:ext cx="1273105" cy="923330"/>
           </a:xfrm>
           <a:prstGeom prst="rect">
             <a:avLst/>
@@ -4429,19 +8151,240 @@
           <a:noFill/>
         </p:spPr>
         <p:txBody>
-          <a:bodyPr wrap="square">
+          <a:bodyPr wrap="none" rtlCol="0">
             <a:spAutoFit/>
           </a:bodyPr>
           <a:lstStyle/>
           <a:p>
-            <a:r>
-              <a:rPr lang="en-CA" sz="1800" b="0" i="0" dirty="0">
-                <a:effectLst/>
-                <a:latin typeface="+mn-lt"/>
-              </a:rPr>
-              <a:t>Mission At Adestria, we create, develop, and implement dependable software solutions that address practical issues. We empower companies to confidently expand operations, enhance customer experience, and streamline their online presence through responsive front end design, clean architecture, and efficient back end systems. Vision To be a trustworthy technology partner with a reputation for creative software development, accessible digital design, and technical accuracy. By transforming complex requirements into accessible, and valuable user experiences, we hope to impact the direction of online and application systems in the future.</a:t>
-            </a:r>
-            <a:endParaRPr lang="en-CA" dirty="0"/>
+            <a:pPr algn="r"/>
+            <a:r>
+              <a:rPr lang="en-CA" dirty="0"/>
+              <a:t>Create</a:t>
+            </a:r>
+          </a:p>
+          <a:p>
+            <a:pPr algn="r"/>
+            <a:r>
+              <a:rPr lang="en-CA" dirty="0"/>
+              <a:t>Develop</a:t>
+            </a:r>
+          </a:p>
+          <a:p>
+            <a:pPr algn="r"/>
+            <a:r>
+              <a:rPr lang="en-CA" dirty="0"/>
+              <a:t>Implement</a:t>
+            </a:r>
+          </a:p>
+        </p:txBody>
+      </p:sp>
+      <p:sp>
+        <p:nvSpPr>
+          <p:cNvPr id="19" name="TextBox 18">
+            <a:extLst>
+              <a:ext uri="{FF2B5EF4-FFF2-40B4-BE49-F238E27FC236}">
+                <a16:creationId xmlns:a16="http://schemas.microsoft.com/office/drawing/2014/main" id="{4A0CC54C-E406-43A5-B3FC-71C942466F46}"/>
+              </a:ext>
+            </a:extLst>
+          </p:cNvPr>
+          <p:cNvSpPr txBox="1"/>
+          <p:nvPr/>
+        </p:nvSpPr>
+        <p:spPr>
+          <a:xfrm>
+            <a:off x="6564238" y="3199884"/>
+            <a:ext cx="2041393" cy="369332"/>
+          </a:xfrm>
+          <a:prstGeom prst="rect">
+            <a:avLst/>
+          </a:prstGeom>
+          <a:noFill/>
+        </p:spPr>
+        <p:txBody>
+          <a:bodyPr wrap="none" rtlCol="0">
+            <a:spAutoFit/>
+          </a:bodyPr>
+          <a:lstStyle/>
+          <a:p>
+            <a:r>
+              <a:rPr lang="en-CA" dirty="0"/>
+              <a:t>solutions to issues</a:t>
+            </a:r>
+          </a:p>
+        </p:txBody>
+      </p:sp>
+      <p:sp>
+        <p:nvSpPr>
+          <p:cNvPr id="20" name="TextBox 19">
+            <a:extLst>
+              <a:ext uri="{FF2B5EF4-FFF2-40B4-BE49-F238E27FC236}">
+                <a16:creationId xmlns:a16="http://schemas.microsoft.com/office/drawing/2014/main" id="{CCFAD389-EE71-B68B-7904-B518B60423D2}"/>
+              </a:ext>
+            </a:extLst>
+          </p:cNvPr>
+          <p:cNvSpPr txBox="1"/>
+          <p:nvPr/>
+        </p:nvSpPr>
+        <p:spPr>
+          <a:xfrm>
+            <a:off x="5766249" y="3198336"/>
+            <a:ext cx="925253" cy="369332"/>
+          </a:xfrm>
+          <a:prstGeom prst="rect">
+            <a:avLst/>
+          </a:prstGeom>
+          <a:noFill/>
+        </p:spPr>
+        <p:txBody>
+          <a:bodyPr wrap="none" rtlCol="0">
+            <a:spAutoFit/>
+          </a:bodyPr>
+          <a:lstStyle/>
+          <a:p>
+            <a:r>
+              <a:rPr lang="en-CA" dirty="0"/>
+              <a:t>Expand</a:t>
+            </a:r>
+          </a:p>
+        </p:txBody>
+      </p:sp>
+      <p:sp>
+        <p:nvSpPr>
+          <p:cNvPr id="21" name="TextBox 20">
+            <a:extLst>
+              <a:ext uri="{FF2B5EF4-FFF2-40B4-BE49-F238E27FC236}">
+                <a16:creationId xmlns:a16="http://schemas.microsoft.com/office/drawing/2014/main" id="{AD65F9A4-3D9F-CADB-4D37-DD80B4615F45}"/>
+              </a:ext>
+            </a:extLst>
+          </p:cNvPr>
+          <p:cNvSpPr txBox="1"/>
+          <p:nvPr/>
+        </p:nvSpPr>
+        <p:spPr>
+          <a:xfrm>
+            <a:off x="6689655" y="3198336"/>
+            <a:ext cx="1059906" cy="369332"/>
+          </a:xfrm>
+          <a:prstGeom prst="rect">
+            <a:avLst/>
+          </a:prstGeom>
+          <a:noFill/>
+        </p:spPr>
+        <p:txBody>
+          <a:bodyPr wrap="none" rtlCol="0">
+            <a:spAutoFit/>
+          </a:bodyPr>
+          <a:lstStyle/>
+          <a:p>
+            <a:r>
+              <a:rPr lang="en-CA" dirty="0"/>
+              <a:t>Enhance</a:t>
+            </a:r>
+          </a:p>
+        </p:txBody>
+      </p:sp>
+      <p:sp>
+        <p:nvSpPr>
+          <p:cNvPr id="22" name="TextBox 21">
+            <a:extLst>
+              <a:ext uri="{FF2B5EF4-FFF2-40B4-BE49-F238E27FC236}">
+                <a16:creationId xmlns:a16="http://schemas.microsoft.com/office/drawing/2014/main" id="{12F11FF0-1BF1-6CC5-4631-D4121454A724}"/>
+              </a:ext>
+            </a:extLst>
+          </p:cNvPr>
+          <p:cNvSpPr txBox="1"/>
+          <p:nvPr/>
+        </p:nvSpPr>
+        <p:spPr>
+          <a:xfrm>
+            <a:off x="7747714" y="3198336"/>
+            <a:ext cx="1268361" cy="369332"/>
+          </a:xfrm>
+          <a:prstGeom prst="rect">
+            <a:avLst/>
+          </a:prstGeom>
+          <a:noFill/>
+        </p:spPr>
+        <p:txBody>
+          <a:bodyPr wrap="none" rtlCol="0">
+            <a:spAutoFit/>
+          </a:bodyPr>
+          <a:lstStyle/>
+          <a:p>
+            <a:r>
+              <a:rPr lang="en-CA" dirty="0"/>
+              <a:t>Streamline</a:t>
+            </a:r>
+          </a:p>
+        </p:txBody>
+      </p:sp>
+      <p:sp>
+        <p:nvSpPr>
+          <p:cNvPr id="23" name="TextBox 22">
+            <a:extLst>
+              <a:ext uri="{FF2B5EF4-FFF2-40B4-BE49-F238E27FC236}">
+                <a16:creationId xmlns:a16="http://schemas.microsoft.com/office/drawing/2014/main" id="{407BEB45-41C6-4289-92A8-7E218F7F8701}"/>
+              </a:ext>
+            </a:extLst>
+          </p:cNvPr>
+          <p:cNvSpPr txBox="1"/>
+          <p:nvPr/>
+        </p:nvSpPr>
+        <p:spPr>
+          <a:xfrm>
+            <a:off x="6542820" y="3199884"/>
+            <a:ext cx="293670" cy="369332"/>
+          </a:xfrm>
+          <a:prstGeom prst="rect">
+            <a:avLst/>
+          </a:prstGeom>
+          <a:noFill/>
+        </p:spPr>
+        <p:txBody>
+          <a:bodyPr wrap="none" rtlCol="0">
+            <a:spAutoFit/>
+          </a:bodyPr>
+          <a:lstStyle/>
+          <a:p>
+            <a:r>
+              <a:rPr lang="en-CA" dirty="0"/>
+              <a:t>•</a:t>
+            </a:r>
+          </a:p>
+        </p:txBody>
+      </p:sp>
+      <p:sp>
+        <p:nvSpPr>
+          <p:cNvPr id="24" name="TextBox 23">
+            <a:extLst>
+              <a:ext uri="{FF2B5EF4-FFF2-40B4-BE49-F238E27FC236}">
+                <a16:creationId xmlns:a16="http://schemas.microsoft.com/office/drawing/2014/main" id="{943D9693-4F65-1A39-4384-D3D500B08D4A}"/>
+              </a:ext>
+            </a:extLst>
+          </p:cNvPr>
+          <p:cNvSpPr txBox="1"/>
+          <p:nvPr/>
+        </p:nvSpPr>
+        <p:spPr>
+          <a:xfrm>
+            <a:off x="7599032" y="3198336"/>
+            <a:ext cx="293670" cy="369332"/>
+          </a:xfrm>
+          <a:prstGeom prst="rect">
+            <a:avLst/>
+          </a:prstGeom>
+          <a:noFill/>
+        </p:spPr>
+        <p:txBody>
+          <a:bodyPr wrap="none" rtlCol="0">
+            <a:spAutoFit/>
+          </a:bodyPr>
+          <a:lstStyle/>
+          <a:p>
+            <a:r>
+              <a:rPr lang="en-CA" dirty="0"/>
+              <a:t>•</a:t>
+            </a:r>
           </a:p>
         </p:txBody>
       </p:sp>
@@ -4455,6 +8398,1240 @@
   <p:clrMapOvr>
     <a:masterClrMapping/>
   </p:clrMapOvr>
+  <p:timing>
+    <p:tnLst>
+      <p:par>
+        <p:cTn id="1" dur="indefinite" restart="never" nodeType="tmRoot">
+          <p:childTnLst>
+            <p:seq concurrent="1" nextAc="seek">
+              <p:cTn id="2" dur="indefinite" nodeType="mainSeq">
+                <p:childTnLst>
+                  <p:par>
+                    <p:cTn id="3" fill="hold">
+                      <p:stCondLst>
+                        <p:cond delay="indefinite"/>
+                        <p:cond evt="onBegin" delay="0">
+                          <p:tn val="2"/>
+                        </p:cond>
+                      </p:stCondLst>
+                      <p:childTnLst>
+                        <p:par>
+                          <p:cTn id="4" fill="hold">
+                            <p:stCondLst>
+                              <p:cond delay="0"/>
+                            </p:stCondLst>
+                            <p:childTnLst>
+                              <p:par>
+                                <p:cTn id="5" presetID="10" presetClass="entr" presetSubtype="0" fill="hold" nodeType="withEffect">
+                                  <p:stCondLst>
+                                    <p:cond delay="0"/>
+                                  </p:stCondLst>
+                                  <p:childTnLst>
+                                    <p:set>
+                                      <p:cBhvr>
+                                        <p:cTn id="6" dur="1" fill="hold">
+                                          <p:stCondLst>
+                                            <p:cond delay="0"/>
+                                          </p:stCondLst>
+                                        </p:cTn>
+                                        <p:tgtEl>
+                                          <p:spTgt spid="18">
+                                            <p:txEl>
+                                              <p:pRg st="0" end="0"/>
+                                            </p:txEl>
+                                          </p:spTgt>
+                                        </p:tgtEl>
+                                        <p:attrNameLst>
+                                          <p:attrName>style.visibility</p:attrName>
+                                        </p:attrNameLst>
+                                      </p:cBhvr>
+                                      <p:to>
+                                        <p:strVal val="visible"/>
+                                      </p:to>
+                                    </p:set>
+                                    <p:animEffect transition="in" filter="fade">
+                                      <p:cBhvr>
+                                        <p:cTn id="7" dur="500"/>
+                                        <p:tgtEl>
+                                          <p:spTgt spid="18">
+                                            <p:txEl>
+                                              <p:pRg st="0" end="0"/>
+                                            </p:txEl>
+                                          </p:spTgt>
+                                        </p:tgtEl>
+                                      </p:cBhvr>
+                                    </p:animEffect>
+                                  </p:childTnLst>
+                                </p:cTn>
+                              </p:par>
+                              <p:par>
+                                <p:cTn id="8" presetID="10" presetClass="entr" presetSubtype="0" fill="hold" nodeType="withEffect">
+                                  <p:stCondLst>
+                                    <p:cond delay="0"/>
+                                  </p:stCondLst>
+                                  <p:childTnLst>
+                                    <p:set>
+                                      <p:cBhvr>
+                                        <p:cTn id="9" dur="1" fill="hold">
+                                          <p:stCondLst>
+                                            <p:cond delay="0"/>
+                                          </p:stCondLst>
+                                        </p:cTn>
+                                        <p:tgtEl>
+                                          <p:spTgt spid="19">
+                                            <p:txEl>
+                                              <p:pRg st="0" end="0"/>
+                                            </p:txEl>
+                                          </p:spTgt>
+                                        </p:tgtEl>
+                                        <p:attrNameLst>
+                                          <p:attrName>style.visibility</p:attrName>
+                                        </p:attrNameLst>
+                                      </p:cBhvr>
+                                      <p:to>
+                                        <p:strVal val="visible"/>
+                                      </p:to>
+                                    </p:set>
+                                    <p:animEffect transition="in" filter="fade">
+                                      <p:cBhvr>
+                                        <p:cTn id="10" dur="500"/>
+                                        <p:tgtEl>
+                                          <p:spTgt spid="19">
+                                            <p:txEl>
+                                              <p:pRg st="0" end="0"/>
+                                            </p:txEl>
+                                          </p:spTgt>
+                                        </p:tgtEl>
+                                      </p:cBhvr>
+                                    </p:animEffect>
+                                  </p:childTnLst>
+                                </p:cTn>
+                              </p:par>
+                            </p:childTnLst>
+                          </p:cTn>
+                        </p:par>
+                      </p:childTnLst>
+                    </p:cTn>
+                  </p:par>
+                  <p:par>
+                    <p:cTn id="11" fill="hold">
+                      <p:stCondLst>
+                        <p:cond delay="indefinite"/>
+                      </p:stCondLst>
+                      <p:childTnLst>
+                        <p:par>
+                          <p:cTn id="12" fill="hold">
+                            <p:stCondLst>
+                              <p:cond delay="0"/>
+                            </p:stCondLst>
+                            <p:childTnLst>
+                              <p:par>
+                                <p:cTn id="13" presetID="22" presetClass="entr" presetSubtype="1" fill="hold" nodeType="clickEffect">
+                                  <p:stCondLst>
+                                    <p:cond delay="0"/>
+                                  </p:stCondLst>
+                                  <p:childTnLst>
+                                    <p:set>
+                                      <p:cBhvr>
+                                        <p:cTn id="14" dur="1" fill="hold">
+                                          <p:stCondLst>
+                                            <p:cond delay="0"/>
+                                          </p:stCondLst>
+                                        </p:cTn>
+                                        <p:tgtEl>
+                                          <p:spTgt spid="18">
+                                            <p:txEl>
+                                              <p:pRg st="1" end="1"/>
+                                            </p:txEl>
+                                          </p:spTgt>
+                                        </p:tgtEl>
+                                        <p:attrNameLst>
+                                          <p:attrName>style.visibility</p:attrName>
+                                        </p:attrNameLst>
+                                      </p:cBhvr>
+                                      <p:to>
+                                        <p:strVal val="visible"/>
+                                      </p:to>
+                                    </p:set>
+                                    <p:animEffect transition="in" filter="wipe(up)">
+                                      <p:cBhvr>
+                                        <p:cTn id="15" dur="500"/>
+                                        <p:tgtEl>
+                                          <p:spTgt spid="18">
+                                            <p:txEl>
+                                              <p:pRg st="1" end="1"/>
+                                            </p:txEl>
+                                          </p:spTgt>
+                                        </p:tgtEl>
+                                      </p:cBhvr>
+                                    </p:animEffect>
+                                  </p:childTnLst>
+                                </p:cTn>
+                              </p:par>
+                              <p:par>
+                                <p:cTn id="16" presetID="42" presetClass="path" presetSubtype="0" accel="50000" decel="50000" fill="hold" nodeType="withEffect">
+                                  <p:stCondLst>
+                                    <p:cond delay="0"/>
+                                  </p:stCondLst>
+                                  <p:childTnLst>
+                                    <p:animMotion origin="layout" path="M 5E-6 2.96296E-6 L -0.00027 -0.04028 " pathEditMode="relative" rAng="0" ptsTypes="AA">
+                                      <p:cBhvr>
+                                        <p:cTn id="17" dur="500" fill="hold"/>
+                                        <p:tgtEl>
+                                          <p:spTgt spid="18">
+                                            <p:txEl>
+                                              <p:pRg st="0" end="0"/>
+                                            </p:txEl>
+                                          </p:spTgt>
+                                        </p:tgtEl>
+                                        <p:attrNameLst>
+                                          <p:attrName>ppt_x</p:attrName>
+                                          <p:attrName>ppt_y</p:attrName>
+                                        </p:attrNameLst>
+                                      </p:cBhvr>
+                                      <p:rCtr x="-13" y="-2014"/>
+                                    </p:animMotion>
+                                  </p:childTnLst>
+                                </p:cTn>
+                              </p:par>
+                              <p:par>
+                                <p:cTn id="18" presetID="42" presetClass="path" presetSubtype="0" accel="50000" decel="50000" fill="hold" nodeType="withEffect">
+                                  <p:stCondLst>
+                                    <p:cond delay="0"/>
+                                  </p:stCondLst>
+                                  <p:childTnLst>
+                                    <p:animMotion origin="layout" path="M -0.00157 0.00116 L -0.00118 -0.03981 " pathEditMode="relative" rAng="0" ptsTypes="AA">
+                                      <p:cBhvr>
+                                        <p:cTn id="19" dur="500" fill="hold"/>
+                                        <p:tgtEl>
+                                          <p:spTgt spid="18">
+                                            <p:txEl>
+                                              <p:pRg st="1" end="1"/>
+                                            </p:txEl>
+                                          </p:spTgt>
+                                        </p:tgtEl>
+                                        <p:attrNameLst>
+                                          <p:attrName>ppt_x</p:attrName>
+                                          <p:attrName>ppt_y</p:attrName>
+                                        </p:attrNameLst>
+                                      </p:cBhvr>
+                                      <p:rCtr x="13" y="-2060"/>
+                                    </p:animMotion>
+                                  </p:childTnLst>
+                                </p:cTn>
+                              </p:par>
+                            </p:childTnLst>
+                          </p:cTn>
+                        </p:par>
+                      </p:childTnLst>
+                    </p:cTn>
+                  </p:par>
+                  <p:par>
+                    <p:cTn id="20" fill="hold">
+                      <p:stCondLst>
+                        <p:cond delay="indefinite"/>
+                      </p:stCondLst>
+                      <p:childTnLst>
+                        <p:par>
+                          <p:cTn id="21" fill="hold">
+                            <p:stCondLst>
+                              <p:cond delay="0"/>
+                            </p:stCondLst>
+                            <p:childTnLst>
+                              <p:par>
+                                <p:cTn id="22" presetID="22" presetClass="entr" presetSubtype="1" fill="hold" nodeType="clickEffect">
+                                  <p:stCondLst>
+                                    <p:cond delay="0"/>
+                                  </p:stCondLst>
+                                  <p:childTnLst>
+                                    <p:set>
+                                      <p:cBhvr>
+                                        <p:cTn id="23" dur="1" fill="hold">
+                                          <p:stCondLst>
+                                            <p:cond delay="0"/>
+                                          </p:stCondLst>
+                                        </p:cTn>
+                                        <p:tgtEl>
+                                          <p:spTgt spid="18">
+                                            <p:txEl>
+                                              <p:pRg st="2" end="2"/>
+                                            </p:txEl>
+                                          </p:spTgt>
+                                        </p:tgtEl>
+                                        <p:attrNameLst>
+                                          <p:attrName>style.visibility</p:attrName>
+                                        </p:attrNameLst>
+                                      </p:cBhvr>
+                                      <p:to>
+                                        <p:strVal val="visible"/>
+                                      </p:to>
+                                    </p:set>
+                                    <p:animEffect transition="in" filter="wipe(up)">
+                                      <p:cBhvr>
+                                        <p:cTn id="24" dur="500"/>
+                                        <p:tgtEl>
+                                          <p:spTgt spid="18">
+                                            <p:txEl>
+                                              <p:pRg st="2" end="2"/>
+                                            </p:txEl>
+                                          </p:spTgt>
+                                        </p:tgtEl>
+                                      </p:cBhvr>
+                                    </p:animEffect>
+                                  </p:childTnLst>
+                                </p:cTn>
+                              </p:par>
+                              <p:par>
+                                <p:cTn id="25" presetID="42" presetClass="path" presetSubtype="0" accel="50000" decel="50000" fill="hold" nodeType="withEffect">
+                                  <p:stCondLst>
+                                    <p:cond delay="0"/>
+                                  </p:stCondLst>
+                                  <p:childTnLst>
+                                    <p:animMotion origin="layout" path="M -0.00287 0.00023 L -0.00182 -0.07963 " pathEditMode="relative" rAng="0" ptsTypes="AA">
+                                      <p:cBhvr>
+                                        <p:cTn id="26" dur="500" fill="hold"/>
+                                        <p:tgtEl>
+                                          <p:spTgt spid="18">
+                                            <p:txEl>
+                                              <p:pRg st="2" end="2"/>
+                                            </p:txEl>
+                                          </p:spTgt>
+                                        </p:tgtEl>
+                                        <p:attrNameLst>
+                                          <p:attrName>ppt_x</p:attrName>
+                                          <p:attrName>ppt_y</p:attrName>
+                                        </p:attrNameLst>
+                                      </p:cBhvr>
+                                      <p:rCtr x="52" y="-4005"/>
+                                    </p:animMotion>
+                                  </p:childTnLst>
+                                </p:cTn>
+                              </p:par>
+                              <p:par>
+                                <p:cTn id="27" presetID="42" presetClass="path" presetSubtype="0" accel="50000" decel="50000" fill="hold" nodeType="withEffect">
+                                  <p:stCondLst>
+                                    <p:cond delay="0"/>
+                                  </p:stCondLst>
+                                  <p:childTnLst>
+                                    <p:animMotion origin="layout" path="M -0.00118 -0.03981 L -0.00118 -0.07986 " pathEditMode="relative" rAng="0" ptsTypes="AA">
+                                      <p:cBhvr>
+                                        <p:cTn id="28" dur="500" fill="hold"/>
+                                        <p:tgtEl>
+                                          <p:spTgt spid="18">
+                                            <p:txEl>
+                                              <p:pRg st="1" end="1"/>
+                                            </p:txEl>
+                                          </p:spTgt>
+                                        </p:tgtEl>
+                                        <p:attrNameLst>
+                                          <p:attrName>ppt_x</p:attrName>
+                                          <p:attrName>ppt_y</p:attrName>
+                                        </p:attrNameLst>
+                                      </p:cBhvr>
+                                      <p:rCtr x="0" y="-2014"/>
+                                    </p:animMotion>
+                                  </p:childTnLst>
+                                </p:cTn>
+                              </p:par>
+                              <p:par>
+                                <p:cTn id="29" presetID="42" presetClass="path" presetSubtype="0" accel="50000" decel="50000" fill="hold" nodeType="withEffect">
+                                  <p:stCondLst>
+                                    <p:cond delay="0"/>
+                                  </p:stCondLst>
+                                  <p:childTnLst>
+                                    <p:animMotion origin="layout" path="M -0.00027 -0.04028 L -0.00013 -0.07871 " pathEditMode="relative" rAng="0" ptsTypes="AA">
+                                      <p:cBhvr>
+                                        <p:cTn id="30" dur="500" fill="hold"/>
+                                        <p:tgtEl>
+                                          <p:spTgt spid="18">
+                                            <p:txEl>
+                                              <p:pRg st="0" end="0"/>
+                                            </p:txEl>
+                                          </p:spTgt>
+                                        </p:tgtEl>
+                                        <p:attrNameLst>
+                                          <p:attrName>ppt_x</p:attrName>
+                                          <p:attrName>ppt_y</p:attrName>
+                                        </p:attrNameLst>
+                                      </p:cBhvr>
+                                      <p:rCtr x="0" y="-1921"/>
+                                    </p:animMotion>
+                                  </p:childTnLst>
+                                </p:cTn>
+                              </p:par>
+                            </p:childTnLst>
+                          </p:cTn>
+                        </p:par>
+                      </p:childTnLst>
+                    </p:cTn>
+                  </p:par>
+                  <p:par>
+                    <p:cTn id="31" fill="hold">
+                      <p:stCondLst>
+                        <p:cond delay="indefinite"/>
+                      </p:stCondLst>
+                      <p:childTnLst>
+                        <p:par>
+                          <p:cTn id="32" fill="hold">
+                            <p:stCondLst>
+                              <p:cond delay="0"/>
+                            </p:stCondLst>
+                            <p:childTnLst>
+                              <p:par>
+                                <p:cTn id="33" presetID="10" presetClass="exit" presetSubtype="0" fill="hold" grpId="0" nodeType="clickEffect">
+                                  <p:stCondLst>
+                                    <p:cond delay="0"/>
+                                  </p:stCondLst>
+                                  <p:childTnLst>
+                                    <p:animEffect transition="out" filter="fade">
+                                      <p:cBhvr>
+                                        <p:cTn id="34" dur="500"/>
+                                        <p:tgtEl>
+                                          <p:spTgt spid="18">
+                                            <p:txEl>
+                                              <p:pRg st="0" end="0"/>
+                                            </p:txEl>
+                                          </p:spTgt>
+                                        </p:tgtEl>
+                                      </p:cBhvr>
+                                    </p:animEffect>
+                                    <p:set>
+                                      <p:cBhvr>
+                                        <p:cTn id="35" dur="1" fill="hold">
+                                          <p:stCondLst>
+                                            <p:cond delay="499"/>
+                                          </p:stCondLst>
+                                        </p:cTn>
+                                        <p:tgtEl>
+                                          <p:spTgt spid="18">
+                                            <p:txEl>
+                                              <p:pRg st="0" end="0"/>
+                                            </p:txEl>
+                                          </p:spTgt>
+                                        </p:tgtEl>
+                                        <p:attrNameLst>
+                                          <p:attrName>style.visibility</p:attrName>
+                                        </p:attrNameLst>
+                                      </p:cBhvr>
+                                      <p:to>
+                                        <p:strVal val="hidden"/>
+                                      </p:to>
+                                    </p:set>
+                                  </p:childTnLst>
+                                </p:cTn>
+                              </p:par>
+                              <p:par>
+                                <p:cTn id="36" presetID="10" presetClass="exit" presetSubtype="0" fill="hold" grpId="0" nodeType="withEffect">
+                                  <p:stCondLst>
+                                    <p:cond delay="0"/>
+                                  </p:stCondLst>
+                                  <p:childTnLst>
+                                    <p:animEffect transition="out" filter="fade">
+                                      <p:cBhvr>
+                                        <p:cTn id="37" dur="500"/>
+                                        <p:tgtEl>
+                                          <p:spTgt spid="18">
+                                            <p:txEl>
+                                              <p:pRg st="1" end="1"/>
+                                            </p:txEl>
+                                          </p:spTgt>
+                                        </p:tgtEl>
+                                      </p:cBhvr>
+                                    </p:animEffect>
+                                    <p:set>
+                                      <p:cBhvr>
+                                        <p:cTn id="38" dur="1" fill="hold">
+                                          <p:stCondLst>
+                                            <p:cond delay="499"/>
+                                          </p:stCondLst>
+                                        </p:cTn>
+                                        <p:tgtEl>
+                                          <p:spTgt spid="18">
+                                            <p:txEl>
+                                              <p:pRg st="1" end="1"/>
+                                            </p:txEl>
+                                          </p:spTgt>
+                                        </p:tgtEl>
+                                        <p:attrNameLst>
+                                          <p:attrName>style.visibility</p:attrName>
+                                        </p:attrNameLst>
+                                      </p:cBhvr>
+                                      <p:to>
+                                        <p:strVal val="hidden"/>
+                                      </p:to>
+                                    </p:set>
+                                  </p:childTnLst>
+                                </p:cTn>
+                              </p:par>
+                              <p:par>
+                                <p:cTn id="39" presetID="10" presetClass="exit" presetSubtype="0" fill="hold" grpId="0" nodeType="withEffect">
+                                  <p:stCondLst>
+                                    <p:cond delay="0"/>
+                                  </p:stCondLst>
+                                  <p:childTnLst>
+                                    <p:animEffect transition="out" filter="fade">
+                                      <p:cBhvr>
+                                        <p:cTn id="40" dur="500"/>
+                                        <p:tgtEl>
+                                          <p:spTgt spid="18">
+                                            <p:txEl>
+                                              <p:pRg st="2" end="2"/>
+                                            </p:txEl>
+                                          </p:spTgt>
+                                        </p:tgtEl>
+                                      </p:cBhvr>
+                                    </p:animEffect>
+                                    <p:set>
+                                      <p:cBhvr>
+                                        <p:cTn id="41" dur="1" fill="hold">
+                                          <p:stCondLst>
+                                            <p:cond delay="499"/>
+                                          </p:stCondLst>
+                                        </p:cTn>
+                                        <p:tgtEl>
+                                          <p:spTgt spid="18">
+                                            <p:txEl>
+                                              <p:pRg st="2" end="2"/>
+                                            </p:txEl>
+                                          </p:spTgt>
+                                        </p:tgtEl>
+                                        <p:attrNameLst>
+                                          <p:attrName>style.visibility</p:attrName>
+                                        </p:attrNameLst>
+                                      </p:cBhvr>
+                                      <p:to>
+                                        <p:strVal val="hidden"/>
+                                      </p:to>
+                                    </p:set>
+                                  </p:childTnLst>
+                                </p:cTn>
+                              </p:par>
+                              <p:par>
+                                <p:cTn id="42" presetID="10" presetClass="exit" presetSubtype="0" fill="hold" grpId="0" nodeType="withEffect">
+                                  <p:stCondLst>
+                                    <p:cond delay="0"/>
+                                  </p:stCondLst>
+                                  <p:childTnLst>
+                                    <p:animEffect transition="out" filter="fade">
+                                      <p:cBhvr>
+                                        <p:cTn id="43" dur="500"/>
+                                        <p:tgtEl>
+                                          <p:spTgt spid="19">
+                                            <p:txEl>
+                                              <p:pRg st="0" end="0"/>
+                                            </p:txEl>
+                                          </p:spTgt>
+                                        </p:tgtEl>
+                                      </p:cBhvr>
+                                    </p:animEffect>
+                                    <p:set>
+                                      <p:cBhvr>
+                                        <p:cTn id="44" dur="1" fill="hold">
+                                          <p:stCondLst>
+                                            <p:cond delay="499"/>
+                                          </p:stCondLst>
+                                        </p:cTn>
+                                        <p:tgtEl>
+                                          <p:spTgt spid="19">
+                                            <p:txEl>
+                                              <p:pRg st="0" end="0"/>
+                                            </p:txEl>
+                                          </p:spTgt>
+                                        </p:tgtEl>
+                                        <p:attrNameLst>
+                                          <p:attrName>style.visibility</p:attrName>
+                                        </p:attrNameLst>
+                                      </p:cBhvr>
+                                      <p:to>
+                                        <p:strVal val="hidden"/>
+                                      </p:to>
+                                    </p:set>
+                                  </p:childTnLst>
+                                </p:cTn>
+                              </p:par>
+                              <p:par>
+                                <p:cTn id="45" presetID="10" presetClass="entr" presetSubtype="0" fill="hold" grpId="0" nodeType="withEffect">
+                                  <p:stCondLst>
+                                    <p:cond delay="0"/>
+                                  </p:stCondLst>
+                                  <p:childTnLst>
+                                    <p:set>
+                                      <p:cBhvr>
+                                        <p:cTn id="46" dur="1" fill="hold">
+                                          <p:stCondLst>
+                                            <p:cond delay="0"/>
+                                          </p:stCondLst>
+                                        </p:cTn>
+                                        <p:tgtEl>
+                                          <p:spTgt spid="23"/>
+                                        </p:tgtEl>
+                                        <p:attrNameLst>
+                                          <p:attrName>style.visibility</p:attrName>
+                                        </p:attrNameLst>
+                                      </p:cBhvr>
+                                      <p:to>
+                                        <p:strVal val="visible"/>
+                                      </p:to>
+                                    </p:set>
+                                    <p:animEffect transition="in" filter="fade">
+                                      <p:cBhvr>
+                                        <p:cTn id="47" dur="500"/>
+                                        <p:tgtEl>
+                                          <p:spTgt spid="23"/>
+                                        </p:tgtEl>
+                                      </p:cBhvr>
+                                    </p:animEffect>
+                                  </p:childTnLst>
+                                </p:cTn>
+                              </p:par>
+                              <p:par>
+                                <p:cTn id="48" presetID="10" presetClass="entr" presetSubtype="0" fill="hold" grpId="0" nodeType="withEffect">
+                                  <p:stCondLst>
+                                    <p:cond delay="0"/>
+                                  </p:stCondLst>
+                                  <p:childTnLst>
+                                    <p:set>
+                                      <p:cBhvr>
+                                        <p:cTn id="49" dur="1" fill="hold">
+                                          <p:stCondLst>
+                                            <p:cond delay="0"/>
+                                          </p:stCondLst>
+                                        </p:cTn>
+                                        <p:tgtEl>
+                                          <p:spTgt spid="24"/>
+                                        </p:tgtEl>
+                                        <p:attrNameLst>
+                                          <p:attrName>style.visibility</p:attrName>
+                                        </p:attrNameLst>
+                                      </p:cBhvr>
+                                      <p:to>
+                                        <p:strVal val="visible"/>
+                                      </p:to>
+                                    </p:set>
+                                    <p:animEffect transition="in" filter="fade">
+                                      <p:cBhvr>
+                                        <p:cTn id="50" dur="500"/>
+                                        <p:tgtEl>
+                                          <p:spTgt spid="24"/>
+                                        </p:tgtEl>
+                                      </p:cBhvr>
+                                    </p:animEffect>
+                                  </p:childTnLst>
+                                </p:cTn>
+                              </p:par>
+                            </p:childTnLst>
+                          </p:cTn>
+                        </p:par>
+                      </p:childTnLst>
+                    </p:cTn>
+                  </p:par>
+                  <p:par>
+                    <p:cTn id="51" fill="hold">
+                      <p:stCondLst>
+                        <p:cond delay="indefinite"/>
+                      </p:stCondLst>
+                      <p:childTnLst>
+                        <p:par>
+                          <p:cTn id="52" fill="hold">
+                            <p:stCondLst>
+                              <p:cond delay="0"/>
+                            </p:stCondLst>
+                            <p:childTnLst>
+                              <p:par>
+                                <p:cTn id="53" presetID="10" presetClass="entr" presetSubtype="0" fill="hold" nodeType="clickEffect">
+                                  <p:stCondLst>
+                                    <p:cond delay="0"/>
+                                  </p:stCondLst>
+                                  <p:childTnLst>
+                                    <p:set>
+                                      <p:cBhvr>
+                                        <p:cTn id="54" dur="1" fill="hold">
+                                          <p:stCondLst>
+                                            <p:cond delay="0"/>
+                                          </p:stCondLst>
+                                        </p:cTn>
+                                        <p:tgtEl>
+                                          <p:spTgt spid="20">
+                                            <p:txEl>
+                                              <p:pRg st="0" end="0"/>
+                                            </p:txEl>
+                                          </p:spTgt>
+                                        </p:tgtEl>
+                                        <p:attrNameLst>
+                                          <p:attrName>style.visibility</p:attrName>
+                                        </p:attrNameLst>
+                                      </p:cBhvr>
+                                      <p:to>
+                                        <p:strVal val="visible"/>
+                                      </p:to>
+                                    </p:set>
+                                    <p:animEffect transition="in" filter="fade">
+                                      <p:cBhvr>
+                                        <p:cTn id="55" dur="500"/>
+                                        <p:tgtEl>
+                                          <p:spTgt spid="20">
+                                            <p:txEl>
+                                              <p:pRg st="0" end="0"/>
+                                            </p:txEl>
+                                          </p:spTgt>
+                                        </p:tgtEl>
+                                      </p:cBhvr>
+                                    </p:animEffect>
+                                  </p:childTnLst>
+                                </p:cTn>
+                              </p:par>
+                            </p:childTnLst>
+                          </p:cTn>
+                        </p:par>
+                      </p:childTnLst>
+                    </p:cTn>
+                  </p:par>
+                  <p:par>
+                    <p:cTn id="56" fill="hold">
+                      <p:stCondLst>
+                        <p:cond delay="indefinite"/>
+                      </p:stCondLst>
+                      <p:childTnLst>
+                        <p:par>
+                          <p:cTn id="57" fill="hold">
+                            <p:stCondLst>
+                              <p:cond delay="0"/>
+                            </p:stCondLst>
+                            <p:childTnLst>
+                              <p:par>
+                                <p:cTn id="58" presetID="10" presetClass="entr" presetSubtype="0" fill="hold" nodeType="clickEffect">
+                                  <p:stCondLst>
+                                    <p:cond delay="0"/>
+                                  </p:stCondLst>
+                                  <p:childTnLst>
+                                    <p:set>
+                                      <p:cBhvr>
+                                        <p:cTn id="59" dur="1" fill="hold">
+                                          <p:stCondLst>
+                                            <p:cond delay="0"/>
+                                          </p:stCondLst>
+                                        </p:cTn>
+                                        <p:tgtEl>
+                                          <p:spTgt spid="21">
+                                            <p:txEl>
+                                              <p:pRg st="0" end="0"/>
+                                            </p:txEl>
+                                          </p:spTgt>
+                                        </p:tgtEl>
+                                        <p:attrNameLst>
+                                          <p:attrName>style.visibility</p:attrName>
+                                        </p:attrNameLst>
+                                      </p:cBhvr>
+                                      <p:to>
+                                        <p:strVal val="visible"/>
+                                      </p:to>
+                                    </p:set>
+                                    <p:animEffect transition="in" filter="fade">
+                                      <p:cBhvr>
+                                        <p:cTn id="60" dur="500"/>
+                                        <p:tgtEl>
+                                          <p:spTgt spid="21">
+                                            <p:txEl>
+                                              <p:pRg st="0" end="0"/>
+                                            </p:txEl>
+                                          </p:spTgt>
+                                        </p:tgtEl>
+                                      </p:cBhvr>
+                                    </p:animEffect>
+                                  </p:childTnLst>
+                                </p:cTn>
+                              </p:par>
+                            </p:childTnLst>
+                          </p:cTn>
+                        </p:par>
+                      </p:childTnLst>
+                    </p:cTn>
+                  </p:par>
+                  <p:par>
+                    <p:cTn id="61" fill="hold">
+                      <p:stCondLst>
+                        <p:cond delay="indefinite"/>
+                      </p:stCondLst>
+                      <p:childTnLst>
+                        <p:par>
+                          <p:cTn id="62" fill="hold">
+                            <p:stCondLst>
+                              <p:cond delay="0"/>
+                            </p:stCondLst>
+                            <p:childTnLst>
+                              <p:par>
+                                <p:cTn id="63" presetID="10" presetClass="entr" presetSubtype="0" fill="hold" nodeType="clickEffect">
+                                  <p:stCondLst>
+                                    <p:cond delay="0"/>
+                                  </p:stCondLst>
+                                  <p:childTnLst>
+                                    <p:set>
+                                      <p:cBhvr>
+                                        <p:cTn id="64" dur="1" fill="hold">
+                                          <p:stCondLst>
+                                            <p:cond delay="0"/>
+                                          </p:stCondLst>
+                                        </p:cTn>
+                                        <p:tgtEl>
+                                          <p:spTgt spid="22">
+                                            <p:txEl>
+                                              <p:pRg st="0" end="0"/>
+                                            </p:txEl>
+                                          </p:spTgt>
+                                        </p:tgtEl>
+                                        <p:attrNameLst>
+                                          <p:attrName>style.visibility</p:attrName>
+                                        </p:attrNameLst>
+                                      </p:cBhvr>
+                                      <p:to>
+                                        <p:strVal val="visible"/>
+                                      </p:to>
+                                    </p:set>
+                                    <p:animEffect transition="in" filter="fade">
+                                      <p:cBhvr>
+                                        <p:cTn id="65" dur="500"/>
+                                        <p:tgtEl>
+                                          <p:spTgt spid="22">
+                                            <p:txEl>
+                                              <p:pRg st="0" end="0"/>
+                                            </p:txEl>
+                                          </p:spTgt>
+                                        </p:tgtEl>
+                                      </p:cBhvr>
+                                    </p:animEffect>
+                                  </p:childTnLst>
+                                </p:cTn>
+                              </p:par>
+                            </p:childTnLst>
+                          </p:cTn>
+                        </p:par>
+                      </p:childTnLst>
+                    </p:cTn>
+                  </p:par>
+                  <p:par>
+                    <p:cTn id="66" fill="hold">
+                      <p:stCondLst>
+                        <p:cond delay="indefinite"/>
+                      </p:stCondLst>
+                      <p:childTnLst>
+                        <p:par>
+                          <p:cTn id="67" fill="hold">
+                            <p:stCondLst>
+                              <p:cond delay="0"/>
+                            </p:stCondLst>
+                            <p:childTnLst>
+                              <p:par>
+                                <p:cTn id="68" presetID="10" presetClass="exit" presetSubtype="0" fill="hold" grpId="1" nodeType="clickEffect">
+                                  <p:stCondLst>
+                                    <p:cond delay="0"/>
+                                  </p:stCondLst>
+                                  <p:childTnLst>
+                                    <p:animEffect transition="out" filter="fade">
+                                      <p:cBhvr>
+                                        <p:cTn id="69" dur="500"/>
+                                        <p:tgtEl>
+                                          <p:spTgt spid="18">
+                                            <p:txEl>
+                                              <p:pRg st="0" end="0"/>
+                                            </p:txEl>
+                                          </p:spTgt>
+                                        </p:tgtEl>
+                                      </p:cBhvr>
+                                    </p:animEffect>
+                                    <p:set>
+                                      <p:cBhvr>
+                                        <p:cTn id="70" dur="1" fill="hold">
+                                          <p:stCondLst>
+                                            <p:cond delay="499"/>
+                                          </p:stCondLst>
+                                        </p:cTn>
+                                        <p:tgtEl>
+                                          <p:spTgt spid="18">
+                                            <p:txEl>
+                                              <p:pRg st="0" end="0"/>
+                                            </p:txEl>
+                                          </p:spTgt>
+                                        </p:tgtEl>
+                                        <p:attrNameLst>
+                                          <p:attrName>style.visibility</p:attrName>
+                                        </p:attrNameLst>
+                                      </p:cBhvr>
+                                      <p:to>
+                                        <p:strVal val="hidden"/>
+                                      </p:to>
+                                    </p:set>
+                                  </p:childTnLst>
+                                </p:cTn>
+                              </p:par>
+                              <p:par>
+                                <p:cTn id="71" presetID="10" presetClass="exit" presetSubtype="0" fill="hold" grpId="1" nodeType="withEffect">
+                                  <p:stCondLst>
+                                    <p:cond delay="0"/>
+                                  </p:stCondLst>
+                                  <p:childTnLst>
+                                    <p:animEffect transition="out" filter="fade">
+                                      <p:cBhvr>
+                                        <p:cTn id="72" dur="500"/>
+                                        <p:tgtEl>
+                                          <p:spTgt spid="18">
+                                            <p:txEl>
+                                              <p:pRg st="1" end="1"/>
+                                            </p:txEl>
+                                          </p:spTgt>
+                                        </p:tgtEl>
+                                      </p:cBhvr>
+                                    </p:animEffect>
+                                    <p:set>
+                                      <p:cBhvr>
+                                        <p:cTn id="73" dur="1" fill="hold">
+                                          <p:stCondLst>
+                                            <p:cond delay="499"/>
+                                          </p:stCondLst>
+                                        </p:cTn>
+                                        <p:tgtEl>
+                                          <p:spTgt spid="18">
+                                            <p:txEl>
+                                              <p:pRg st="1" end="1"/>
+                                            </p:txEl>
+                                          </p:spTgt>
+                                        </p:tgtEl>
+                                        <p:attrNameLst>
+                                          <p:attrName>style.visibility</p:attrName>
+                                        </p:attrNameLst>
+                                      </p:cBhvr>
+                                      <p:to>
+                                        <p:strVal val="hidden"/>
+                                      </p:to>
+                                    </p:set>
+                                  </p:childTnLst>
+                                </p:cTn>
+                              </p:par>
+                              <p:par>
+                                <p:cTn id="74" presetID="10" presetClass="exit" presetSubtype="0" fill="hold" grpId="1" nodeType="withEffect">
+                                  <p:stCondLst>
+                                    <p:cond delay="0"/>
+                                  </p:stCondLst>
+                                  <p:childTnLst>
+                                    <p:animEffect transition="out" filter="fade">
+                                      <p:cBhvr>
+                                        <p:cTn id="75" dur="500"/>
+                                        <p:tgtEl>
+                                          <p:spTgt spid="18">
+                                            <p:txEl>
+                                              <p:pRg st="2" end="2"/>
+                                            </p:txEl>
+                                          </p:spTgt>
+                                        </p:tgtEl>
+                                      </p:cBhvr>
+                                    </p:animEffect>
+                                    <p:set>
+                                      <p:cBhvr>
+                                        <p:cTn id="76" dur="1" fill="hold">
+                                          <p:stCondLst>
+                                            <p:cond delay="499"/>
+                                          </p:stCondLst>
+                                        </p:cTn>
+                                        <p:tgtEl>
+                                          <p:spTgt spid="18">
+                                            <p:txEl>
+                                              <p:pRg st="2" end="2"/>
+                                            </p:txEl>
+                                          </p:spTgt>
+                                        </p:tgtEl>
+                                        <p:attrNameLst>
+                                          <p:attrName>style.visibility</p:attrName>
+                                        </p:attrNameLst>
+                                      </p:cBhvr>
+                                      <p:to>
+                                        <p:strVal val="hidden"/>
+                                      </p:to>
+                                    </p:set>
+                                  </p:childTnLst>
+                                </p:cTn>
+                              </p:par>
+                              <p:par>
+                                <p:cTn id="77" presetID="10" presetClass="exit" presetSubtype="0" fill="hold" grpId="1" nodeType="withEffect">
+                                  <p:stCondLst>
+                                    <p:cond delay="0"/>
+                                  </p:stCondLst>
+                                  <p:childTnLst>
+                                    <p:animEffect transition="out" filter="fade">
+                                      <p:cBhvr>
+                                        <p:cTn id="78" dur="500"/>
+                                        <p:tgtEl>
+                                          <p:spTgt spid="19">
+                                            <p:txEl>
+                                              <p:pRg st="0" end="0"/>
+                                            </p:txEl>
+                                          </p:spTgt>
+                                        </p:tgtEl>
+                                      </p:cBhvr>
+                                    </p:animEffect>
+                                    <p:set>
+                                      <p:cBhvr>
+                                        <p:cTn id="79" dur="1" fill="hold">
+                                          <p:stCondLst>
+                                            <p:cond delay="499"/>
+                                          </p:stCondLst>
+                                        </p:cTn>
+                                        <p:tgtEl>
+                                          <p:spTgt spid="19">
+                                            <p:txEl>
+                                              <p:pRg st="0" end="0"/>
+                                            </p:txEl>
+                                          </p:spTgt>
+                                        </p:tgtEl>
+                                        <p:attrNameLst>
+                                          <p:attrName>style.visibility</p:attrName>
+                                        </p:attrNameLst>
+                                      </p:cBhvr>
+                                      <p:to>
+                                        <p:strVal val="hidden"/>
+                                      </p:to>
+                                    </p:set>
+                                  </p:childTnLst>
+                                </p:cTn>
+                              </p:par>
+                              <p:par>
+                                <p:cTn id="80" presetID="10" presetClass="exit" presetSubtype="0" fill="hold" grpId="1" nodeType="withEffect">
+                                  <p:stCondLst>
+                                    <p:cond delay="0"/>
+                                  </p:stCondLst>
+                                  <p:childTnLst>
+                                    <p:animEffect transition="out" filter="fade">
+                                      <p:cBhvr>
+                                        <p:cTn id="81" dur="500"/>
+                                        <p:tgtEl>
+                                          <p:spTgt spid="23"/>
+                                        </p:tgtEl>
+                                      </p:cBhvr>
+                                    </p:animEffect>
+                                    <p:set>
+                                      <p:cBhvr>
+                                        <p:cTn id="82" dur="1" fill="hold">
+                                          <p:stCondLst>
+                                            <p:cond delay="499"/>
+                                          </p:stCondLst>
+                                        </p:cTn>
+                                        <p:tgtEl>
+                                          <p:spTgt spid="23"/>
+                                        </p:tgtEl>
+                                        <p:attrNameLst>
+                                          <p:attrName>style.visibility</p:attrName>
+                                        </p:attrNameLst>
+                                      </p:cBhvr>
+                                      <p:to>
+                                        <p:strVal val="hidden"/>
+                                      </p:to>
+                                    </p:set>
+                                  </p:childTnLst>
+                                </p:cTn>
+                              </p:par>
+                              <p:par>
+                                <p:cTn id="83" presetID="10" presetClass="exit" presetSubtype="0" fill="hold" grpId="1" nodeType="withEffect">
+                                  <p:stCondLst>
+                                    <p:cond delay="0"/>
+                                  </p:stCondLst>
+                                  <p:childTnLst>
+                                    <p:animEffect transition="out" filter="fade">
+                                      <p:cBhvr>
+                                        <p:cTn id="84" dur="500"/>
+                                        <p:tgtEl>
+                                          <p:spTgt spid="24"/>
+                                        </p:tgtEl>
+                                      </p:cBhvr>
+                                    </p:animEffect>
+                                    <p:set>
+                                      <p:cBhvr>
+                                        <p:cTn id="85" dur="1" fill="hold">
+                                          <p:stCondLst>
+                                            <p:cond delay="499"/>
+                                          </p:stCondLst>
+                                        </p:cTn>
+                                        <p:tgtEl>
+                                          <p:spTgt spid="24"/>
+                                        </p:tgtEl>
+                                        <p:attrNameLst>
+                                          <p:attrName>style.visibility</p:attrName>
+                                        </p:attrNameLst>
+                                      </p:cBhvr>
+                                      <p:to>
+                                        <p:strVal val="hidden"/>
+                                      </p:to>
+                                    </p:set>
+                                  </p:childTnLst>
+                                </p:cTn>
+                              </p:par>
+                              <p:par>
+                                <p:cTn id="86" presetID="10" presetClass="exit" presetSubtype="0" fill="hold" grpId="0" nodeType="withEffect">
+                                  <p:stCondLst>
+                                    <p:cond delay="0"/>
+                                  </p:stCondLst>
+                                  <p:childTnLst>
+                                    <p:animEffect transition="out" filter="fade">
+                                      <p:cBhvr>
+                                        <p:cTn id="87" dur="500"/>
+                                        <p:tgtEl>
+                                          <p:spTgt spid="20">
+                                            <p:txEl>
+                                              <p:pRg st="0" end="0"/>
+                                            </p:txEl>
+                                          </p:spTgt>
+                                        </p:tgtEl>
+                                      </p:cBhvr>
+                                    </p:animEffect>
+                                    <p:set>
+                                      <p:cBhvr>
+                                        <p:cTn id="88" dur="1" fill="hold">
+                                          <p:stCondLst>
+                                            <p:cond delay="499"/>
+                                          </p:stCondLst>
+                                        </p:cTn>
+                                        <p:tgtEl>
+                                          <p:spTgt spid="20">
+                                            <p:txEl>
+                                              <p:pRg st="0" end="0"/>
+                                            </p:txEl>
+                                          </p:spTgt>
+                                        </p:tgtEl>
+                                        <p:attrNameLst>
+                                          <p:attrName>style.visibility</p:attrName>
+                                        </p:attrNameLst>
+                                      </p:cBhvr>
+                                      <p:to>
+                                        <p:strVal val="hidden"/>
+                                      </p:to>
+                                    </p:set>
+                                  </p:childTnLst>
+                                </p:cTn>
+                              </p:par>
+                              <p:par>
+                                <p:cTn id="89" presetID="10" presetClass="exit" presetSubtype="0" fill="hold" grpId="0" nodeType="withEffect">
+                                  <p:stCondLst>
+                                    <p:cond delay="0"/>
+                                  </p:stCondLst>
+                                  <p:childTnLst>
+                                    <p:animEffect transition="out" filter="fade">
+                                      <p:cBhvr>
+                                        <p:cTn id="90" dur="500"/>
+                                        <p:tgtEl>
+                                          <p:spTgt spid="21">
+                                            <p:txEl>
+                                              <p:pRg st="0" end="0"/>
+                                            </p:txEl>
+                                          </p:spTgt>
+                                        </p:tgtEl>
+                                      </p:cBhvr>
+                                    </p:animEffect>
+                                    <p:set>
+                                      <p:cBhvr>
+                                        <p:cTn id="91" dur="1" fill="hold">
+                                          <p:stCondLst>
+                                            <p:cond delay="499"/>
+                                          </p:stCondLst>
+                                        </p:cTn>
+                                        <p:tgtEl>
+                                          <p:spTgt spid="21">
+                                            <p:txEl>
+                                              <p:pRg st="0" end="0"/>
+                                            </p:txEl>
+                                          </p:spTgt>
+                                        </p:tgtEl>
+                                        <p:attrNameLst>
+                                          <p:attrName>style.visibility</p:attrName>
+                                        </p:attrNameLst>
+                                      </p:cBhvr>
+                                      <p:to>
+                                        <p:strVal val="hidden"/>
+                                      </p:to>
+                                    </p:set>
+                                  </p:childTnLst>
+                                </p:cTn>
+                              </p:par>
+                              <p:par>
+                                <p:cTn id="92" presetID="10" presetClass="exit" presetSubtype="0" fill="hold" grpId="0" nodeType="withEffect">
+                                  <p:stCondLst>
+                                    <p:cond delay="0"/>
+                                  </p:stCondLst>
+                                  <p:childTnLst>
+                                    <p:animEffect transition="out" filter="fade">
+                                      <p:cBhvr>
+                                        <p:cTn id="93" dur="500"/>
+                                        <p:tgtEl>
+                                          <p:spTgt spid="22">
+                                            <p:txEl>
+                                              <p:pRg st="0" end="0"/>
+                                            </p:txEl>
+                                          </p:spTgt>
+                                        </p:tgtEl>
+                                      </p:cBhvr>
+                                    </p:animEffect>
+                                    <p:set>
+                                      <p:cBhvr>
+                                        <p:cTn id="94" dur="1" fill="hold">
+                                          <p:stCondLst>
+                                            <p:cond delay="499"/>
+                                          </p:stCondLst>
+                                        </p:cTn>
+                                        <p:tgtEl>
+                                          <p:spTgt spid="22">
+                                            <p:txEl>
+                                              <p:pRg st="0" end="0"/>
+                                            </p:txEl>
+                                          </p:spTgt>
+                                        </p:tgtEl>
+                                        <p:attrNameLst>
+                                          <p:attrName>style.visibility</p:attrName>
+                                        </p:attrNameLst>
+                                      </p:cBhvr>
+                                      <p:to>
+                                        <p:strVal val="hidden"/>
+                                      </p:to>
+                                    </p:set>
+                                  </p:childTnLst>
+                                </p:cTn>
+                              </p:par>
+                            </p:childTnLst>
+                          </p:cTn>
+                        </p:par>
+                      </p:childTnLst>
+                    </p:cTn>
+                  </p:par>
+                </p:childTnLst>
+              </p:cTn>
+              <p:prevCondLst>
+                <p:cond evt="onPrev" delay="0">
+                  <p:tgtEl>
+                    <p:sldTgt/>
+                  </p:tgtEl>
+                </p:cond>
+              </p:prevCondLst>
+              <p:nextCondLst>
+                <p:cond evt="onNext" delay="0">
+                  <p:tgtEl>
+                    <p:sldTgt/>
+                  </p:tgtEl>
+                </p:cond>
+              </p:nextCondLst>
+            </p:seq>
+          </p:childTnLst>
+        </p:cTn>
+      </p:par>
+    </p:tnLst>
+    <p:bldLst>
+      <p:bldP spid="18" grpId="0" build="allAtOnce"/>
+      <p:bldP spid="18" grpId="1" build="allAtOnce"/>
+      <p:bldP spid="19" grpId="0" build="allAtOnce"/>
+      <p:bldP spid="19" grpId="1" build="allAtOnce"/>
+      <p:bldP spid="20" grpId="0" build="allAtOnce"/>
+      <p:bldP spid="21" grpId="0" build="allAtOnce"/>
+      <p:bldP spid="22" grpId="0" build="allAtOnce"/>
+      <p:bldP spid="23" grpId="0"/>
+      <p:bldP spid="23" grpId="1"/>
+      <p:bldP spid="24" grpId="0"/>
+      <p:bldP spid="24" grpId="1"/>
+    </p:bldLst>
+  </p:timing>
 </p:sld>
 </file>
 
@@ -4466,7 +9643,7 @@
         <p:cNvPr id="1" name="">
           <a:extLst>
             <a:ext uri="{FF2B5EF4-FFF2-40B4-BE49-F238E27FC236}">
-              <a16:creationId xmlns:a16="http://schemas.microsoft.com/office/drawing/2014/main" id="{C122A0C9-65FB-0BB9-F809-2285D9EF1456}"/>
+              <a16:creationId xmlns:a16="http://schemas.microsoft.com/office/drawing/2014/main" id="{7D29EC8D-6450-0145-89D0-7C5E1285B0BA}"/>
             </a:ext>
           </a:extLst>
         </p:cNvPr>
@@ -4483,104 +9660,258 @@
       </p:grpSpPr>
       <p:sp>
         <p:nvSpPr>
-          <p:cNvPr id="2" name="TextBox 1">
+          <p:cNvPr id="11" name="Rectangle: Rounded Corners 10">
             <a:extLst>
               <a:ext uri="{FF2B5EF4-FFF2-40B4-BE49-F238E27FC236}">
-                <a16:creationId xmlns:a16="http://schemas.microsoft.com/office/drawing/2014/main" id="{9019CA75-AE86-96E8-F266-96497A23FD87}"/>
+                <a16:creationId xmlns:a16="http://schemas.microsoft.com/office/drawing/2014/main" id="{01FD20CE-420D-5D93-0EE6-EC9658D1E720}"/>
               </a:ext>
             </a:extLst>
           </p:cNvPr>
-          <p:cNvSpPr txBox="1"/>
+          <p:cNvSpPr/>
           <p:nvPr/>
         </p:nvSpPr>
         <p:spPr>
           <a:xfrm>
-            <a:off x="4506686" y="2759529"/>
-            <a:ext cx="619978" cy="369332"/>
+            <a:off x="331871" y="585786"/>
+            <a:ext cx="2878053" cy="714377"/>
           </a:xfrm>
-          <a:prstGeom prst="rect">
-            <a:avLst/>
+          <a:prstGeom prst="roundRect">
+            <a:avLst>
+              <a:gd name="adj" fmla="val 11544"/>
+            </a:avLst>
           </a:prstGeom>
-          <a:noFill/>
+          <a:solidFill>
+            <a:schemeClr val="bg1">
+              <a:lumMod val="90000"/>
+            </a:schemeClr>
+          </a:solidFill>
+          <a:ln>
+            <a:noFill/>
+          </a:ln>
         </p:spPr>
+        <p:style>
+          <a:lnRef idx="2">
+            <a:schemeClr val="accent1">
+              <a:shade val="15000"/>
+            </a:schemeClr>
+          </a:lnRef>
+          <a:fillRef idx="1">
+            <a:schemeClr val="accent1"/>
+          </a:fillRef>
+          <a:effectRef idx="0">
+            <a:schemeClr val="accent1"/>
+          </a:effectRef>
+          <a:fontRef idx="minor">
+            <a:schemeClr val="lt1"/>
+          </a:fontRef>
+        </p:style>
         <p:txBody>
-          <a:bodyPr wrap="none" rtlCol="0">
-            <a:spAutoFit/>
-          </a:bodyPr>
+          <a:bodyPr rtlCol="0" anchor="ctr"/>
           <a:lstStyle/>
           <a:p>
-            <a:r>
-              <a:rPr lang="en-CA" dirty="0"/>
-              <a:t>Jack</a:t>
-            </a:r>
+            <a:pPr algn="ctr"/>
+            <a:endParaRPr lang="en-CA"/>
           </a:p>
         </p:txBody>
       </p:sp>
       <p:sp>
         <p:nvSpPr>
-          <p:cNvPr id="4" name="TextBox 3">
+          <p:cNvPr id="9" name="Rectangle: Rounded Corners 8">
             <a:extLst>
               <a:ext uri="{FF2B5EF4-FFF2-40B4-BE49-F238E27FC236}">
-                <a16:creationId xmlns:a16="http://schemas.microsoft.com/office/drawing/2014/main" id="{487D995F-8AAC-6993-74EB-723E6B5C0BFF}"/>
+                <a16:creationId xmlns:a16="http://schemas.microsoft.com/office/drawing/2014/main" id="{0488ED9F-6438-678E-E4DD-BB6D15FDBB1D}"/>
               </a:ext>
             </a:extLst>
           </p:cNvPr>
-          <p:cNvSpPr txBox="1"/>
+          <p:cNvSpPr/>
           <p:nvPr/>
         </p:nvSpPr>
         <p:spPr>
           <a:xfrm>
-            <a:off x="4407954" y="3267475"/>
-            <a:ext cx="2050818" cy="923330"/>
+            <a:off x="3003634" y="585786"/>
+            <a:ext cx="8559716" cy="5686427"/>
           </a:xfrm>
-          <a:prstGeom prst="rect">
-            <a:avLst/>
+          <a:prstGeom prst="roundRect">
+            <a:avLst>
+              <a:gd name="adj" fmla="val 2513"/>
+            </a:avLst>
           </a:prstGeom>
-          <a:noFill/>
+          <a:solidFill>
+            <a:schemeClr val="bg1">
+              <a:lumMod val="90000"/>
+            </a:schemeClr>
+          </a:solidFill>
+          <a:ln>
+            <a:noFill/>
+          </a:ln>
         </p:spPr>
+        <p:style>
+          <a:lnRef idx="2">
+            <a:schemeClr val="accent1">
+              <a:shade val="15000"/>
+            </a:schemeClr>
+          </a:lnRef>
+          <a:fillRef idx="1">
+            <a:schemeClr val="accent1"/>
+          </a:fillRef>
+          <a:effectRef idx="0">
+            <a:schemeClr val="accent1"/>
+          </a:effectRef>
+          <a:fontRef idx="minor">
+            <a:schemeClr val="lt1"/>
+          </a:fontRef>
+        </p:style>
         <p:txBody>
-          <a:bodyPr wrap="none" rtlCol="0">
-            <a:spAutoFit/>
-          </a:bodyPr>
+          <a:bodyPr rtlCol="0" anchor="ctr"/>
           <a:lstStyle/>
           <a:p>
-            <a:pPr marL="285750" indent="-285750">
-              <a:buFontTx/>
-              <a:buChar char="-"/>
-            </a:pPr>
-            <a:r>
-              <a:rPr lang="en-CA" dirty="0"/>
-              <a:t>Past experience</a:t>
-            </a:r>
-          </a:p>
-          <a:p>
-            <a:pPr marL="285750" indent="-285750">
-              <a:buFontTx/>
-              <a:buChar char="-"/>
-            </a:pPr>
-            <a:r>
-              <a:rPr lang="en-CA" dirty="0"/>
-              <a:t>Role</a:t>
-            </a:r>
-          </a:p>
-          <a:p>
-            <a:pPr marL="285750" indent="-285750">
-              <a:buFontTx/>
-              <a:buChar char="-"/>
-            </a:pPr>
-            <a:r>
-              <a:rPr lang="en-CA" dirty="0"/>
-              <a:t>Expectations</a:t>
-            </a:r>
+            <a:pPr algn="ctr"/>
+            <a:endParaRPr lang="en-CA" dirty="0"/>
           </a:p>
         </p:txBody>
       </p:sp>
+      <p:grpSp>
+        <p:nvGrpSpPr>
+          <p:cNvPr id="14" name="Group 13">
+            <a:extLst>
+              <a:ext uri="{FF2B5EF4-FFF2-40B4-BE49-F238E27FC236}">
+                <a16:creationId xmlns:a16="http://schemas.microsoft.com/office/drawing/2014/main" id="{09FF16B3-5309-D404-0771-DCF26DB503B5}"/>
+              </a:ext>
+            </a:extLst>
+          </p:cNvPr>
+          <p:cNvGrpSpPr/>
+          <p:nvPr/>
+        </p:nvGrpSpPr>
+        <p:grpSpPr>
+          <a:xfrm>
+            <a:off x="2703597" y="1300163"/>
+            <a:ext cx="300037" cy="300038"/>
+            <a:chOff x="1234559" y="4745831"/>
+            <a:chExt cx="300037" cy="300038"/>
+          </a:xfrm>
+        </p:grpSpPr>
+        <p:sp>
+          <p:nvSpPr>
+            <p:cNvPr id="13" name="Rectangle 12">
+              <a:extLst>
+                <a:ext uri="{FF2B5EF4-FFF2-40B4-BE49-F238E27FC236}">
+                  <a16:creationId xmlns:a16="http://schemas.microsoft.com/office/drawing/2014/main" id="{BAEDA470-162E-C656-E766-7CC308703082}"/>
+                </a:ext>
+              </a:extLst>
+            </p:cNvPr>
+            <p:cNvSpPr/>
+            <p:nvPr/>
+          </p:nvSpPr>
+          <p:spPr>
+            <a:xfrm>
+              <a:off x="1234559" y="4745832"/>
+              <a:ext cx="300037" cy="300037"/>
+            </a:xfrm>
+            <a:prstGeom prst="rect">
+              <a:avLst/>
+            </a:prstGeom>
+            <a:gradFill flip="none" rotWithShape="1">
+              <a:gsLst>
+                <a:gs pos="68000">
+                  <a:schemeClr val="bg1"/>
+                </a:gs>
+                <a:gs pos="83000">
+                  <a:schemeClr val="bg1">
+                    <a:lumMod val="90000"/>
+                  </a:schemeClr>
+                </a:gs>
+              </a:gsLst>
+              <a:lin ang="18900000" scaled="1"/>
+              <a:tileRect/>
+            </a:gradFill>
+            <a:ln>
+              <a:noFill/>
+            </a:ln>
+          </p:spPr>
+          <p:style>
+            <a:lnRef idx="2">
+              <a:schemeClr val="accent1">
+                <a:shade val="15000"/>
+              </a:schemeClr>
+            </a:lnRef>
+            <a:fillRef idx="1">
+              <a:schemeClr val="accent1"/>
+            </a:fillRef>
+            <a:effectRef idx="0">
+              <a:schemeClr val="accent1"/>
+            </a:effectRef>
+            <a:fontRef idx="minor">
+              <a:schemeClr val="lt1"/>
+            </a:fontRef>
+          </p:style>
+          <p:txBody>
+            <a:bodyPr rtlCol="0" anchor="ctr"/>
+            <a:lstStyle/>
+            <a:p>
+              <a:pPr algn="ctr"/>
+              <a:endParaRPr lang="en-CA" dirty="0"/>
+            </a:p>
+          </p:txBody>
+        </p:sp>
+        <p:sp>
+          <p:nvSpPr>
+            <p:cNvPr id="12" name="Oval 11">
+              <a:extLst>
+                <a:ext uri="{FF2B5EF4-FFF2-40B4-BE49-F238E27FC236}">
+                  <a16:creationId xmlns:a16="http://schemas.microsoft.com/office/drawing/2014/main" id="{57A2785A-DD84-53A8-2218-C532F296C87F}"/>
+                </a:ext>
+              </a:extLst>
+            </p:cNvPr>
+            <p:cNvSpPr/>
+            <p:nvPr/>
+          </p:nvSpPr>
+          <p:spPr>
+            <a:xfrm>
+              <a:off x="1234559" y="4745831"/>
+              <a:ext cx="300036" cy="300037"/>
+            </a:xfrm>
+            <a:prstGeom prst="ellipse">
+              <a:avLst/>
+            </a:prstGeom>
+            <a:solidFill>
+              <a:schemeClr val="bg1"/>
+            </a:solidFill>
+            <a:ln>
+              <a:noFill/>
+            </a:ln>
+          </p:spPr>
+          <p:style>
+            <a:lnRef idx="2">
+              <a:schemeClr val="accent1">
+                <a:shade val="15000"/>
+              </a:schemeClr>
+            </a:lnRef>
+            <a:fillRef idx="1">
+              <a:schemeClr val="accent1"/>
+            </a:fillRef>
+            <a:effectRef idx="0">
+              <a:schemeClr val="accent1"/>
+            </a:effectRef>
+            <a:fontRef idx="minor">
+              <a:schemeClr val="lt1"/>
+            </a:fontRef>
+          </p:style>
+          <p:txBody>
+            <a:bodyPr rtlCol="0" anchor="ctr"/>
+            <a:lstStyle/>
+            <a:p>
+              <a:pPr algn="ctr"/>
+              <a:endParaRPr lang="en-CA"/>
+            </a:p>
+          </p:txBody>
+        </p:sp>
+      </p:grpSp>
       <p:sp>
         <p:nvSpPr>
-          <p:cNvPr id="5" name="TextBox 4">
+          <p:cNvPr id="3" name="TextBox 2">
             <a:extLst>
               <a:ext uri="{FF2B5EF4-FFF2-40B4-BE49-F238E27FC236}">
-                <a16:creationId xmlns:a16="http://schemas.microsoft.com/office/drawing/2014/main" id="{CC915FDB-49B9-2B7E-78DD-B03D9C91E7BB}"/>
+                <a16:creationId xmlns:a16="http://schemas.microsoft.com/office/drawing/2014/main" id="{E708DE89-EBCB-3EDF-87C7-829832B351D2}"/>
               </a:ext>
             </a:extLst>
           </p:cNvPr>
@@ -4717,7 +10048,7 @@
               </a:lnSpc>
             </a:pPr>
             <a:r>
-              <a:rPr lang="en-CA" sz="2800">
+              <a:rPr lang="en-CA" sz="2800" dirty="0">
                 <a:solidFill>
                   <a:schemeClr val="tx1">
                     <a:lumMod val="25000"/>
@@ -4729,6 +10060,49 @@
               </a:rPr>
               <a:t>Project</a:t>
             </a:r>
+          </a:p>
+        </p:txBody>
+      </p:sp>
+      <p:sp>
+        <p:nvSpPr>
+          <p:cNvPr id="5" name="TextBox 4">
+            <a:extLst>
+              <a:ext uri="{FF2B5EF4-FFF2-40B4-BE49-F238E27FC236}">
+                <a16:creationId xmlns:a16="http://schemas.microsoft.com/office/drawing/2014/main" id="{F8956383-E691-FC76-E924-4B4A864CF854}"/>
+              </a:ext>
+            </a:extLst>
+          </p:cNvPr>
+          <p:cNvSpPr txBox="1"/>
+          <p:nvPr/>
+        </p:nvSpPr>
+        <p:spPr>
+          <a:xfrm>
+            <a:off x="440111" y="376344"/>
+            <a:ext cx="1588897" cy="2550378"/>
+          </a:xfrm>
+          <a:prstGeom prst="rect">
+            <a:avLst/>
+          </a:prstGeom>
+          <a:noFill/>
+        </p:spPr>
+        <p:txBody>
+          <a:bodyPr wrap="none" rtlCol="0">
+            <a:spAutoFit/>
+          </a:bodyPr>
+          <a:lstStyle/>
+          <a:p>
+            <a:pPr>
+              <a:lnSpc>
+                <a:spcPct val="200000"/>
+              </a:lnSpc>
+            </a:pPr>
+            <a:r>
+              <a:rPr lang="en-CA" sz="2800" dirty="0">
+                <a:latin typeface="Kumbh Sans" pitchFamily="2" charset="0"/>
+                <a:cs typeface="Kumbh Sans" pitchFamily="2" charset="0"/>
+              </a:rPr>
+              <a:t>Adestria</a:t>
+            </a:r>
             <a:endParaRPr lang="en-CA" sz="2800" dirty="0">
               <a:solidFill>
                 <a:schemeClr val="tx1">
@@ -4740,22 +10114,1485 @@
               <a:cs typeface="Kumbh Sans" pitchFamily="2" charset="0"/>
             </a:endParaRPr>
           </a:p>
+          <a:p>
+            <a:pPr>
+              <a:lnSpc>
+                <a:spcPct val="200000"/>
+              </a:lnSpc>
+            </a:pPr>
+            <a:r>
+              <a:rPr lang="en-CA" sz="2800" dirty="0">
+                <a:solidFill>
+                  <a:schemeClr val="tx1">
+                    <a:lumMod val="25000"/>
+                    <a:lumOff val="75000"/>
+                  </a:schemeClr>
+                </a:solidFill>
+                <a:latin typeface="Kumbh Sans" pitchFamily="2" charset="0"/>
+                <a:cs typeface="Kumbh Sans" pitchFamily="2" charset="0"/>
+              </a:rPr>
+              <a:t>Project</a:t>
+            </a:r>
+          </a:p>
+          <a:p>
+            <a:pPr>
+              <a:lnSpc>
+                <a:spcPct val="200000"/>
+              </a:lnSpc>
+            </a:pPr>
+            <a:r>
+              <a:rPr lang="en-CA" sz="2800" dirty="0">
+                <a:solidFill>
+                  <a:schemeClr val="tx1">
+                    <a:lumMod val="25000"/>
+                    <a:lumOff val="75000"/>
+                  </a:schemeClr>
+                </a:solidFill>
+                <a:latin typeface="Kumbh Sans" pitchFamily="2" charset="0"/>
+                <a:cs typeface="Kumbh Sans" pitchFamily="2" charset="0"/>
+              </a:rPr>
+              <a:t>Q &amp; A</a:t>
+            </a:r>
+            <a:endParaRPr lang="en-CA" sz="2800" dirty="0">
+              <a:latin typeface="Kumbh Sans" pitchFamily="2" charset="0"/>
+              <a:cs typeface="Kumbh Sans" pitchFamily="2" charset="0"/>
+            </a:endParaRPr>
+          </a:p>
         </p:txBody>
       </p:sp>
+      <p:grpSp>
+        <p:nvGrpSpPr>
+          <p:cNvPr id="4" name="Group 3">
+            <a:extLst>
+              <a:ext uri="{FF2B5EF4-FFF2-40B4-BE49-F238E27FC236}">
+                <a16:creationId xmlns:a16="http://schemas.microsoft.com/office/drawing/2014/main" id="{9BD9A52F-41BC-38EA-E934-69D56F8B495C}"/>
+              </a:ext>
+            </a:extLst>
+          </p:cNvPr>
+          <p:cNvGrpSpPr/>
+          <p:nvPr/>
+        </p:nvGrpSpPr>
+        <p:grpSpPr>
+          <a:xfrm rot="5400000">
+            <a:off x="2702405" y="284138"/>
+            <a:ext cx="302418" cy="300038"/>
+            <a:chOff x="1232178" y="4745831"/>
+            <a:chExt cx="302418" cy="300038"/>
+          </a:xfrm>
+        </p:grpSpPr>
+        <p:sp>
+          <p:nvSpPr>
+            <p:cNvPr id="6" name="Rectangle 5">
+              <a:extLst>
+                <a:ext uri="{FF2B5EF4-FFF2-40B4-BE49-F238E27FC236}">
+                  <a16:creationId xmlns:a16="http://schemas.microsoft.com/office/drawing/2014/main" id="{A9B1EA98-EB40-4CB6-A104-255865A5740D}"/>
+                </a:ext>
+              </a:extLst>
+            </p:cNvPr>
+            <p:cNvSpPr/>
+            <p:nvPr/>
+          </p:nvSpPr>
+          <p:spPr>
+            <a:xfrm>
+              <a:off x="1234559" y="4745832"/>
+              <a:ext cx="300037" cy="300037"/>
+            </a:xfrm>
+            <a:prstGeom prst="rect">
+              <a:avLst/>
+            </a:prstGeom>
+            <a:gradFill flip="none" rotWithShape="1">
+              <a:gsLst>
+                <a:gs pos="68000">
+                  <a:schemeClr val="bg1"/>
+                </a:gs>
+                <a:gs pos="83000">
+                  <a:schemeClr val="bg1">
+                    <a:lumMod val="90000"/>
+                  </a:schemeClr>
+                </a:gs>
+              </a:gsLst>
+              <a:lin ang="18900000" scaled="1"/>
+              <a:tileRect/>
+            </a:gradFill>
+            <a:ln>
+              <a:noFill/>
+            </a:ln>
+          </p:spPr>
+          <p:style>
+            <a:lnRef idx="2">
+              <a:schemeClr val="accent1">
+                <a:shade val="15000"/>
+              </a:schemeClr>
+            </a:lnRef>
+            <a:fillRef idx="1">
+              <a:schemeClr val="accent1"/>
+            </a:fillRef>
+            <a:effectRef idx="0">
+              <a:schemeClr val="accent1"/>
+            </a:effectRef>
+            <a:fontRef idx="minor">
+              <a:schemeClr val="lt1"/>
+            </a:fontRef>
+          </p:style>
+          <p:txBody>
+            <a:bodyPr rtlCol="0" anchor="ctr"/>
+            <a:lstStyle/>
+            <a:p>
+              <a:pPr algn="ctr"/>
+              <a:endParaRPr lang="en-CA" dirty="0"/>
+            </a:p>
+          </p:txBody>
+        </p:sp>
+        <p:sp>
+          <p:nvSpPr>
+            <p:cNvPr id="7" name="Oval 6">
+              <a:extLst>
+                <a:ext uri="{FF2B5EF4-FFF2-40B4-BE49-F238E27FC236}">
+                  <a16:creationId xmlns:a16="http://schemas.microsoft.com/office/drawing/2014/main" id="{B4A8BA7C-8C7E-202C-DF5F-646269DBFFF3}"/>
+                </a:ext>
+              </a:extLst>
+            </p:cNvPr>
+            <p:cNvSpPr/>
+            <p:nvPr/>
+          </p:nvSpPr>
+          <p:spPr>
+            <a:xfrm>
+              <a:off x="1232178" y="4745831"/>
+              <a:ext cx="300036" cy="300037"/>
+            </a:xfrm>
+            <a:prstGeom prst="ellipse">
+              <a:avLst/>
+            </a:prstGeom>
+            <a:solidFill>
+              <a:schemeClr val="bg1"/>
+            </a:solidFill>
+            <a:ln>
+              <a:noFill/>
+            </a:ln>
+          </p:spPr>
+          <p:style>
+            <a:lnRef idx="2">
+              <a:schemeClr val="accent1">
+                <a:shade val="15000"/>
+              </a:schemeClr>
+            </a:lnRef>
+            <a:fillRef idx="1">
+              <a:schemeClr val="accent1"/>
+            </a:fillRef>
+            <a:effectRef idx="0">
+              <a:schemeClr val="accent1"/>
+            </a:effectRef>
+            <a:fontRef idx="minor">
+              <a:schemeClr val="lt1"/>
+            </a:fontRef>
+          </p:style>
+          <p:txBody>
+            <a:bodyPr rtlCol="0" anchor="ctr"/>
+            <a:lstStyle/>
+            <a:p>
+              <a:pPr algn="ctr"/>
+              <a:endParaRPr lang="en-CA"/>
+            </a:p>
+          </p:txBody>
+        </p:sp>
+      </p:grpSp>
     </p:spTree>
     <p:extLst>
       <p:ext uri="{BB962C8B-B14F-4D97-AF65-F5344CB8AC3E}">
-        <p14:creationId xmlns:p14="http://schemas.microsoft.com/office/powerpoint/2010/main" val="2553109476"/>
+        <p14:creationId xmlns:p14="http://schemas.microsoft.com/office/powerpoint/2010/main" val="859702855"/>
       </p:ext>
     </p:extLst>
   </p:cSld>
   <p:clrMapOvr>
     <a:masterClrMapping/>
   </p:clrMapOvr>
+  <p:timing>
+    <p:tnLst>
+      <p:par>
+        <p:cTn id="1" dur="indefinite" restart="never" nodeType="tmRoot">
+          <p:childTnLst>
+            <p:seq concurrent="1" nextAc="seek">
+              <p:cTn id="2" dur="indefinite" nodeType="mainSeq">
+                <p:childTnLst>
+                  <p:par>
+                    <p:cTn id="3" fill="hold">
+                      <p:stCondLst>
+                        <p:cond delay="indefinite"/>
+                        <p:cond evt="onBegin" delay="0">
+                          <p:tn val="2"/>
+                        </p:cond>
+                      </p:stCondLst>
+                      <p:childTnLst>
+                        <p:par>
+                          <p:cTn id="4" fill="hold">
+                            <p:stCondLst>
+                              <p:cond delay="0"/>
+                            </p:stCondLst>
+                            <p:childTnLst>
+                              <p:par>
+                                <p:cTn id="5" presetID="1" presetClass="exit" presetSubtype="0" fill="hold" nodeType="withEffect">
+                                  <p:stCondLst>
+                                    <p:cond delay="0"/>
+                                  </p:stCondLst>
+                                  <p:childTnLst>
+                                    <p:set>
+                                      <p:cBhvr>
+                                        <p:cTn id="6" dur="1" fill="hold">
+                                          <p:stCondLst>
+                                            <p:cond delay="0"/>
+                                          </p:stCondLst>
+                                        </p:cTn>
+                                        <p:tgtEl>
+                                          <p:spTgt spid="4"/>
+                                        </p:tgtEl>
+                                        <p:attrNameLst>
+                                          <p:attrName>style.visibility</p:attrName>
+                                        </p:attrNameLst>
+                                      </p:cBhvr>
+                                      <p:to>
+                                        <p:strVal val="hidden"/>
+                                      </p:to>
+                                    </p:set>
+                                  </p:childTnLst>
+                                </p:cTn>
+                              </p:par>
+                              <p:par>
+                                <p:cTn id="7" presetID="42" presetClass="path" presetSubtype="0" accel="50000" decel="50000" fill="hold" nodeType="withEffect">
+                                  <p:stCondLst>
+                                    <p:cond delay="0"/>
+                                  </p:stCondLst>
+                                  <p:childTnLst>
+                                    <p:animMotion origin="layout" path="M -2.91667E-6 1.85185E-6 L -2.91667E-6 0.62106 " pathEditMode="relative" rAng="0" ptsTypes="AA">
+                                      <p:cBhvr>
+                                        <p:cTn id="8" dur="2000" fill="hold"/>
+                                        <p:tgtEl>
+                                          <p:spTgt spid="5">
+                                            <p:txEl>
+                                              <p:pRg st="1" end="1"/>
+                                            </p:txEl>
+                                          </p:spTgt>
+                                        </p:tgtEl>
+                                        <p:attrNameLst>
+                                          <p:attrName>ppt_x</p:attrName>
+                                          <p:attrName>ppt_y</p:attrName>
+                                        </p:attrNameLst>
+                                      </p:cBhvr>
+                                      <p:rCtr x="0" y="31042"/>
+                                    </p:animMotion>
+                                  </p:childTnLst>
+                                </p:cTn>
+                              </p:par>
+                              <p:par>
+                                <p:cTn id="9" presetID="42" presetClass="path" presetSubtype="0" accel="50000" decel="50000" fill="hold" nodeType="withEffect">
+                                  <p:stCondLst>
+                                    <p:cond delay="0"/>
+                                  </p:stCondLst>
+                                  <p:childTnLst>
+                                    <p:animMotion origin="layout" path="M -1.04167E-6 4.07407E-6 L -1.04167E-6 0.83101 " pathEditMode="relative" rAng="0" ptsTypes="AA">
+                                      <p:cBhvr>
+                                        <p:cTn id="10" dur="2000" fill="hold"/>
+                                        <p:tgtEl>
+                                          <p:spTgt spid="5">
+                                            <p:txEl>
+                                              <p:pRg st="2" end="2"/>
+                                            </p:txEl>
+                                          </p:spTgt>
+                                        </p:tgtEl>
+                                        <p:attrNameLst>
+                                          <p:attrName>ppt_x</p:attrName>
+                                          <p:attrName>ppt_y</p:attrName>
+                                        </p:attrNameLst>
+                                      </p:cBhvr>
+                                      <p:rCtr x="0" y="41551"/>
+                                    </p:animMotion>
+                                  </p:childTnLst>
+                                </p:cTn>
+                              </p:par>
+                              <p:par>
+                                <p:cTn id="11" presetID="22" presetClass="entr" presetSubtype="1" fill="hold" grpId="0" nodeType="withEffect">
+                                  <p:stCondLst>
+                                    <p:cond delay="1000"/>
+                                  </p:stCondLst>
+                                  <p:childTnLst>
+                                    <p:set>
+                                      <p:cBhvr>
+                                        <p:cTn id="12" dur="1" fill="hold">
+                                          <p:stCondLst>
+                                            <p:cond delay="0"/>
+                                          </p:stCondLst>
+                                        </p:cTn>
+                                        <p:tgtEl>
+                                          <p:spTgt spid="3"/>
+                                        </p:tgtEl>
+                                        <p:attrNameLst>
+                                          <p:attrName>style.visibility</p:attrName>
+                                        </p:attrNameLst>
+                                      </p:cBhvr>
+                                      <p:to>
+                                        <p:strVal val="visible"/>
+                                      </p:to>
+                                    </p:set>
+                                    <p:animEffect transition="in" filter="wipe(up)">
+                                      <p:cBhvr>
+                                        <p:cTn id="13" dur="1000"/>
+                                        <p:tgtEl>
+                                          <p:spTgt spid="3"/>
+                                        </p:tgtEl>
+                                      </p:cBhvr>
+                                    </p:animEffect>
+                                  </p:childTnLst>
+                                </p:cTn>
+                              </p:par>
+                              <p:par>
+                                <p:cTn id="14" presetID="10" presetClass="exit" presetSubtype="0" fill="hold" nodeType="withEffect">
+                                  <p:stCondLst>
+                                    <p:cond delay="2000"/>
+                                  </p:stCondLst>
+                                  <p:childTnLst>
+                                    <p:animEffect transition="out" filter="fade">
+                                      <p:cBhvr>
+                                        <p:cTn id="15" dur="500"/>
+                                        <p:tgtEl>
+                                          <p:spTgt spid="5">
+                                            <p:txEl>
+                                              <p:pRg st="1" end="1"/>
+                                            </p:txEl>
+                                          </p:spTgt>
+                                        </p:tgtEl>
+                                      </p:cBhvr>
+                                    </p:animEffect>
+                                    <p:set>
+                                      <p:cBhvr>
+                                        <p:cTn id="16" dur="1" fill="hold">
+                                          <p:stCondLst>
+                                            <p:cond delay="499"/>
+                                          </p:stCondLst>
+                                        </p:cTn>
+                                        <p:tgtEl>
+                                          <p:spTgt spid="5">
+                                            <p:txEl>
+                                              <p:pRg st="1" end="1"/>
+                                            </p:txEl>
+                                          </p:spTgt>
+                                        </p:tgtEl>
+                                        <p:attrNameLst>
+                                          <p:attrName>style.visibility</p:attrName>
+                                        </p:attrNameLst>
+                                      </p:cBhvr>
+                                      <p:to>
+                                        <p:strVal val="hidden"/>
+                                      </p:to>
+                                    </p:set>
+                                  </p:childTnLst>
+                                </p:cTn>
+                              </p:par>
+                              <p:par>
+                                <p:cTn id="17" presetID="10" presetClass="exit" presetSubtype="0" fill="hold" nodeType="withEffect">
+                                  <p:stCondLst>
+                                    <p:cond delay="2000"/>
+                                  </p:stCondLst>
+                                  <p:childTnLst>
+                                    <p:animEffect transition="out" filter="fade">
+                                      <p:cBhvr>
+                                        <p:cTn id="18" dur="500"/>
+                                        <p:tgtEl>
+                                          <p:spTgt spid="5">
+                                            <p:txEl>
+                                              <p:pRg st="0" end="0"/>
+                                            </p:txEl>
+                                          </p:spTgt>
+                                        </p:tgtEl>
+                                      </p:cBhvr>
+                                    </p:animEffect>
+                                    <p:set>
+                                      <p:cBhvr>
+                                        <p:cTn id="19" dur="1" fill="hold">
+                                          <p:stCondLst>
+                                            <p:cond delay="499"/>
+                                          </p:stCondLst>
+                                        </p:cTn>
+                                        <p:tgtEl>
+                                          <p:spTgt spid="5">
+                                            <p:txEl>
+                                              <p:pRg st="0" end="0"/>
+                                            </p:txEl>
+                                          </p:spTgt>
+                                        </p:tgtEl>
+                                        <p:attrNameLst>
+                                          <p:attrName>style.visibility</p:attrName>
+                                        </p:attrNameLst>
+                                      </p:cBhvr>
+                                      <p:to>
+                                        <p:strVal val="hidden"/>
+                                      </p:to>
+                                    </p:set>
+                                  </p:childTnLst>
+                                </p:cTn>
+                              </p:par>
+                              <p:par>
+                                <p:cTn id="20" presetID="42" presetClass="path" presetSubtype="0" accel="50000" decel="50000" fill="hold" grpId="0" nodeType="withEffect">
+                                  <p:stCondLst>
+                                    <p:cond delay="700"/>
+                                  </p:stCondLst>
+                                  <p:childTnLst>
+                                    <p:animMotion origin="layout" path="M -2.29167E-6 0 L -2.29167E-6 0.12593 " pathEditMode="relative" rAng="0" ptsTypes="AA">
+                                      <p:cBhvr>
+                                        <p:cTn id="21" dur="2000" fill="hold"/>
+                                        <p:tgtEl>
+                                          <p:spTgt spid="11"/>
+                                        </p:tgtEl>
+                                        <p:attrNameLst>
+                                          <p:attrName>ppt_x</p:attrName>
+                                          <p:attrName>ppt_y</p:attrName>
+                                        </p:attrNameLst>
+                                      </p:cBhvr>
+                                      <p:rCtr x="0" y="6296"/>
+                                    </p:animMotion>
+                                  </p:childTnLst>
+                                </p:cTn>
+                              </p:par>
+                              <p:par>
+                                <p:cTn id="22" presetID="42" presetClass="path" presetSubtype="0" accel="50000" decel="50000" fill="hold" nodeType="withEffect">
+                                  <p:stCondLst>
+                                    <p:cond delay="700"/>
+                                  </p:stCondLst>
+                                  <p:childTnLst>
+                                    <p:animMotion origin="layout" path="M -4.375E-6 -2.59259E-6 L -4.375E-6 0.12593 " pathEditMode="relative" rAng="0" ptsTypes="AA">
+                                      <p:cBhvr>
+                                        <p:cTn id="23" dur="2000" fill="hold"/>
+                                        <p:tgtEl>
+                                          <p:spTgt spid="14"/>
+                                        </p:tgtEl>
+                                        <p:attrNameLst>
+                                          <p:attrName>ppt_x</p:attrName>
+                                          <p:attrName>ppt_y</p:attrName>
+                                        </p:attrNameLst>
+                                      </p:cBhvr>
+                                      <p:rCtr x="0" y="6296"/>
+                                    </p:animMotion>
+                                  </p:childTnLst>
+                                </p:cTn>
+                              </p:par>
+                              <p:par>
+                                <p:cTn id="24" presetID="42" presetClass="path" presetSubtype="0" accel="50000" decel="50000" fill="hold" nodeType="withEffect">
+                                  <p:stCondLst>
+                                    <p:cond delay="700"/>
+                                  </p:stCondLst>
+                                  <p:childTnLst>
+                                    <p:animMotion origin="layout" path="M -4.375E-6 -4.44444E-6 L -4.375E-6 0.12639 " pathEditMode="relative" rAng="0" ptsTypes="AA">
+                                      <p:cBhvr>
+                                        <p:cTn id="25" dur="2000" fill="hold"/>
+                                        <p:tgtEl>
+                                          <p:spTgt spid="4"/>
+                                        </p:tgtEl>
+                                        <p:attrNameLst>
+                                          <p:attrName>ppt_x</p:attrName>
+                                          <p:attrName>ppt_y</p:attrName>
+                                        </p:attrNameLst>
+                                      </p:cBhvr>
+                                      <p:rCtr x="0" y="6319"/>
+                                    </p:animMotion>
+                                  </p:childTnLst>
+                                </p:cTn>
+                              </p:par>
+                              <p:par>
+                                <p:cTn id="26" presetID="22" presetClass="entr" presetSubtype="1" fill="hold" nodeType="withEffect">
+                                  <p:stCondLst>
+                                    <p:cond delay="1000"/>
+                                  </p:stCondLst>
+                                  <p:childTnLst>
+                                    <p:set>
+                                      <p:cBhvr>
+                                        <p:cTn id="27" dur="1" fill="hold">
+                                          <p:stCondLst>
+                                            <p:cond delay="0"/>
+                                          </p:stCondLst>
+                                        </p:cTn>
+                                        <p:tgtEl>
+                                          <p:spTgt spid="4"/>
+                                        </p:tgtEl>
+                                        <p:attrNameLst>
+                                          <p:attrName>style.visibility</p:attrName>
+                                        </p:attrNameLst>
+                                      </p:cBhvr>
+                                      <p:to>
+                                        <p:strVal val="visible"/>
+                                      </p:to>
+                                    </p:set>
+                                    <p:animEffect transition="in" filter="wipe(up)">
+                                      <p:cBhvr>
+                                        <p:cTn id="28" dur="500"/>
+                                        <p:tgtEl>
+                                          <p:spTgt spid="4"/>
+                                        </p:tgtEl>
+                                      </p:cBhvr>
+                                    </p:animEffect>
+                                  </p:childTnLst>
+                                </p:cTn>
+                              </p:par>
+                            </p:childTnLst>
+                          </p:cTn>
+                        </p:par>
+                      </p:childTnLst>
+                    </p:cTn>
+                  </p:par>
+                </p:childTnLst>
+              </p:cTn>
+              <p:prevCondLst>
+                <p:cond evt="onPrev" delay="0">
+                  <p:tgtEl>
+                    <p:sldTgt/>
+                  </p:tgtEl>
+                </p:cond>
+              </p:prevCondLst>
+              <p:nextCondLst>
+                <p:cond evt="onNext" delay="0">
+                  <p:tgtEl>
+                    <p:sldTgt/>
+                  </p:tgtEl>
+                </p:cond>
+              </p:nextCondLst>
+            </p:seq>
+          </p:childTnLst>
+        </p:cTn>
+      </p:par>
+    </p:tnLst>
+    <p:bldLst>
+      <p:bldP spid="11" grpId="0" animBg="1"/>
+      <p:bldP spid="3" grpId="0"/>
+    </p:bldLst>
+  </p:timing>
 </p:sld>
 </file>
 
 <file path=ppt/slides/slide5.xml><?xml version="1.0" encoding="utf-8"?>
+<p:sld xmlns:a="http://schemas.openxmlformats.org/drawingml/2006/main" xmlns:r="http://schemas.openxmlformats.org/officeDocument/2006/relationships" xmlns:p="http://schemas.openxmlformats.org/presentationml/2006/main">
+  <p:cSld>
+    <p:spTree>
+      <p:nvGrpSpPr>
+        <p:cNvPr id="1" name="">
+          <a:extLst>
+            <a:ext uri="{FF2B5EF4-FFF2-40B4-BE49-F238E27FC236}">
+              <a16:creationId xmlns:a16="http://schemas.microsoft.com/office/drawing/2014/main" id="{49B1B284-D6FF-4B90-245B-0D1F62CAEBEB}"/>
+            </a:ext>
+          </a:extLst>
+        </p:cNvPr>
+        <p:cNvGrpSpPr/>
+        <p:nvPr/>
+      </p:nvGrpSpPr>
+      <p:grpSpPr>
+        <a:xfrm>
+          <a:off x="0" y="0"/>
+          <a:ext cx="0" cy="0"/>
+          <a:chOff x="0" y="0"/>
+          <a:chExt cx="0" cy="0"/>
+        </a:xfrm>
+      </p:grpSpPr>
+      <p:sp>
+        <p:nvSpPr>
+          <p:cNvPr id="2" name="Rectangle: Rounded Corners 1">
+            <a:extLst>
+              <a:ext uri="{FF2B5EF4-FFF2-40B4-BE49-F238E27FC236}">
+                <a16:creationId xmlns:a16="http://schemas.microsoft.com/office/drawing/2014/main" id="{ADAD1B22-E98A-1F1C-0E10-FBB0D4FDB4E7}"/>
+              </a:ext>
+            </a:extLst>
+          </p:cNvPr>
+          <p:cNvSpPr/>
+          <p:nvPr/>
+        </p:nvSpPr>
+        <p:spPr>
+          <a:xfrm>
+            <a:off x="331871" y="1458117"/>
+            <a:ext cx="2878053" cy="714377"/>
+          </a:xfrm>
+          <a:prstGeom prst="roundRect">
+            <a:avLst>
+              <a:gd name="adj" fmla="val 11544"/>
+            </a:avLst>
+          </a:prstGeom>
+          <a:solidFill>
+            <a:schemeClr val="bg1">
+              <a:lumMod val="90000"/>
+            </a:schemeClr>
+          </a:solidFill>
+          <a:ln>
+            <a:noFill/>
+          </a:ln>
+        </p:spPr>
+        <p:style>
+          <a:lnRef idx="2">
+            <a:schemeClr val="accent1">
+              <a:shade val="15000"/>
+            </a:schemeClr>
+          </a:lnRef>
+          <a:fillRef idx="1">
+            <a:schemeClr val="accent1"/>
+          </a:fillRef>
+          <a:effectRef idx="0">
+            <a:schemeClr val="accent1"/>
+          </a:effectRef>
+          <a:fontRef idx="minor">
+            <a:schemeClr val="lt1"/>
+          </a:fontRef>
+        </p:style>
+        <p:txBody>
+          <a:bodyPr rtlCol="0" anchor="ctr"/>
+          <a:lstStyle/>
+          <a:p>
+            <a:pPr algn="ctr"/>
+            <a:endParaRPr lang="en-CA"/>
+          </a:p>
+        </p:txBody>
+      </p:sp>
+      <p:grpSp>
+        <p:nvGrpSpPr>
+          <p:cNvPr id="6" name="Group 5">
+            <a:extLst>
+              <a:ext uri="{FF2B5EF4-FFF2-40B4-BE49-F238E27FC236}">
+                <a16:creationId xmlns:a16="http://schemas.microsoft.com/office/drawing/2014/main" id="{BE8F80B6-389F-2079-3028-3EE34EBC6005}"/>
+              </a:ext>
+            </a:extLst>
+          </p:cNvPr>
+          <p:cNvGrpSpPr/>
+          <p:nvPr/>
+        </p:nvGrpSpPr>
+        <p:grpSpPr>
+          <a:xfrm>
+            <a:off x="2703597" y="2172494"/>
+            <a:ext cx="300037" cy="300038"/>
+            <a:chOff x="1234559" y="4745831"/>
+            <a:chExt cx="300037" cy="300038"/>
+          </a:xfrm>
+        </p:grpSpPr>
+        <p:sp>
+          <p:nvSpPr>
+            <p:cNvPr id="7" name="Rectangle 6">
+              <a:extLst>
+                <a:ext uri="{FF2B5EF4-FFF2-40B4-BE49-F238E27FC236}">
+                  <a16:creationId xmlns:a16="http://schemas.microsoft.com/office/drawing/2014/main" id="{13E83B4C-D3F0-0B41-2951-5D1ED5B07CF7}"/>
+                </a:ext>
+              </a:extLst>
+            </p:cNvPr>
+            <p:cNvSpPr/>
+            <p:nvPr/>
+          </p:nvSpPr>
+          <p:spPr>
+            <a:xfrm>
+              <a:off x="1234559" y="4745832"/>
+              <a:ext cx="300037" cy="300037"/>
+            </a:xfrm>
+            <a:prstGeom prst="rect">
+              <a:avLst/>
+            </a:prstGeom>
+            <a:gradFill flip="none" rotWithShape="1">
+              <a:gsLst>
+                <a:gs pos="68000">
+                  <a:schemeClr val="bg1"/>
+                </a:gs>
+                <a:gs pos="83000">
+                  <a:schemeClr val="bg1">
+                    <a:lumMod val="90000"/>
+                  </a:schemeClr>
+                </a:gs>
+              </a:gsLst>
+              <a:lin ang="18900000" scaled="1"/>
+              <a:tileRect/>
+            </a:gradFill>
+            <a:ln>
+              <a:noFill/>
+            </a:ln>
+          </p:spPr>
+          <p:style>
+            <a:lnRef idx="2">
+              <a:schemeClr val="accent1">
+                <a:shade val="15000"/>
+              </a:schemeClr>
+            </a:lnRef>
+            <a:fillRef idx="1">
+              <a:schemeClr val="accent1"/>
+            </a:fillRef>
+            <a:effectRef idx="0">
+              <a:schemeClr val="accent1"/>
+            </a:effectRef>
+            <a:fontRef idx="minor">
+              <a:schemeClr val="lt1"/>
+            </a:fontRef>
+          </p:style>
+          <p:txBody>
+            <a:bodyPr rtlCol="0" anchor="ctr"/>
+            <a:lstStyle/>
+            <a:p>
+              <a:pPr algn="ctr"/>
+              <a:endParaRPr lang="en-CA" dirty="0"/>
+            </a:p>
+          </p:txBody>
+        </p:sp>
+        <p:sp>
+          <p:nvSpPr>
+            <p:cNvPr id="8" name="Oval 7">
+              <a:extLst>
+                <a:ext uri="{FF2B5EF4-FFF2-40B4-BE49-F238E27FC236}">
+                  <a16:creationId xmlns:a16="http://schemas.microsoft.com/office/drawing/2014/main" id="{89B9FE66-22FF-D079-0855-0C0B63B4511F}"/>
+                </a:ext>
+              </a:extLst>
+            </p:cNvPr>
+            <p:cNvSpPr/>
+            <p:nvPr/>
+          </p:nvSpPr>
+          <p:spPr>
+            <a:xfrm>
+              <a:off x="1234559" y="4745831"/>
+              <a:ext cx="300036" cy="300037"/>
+            </a:xfrm>
+            <a:prstGeom prst="ellipse">
+              <a:avLst/>
+            </a:prstGeom>
+            <a:solidFill>
+              <a:schemeClr val="bg1"/>
+            </a:solidFill>
+            <a:ln>
+              <a:noFill/>
+            </a:ln>
+          </p:spPr>
+          <p:style>
+            <a:lnRef idx="2">
+              <a:schemeClr val="accent1">
+                <a:shade val="15000"/>
+              </a:schemeClr>
+            </a:lnRef>
+            <a:fillRef idx="1">
+              <a:schemeClr val="accent1"/>
+            </a:fillRef>
+            <a:effectRef idx="0">
+              <a:schemeClr val="accent1"/>
+            </a:effectRef>
+            <a:fontRef idx="minor">
+              <a:schemeClr val="lt1"/>
+            </a:fontRef>
+          </p:style>
+          <p:txBody>
+            <a:bodyPr rtlCol="0" anchor="ctr"/>
+            <a:lstStyle/>
+            <a:p>
+              <a:pPr algn="ctr"/>
+              <a:endParaRPr lang="en-CA"/>
+            </a:p>
+          </p:txBody>
+        </p:sp>
+      </p:grpSp>
+      <p:grpSp>
+        <p:nvGrpSpPr>
+          <p:cNvPr id="9" name="Group 8">
+            <a:extLst>
+              <a:ext uri="{FF2B5EF4-FFF2-40B4-BE49-F238E27FC236}">
+                <a16:creationId xmlns:a16="http://schemas.microsoft.com/office/drawing/2014/main" id="{DC473272-EA6A-3325-C544-CA6A24D4FC9E}"/>
+              </a:ext>
+            </a:extLst>
+          </p:cNvPr>
+          <p:cNvGrpSpPr/>
+          <p:nvPr/>
+        </p:nvGrpSpPr>
+        <p:grpSpPr>
+          <a:xfrm rot="5400000">
+            <a:off x="2702405" y="1156469"/>
+            <a:ext cx="302418" cy="300038"/>
+            <a:chOff x="1232178" y="4745831"/>
+            <a:chExt cx="302418" cy="300038"/>
+          </a:xfrm>
+        </p:grpSpPr>
+        <p:sp>
+          <p:nvSpPr>
+            <p:cNvPr id="10" name="Rectangle 9">
+              <a:extLst>
+                <a:ext uri="{FF2B5EF4-FFF2-40B4-BE49-F238E27FC236}">
+                  <a16:creationId xmlns:a16="http://schemas.microsoft.com/office/drawing/2014/main" id="{66B2A3DE-2865-9335-0D82-30F2149DAC1B}"/>
+                </a:ext>
+              </a:extLst>
+            </p:cNvPr>
+            <p:cNvSpPr/>
+            <p:nvPr/>
+          </p:nvSpPr>
+          <p:spPr>
+            <a:xfrm>
+              <a:off x="1234559" y="4745832"/>
+              <a:ext cx="300037" cy="300037"/>
+            </a:xfrm>
+            <a:prstGeom prst="rect">
+              <a:avLst/>
+            </a:prstGeom>
+            <a:gradFill flip="none" rotWithShape="1">
+              <a:gsLst>
+                <a:gs pos="68000">
+                  <a:schemeClr val="bg1"/>
+                </a:gs>
+                <a:gs pos="83000">
+                  <a:schemeClr val="bg1">
+                    <a:lumMod val="90000"/>
+                  </a:schemeClr>
+                </a:gs>
+              </a:gsLst>
+              <a:lin ang="18900000" scaled="1"/>
+              <a:tileRect/>
+            </a:gradFill>
+            <a:ln>
+              <a:noFill/>
+            </a:ln>
+          </p:spPr>
+          <p:style>
+            <a:lnRef idx="2">
+              <a:schemeClr val="accent1">
+                <a:shade val="15000"/>
+              </a:schemeClr>
+            </a:lnRef>
+            <a:fillRef idx="1">
+              <a:schemeClr val="accent1"/>
+            </a:fillRef>
+            <a:effectRef idx="0">
+              <a:schemeClr val="accent1"/>
+            </a:effectRef>
+            <a:fontRef idx="minor">
+              <a:schemeClr val="lt1"/>
+            </a:fontRef>
+          </p:style>
+          <p:txBody>
+            <a:bodyPr rtlCol="0" anchor="ctr"/>
+            <a:lstStyle/>
+            <a:p>
+              <a:pPr algn="ctr"/>
+              <a:endParaRPr lang="en-CA" dirty="0"/>
+            </a:p>
+          </p:txBody>
+        </p:sp>
+        <p:sp>
+          <p:nvSpPr>
+            <p:cNvPr id="11" name="Oval 10">
+              <a:extLst>
+                <a:ext uri="{FF2B5EF4-FFF2-40B4-BE49-F238E27FC236}">
+                  <a16:creationId xmlns:a16="http://schemas.microsoft.com/office/drawing/2014/main" id="{E025BE1E-2CB8-69B3-6BA0-3467CFC07D78}"/>
+                </a:ext>
+              </a:extLst>
+            </p:cNvPr>
+            <p:cNvSpPr/>
+            <p:nvPr/>
+          </p:nvSpPr>
+          <p:spPr>
+            <a:xfrm>
+              <a:off x="1232178" y="4745831"/>
+              <a:ext cx="300036" cy="300037"/>
+            </a:xfrm>
+            <a:prstGeom prst="ellipse">
+              <a:avLst/>
+            </a:prstGeom>
+            <a:solidFill>
+              <a:schemeClr val="bg1"/>
+            </a:solidFill>
+            <a:ln>
+              <a:noFill/>
+            </a:ln>
+          </p:spPr>
+          <p:style>
+            <a:lnRef idx="2">
+              <a:schemeClr val="accent1">
+                <a:shade val="15000"/>
+              </a:schemeClr>
+            </a:lnRef>
+            <a:fillRef idx="1">
+              <a:schemeClr val="accent1"/>
+            </a:fillRef>
+            <a:effectRef idx="0">
+              <a:schemeClr val="accent1"/>
+            </a:effectRef>
+            <a:fontRef idx="minor">
+              <a:schemeClr val="lt1"/>
+            </a:fontRef>
+          </p:style>
+          <p:txBody>
+            <a:bodyPr rtlCol="0" anchor="ctr"/>
+            <a:lstStyle/>
+            <a:p>
+              <a:pPr algn="ctr"/>
+              <a:endParaRPr lang="en-CA"/>
+            </a:p>
+          </p:txBody>
+        </p:sp>
+      </p:grpSp>
+      <p:sp>
+        <p:nvSpPr>
+          <p:cNvPr id="4" name="TextBox 3">
+            <a:extLst>
+              <a:ext uri="{FF2B5EF4-FFF2-40B4-BE49-F238E27FC236}">
+                <a16:creationId xmlns:a16="http://schemas.microsoft.com/office/drawing/2014/main" id="{FFE3D04C-156E-1113-8F63-2D97DC4BE6A3}"/>
+              </a:ext>
+            </a:extLst>
+          </p:cNvPr>
+          <p:cNvSpPr txBox="1"/>
+          <p:nvPr/>
+        </p:nvSpPr>
+        <p:spPr>
+          <a:xfrm>
+            <a:off x="4407954" y="3267475"/>
+            <a:ext cx="2182008" cy="923330"/>
+          </a:xfrm>
+          <a:prstGeom prst="rect">
+            <a:avLst/>
+          </a:prstGeom>
+          <a:noFill/>
+        </p:spPr>
+        <p:txBody>
+          <a:bodyPr wrap="none" rtlCol="0">
+            <a:spAutoFit/>
+          </a:bodyPr>
+          <a:lstStyle/>
+          <a:p>
+            <a:pPr marL="285750" indent="-285750">
+              <a:buFontTx/>
+              <a:buChar char="-"/>
+            </a:pPr>
+            <a:r>
+              <a:rPr lang="en-CA" dirty="0">
+                <a:latin typeface="Kumbh Sans" pitchFamily="2" charset="0"/>
+                <a:cs typeface="Kumbh Sans" pitchFamily="2" charset="0"/>
+              </a:rPr>
+              <a:t>Past experience</a:t>
+            </a:r>
+          </a:p>
+          <a:p>
+            <a:pPr marL="285750" indent="-285750">
+              <a:buFontTx/>
+              <a:buChar char="-"/>
+            </a:pPr>
+            <a:r>
+              <a:rPr lang="en-CA" dirty="0">
+                <a:latin typeface="Kumbh Sans" pitchFamily="2" charset="0"/>
+                <a:cs typeface="Kumbh Sans" pitchFamily="2" charset="0"/>
+              </a:rPr>
+              <a:t>Role</a:t>
+            </a:r>
+          </a:p>
+          <a:p>
+            <a:pPr marL="285750" indent="-285750">
+              <a:buFontTx/>
+              <a:buChar char="-"/>
+            </a:pPr>
+            <a:r>
+              <a:rPr lang="en-CA" dirty="0">
+                <a:latin typeface="Kumbh Sans" pitchFamily="2" charset="0"/>
+                <a:cs typeface="Kumbh Sans" pitchFamily="2" charset="0"/>
+              </a:rPr>
+              <a:t>Expectations</a:t>
+            </a:r>
+          </a:p>
+        </p:txBody>
+      </p:sp>
+      <p:sp>
+        <p:nvSpPr>
+          <p:cNvPr id="5" name="TextBox 4">
+            <a:extLst>
+              <a:ext uri="{FF2B5EF4-FFF2-40B4-BE49-F238E27FC236}">
+                <a16:creationId xmlns:a16="http://schemas.microsoft.com/office/drawing/2014/main" id="{32AB9166-2446-17C2-01D2-CCA23D7EB405}"/>
+              </a:ext>
+            </a:extLst>
+          </p:cNvPr>
+          <p:cNvSpPr txBox="1"/>
+          <p:nvPr/>
+        </p:nvSpPr>
+        <p:spPr>
+          <a:xfrm>
+            <a:off x="440111" y="376344"/>
+            <a:ext cx="1588897" cy="5997476"/>
+          </a:xfrm>
+          <a:prstGeom prst="rect">
+            <a:avLst/>
+          </a:prstGeom>
+          <a:noFill/>
+        </p:spPr>
+        <p:txBody>
+          <a:bodyPr wrap="none" rtlCol="0">
+            <a:spAutoFit/>
+          </a:bodyPr>
+          <a:lstStyle/>
+          <a:p>
+            <a:pPr>
+              <a:lnSpc>
+                <a:spcPct val="200000"/>
+              </a:lnSpc>
+            </a:pPr>
+            <a:r>
+              <a:rPr lang="en-CA" sz="2800" dirty="0">
+                <a:latin typeface="Kumbh Sans" pitchFamily="2" charset="0"/>
+                <a:cs typeface="Kumbh Sans" pitchFamily="2" charset="0"/>
+              </a:rPr>
+              <a:t>Adestria</a:t>
+            </a:r>
+          </a:p>
+          <a:p>
+            <a:pPr>
+              <a:lnSpc>
+                <a:spcPct val="200000"/>
+              </a:lnSpc>
+            </a:pPr>
+            <a:r>
+              <a:rPr lang="en-CA" sz="2800" dirty="0">
+                <a:latin typeface="Kumbh Sans" pitchFamily="2" charset="0"/>
+                <a:cs typeface="Kumbh Sans" pitchFamily="2" charset="0"/>
+              </a:rPr>
+              <a:t>    Jack</a:t>
+            </a:r>
+          </a:p>
+          <a:p>
+            <a:pPr>
+              <a:lnSpc>
+                <a:spcPct val="200000"/>
+              </a:lnSpc>
+            </a:pPr>
+            <a:r>
+              <a:rPr lang="en-CA" sz="2800" dirty="0">
+                <a:solidFill>
+                  <a:schemeClr val="tx1">
+                    <a:lumMod val="25000"/>
+                    <a:lumOff val="75000"/>
+                  </a:schemeClr>
+                </a:solidFill>
+                <a:latin typeface="Kumbh Sans" pitchFamily="2" charset="0"/>
+                <a:cs typeface="Kumbh Sans" pitchFamily="2" charset="0"/>
+              </a:rPr>
+              <a:t>    Kayla</a:t>
+            </a:r>
+          </a:p>
+          <a:p>
+            <a:pPr>
+              <a:lnSpc>
+                <a:spcPct val="200000"/>
+              </a:lnSpc>
+            </a:pPr>
+            <a:r>
+              <a:rPr lang="en-CA" sz="2800" dirty="0">
+                <a:solidFill>
+                  <a:schemeClr val="tx1">
+                    <a:lumMod val="25000"/>
+                    <a:lumOff val="75000"/>
+                  </a:schemeClr>
+                </a:solidFill>
+                <a:latin typeface="Kumbh Sans" pitchFamily="2" charset="0"/>
+                <a:cs typeface="Kumbh Sans" pitchFamily="2" charset="0"/>
+              </a:rPr>
+              <a:t>    Edin</a:t>
+            </a:r>
+          </a:p>
+          <a:p>
+            <a:pPr>
+              <a:lnSpc>
+                <a:spcPct val="200000"/>
+              </a:lnSpc>
+            </a:pPr>
+            <a:r>
+              <a:rPr lang="en-CA" sz="2800" dirty="0">
+                <a:solidFill>
+                  <a:schemeClr val="tx1">
+                    <a:lumMod val="25000"/>
+                    <a:lumOff val="75000"/>
+                  </a:schemeClr>
+                </a:solidFill>
+                <a:latin typeface="Kumbh Sans" pitchFamily="2" charset="0"/>
+                <a:cs typeface="Kumbh Sans" pitchFamily="2" charset="0"/>
+              </a:rPr>
+              <a:t>    Jake</a:t>
+            </a:r>
+          </a:p>
+          <a:p>
+            <a:pPr>
+              <a:lnSpc>
+                <a:spcPct val="200000"/>
+              </a:lnSpc>
+            </a:pPr>
+            <a:r>
+              <a:rPr lang="en-CA" sz="2800" dirty="0">
+                <a:solidFill>
+                  <a:schemeClr val="tx1">
+                    <a:lumMod val="25000"/>
+                    <a:lumOff val="75000"/>
+                  </a:schemeClr>
+                </a:solidFill>
+                <a:latin typeface="Kumbh Sans" pitchFamily="2" charset="0"/>
+                <a:cs typeface="Kumbh Sans" pitchFamily="2" charset="0"/>
+              </a:rPr>
+              <a:t>    Steve</a:t>
+            </a:r>
+          </a:p>
+          <a:p>
+            <a:pPr>
+              <a:lnSpc>
+                <a:spcPct val="200000"/>
+              </a:lnSpc>
+            </a:pPr>
+            <a:r>
+              <a:rPr lang="en-CA" sz="2800" dirty="0">
+                <a:solidFill>
+                  <a:schemeClr val="tx1">
+                    <a:lumMod val="25000"/>
+                    <a:lumOff val="75000"/>
+                  </a:schemeClr>
+                </a:solidFill>
+                <a:latin typeface="Kumbh Sans" pitchFamily="2" charset="0"/>
+                <a:cs typeface="Kumbh Sans" pitchFamily="2" charset="0"/>
+              </a:rPr>
+              <a:t>Project</a:t>
+            </a:r>
+          </a:p>
+        </p:txBody>
+      </p:sp>
+      <p:sp>
+        <p:nvSpPr>
+          <p:cNvPr id="3" name="Rectangle: Rounded Corners 2">
+            <a:extLst>
+              <a:ext uri="{FF2B5EF4-FFF2-40B4-BE49-F238E27FC236}">
+                <a16:creationId xmlns:a16="http://schemas.microsoft.com/office/drawing/2014/main" id="{3509C406-746C-2D41-7411-CAD9A5B245CC}"/>
+              </a:ext>
+            </a:extLst>
+          </p:cNvPr>
+          <p:cNvSpPr/>
+          <p:nvPr/>
+        </p:nvSpPr>
+        <p:spPr>
+          <a:xfrm>
+            <a:off x="3003634" y="585786"/>
+            <a:ext cx="8559716" cy="5686427"/>
+          </a:xfrm>
+          <a:prstGeom prst="roundRect">
+            <a:avLst>
+              <a:gd name="adj" fmla="val 2513"/>
+            </a:avLst>
+          </a:prstGeom>
+          <a:solidFill>
+            <a:schemeClr val="bg1">
+              <a:lumMod val="90000"/>
+            </a:schemeClr>
+          </a:solidFill>
+          <a:ln>
+            <a:noFill/>
+          </a:ln>
+        </p:spPr>
+        <p:style>
+          <a:lnRef idx="2">
+            <a:schemeClr val="accent1">
+              <a:shade val="15000"/>
+            </a:schemeClr>
+          </a:lnRef>
+          <a:fillRef idx="1">
+            <a:schemeClr val="accent1"/>
+          </a:fillRef>
+          <a:effectRef idx="0">
+            <a:schemeClr val="accent1"/>
+          </a:effectRef>
+          <a:fontRef idx="minor">
+            <a:schemeClr val="lt1"/>
+          </a:fontRef>
+        </p:style>
+        <p:txBody>
+          <a:bodyPr rtlCol="0" anchor="ctr"/>
+          <a:lstStyle/>
+          <a:p>
+            <a:pPr algn="ctr"/>
+            <a:endParaRPr lang="en-CA" dirty="0"/>
+          </a:p>
+        </p:txBody>
+      </p:sp>
+    </p:spTree>
+    <p:extLst>
+      <p:ext uri="{BB962C8B-B14F-4D97-AF65-F5344CB8AC3E}">
+        <p14:creationId xmlns:p14="http://schemas.microsoft.com/office/powerpoint/2010/main" val="3925825761"/>
+      </p:ext>
+    </p:extLst>
+  </p:cSld>
+  <p:clrMapOvr>
+    <a:masterClrMapping/>
+  </p:clrMapOvr>
+  <p:timing>
+    <p:tnLst>
+      <p:par>
+        <p:cTn id="1" dur="indefinite" restart="never" nodeType="tmRoot">
+          <p:childTnLst>
+            <p:seq concurrent="1" nextAc="seek">
+              <p:cTn id="2" dur="indefinite" nodeType="mainSeq">
+                <p:childTnLst>
+                  <p:par>
+                    <p:cTn id="3" fill="hold">
+                      <p:stCondLst>
+                        <p:cond delay="indefinite"/>
+                        <p:cond evt="onBegin" delay="0">
+                          <p:tn val="2"/>
+                        </p:cond>
+                      </p:stCondLst>
+                      <p:childTnLst>
+                        <p:par>
+                          <p:cTn id="4" fill="hold">
+                            <p:stCondLst>
+                              <p:cond delay="0"/>
+                            </p:stCondLst>
+                            <p:childTnLst>
+                              <p:par>
+                                <p:cTn id="5" presetID="42" presetClass="path" presetSubtype="0" accel="50000" decel="50000" fill="hold" grpId="0" nodeType="withEffect">
+                                  <p:stCondLst>
+                                    <p:cond delay="700"/>
+                                  </p:stCondLst>
+                                  <p:childTnLst>
+                                    <p:animMotion origin="layout" path="M -2.29167E-6 -3.33333E-6 L -2.29167E-6 0.1213 " pathEditMode="relative" rAng="0" ptsTypes="AA">
+                                      <p:cBhvr>
+                                        <p:cTn id="6" dur="2000" fill="hold"/>
+                                        <p:tgtEl>
+                                          <p:spTgt spid="2"/>
+                                        </p:tgtEl>
+                                        <p:attrNameLst>
+                                          <p:attrName>ppt_x</p:attrName>
+                                          <p:attrName>ppt_y</p:attrName>
+                                        </p:attrNameLst>
+                                      </p:cBhvr>
+                                      <p:rCtr x="0" y="6065"/>
+                                    </p:animMotion>
+                                  </p:childTnLst>
+                                </p:cTn>
+                              </p:par>
+                              <p:par>
+                                <p:cTn id="7" presetID="42" presetClass="path" presetSubtype="0" accel="50000" decel="50000" fill="hold" nodeType="withEffect">
+                                  <p:stCondLst>
+                                    <p:cond delay="700"/>
+                                  </p:stCondLst>
+                                  <p:childTnLst>
+                                    <p:animMotion origin="layout" path="M -4.375E-6 2.59259E-6 L -4.375E-6 0.12106 " pathEditMode="relative" rAng="0" ptsTypes="AA">
+                                      <p:cBhvr>
+                                        <p:cTn id="8" dur="2000" fill="hold"/>
+                                        <p:tgtEl>
+                                          <p:spTgt spid="6"/>
+                                        </p:tgtEl>
+                                        <p:attrNameLst>
+                                          <p:attrName>ppt_x</p:attrName>
+                                          <p:attrName>ppt_y</p:attrName>
+                                        </p:attrNameLst>
+                                      </p:cBhvr>
+                                      <p:rCtr x="0" y="6042"/>
+                                    </p:animMotion>
+                                  </p:childTnLst>
+                                </p:cTn>
+                              </p:par>
+                              <p:par>
+                                <p:cTn id="9" presetID="42" presetClass="path" presetSubtype="0" accel="50000" decel="50000" fill="hold" nodeType="withEffect">
+                                  <p:stCondLst>
+                                    <p:cond delay="700"/>
+                                  </p:stCondLst>
+                                  <p:childTnLst>
+                                    <p:animMotion origin="layout" path="M -4.375E-6 2.22222E-6 L -4.375E-6 0.12153 " pathEditMode="relative" rAng="0" ptsTypes="AA">
+                                      <p:cBhvr>
+                                        <p:cTn id="10" dur="2000" fill="hold"/>
+                                        <p:tgtEl>
+                                          <p:spTgt spid="9"/>
+                                        </p:tgtEl>
+                                        <p:attrNameLst>
+                                          <p:attrName>ppt_x</p:attrName>
+                                          <p:attrName>ppt_y</p:attrName>
+                                        </p:attrNameLst>
+                                      </p:cBhvr>
+                                      <p:rCtr x="0" y="6065"/>
+                                    </p:animMotion>
+                                  </p:childTnLst>
+                                </p:cTn>
+                              </p:par>
+                              <p:par>
+                                <p:cTn id="11" presetID="19" presetClass="emph" presetSubtype="0" fill="hold" nodeType="withEffect">
+                                  <p:stCondLst>
+                                    <p:cond delay="1300"/>
+                                  </p:stCondLst>
+                                  <p:childTnLst>
+                                    <p:animClr clrSpc="rgb" dir="cw">
+                                      <p:cBhvr override="childStyle">
+                                        <p:cTn id="12" dur="500" fill="hold"/>
+                                        <p:tgtEl>
+                                          <p:spTgt spid="5">
+                                            <p:txEl>
+                                              <p:pRg st="2" end="2"/>
+                                            </p:txEl>
+                                          </p:spTgt>
+                                        </p:tgtEl>
+                                        <p:attrNameLst>
+                                          <p:attrName>style.color</p:attrName>
+                                        </p:attrNameLst>
+                                      </p:cBhvr>
+                                      <p:to>
+                                        <a:schemeClr val="accent2"/>
+                                      </p:to>
+                                    </p:animClr>
+                                    <p:animClr clrSpc="rgb" dir="cw">
+                                      <p:cBhvr>
+                                        <p:cTn id="13" dur="500" fill="hold"/>
+                                        <p:tgtEl>
+                                          <p:spTgt spid="5">
+                                            <p:txEl>
+                                              <p:pRg st="2" end="2"/>
+                                            </p:txEl>
+                                          </p:spTgt>
+                                        </p:tgtEl>
+                                        <p:attrNameLst>
+                                          <p:attrName>fillcolor</p:attrName>
+                                        </p:attrNameLst>
+                                      </p:cBhvr>
+                                      <p:to>
+                                        <a:schemeClr val="accent2"/>
+                                      </p:to>
+                                    </p:animClr>
+                                    <p:set>
+                                      <p:cBhvr>
+                                        <p:cTn id="14" dur="500" fill="hold"/>
+                                        <p:tgtEl>
+                                          <p:spTgt spid="5">
+                                            <p:txEl>
+                                              <p:pRg st="2" end="2"/>
+                                            </p:txEl>
+                                          </p:spTgt>
+                                        </p:tgtEl>
+                                        <p:attrNameLst>
+                                          <p:attrName>fill.type</p:attrName>
+                                        </p:attrNameLst>
+                                      </p:cBhvr>
+                                      <p:to>
+                                        <p:strVal val="solid"/>
+                                      </p:to>
+                                    </p:set>
+                                    <p:set>
+                                      <p:cBhvr>
+                                        <p:cTn id="15" dur="500" fill="hold"/>
+                                        <p:tgtEl>
+                                          <p:spTgt spid="5">
+                                            <p:txEl>
+                                              <p:pRg st="2" end="2"/>
+                                            </p:txEl>
+                                          </p:spTgt>
+                                        </p:tgtEl>
+                                        <p:attrNameLst>
+                                          <p:attrName>fill.on</p:attrName>
+                                        </p:attrNameLst>
+                                      </p:cBhvr>
+                                      <p:to>
+                                        <p:strVal val="true"/>
+                                      </p:to>
+                                    </p:set>
+                                  </p:childTnLst>
+                                </p:cTn>
+                              </p:par>
+                              <p:par>
+                                <p:cTn id="16" presetID="19" presetClass="emph" presetSubtype="0" fill="hold" nodeType="withEffect">
+                                  <p:stCondLst>
+                                    <p:cond delay="1300"/>
+                                  </p:stCondLst>
+                                  <p:childTnLst>
+                                    <p:animClr clrSpc="rgb" dir="cw">
+                                      <p:cBhvr override="childStyle">
+                                        <p:cTn id="17" dur="500" fill="hold"/>
+                                        <p:tgtEl>
+                                          <p:spTgt spid="5">
+                                            <p:txEl>
+                                              <p:pRg st="1" end="1"/>
+                                            </p:txEl>
+                                          </p:spTgt>
+                                        </p:tgtEl>
+                                        <p:attrNameLst>
+                                          <p:attrName>style.color</p:attrName>
+                                        </p:attrNameLst>
+                                      </p:cBhvr>
+                                      <p:to>
+                                        <a:srgbClr val="96CDF8"/>
+                                      </p:to>
+                                    </p:animClr>
+                                    <p:animClr clrSpc="rgb" dir="cw">
+                                      <p:cBhvr>
+                                        <p:cTn id="18" dur="500" fill="hold"/>
+                                        <p:tgtEl>
+                                          <p:spTgt spid="5">
+                                            <p:txEl>
+                                              <p:pRg st="1" end="1"/>
+                                            </p:txEl>
+                                          </p:spTgt>
+                                        </p:tgtEl>
+                                        <p:attrNameLst>
+                                          <p:attrName>fillcolor</p:attrName>
+                                        </p:attrNameLst>
+                                      </p:cBhvr>
+                                      <p:to>
+                                        <a:srgbClr val="96CDF8"/>
+                                      </p:to>
+                                    </p:animClr>
+                                    <p:set>
+                                      <p:cBhvr>
+                                        <p:cTn id="19" dur="500" fill="hold"/>
+                                        <p:tgtEl>
+                                          <p:spTgt spid="5">
+                                            <p:txEl>
+                                              <p:pRg st="1" end="1"/>
+                                            </p:txEl>
+                                          </p:spTgt>
+                                        </p:tgtEl>
+                                        <p:attrNameLst>
+                                          <p:attrName>fill.type</p:attrName>
+                                        </p:attrNameLst>
+                                      </p:cBhvr>
+                                      <p:to>
+                                        <p:strVal val="solid"/>
+                                      </p:to>
+                                    </p:set>
+                                    <p:set>
+                                      <p:cBhvr>
+                                        <p:cTn id="20" dur="500" fill="hold"/>
+                                        <p:tgtEl>
+                                          <p:spTgt spid="5">
+                                            <p:txEl>
+                                              <p:pRg st="1" end="1"/>
+                                            </p:txEl>
+                                          </p:spTgt>
+                                        </p:tgtEl>
+                                        <p:attrNameLst>
+                                          <p:attrName>fill.on</p:attrName>
+                                        </p:attrNameLst>
+                                      </p:cBhvr>
+                                      <p:to>
+                                        <p:strVal val="true"/>
+                                      </p:to>
+                                    </p:set>
+                                  </p:childTnLst>
+                                </p:cTn>
+                              </p:par>
+                            </p:childTnLst>
+                          </p:cTn>
+                        </p:par>
+                      </p:childTnLst>
+                    </p:cTn>
+                  </p:par>
+                </p:childTnLst>
+              </p:cTn>
+              <p:prevCondLst>
+                <p:cond evt="onPrev" delay="0">
+                  <p:tgtEl>
+                    <p:sldTgt/>
+                  </p:tgtEl>
+                </p:cond>
+              </p:prevCondLst>
+              <p:nextCondLst>
+                <p:cond evt="onNext" delay="0">
+                  <p:tgtEl>
+                    <p:sldTgt/>
+                  </p:tgtEl>
+                </p:cond>
+              </p:nextCondLst>
+            </p:seq>
+          </p:childTnLst>
+        </p:cTn>
+      </p:par>
+    </p:tnLst>
+    <p:bldLst>
+      <p:bldP spid="2" grpId="0" animBg="1"/>
+    </p:bldLst>
+  </p:timing>
+</p:sld>
+</file>
+
+<file path=ppt/slides/slide6.xml><?xml version="1.0" encoding="utf-8"?>
 <p:sld xmlns:a="http://schemas.openxmlformats.org/drawingml/2006/main" xmlns:r="http://schemas.openxmlformats.org/officeDocument/2006/relationships" xmlns:p="http://schemas.openxmlformats.org/presentationml/2006/main">
   <p:cSld>
     <p:spTree>
@@ -4780,41 +11617,6 @@
       </p:grpSpPr>
       <p:sp>
         <p:nvSpPr>
-          <p:cNvPr id="2" name="TextBox 1">
-            <a:extLst>
-              <a:ext uri="{FF2B5EF4-FFF2-40B4-BE49-F238E27FC236}">
-                <a16:creationId xmlns:a16="http://schemas.microsoft.com/office/drawing/2014/main" id="{F8626D69-4F4F-76B2-E4FB-EA5B5DF367A4}"/>
-              </a:ext>
-            </a:extLst>
-          </p:cNvPr>
-          <p:cNvSpPr txBox="1"/>
-          <p:nvPr/>
-        </p:nvSpPr>
-        <p:spPr>
-          <a:xfrm>
-            <a:off x="4506686" y="2759529"/>
-            <a:ext cx="724878" cy="369332"/>
-          </a:xfrm>
-          <a:prstGeom prst="rect">
-            <a:avLst/>
-          </a:prstGeom>
-          <a:noFill/>
-        </p:spPr>
-        <p:txBody>
-          <a:bodyPr wrap="none" rtlCol="0">
-            <a:spAutoFit/>
-          </a:bodyPr>
-          <a:lstStyle/>
-          <a:p>
-            <a:r>
-              <a:rPr lang="en-CA" dirty="0"/>
-              <a:t>Kayla</a:t>
-            </a:r>
-          </a:p>
-        </p:txBody>
-      </p:sp>
-      <p:sp>
-        <p:nvSpPr>
           <p:cNvPr id="4" name="TextBox 3">
             <a:extLst>
               <a:ext uri="{FF2B5EF4-FFF2-40B4-BE49-F238E27FC236}">
@@ -4828,7 +11630,7 @@
         <p:spPr>
           <a:xfrm>
             <a:off x="4407954" y="3267475"/>
-            <a:ext cx="2050818" cy="923330"/>
+            <a:ext cx="2182008" cy="923330"/>
           </a:xfrm>
           <a:prstGeom prst="rect">
             <a:avLst/>
@@ -4846,7 +11648,10 @@
               <a:buChar char="-"/>
             </a:pPr>
             <a:r>
-              <a:rPr lang="en-CA" dirty="0"/>
+              <a:rPr lang="en-CA" dirty="0">
+                <a:latin typeface="Kumbh Sans" pitchFamily="2" charset="0"/>
+                <a:cs typeface="Kumbh Sans" pitchFamily="2" charset="0"/>
+              </a:rPr>
               <a:t>Past experience</a:t>
             </a:r>
           </a:p>
@@ -4856,7 +11661,10 @@
               <a:buChar char="-"/>
             </a:pPr>
             <a:r>
-              <a:rPr lang="en-CA" dirty="0"/>
+              <a:rPr lang="en-CA" dirty="0">
+                <a:latin typeface="Kumbh Sans" pitchFamily="2" charset="0"/>
+                <a:cs typeface="Kumbh Sans" pitchFamily="2" charset="0"/>
+              </a:rPr>
               <a:t>Role</a:t>
             </a:r>
           </a:p>
@@ -4866,7 +11674,10 @@
               <a:buChar char="-"/>
             </a:pPr>
             <a:r>
-              <a:rPr lang="en-CA" dirty="0"/>
+              <a:rPr lang="en-CA" dirty="0">
+                <a:latin typeface="Kumbh Sans" pitchFamily="2" charset="0"/>
+                <a:cs typeface="Kumbh Sans" pitchFamily="2" charset="0"/>
+              </a:rPr>
               <a:t>Expectations</a:t>
             </a:r>
           </a:p>
@@ -4874,10 +11685,10 @@
       </p:sp>
       <p:sp>
         <p:nvSpPr>
-          <p:cNvPr id="5" name="TextBox 4">
+          <p:cNvPr id="6" name="TextBox 5">
             <a:extLst>
               <a:ext uri="{FF2B5EF4-FFF2-40B4-BE49-F238E27FC236}">
-                <a16:creationId xmlns:a16="http://schemas.microsoft.com/office/drawing/2014/main" id="{F48311E2-530A-88F3-A0F2-5F0110403BE1}"/>
+                <a16:creationId xmlns:a16="http://schemas.microsoft.com/office/drawing/2014/main" id="{DB957D48-6A7C-B8E3-25B3-448F0B786932}"/>
               </a:ext>
             </a:extLst>
           </p:cNvPr>
@@ -4886,8 +11697,8 @@
         </p:nvSpPr>
         <p:spPr>
           <a:xfrm>
-            <a:off x="480933" y="0"/>
-            <a:ext cx="1144865" cy="4273927"/>
+            <a:off x="440111" y="376344"/>
+            <a:ext cx="1588897" cy="5997476"/>
           </a:xfrm>
           <a:prstGeom prst="rect">
             <a:avLst/>
@@ -4907,6 +11718,27 @@
             </a:pPr>
             <a:r>
               <a:rPr lang="en-CA" sz="2800" dirty="0">
+                <a:latin typeface="Kumbh Sans" pitchFamily="2" charset="0"/>
+                <a:cs typeface="Kumbh Sans" pitchFamily="2" charset="0"/>
+              </a:rPr>
+              <a:t>Adestria</a:t>
+            </a:r>
+          </a:p>
+          <a:p>
+            <a:pPr>
+              <a:lnSpc>
+                <a:spcPct val="200000"/>
+              </a:lnSpc>
+            </a:pPr>
+            <a:r>
+              <a:rPr lang="en-CA" sz="2800" dirty="0">
+                <a:latin typeface="Kumbh Sans" pitchFamily="2" charset="0"/>
+                <a:cs typeface="Kumbh Sans" pitchFamily="2" charset="0"/>
+              </a:rPr>
+              <a:t>    </a:t>
+            </a:r>
+            <a:r>
+              <a:rPr lang="en-CA" sz="2800" dirty="0">
                 <a:solidFill>
                   <a:schemeClr val="tx1">
                     <a:lumMod val="25000"/>
@@ -4927,6 +11759,19 @@
             </a:pPr>
             <a:r>
               <a:rPr lang="en-CA" sz="2800" dirty="0">
+                <a:solidFill>
+                  <a:schemeClr val="tx1">
+                    <a:lumMod val="25000"/>
+                    <a:lumOff val="75000"/>
+                  </a:schemeClr>
+                </a:solidFill>
+                <a:latin typeface="Kumbh Sans" pitchFamily="2" charset="0"/>
+                <a:cs typeface="Kumbh Sans" pitchFamily="2" charset="0"/>
+              </a:rPr>
+              <a:t>    </a:t>
+            </a:r>
+            <a:r>
+              <a:rPr lang="en-CA" sz="2800" dirty="0">
                 <a:latin typeface="Kumbh Sans" pitchFamily="2" charset="0"/>
                 <a:cs typeface="Kumbh Sans" pitchFamily="2" charset="0"/>
               </a:rPr>
@@ -4950,7 +11795,7 @@
                 <a:latin typeface="Kumbh Sans" pitchFamily="2" charset="0"/>
                 <a:cs typeface="Kumbh Sans" pitchFamily="2" charset="0"/>
               </a:rPr>
-              <a:t>Edin</a:t>
+              <a:t>    Edin</a:t>
             </a:r>
           </a:p>
           <a:p>
@@ -4970,7 +11815,7 @@
                 <a:latin typeface="Kumbh Sans" pitchFamily="2" charset="0"/>
                 <a:cs typeface="Kumbh Sans" pitchFamily="2" charset="0"/>
               </a:rPr>
-              <a:t>Jake</a:t>
+              <a:t>    Jake</a:t>
             </a:r>
           </a:p>
           <a:p>
@@ -4990,7 +11835,27 @@
                 <a:latin typeface="Kumbh Sans" pitchFamily="2" charset="0"/>
                 <a:cs typeface="Kumbh Sans" pitchFamily="2" charset="0"/>
               </a:rPr>
-              <a:t>Steve</a:t>
+              <a:t>    Steve</a:t>
+            </a:r>
+          </a:p>
+          <a:p>
+            <a:pPr>
+              <a:lnSpc>
+                <a:spcPct val="200000"/>
+              </a:lnSpc>
+            </a:pPr>
+            <a:r>
+              <a:rPr lang="en-CA" sz="2800" dirty="0">
+                <a:solidFill>
+                  <a:schemeClr val="tx1">
+                    <a:lumMod val="25000"/>
+                    <a:lumOff val="75000"/>
+                  </a:schemeClr>
+                </a:solidFill>
+                <a:latin typeface="Kumbh Sans" pitchFamily="2" charset="0"/>
+                <a:cs typeface="Kumbh Sans" pitchFamily="2" charset="0"/>
+              </a:rPr>
+              <a:t>Project</a:t>
             </a:r>
           </a:p>
         </p:txBody>
@@ -5008,7 +11873,7 @@
 </p:sld>
 </file>
 
-<file path=ppt/slides/slide6.xml><?xml version="1.0" encoding="utf-8"?>
+<file path=ppt/slides/slide7.xml><?xml version="1.0" encoding="utf-8"?>
 <p:sld xmlns:a="http://schemas.openxmlformats.org/drawingml/2006/main" xmlns:r="http://schemas.openxmlformats.org/officeDocument/2006/relationships" xmlns:p="http://schemas.openxmlformats.org/presentationml/2006/main">
   <p:cSld>
     <p:spTree>
@@ -5033,41 +11898,6 @@
       </p:grpSpPr>
       <p:sp>
         <p:nvSpPr>
-          <p:cNvPr id="2" name="TextBox 1">
-            <a:extLst>
-              <a:ext uri="{FF2B5EF4-FFF2-40B4-BE49-F238E27FC236}">
-                <a16:creationId xmlns:a16="http://schemas.microsoft.com/office/drawing/2014/main" id="{394BDA26-D74C-5390-5839-09EEB9016D38}"/>
-              </a:ext>
-            </a:extLst>
-          </p:cNvPr>
-          <p:cNvSpPr txBox="1"/>
-          <p:nvPr/>
-        </p:nvSpPr>
-        <p:spPr>
-          <a:xfrm>
-            <a:off x="4506686" y="2759529"/>
-            <a:ext cx="623889" cy="369332"/>
-          </a:xfrm>
-          <a:prstGeom prst="rect">
-            <a:avLst/>
-          </a:prstGeom>
-          <a:noFill/>
-        </p:spPr>
-        <p:txBody>
-          <a:bodyPr wrap="none" rtlCol="0">
-            <a:spAutoFit/>
-          </a:bodyPr>
-          <a:lstStyle/>
-          <a:p>
-            <a:r>
-              <a:rPr lang="en-CA" dirty="0"/>
-              <a:t>Edin</a:t>
-            </a:r>
-          </a:p>
-        </p:txBody>
-      </p:sp>
-      <p:sp>
-        <p:nvSpPr>
           <p:cNvPr id="4" name="TextBox 3">
             <a:extLst>
               <a:ext uri="{FF2B5EF4-FFF2-40B4-BE49-F238E27FC236}">
@@ -5081,7 +11911,7 @@
         <p:spPr>
           <a:xfrm>
             <a:off x="4407954" y="3267475"/>
-            <a:ext cx="2050818" cy="923330"/>
+            <a:ext cx="2182008" cy="923330"/>
           </a:xfrm>
           <a:prstGeom prst="rect">
             <a:avLst/>
@@ -5099,7 +11929,10 @@
               <a:buChar char="-"/>
             </a:pPr>
             <a:r>
-              <a:rPr lang="en-CA" dirty="0"/>
+              <a:rPr lang="en-CA" dirty="0">
+                <a:latin typeface="Kumbh Sans" pitchFamily="2" charset="0"/>
+                <a:cs typeface="Kumbh Sans" pitchFamily="2" charset="0"/>
+              </a:rPr>
               <a:t>Past experience</a:t>
             </a:r>
           </a:p>
@@ -5109,7 +11942,10 @@
               <a:buChar char="-"/>
             </a:pPr>
             <a:r>
-              <a:rPr lang="en-CA" dirty="0"/>
+              <a:rPr lang="en-CA" dirty="0">
+                <a:latin typeface="Kumbh Sans" pitchFamily="2" charset="0"/>
+                <a:cs typeface="Kumbh Sans" pitchFamily="2" charset="0"/>
+              </a:rPr>
               <a:t>Role</a:t>
             </a:r>
           </a:p>
@@ -5119,7 +11955,10 @@
               <a:buChar char="-"/>
             </a:pPr>
             <a:r>
-              <a:rPr lang="en-CA" dirty="0"/>
+              <a:rPr lang="en-CA" dirty="0">
+                <a:latin typeface="Kumbh Sans" pitchFamily="2" charset="0"/>
+                <a:cs typeface="Kumbh Sans" pitchFamily="2" charset="0"/>
+              </a:rPr>
               <a:t>Expectations</a:t>
             </a:r>
           </a:p>
@@ -5127,10 +11966,10 @@
       </p:sp>
       <p:sp>
         <p:nvSpPr>
-          <p:cNvPr id="5" name="TextBox 4">
+          <p:cNvPr id="6" name="TextBox 5">
             <a:extLst>
               <a:ext uri="{FF2B5EF4-FFF2-40B4-BE49-F238E27FC236}">
-                <a16:creationId xmlns:a16="http://schemas.microsoft.com/office/drawing/2014/main" id="{12223178-2D4D-92AC-AE08-E324647AB193}"/>
+                <a16:creationId xmlns:a16="http://schemas.microsoft.com/office/drawing/2014/main" id="{4B417B1F-4D76-94E6-39D5-BE8719071E14}"/>
               </a:ext>
             </a:extLst>
           </p:cNvPr>
@@ -5139,8 +11978,8 @@
         </p:nvSpPr>
         <p:spPr>
           <a:xfrm>
-            <a:off x="480933" y="0"/>
-            <a:ext cx="1144865" cy="4273927"/>
+            <a:off x="440111" y="376344"/>
+            <a:ext cx="1588897" cy="5997476"/>
           </a:xfrm>
           <a:prstGeom prst="rect">
             <a:avLst/>
@@ -5160,6 +11999,27 @@
             </a:pPr>
             <a:r>
               <a:rPr lang="en-CA" sz="2800" dirty="0">
+                <a:latin typeface="Kumbh Sans" pitchFamily="2" charset="0"/>
+                <a:cs typeface="Kumbh Sans" pitchFamily="2" charset="0"/>
+              </a:rPr>
+              <a:t>Adestria</a:t>
+            </a:r>
+          </a:p>
+          <a:p>
+            <a:pPr>
+              <a:lnSpc>
+                <a:spcPct val="200000"/>
+              </a:lnSpc>
+            </a:pPr>
+            <a:r>
+              <a:rPr lang="en-CA" sz="2800" dirty="0">
+                <a:latin typeface="Kumbh Sans" pitchFamily="2" charset="0"/>
+                <a:cs typeface="Kumbh Sans" pitchFamily="2" charset="0"/>
+              </a:rPr>
+              <a:t>    </a:t>
+            </a:r>
+            <a:r>
+              <a:rPr lang="en-CA" sz="2800" dirty="0">
                 <a:solidFill>
                   <a:schemeClr val="tx1">
                     <a:lumMod val="25000"/>
@@ -5189,21 +12049,7 @@
                 <a:latin typeface="Kumbh Sans" pitchFamily="2" charset="0"/>
                 <a:cs typeface="Kumbh Sans" pitchFamily="2" charset="0"/>
               </a:rPr>
-              <a:t>Kayla</a:t>
-            </a:r>
-          </a:p>
-          <a:p>
-            <a:pPr>
-              <a:lnSpc>
-                <a:spcPct val="200000"/>
-              </a:lnSpc>
-            </a:pPr>
-            <a:r>
-              <a:rPr lang="en-CA" sz="2800" dirty="0">
-                <a:latin typeface="Kumbh Sans" pitchFamily="2" charset="0"/>
-                <a:cs typeface="Kumbh Sans" pitchFamily="2" charset="0"/>
-              </a:rPr>
-              <a:t>Edin</a:t>
+              <a:t>    Kayla</a:t>
             </a:r>
           </a:p>
           <a:p>
@@ -5223,7 +12069,14 @@
                 <a:latin typeface="Kumbh Sans" pitchFamily="2" charset="0"/>
                 <a:cs typeface="Kumbh Sans" pitchFamily="2" charset="0"/>
               </a:rPr>
-              <a:t>Jake</a:t>
+              <a:t>    </a:t>
+            </a:r>
+            <a:r>
+              <a:rPr lang="en-CA" sz="2800" dirty="0">
+                <a:latin typeface="Kumbh Sans" pitchFamily="2" charset="0"/>
+                <a:cs typeface="Kumbh Sans" pitchFamily="2" charset="0"/>
+              </a:rPr>
+              <a:t>Edin</a:t>
             </a:r>
           </a:p>
           <a:p>
@@ -5243,7 +12096,47 @@
                 <a:latin typeface="Kumbh Sans" pitchFamily="2" charset="0"/>
                 <a:cs typeface="Kumbh Sans" pitchFamily="2" charset="0"/>
               </a:rPr>
-              <a:t>Steve</a:t>
+              <a:t>    Jake</a:t>
+            </a:r>
+          </a:p>
+          <a:p>
+            <a:pPr>
+              <a:lnSpc>
+                <a:spcPct val="200000"/>
+              </a:lnSpc>
+            </a:pPr>
+            <a:r>
+              <a:rPr lang="en-CA" sz="2800" dirty="0">
+                <a:solidFill>
+                  <a:schemeClr val="tx1">
+                    <a:lumMod val="25000"/>
+                    <a:lumOff val="75000"/>
+                  </a:schemeClr>
+                </a:solidFill>
+                <a:latin typeface="Kumbh Sans" pitchFamily="2" charset="0"/>
+                <a:cs typeface="Kumbh Sans" pitchFamily="2" charset="0"/>
+              </a:rPr>
+              <a:t>    Steve</a:t>
+            </a:r>
+          </a:p>
+          <a:p>
+            <a:pPr>
+              <a:lnSpc>
+                <a:spcPct val="200000"/>
+              </a:lnSpc>
+            </a:pPr>
+            <a:r>
+              <a:rPr lang="en-CA" sz="2800" dirty="0">
+                <a:solidFill>
+                  <a:schemeClr val="tx1">
+                    <a:lumMod val="25000"/>
+                    <a:lumOff val="75000"/>
+                  </a:schemeClr>
+                </a:solidFill>
+                <a:latin typeface="Kumbh Sans" pitchFamily="2" charset="0"/>
+                <a:cs typeface="Kumbh Sans" pitchFamily="2" charset="0"/>
+              </a:rPr>
+              <a:t>Project</a:t>
             </a:r>
           </a:p>
         </p:txBody>
@@ -5261,7 +12154,7 @@
 </p:sld>
 </file>
 
-<file path=ppt/slides/slide7.xml><?xml version="1.0" encoding="utf-8"?>
+<file path=ppt/slides/slide8.xml><?xml version="1.0" encoding="utf-8"?>
 <p:sld xmlns:a="http://schemas.openxmlformats.org/drawingml/2006/main" xmlns:r="http://schemas.openxmlformats.org/officeDocument/2006/relationships" xmlns:p="http://schemas.openxmlformats.org/presentationml/2006/main">
   <p:cSld>
     <p:spTree>
@@ -5286,41 +12179,6 @@
       </p:grpSpPr>
       <p:sp>
         <p:nvSpPr>
-          <p:cNvPr id="2" name="TextBox 1">
-            <a:extLst>
-              <a:ext uri="{FF2B5EF4-FFF2-40B4-BE49-F238E27FC236}">
-                <a16:creationId xmlns:a16="http://schemas.microsoft.com/office/drawing/2014/main" id="{5745D002-DA86-69FC-73CA-295EFFA512FA}"/>
-              </a:ext>
-            </a:extLst>
-          </p:cNvPr>
-          <p:cNvSpPr txBox="1"/>
-          <p:nvPr/>
-        </p:nvSpPr>
-        <p:spPr>
-          <a:xfrm>
-            <a:off x="4506686" y="2759529"/>
-            <a:ext cx="614464" cy="369332"/>
-          </a:xfrm>
-          <a:prstGeom prst="rect">
-            <a:avLst/>
-          </a:prstGeom>
-          <a:noFill/>
-        </p:spPr>
-        <p:txBody>
-          <a:bodyPr wrap="none" rtlCol="0">
-            <a:spAutoFit/>
-          </a:bodyPr>
-          <a:lstStyle/>
-          <a:p>
-            <a:r>
-              <a:rPr lang="en-CA" dirty="0"/>
-              <a:t>Jake</a:t>
-            </a:r>
-          </a:p>
-        </p:txBody>
-      </p:sp>
-      <p:sp>
-        <p:nvSpPr>
           <p:cNvPr id="4" name="TextBox 3">
             <a:extLst>
               <a:ext uri="{FF2B5EF4-FFF2-40B4-BE49-F238E27FC236}">
@@ -5334,7 +12192,7 @@
         <p:spPr>
           <a:xfrm>
             <a:off x="4407954" y="3267475"/>
-            <a:ext cx="3404137" cy="923330"/>
+            <a:ext cx="3695242" cy="923330"/>
           </a:xfrm>
           <a:prstGeom prst="rect">
             <a:avLst/>
@@ -5352,7 +12210,10 @@
               <a:buChar char="-"/>
             </a:pPr>
             <a:r>
-              <a:rPr lang="en-CA" dirty="0"/>
+              <a:rPr lang="en-CA" dirty="0">
+                <a:latin typeface="Kumbh Sans" pitchFamily="2" charset="0"/>
+                <a:cs typeface="Kumbh Sans" pitchFamily="2" charset="0"/>
+              </a:rPr>
               <a:t>Past experience</a:t>
             </a:r>
           </a:p>
@@ -5362,7 +12223,10 @@
               <a:buChar char="-"/>
             </a:pPr>
             <a:r>
-              <a:rPr lang="en-CA" dirty="0"/>
+              <a:rPr lang="en-CA" dirty="0">
+                <a:latin typeface="Kumbh Sans" pitchFamily="2" charset="0"/>
+                <a:cs typeface="Kumbh Sans" pitchFamily="2" charset="0"/>
+              </a:rPr>
               <a:t>Role</a:t>
             </a:r>
           </a:p>
@@ -5372,7 +12236,10 @@
               <a:buChar char="-"/>
             </a:pPr>
             <a:r>
-              <a:rPr lang="en-CA" dirty="0"/>
+              <a:rPr lang="en-CA" dirty="0">
+                <a:latin typeface="Kumbh Sans" pitchFamily="2" charset="0"/>
+                <a:cs typeface="Kumbh Sans" pitchFamily="2" charset="0"/>
+              </a:rPr>
               <a:t>Expectations to get out of this</a:t>
             </a:r>
           </a:p>
@@ -5380,10 +12247,10 @@
       </p:sp>
       <p:sp>
         <p:nvSpPr>
-          <p:cNvPr id="5" name="TextBox 4">
+          <p:cNvPr id="6" name="TextBox 5">
             <a:extLst>
               <a:ext uri="{FF2B5EF4-FFF2-40B4-BE49-F238E27FC236}">
-                <a16:creationId xmlns:a16="http://schemas.microsoft.com/office/drawing/2014/main" id="{3F61CD58-FAF9-4198-A045-50D19461C2D1}"/>
+                <a16:creationId xmlns:a16="http://schemas.microsoft.com/office/drawing/2014/main" id="{963CB6CA-9071-0ED2-6369-CCD22B4D6B1D}"/>
               </a:ext>
             </a:extLst>
           </p:cNvPr>
@@ -5392,8 +12259,8 @@
         </p:nvSpPr>
         <p:spPr>
           <a:xfrm>
-            <a:off x="480933" y="0"/>
-            <a:ext cx="1144865" cy="4273927"/>
+            <a:off x="440111" y="376344"/>
+            <a:ext cx="1588897" cy="5997476"/>
           </a:xfrm>
           <a:prstGeom prst="rect">
             <a:avLst/>
@@ -5413,6 +12280,27 @@
             </a:pPr>
             <a:r>
               <a:rPr lang="en-CA" sz="2800" dirty="0">
+                <a:latin typeface="Kumbh Sans" pitchFamily="2" charset="0"/>
+                <a:cs typeface="Kumbh Sans" pitchFamily="2" charset="0"/>
+              </a:rPr>
+              <a:t>Adestria</a:t>
+            </a:r>
+          </a:p>
+          <a:p>
+            <a:pPr>
+              <a:lnSpc>
+                <a:spcPct val="200000"/>
+              </a:lnSpc>
+            </a:pPr>
+            <a:r>
+              <a:rPr lang="en-CA" sz="2800" dirty="0">
+                <a:latin typeface="Kumbh Sans" pitchFamily="2" charset="0"/>
+                <a:cs typeface="Kumbh Sans" pitchFamily="2" charset="0"/>
+              </a:rPr>
+              <a:t>    </a:t>
+            </a:r>
+            <a:r>
+              <a:rPr lang="en-CA" sz="2800" dirty="0">
                 <a:solidFill>
                   <a:schemeClr val="tx1">
                     <a:lumMod val="25000"/>
@@ -5442,7 +12330,7 @@
                 <a:latin typeface="Kumbh Sans" pitchFamily="2" charset="0"/>
                 <a:cs typeface="Kumbh Sans" pitchFamily="2" charset="0"/>
               </a:rPr>
-              <a:t>Kayla</a:t>
+              <a:t>    Kayla</a:t>
             </a:r>
           </a:p>
           <a:p>
@@ -5462,7 +12350,7 @@
                 <a:latin typeface="Kumbh Sans" pitchFamily="2" charset="0"/>
                 <a:cs typeface="Kumbh Sans" pitchFamily="2" charset="0"/>
               </a:rPr>
-              <a:t>Edin</a:t>
+              <a:t>    Edin</a:t>
             </a:r>
           </a:p>
           <a:p>
@@ -5476,7 +12364,7 @@
                 <a:latin typeface="Kumbh Sans" pitchFamily="2" charset="0"/>
                 <a:cs typeface="Kumbh Sans" pitchFamily="2" charset="0"/>
               </a:rPr>
-              <a:t>Jake</a:t>
+              <a:t>    Jake</a:t>
             </a:r>
           </a:p>
           <a:p>
@@ -5496,7 +12384,27 @@
                 <a:latin typeface="Kumbh Sans" pitchFamily="2" charset="0"/>
                 <a:cs typeface="Kumbh Sans" pitchFamily="2" charset="0"/>
               </a:rPr>
-              <a:t>Steve</a:t>
+              <a:t>    Steve</a:t>
+            </a:r>
+          </a:p>
+          <a:p>
+            <a:pPr>
+              <a:lnSpc>
+                <a:spcPct val="200000"/>
+              </a:lnSpc>
+            </a:pPr>
+            <a:r>
+              <a:rPr lang="en-CA" sz="2800" dirty="0">
+                <a:solidFill>
+                  <a:schemeClr val="tx1">
+                    <a:lumMod val="25000"/>
+                    <a:lumOff val="75000"/>
+                  </a:schemeClr>
+                </a:solidFill>
+                <a:latin typeface="Kumbh Sans" pitchFamily="2" charset="0"/>
+                <a:cs typeface="Kumbh Sans" pitchFamily="2" charset="0"/>
+              </a:rPr>
+              <a:t>Project</a:t>
             </a:r>
           </a:p>
         </p:txBody>
@@ -5514,7 +12422,7 @@
 </p:sld>
 </file>
 
-<file path=ppt/slides/slide8.xml><?xml version="1.0" encoding="utf-8"?>
+<file path=ppt/slides/slide9.xml><?xml version="1.0" encoding="utf-8"?>
 <p:sld xmlns:a="http://schemas.openxmlformats.org/drawingml/2006/main" xmlns:r="http://schemas.openxmlformats.org/officeDocument/2006/relationships" xmlns:p="http://schemas.openxmlformats.org/presentationml/2006/main">
   <p:cSld>
     <p:spTree>
@@ -5537,129 +12445,6 @@
           <a:chExt cx="0" cy="0"/>
         </a:xfrm>
       </p:grpSpPr>
-      <p:sp>
-        <p:nvSpPr>
-          <p:cNvPr id="2" name="TextBox 1">
-            <a:extLst>
-              <a:ext uri="{FF2B5EF4-FFF2-40B4-BE49-F238E27FC236}">
-                <a16:creationId xmlns:a16="http://schemas.microsoft.com/office/drawing/2014/main" id="{28A7DA79-A174-410A-3A18-3A2891D7BA9C}"/>
-              </a:ext>
-            </a:extLst>
-          </p:cNvPr>
-          <p:cNvSpPr txBox="1"/>
-          <p:nvPr/>
-        </p:nvSpPr>
-        <p:spPr>
-          <a:xfrm>
-            <a:off x="480933" y="0"/>
-            <a:ext cx="1144865" cy="4273927"/>
-          </a:xfrm>
-          <a:prstGeom prst="rect">
-            <a:avLst/>
-          </a:prstGeom>
-          <a:noFill/>
-        </p:spPr>
-        <p:txBody>
-          <a:bodyPr wrap="none" rtlCol="0">
-            <a:spAutoFit/>
-          </a:bodyPr>
-          <a:lstStyle/>
-          <a:p>
-            <a:pPr>
-              <a:lnSpc>
-                <a:spcPct val="200000"/>
-              </a:lnSpc>
-            </a:pPr>
-            <a:r>
-              <a:rPr lang="en-CA" sz="2800" dirty="0">
-                <a:solidFill>
-                  <a:schemeClr val="tx1">
-                    <a:lumMod val="25000"/>
-                    <a:lumOff val="75000"/>
-                  </a:schemeClr>
-                </a:solidFill>
-                <a:latin typeface="Kumbh Sans" pitchFamily="2" charset="0"/>
-                <a:cs typeface="Kumbh Sans" pitchFamily="2" charset="0"/>
-              </a:rPr>
-              <a:t>Jack</a:t>
-            </a:r>
-          </a:p>
-          <a:p>
-            <a:pPr>
-              <a:lnSpc>
-                <a:spcPct val="200000"/>
-              </a:lnSpc>
-            </a:pPr>
-            <a:r>
-              <a:rPr lang="en-CA" sz="2800" dirty="0">
-                <a:solidFill>
-                  <a:schemeClr val="tx1">
-                    <a:lumMod val="25000"/>
-                    <a:lumOff val="75000"/>
-                  </a:schemeClr>
-                </a:solidFill>
-                <a:latin typeface="Kumbh Sans" pitchFamily="2" charset="0"/>
-                <a:cs typeface="Kumbh Sans" pitchFamily="2" charset="0"/>
-              </a:rPr>
-              <a:t>Kayla</a:t>
-            </a:r>
-          </a:p>
-          <a:p>
-            <a:pPr>
-              <a:lnSpc>
-                <a:spcPct val="200000"/>
-              </a:lnSpc>
-            </a:pPr>
-            <a:r>
-              <a:rPr lang="en-CA" sz="2800" dirty="0">
-                <a:solidFill>
-                  <a:schemeClr val="tx1">
-                    <a:lumMod val="25000"/>
-                    <a:lumOff val="75000"/>
-                  </a:schemeClr>
-                </a:solidFill>
-                <a:latin typeface="Kumbh Sans" pitchFamily="2" charset="0"/>
-                <a:cs typeface="Kumbh Sans" pitchFamily="2" charset="0"/>
-              </a:rPr>
-              <a:t>Edin</a:t>
-            </a:r>
-          </a:p>
-          <a:p>
-            <a:pPr>
-              <a:lnSpc>
-                <a:spcPct val="200000"/>
-              </a:lnSpc>
-            </a:pPr>
-            <a:r>
-              <a:rPr lang="en-CA" sz="2800" dirty="0">
-                <a:solidFill>
-                  <a:schemeClr val="tx1">
-                    <a:lumMod val="25000"/>
-                    <a:lumOff val="75000"/>
-                  </a:schemeClr>
-                </a:solidFill>
-                <a:latin typeface="Kumbh Sans" pitchFamily="2" charset="0"/>
-                <a:cs typeface="Kumbh Sans" pitchFamily="2" charset="0"/>
-              </a:rPr>
-              <a:t>Jake</a:t>
-            </a:r>
-          </a:p>
-          <a:p>
-            <a:pPr>
-              <a:lnSpc>
-                <a:spcPct val="200000"/>
-              </a:lnSpc>
-            </a:pPr>
-            <a:r>
-              <a:rPr lang="en-CA" sz="2800" dirty="0">
-                <a:latin typeface="Kumbh Sans" pitchFamily="2" charset="0"/>
-                <a:cs typeface="Kumbh Sans" pitchFamily="2" charset="0"/>
-              </a:rPr>
-              <a:t>Steve</a:t>
-            </a:r>
-          </a:p>
-        </p:txBody>
-      </p:sp>
       <p:sp>
         <p:nvSpPr>
           <p:cNvPr id="4" name="TextBox 3">
@@ -5728,48 +12513,12 @@
           </a:p>
         </p:txBody>
       </p:sp>
-    </p:spTree>
-    <p:extLst>
-      <p:ext uri="{BB962C8B-B14F-4D97-AF65-F5344CB8AC3E}">
-        <p14:creationId xmlns:p14="http://schemas.microsoft.com/office/powerpoint/2010/main" val="2049535269"/>
-      </p:ext>
-    </p:extLst>
-  </p:cSld>
-  <p:clrMapOvr>
-    <a:masterClrMapping/>
-  </p:clrMapOvr>
-</p:sld>
-</file>
-
-<file path=ppt/slides/slide9.xml><?xml version="1.0" encoding="utf-8"?>
-<p:sld xmlns:a="http://schemas.openxmlformats.org/drawingml/2006/main" xmlns:r="http://schemas.openxmlformats.org/officeDocument/2006/relationships" xmlns:p="http://schemas.openxmlformats.org/presentationml/2006/main">
-  <p:cSld>
-    <p:spTree>
-      <p:nvGrpSpPr>
-        <p:cNvPr id="1" name="">
-          <a:extLst>
-            <a:ext uri="{FF2B5EF4-FFF2-40B4-BE49-F238E27FC236}">
-              <a16:creationId xmlns:a16="http://schemas.microsoft.com/office/drawing/2014/main" id="{7031C921-2922-BE23-8C94-1233CD6D7FF7}"/>
-            </a:ext>
-          </a:extLst>
-        </p:cNvPr>
-        <p:cNvGrpSpPr/>
-        <p:nvPr/>
-      </p:nvGrpSpPr>
-      <p:grpSpPr>
-        <a:xfrm>
-          <a:off x="0" y="0"/>
-          <a:ext cx="0" cy="0"/>
-          <a:chOff x="0" y="0"/>
-          <a:chExt cx="0" cy="0"/>
-        </a:xfrm>
-      </p:grpSpPr>
       <p:sp>
         <p:nvSpPr>
-          <p:cNvPr id="2" name="TextBox 1">
+          <p:cNvPr id="5" name="TextBox 4">
             <a:extLst>
               <a:ext uri="{FF2B5EF4-FFF2-40B4-BE49-F238E27FC236}">
-                <a16:creationId xmlns:a16="http://schemas.microsoft.com/office/drawing/2014/main" id="{002E2CC7-570D-FDB3-3281-85D5D28B2E70}"/>
+                <a16:creationId xmlns:a16="http://schemas.microsoft.com/office/drawing/2014/main" id="{C0C4D05C-8AD1-4702-C50E-A96CC6F600F5}"/>
               </a:ext>
             </a:extLst>
           </p:cNvPr>
@@ -5778,8 +12527,8 @@
         </p:nvSpPr>
         <p:spPr>
           <a:xfrm>
-            <a:off x="4506686" y="2759529"/>
-            <a:ext cx="1441420" cy="369332"/>
+            <a:off x="440111" y="376344"/>
+            <a:ext cx="1588897" cy="5997476"/>
           </a:xfrm>
           <a:prstGeom prst="rect">
             <a:avLst/>
@@ -5792,9 +12541,151 @@
           </a:bodyPr>
           <a:lstStyle/>
           <a:p>
-            <a:r>
-              <a:rPr lang="en-CA" dirty="0"/>
-              <a:t>Client needs</a:t>
+            <a:pPr>
+              <a:lnSpc>
+                <a:spcPct val="200000"/>
+              </a:lnSpc>
+            </a:pPr>
+            <a:r>
+              <a:rPr lang="en-CA" sz="2800" dirty="0">
+                <a:latin typeface="Kumbh Sans" pitchFamily="2" charset="0"/>
+                <a:cs typeface="Kumbh Sans" pitchFamily="2" charset="0"/>
+              </a:rPr>
+              <a:t>Adestria</a:t>
+            </a:r>
+          </a:p>
+          <a:p>
+            <a:pPr>
+              <a:lnSpc>
+                <a:spcPct val="200000"/>
+              </a:lnSpc>
+            </a:pPr>
+            <a:r>
+              <a:rPr lang="en-CA" sz="2800" dirty="0">
+                <a:latin typeface="Kumbh Sans" pitchFamily="2" charset="0"/>
+                <a:cs typeface="Kumbh Sans" pitchFamily="2" charset="0"/>
+              </a:rPr>
+              <a:t>    </a:t>
+            </a:r>
+            <a:r>
+              <a:rPr lang="en-CA" sz="2800" dirty="0">
+                <a:solidFill>
+                  <a:schemeClr val="tx1">
+                    <a:lumMod val="25000"/>
+                    <a:lumOff val="75000"/>
+                  </a:schemeClr>
+                </a:solidFill>
+                <a:latin typeface="Kumbh Sans" pitchFamily="2" charset="0"/>
+                <a:cs typeface="Kumbh Sans" pitchFamily="2" charset="0"/>
+              </a:rPr>
+              <a:t>Jack</a:t>
+            </a:r>
+          </a:p>
+          <a:p>
+            <a:pPr>
+              <a:lnSpc>
+                <a:spcPct val="200000"/>
+              </a:lnSpc>
+            </a:pPr>
+            <a:r>
+              <a:rPr lang="en-CA" sz="2800" dirty="0">
+                <a:solidFill>
+                  <a:schemeClr val="tx1">
+                    <a:lumMod val="25000"/>
+                    <a:lumOff val="75000"/>
+                  </a:schemeClr>
+                </a:solidFill>
+                <a:latin typeface="Kumbh Sans" pitchFamily="2" charset="0"/>
+                <a:cs typeface="Kumbh Sans" pitchFamily="2" charset="0"/>
+              </a:rPr>
+              <a:t>    Kayla</a:t>
+            </a:r>
+          </a:p>
+          <a:p>
+            <a:pPr>
+              <a:lnSpc>
+                <a:spcPct val="200000"/>
+              </a:lnSpc>
+            </a:pPr>
+            <a:r>
+              <a:rPr lang="en-CA" sz="2800" dirty="0">
+                <a:solidFill>
+                  <a:schemeClr val="tx1">
+                    <a:lumMod val="25000"/>
+                    <a:lumOff val="75000"/>
+                  </a:schemeClr>
+                </a:solidFill>
+                <a:latin typeface="Kumbh Sans" pitchFamily="2" charset="0"/>
+                <a:cs typeface="Kumbh Sans" pitchFamily="2" charset="0"/>
+              </a:rPr>
+              <a:t>    Edin</a:t>
+            </a:r>
+          </a:p>
+          <a:p>
+            <a:pPr>
+              <a:lnSpc>
+                <a:spcPct val="200000"/>
+              </a:lnSpc>
+            </a:pPr>
+            <a:r>
+              <a:rPr lang="en-CA" sz="2800" dirty="0">
+                <a:solidFill>
+                  <a:schemeClr val="tx1">
+                    <a:lumMod val="25000"/>
+                    <a:lumOff val="75000"/>
+                  </a:schemeClr>
+                </a:solidFill>
+                <a:latin typeface="Kumbh Sans" pitchFamily="2" charset="0"/>
+                <a:cs typeface="Kumbh Sans" pitchFamily="2" charset="0"/>
+              </a:rPr>
+              <a:t>    Jake</a:t>
+            </a:r>
+          </a:p>
+          <a:p>
+            <a:pPr>
+              <a:lnSpc>
+                <a:spcPct val="200000"/>
+              </a:lnSpc>
+            </a:pPr>
+            <a:r>
+              <a:rPr lang="en-CA" sz="2800" dirty="0">
+                <a:solidFill>
+                  <a:schemeClr val="tx1">
+                    <a:lumMod val="25000"/>
+                    <a:lumOff val="75000"/>
+                  </a:schemeClr>
+                </a:solidFill>
+                <a:latin typeface="Kumbh Sans" pitchFamily="2" charset="0"/>
+                <a:cs typeface="Kumbh Sans" pitchFamily="2" charset="0"/>
+              </a:rPr>
+              <a:t>    </a:t>
+            </a:r>
+            <a:r>
+              <a:rPr lang="en-CA" sz="2800" dirty="0">
+                <a:latin typeface="Kumbh Sans" pitchFamily="2" charset="0"/>
+                <a:cs typeface="Kumbh Sans" pitchFamily="2" charset="0"/>
+              </a:rPr>
+              <a:t>Steve</a:t>
+            </a:r>
+          </a:p>
+          <a:p>
+            <a:pPr>
+              <a:lnSpc>
+                <a:spcPct val="200000"/>
+              </a:lnSpc>
+            </a:pPr>
+            <a:r>
+              <a:rPr lang="en-CA" sz="2800" dirty="0">
+                <a:solidFill>
+                  <a:schemeClr val="tx1">
+                    <a:lumMod val="25000"/>
+                    <a:lumOff val="75000"/>
+                  </a:schemeClr>
+                </a:solidFill>
+                <a:latin typeface="Kumbh Sans" pitchFamily="2" charset="0"/>
+                <a:cs typeface="Kumbh Sans" pitchFamily="2" charset="0"/>
+              </a:rPr>
+              <a:t>Project</a:t>
             </a:r>
           </a:p>
         </p:txBody>
@@ -5802,7 +12693,7 @@
     </p:spTree>
     <p:extLst>
       <p:ext uri="{BB962C8B-B14F-4D97-AF65-F5344CB8AC3E}">
-        <p14:creationId xmlns:p14="http://schemas.microsoft.com/office/powerpoint/2010/main" val="3444687766"/>
+        <p14:creationId xmlns:p14="http://schemas.microsoft.com/office/powerpoint/2010/main" val="2049535269"/>
       </p:ext>
     </p:extLst>
   </p:cSld>
@@ -6125,4 +13016,319 @@
     </a:ext>
   </a:extLst>
 </a:theme>
+</file>
+
+<file path=ppt/theme/theme2.xml><?xml version="1.0" encoding="utf-8"?>
+<a:theme xmlns:a="http://schemas.openxmlformats.org/drawingml/2006/main" name="Office Theme">
+  <a:themeElements>
+    <a:clrScheme name="Office">
+      <a:dk1>
+        <a:sysClr val="windowText" lastClr="000000"/>
+      </a:dk1>
+      <a:lt1>
+        <a:sysClr val="window" lastClr="FFFFFF"/>
+      </a:lt1>
+      <a:dk2>
+        <a:srgbClr val="0E2841"/>
+      </a:dk2>
+      <a:lt2>
+        <a:srgbClr val="E8E8E8"/>
+      </a:lt2>
+      <a:accent1>
+        <a:srgbClr val="156082"/>
+      </a:accent1>
+      <a:accent2>
+        <a:srgbClr val="E97132"/>
+      </a:accent2>
+      <a:accent3>
+        <a:srgbClr val="196B24"/>
+      </a:accent3>
+      <a:accent4>
+        <a:srgbClr val="0F9ED5"/>
+      </a:accent4>
+      <a:accent5>
+        <a:srgbClr val="A02B93"/>
+      </a:accent5>
+      <a:accent6>
+        <a:srgbClr val="4EA72E"/>
+      </a:accent6>
+      <a:hlink>
+        <a:srgbClr val="467886"/>
+      </a:hlink>
+      <a:folHlink>
+        <a:srgbClr val="96607D"/>
+      </a:folHlink>
+    </a:clrScheme>
+    <a:fontScheme name="Office">
+      <a:majorFont>
+        <a:latin typeface="Aptos Display" panose="02110004020202020204"/>
+        <a:ea typeface=""/>
+        <a:cs typeface=""/>
+        <a:font script="Jpan" typeface="游ゴシック Light"/>
+        <a:font script="Hang" typeface="맑은 고딕"/>
+        <a:font script="Hans" typeface="等线 Light"/>
+        <a:font script="Hant" typeface="新細明體"/>
+        <a:font script="Arab" typeface="Times New Roman"/>
+        <a:font script="Hebr" typeface="Times New Roman"/>
+        <a:font script="Thai" typeface="Angsana New"/>
+        <a:font script="Ethi" typeface="Nyala"/>
+        <a:font script="Beng" typeface="Vrinda"/>
+        <a:font script="Gujr" typeface="Shruti"/>
+        <a:font script="Khmr" typeface="MoolBoran"/>
+        <a:font script="Knda" typeface="Tunga"/>
+        <a:font script="Guru" typeface="Raavi"/>
+        <a:font script="Cans" typeface="Euphemia"/>
+        <a:font script="Cher" typeface="Plantagenet Cherokee"/>
+        <a:font script="Yiii" typeface="Microsoft Yi Baiti"/>
+        <a:font script="Tibt" typeface="Microsoft Himalaya"/>
+        <a:font script="Thaa" typeface="MV Boli"/>
+        <a:font script="Deva" typeface="Mangal"/>
+        <a:font script="Telu" typeface="Gautami"/>
+        <a:font script="Taml" typeface="Latha"/>
+        <a:font script="Syrc" typeface="Estrangelo Edessa"/>
+        <a:font script="Orya" typeface="Kalinga"/>
+        <a:font script="Mlym" typeface="Kartika"/>
+        <a:font script="Laoo" typeface="DokChampa"/>
+        <a:font script="Sinh" typeface="Iskoola Pota"/>
+        <a:font script="Mong" typeface="Mongolian Baiti"/>
+        <a:font script="Viet" typeface="Times New Roman"/>
+        <a:font script="Uigh" typeface="Microsoft Uighur"/>
+        <a:font script="Geor" typeface="Sylfaen"/>
+        <a:font script="Armn" typeface="Arial"/>
+        <a:font script="Bugi" typeface="Leelawadee UI"/>
+        <a:font script="Bopo" typeface="Microsoft JhengHei"/>
+        <a:font script="Java" typeface="Javanese Text"/>
+        <a:font script="Lisu" typeface="Segoe UI"/>
+        <a:font script="Mymr" typeface="Myanmar Text"/>
+        <a:font script="Nkoo" typeface="Ebrima"/>
+        <a:font script="Olck" typeface="Nirmala UI"/>
+        <a:font script="Osma" typeface="Ebrima"/>
+        <a:font script="Phag" typeface="Phagspa"/>
+        <a:font script="Syrn" typeface="Estrangelo Edessa"/>
+        <a:font script="Syrj" typeface="Estrangelo Edessa"/>
+        <a:font script="Syre" typeface="Estrangelo Edessa"/>
+        <a:font script="Sora" typeface="Nirmala UI"/>
+        <a:font script="Tale" typeface="Microsoft Tai Le"/>
+        <a:font script="Talu" typeface="Microsoft New Tai Lue"/>
+        <a:font script="Tfng" typeface="Ebrima"/>
+      </a:majorFont>
+      <a:minorFont>
+        <a:latin typeface="Aptos" panose="02110004020202020204"/>
+        <a:ea typeface=""/>
+        <a:cs typeface=""/>
+        <a:font script="Jpan" typeface="游ゴシック"/>
+        <a:font script="Hang" typeface="맑은 고딕"/>
+        <a:font script="Hans" typeface="等线"/>
+        <a:font script="Hant" typeface="新細明體"/>
+        <a:font script="Arab" typeface="Arial"/>
+        <a:font script="Hebr" typeface="Arial"/>
+        <a:font script="Thai" typeface="Cordia New"/>
+        <a:font script="Ethi" typeface="Nyala"/>
+        <a:font script="Beng" typeface="Vrinda"/>
+        <a:font script="Gujr" typeface="Shruti"/>
+        <a:font script="Khmr" typeface="DaunPenh"/>
+        <a:font script="Knda" typeface="Tunga"/>
+        <a:font script="Guru" typeface="Raavi"/>
+        <a:font script="Cans" typeface="Euphemia"/>
+        <a:font script="Cher" typeface="Plantagenet Cherokee"/>
+        <a:font script="Yiii" typeface="Microsoft Yi Baiti"/>
+        <a:font script="Tibt" typeface="Microsoft Himalaya"/>
+        <a:font script="Thaa" typeface="MV Boli"/>
+        <a:font script="Deva" typeface="Mangal"/>
+        <a:font script="Telu" typeface="Gautami"/>
+        <a:font script="Taml" typeface="Latha"/>
+        <a:font script="Syrc" typeface="Estrangelo Edessa"/>
+        <a:font script="Orya" typeface="Kalinga"/>
+        <a:font script="Mlym" typeface="Kartika"/>
+        <a:font script="Laoo" typeface="DokChampa"/>
+        <a:font script="Sinh" typeface="Iskoola Pota"/>
+        <a:font script="Mong" typeface="Mongolian Baiti"/>
+        <a:font script="Viet" typeface="Arial"/>
+        <a:font script="Uigh" typeface="Microsoft Uighur"/>
+        <a:font script="Geor" typeface="Sylfaen"/>
+        <a:font script="Armn" typeface="Arial"/>
+        <a:font script="Bugi" typeface="Leelawadee UI"/>
+        <a:font script="Bopo" typeface="Microsoft JhengHei"/>
+        <a:font script="Java" typeface="Javanese Text"/>
+        <a:font script="Lisu" typeface="Segoe UI"/>
+        <a:font script="Mymr" typeface="Myanmar Text"/>
+        <a:font script="Nkoo" typeface="Ebrima"/>
+        <a:font script="Olck" typeface="Nirmala UI"/>
+        <a:font script="Osma" typeface="Ebrima"/>
+        <a:font script="Phag" typeface="Phagspa"/>
+        <a:font script="Syrn" typeface="Estrangelo Edessa"/>
+        <a:font script="Syrj" typeface="Estrangelo Edessa"/>
+        <a:font script="Syre" typeface="Estrangelo Edessa"/>
+        <a:font script="Sora" typeface="Nirmala UI"/>
+        <a:font script="Tale" typeface="Microsoft Tai Le"/>
+        <a:font script="Talu" typeface="Microsoft New Tai Lue"/>
+        <a:font script="Tfng" typeface="Ebrima"/>
+      </a:minorFont>
+    </a:fontScheme>
+    <a:fmtScheme name="Office">
+      <a:fillStyleLst>
+        <a:solidFill>
+          <a:schemeClr val="phClr"/>
+        </a:solidFill>
+        <a:gradFill rotWithShape="1">
+          <a:gsLst>
+            <a:gs pos="0">
+              <a:schemeClr val="phClr">
+                <a:lumMod val="110000"/>
+                <a:satMod val="105000"/>
+                <a:tint val="67000"/>
+              </a:schemeClr>
+            </a:gs>
+            <a:gs pos="50000">
+              <a:schemeClr val="phClr">
+                <a:lumMod val="105000"/>
+                <a:satMod val="103000"/>
+                <a:tint val="73000"/>
+              </a:schemeClr>
+            </a:gs>
+            <a:gs pos="100000">
+              <a:schemeClr val="phClr">
+                <a:lumMod val="105000"/>
+                <a:satMod val="109000"/>
+                <a:tint val="81000"/>
+              </a:schemeClr>
+            </a:gs>
+          </a:gsLst>
+          <a:lin ang="5400000" scaled="0"/>
+        </a:gradFill>
+        <a:gradFill rotWithShape="1">
+          <a:gsLst>
+            <a:gs pos="0">
+              <a:schemeClr val="phClr">
+                <a:satMod val="103000"/>
+                <a:lumMod val="102000"/>
+                <a:tint val="94000"/>
+              </a:schemeClr>
+            </a:gs>
+            <a:gs pos="50000">
+              <a:schemeClr val="phClr">
+                <a:satMod val="110000"/>
+                <a:lumMod val="100000"/>
+                <a:shade val="100000"/>
+              </a:schemeClr>
+            </a:gs>
+            <a:gs pos="100000">
+              <a:schemeClr val="phClr">
+                <a:lumMod val="99000"/>
+                <a:satMod val="120000"/>
+                <a:shade val="78000"/>
+              </a:schemeClr>
+            </a:gs>
+          </a:gsLst>
+          <a:lin ang="5400000" scaled="0"/>
+        </a:gradFill>
+      </a:fillStyleLst>
+      <a:lnStyleLst>
+        <a:ln w="12700" cap="flat" cmpd="sng" algn="ctr">
+          <a:solidFill>
+            <a:schemeClr val="phClr"/>
+          </a:solidFill>
+          <a:prstDash val="solid"/>
+          <a:miter lim="800000"/>
+        </a:ln>
+        <a:ln w="19050" cap="flat" cmpd="sng" algn="ctr">
+          <a:solidFill>
+            <a:schemeClr val="phClr"/>
+          </a:solidFill>
+          <a:prstDash val="solid"/>
+          <a:miter lim="800000"/>
+        </a:ln>
+        <a:ln w="25400" cap="flat" cmpd="sng" algn="ctr">
+          <a:solidFill>
+            <a:schemeClr val="phClr"/>
+          </a:solidFill>
+          <a:prstDash val="solid"/>
+          <a:miter lim="800000"/>
+        </a:ln>
+      </a:lnStyleLst>
+      <a:effectStyleLst>
+        <a:effectStyle>
+          <a:effectLst/>
+        </a:effectStyle>
+        <a:effectStyle>
+          <a:effectLst/>
+        </a:effectStyle>
+        <a:effectStyle>
+          <a:effectLst>
+            <a:outerShdw blurRad="57150" dist="19050" dir="5400000" algn="ctr" rotWithShape="0">
+              <a:srgbClr val="000000">
+                <a:alpha val="63000"/>
+              </a:srgbClr>
+            </a:outerShdw>
+          </a:effectLst>
+        </a:effectStyle>
+      </a:effectStyleLst>
+      <a:bgFillStyleLst>
+        <a:solidFill>
+          <a:schemeClr val="phClr"/>
+        </a:solidFill>
+        <a:solidFill>
+          <a:schemeClr val="phClr">
+            <a:tint val="95000"/>
+            <a:satMod val="170000"/>
+          </a:schemeClr>
+        </a:solidFill>
+        <a:gradFill rotWithShape="1">
+          <a:gsLst>
+            <a:gs pos="0">
+              <a:schemeClr val="phClr">
+                <a:tint val="93000"/>
+                <a:satMod val="150000"/>
+                <a:shade val="98000"/>
+                <a:lumMod val="102000"/>
+              </a:schemeClr>
+            </a:gs>
+            <a:gs pos="50000">
+              <a:schemeClr val="phClr">
+                <a:tint val="98000"/>
+                <a:satMod val="130000"/>
+                <a:shade val="90000"/>
+                <a:lumMod val="103000"/>
+              </a:schemeClr>
+            </a:gs>
+            <a:gs pos="100000">
+              <a:schemeClr val="phClr">
+                <a:shade val="63000"/>
+                <a:satMod val="120000"/>
+              </a:schemeClr>
+            </a:gs>
+          </a:gsLst>
+          <a:lin ang="5400000" scaled="0"/>
+        </a:gradFill>
+      </a:bgFillStyleLst>
+    </a:fmtScheme>
+  </a:themeElements>
+  <a:objectDefaults>
+    <a:lnDef>
+      <a:spPr/>
+      <a:bodyPr/>
+      <a:lstStyle/>
+      <a:style>
+        <a:lnRef idx="2">
+          <a:schemeClr val="accent1"/>
+        </a:lnRef>
+        <a:fillRef idx="0">
+          <a:schemeClr val="accent1"/>
+        </a:fillRef>
+        <a:effectRef idx="1">
+          <a:schemeClr val="accent1"/>
+        </a:effectRef>
+        <a:fontRef idx="minor">
+          <a:schemeClr val="tx1"/>
+        </a:fontRef>
+      </a:style>
+    </a:lnDef>
+  </a:objectDefaults>
+  <a:extraClrSchemeLst/>
+  <a:extLst>
+    <a:ext uri="{05A4C25C-085E-4340-85A3-A5531E510DB2}">
+      <thm15:themeFamily xmlns:thm15="http://schemas.microsoft.com/office/thememl/2012/main" name="Office Theme" id="{2E142A2C-CD16-42D6-873A-C26D2A0506FA}" vid="{1BDDFF52-6CD6-40A5-AB3C-68EB2F1E4D0A}"/>
+    </a:ext>
+  </a:extLst>
+</a:theme>
 </file>
--- a/Deliverables/Presentation1.pptx
+++ b/Deliverables/Presentation1.pptx
@@ -133,7 +133,7 @@
 <file path=ppt/revisionInfo.xml><?xml version="1.0" encoding="utf-8"?>
 <p1510:revInfo xmlns:a="http://schemas.openxmlformats.org/drawingml/2006/main" xmlns:r="http://schemas.openxmlformats.org/officeDocument/2006/relationships" xmlns:p1510="http://schemas.microsoft.com/office/powerpoint/2015/10/main">
   <p1510:revLst>
-    <p1510:client id="{EADFFEA0-CC63-45EF-97E4-5A80CDB68182}" v="1242" dt="2026-09-16T13:07:37.451"/>
+    <p1510:client id="{EADFFEA0-CC63-45EF-97E4-5A80CDB68182}" v="1612" dt="2026-09-16T15:22:15.054"/>
   </p1510:revLst>
 </p1510:revInfo>
 </file>
@@ -143,18 +143,18 @@
   <pc:docChgLst>
     <pc:chgData name="Steve Mutrux" userId="4fa98d0c-dc66-4728-b09b-a88e22e95094" providerId="ADAL" clId="{421BD283-33D8-4C6C-821F-71755E863FA2}"/>
     <pc:docChg chg="undo custSel addSld delSld modSld sldOrd">
-      <pc:chgData name="Steve Mutrux" userId="4fa98d0c-dc66-4728-b09b-a88e22e95094" providerId="ADAL" clId="{421BD283-33D8-4C6C-821F-71755E863FA2}" dt="2026-09-16T13:08:23.999" v="4176" actId="1036"/>
+      <pc:chgData name="Steve Mutrux" userId="4fa98d0c-dc66-4728-b09b-a88e22e95094" providerId="ADAL" clId="{421BD283-33D8-4C6C-821F-71755E863FA2}" dt="2026-09-16T15:22:15.053" v="4690"/>
       <pc:docMkLst>
         <pc:docMk/>
       </pc:docMkLst>
-      <pc:sldChg chg="addSp modSp mod">
-        <pc:chgData name="Steve Mutrux" userId="4fa98d0c-dc66-4728-b09b-a88e22e95094" providerId="ADAL" clId="{421BD283-33D8-4C6C-821F-71755E863FA2}" dt="2026-09-16T00:47:37.043" v="924" actId="2711"/>
+      <pc:sldChg chg="addSp modSp mod modAnim">
+        <pc:chgData name="Steve Mutrux" userId="4fa98d0c-dc66-4728-b09b-a88e22e95094" providerId="ADAL" clId="{421BD283-33D8-4C6C-821F-71755E863FA2}" dt="2026-09-16T14:43:20.241" v="4217"/>
         <pc:sldMkLst>
           <pc:docMk/>
           <pc:sldMk cId="1072592071" sldId="256"/>
         </pc:sldMkLst>
         <pc:spChg chg="add mod">
-          <ac:chgData name="Steve Mutrux" userId="4fa98d0c-dc66-4728-b09b-a88e22e95094" providerId="ADAL" clId="{421BD283-33D8-4C6C-821F-71755E863FA2}" dt="2026-09-16T00:47:37.043" v="924" actId="2711"/>
+          <ac:chgData name="Steve Mutrux" userId="4fa98d0c-dc66-4728-b09b-a88e22e95094" providerId="ADAL" clId="{421BD283-33D8-4C6C-821F-71755E863FA2}" dt="2026-09-16T14:43:05.584" v="4216" actId="1076"/>
           <ac:spMkLst>
             <pc:docMk/>
             <pc:sldMk cId="1072592071" sldId="256"/>
@@ -162,7 +162,7 @@
           </ac:spMkLst>
         </pc:spChg>
         <pc:spChg chg="add mod">
-          <ac:chgData name="Steve Mutrux" userId="4fa98d0c-dc66-4728-b09b-a88e22e95094" providerId="ADAL" clId="{421BD283-33D8-4C6C-821F-71755E863FA2}" dt="2026-09-16T00:47:37.043" v="924" actId="2711"/>
+          <ac:chgData name="Steve Mutrux" userId="4fa98d0c-dc66-4728-b09b-a88e22e95094" providerId="ADAL" clId="{421BD283-33D8-4C6C-821F-71755E863FA2}" dt="2026-09-16T14:42:47.115" v="4213" actId="1076"/>
           <ac:spMkLst>
             <pc:docMk/>
             <pc:sldMk cId="1072592071" sldId="256"/>
@@ -170,7 +170,7 @@
           </ac:spMkLst>
         </pc:spChg>
         <pc:spChg chg="add mod">
-          <ac:chgData name="Steve Mutrux" userId="4fa98d0c-dc66-4728-b09b-a88e22e95094" providerId="ADAL" clId="{421BD283-33D8-4C6C-821F-71755E863FA2}" dt="2026-09-16T00:47:37.043" v="924" actId="2711"/>
+          <ac:chgData name="Steve Mutrux" userId="4fa98d0c-dc66-4728-b09b-a88e22e95094" providerId="ADAL" clId="{421BD283-33D8-4C6C-821F-71755E863FA2}" dt="2026-09-16T14:42:59.454" v="4215" actId="1076"/>
           <ac:spMkLst>
             <pc:docMk/>
             <pc:sldMk cId="1072592071" sldId="256"/>
@@ -503,8 +503,8 @@
           </ac:spMkLst>
         </pc:spChg>
       </pc:sldChg>
-      <pc:sldChg chg="addSp delSp modSp add mod ord modAnim">
-        <pc:chgData name="Steve Mutrux" userId="4fa98d0c-dc66-4728-b09b-a88e22e95094" providerId="ADAL" clId="{421BD283-33D8-4C6C-821F-71755E863FA2}" dt="2026-09-16T12:36:19.539" v="3839" actId="167"/>
+      <pc:sldChg chg="addSp delSp modSp add mod ord modTransition modAnim">
+        <pc:chgData name="Steve Mutrux" userId="4fa98d0c-dc66-4728-b09b-a88e22e95094" providerId="ADAL" clId="{421BD283-33D8-4C6C-821F-71755E863FA2}" dt="2026-09-16T15:22:15.053" v="4690"/>
         <pc:sldMkLst>
           <pc:docMk/>
           <pc:sldMk cId="3444687766" sldId="260"/>
@@ -515,6 +515,22 @@
             <pc:docMk/>
             <pc:sldMk cId="3444687766" sldId="260"/>
             <ac:spMk id="2" creationId="{002E2CC7-570D-FDB3-3281-85D5D28B2E70}"/>
+          </ac:spMkLst>
+        </pc:spChg>
+        <pc:spChg chg="add mod">
+          <ac:chgData name="Steve Mutrux" userId="4fa98d0c-dc66-4728-b09b-a88e22e95094" providerId="ADAL" clId="{421BD283-33D8-4C6C-821F-71755E863FA2}" dt="2026-09-16T15:08:22.939" v="4538"/>
+          <ac:spMkLst>
+            <pc:docMk/>
+            <pc:sldMk cId="3444687766" sldId="260"/>
+            <ac:spMk id="2" creationId="{691C4877-3DAD-6CAA-ED51-1E15F5891382}"/>
+          </ac:spMkLst>
+        </pc:spChg>
+        <pc:spChg chg="add mod">
+          <ac:chgData name="Steve Mutrux" userId="4fa98d0c-dc66-4728-b09b-a88e22e95094" providerId="ADAL" clId="{421BD283-33D8-4C6C-821F-71755E863FA2}" dt="2026-09-16T15:16:53.093" v="4684" actId="20577"/>
+          <ac:spMkLst>
+            <pc:docMk/>
+            <pc:sldMk cId="3444687766" sldId="260"/>
+            <ac:spMk id="3" creationId="{5F97503A-9C72-47A2-2CA8-09144AD4223D}"/>
           </ac:spMkLst>
         </pc:spChg>
         <pc:spChg chg="mod">
@@ -531,6 +547,14 @@
             <pc:docMk/>
             <pc:sldMk cId="3444687766" sldId="260"/>
             <ac:spMk id="4" creationId="{42765858-AB49-C69A-CA41-8F00663B3404}"/>
+          </ac:spMkLst>
+        </pc:spChg>
+        <pc:spChg chg="add mod">
+          <ac:chgData name="Steve Mutrux" userId="4fa98d0c-dc66-4728-b09b-a88e22e95094" providerId="ADAL" clId="{421BD283-33D8-4C6C-821F-71755E863FA2}" dt="2026-09-16T15:11:28.446" v="4575" actId="20577"/>
+          <ac:spMkLst>
+            <pc:docMk/>
+            <pc:sldMk cId="3444687766" sldId="260"/>
+            <ac:spMk id="5" creationId="{E0D86D48-4A11-51EE-D37F-9B0D8E07F58B}"/>
           </ac:spMkLst>
         </pc:spChg>
         <pc:spChg chg="mod">
@@ -670,8 +694,8 @@
           </ac:grpSpMkLst>
         </pc:grpChg>
       </pc:sldChg>
-      <pc:sldChg chg="addSp delSp modSp add mod addAnim delAnim modAnim">
-        <pc:chgData name="Steve Mutrux" userId="4fa98d0c-dc66-4728-b09b-a88e22e95094" providerId="ADAL" clId="{421BD283-33D8-4C6C-821F-71755E863FA2}" dt="2026-09-16T12:52:14.028" v="4053" actId="166"/>
+      <pc:sldChg chg="addSp delSp modSp add mod modTransition addAnim delAnim modAnim">
+        <pc:chgData name="Steve Mutrux" userId="4fa98d0c-dc66-4728-b09b-a88e22e95094" providerId="ADAL" clId="{421BD283-33D8-4C6C-821F-71755E863FA2}" dt="2026-09-16T15:19:18.724" v="4686"/>
         <pc:sldMkLst>
           <pc:docMk/>
           <pc:sldMk cId="4190029259" sldId="261"/>
@@ -1754,8 +1778,8 @@
           </ac:spMkLst>
         </pc:spChg>
       </pc:sldChg>
-      <pc:sldChg chg="addSp delSp modSp add mod ord modAnim">
-        <pc:chgData name="Steve Mutrux" userId="4fa98d0c-dc66-4728-b09b-a88e22e95094" providerId="ADAL" clId="{421BD283-33D8-4C6C-821F-71755E863FA2}" dt="2026-09-16T12:38:37.651" v="3859"/>
+      <pc:sldChg chg="addSp delSp modSp add mod ord modTransition addAnim delAnim modAnim">
+        <pc:chgData name="Steve Mutrux" userId="4fa98d0c-dc66-4728-b09b-a88e22e95094" providerId="ADAL" clId="{421BD283-33D8-4C6C-821F-71755E863FA2}" dt="2026-09-16T15:12:57.325" v="4601" actId="20577"/>
         <pc:sldMkLst>
           <pc:docMk/>
           <pc:sldMk cId="1194673410" sldId="272"/>
@@ -1816,6 +1840,14 @@
             <ac:spMk id="8" creationId="{6D7F7FB9-948B-2F04-F5F0-3961BF3B13D4}"/>
           </ac:spMkLst>
         </pc:spChg>
+        <pc:spChg chg="add mod">
+          <ac:chgData name="Steve Mutrux" userId="4fa98d0c-dc66-4728-b09b-a88e22e95094" providerId="ADAL" clId="{421BD283-33D8-4C6C-821F-71755E863FA2}" dt="2026-09-16T15:12:57.325" v="4601" actId="20577"/>
+          <ac:spMkLst>
+            <pc:docMk/>
+            <pc:sldMk cId="1194673410" sldId="272"/>
+            <ac:spMk id="8" creationId="{AED53C7F-599F-FBA7-12D5-0CEFFBEE13B0}"/>
+          </ac:spMkLst>
+        </pc:spChg>
         <pc:spChg chg="mod">
           <ac:chgData name="Steve Mutrux" userId="4fa98d0c-dc66-4728-b09b-a88e22e95094" providerId="ADAL" clId="{421BD283-33D8-4C6C-821F-71755E863FA2}" dt="2026-09-16T12:37:14.742" v="3840"/>
           <ac:spMkLst>
@@ -1854,6 +1886,14 @@
             <pc:docMk/>
             <pc:sldMk cId="1194673410" sldId="272"/>
             <ac:spMk id="13" creationId="{1340E59F-A77C-0355-6B43-C13F8528C998}"/>
+          </ac:spMkLst>
+        </pc:spChg>
+        <pc:spChg chg="add mod">
+          <ac:chgData name="Steve Mutrux" userId="4fa98d0c-dc66-4728-b09b-a88e22e95094" providerId="ADAL" clId="{421BD283-33D8-4C6C-821F-71755E863FA2}" dt="2026-09-16T15:09:40.546" v="4562" actId="1076"/>
+          <ac:spMkLst>
+            <pc:docMk/>
+            <pc:sldMk cId="1194673410" sldId="272"/>
+            <ac:spMk id="14" creationId="{3DAEF85A-079C-3F9A-92CF-835B7D0DC7BD}"/>
           </ac:spMkLst>
         </pc:spChg>
         <pc:grpChg chg="add mod">
@@ -2088,7 +2128,7 @@
         </pc:grpChg>
       </pc:sldChg>
       <pc:sldChg chg="addSp delSp modSp add mod addAnim delAnim modAnim modNotesTx">
-        <pc:chgData name="Steve Mutrux" userId="4fa98d0c-dc66-4728-b09b-a88e22e95094" providerId="ADAL" clId="{421BD283-33D8-4C6C-821F-71755E863FA2}" dt="2026-09-16T12:27:36.526" v="3714"/>
+        <pc:chgData name="Steve Mutrux" userId="4fa98d0c-dc66-4728-b09b-a88e22e95094" providerId="ADAL" clId="{421BD283-33D8-4C6C-821F-71755E863FA2}" dt="2026-09-16T15:07:12.291" v="4537"/>
         <pc:sldMkLst>
           <pc:docMk/>
           <pc:sldMk cId="1282376480" sldId="275"/>
@@ -2149,12 +2189,28 @@
             <ac:spMk id="11" creationId="{86CD9824-3652-9E7A-9200-E55A24490667}"/>
           </ac:spMkLst>
         </pc:spChg>
+        <pc:spChg chg="add del mod">
+          <ac:chgData name="Steve Mutrux" userId="4fa98d0c-dc66-4728-b09b-a88e22e95094" providerId="ADAL" clId="{421BD283-33D8-4C6C-821F-71755E863FA2}" dt="2026-09-16T14:46:44.967" v="4291" actId="478"/>
+          <ac:spMkLst>
+            <pc:docMk/>
+            <pc:sldMk cId="1282376480" sldId="275"/>
+            <ac:spMk id="12" creationId="{7365D203-7450-4585-FA21-1D2F0D181061}"/>
+          </ac:spMkLst>
+        </pc:spChg>
         <pc:spChg chg="add del">
           <ac:chgData name="Steve Mutrux" userId="4fa98d0c-dc66-4728-b09b-a88e22e95094" providerId="ADAL" clId="{421BD283-33D8-4C6C-821F-71755E863FA2}" dt="2026-09-16T12:00:20.735" v="3516" actId="22"/>
           <ac:spMkLst>
             <pc:docMk/>
             <pc:sldMk cId="1282376480" sldId="275"/>
             <ac:spMk id="13" creationId="{2990AC67-FCBD-4F2C-5BAF-E46B8946B354}"/>
+          </ac:spMkLst>
+        </pc:spChg>
+        <pc:spChg chg="add mod">
+          <ac:chgData name="Steve Mutrux" userId="4fa98d0c-dc66-4728-b09b-a88e22e95094" providerId="ADAL" clId="{421BD283-33D8-4C6C-821F-71755E863FA2}" dt="2026-09-16T14:53:42.755" v="4325" actId="313"/>
+          <ac:spMkLst>
+            <pc:docMk/>
+            <pc:sldMk cId="1282376480" sldId="275"/>
+            <ac:spMk id="13" creationId="{71406E84-B673-8720-C77A-5F79E5792EEE}"/>
           </ac:spMkLst>
         </pc:spChg>
         <pc:spChg chg="add mod ord">
@@ -2862,6 +2918,90 @@
 </p:notes>
 </file>
 
+<file path=ppt/notesSlides/notesSlide10.xml><?xml version="1.0" encoding="utf-8"?>
+<p:notes xmlns:a="http://schemas.openxmlformats.org/drawingml/2006/main" xmlns:r="http://schemas.openxmlformats.org/officeDocument/2006/relationships" xmlns:p="http://schemas.openxmlformats.org/presentationml/2006/main">
+  <p:cSld>
+    <p:spTree>
+      <p:nvGrpSpPr>
+        <p:cNvPr id="1" name=""/>
+        <p:cNvGrpSpPr/>
+        <p:nvPr/>
+      </p:nvGrpSpPr>
+      <p:grpSpPr>
+        <a:xfrm>
+          <a:off x="0" y="0"/>
+          <a:ext cx="0" cy="0"/>
+          <a:chOff x="0" y="0"/>
+          <a:chExt cx="0" cy="0"/>
+        </a:xfrm>
+      </p:grpSpPr>
+      <p:sp>
+        <p:nvSpPr>
+          <p:cNvPr id="2" name="Slide Image Placeholder 1"/>
+          <p:cNvSpPr>
+            <a:spLocks noGrp="1" noRot="1" noChangeAspect="1"/>
+          </p:cNvSpPr>
+          <p:nvPr>
+            <p:ph type="sldImg"/>
+          </p:nvPr>
+        </p:nvSpPr>
+        <p:spPr/>
+      </p:sp>
+      <p:sp>
+        <p:nvSpPr>
+          <p:cNvPr id="3" name="Notes Placeholder 2"/>
+          <p:cNvSpPr>
+            <a:spLocks noGrp="1"/>
+          </p:cNvSpPr>
+          <p:nvPr>
+            <p:ph type="body" idx="1"/>
+          </p:nvPr>
+        </p:nvSpPr>
+        <p:spPr/>
+        <p:txBody>
+          <a:bodyPr/>
+          <a:lstStyle/>
+          <a:p>
+            <a:endParaRPr lang="en-CA" dirty="0"/>
+          </a:p>
+        </p:txBody>
+      </p:sp>
+      <p:sp>
+        <p:nvSpPr>
+          <p:cNvPr id="4" name="Slide Number Placeholder 3"/>
+          <p:cNvSpPr>
+            <a:spLocks noGrp="1"/>
+          </p:cNvSpPr>
+          <p:nvPr>
+            <p:ph type="sldNum" sz="quarter" idx="5"/>
+          </p:nvPr>
+        </p:nvSpPr>
+        <p:spPr/>
+        <p:txBody>
+          <a:bodyPr/>
+          <a:lstStyle/>
+          <a:p>
+            <a:fld id="{47B22D95-B55A-456E-B882-ED519B72F1D2}" type="slidenum">
+              <a:rPr lang="en-CA" smtClean="0"/>
+              <a:t>12</a:t>
+            </a:fld>
+            <a:endParaRPr lang="en-CA"/>
+          </a:p>
+        </p:txBody>
+      </p:sp>
+    </p:spTree>
+    <p:extLst>
+      <p:ext uri="{BB962C8B-B14F-4D97-AF65-F5344CB8AC3E}">
+        <p14:creationId xmlns:p14="http://schemas.microsoft.com/office/powerpoint/2010/main" val="2985978308"/>
+      </p:ext>
+    </p:extLst>
+  </p:cSld>
+  <p:clrMapOvr>
+    <a:masterClrMapping/>
+  </p:clrMapOvr>
+</p:notes>
+</file>
+
 <file path=ppt/notesSlides/notesSlide2.xml><?xml version="1.0" encoding="utf-8"?>
 <p:notes xmlns:a="http://schemas.openxmlformats.org/drawingml/2006/main" xmlns:r="http://schemas.openxmlformats.org/officeDocument/2006/relationships" xmlns:p="http://schemas.openxmlformats.org/presentationml/2006/main">
   <p:cSld>
@@ -3463,8 +3603,13 @@
           <a:p>
             <a:r>
               <a:rPr lang="en-CA" dirty="0"/>
-              <a:t>Current situation/needs</a:t>
+              <a:t>Current situation/</a:t>
             </a:r>
+            <a:r>
+              <a:rPr lang="en-CA" dirty="0" err="1"/>
+              <a:t>needsc</a:t>
+            </a:r>
+            <a:endParaRPr lang="en-CA" dirty="0"/>
           </a:p>
         </p:txBody>
       </p:sp>
@@ -3569,7 +3714,7 @@
           <a:p>
             <a:fld id="{47B22D95-B55A-456E-B882-ED519B72F1D2}" type="slidenum">
               <a:rPr lang="en-CA" smtClean="0"/>
-              <a:t>12</a:t>
+              <a:t>10</a:t>
             </a:fld>
             <a:endParaRPr lang="en-CA"/>
           </a:p>
@@ -3578,7 +3723,91 @@
     </p:spTree>
     <p:extLst>
       <p:ext uri="{BB962C8B-B14F-4D97-AF65-F5344CB8AC3E}">
-        <p14:creationId xmlns:p14="http://schemas.microsoft.com/office/powerpoint/2010/main" val="2985978308"/>
+        <p14:creationId xmlns:p14="http://schemas.microsoft.com/office/powerpoint/2010/main" val="1989583698"/>
+      </p:ext>
+    </p:extLst>
+  </p:cSld>
+  <p:clrMapOvr>
+    <a:masterClrMapping/>
+  </p:clrMapOvr>
+</p:notes>
+</file>
+
+<file path=ppt/notesSlides/notesSlide9.xml><?xml version="1.0" encoding="utf-8"?>
+<p:notes xmlns:a="http://schemas.openxmlformats.org/drawingml/2006/main" xmlns:r="http://schemas.openxmlformats.org/officeDocument/2006/relationships" xmlns:p="http://schemas.openxmlformats.org/presentationml/2006/main">
+  <p:cSld>
+    <p:spTree>
+      <p:nvGrpSpPr>
+        <p:cNvPr id="1" name=""/>
+        <p:cNvGrpSpPr/>
+        <p:nvPr/>
+      </p:nvGrpSpPr>
+      <p:grpSpPr>
+        <a:xfrm>
+          <a:off x="0" y="0"/>
+          <a:ext cx="0" cy="0"/>
+          <a:chOff x="0" y="0"/>
+          <a:chExt cx="0" cy="0"/>
+        </a:xfrm>
+      </p:grpSpPr>
+      <p:sp>
+        <p:nvSpPr>
+          <p:cNvPr id="2" name="Slide Image Placeholder 1"/>
+          <p:cNvSpPr>
+            <a:spLocks noGrp="1" noRot="1" noChangeAspect="1"/>
+          </p:cNvSpPr>
+          <p:nvPr>
+            <p:ph type="sldImg"/>
+          </p:nvPr>
+        </p:nvSpPr>
+        <p:spPr/>
+      </p:sp>
+      <p:sp>
+        <p:nvSpPr>
+          <p:cNvPr id="3" name="Notes Placeholder 2"/>
+          <p:cNvSpPr>
+            <a:spLocks noGrp="1"/>
+          </p:cNvSpPr>
+          <p:nvPr>
+            <p:ph type="body" idx="1"/>
+          </p:nvPr>
+        </p:nvSpPr>
+        <p:spPr/>
+        <p:txBody>
+          <a:bodyPr/>
+          <a:lstStyle/>
+          <a:p>
+            <a:endParaRPr lang="en-CA" dirty="0"/>
+          </a:p>
+        </p:txBody>
+      </p:sp>
+      <p:sp>
+        <p:nvSpPr>
+          <p:cNvPr id="4" name="Slide Number Placeholder 3"/>
+          <p:cNvSpPr>
+            <a:spLocks noGrp="1"/>
+          </p:cNvSpPr>
+          <p:nvPr>
+            <p:ph type="sldNum" sz="quarter" idx="5"/>
+          </p:nvPr>
+        </p:nvSpPr>
+        <p:spPr/>
+        <p:txBody>
+          <a:bodyPr/>
+          <a:lstStyle/>
+          <a:p>
+            <a:fld id="{47B22D95-B55A-456E-B882-ED519B72F1D2}" type="slidenum">
+              <a:rPr lang="en-CA" smtClean="0"/>
+              <a:t>11</a:t>
+            </a:fld>
+            <a:endParaRPr lang="en-CA"/>
+          </a:p>
+        </p:txBody>
+      </p:sp>
+    </p:spTree>
+    <p:extLst>
+      <p:ext uri="{BB962C8B-B14F-4D97-AF65-F5344CB8AC3E}">
+        <p14:creationId xmlns:p14="http://schemas.microsoft.com/office/powerpoint/2010/main" val="1286061373"/>
       </p:ext>
     </p:extLst>
   </p:cSld>
@@ -6837,7 +7066,7 @@
         </p:nvSpPr>
         <p:spPr>
           <a:xfrm>
-            <a:off x="4694464" y="1240972"/>
+            <a:off x="4718858" y="5023125"/>
             <a:ext cx="2754280" cy="369332"/>
           </a:xfrm>
           <a:prstGeom prst="rect">
@@ -6851,6 +7080,7 @@
           </a:bodyPr>
           <a:lstStyle/>
           <a:p>
+            <a:pPr algn="ctr"/>
             <a:r>
               <a:rPr lang="en-CA" dirty="0">
                 <a:latin typeface="Kumbh Sans" pitchFamily="2" charset="0"/>
@@ -6875,7 +7105,7 @@
         </p:nvSpPr>
         <p:spPr>
           <a:xfrm>
-            <a:off x="4585607" y="5344886"/>
+            <a:off x="4364595" y="5392457"/>
             <a:ext cx="3462807" cy="369332"/>
           </a:xfrm>
           <a:prstGeom prst="rect">
@@ -6889,6 +7119,7 @@
           </a:bodyPr>
           <a:lstStyle/>
           <a:p>
+            <a:pPr algn="ctr"/>
             <a:r>
               <a:rPr lang="en-CA" dirty="0">
                 <a:latin typeface="Kumbh Sans" pitchFamily="2" charset="0"/>
@@ -6913,8 +7144,8 @@
         </p:nvSpPr>
         <p:spPr>
           <a:xfrm>
-            <a:off x="4694463" y="3244334"/>
-            <a:ext cx="4466287" cy="707886"/>
+            <a:off x="4318107" y="2298270"/>
+            <a:ext cx="3555782" cy="707886"/>
           </a:xfrm>
           <a:prstGeom prst="rect">
             <a:avLst/>
@@ -6927,12 +7158,13 @@
           </a:bodyPr>
           <a:lstStyle/>
           <a:p>
+            <a:pPr algn="ctr"/>
             <a:r>
-              <a:rPr lang="en-CA" sz="4000" dirty="0">
+              <a:rPr lang="en-CA" sz="4000" b="1" dirty="0">
                 <a:latin typeface="Kumbh Sans" pitchFamily="2" charset="0"/>
                 <a:cs typeface="Kumbh Sans" pitchFamily="2" charset="0"/>
               </a:rPr>
-              <a:t>Name of software</a:t>
+              <a:t>NCR Manager</a:t>
             </a:r>
           </a:p>
         </p:txBody>
@@ -6947,6 +7179,164 @@
   <p:clrMapOvr>
     <a:masterClrMapping/>
   </p:clrMapOvr>
+  <p:timing>
+    <p:tnLst>
+      <p:par>
+        <p:cTn id="1" dur="indefinite" restart="never" nodeType="tmRoot">
+          <p:childTnLst>
+            <p:seq concurrent="1" nextAc="seek">
+              <p:cTn id="2" dur="indefinite" nodeType="mainSeq">
+                <p:childTnLst>
+                  <p:par>
+                    <p:cTn id="3" fill="hold">
+                      <p:stCondLst>
+                        <p:cond delay="indefinite"/>
+                      </p:stCondLst>
+                      <p:childTnLst>
+                        <p:par>
+                          <p:cTn id="4" fill="hold">
+                            <p:stCondLst>
+                              <p:cond delay="0"/>
+                            </p:stCondLst>
+                            <p:childTnLst>
+                              <p:par>
+                                <p:cTn id="5" presetID="10" presetClass="entr" presetSubtype="0" fill="hold" grpId="0" nodeType="clickEffect">
+                                  <p:stCondLst>
+                                    <p:cond delay="0"/>
+                                  </p:stCondLst>
+                                  <p:childTnLst>
+                                    <p:set>
+                                      <p:cBhvr>
+                                        <p:cTn id="6" dur="1" fill="hold">
+                                          <p:stCondLst>
+                                            <p:cond delay="0"/>
+                                          </p:stCondLst>
+                                        </p:cTn>
+                                        <p:tgtEl>
+                                          <p:spTgt spid="2"/>
+                                        </p:tgtEl>
+                                        <p:attrNameLst>
+                                          <p:attrName>style.visibility</p:attrName>
+                                        </p:attrNameLst>
+                                      </p:cBhvr>
+                                      <p:to>
+                                        <p:strVal val="visible"/>
+                                      </p:to>
+                                    </p:set>
+                                    <p:animEffect transition="in" filter="fade">
+                                      <p:cBhvr>
+                                        <p:cTn id="7" dur="500"/>
+                                        <p:tgtEl>
+                                          <p:spTgt spid="2"/>
+                                        </p:tgtEl>
+                                      </p:cBhvr>
+                                    </p:animEffect>
+                                  </p:childTnLst>
+                                </p:cTn>
+                              </p:par>
+                              <p:par>
+                                <p:cTn id="8" presetID="10" presetClass="entr" presetSubtype="0" fill="hold" grpId="0" nodeType="withEffect">
+                                  <p:stCondLst>
+                                    <p:cond delay="0"/>
+                                  </p:stCondLst>
+                                  <p:childTnLst>
+                                    <p:set>
+                                      <p:cBhvr>
+                                        <p:cTn id="9" dur="1" fill="hold">
+                                          <p:stCondLst>
+                                            <p:cond delay="0"/>
+                                          </p:stCondLst>
+                                        </p:cTn>
+                                        <p:tgtEl>
+                                          <p:spTgt spid="4"/>
+                                        </p:tgtEl>
+                                        <p:attrNameLst>
+                                          <p:attrName>style.visibility</p:attrName>
+                                        </p:attrNameLst>
+                                      </p:cBhvr>
+                                      <p:to>
+                                        <p:strVal val="visible"/>
+                                      </p:to>
+                                    </p:set>
+                                    <p:animEffect transition="in" filter="fade">
+                                      <p:cBhvr>
+                                        <p:cTn id="10" dur="500"/>
+                                        <p:tgtEl>
+                                          <p:spTgt spid="4"/>
+                                        </p:tgtEl>
+                                      </p:cBhvr>
+                                    </p:animEffect>
+                                  </p:childTnLst>
+                                </p:cTn>
+                              </p:par>
+                              <p:par>
+                                <p:cTn id="11" presetID="10" presetClass="entr" presetSubtype="0" fill="hold" grpId="0" nodeType="withEffect">
+                                  <p:stCondLst>
+                                    <p:cond delay="0"/>
+                                  </p:stCondLst>
+                                  <p:childTnLst>
+                                    <p:set>
+                                      <p:cBhvr>
+                                        <p:cTn id="12" dur="1" fill="hold">
+                                          <p:stCondLst>
+                                            <p:cond delay="0"/>
+                                          </p:stCondLst>
+                                        </p:cTn>
+                                        <p:tgtEl>
+                                          <p:spTgt spid="6"/>
+                                        </p:tgtEl>
+                                        <p:attrNameLst>
+                                          <p:attrName>style.visibility</p:attrName>
+                                        </p:attrNameLst>
+                                      </p:cBhvr>
+                                      <p:to>
+                                        <p:strVal val="visible"/>
+                                      </p:to>
+                                    </p:set>
+                                    <p:animEffect transition="in" filter="fade">
+                                      <p:cBhvr>
+                                        <p:cTn id="13" dur="500"/>
+                                        <p:tgtEl>
+                                          <p:spTgt spid="6"/>
+                                        </p:tgtEl>
+                                      </p:cBhvr>
+                                    </p:animEffect>
+                                  </p:childTnLst>
+                                </p:cTn>
+                              </p:par>
+                            </p:childTnLst>
+                          </p:cTn>
+                        </p:par>
+                      </p:childTnLst>
+                    </p:cTn>
+                  </p:par>
+                </p:childTnLst>
+              </p:cTn>
+              <p:prevCondLst>
+                <p:cond evt="onPrev" delay="0">
+                  <p:tgtEl>
+                    <p:sldTgt/>
+                  </p:tgtEl>
+                </p:cond>
+              </p:prevCondLst>
+              <p:nextCondLst>
+                <p:cond evt="onNext" delay="0">
+                  <p:tgtEl>
+                    <p:sldTgt/>
+                  </p:tgtEl>
+                </p:cond>
+              </p:nextCondLst>
+            </p:seq>
+          </p:childTnLst>
+        </p:cTn>
+      </p:par>
+    </p:tnLst>
+    <p:bldLst>
+      <p:bldP spid="2" grpId="0"/>
+      <p:bldP spid="4" grpId="0"/>
+      <p:bldP spid="6" grpId="0"/>
+    </p:bldLst>
+  </p:timing>
 </p:sld>
 </file>
 
@@ -7608,6 +7998,178 @@
           </a:p>
         </p:txBody>
       </p:sp>
+      <p:sp>
+        <p:nvSpPr>
+          <p:cNvPr id="8" name="TextBox 7">
+            <a:extLst>
+              <a:ext uri="{FF2B5EF4-FFF2-40B4-BE49-F238E27FC236}">
+                <a16:creationId xmlns:a16="http://schemas.microsoft.com/office/drawing/2014/main" id="{AED53C7F-599F-FBA7-12D5-0CEFFBEE13B0}"/>
+              </a:ext>
+            </a:extLst>
+          </p:cNvPr>
+          <p:cNvSpPr txBox="1"/>
+          <p:nvPr/>
+        </p:nvSpPr>
+        <p:spPr>
+          <a:xfrm>
+            <a:off x="4360384" y="1664912"/>
+            <a:ext cx="5707012" cy="3694729"/>
+          </a:xfrm>
+          <a:prstGeom prst="rect">
+            <a:avLst/>
+          </a:prstGeom>
+          <a:noFill/>
+        </p:spPr>
+        <p:txBody>
+          <a:bodyPr wrap="none" rtlCol="0">
+            <a:spAutoFit/>
+          </a:bodyPr>
+          <a:lstStyle/>
+          <a:p>
+            <a:pPr marL="285750" indent="-285750">
+              <a:lnSpc>
+                <a:spcPct val="200000"/>
+              </a:lnSpc>
+              <a:buFont typeface="Arial" panose="020B0604020202020204" pitchFamily="34" charset="0"/>
+              <a:buChar char="•"/>
+            </a:pPr>
+            <a:r>
+              <a:rPr lang="en-CA" sz="2000" dirty="0">
+                <a:latin typeface="Kumbh Sans" pitchFamily="2" charset="0"/>
+                <a:cs typeface="Kumbh Sans" pitchFamily="2" charset="0"/>
+              </a:rPr>
+              <a:t>Management &amp; Manufacturing</a:t>
+            </a:r>
+          </a:p>
+          <a:p>
+            <a:pPr marL="285750" indent="-285750">
+              <a:lnSpc>
+                <a:spcPct val="200000"/>
+              </a:lnSpc>
+              <a:buFont typeface="Arial" panose="020B0604020202020204" pitchFamily="34" charset="0"/>
+              <a:buChar char="•"/>
+            </a:pPr>
+            <a:r>
+              <a:rPr lang="en-CA" sz="2000" dirty="0">
+                <a:latin typeface="Kumbh Sans" pitchFamily="2" charset="0"/>
+                <a:cs typeface="Kumbh Sans" pitchFamily="2" charset="0"/>
+              </a:rPr>
+              <a:t>Documentation, Training, Risk management</a:t>
+            </a:r>
+          </a:p>
+          <a:p>
+            <a:pPr marL="285750" indent="-285750">
+              <a:lnSpc>
+                <a:spcPct val="200000"/>
+              </a:lnSpc>
+              <a:buFont typeface="Arial" panose="020B0604020202020204" pitchFamily="34" charset="0"/>
+              <a:buChar char="•"/>
+            </a:pPr>
+            <a:r>
+              <a:rPr lang="en-CA" sz="2000" dirty="0">
+                <a:latin typeface="Kumbh Sans" pitchFamily="2" charset="0"/>
+                <a:cs typeface="Kumbh Sans" pitchFamily="2" charset="0"/>
+              </a:rPr>
+              <a:t>Extensive logs</a:t>
+            </a:r>
+          </a:p>
+          <a:p>
+            <a:pPr marL="285750" indent="-285750">
+              <a:lnSpc>
+                <a:spcPct val="200000"/>
+              </a:lnSpc>
+              <a:buFont typeface="Arial" panose="020B0604020202020204" pitchFamily="34" charset="0"/>
+              <a:buChar char="•"/>
+            </a:pPr>
+            <a:r>
+              <a:rPr lang="en-CA" sz="2000" dirty="0">
+                <a:latin typeface="Kumbh Sans" pitchFamily="2" charset="0"/>
+                <a:cs typeface="Kumbh Sans" pitchFamily="2" charset="0"/>
+              </a:rPr>
+              <a:t>AI integration</a:t>
+            </a:r>
+          </a:p>
+          <a:p>
+            <a:pPr marL="285750" indent="-285750">
+              <a:lnSpc>
+                <a:spcPct val="200000"/>
+              </a:lnSpc>
+              <a:buFont typeface="Arial" panose="020B0604020202020204" pitchFamily="34" charset="0"/>
+              <a:buChar char="•"/>
+            </a:pPr>
+            <a:r>
+              <a:rPr lang="en-CA" sz="2000" dirty="0">
+                <a:latin typeface="Kumbh Sans" pitchFamily="2" charset="0"/>
+                <a:cs typeface="Kumbh Sans" pitchFamily="2" charset="0"/>
+              </a:rPr>
+              <a:t>Hands off</a:t>
+            </a:r>
+          </a:p>
+          <a:p>
+            <a:pPr marL="285750" indent="-285750">
+              <a:lnSpc>
+                <a:spcPct val="200000"/>
+              </a:lnSpc>
+              <a:buFont typeface="Arial" panose="020B0604020202020204" pitchFamily="34" charset="0"/>
+              <a:buChar char="•"/>
+            </a:pPr>
+            <a:r>
+              <a:rPr lang="en-CA" sz="2000" dirty="0">
+                <a:latin typeface="Kumbh Sans" pitchFamily="2" charset="0"/>
+                <a:cs typeface="Kumbh Sans" pitchFamily="2" charset="0"/>
+              </a:rPr>
+              <a:t>$25,000/year</a:t>
+            </a:r>
+          </a:p>
+        </p:txBody>
+      </p:sp>
+      <p:sp>
+        <p:nvSpPr>
+          <p:cNvPr id="14" name="TextBox 13">
+            <a:extLst>
+              <a:ext uri="{FF2B5EF4-FFF2-40B4-BE49-F238E27FC236}">
+                <a16:creationId xmlns:a16="http://schemas.microsoft.com/office/drawing/2014/main" id="{3DAEF85A-079C-3F9A-92CF-835B7D0DC7BD}"/>
+              </a:ext>
+            </a:extLst>
+          </p:cNvPr>
+          <p:cNvSpPr txBox="1"/>
+          <p:nvPr/>
+        </p:nvSpPr>
+        <p:spPr>
+          <a:xfrm>
+            <a:off x="6155619" y="2865497"/>
+            <a:ext cx="2255746" cy="721929"/>
+          </a:xfrm>
+          <a:prstGeom prst="rect">
+            <a:avLst/>
+          </a:prstGeom>
+          <a:noFill/>
+        </p:spPr>
+        <p:txBody>
+          <a:bodyPr wrap="none" rtlCol="0">
+            <a:spAutoFit/>
+          </a:bodyPr>
+          <a:lstStyle/>
+          <a:p>
+            <a:pPr algn="ctr">
+              <a:lnSpc>
+                <a:spcPct val="200000"/>
+              </a:lnSpc>
+            </a:pPr>
+            <a:r>
+              <a:rPr lang="en-CA" sz="2400" dirty="0" err="1">
+                <a:latin typeface="Kumbh Sans" pitchFamily="2" charset="0"/>
+                <a:cs typeface="Kumbh Sans" pitchFamily="2" charset="0"/>
+              </a:rPr>
+              <a:t>MasterControl</a:t>
+            </a:r>
+            <a:endParaRPr lang="en-CA" sz="2400" dirty="0">
+              <a:latin typeface="Kumbh Sans" pitchFamily="2" charset="0"/>
+              <a:cs typeface="Kumbh Sans" pitchFamily="2" charset="0"/>
+            </a:endParaRPr>
+          </a:p>
+        </p:txBody>
+      </p:sp>
     </p:spTree>
     <p:extLst>
       <p:ext uri="{BB962C8B-B14F-4D97-AF65-F5344CB8AC3E}">
@@ -7618,6 +8180,853 @@
   <p:clrMapOvr>
     <a:masterClrMapping/>
   </p:clrMapOvr>
+  <mc:AlternateContent xmlns:mc="http://schemas.openxmlformats.org/markup-compatibility/2006">
+    <mc:Choice xmlns:p14="http://schemas.microsoft.com/office/powerpoint/2010/main" Requires="p14">
+      <p:transition spd="med" p14:dur="700">
+        <p:fade/>
+      </p:transition>
+    </mc:Choice>
+    <mc:Fallback>
+      <p:transition spd="med">
+        <p:fade/>
+      </p:transition>
+    </mc:Fallback>
+  </mc:AlternateContent>
+  <p:timing>
+    <p:tnLst>
+      <p:par>
+        <p:cTn id="1" dur="indefinite" restart="never" nodeType="tmRoot">
+          <p:childTnLst>
+            <p:seq concurrent="1" nextAc="seek">
+              <p:cTn id="2" dur="indefinite" nodeType="mainSeq">
+                <p:childTnLst>
+                  <p:par>
+                    <p:cTn id="3" fill="hold">
+                      <p:stCondLst>
+                        <p:cond delay="indefinite"/>
+                      </p:stCondLst>
+                      <p:childTnLst>
+                        <p:par>
+                          <p:cTn id="4" fill="hold">
+                            <p:stCondLst>
+                              <p:cond delay="0"/>
+                            </p:stCondLst>
+                            <p:childTnLst>
+                              <p:par>
+                                <p:cTn id="5" presetID="42" presetClass="path" presetSubtype="0" accel="50000" decel="50000" fill="hold" grpId="0" nodeType="clickEffect">
+                                  <p:stCondLst>
+                                    <p:cond delay="0"/>
+                                  </p:stCondLst>
+                                  <p:childTnLst>
+                                    <p:animMotion origin="layout" path="M 4.16667E-6 -3.7037E-7 L 4.16667E-6 -0.29074 " pathEditMode="relative" rAng="0" ptsTypes="AA">
+                                      <p:cBhvr>
+                                        <p:cTn id="6" dur="2000" fill="hold"/>
+                                        <p:tgtEl>
+                                          <p:spTgt spid="14"/>
+                                        </p:tgtEl>
+                                        <p:attrNameLst>
+                                          <p:attrName>ppt_x</p:attrName>
+                                          <p:attrName>ppt_y</p:attrName>
+                                        </p:attrNameLst>
+                                      </p:cBhvr>
+                                      <p:rCtr x="0" y="-14537"/>
+                                    </p:animMotion>
+                                  </p:childTnLst>
+                                </p:cTn>
+                              </p:par>
+                            </p:childTnLst>
+                          </p:cTn>
+                        </p:par>
+                        <p:par>
+                          <p:cTn id="7" fill="hold">
+                            <p:stCondLst>
+                              <p:cond delay="2000"/>
+                            </p:stCondLst>
+                            <p:childTnLst>
+                              <p:par>
+                                <p:cTn id="8" presetID="10" presetClass="entr" presetSubtype="0" fill="hold" nodeType="afterEffect">
+                                  <p:stCondLst>
+                                    <p:cond delay="0"/>
+                                  </p:stCondLst>
+                                  <p:childTnLst>
+                                    <p:set>
+                                      <p:cBhvr>
+                                        <p:cTn id="9" dur="1" fill="hold">
+                                          <p:stCondLst>
+                                            <p:cond delay="0"/>
+                                          </p:stCondLst>
+                                        </p:cTn>
+                                        <p:tgtEl>
+                                          <p:spTgt spid="8">
+                                            <p:txEl>
+                                              <p:pRg st="0" end="0"/>
+                                            </p:txEl>
+                                          </p:spTgt>
+                                        </p:tgtEl>
+                                        <p:attrNameLst>
+                                          <p:attrName>style.visibility</p:attrName>
+                                        </p:attrNameLst>
+                                      </p:cBhvr>
+                                      <p:to>
+                                        <p:strVal val="visible"/>
+                                      </p:to>
+                                    </p:set>
+                                    <p:animEffect transition="in" filter="fade">
+                                      <p:cBhvr>
+                                        <p:cTn id="10" dur="500"/>
+                                        <p:tgtEl>
+                                          <p:spTgt spid="8">
+                                            <p:txEl>
+                                              <p:pRg st="0" end="0"/>
+                                            </p:txEl>
+                                          </p:spTgt>
+                                        </p:tgtEl>
+                                      </p:cBhvr>
+                                    </p:animEffect>
+                                  </p:childTnLst>
+                                </p:cTn>
+                              </p:par>
+                            </p:childTnLst>
+                          </p:cTn>
+                        </p:par>
+                      </p:childTnLst>
+                    </p:cTn>
+                  </p:par>
+                  <p:par>
+                    <p:cTn id="11" fill="hold">
+                      <p:stCondLst>
+                        <p:cond delay="indefinite"/>
+                      </p:stCondLst>
+                      <p:childTnLst>
+                        <p:par>
+                          <p:cTn id="12" fill="hold">
+                            <p:stCondLst>
+                              <p:cond delay="0"/>
+                            </p:stCondLst>
+                            <p:childTnLst>
+                              <p:par>
+                                <p:cTn id="13" presetID="10" presetClass="entr" presetSubtype="0" fill="hold" nodeType="clickEffect">
+                                  <p:stCondLst>
+                                    <p:cond delay="0"/>
+                                  </p:stCondLst>
+                                  <p:childTnLst>
+                                    <p:set>
+                                      <p:cBhvr>
+                                        <p:cTn id="14" dur="1" fill="hold">
+                                          <p:stCondLst>
+                                            <p:cond delay="0"/>
+                                          </p:stCondLst>
+                                        </p:cTn>
+                                        <p:tgtEl>
+                                          <p:spTgt spid="8">
+                                            <p:txEl>
+                                              <p:pRg st="1" end="1"/>
+                                            </p:txEl>
+                                          </p:spTgt>
+                                        </p:tgtEl>
+                                        <p:attrNameLst>
+                                          <p:attrName>style.visibility</p:attrName>
+                                        </p:attrNameLst>
+                                      </p:cBhvr>
+                                      <p:to>
+                                        <p:strVal val="visible"/>
+                                      </p:to>
+                                    </p:set>
+                                    <p:animEffect transition="in" filter="fade">
+                                      <p:cBhvr>
+                                        <p:cTn id="15" dur="500"/>
+                                        <p:tgtEl>
+                                          <p:spTgt spid="8">
+                                            <p:txEl>
+                                              <p:pRg st="1" end="1"/>
+                                            </p:txEl>
+                                          </p:spTgt>
+                                        </p:tgtEl>
+                                      </p:cBhvr>
+                                    </p:animEffect>
+                                  </p:childTnLst>
+                                </p:cTn>
+                              </p:par>
+                              <p:par>
+                                <p:cTn id="16" presetID="19" presetClass="emph" presetSubtype="0" fill="hold" nodeType="withEffect">
+                                  <p:stCondLst>
+                                    <p:cond delay="0"/>
+                                  </p:stCondLst>
+                                  <p:childTnLst>
+                                    <p:animClr clrSpc="rgb" dir="cw">
+                                      <p:cBhvr override="childStyle">
+                                        <p:cTn id="17" dur="500" fill="hold"/>
+                                        <p:tgtEl>
+                                          <p:spTgt spid="8">
+                                            <p:txEl>
+                                              <p:pRg st="0" end="0"/>
+                                            </p:txEl>
+                                          </p:spTgt>
+                                        </p:tgtEl>
+                                        <p:attrNameLst>
+                                          <p:attrName>style.color</p:attrName>
+                                        </p:attrNameLst>
+                                      </p:cBhvr>
+                                      <p:to>
+                                        <a:srgbClr val="7CAFE2"/>
+                                      </p:to>
+                                    </p:animClr>
+                                    <p:animClr clrSpc="rgb" dir="cw">
+                                      <p:cBhvr>
+                                        <p:cTn id="18" dur="500" fill="hold"/>
+                                        <p:tgtEl>
+                                          <p:spTgt spid="8">
+                                            <p:txEl>
+                                              <p:pRg st="0" end="0"/>
+                                            </p:txEl>
+                                          </p:spTgt>
+                                        </p:tgtEl>
+                                        <p:attrNameLst>
+                                          <p:attrName>fillcolor</p:attrName>
+                                        </p:attrNameLst>
+                                      </p:cBhvr>
+                                      <p:to>
+                                        <a:srgbClr val="7CAFE2"/>
+                                      </p:to>
+                                    </p:animClr>
+                                    <p:set>
+                                      <p:cBhvr>
+                                        <p:cTn id="19" dur="500" fill="hold"/>
+                                        <p:tgtEl>
+                                          <p:spTgt spid="8">
+                                            <p:txEl>
+                                              <p:pRg st="0" end="0"/>
+                                            </p:txEl>
+                                          </p:spTgt>
+                                        </p:tgtEl>
+                                        <p:attrNameLst>
+                                          <p:attrName>fill.type</p:attrName>
+                                        </p:attrNameLst>
+                                      </p:cBhvr>
+                                      <p:to>
+                                        <p:strVal val="solid"/>
+                                      </p:to>
+                                    </p:set>
+                                    <p:set>
+                                      <p:cBhvr>
+                                        <p:cTn id="20" dur="500" fill="hold"/>
+                                        <p:tgtEl>
+                                          <p:spTgt spid="8">
+                                            <p:txEl>
+                                              <p:pRg st="0" end="0"/>
+                                            </p:txEl>
+                                          </p:spTgt>
+                                        </p:tgtEl>
+                                        <p:attrNameLst>
+                                          <p:attrName>fill.on</p:attrName>
+                                        </p:attrNameLst>
+                                      </p:cBhvr>
+                                      <p:to>
+                                        <p:strVal val="true"/>
+                                      </p:to>
+                                    </p:set>
+                                  </p:childTnLst>
+                                </p:cTn>
+                              </p:par>
+                            </p:childTnLst>
+                          </p:cTn>
+                        </p:par>
+                      </p:childTnLst>
+                    </p:cTn>
+                  </p:par>
+                  <p:par>
+                    <p:cTn id="21" fill="hold">
+                      <p:stCondLst>
+                        <p:cond delay="indefinite"/>
+                      </p:stCondLst>
+                      <p:childTnLst>
+                        <p:par>
+                          <p:cTn id="22" fill="hold">
+                            <p:stCondLst>
+                              <p:cond delay="0"/>
+                            </p:stCondLst>
+                            <p:childTnLst>
+                              <p:par>
+                                <p:cTn id="23" presetID="10" presetClass="entr" presetSubtype="0" fill="hold" nodeType="clickEffect">
+                                  <p:stCondLst>
+                                    <p:cond delay="0"/>
+                                  </p:stCondLst>
+                                  <p:childTnLst>
+                                    <p:set>
+                                      <p:cBhvr>
+                                        <p:cTn id="24" dur="1" fill="hold">
+                                          <p:stCondLst>
+                                            <p:cond delay="0"/>
+                                          </p:stCondLst>
+                                        </p:cTn>
+                                        <p:tgtEl>
+                                          <p:spTgt spid="8">
+                                            <p:txEl>
+                                              <p:pRg st="2" end="2"/>
+                                            </p:txEl>
+                                          </p:spTgt>
+                                        </p:tgtEl>
+                                        <p:attrNameLst>
+                                          <p:attrName>style.visibility</p:attrName>
+                                        </p:attrNameLst>
+                                      </p:cBhvr>
+                                      <p:to>
+                                        <p:strVal val="visible"/>
+                                      </p:to>
+                                    </p:set>
+                                    <p:animEffect transition="in" filter="fade">
+                                      <p:cBhvr>
+                                        <p:cTn id="25" dur="500"/>
+                                        <p:tgtEl>
+                                          <p:spTgt spid="8">
+                                            <p:txEl>
+                                              <p:pRg st="2" end="2"/>
+                                            </p:txEl>
+                                          </p:spTgt>
+                                        </p:tgtEl>
+                                      </p:cBhvr>
+                                    </p:animEffect>
+                                  </p:childTnLst>
+                                </p:cTn>
+                              </p:par>
+                              <p:par>
+                                <p:cTn id="26" presetID="19" presetClass="emph" presetSubtype="0" fill="hold" nodeType="withEffect">
+                                  <p:stCondLst>
+                                    <p:cond delay="0"/>
+                                  </p:stCondLst>
+                                  <p:childTnLst>
+                                    <p:animClr clrSpc="rgb" dir="cw">
+                                      <p:cBhvr override="childStyle">
+                                        <p:cTn id="27" dur="500" fill="hold"/>
+                                        <p:tgtEl>
+                                          <p:spTgt spid="8">
+                                            <p:txEl>
+                                              <p:pRg st="1" end="1"/>
+                                            </p:txEl>
+                                          </p:spTgt>
+                                        </p:tgtEl>
+                                        <p:attrNameLst>
+                                          <p:attrName>style.color</p:attrName>
+                                        </p:attrNameLst>
+                                      </p:cBhvr>
+                                      <p:to>
+                                        <a:srgbClr val="7CAFE2"/>
+                                      </p:to>
+                                    </p:animClr>
+                                    <p:animClr clrSpc="rgb" dir="cw">
+                                      <p:cBhvr>
+                                        <p:cTn id="28" dur="500" fill="hold"/>
+                                        <p:tgtEl>
+                                          <p:spTgt spid="8">
+                                            <p:txEl>
+                                              <p:pRg st="1" end="1"/>
+                                            </p:txEl>
+                                          </p:spTgt>
+                                        </p:tgtEl>
+                                        <p:attrNameLst>
+                                          <p:attrName>fillcolor</p:attrName>
+                                        </p:attrNameLst>
+                                      </p:cBhvr>
+                                      <p:to>
+                                        <a:srgbClr val="7CAFE2"/>
+                                      </p:to>
+                                    </p:animClr>
+                                    <p:set>
+                                      <p:cBhvr>
+                                        <p:cTn id="29" dur="500" fill="hold"/>
+                                        <p:tgtEl>
+                                          <p:spTgt spid="8">
+                                            <p:txEl>
+                                              <p:pRg st="1" end="1"/>
+                                            </p:txEl>
+                                          </p:spTgt>
+                                        </p:tgtEl>
+                                        <p:attrNameLst>
+                                          <p:attrName>fill.type</p:attrName>
+                                        </p:attrNameLst>
+                                      </p:cBhvr>
+                                      <p:to>
+                                        <p:strVal val="solid"/>
+                                      </p:to>
+                                    </p:set>
+                                    <p:set>
+                                      <p:cBhvr>
+                                        <p:cTn id="30" dur="500" fill="hold"/>
+                                        <p:tgtEl>
+                                          <p:spTgt spid="8">
+                                            <p:txEl>
+                                              <p:pRg st="1" end="1"/>
+                                            </p:txEl>
+                                          </p:spTgt>
+                                        </p:tgtEl>
+                                        <p:attrNameLst>
+                                          <p:attrName>fill.on</p:attrName>
+                                        </p:attrNameLst>
+                                      </p:cBhvr>
+                                      <p:to>
+                                        <p:strVal val="true"/>
+                                      </p:to>
+                                    </p:set>
+                                  </p:childTnLst>
+                                </p:cTn>
+                              </p:par>
+                            </p:childTnLst>
+                          </p:cTn>
+                        </p:par>
+                      </p:childTnLst>
+                    </p:cTn>
+                  </p:par>
+                  <p:par>
+                    <p:cTn id="31" fill="hold">
+                      <p:stCondLst>
+                        <p:cond delay="indefinite"/>
+                      </p:stCondLst>
+                      <p:childTnLst>
+                        <p:par>
+                          <p:cTn id="32" fill="hold">
+                            <p:stCondLst>
+                              <p:cond delay="0"/>
+                            </p:stCondLst>
+                            <p:childTnLst>
+                              <p:par>
+                                <p:cTn id="33" presetID="10" presetClass="entr" presetSubtype="0" fill="hold" nodeType="clickEffect">
+                                  <p:stCondLst>
+                                    <p:cond delay="0"/>
+                                  </p:stCondLst>
+                                  <p:childTnLst>
+                                    <p:set>
+                                      <p:cBhvr>
+                                        <p:cTn id="34" dur="1" fill="hold">
+                                          <p:stCondLst>
+                                            <p:cond delay="0"/>
+                                          </p:stCondLst>
+                                        </p:cTn>
+                                        <p:tgtEl>
+                                          <p:spTgt spid="8">
+                                            <p:txEl>
+                                              <p:pRg st="3" end="3"/>
+                                            </p:txEl>
+                                          </p:spTgt>
+                                        </p:tgtEl>
+                                        <p:attrNameLst>
+                                          <p:attrName>style.visibility</p:attrName>
+                                        </p:attrNameLst>
+                                      </p:cBhvr>
+                                      <p:to>
+                                        <p:strVal val="visible"/>
+                                      </p:to>
+                                    </p:set>
+                                    <p:animEffect transition="in" filter="fade">
+                                      <p:cBhvr>
+                                        <p:cTn id="35" dur="500"/>
+                                        <p:tgtEl>
+                                          <p:spTgt spid="8">
+                                            <p:txEl>
+                                              <p:pRg st="3" end="3"/>
+                                            </p:txEl>
+                                          </p:spTgt>
+                                        </p:tgtEl>
+                                      </p:cBhvr>
+                                    </p:animEffect>
+                                  </p:childTnLst>
+                                </p:cTn>
+                              </p:par>
+                              <p:par>
+                                <p:cTn id="36" presetID="19" presetClass="emph" presetSubtype="0" fill="hold" nodeType="withEffect">
+                                  <p:stCondLst>
+                                    <p:cond delay="0"/>
+                                  </p:stCondLst>
+                                  <p:childTnLst>
+                                    <p:animClr clrSpc="rgb" dir="cw">
+                                      <p:cBhvr override="childStyle">
+                                        <p:cTn id="37" dur="500" fill="hold"/>
+                                        <p:tgtEl>
+                                          <p:spTgt spid="8">
+                                            <p:txEl>
+                                              <p:pRg st="2" end="2"/>
+                                            </p:txEl>
+                                          </p:spTgt>
+                                        </p:tgtEl>
+                                        <p:attrNameLst>
+                                          <p:attrName>style.color</p:attrName>
+                                        </p:attrNameLst>
+                                      </p:cBhvr>
+                                      <p:to>
+                                        <a:srgbClr val="7CAFE2"/>
+                                      </p:to>
+                                    </p:animClr>
+                                    <p:animClr clrSpc="rgb" dir="cw">
+                                      <p:cBhvr>
+                                        <p:cTn id="38" dur="500" fill="hold"/>
+                                        <p:tgtEl>
+                                          <p:spTgt spid="8">
+                                            <p:txEl>
+                                              <p:pRg st="2" end="2"/>
+                                            </p:txEl>
+                                          </p:spTgt>
+                                        </p:tgtEl>
+                                        <p:attrNameLst>
+                                          <p:attrName>fillcolor</p:attrName>
+                                        </p:attrNameLst>
+                                      </p:cBhvr>
+                                      <p:to>
+                                        <a:srgbClr val="7CAFE2"/>
+                                      </p:to>
+                                    </p:animClr>
+                                    <p:set>
+                                      <p:cBhvr>
+                                        <p:cTn id="39" dur="500" fill="hold"/>
+                                        <p:tgtEl>
+                                          <p:spTgt spid="8">
+                                            <p:txEl>
+                                              <p:pRg st="2" end="2"/>
+                                            </p:txEl>
+                                          </p:spTgt>
+                                        </p:tgtEl>
+                                        <p:attrNameLst>
+                                          <p:attrName>fill.type</p:attrName>
+                                        </p:attrNameLst>
+                                      </p:cBhvr>
+                                      <p:to>
+                                        <p:strVal val="solid"/>
+                                      </p:to>
+                                    </p:set>
+                                    <p:set>
+                                      <p:cBhvr>
+                                        <p:cTn id="40" dur="500" fill="hold"/>
+                                        <p:tgtEl>
+                                          <p:spTgt spid="8">
+                                            <p:txEl>
+                                              <p:pRg st="2" end="2"/>
+                                            </p:txEl>
+                                          </p:spTgt>
+                                        </p:tgtEl>
+                                        <p:attrNameLst>
+                                          <p:attrName>fill.on</p:attrName>
+                                        </p:attrNameLst>
+                                      </p:cBhvr>
+                                      <p:to>
+                                        <p:strVal val="true"/>
+                                      </p:to>
+                                    </p:set>
+                                  </p:childTnLst>
+                                </p:cTn>
+                              </p:par>
+                            </p:childTnLst>
+                          </p:cTn>
+                        </p:par>
+                      </p:childTnLst>
+                    </p:cTn>
+                  </p:par>
+                  <p:par>
+                    <p:cTn id="41" fill="hold">
+                      <p:stCondLst>
+                        <p:cond delay="indefinite"/>
+                      </p:stCondLst>
+                      <p:childTnLst>
+                        <p:par>
+                          <p:cTn id="42" fill="hold">
+                            <p:stCondLst>
+                              <p:cond delay="0"/>
+                            </p:stCondLst>
+                            <p:childTnLst>
+                              <p:par>
+                                <p:cTn id="43" presetID="10" presetClass="entr" presetSubtype="0" fill="hold" nodeType="clickEffect">
+                                  <p:stCondLst>
+                                    <p:cond delay="0"/>
+                                  </p:stCondLst>
+                                  <p:childTnLst>
+                                    <p:set>
+                                      <p:cBhvr>
+                                        <p:cTn id="44" dur="1" fill="hold">
+                                          <p:stCondLst>
+                                            <p:cond delay="0"/>
+                                          </p:stCondLst>
+                                        </p:cTn>
+                                        <p:tgtEl>
+                                          <p:spTgt spid="8">
+                                            <p:txEl>
+                                              <p:pRg st="4" end="4"/>
+                                            </p:txEl>
+                                          </p:spTgt>
+                                        </p:tgtEl>
+                                        <p:attrNameLst>
+                                          <p:attrName>style.visibility</p:attrName>
+                                        </p:attrNameLst>
+                                      </p:cBhvr>
+                                      <p:to>
+                                        <p:strVal val="visible"/>
+                                      </p:to>
+                                    </p:set>
+                                    <p:animEffect transition="in" filter="fade">
+                                      <p:cBhvr>
+                                        <p:cTn id="45" dur="500"/>
+                                        <p:tgtEl>
+                                          <p:spTgt spid="8">
+                                            <p:txEl>
+                                              <p:pRg st="4" end="4"/>
+                                            </p:txEl>
+                                          </p:spTgt>
+                                        </p:tgtEl>
+                                      </p:cBhvr>
+                                    </p:animEffect>
+                                  </p:childTnLst>
+                                </p:cTn>
+                              </p:par>
+                              <p:par>
+                                <p:cTn id="46" presetID="19" presetClass="emph" presetSubtype="0" fill="hold" nodeType="withEffect">
+                                  <p:stCondLst>
+                                    <p:cond delay="0"/>
+                                  </p:stCondLst>
+                                  <p:childTnLst>
+                                    <p:animClr clrSpc="rgb" dir="cw">
+                                      <p:cBhvr override="childStyle">
+                                        <p:cTn id="47" dur="500" fill="hold"/>
+                                        <p:tgtEl>
+                                          <p:spTgt spid="8">
+                                            <p:txEl>
+                                              <p:pRg st="3" end="3"/>
+                                            </p:txEl>
+                                          </p:spTgt>
+                                        </p:tgtEl>
+                                        <p:attrNameLst>
+                                          <p:attrName>style.color</p:attrName>
+                                        </p:attrNameLst>
+                                      </p:cBhvr>
+                                      <p:to>
+                                        <a:srgbClr val="7CAFE2"/>
+                                      </p:to>
+                                    </p:animClr>
+                                    <p:animClr clrSpc="rgb" dir="cw">
+                                      <p:cBhvr>
+                                        <p:cTn id="48" dur="500" fill="hold"/>
+                                        <p:tgtEl>
+                                          <p:spTgt spid="8">
+                                            <p:txEl>
+                                              <p:pRg st="3" end="3"/>
+                                            </p:txEl>
+                                          </p:spTgt>
+                                        </p:tgtEl>
+                                        <p:attrNameLst>
+                                          <p:attrName>fillcolor</p:attrName>
+                                        </p:attrNameLst>
+                                      </p:cBhvr>
+                                      <p:to>
+                                        <a:srgbClr val="7CAFE2"/>
+                                      </p:to>
+                                    </p:animClr>
+                                    <p:set>
+                                      <p:cBhvr>
+                                        <p:cTn id="49" dur="500" fill="hold"/>
+                                        <p:tgtEl>
+                                          <p:spTgt spid="8">
+                                            <p:txEl>
+                                              <p:pRg st="3" end="3"/>
+                                            </p:txEl>
+                                          </p:spTgt>
+                                        </p:tgtEl>
+                                        <p:attrNameLst>
+                                          <p:attrName>fill.type</p:attrName>
+                                        </p:attrNameLst>
+                                      </p:cBhvr>
+                                      <p:to>
+                                        <p:strVal val="solid"/>
+                                      </p:to>
+                                    </p:set>
+                                    <p:set>
+                                      <p:cBhvr>
+                                        <p:cTn id="50" dur="500" fill="hold"/>
+                                        <p:tgtEl>
+                                          <p:spTgt spid="8">
+                                            <p:txEl>
+                                              <p:pRg st="3" end="3"/>
+                                            </p:txEl>
+                                          </p:spTgt>
+                                        </p:tgtEl>
+                                        <p:attrNameLst>
+                                          <p:attrName>fill.on</p:attrName>
+                                        </p:attrNameLst>
+                                      </p:cBhvr>
+                                      <p:to>
+                                        <p:strVal val="true"/>
+                                      </p:to>
+                                    </p:set>
+                                  </p:childTnLst>
+                                </p:cTn>
+                              </p:par>
+                            </p:childTnLst>
+                          </p:cTn>
+                        </p:par>
+                      </p:childTnLst>
+                    </p:cTn>
+                  </p:par>
+                  <p:par>
+                    <p:cTn id="51" fill="hold">
+                      <p:stCondLst>
+                        <p:cond delay="indefinite"/>
+                      </p:stCondLst>
+                      <p:childTnLst>
+                        <p:par>
+                          <p:cTn id="52" fill="hold">
+                            <p:stCondLst>
+                              <p:cond delay="0"/>
+                            </p:stCondLst>
+                            <p:childTnLst>
+                              <p:par>
+                                <p:cTn id="53" presetID="10" presetClass="entr" presetSubtype="0" fill="hold" nodeType="clickEffect">
+                                  <p:stCondLst>
+                                    <p:cond delay="0"/>
+                                  </p:stCondLst>
+                                  <p:childTnLst>
+                                    <p:set>
+                                      <p:cBhvr>
+                                        <p:cTn id="54" dur="1" fill="hold">
+                                          <p:stCondLst>
+                                            <p:cond delay="0"/>
+                                          </p:stCondLst>
+                                        </p:cTn>
+                                        <p:tgtEl>
+                                          <p:spTgt spid="8">
+                                            <p:txEl>
+                                              <p:pRg st="5" end="5"/>
+                                            </p:txEl>
+                                          </p:spTgt>
+                                        </p:tgtEl>
+                                        <p:attrNameLst>
+                                          <p:attrName>style.visibility</p:attrName>
+                                        </p:attrNameLst>
+                                      </p:cBhvr>
+                                      <p:to>
+                                        <p:strVal val="visible"/>
+                                      </p:to>
+                                    </p:set>
+                                    <p:animEffect transition="in" filter="fade">
+                                      <p:cBhvr>
+                                        <p:cTn id="55" dur="500"/>
+                                        <p:tgtEl>
+                                          <p:spTgt spid="8">
+                                            <p:txEl>
+                                              <p:pRg st="5" end="5"/>
+                                            </p:txEl>
+                                          </p:spTgt>
+                                        </p:tgtEl>
+                                      </p:cBhvr>
+                                    </p:animEffect>
+                                  </p:childTnLst>
+                                </p:cTn>
+                              </p:par>
+                              <p:par>
+                                <p:cTn id="56" presetID="19" presetClass="emph" presetSubtype="0" fill="hold" nodeType="withEffect">
+                                  <p:stCondLst>
+                                    <p:cond delay="0"/>
+                                  </p:stCondLst>
+                                  <p:childTnLst>
+                                    <p:animClr clrSpc="rgb" dir="cw">
+                                      <p:cBhvr override="childStyle">
+                                        <p:cTn id="57" dur="500" fill="hold"/>
+                                        <p:tgtEl>
+                                          <p:spTgt spid="8">
+                                            <p:txEl>
+                                              <p:pRg st="4" end="4"/>
+                                            </p:txEl>
+                                          </p:spTgt>
+                                        </p:tgtEl>
+                                        <p:attrNameLst>
+                                          <p:attrName>style.color</p:attrName>
+                                        </p:attrNameLst>
+                                      </p:cBhvr>
+                                      <p:to>
+                                        <a:srgbClr val="7CAFE2"/>
+                                      </p:to>
+                                    </p:animClr>
+                                    <p:animClr clrSpc="rgb" dir="cw">
+                                      <p:cBhvr>
+                                        <p:cTn id="58" dur="500" fill="hold"/>
+                                        <p:tgtEl>
+                                          <p:spTgt spid="8">
+                                            <p:txEl>
+                                              <p:pRg st="4" end="4"/>
+                                            </p:txEl>
+                                          </p:spTgt>
+                                        </p:tgtEl>
+                                        <p:attrNameLst>
+                                          <p:attrName>fillcolor</p:attrName>
+                                        </p:attrNameLst>
+                                      </p:cBhvr>
+                                      <p:to>
+                                        <a:srgbClr val="7CAFE2"/>
+                                      </p:to>
+                                    </p:animClr>
+                                    <p:set>
+                                      <p:cBhvr>
+                                        <p:cTn id="59" dur="500" fill="hold"/>
+                                        <p:tgtEl>
+                                          <p:spTgt spid="8">
+                                            <p:txEl>
+                                              <p:pRg st="4" end="4"/>
+                                            </p:txEl>
+                                          </p:spTgt>
+                                        </p:tgtEl>
+                                        <p:attrNameLst>
+                                          <p:attrName>fill.type</p:attrName>
+                                        </p:attrNameLst>
+                                      </p:cBhvr>
+                                      <p:to>
+                                        <p:strVal val="solid"/>
+                                      </p:to>
+                                    </p:set>
+                                    <p:set>
+                                      <p:cBhvr>
+                                        <p:cTn id="60" dur="500" fill="hold"/>
+                                        <p:tgtEl>
+                                          <p:spTgt spid="8">
+                                            <p:txEl>
+                                              <p:pRg st="4" end="4"/>
+                                            </p:txEl>
+                                          </p:spTgt>
+                                        </p:tgtEl>
+                                        <p:attrNameLst>
+                                          <p:attrName>fill.on</p:attrName>
+                                        </p:attrNameLst>
+                                      </p:cBhvr>
+                                      <p:to>
+                                        <p:strVal val="true"/>
+                                      </p:to>
+                                    </p:set>
+                                  </p:childTnLst>
+                                </p:cTn>
+                              </p:par>
+                            </p:childTnLst>
+                          </p:cTn>
+                        </p:par>
+                      </p:childTnLst>
+                    </p:cTn>
+                  </p:par>
+                </p:childTnLst>
+              </p:cTn>
+              <p:prevCondLst>
+                <p:cond evt="onPrev" delay="0">
+                  <p:tgtEl>
+                    <p:sldTgt/>
+                  </p:tgtEl>
+                </p:cond>
+              </p:prevCondLst>
+              <p:nextCondLst>
+                <p:cond evt="onNext" delay="0">
+                  <p:tgtEl>
+                    <p:sldTgt/>
+                  </p:tgtEl>
+                </p:cond>
+              </p:nextCondLst>
+            </p:seq>
+          </p:childTnLst>
+        </p:cTn>
+      </p:par>
+    </p:tnLst>
+    <p:bldLst>
+      <p:bldP spid="14" grpId="0"/>
+    </p:bldLst>
+  </p:timing>
 </p:sld>
 </file>
 
@@ -8279,6 +9688,178 @@
           </a:p>
         </p:txBody>
       </p:sp>
+      <p:sp>
+        <p:nvSpPr>
+          <p:cNvPr id="3" name="TextBox 2">
+            <a:extLst>
+              <a:ext uri="{FF2B5EF4-FFF2-40B4-BE49-F238E27FC236}">
+                <a16:creationId xmlns:a16="http://schemas.microsoft.com/office/drawing/2014/main" id="{5F97503A-9C72-47A2-2CA8-09144AD4223D}"/>
+              </a:ext>
+            </a:extLst>
+          </p:cNvPr>
+          <p:cNvSpPr txBox="1"/>
+          <p:nvPr/>
+        </p:nvSpPr>
+        <p:spPr>
+          <a:xfrm>
+            <a:off x="4360384" y="1664912"/>
+            <a:ext cx="3339376" cy="3694729"/>
+          </a:xfrm>
+          <a:prstGeom prst="rect">
+            <a:avLst/>
+          </a:prstGeom>
+          <a:noFill/>
+        </p:spPr>
+        <p:txBody>
+          <a:bodyPr wrap="none" rtlCol="0">
+            <a:spAutoFit/>
+          </a:bodyPr>
+          <a:lstStyle/>
+          <a:p>
+            <a:pPr marL="285750" indent="-285750">
+              <a:lnSpc>
+                <a:spcPct val="200000"/>
+              </a:lnSpc>
+              <a:buFont typeface="Arial" panose="020B0604020202020204" pitchFamily="34" charset="0"/>
+              <a:buChar char="•"/>
+            </a:pPr>
+            <a:r>
+              <a:rPr lang="en-CA" sz="2000" dirty="0">
+                <a:latin typeface="Kumbh Sans" pitchFamily="2" charset="0"/>
+                <a:cs typeface="Kumbh Sans" pitchFamily="2" charset="0"/>
+              </a:rPr>
+              <a:t>Automated AI training</a:t>
+            </a:r>
+          </a:p>
+          <a:p>
+            <a:pPr marL="285750" indent="-285750">
+              <a:lnSpc>
+                <a:spcPct val="200000"/>
+              </a:lnSpc>
+              <a:buFont typeface="Arial" panose="020B0604020202020204" pitchFamily="34" charset="0"/>
+              <a:buChar char="•"/>
+            </a:pPr>
+            <a:r>
+              <a:rPr lang="en-CA" sz="2000" dirty="0">
+                <a:latin typeface="Kumbh Sans" pitchFamily="2" charset="0"/>
+                <a:cs typeface="Kumbh Sans" pitchFamily="2" charset="0"/>
+              </a:rPr>
+              <a:t>Heavy AI integration</a:t>
+            </a:r>
+          </a:p>
+          <a:p>
+            <a:pPr marL="285750" indent="-285750">
+              <a:lnSpc>
+                <a:spcPct val="200000"/>
+              </a:lnSpc>
+              <a:buFont typeface="Arial" panose="020B0604020202020204" pitchFamily="34" charset="0"/>
+              <a:buChar char="•"/>
+            </a:pPr>
+            <a:r>
+              <a:rPr lang="en-CA" sz="2000" dirty="0">
+                <a:latin typeface="Kumbh Sans" pitchFamily="2" charset="0"/>
+                <a:cs typeface="Kumbh Sans" pitchFamily="2" charset="0"/>
+              </a:rPr>
+              <a:t>Aggressive automations</a:t>
+            </a:r>
+          </a:p>
+          <a:p>
+            <a:pPr marL="285750" indent="-285750">
+              <a:lnSpc>
+                <a:spcPct val="200000"/>
+              </a:lnSpc>
+              <a:buFont typeface="Arial" panose="020B0604020202020204" pitchFamily="34" charset="0"/>
+              <a:buChar char="•"/>
+            </a:pPr>
+            <a:r>
+              <a:rPr lang="en-CA" sz="2000" dirty="0">
+                <a:latin typeface="Kumbh Sans" pitchFamily="2" charset="0"/>
+                <a:cs typeface="Kumbh Sans" pitchFamily="2" charset="0"/>
+              </a:rPr>
+              <a:t>Heavy AI integration</a:t>
+            </a:r>
+          </a:p>
+          <a:p>
+            <a:pPr marL="285750" indent="-285750">
+              <a:lnSpc>
+                <a:spcPct val="200000"/>
+              </a:lnSpc>
+              <a:buFont typeface="Arial" panose="020B0604020202020204" pitchFamily="34" charset="0"/>
+              <a:buChar char="•"/>
+            </a:pPr>
+            <a:r>
+              <a:rPr lang="en-CA" sz="2000" dirty="0">
+                <a:latin typeface="Kumbh Sans" pitchFamily="2" charset="0"/>
+                <a:cs typeface="Kumbh Sans" pitchFamily="2" charset="0"/>
+              </a:rPr>
+              <a:t>Encrypted data</a:t>
+            </a:r>
+          </a:p>
+          <a:p>
+            <a:pPr marL="285750" indent="-285750">
+              <a:lnSpc>
+                <a:spcPct val="200000"/>
+              </a:lnSpc>
+              <a:buFont typeface="Arial" panose="020B0604020202020204" pitchFamily="34" charset="0"/>
+              <a:buChar char="•"/>
+            </a:pPr>
+            <a:r>
+              <a:rPr lang="en-CA" sz="2000" dirty="0">
+                <a:latin typeface="Kumbh Sans" pitchFamily="2" charset="0"/>
+                <a:cs typeface="Kumbh Sans" pitchFamily="2" charset="0"/>
+              </a:rPr>
+              <a:t>$24/person/month</a:t>
+            </a:r>
+          </a:p>
+        </p:txBody>
+      </p:sp>
+      <p:sp>
+        <p:nvSpPr>
+          <p:cNvPr id="5" name="TextBox 4">
+            <a:extLst>
+              <a:ext uri="{FF2B5EF4-FFF2-40B4-BE49-F238E27FC236}">
+                <a16:creationId xmlns:a16="http://schemas.microsoft.com/office/drawing/2014/main" id="{E0D86D48-4A11-51EE-D37F-9B0D8E07F58B}"/>
+              </a:ext>
+            </a:extLst>
+          </p:cNvPr>
+          <p:cNvSpPr txBox="1"/>
+          <p:nvPr/>
+        </p:nvSpPr>
+        <p:spPr>
+          <a:xfrm>
+            <a:off x="6861742" y="2865497"/>
+            <a:ext cx="843501" cy="721929"/>
+          </a:xfrm>
+          <a:prstGeom prst="rect">
+            <a:avLst/>
+          </a:prstGeom>
+          <a:noFill/>
+        </p:spPr>
+        <p:txBody>
+          <a:bodyPr wrap="none" rtlCol="0">
+            <a:spAutoFit/>
+          </a:bodyPr>
+          <a:lstStyle/>
+          <a:p>
+            <a:pPr algn="ctr">
+              <a:lnSpc>
+                <a:spcPct val="200000"/>
+              </a:lnSpc>
+            </a:pPr>
+            <a:r>
+              <a:rPr lang="en-CA" sz="2400" dirty="0" err="1">
+                <a:latin typeface="Kumbh Sans" pitchFamily="2" charset="0"/>
+                <a:cs typeface="Kumbh Sans" pitchFamily="2" charset="0"/>
+              </a:rPr>
+              <a:t>Mitti</a:t>
+            </a:r>
+            <a:endParaRPr lang="en-CA" sz="2400" dirty="0">
+              <a:latin typeface="Kumbh Sans" pitchFamily="2" charset="0"/>
+              <a:cs typeface="Kumbh Sans" pitchFamily="2" charset="0"/>
+            </a:endParaRPr>
+          </a:p>
+        </p:txBody>
+      </p:sp>
     </p:spTree>
     <p:extLst>
       <p:ext uri="{BB962C8B-B14F-4D97-AF65-F5344CB8AC3E}">
@@ -8289,6 +9870,18 @@
   <p:clrMapOvr>
     <a:masterClrMapping/>
   </p:clrMapOvr>
+  <mc:AlternateContent xmlns:mc="http://schemas.openxmlformats.org/markup-compatibility/2006">
+    <mc:Choice xmlns:p14="http://schemas.microsoft.com/office/powerpoint/2010/main" Requires="p14">
+      <p:transition spd="med" p14:dur="700">
+        <p:fade/>
+      </p:transition>
+    </mc:Choice>
+    <mc:Fallback>
+      <p:transition spd="med">
+        <p:fade/>
+      </p:transition>
+    </mc:Fallback>
+  </mc:AlternateContent>
   <p:timing>
     <p:tnLst>
       <p:par>
@@ -8310,14 +9903,816 @@
                             </p:stCondLst>
                             <p:childTnLst>
                               <p:par>
-                                <p:cTn id="5" presetID="42" presetClass="path" presetSubtype="0" accel="50000" decel="50000" fill="hold" nodeType="clickEffect">
+                                <p:cTn id="5" presetID="42" presetClass="path" presetSubtype="0" accel="50000" decel="50000" fill="hold" grpId="0" nodeType="clickEffect">
+                                  <p:stCondLst>
+                                    <p:cond delay="0"/>
+                                  </p:stCondLst>
+                                  <p:childTnLst>
+                                    <p:animMotion origin="layout" path="M 4.16667E-6 -3.7037E-7 L 4.16667E-6 -0.29074 " pathEditMode="relative" rAng="0" ptsTypes="AA">
+                                      <p:cBhvr>
+                                        <p:cTn id="6" dur="2000" fill="hold"/>
+                                        <p:tgtEl>
+                                          <p:spTgt spid="5"/>
+                                        </p:tgtEl>
+                                        <p:attrNameLst>
+                                          <p:attrName>ppt_x</p:attrName>
+                                          <p:attrName>ppt_y</p:attrName>
+                                        </p:attrNameLst>
+                                      </p:cBhvr>
+                                      <p:rCtr x="0" y="-14537"/>
+                                    </p:animMotion>
+                                  </p:childTnLst>
+                                </p:cTn>
+                              </p:par>
+                            </p:childTnLst>
+                          </p:cTn>
+                        </p:par>
+                        <p:par>
+                          <p:cTn id="7" fill="hold">
+                            <p:stCondLst>
+                              <p:cond delay="2000"/>
+                            </p:stCondLst>
+                            <p:childTnLst>
+                              <p:par>
+                                <p:cTn id="8" presetID="10" presetClass="entr" presetSubtype="0" fill="hold" nodeType="afterEffect">
+                                  <p:stCondLst>
+                                    <p:cond delay="0"/>
+                                  </p:stCondLst>
+                                  <p:childTnLst>
+                                    <p:set>
+                                      <p:cBhvr>
+                                        <p:cTn id="9" dur="1" fill="hold">
+                                          <p:stCondLst>
+                                            <p:cond delay="0"/>
+                                          </p:stCondLst>
+                                        </p:cTn>
+                                        <p:tgtEl>
+                                          <p:spTgt spid="3">
+                                            <p:txEl>
+                                              <p:pRg st="0" end="0"/>
+                                            </p:txEl>
+                                          </p:spTgt>
+                                        </p:tgtEl>
+                                        <p:attrNameLst>
+                                          <p:attrName>style.visibility</p:attrName>
+                                        </p:attrNameLst>
+                                      </p:cBhvr>
+                                      <p:to>
+                                        <p:strVal val="visible"/>
+                                      </p:to>
+                                    </p:set>
+                                    <p:animEffect transition="in" filter="fade">
+                                      <p:cBhvr>
+                                        <p:cTn id="10" dur="500"/>
+                                        <p:tgtEl>
+                                          <p:spTgt spid="3">
+                                            <p:txEl>
+                                              <p:pRg st="0" end="0"/>
+                                            </p:txEl>
+                                          </p:spTgt>
+                                        </p:tgtEl>
+                                      </p:cBhvr>
+                                    </p:animEffect>
+                                  </p:childTnLst>
+                                </p:cTn>
+                              </p:par>
+                            </p:childTnLst>
+                          </p:cTn>
+                        </p:par>
+                      </p:childTnLst>
+                    </p:cTn>
+                  </p:par>
+                  <p:par>
+                    <p:cTn id="11" fill="hold">
+                      <p:stCondLst>
+                        <p:cond delay="indefinite"/>
+                      </p:stCondLst>
+                      <p:childTnLst>
+                        <p:par>
+                          <p:cTn id="12" fill="hold">
+                            <p:stCondLst>
+                              <p:cond delay="0"/>
+                            </p:stCondLst>
+                            <p:childTnLst>
+                              <p:par>
+                                <p:cTn id="13" presetID="10" presetClass="entr" presetSubtype="0" fill="hold" nodeType="clickEffect">
+                                  <p:stCondLst>
+                                    <p:cond delay="0"/>
+                                  </p:stCondLst>
+                                  <p:childTnLst>
+                                    <p:set>
+                                      <p:cBhvr>
+                                        <p:cTn id="14" dur="1" fill="hold">
+                                          <p:stCondLst>
+                                            <p:cond delay="0"/>
+                                          </p:stCondLst>
+                                        </p:cTn>
+                                        <p:tgtEl>
+                                          <p:spTgt spid="3">
+                                            <p:txEl>
+                                              <p:pRg st="1" end="1"/>
+                                            </p:txEl>
+                                          </p:spTgt>
+                                        </p:tgtEl>
+                                        <p:attrNameLst>
+                                          <p:attrName>style.visibility</p:attrName>
+                                        </p:attrNameLst>
+                                      </p:cBhvr>
+                                      <p:to>
+                                        <p:strVal val="visible"/>
+                                      </p:to>
+                                    </p:set>
+                                    <p:animEffect transition="in" filter="fade">
+                                      <p:cBhvr>
+                                        <p:cTn id="15" dur="500"/>
+                                        <p:tgtEl>
+                                          <p:spTgt spid="3">
+                                            <p:txEl>
+                                              <p:pRg st="1" end="1"/>
+                                            </p:txEl>
+                                          </p:spTgt>
+                                        </p:tgtEl>
+                                      </p:cBhvr>
+                                    </p:animEffect>
+                                  </p:childTnLst>
+                                </p:cTn>
+                              </p:par>
+                              <p:par>
+                                <p:cTn id="16" presetID="19" presetClass="emph" presetSubtype="0" fill="hold" nodeType="withEffect">
+                                  <p:stCondLst>
+                                    <p:cond delay="0"/>
+                                  </p:stCondLst>
+                                  <p:childTnLst>
+                                    <p:animClr clrSpc="rgb" dir="cw">
+                                      <p:cBhvr override="childStyle">
+                                        <p:cTn id="17" dur="500" fill="hold"/>
+                                        <p:tgtEl>
+                                          <p:spTgt spid="3">
+                                            <p:txEl>
+                                              <p:pRg st="0" end="0"/>
+                                            </p:txEl>
+                                          </p:spTgt>
+                                        </p:tgtEl>
+                                        <p:attrNameLst>
+                                          <p:attrName>style.color</p:attrName>
+                                        </p:attrNameLst>
+                                      </p:cBhvr>
+                                      <p:to>
+                                        <a:srgbClr val="7CAFE2"/>
+                                      </p:to>
+                                    </p:animClr>
+                                    <p:animClr clrSpc="rgb" dir="cw">
+                                      <p:cBhvr>
+                                        <p:cTn id="18" dur="500" fill="hold"/>
+                                        <p:tgtEl>
+                                          <p:spTgt spid="3">
+                                            <p:txEl>
+                                              <p:pRg st="0" end="0"/>
+                                            </p:txEl>
+                                          </p:spTgt>
+                                        </p:tgtEl>
+                                        <p:attrNameLst>
+                                          <p:attrName>fillcolor</p:attrName>
+                                        </p:attrNameLst>
+                                      </p:cBhvr>
+                                      <p:to>
+                                        <a:srgbClr val="7CAFE2"/>
+                                      </p:to>
+                                    </p:animClr>
+                                    <p:set>
+                                      <p:cBhvr>
+                                        <p:cTn id="19" dur="500" fill="hold"/>
+                                        <p:tgtEl>
+                                          <p:spTgt spid="3">
+                                            <p:txEl>
+                                              <p:pRg st="0" end="0"/>
+                                            </p:txEl>
+                                          </p:spTgt>
+                                        </p:tgtEl>
+                                        <p:attrNameLst>
+                                          <p:attrName>fill.type</p:attrName>
+                                        </p:attrNameLst>
+                                      </p:cBhvr>
+                                      <p:to>
+                                        <p:strVal val="solid"/>
+                                      </p:to>
+                                    </p:set>
+                                    <p:set>
+                                      <p:cBhvr>
+                                        <p:cTn id="20" dur="500" fill="hold"/>
+                                        <p:tgtEl>
+                                          <p:spTgt spid="3">
+                                            <p:txEl>
+                                              <p:pRg st="0" end="0"/>
+                                            </p:txEl>
+                                          </p:spTgt>
+                                        </p:tgtEl>
+                                        <p:attrNameLst>
+                                          <p:attrName>fill.on</p:attrName>
+                                        </p:attrNameLst>
+                                      </p:cBhvr>
+                                      <p:to>
+                                        <p:strVal val="true"/>
+                                      </p:to>
+                                    </p:set>
+                                  </p:childTnLst>
+                                </p:cTn>
+                              </p:par>
+                            </p:childTnLst>
+                          </p:cTn>
+                        </p:par>
+                      </p:childTnLst>
+                    </p:cTn>
+                  </p:par>
+                  <p:par>
+                    <p:cTn id="21" fill="hold">
+                      <p:stCondLst>
+                        <p:cond delay="indefinite"/>
+                      </p:stCondLst>
+                      <p:childTnLst>
+                        <p:par>
+                          <p:cTn id="22" fill="hold">
+                            <p:stCondLst>
+                              <p:cond delay="0"/>
+                            </p:stCondLst>
+                            <p:childTnLst>
+                              <p:par>
+                                <p:cTn id="23" presetID="10" presetClass="entr" presetSubtype="0" fill="hold" nodeType="clickEffect">
+                                  <p:stCondLst>
+                                    <p:cond delay="0"/>
+                                  </p:stCondLst>
+                                  <p:childTnLst>
+                                    <p:set>
+                                      <p:cBhvr>
+                                        <p:cTn id="24" dur="1" fill="hold">
+                                          <p:stCondLst>
+                                            <p:cond delay="0"/>
+                                          </p:stCondLst>
+                                        </p:cTn>
+                                        <p:tgtEl>
+                                          <p:spTgt spid="3">
+                                            <p:txEl>
+                                              <p:pRg st="2" end="2"/>
+                                            </p:txEl>
+                                          </p:spTgt>
+                                        </p:tgtEl>
+                                        <p:attrNameLst>
+                                          <p:attrName>style.visibility</p:attrName>
+                                        </p:attrNameLst>
+                                      </p:cBhvr>
+                                      <p:to>
+                                        <p:strVal val="visible"/>
+                                      </p:to>
+                                    </p:set>
+                                    <p:animEffect transition="in" filter="fade">
+                                      <p:cBhvr>
+                                        <p:cTn id="25" dur="500"/>
+                                        <p:tgtEl>
+                                          <p:spTgt spid="3">
+                                            <p:txEl>
+                                              <p:pRg st="2" end="2"/>
+                                            </p:txEl>
+                                          </p:spTgt>
+                                        </p:tgtEl>
+                                      </p:cBhvr>
+                                    </p:animEffect>
+                                  </p:childTnLst>
+                                </p:cTn>
+                              </p:par>
+                              <p:par>
+                                <p:cTn id="26" presetID="19" presetClass="emph" presetSubtype="0" fill="hold" nodeType="withEffect">
+                                  <p:stCondLst>
+                                    <p:cond delay="0"/>
+                                  </p:stCondLst>
+                                  <p:childTnLst>
+                                    <p:animClr clrSpc="rgb" dir="cw">
+                                      <p:cBhvr override="childStyle">
+                                        <p:cTn id="27" dur="500" fill="hold"/>
+                                        <p:tgtEl>
+                                          <p:spTgt spid="3">
+                                            <p:txEl>
+                                              <p:pRg st="1" end="1"/>
+                                            </p:txEl>
+                                          </p:spTgt>
+                                        </p:tgtEl>
+                                        <p:attrNameLst>
+                                          <p:attrName>style.color</p:attrName>
+                                        </p:attrNameLst>
+                                      </p:cBhvr>
+                                      <p:to>
+                                        <a:srgbClr val="7CAFE2"/>
+                                      </p:to>
+                                    </p:animClr>
+                                    <p:animClr clrSpc="rgb" dir="cw">
+                                      <p:cBhvr>
+                                        <p:cTn id="28" dur="500" fill="hold"/>
+                                        <p:tgtEl>
+                                          <p:spTgt spid="3">
+                                            <p:txEl>
+                                              <p:pRg st="1" end="1"/>
+                                            </p:txEl>
+                                          </p:spTgt>
+                                        </p:tgtEl>
+                                        <p:attrNameLst>
+                                          <p:attrName>fillcolor</p:attrName>
+                                        </p:attrNameLst>
+                                      </p:cBhvr>
+                                      <p:to>
+                                        <a:srgbClr val="7CAFE2"/>
+                                      </p:to>
+                                    </p:animClr>
+                                    <p:set>
+                                      <p:cBhvr>
+                                        <p:cTn id="29" dur="500" fill="hold"/>
+                                        <p:tgtEl>
+                                          <p:spTgt spid="3">
+                                            <p:txEl>
+                                              <p:pRg st="1" end="1"/>
+                                            </p:txEl>
+                                          </p:spTgt>
+                                        </p:tgtEl>
+                                        <p:attrNameLst>
+                                          <p:attrName>fill.type</p:attrName>
+                                        </p:attrNameLst>
+                                      </p:cBhvr>
+                                      <p:to>
+                                        <p:strVal val="solid"/>
+                                      </p:to>
+                                    </p:set>
+                                    <p:set>
+                                      <p:cBhvr>
+                                        <p:cTn id="30" dur="500" fill="hold"/>
+                                        <p:tgtEl>
+                                          <p:spTgt spid="3">
+                                            <p:txEl>
+                                              <p:pRg st="1" end="1"/>
+                                            </p:txEl>
+                                          </p:spTgt>
+                                        </p:tgtEl>
+                                        <p:attrNameLst>
+                                          <p:attrName>fill.on</p:attrName>
+                                        </p:attrNameLst>
+                                      </p:cBhvr>
+                                      <p:to>
+                                        <p:strVal val="true"/>
+                                      </p:to>
+                                    </p:set>
+                                  </p:childTnLst>
+                                </p:cTn>
+                              </p:par>
+                            </p:childTnLst>
+                          </p:cTn>
+                        </p:par>
+                      </p:childTnLst>
+                    </p:cTn>
+                  </p:par>
+                  <p:par>
+                    <p:cTn id="31" fill="hold">
+                      <p:stCondLst>
+                        <p:cond delay="indefinite"/>
+                      </p:stCondLst>
+                      <p:childTnLst>
+                        <p:par>
+                          <p:cTn id="32" fill="hold">
+                            <p:stCondLst>
+                              <p:cond delay="0"/>
+                            </p:stCondLst>
+                            <p:childTnLst>
+                              <p:par>
+                                <p:cTn id="33" presetID="10" presetClass="entr" presetSubtype="0" fill="hold" nodeType="clickEffect">
+                                  <p:stCondLst>
+                                    <p:cond delay="0"/>
+                                  </p:stCondLst>
+                                  <p:childTnLst>
+                                    <p:set>
+                                      <p:cBhvr>
+                                        <p:cTn id="34" dur="1" fill="hold">
+                                          <p:stCondLst>
+                                            <p:cond delay="0"/>
+                                          </p:stCondLst>
+                                        </p:cTn>
+                                        <p:tgtEl>
+                                          <p:spTgt spid="3">
+                                            <p:txEl>
+                                              <p:pRg st="3" end="3"/>
+                                            </p:txEl>
+                                          </p:spTgt>
+                                        </p:tgtEl>
+                                        <p:attrNameLst>
+                                          <p:attrName>style.visibility</p:attrName>
+                                        </p:attrNameLst>
+                                      </p:cBhvr>
+                                      <p:to>
+                                        <p:strVal val="visible"/>
+                                      </p:to>
+                                    </p:set>
+                                    <p:animEffect transition="in" filter="fade">
+                                      <p:cBhvr>
+                                        <p:cTn id="35" dur="500"/>
+                                        <p:tgtEl>
+                                          <p:spTgt spid="3">
+                                            <p:txEl>
+                                              <p:pRg st="3" end="3"/>
+                                            </p:txEl>
+                                          </p:spTgt>
+                                        </p:tgtEl>
+                                      </p:cBhvr>
+                                    </p:animEffect>
+                                  </p:childTnLst>
+                                </p:cTn>
+                              </p:par>
+                              <p:par>
+                                <p:cTn id="36" presetID="19" presetClass="emph" presetSubtype="0" fill="hold" nodeType="withEffect">
+                                  <p:stCondLst>
+                                    <p:cond delay="0"/>
+                                  </p:stCondLst>
+                                  <p:childTnLst>
+                                    <p:animClr clrSpc="rgb" dir="cw">
+                                      <p:cBhvr override="childStyle">
+                                        <p:cTn id="37" dur="500" fill="hold"/>
+                                        <p:tgtEl>
+                                          <p:spTgt spid="3">
+                                            <p:txEl>
+                                              <p:pRg st="2" end="2"/>
+                                            </p:txEl>
+                                          </p:spTgt>
+                                        </p:tgtEl>
+                                        <p:attrNameLst>
+                                          <p:attrName>style.color</p:attrName>
+                                        </p:attrNameLst>
+                                      </p:cBhvr>
+                                      <p:to>
+                                        <a:srgbClr val="7CAFE2"/>
+                                      </p:to>
+                                    </p:animClr>
+                                    <p:animClr clrSpc="rgb" dir="cw">
+                                      <p:cBhvr>
+                                        <p:cTn id="38" dur="500" fill="hold"/>
+                                        <p:tgtEl>
+                                          <p:spTgt spid="3">
+                                            <p:txEl>
+                                              <p:pRg st="2" end="2"/>
+                                            </p:txEl>
+                                          </p:spTgt>
+                                        </p:tgtEl>
+                                        <p:attrNameLst>
+                                          <p:attrName>fillcolor</p:attrName>
+                                        </p:attrNameLst>
+                                      </p:cBhvr>
+                                      <p:to>
+                                        <a:srgbClr val="7CAFE2"/>
+                                      </p:to>
+                                    </p:animClr>
+                                    <p:set>
+                                      <p:cBhvr>
+                                        <p:cTn id="39" dur="500" fill="hold"/>
+                                        <p:tgtEl>
+                                          <p:spTgt spid="3">
+                                            <p:txEl>
+                                              <p:pRg st="2" end="2"/>
+                                            </p:txEl>
+                                          </p:spTgt>
+                                        </p:tgtEl>
+                                        <p:attrNameLst>
+                                          <p:attrName>fill.type</p:attrName>
+                                        </p:attrNameLst>
+                                      </p:cBhvr>
+                                      <p:to>
+                                        <p:strVal val="solid"/>
+                                      </p:to>
+                                    </p:set>
+                                    <p:set>
+                                      <p:cBhvr>
+                                        <p:cTn id="40" dur="500" fill="hold"/>
+                                        <p:tgtEl>
+                                          <p:spTgt spid="3">
+                                            <p:txEl>
+                                              <p:pRg st="2" end="2"/>
+                                            </p:txEl>
+                                          </p:spTgt>
+                                        </p:tgtEl>
+                                        <p:attrNameLst>
+                                          <p:attrName>fill.on</p:attrName>
+                                        </p:attrNameLst>
+                                      </p:cBhvr>
+                                      <p:to>
+                                        <p:strVal val="true"/>
+                                      </p:to>
+                                    </p:set>
+                                  </p:childTnLst>
+                                </p:cTn>
+                              </p:par>
+                            </p:childTnLst>
+                          </p:cTn>
+                        </p:par>
+                      </p:childTnLst>
+                    </p:cTn>
+                  </p:par>
+                  <p:par>
+                    <p:cTn id="41" fill="hold">
+                      <p:stCondLst>
+                        <p:cond delay="indefinite"/>
+                      </p:stCondLst>
+                      <p:childTnLst>
+                        <p:par>
+                          <p:cTn id="42" fill="hold">
+                            <p:stCondLst>
+                              <p:cond delay="0"/>
+                            </p:stCondLst>
+                            <p:childTnLst>
+                              <p:par>
+                                <p:cTn id="43" presetID="10" presetClass="entr" presetSubtype="0" fill="hold" nodeType="clickEffect">
+                                  <p:stCondLst>
+                                    <p:cond delay="0"/>
+                                  </p:stCondLst>
+                                  <p:childTnLst>
+                                    <p:set>
+                                      <p:cBhvr>
+                                        <p:cTn id="44" dur="1" fill="hold">
+                                          <p:stCondLst>
+                                            <p:cond delay="0"/>
+                                          </p:stCondLst>
+                                        </p:cTn>
+                                        <p:tgtEl>
+                                          <p:spTgt spid="3">
+                                            <p:txEl>
+                                              <p:pRg st="4" end="4"/>
+                                            </p:txEl>
+                                          </p:spTgt>
+                                        </p:tgtEl>
+                                        <p:attrNameLst>
+                                          <p:attrName>style.visibility</p:attrName>
+                                        </p:attrNameLst>
+                                      </p:cBhvr>
+                                      <p:to>
+                                        <p:strVal val="visible"/>
+                                      </p:to>
+                                    </p:set>
+                                    <p:animEffect transition="in" filter="fade">
+                                      <p:cBhvr>
+                                        <p:cTn id="45" dur="500"/>
+                                        <p:tgtEl>
+                                          <p:spTgt spid="3">
+                                            <p:txEl>
+                                              <p:pRg st="4" end="4"/>
+                                            </p:txEl>
+                                          </p:spTgt>
+                                        </p:tgtEl>
+                                      </p:cBhvr>
+                                    </p:animEffect>
+                                  </p:childTnLst>
+                                </p:cTn>
+                              </p:par>
+                              <p:par>
+                                <p:cTn id="46" presetID="19" presetClass="emph" presetSubtype="0" fill="hold" nodeType="withEffect">
+                                  <p:stCondLst>
+                                    <p:cond delay="0"/>
+                                  </p:stCondLst>
+                                  <p:childTnLst>
+                                    <p:animClr clrSpc="rgb" dir="cw">
+                                      <p:cBhvr override="childStyle">
+                                        <p:cTn id="47" dur="500" fill="hold"/>
+                                        <p:tgtEl>
+                                          <p:spTgt spid="3">
+                                            <p:txEl>
+                                              <p:pRg st="3" end="3"/>
+                                            </p:txEl>
+                                          </p:spTgt>
+                                        </p:tgtEl>
+                                        <p:attrNameLst>
+                                          <p:attrName>style.color</p:attrName>
+                                        </p:attrNameLst>
+                                      </p:cBhvr>
+                                      <p:to>
+                                        <a:srgbClr val="7CAFE2"/>
+                                      </p:to>
+                                    </p:animClr>
+                                    <p:animClr clrSpc="rgb" dir="cw">
+                                      <p:cBhvr>
+                                        <p:cTn id="48" dur="500" fill="hold"/>
+                                        <p:tgtEl>
+                                          <p:spTgt spid="3">
+                                            <p:txEl>
+                                              <p:pRg st="3" end="3"/>
+                                            </p:txEl>
+                                          </p:spTgt>
+                                        </p:tgtEl>
+                                        <p:attrNameLst>
+                                          <p:attrName>fillcolor</p:attrName>
+                                        </p:attrNameLst>
+                                      </p:cBhvr>
+                                      <p:to>
+                                        <a:srgbClr val="7CAFE2"/>
+                                      </p:to>
+                                    </p:animClr>
+                                    <p:set>
+                                      <p:cBhvr>
+                                        <p:cTn id="49" dur="500" fill="hold"/>
+                                        <p:tgtEl>
+                                          <p:spTgt spid="3">
+                                            <p:txEl>
+                                              <p:pRg st="3" end="3"/>
+                                            </p:txEl>
+                                          </p:spTgt>
+                                        </p:tgtEl>
+                                        <p:attrNameLst>
+                                          <p:attrName>fill.type</p:attrName>
+                                        </p:attrNameLst>
+                                      </p:cBhvr>
+                                      <p:to>
+                                        <p:strVal val="solid"/>
+                                      </p:to>
+                                    </p:set>
+                                    <p:set>
+                                      <p:cBhvr>
+                                        <p:cTn id="50" dur="500" fill="hold"/>
+                                        <p:tgtEl>
+                                          <p:spTgt spid="3">
+                                            <p:txEl>
+                                              <p:pRg st="3" end="3"/>
+                                            </p:txEl>
+                                          </p:spTgt>
+                                        </p:tgtEl>
+                                        <p:attrNameLst>
+                                          <p:attrName>fill.on</p:attrName>
+                                        </p:attrNameLst>
+                                      </p:cBhvr>
+                                      <p:to>
+                                        <p:strVal val="true"/>
+                                      </p:to>
+                                    </p:set>
+                                  </p:childTnLst>
+                                </p:cTn>
+                              </p:par>
+                            </p:childTnLst>
+                          </p:cTn>
+                        </p:par>
+                      </p:childTnLst>
+                    </p:cTn>
+                  </p:par>
+                  <p:par>
+                    <p:cTn id="51" fill="hold">
+                      <p:stCondLst>
+                        <p:cond delay="indefinite"/>
+                      </p:stCondLst>
+                      <p:childTnLst>
+                        <p:par>
+                          <p:cTn id="52" fill="hold">
+                            <p:stCondLst>
+                              <p:cond delay="0"/>
+                            </p:stCondLst>
+                            <p:childTnLst>
+                              <p:par>
+                                <p:cTn id="53" presetID="10" presetClass="entr" presetSubtype="0" fill="hold" nodeType="clickEffect">
+                                  <p:stCondLst>
+                                    <p:cond delay="0"/>
+                                  </p:stCondLst>
+                                  <p:childTnLst>
+                                    <p:set>
+                                      <p:cBhvr>
+                                        <p:cTn id="54" dur="1" fill="hold">
+                                          <p:stCondLst>
+                                            <p:cond delay="0"/>
+                                          </p:stCondLst>
+                                        </p:cTn>
+                                        <p:tgtEl>
+                                          <p:spTgt spid="3">
+                                            <p:txEl>
+                                              <p:pRg st="5" end="5"/>
+                                            </p:txEl>
+                                          </p:spTgt>
+                                        </p:tgtEl>
+                                        <p:attrNameLst>
+                                          <p:attrName>style.visibility</p:attrName>
+                                        </p:attrNameLst>
+                                      </p:cBhvr>
+                                      <p:to>
+                                        <p:strVal val="visible"/>
+                                      </p:to>
+                                    </p:set>
+                                    <p:animEffect transition="in" filter="fade">
+                                      <p:cBhvr>
+                                        <p:cTn id="55" dur="500"/>
+                                        <p:tgtEl>
+                                          <p:spTgt spid="3">
+                                            <p:txEl>
+                                              <p:pRg st="5" end="5"/>
+                                            </p:txEl>
+                                          </p:spTgt>
+                                        </p:tgtEl>
+                                      </p:cBhvr>
+                                    </p:animEffect>
+                                  </p:childTnLst>
+                                </p:cTn>
+                              </p:par>
+                              <p:par>
+                                <p:cTn id="56" presetID="19" presetClass="emph" presetSubtype="0" fill="hold" nodeType="withEffect">
+                                  <p:stCondLst>
+                                    <p:cond delay="0"/>
+                                  </p:stCondLst>
+                                  <p:childTnLst>
+                                    <p:animClr clrSpc="rgb" dir="cw">
+                                      <p:cBhvr override="childStyle">
+                                        <p:cTn id="57" dur="500" fill="hold"/>
+                                        <p:tgtEl>
+                                          <p:spTgt spid="3">
+                                            <p:txEl>
+                                              <p:pRg st="4" end="4"/>
+                                            </p:txEl>
+                                          </p:spTgt>
+                                        </p:tgtEl>
+                                        <p:attrNameLst>
+                                          <p:attrName>style.color</p:attrName>
+                                        </p:attrNameLst>
+                                      </p:cBhvr>
+                                      <p:to>
+                                        <a:srgbClr val="7CAFE2"/>
+                                      </p:to>
+                                    </p:animClr>
+                                    <p:animClr clrSpc="rgb" dir="cw">
+                                      <p:cBhvr>
+                                        <p:cTn id="58" dur="500" fill="hold"/>
+                                        <p:tgtEl>
+                                          <p:spTgt spid="3">
+                                            <p:txEl>
+                                              <p:pRg st="4" end="4"/>
+                                            </p:txEl>
+                                          </p:spTgt>
+                                        </p:tgtEl>
+                                        <p:attrNameLst>
+                                          <p:attrName>fillcolor</p:attrName>
+                                        </p:attrNameLst>
+                                      </p:cBhvr>
+                                      <p:to>
+                                        <a:srgbClr val="7CAFE2"/>
+                                      </p:to>
+                                    </p:animClr>
+                                    <p:set>
+                                      <p:cBhvr>
+                                        <p:cTn id="59" dur="500" fill="hold"/>
+                                        <p:tgtEl>
+                                          <p:spTgt spid="3">
+                                            <p:txEl>
+                                              <p:pRg st="4" end="4"/>
+                                            </p:txEl>
+                                          </p:spTgt>
+                                        </p:tgtEl>
+                                        <p:attrNameLst>
+                                          <p:attrName>fill.type</p:attrName>
+                                        </p:attrNameLst>
+                                      </p:cBhvr>
+                                      <p:to>
+                                        <p:strVal val="solid"/>
+                                      </p:to>
+                                    </p:set>
+                                    <p:set>
+                                      <p:cBhvr>
+                                        <p:cTn id="60" dur="500" fill="hold"/>
+                                        <p:tgtEl>
+                                          <p:spTgt spid="3">
+                                            <p:txEl>
+                                              <p:pRg st="4" end="4"/>
+                                            </p:txEl>
+                                          </p:spTgt>
+                                        </p:tgtEl>
+                                        <p:attrNameLst>
+                                          <p:attrName>fill.on</p:attrName>
+                                        </p:attrNameLst>
+                                      </p:cBhvr>
+                                      <p:to>
+                                        <p:strVal val="true"/>
+                                      </p:to>
+                                    </p:set>
+                                  </p:childTnLst>
+                                </p:cTn>
+                              </p:par>
+                            </p:childTnLst>
+                          </p:cTn>
+                        </p:par>
+                      </p:childTnLst>
+                    </p:cTn>
+                  </p:par>
+                  <p:par>
+                    <p:cTn id="61" fill="hold">
+                      <p:stCondLst>
+                        <p:cond delay="indefinite"/>
+                      </p:stCondLst>
+                      <p:childTnLst>
+                        <p:par>
+                          <p:cTn id="62" fill="hold">
+                            <p:stCondLst>
+                              <p:cond delay="0"/>
+                            </p:stCondLst>
+                            <p:childTnLst>
+                              <p:par>
+                                <p:cTn id="63" presetID="42" presetClass="path" presetSubtype="0" accel="50000" decel="50000" fill="hold" nodeType="clickEffect">
                                   <p:stCondLst>
                                     <p:cond delay="0"/>
                                   </p:stCondLst>
                                   <p:childTnLst>
                                     <p:animMotion origin="layout" path="M -2.29167E-6 -4.81481E-6 L -2.29167E-6 0.18612 " pathEditMode="relative" rAng="0" ptsTypes="AA">
                                       <p:cBhvr>
-                                        <p:cTn id="6" dur="2000" fill="hold"/>
+                                        <p:cTn id="64" dur="2000" fill="hold"/>
                                         <p:tgtEl>
                                           <p:spTgt spid="20"/>
                                         </p:tgtEl>
@@ -8332,14 +10727,14 @@
                                 </p:cTn>
                               </p:par>
                               <p:par>
-                                <p:cTn id="7" presetID="19" presetClass="emph" presetSubtype="0" fill="hold" nodeType="withEffect">
+                                <p:cTn id="65" presetID="19" presetClass="emph" presetSubtype="0" fill="hold" nodeType="withEffect">
                                   <p:stCondLst>
                                     <p:cond delay="800"/>
                                   </p:stCondLst>
                                   <p:childTnLst>
                                     <p:animClr clrSpc="rgb" dir="cw">
                                       <p:cBhvr override="childStyle">
-                                        <p:cTn id="8" dur="500" fill="hold"/>
+                                        <p:cTn id="66" dur="500" fill="hold"/>
                                         <p:tgtEl>
                                           <p:spTgt spid="4">
                                             <p:txEl>
@@ -8357,7 +10752,7 @@
                                     </p:animClr>
                                     <p:animClr clrSpc="rgb" dir="cw">
                                       <p:cBhvr>
-                                        <p:cTn id="9" dur="500" fill="hold"/>
+                                        <p:cTn id="67" dur="500" fill="hold"/>
                                         <p:tgtEl>
                                           <p:spTgt spid="4">
                                             <p:txEl>
@@ -8375,7 +10770,7 @@
                                     </p:animClr>
                                     <p:set>
                                       <p:cBhvr>
-                                        <p:cTn id="10" dur="500" fill="hold"/>
+                                        <p:cTn id="68" dur="500" fill="hold"/>
                                         <p:tgtEl>
                                           <p:spTgt spid="4">
                                             <p:txEl>
@@ -8393,7 +10788,7 @@
                                     </p:set>
                                     <p:set>
                                       <p:cBhvr>
-                                        <p:cTn id="11" dur="500" fill="hold"/>
+                                        <p:cTn id="69" dur="500" fill="hold"/>
                                         <p:tgtEl>
                                           <p:spTgt spid="4">
                                             <p:txEl>
@@ -8413,14 +10808,14 @@
                                 </p:cTn>
                               </p:par>
                               <p:par>
-                                <p:cTn id="12" presetID="19" presetClass="emph" presetSubtype="0" fill="hold" nodeType="withEffect">
+                                <p:cTn id="70" presetID="19" presetClass="emph" presetSubtype="0" fill="hold" nodeType="withEffect">
                                   <p:stCondLst>
                                     <p:cond delay="800"/>
                                   </p:stCondLst>
                                   <p:childTnLst>
                                     <p:animClr clrSpc="rgb" dir="cw">
                                       <p:cBhvr override="childStyle">
-                                        <p:cTn id="13" dur="500" fill="hold"/>
+                                        <p:cTn id="71" dur="500" fill="hold"/>
                                         <p:tgtEl>
                                           <p:spTgt spid="4">
                                             <p:txEl>
@@ -8438,7 +10833,7 @@
                                     </p:animClr>
                                     <p:animClr clrSpc="rgb" dir="cw">
                                       <p:cBhvr>
-                                        <p:cTn id="14" dur="500" fill="hold"/>
+                                        <p:cTn id="72" dur="500" fill="hold"/>
                                         <p:tgtEl>
                                           <p:spTgt spid="4">
                                             <p:txEl>
@@ -8456,7 +10851,7 @@
                                     </p:animClr>
                                     <p:set>
                                       <p:cBhvr>
-                                        <p:cTn id="15" dur="500" fill="hold"/>
+                                        <p:cTn id="73" dur="500" fill="hold"/>
                                         <p:tgtEl>
                                           <p:spTgt spid="4">
                                             <p:txEl>
@@ -8474,7 +10869,7 @@
                                     </p:set>
                                     <p:set>
                                       <p:cBhvr>
-                                        <p:cTn id="16" dur="500" fill="hold"/>
+                                        <p:cTn id="74" dur="500" fill="hold"/>
                                         <p:tgtEl>
                                           <p:spTgt spid="4">
                                             <p:txEl>
@@ -8494,14 +10889,14 @@
                                 </p:cTn>
                               </p:par>
                               <p:par>
-                                <p:cTn id="17" presetID="19" presetClass="emph" presetSubtype="0" fill="hold" nodeType="withEffect">
+                                <p:cTn id="75" presetID="19" presetClass="emph" presetSubtype="0" fill="hold" nodeType="withEffect">
                                   <p:stCondLst>
                                     <p:cond delay="800"/>
                                   </p:stCondLst>
                                   <p:childTnLst>
                                     <p:animClr clrSpc="rgb" dir="cw">
                                       <p:cBhvr override="childStyle">
-                                        <p:cTn id="18" dur="500" fill="hold"/>
+                                        <p:cTn id="76" dur="500" fill="hold"/>
                                         <p:tgtEl>
                                           <p:spTgt spid="4">
                                             <p:txEl>
@@ -8519,7 +10914,7 @@
                                     </p:animClr>
                                     <p:animClr clrSpc="rgb" dir="cw">
                                       <p:cBhvr>
-                                        <p:cTn id="19" dur="500" fill="hold"/>
+                                        <p:cTn id="77" dur="500" fill="hold"/>
                                         <p:tgtEl>
                                           <p:spTgt spid="4">
                                             <p:txEl>
@@ -8537,7 +10932,7 @@
                                     </p:animClr>
                                     <p:set>
                                       <p:cBhvr>
-                                        <p:cTn id="20" dur="500" fill="hold"/>
+                                        <p:cTn id="78" dur="500" fill="hold"/>
                                         <p:tgtEl>
                                           <p:spTgt spid="4">
                                             <p:txEl>
@@ -8555,7 +10950,7 @@
                                     </p:set>
                                     <p:set>
                                       <p:cBhvr>
-                                        <p:cTn id="21" dur="500" fill="hold"/>
+                                        <p:cTn id="79" dur="500" fill="hold"/>
                                         <p:tgtEl>
                                           <p:spTgt spid="4">
                                             <p:txEl>
@@ -8575,14 +10970,14 @@
                                 </p:cTn>
                               </p:par>
                               <p:par>
-                                <p:cTn id="22" presetID="19" presetClass="emph" presetSubtype="0" fill="hold" nodeType="withEffect">
+                                <p:cTn id="80" presetID="19" presetClass="emph" presetSubtype="0" fill="hold" nodeType="withEffect">
                                   <p:stCondLst>
                                     <p:cond delay="800"/>
                                   </p:stCondLst>
                                   <p:childTnLst>
                                     <p:animClr clrSpc="rgb" dir="cw">
                                       <p:cBhvr override="childStyle">
-                                        <p:cTn id="23" dur="500" fill="hold"/>
+                                        <p:cTn id="81" dur="500" fill="hold"/>
                                         <p:tgtEl>
                                           <p:spTgt spid="4">
                                             <p:txEl>
@@ -8600,7 +10995,7 @@
                                     </p:animClr>
                                     <p:animClr clrSpc="rgb" dir="cw">
                                       <p:cBhvr>
-                                        <p:cTn id="24" dur="500" fill="hold"/>
+                                        <p:cTn id="82" dur="500" fill="hold"/>
                                         <p:tgtEl>
                                           <p:spTgt spid="4">
                                             <p:txEl>
@@ -8618,7 +11013,7 @@
                                     </p:animClr>
                                     <p:set>
                                       <p:cBhvr>
-                                        <p:cTn id="25" dur="500" fill="hold"/>
+                                        <p:cTn id="83" dur="500" fill="hold"/>
                                         <p:tgtEl>
                                           <p:spTgt spid="4">
                                             <p:txEl>
@@ -8636,7 +11031,7 @@
                                     </p:set>
                                     <p:set>
                                       <p:cBhvr>
-                                        <p:cTn id="26" dur="500" fill="hold"/>
+                                        <p:cTn id="84" dur="500" fill="hold"/>
                                         <p:tgtEl>
                                           <p:spTgt spid="4">
                                             <p:txEl>
@@ -8650,6 +11045,299 @@
                                       </p:cBhvr>
                                       <p:to>
                                         <p:strVal val="true"/>
+                                      </p:to>
+                                    </p:set>
+                                  </p:childTnLst>
+                                </p:cTn>
+                              </p:par>
+                              <p:par>
+                                <p:cTn id="85" presetID="10" presetClass="exit" presetSubtype="0" fill="hold" grpId="1" nodeType="withEffect">
+                                  <p:stCondLst>
+                                    <p:cond delay="0"/>
+                                  </p:stCondLst>
+                                  <p:childTnLst>
+                                    <p:animEffect transition="out" filter="fade">
+                                      <p:cBhvr>
+                                        <p:cTn id="86" dur="500"/>
+                                        <p:tgtEl>
+                                          <p:spTgt spid="5"/>
+                                        </p:tgtEl>
+                                      </p:cBhvr>
+                                    </p:animEffect>
+                                    <p:set>
+                                      <p:cBhvr>
+                                        <p:cTn id="87" dur="1" fill="hold">
+                                          <p:stCondLst>
+                                            <p:cond delay="499"/>
+                                          </p:stCondLst>
+                                        </p:cTn>
+                                        <p:tgtEl>
+                                          <p:spTgt spid="5"/>
+                                        </p:tgtEl>
+                                        <p:attrNameLst>
+                                          <p:attrName>style.visibility</p:attrName>
+                                        </p:attrNameLst>
+                                      </p:cBhvr>
+                                      <p:to>
+                                        <p:strVal val="hidden"/>
+                                      </p:to>
+                                    </p:set>
+                                  </p:childTnLst>
+                                </p:cTn>
+                              </p:par>
+                              <p:par>
+                                <p:cTn id="88" presetID="10" presetClass="exit" presetSubtype="0" fill="hold" grpId="0" nodeType="withEffect">
+                                  <p:stCondLst>
+                                    <p:cond delay="0"/>
+                                  </p:stCondLst>
+                                  <p:childTnLst>
+                                    <p:animEffect transition="out" filter="fade">
+                                      <p:cBhvr>
+                                        <p:cTn id="89" dur="500"/>
+                                        <p:tgtEl>
+                                          <p:spTgt spid="3">
+                                            <p:txEl>
+                                              <p:pRg st="0" end="0"/>
+                                            </p:txEl>
+                                          </p:spTgt>
+                                        </p:tgtEl>
+                                      </p:cBhvr>
+                                    </p:animEffect>
+                                    <p:set>
+                                      <p:cBhvr>
+                                        <p:cTn id="90" dur="1" fill="hold">
+                                          <p:stCondLst>
+                                            <p:cond delay="499"/>
+                                          </p:stCondLst>
+                                        </p:cTn>
+                                        <p:tgtEl>
+                                          <p:spTgt spid="3">
+                                            <p:txEl>
+                                              <p:pRg st="0" end="0"/>
+                                            </p:txEl>
+                                          </p:spTgt>
+                                        </p:tgtEl>
+                                        <p:attrNameLst>
+                                          <p:attrName>style.visibility</p:attrName>
+                                        </p:attrNameLst>
+                                      </p:cBhvr>
+                                      <p:to>
+                                        <p:strVal val="hidden"/>
+                                      </p:to>
+                                    </p:set>
+                                  </p:childTnLst>
+                                </p:cTn>
+                              </p:par>
+                              <p:par>
+                                <p:cTn id="91" presetID="10" presetClass="exit" presetSubtype="0" fill="hold" grpId="0" nodeType="withEffect">
+                                  <p:stCondLst>
+                                    <p:cond delay="800"/>
+                                  </p:stCondLst>
+                                  <p:childTnLst>
+                                    <p:animEffect transition="out" filter="fade">
+                                      <p:cBhvr>
+                                        <p:cTn id="92" dur="500"/>
+                                        <p:tgtEl>
+                                          <p:spTgt spid="3">
+                                            <p:txEl>
+                                              <p:pRg st="1" end="1"/>
+                                            </p:txEl>
+                                          </p:spTgt>
+                                        </p:tgtEl>
+                                      </p:cBhvr>
+                                    </p:animEffect>
+                                    <p:set>
+                                      <p:cBhvr>
+                                        <p:cTn id="93" dur="1" fill="hold">
+                                          <p:stCondLst>
+                                            <p:cond delay="499"/>
+                                          </p:stCondLst>
+                                        </p:cTn>
+                                        <p:tgtEl>
+                                          <p:spTgt spid="3">
+                                            <p:txEl>
+                                              <p:pRg st="1" end="1"/>
+                                            </p:txEl>
+                                          </p:spTgt>
+                                        </p:tgtEl>
+                                        <p:attrNameLst>
+                                          <p:attrName>style.visibility</p:attrName>
+                                        </p:attrNameLst>
+                                      </p:cBhvr>
+                                      <p:to>
+                                        <p:strVal val="hidden"/>
+                                      </p:to>
+                                    </p:set>
+                                  </p:childTnLst>
+                                </p:cTn>
+                              </p:par>
+                              <p:par>
+                                <p:cTn id="94" presetID="10" presetClass="exit" presetSubtype="0" fill="hold" grpId="0" nodeType="withEffect">
+                                  <p:stCondLst>
+                                    <p:cond delay="800"/>
+                                  </p:stCondLst>
+                                  <p:childTnLst>
+                                    <p:animEffect transition="out" filter="fade">
+                                      <p:cBhvr>
+                                        <p:cTn id="95" dur="500"/>
+                                        <p:tgtEl>
+                                          <p:spTgt spid="3">
+                                            <p:txEl>
+                                              <p:pRg st="2" end="2"/>
+                                            </p:txEl>
+                                          </p:spTgt>
+                                        </p:tgtEl>
+                                      </p:cBhvr>
+                                    </p:animEffect>
+                                    <p:set>
+                                      <p:cBhvr>
+                                        <p:cTn id="96" dur="1" fill="hold">
+                                          <p:stCondLst>
+                                            <p:cond delay="499"/>
+                                          </p:stCondLst>
+                                        </p:cTn>
+                                        <p:tgtEl>
+                                          <p:spTgt spid="3">
+                                            <p:txEl>
+                                              <p:pRg st="2" end="2"/>
+                                            </p:txEl>
+                                          </p:spTgt>
+                                        </p:tgtEl>
+                                        <p:attrNameLst>
+                                          <p:attrName>style.visibility</p:attrName>
+                                        </p:attrNameLst>
+                                      </p:cBhvr>
+                                      <p:to>
+                                        <p:strVal val="hidden"/>
+                                      </p:to>
+                                    </p:set>
+                                  </p:childTnLst>
+                                </p:cTn>
+                              </p:par>
+                              <p:par>
+                                <p:cTn id="97" presetID="10" presetClass="exit" presetSubtype="0" fill="hold" grpId="0" nodeType="withEffect">
+                                  <p:stCondLst>
+                                    <p:cond delay="800"/>
+                                  </p:stCondLst>
+                                  <p:childTnLst>
+                                    <p:animEffect transition="out" filter="fade">
+                                      <p:cBhvr>
+                                        <p:cTn id="98" dur="500"/>
+                                        <p:tgtEl>
+                                          <p:spTgt spid="3">
+                                            <p:txEl>
+                                              <p:pRg st="3" end="3"/>
+                                            </p:txEl>
+                                          </p:spTgt>
+                                        </p:tgtEl>
+                                      </p:cBhvr>
+                                    </p:animEffect>
+                                    <p:set>
+                                      <p:cBhvr>
+                                        <p:cTn id="99" dur="1" fill="hold">
+                                          <p:stCondLst>
+                                            <p:cond delay="499"/>
+                                          </p:stCondLst>
+                                        </p:cTn>
+                                        <p:tgtEl>
+                                          <p:spTgt spid="3">
+                                            <p:txEl>
+                                              <p:pRg st="3" end="3"/>
+                                            </p:txEl>
+                                          </p:spTgt>
+                                        </p:tgtEl>
+                                        <p:attrNameLst>
+                                          <p:attrName>style.visibility</p:attrName>
+                                        </p:attrNameLst>
+                                      </p:cBhvr>
+                                      <p:to>
+                                        <p:strVal val="hidden"/>
+                                      </p:to>
+                                    </p:set>
+                                  </p:childTnLst>
+                                </p:cTn>
+                              </p:par>
+                              <p:par>
+                                <p:cTn id="100" presetID="10" presetClass="exit" presetSubtype="0" fill="hold" grpId="0" nodeType="withEffect">
+                                  <p:stCondLst>
+                                    <p:cond delay="800"/>
+                                  </p:stCondLst>
+                                  <p:childTnLst>
+                                    <p:animEffect transition="out" filter="fade">
+                                      <p:cBhvr>
+                                        <p:cTn id="101" dur="500"/>
+                                        <p:tgtEl>
+                                          <p:spTgt spid="3">
+                                            <p:txEl>
+                                              <p:pRg st="4" end="4"/>
+                                            </p:txEl>
+                                          </p:spTgt>
+                                        </p:tgtEl>
+                                      </p:cBhvr>
+                                    </p:animEffect>
+                                    <p:set>
+                                      <p:cBhvr>
+                                        <p:cTn id="102" dur="1" fill="hold">
+                                          <p:stCondLst>
+                                            <p:cond delay="499"/>
+                                          </p:stCondLst>
+                                        </p:cTn>
+                                        <p:tgtEl>
+                                          <p:spTgt spid="3">
+                                            <p:txEl>
+                                              <p:pRg st="4" end="4"/>
+                                            </p:txEl>
+                                          </p:spTgt>
+                                        </p:tgtEl>
+                                        <p:attrNameLst>
+                                          <p:attrName>style.visibility</p:attrName>
+                                        </p:attrNameLst>
+                                      </p:cBhvr>
+                                      <p:to>
+                                        <p:strVal val="hidden"/>
+                                      </p:to>
+                                    </p:set>
+                                  </p:childTnLst>
+                                </p:cTn>
+                              </p:par>
+                              <p:par>
+                                <p:cTn id="103" presetID="10" presetClass="exit" presetSubtype="0" fill="hold" grpId="0" nodeType="withEffect">
+                                  <p:stCondLst>
+                                    <p:cond delay="800"/>
+                                  </p:stCondLst>
+                                  <p:childTnLst>
+                                    <p:animEffect transition="out" filter="fade">
+                                      <p:cBhvr>
+                                        <p:cTn id="104" dur="500"/>
+                                        <p:tgtEl>
+                                          <p:spTgt spid="3">
+                                            <p:txEl>
+                                              <p:pRg st="5" end="5"/>
+                                            </p:txEl>
+                                          </p:spTgt>
+                                        </p:tgtEl>
+                                      </p:cBhvr>
+                                    </p:animEffect>
+                                    <p:set>
+                                      <p:cBhvr>
+                                        <p:cTn id="105" dur="1" fill="hold">
+                                          <p:stCondLst>
+                                            <p:cond delay="499"/>
+                                          </p:stCondLst>
+                                        </p:cTn>
+                                        <p:tgtEl>
+                                          <p:spTgt spid="3">
+                                            <p:txEl>
+                                              <p:pRg st="5" end="5"/>
+                                            </p:txEl>
+                                          </p:spTgt>
+                                        </p:tgtEl>
+                                        <p:attrNameLst>
+                                          <p:attrName>style.visibility</p:attrName>
+                                        </p:attrNameLst>
+                                      </p:cBhvr>
+                                      <p:to>
+                                        <p:strVal val="hidden"/>
                                       </p:to>
                                     </p:set>
                                   </p:childTnLst>
@@ -8682,6 +11370,11 @@
         </p:cTn>
       </p:par>
     </p:tnLst>
+    <p:bldLst>
+      <p:bldP spid="3" grpId="0" build="allAtOnce"/>
+      <p:bldP spid="5" grpId="0"/>
+      <p:bldP spid="5" grpId="1"/>
+    </p:bldLst>
   </p:timing>
 </p:sld>
 </file>
@@ -10087,6 +12780,18 @@
   <p:clrMapOvr>
     <a:masterClrMapping/>
   </p:clrMapOvr>
+  <mc:AlternateContent xmlns:mc="http://schemas.openxmlformats.org/markup-compatibility/2006">
+    <mc:Choice xmlns:p14="http://schemas.microsoft.com/office/powerpoint/2010/main" Requires="p14">
+      <p:transition spd="med" p14:dur="700">
+        <p:fade/>
+      </p:transition>
+    </mc:Choice>
+    <mc:Fallback>
+      <p:transition spd="med">
+        <p:fade/>
+      </p:transition>
+    </mc:Fallback>
+  </mc:AlternateContent>
   <p:timing>
     <p:tnLst>
       <p:par>
@@ -23237,6 +25942,83 @@
           </a:p>
         </p:txBody>
       </p:sp>
+      <p:sp>
+        <p:nvSpPr>
+          <p:cNvPr id="13" name="TextBox 12">
+            <a:extLst>
+              <a:ext uri="{FF2B5EF4-FFF2-40B4-BE49-F238E27FC236}">
+                <a16:creationId xmlns:a16="http://schemas.microsoft.com/office/drawing/2014/main" id="{71406E84-B673-8720-C77A-5F79E5792EEE}"/>
+              </a:ext>
+            </a:extLst>
+          </p:cNvPr>
+          <p:cNvSpPr txBox="1"/>
+          <p:nvPr/>
+        </p:nvSpPr>
+        <p:spPr>
+          <a:xfrm>
+            <a:off x="5491491" y="2227699"/>
+            <a:ext cx="1784463" cy="1848070"/>
+          </a:xfrm>
+          <a:prstGeom prst="rect">
+            <a:avLst/>
+          </a:prstGeom>
+          <a:noFill/>
+        </p:spPr>
+        <p:txBody>
+          <a:bodyPr wrap="none" rtlCol="0">
+            <a:spAutoFit/>
+          </a:bodyPr>
+          <a:lstStyle/>
+          <a:p>
+            <a:pPr marL="285750" indent="-285750">
+              <a:lnSpc>
+                <a:spcPct val="200000"/>
+              </a:lnSpc>
+              <a:buFont typeface="Arial" panose="020B0604020202020204" pitchFamily="34" charset="0"/>
+              <a:buChar char="•"/>
+            </a:pPr>
+            <a:r>
+              <a:rPr lang="en-CA" sz="2000" dirty="0">
+                <a:latin typeface="Kumbh Sans" pitchFamily="2" charset="0"/>
+                <a:cs typeface="Kumbh Sans" pitchFamily="2" charset="0"/>
+              </a:rPr>
+              <a:t>Works</a:t>
+            </a:r>
+          </a:p>
+          <a:p>
+            <a:pPr marL="285750" indent="-285750">
+              <a:lnSpc>
+                <a:spcPct val="200000"/>
+              </a:lnSpc>
+              <a:buFont typeface="Arial" panose="020B0604020202020204" pitchFamily="34" charset="0"/>
+              <a:buChar char="•"/>
+            </a:pPr>
+            <a:r>
+              <a:rPr lang="en-CA" sz="2000" dirty="0">
+                <a:latin typeface="Kumbh Sans" pitchFamily="2" charset="0"/>
+                <a:cs typeface="Kumbh Sans" pitchFamily="2" charset="0"/>
+              </a:rPr>
+              <a:t>Familiar</a:t>
+            </a:r>
+          </a:p>
+          <a:p>
+            <a:pPr marL="285750" indent="-285750">
+              <a:lnSpc>
+                <a:spcPct val="200000"/>
+              </a:lnSpc>
+              <a:buFont typeface="Arial" panose="020B0604020202020204" pitchFamily="34" charset="0"/>
+              <a:buChar char="•"/>
+            </a:pPr>
+            <a:r>
+              <a:rPr lang="en-CA" sz="2000" dirty="0">
+                <a:latin typeface="Kumbh Sans" pitchFamily="2" charset="0"/>
+                <a:cs typeface="Kumbh Sans" pitchFamily="2" charset="0"/>
+              </a:rPr>
+              <a:t>Pain points</a:t>
+            </a:r>
+          </a:p>
+        </p:txBody>
+      </p:sp>
     </p:spTree>
     <p:extLst>
       <p:ext uri="{BB962C8B-B14F-4D97-AF65-F5344CB8AC3E}">
@@ -23268,48 +26050,22 @@
                             </p:stCondLst>
                             <p:childTnLst>
                               <p:par>
-                                <p:cTn id="5" presetID="42" presetClass="path" presetSubtype="0" accel="50000" decel="50000" fill="hold" nodeType="clickEffect">
+                                <p:cTn id="5" presetID="10" presetClass="entr" presetSubtype="0" fill="hold" nodeType="clickEffect">
                                   <p:stCondLst>
                                     <p:cond delay="0"/>
                                   </p:stCondLst>
                                   <p:childTnLst>
-                                    <p:animMotion origin="layout" path="M -1.04167E-6 4.07407E-6 L -1.04167E-6 0.49791 " pathEditMode="relative" rAng="0" ptsTypes="AA">
-                                      <p:cBhvr>
-                                        <p:cTn id="6" dur="2000" fill="hold"/>
-                                        <p:tgtEl>
-                                          <p:spTgt spid="4">
-                                            <p:txEl>
-                                              <p:pRg st="2" end="2"/>
-                                            </p:txEl>
-                                          </p:spTgt>
-                                        </p:tgtEl>
-                                        <p:attrNameLst>
-                                          <p:attrName>ppt_x</p:attrName>
-                                          <p:attrName>ppt_y</p:attrName>
-                                        </p:attrNameLst>
-                                      </p:cBhvr>
-                                      <p:rCtr x="0" y="24884"/>
-                                    </p:animMotion>
-                                  </p:childTnLst>
-                                </p:cTn>
-                              </p:par>
-                              <p:par>
-                                <p:cTn id="7" presetID="22" presetClass="entr" presetSubtype="1" fill="hold" nodeType="withEffect">
-                                  <p:stCondLst>
-                                    <p:cond delay="300"/>
-                                  </p:stCondLst>
-                                  <p:childTnLst>
                                     <p:set>
                                       <p:cBhvr>
-                                        <p:cTn id="8" dur="1" fill="hold">
+                                        <p:cTn id="6" dur="1" fill="hold">
                                           <p:stCondLst>
                                             <p:cond delay="0"/>
                                           </p:stCondLst>
                                         </p:cTn>
                                         <p:tgtEl>
-                                          <p:spTgt spid="15">
-                                            <p:txEl>
-                                              <p:pRg st="2" end="2"/>
+                                          <p:spTgt spid="13">
+                                            <p:txEl>
+                                              <p:pRg st="0" end="0"/>
                                             </p:txEl>
                                           </p:spTgt>
                                         </p:tgtEl>
@@ -23321,13 +26077,13 @@
                                         <p:strVal val="visible"/>
                                       </p:to>
                                     </p:set>
-                                    <p:animEffect transition="in" filter="wipe(up)">
-                                      <p:cBhvr>
-                                        <p:cTn id="9" dur="500"/>
-                                        <p:tgtEl>
-                                          <p:spTgt spid="15">
-                                            <p:txEl>
-                                              <p:pRg st="2" end="2"/>
+                                    <p:animEffect transition="in" filter="fade">
+                                      <p:cBhvr>
+                                        <p:cTn id="7" dur="500"/>
+                                        <p:tgtEl>
+                                          <p:spTgt spid="13">
+                                            <p:txEl>
+                                              <p:pRg st="0" end="0"/>
                                             </p:txEl>
                                           </p:spTgt>
                                         </p:tgtEl>
@@ -23336,10 +26092,28 @@
                                   </p:childTnLst>
                                 </p:cTn>
                               </p:par>
+                            </p:childTnLst>
+                          </p:cTn>
+                        </p:par>
+                      </p:childTnLst>
+                    </p:cTn>
+                  </p:par>
+                  <p:par>
+                    <p:cTn id="8" fill="hold">
+                      <p:stCondLst>
+                        <p:cond delay="indefinite"/>
+                      </p:stCondLst>
+                      <p:childTnLst>
+                        <p:par>
+                          <p:cTn id="9" fill="hold">
+                            <p:stCondLst>
+                              <p:cond delay="0"/>
+                            </p:stCondLst>
+                            <p:childTnLst>
                               <p:par>
-                                <p:cTn id="10" presetID="22" presetClass="entr" presetSubtype="1" fill="hold" nodeType="withEffect">
+                                <p:cTn id="10" presetID="10" presetClass="entr" presetSubtype="0" fill="hold" nodeType="clickEffect">
                                   <p:stCondLst>
-                                    <p:cond delay="600"/>
+                                    <p:cond delay="0"/>
                                   </p:stCondLst>
                                   <p:childTnLst>
                                     <p:set>
@@ -23350,9 +26124,9 @@
                                           </p:stCondLst>
                                         </p:cTn>
                                         <p:tgtEl>
-                                          <p:spTgt spid="15">
-                                            <p:txEl>
-                                              <p:pRg st="3" end="3"/>
+                                          <p:spTgt spid="13">
+                                            <p:txEl>
+                                              <p:pRg st="1" end="1"/>
                                             </p:txEl>
                                           </p:spTgt>
                                         </p:tgtEl>
@@ -23364,13 +26138,13 @@
                                         <p:strVal val="visible"/>
                                       </p:to>
                                     </p:set>
-                                    <p:animEffect transition="in" filter="wipe(up)">
+                                    <p:animEffect transition="in" filter="fade">
                                       <p:cBhvr>
                                         <p:cTn id="12" dur="500"/>
                                         <p:tgtEl>
-                                          <p:spTgt spid="15">
-                                            <p:txEl>
-                                              <p:pRg st="3" end="3"/>
+                                          <p:spTgt spid="13">
+                                            <p:txEl>
+                                              <p:pRg st="1" end="1"/>
                                             </p:txEl>
                                           </p:spTgt>
                                         </p:tgtEl>
@@ -23379,21 +26153,116 @@
                                   </p:childTnLst>
                                 </p:cTn>
                               </p:par>
+                            </p:childTnLst>
+                          </p:cTn>
+                        </p:par>
+                      </p:childTnLst>
+                    </p:cTn>
+                  </p:par>
+                  <p:par>
+                    <p:cTn id="13" fill="hold">
+                      <p:stCondLst>
+                        <p:cond delay="indefinite"/>
+                      </p:stCondLst>
+                      <p:childTnLst>
+                        <p:par>
+                          <p:cTn id="14" fill="hold">
+                            <p:stCondLst>
+                              <p:cond delay="0"/>
+                            </p:stCondLst>
+                            <p:childTnLst>
                               <p:par>
-                                <p:cTn id="13" presetID="1" presetClass="exit" presetSubtype="0" fill="hold" nodeType="withEffect">
+                                <p:cTn id="15" presetID="10" presetClass="entr" presetSubtype="0" fill="hold" nodeType="clickEffect">
                                   <p:stCondLst>
                                     <p:cond delay="0"/>
                                   </p:stCondLst>
                                   <p:childTnLst>
                                     <p:set>
                                       <p:cBhvr>
-                                        <p:cTn id="14" dur="1" fill="hold">
+                                        <p:cTn id="16" dur="1" fill="hold">
                                           <p:stCondLst>
                                             <p:cond delay="0"/>
                                           </p:stCondLst>
                                         </p:cTn>
                                         <p:tgtEl>
-                                          <p:spTgt spid="2"/>
+                                          <p:spTgt spid="13">
+                                            <p:txEl>
+                                              <p:pRg st="2" end="2"/>
+                                            </p:txEl>
+                                          </p:spTgt>
+                                        </p:tgtEl>
+                                        <p:attrNameLst>
+                                          <p:attrName>style.visibility</p:attrName>
+                                        </p:attrNameLst>
+                                      </p:cBhvr>
+                                      <p:to>
+                                        <p:strVal val="visible"/>
+                                      </p:to>
+                                    </p:set>
+                                    <p:animEffect transition="in" filter="fade">
+                                      <p:cBhvr>
+                                        <p:cTn id="17" dur="500"/>
+                                        <p:tgtEl>
+                                          <p:spTgt spid="13">
+                                            <p:txEl>
+                                              <p:pRg st="2" end="2"/>
+                                            </p:txEl>
+                                          </p:spTgt>
+                                        </p:tgtEl>
+                                      </p:cBhvr>
+                                    </p:animEffect>
+                                  </p:childTnLst>
+                                </p:cTn>
+                              </p:par>
+                            </p:childTnLst>
+                          </p:cTn>
+                        </p:par>
+                      </p:childTnLst>
+                    </p:cTn>
+                  </p:par>
+                  <p:par>
+                    <p:cTn id="18" fill="hold">
+                      <p:stCondLst>
+                        <p:cond delay="indefinite"/>
+                      </p:stCondLst>
+                      <p:childTnLst>
+                        <p:par>
+                          <p:cTn id="19" fill="hold">
+                            <p:stCondLst>
+                              <p:cond delay="0"/>
+                            </p:stCondLst>
+                            <p:childTnLst>
+                              <p:par>
+                                <p:cTn id="20" presetID="10" presetClass="exit" presetSubtype="0" fill="hold" grpId="0" nodeType="clickEffect">
+                                  <p:stCondLst>
+                                    <p:cond delay="0"/>
+                                  </p:stCondLst>
+                                  <p:childTnLst>
+                                    <p:animEffect transition="out" filter="fade">
+                                      <p:cBhvr>
+                                        <p:cTn id="21" dur="500"/>
+                                        <p:tgtEl>
+                                          <p:spTgt spid="13">
+                                            <p:txEl>
+                                              <p:pRg st="0" end="0"/>
+                                            </p:txEl>
+                                          </p:spTgt>
+                                        </p:tgtEl>
+                                      </p:cBhvr>
+                                    </p:animEffect>
+                                    <p:set>
+                                      <p:cBhvr>
+                                        <p:cTn id="22" dur="1" fill="hold">
+                                          <p:stCondLst>
+                                            <p:cond delay="499"/>
+                                          </p:stCondLst>
+                                        </p:cTn>
+                                        <p:tgtEl>
+                                          <p:spTgt spid="13">
+                                            <p:txEl>
+                                              <p:pRg st="0" end="0"/>
+                                            </p:txEl>
+                                          </p:spTgt>
                                         </p:tgtEl>
                                         <p:attrNameLst>
                                           <p:attrName>style.visibility</p:attrName>
@@ -23407,14 +26276,239 @@
                                 </p:cTn>
                               </p:par>
                               <p:par>
-                                <p:cTn id="15" presetID="1" presetClass="entr" presetSubtype="0" fill="hold" grpId="1" nodeType="withEffect">
+                                <p:cTn id="23" presetID="10" presetClass="exit" presetSubtype="0" fill="hold" grpId="0" nodeType="withEffect">
+                                  <p:stCondLst>
+                                    <p:cond delay="0"/>
+                                  </p:stCondLst>
+                                  <p:childTnLst>
+                                    <p:animEffect transition="out" filter="fade">
+                                      <p:cBhvr>
+                                        <p:cTn id="24" dur="500"/>
+                                        <p:tgtEl>
+                                          <p:spTgt spid="13">
+                                            <p:txEl>
+                                              <p:pRg st="1" end="1"/>
+                                            </p:txEl>
+                                          </p:spTgt>
+                                        </p:tgtEl>
+                                      </p:cBhvr>
+                                    </p:animEffect>
+                                    <p:set>
+                                      <p:cBhvr>
+                                        <p:cTn id="25" dur="1" fill="hold">
+                                          <p:stCondLst>
+                                            <p:cond delay="499"/>
+                                          </p:stCondLst>
+                                        </p:cTn>
+                                        <p:tgtEl>
+                                          <p:spTgt spid="13">
+                                            <p:txEl>
+                                              <p:pRg st="1" end="1"/>
+                                            </p:txEl>
+                                          </p:spTgt>
+                                        </p:tgtEl>
+                                        <p:attrNameLst>
+                                          <p:attrName>style.visibility</p:attrName>
+                                        </p:attrNameLst>
+                                      </p:cBhvr>
+                                      <p:to>
+                                        <p:strVal val="hidden"/>
+                                      </p:to>
+                                    </p:set>
+                                  </p:childTnLst>
+                                </p:cTn>
+                              </p:par>
+                              <p:par>
+                                <p:cTn id="26" presetID="10" presetClass="exit" presetSubtype="0" fill="hold" grpId="0" nodeType="withEffect">
+                                  <p:stCondLst>
+                                    <p:cond delay="0"/>
+                                  </p:stCondLst>
+                                  <p:childTnLst>
+                                    <p:animEffect transition="out" filter="fade">
+                                      <p:cBhvr>
+                                        <p:cTn id="27" dur="500"/>
+                                        <p:tgtEl>
+                                          <p:spTgt spid="13">
+                                            <p:txEl>
+                                              <p:pRg st="2" end="2"/>
+                                            </p:txEl>
+                                          </p:spTgt>
+                                        </p:tgtEl>
+                                      </p:cBhvr>
+                                    </p:animEffect>
+                                    <p:set>
+                                      <p:cBhvr>
+                                        <p:cTn id="28" dur="1" fill="hold">
+                                          <p:stCondLst>
+                                            <p:cond delay="499"/>
+                                          </p:stCondLst>
+                                        </p:cTn>
+                                        <p:tgtEl>
+                                          <p:spTgt spid="13">
+                                            <p:txEl>
+                                              <p:pRg st="2" end="2"/>
+                                            </p:txEl>
+                                          </p:spTgt>
+                                        </p:tgtEl>
+                                        <p:attrNameLst>
+                                          <p:attrName>style.visibility</p:attrName>
+                                        </p:attrNameLst>
+                                      </p:cBhvr>
+                                      <p:to>
+                                        <p:strVal val="hidden"/>
+                                      </p:to>
+                                    </p:set>
+                                  </p:childTnLst>
+                                </p:cTn>
+                              </p:par>
+                              <p:par>
+                                <p:cTn id="29" presetID="42" presetClass="path" presetSubtype="0" accel="50000" decel="50000" fill="hold" nodeType="withEffect">
+                                  <p:stCondLst>
+                                    <p:cond delay="0"/>
+                                  </p:stCondLst>
+                                  <p:childTnLst>
+                                    <p:animMotion origin="layout" path="M -1.04167E-6 4.07407E-6 L -1.04167E-6 0.49791 " pathEditMode="relative" rAng="0" ptsTypes="AA">
+                                      <p:cBhvr>
+                                        <p:cTn id="30" dur="2000" fill="hold"/>
+                                        <p:tgtEl>
+                                          <p:spTgt spid="4">
+                                            <p:txEl>
+                                              <p:pRg st="2" end="2"/>
+                                            </p:txEl>
+                                          </p:spTgt>
+                                        </p:tgtEl>
+                                        <p:attrNameLst>
+                                          <p:attrName>ppt_x</p:attrName>
+                                          <p:attrName>ppt_y</p:attrName>
+                                        </p:attrNameLst>
+                                      </p:cBhvr>
+                                      <p:rCtr x="0" y="24884"/>
+                                    </p:animMotion>
+                                  </p:childTnLst>
+                                </p:cTn>
+                              </p:par>
+                              <p:par>
+                                <p:cTn id="31" presetID="22" presetClass="entr" presetSubtype="1" fill="hold" nodeType="withEffect">
+                                  <p:stCondLst>
+                                    <p:cond delay="300"/>
+                                  </p:stCondLst>
+                                  <p:childTnLst>
+                                    <p:set>
+                                      <p:cBhvr>
+                                        <p:cTn id="32" dur="1" fill="hold">
+                                          <p:stCondLst>
+                                            <p:cond delay="0"/>
+                                          </p:stCondLst>
+                                        </p:cTn>
+                                        <p:tgtEl>
+                                          <p:spTgt spid="15">
+                                            <p:txEl>
+                                              <p:pRg st="2" end="2"/>
+                                            </p:txEl>
+                                          </p:spTgt>
+                                        </p:tgtEl>
+                                        <p:attrNameLst>
+                                          <p:attrName>style.visibility</p:attrName>
+                                        </p:attrNameLst>
+                                      </p:cBhvr>
+                                      <p:to>
+                                        <p:strVal val="visible"/>
+                                      </p:to>
+                                    </p:set>
+                                    <p:animEffect transition="in" filter="wipe(up)">
+                                      <p:cBhvr>
+                                        <p:cTn id="33" dur="500"/>
+                                        <p:tgtEl>
+                                          <p:spTgt spid="15">
+                                            <p:txEl>
+                                              <p:pRg st="2" end="2"/>
+                                            </p:txEl>
+                                          </p:spTgt>
+                                        </p:tgtEl>
+                                      </p:cBhvr>
+                                    </p:animEffect>
+                                  </p:childTnLst>
+                                </p:cTn>
+                              </p:par>
+                              <p:par>
+                                <p:cTn id="34" presetID="22" presetClass="entr" presetSubtype="1" fill="hold" nodeType="withEffect">
+                                  <p:stCondLst>
+                                    <p:cond delay="600"/>
+                                  </p:stCondLst>
+                                  <p:childTnLst>
+                                    <p:set>
+                                      <p:cBhvr>
+                                        <p:cTn id="35" dur="1" fill="hold">
+                                          <p:stCondLst>
+                                            <p:cond delay="0"/>
+                                          </p:stCondLst>
+                                        </p:cTn>
+                                        <p:tgtEl>
+                                          <p:spTgt spid="15">
+                                            <p:txEl>
+                                              <p:pRg st="3" end="3"/>
+                                            </p:txEl>
+                                          </p:spTgt>
+                                        </p:tgtEl>
+                                        <p:attrNameLst>
+                                          <p:attrName>style.visibility</p:attrName>
+                                        </p:attrNameLst>
+                                      </p:cBhvr>
+                                      <p:to>
+                                        <p:strVal val="visible"/>
+                                      </p:to>
+                                    </p:set>
+                                    <p:animEffect transition="in" filter="wipe(up)">
+                                      <p:cBhvr>
+                                        <p:cTn id="36" dur="500"/>
+                                        <p:tgtEl>
+                                          <p:spTgt spid="15">
+                                            <p:txEl>
+                                              <p:pRg st="3" end="3"/>
+                                            </p:txEl>
+                                          </p:spTgt>
+                                        </p:tgtEl>
+                                      </p:cBhvr>
+                                    </p:animEffect>
+                                  </p:childTnLst>
+                                </p:cTn>
+                              </p:par>
+                              <p:par>
+                                <p:cTn id="37" presetID="1" presetClass="exit" presetSubtype="0" fill="hold" nodeType="withEffect">
                                   <p:stCondLst>
                                     <p:cond delay="0"/>
                                   </p:stCondLst>
                                   <p:childTnLst>
                                     <p:set>
                                       <p:cBhvr>
-                                        <p:cTn id="16" dur="1" fill="hold">
+                                        <p:cTn id="38" dur="1" fill="hold">
+                                          <p:stCondLst>
+                                            <p:cond delay="0"/>
+                                          </p:stCondLst>
+                                        </p:cTn>
+                                        <p:tgtEl>
+                                          <p:spTgt spid="2"/>
+                                        </p:tgtEl>
+                                        <p:attrNameLst>
+                                          <p:attrName>style.visibility</p:attrName>
+                                        </p:attrNameLst>
+                                      </p:cBhvr>
+                                      <p:to>
+                                        <p:strVal val="hidden"/>
+                                      </p:to>
+                                    </p:set>
+                                  </p:childTnLst>
+                                </p:cTn>
+                              </p:par>
+                              <p:par>
+                                <p:cTn id="39" presetID="1" presetClass="entr" presetSubtype="0" fill="hold" grpId="1" nodeType="withEffect">
+                                  <p:stCondLst>
+                                    <p:cond delay="0"/>
+                                  </p:stCondLst>
+                                  <p:childTnLst>
+                                    <p:set>
+                                      <p:cBhvr>
+                                        <p:cTn id="40" dur="1" fill="hold">
                                           <p:stCondLst>
                                             <p:cond delay="0"/>
                                           </p:stCondLst>
@@ -23434,14 +26528,14 @@
                                 </p:cTn>
                               </p:par>
                               <p:par>
-                                <p:cTn id="17" presetID="1" presetClass="entr" presetSubtype="0" fill="hold" nodeType="withEffect">
+                                <p:cTn id="41" presetID="1" presetClass="entr" presetSubtype="0" fill="hold" nodeType="withEffect">
                                   <p:stCondLst>
                                     <p:cond delay="0"/>
                                   </p:stCondLst>
                                   <p:childTnLst>
                                     <p:set>
                                       <p:cBhvr>
-                                        <p:cTn id="18" dur="1" fill="hold">
+                                        <p:cTn id="42" dur="1" fill="hold">
                                           <p:stCondLst>
                                             <p:cond delay="0"/>
                                           </p:stCondLst>
@@ -23461,14 +26555,14 @@
                                 </p:cTn>
                               </p:par>
                               <p:par>
-                                <p:cTn id="19" presetID="1" presetClass="entr" presetSubtype="0" fill="hold" nodeType="withEffect">
+                                <p:cTn id="43" presetID="1" presetClass="entr" presetSubtype="0" fill="hold" nodeType="withEffect">
                                   <p:stCondLst>
                                     <p:cond delay="0"/>
                                   </p:stCondLst>
                                   <p:childTnLst>
                                     <p:set>
                                       <p:cBhvr>
-                                        <p:cTn id="20" dur="1" fill="hold">
+                                        <p:cTn id="44" dur="1" fill="hold">
                                           <p:stCondLst>
                                             <p:cond delay="0"/>
                                           </p:stCondLst>
@@ -23488,14 +26582,14 @@
                                 </p:cTn>
                               </p:par>
                               <p:par>
-                                <p:cTn id="21" presetID="1" presetClass="entr" presetSubtype="0" fill="hold" grpId="1" nodeType="withEffect">
+                                <p:cTn id="45" presetID="1" presetClass="entr" presetSubtype="0" fill="hold" grpId="1" nodeType="withEffect">
                                   <p:stCondLst>
                                     <p:cond delay="0"/>
                                   </p:stCondLst>
                                   <p:childTnLst>
                                     <p:set>
                                       <p:cBhvr>
-                                        <p:cTn id="22" dur="1" fill="hold">
+                                        <p:cTn id="46" dur="1" fill="hold">
                                           <p:stCondLst>
                                             <p:cond delay="0"/>
                                           </p:stCondLst>
@@ -23515,14 +26609,14 @@
                                 </p:cTn>
                               </p:par>
                               <p:par>
-                                <p:cTn id="23" presetID="42" presetClass="path" presetSubtype="0" accel="50000" decel="50000" fill="hold" grpId="0" nodeType="withEffect">
+                                <p:cTn id="47" presetID="42" presetClass="path" presetSubtype="0" accel="50000" decel="50000" fill="hold" grpId="0" nodeType="withEffect">
                                   <p:stCondLst>
                                     <p:cond delay="0"/>
                                   </p:stCondLst>
                                   <p:childTnLst>
                                     <p:animMotion origin="layout" path="M -2.29167E-6 -4.44444E-6 L -2.29167E-6 0.1213 " pathEditMode="relative" rAng="0" ptsTypes="AA">
                                       <p:cBhvr>
-                                        <p:cTn id="24" dur="2000" fill="hold"/>
+                                        <p:cTn id="48" dur="2000" fill="hold"/>
                                         <p:tgtEl>
                                           <p:spTgt spid="24"/>
                                         </p:tgtEl>
@@ -23537,14 +26631,14 @@
                                 </p:cTn>
                               </p:par>
                               <p:par>
-                                <p:cTn id="25" presetID="42" presetClass="path" presetSubtype="0" accel="50000" decel="50000" fill="hold" nodeType="withEffect">
+                                <p:cTn id="49" presetID="42" presetClass="path" presetSubtype="0" accel="50000" decel="50000" fill="hold" nodeType="withEffect">
                                   <p:stCondLst>
                                     <p:cond delay="0"/>
                                   </p:stCondLst>
                                   <p:childTnLst>
                                     <p:animMotion origin="layout" path="M -4.375E-6 1.48148E-6 L -4.375E-6 0.20648 " pathEditMode="relative" rAng="0" ptsTypes="AA">
                                       <p:cBhvr>
-                                        <p:cTn id="26" dur="2000" fill="hold"/>
+                                        <p:cTn id="50" dur="2000" fill="hold"/>
                                         <p:tgtEl>
                                           <p:spTgt spid="25"/>
                                         </p:tgtEl>
@@ -23559,14 +26653,14 @@
                                 </p:cTn>
                               </p:par>
                               <p:par>
-                                <p:cTn id="27" presetID="42" presetClass="path" presetSubtype="0" accel="50000" decel="50000" fill="hold" nodeType="withEffect">
+                                <p:cTn id="51" presetID="42" presetClass="path" presetSubtype="0" accel="50000" decel="50000" fill="hold" nodeType="withEffect">
                                   <p:stCondLst>
                                     <p:cond delay="0"/>
                                   </p:stCondLst>
                                   <p:childTnLst>
                                     <p:animMotion origin="layout" path="M -4.375E-6 1.11111E-6 L -4.375E-6 0.12153 " pathEditMode="relative" rAng="0" ptsTypes="AA">
                                       <p:cBhvr>
-                                        <p:cTn id="28" dur="2000" fill="hold"/>
+                                        <p:cTn id="52" dur="2000" fill="hold"/>
                                         <p:tgtEl>
                                           <p:spTgt spid="28"/>
                                         </p:tgtEl>
@@ -23581,14 +26675,14 @@
                                 </p:cTn>
                               </p:par>
                               <p:par>
-                                <p:cTn id="29" presetID="42" presetClass="path" presetSubtype="0" accel="50000" decel="50000" fill="hold" grpId="0" nodeType="withEffect">
+                                <p:cTn id="53" presetID="42" presetClass="path" presetSubtype="0" accel="50000" decel="50000" fill="hold" grpId="0" nodeType="withEffect">
                                   <p:stCondLst>
                                     <p:cond delay="0"/>
                                   </p:stCondLst>
                                   <p:childTnLst>
                                     <p:animMotion origin="layout" path="M -2.29167E-6 -2.96296E-6 L -2.29167E-6 0.20695 " pathEditMode="relative" rAng="0" ptsTypes="AA">
                                       <p:cBhvr>
-                                        <p:cTn id="30" dur="2000" fill="hold"/>
+                                        <p:cTn id="54" dur="2000" fill="hold"/>
                                         <p:tgtEl>
                                           <p:spTgt spid="39"/>
                                         </p:tgtEl>
@@ -23603,14 +26697,14 @@
                                 </p:cTn>
                               </p:par>
                               <p:par>
-                                <p:cTn id="31" presetID="22" presetClass="entr" presetSubtype="1" fill="hold" nodeType="withEffect">
+                                <p:cTn id="55" presetID="22" presetClass="entr" presetSubtype="1" fill="hold" nodeType="withEffect">
                                   <p:stCondLst>
                                     <p:cond delay="800"/>
                                   </p:stCondLst>
                                   <p:childTnLst>
                                     <p:set>
                                       <p:cBhvr>
-                                        <p:cTn id="32" dur="1" fill="hold">
+                                        <p:cTn id="56" dur="1" fill="hold">
                                           <p:stCondLst>
                                             <p:cond delay="0"/>
                                           </p:stCondLst>
@@ -23632,7 +26726,7 @@
                                     </p:set>
                                     <p:animEffect transition="in" filter="wipe(up)">
                                       <p:cBhvr>
-                                        <p:cTn id="33" dur="500"/>
+                                        <p:cTn id="57" dur="500"/>
                                         <p:tgtEl>
                                           <p:spTgt spid="15">
                                             <p:txEl>
@@ -23646,14 +26740,14 @@
                                 </p:cTn>
                               </p:par>
                               <p:par>
-                                <p:cTn id="34" presetID="19" presetClass="emph" presetSubtype="0" fill="hold" nodeType="withEffect">
+                                <p:cTn id="58" presetID="19" presetClass="emph" presetSubtype="0" fill="hold" nodeType="withEffect">
                                   <p:stCondLst>
                                     <p:cond delay="800"/>
                                   </p:stCondLst>
                                   <p:childTnLst>
                                     <p:animClr clrSpc="rgb" dir="cw">
                                       <p:cBhvr override="childStyle">
-                                        <p:cTn id="35" dur="500" fill="hold"/>
+                                        <p:cTn id="59" dur="500" fill="hold"/>
                                         <p:tgtEl>
                                           <p:spTgt spid="15">
                                             <p:txEl>
@@ -23671,7 +26765,7 @@
                                     </p:animClr>
                                     <p:animClr clrSpc="rgb" dir="cw">
                                       <p:cBhvr>
-                                        <p:cTn id="36" dur="500" fill="hold"/>
+                                        <p:cTn id="60" dur="500" fill="hold"/>
                                         <p:tgtEl>
                                           <p:spTgt spid="15">
                                             <p:txEl>
@@ -23689,7 +26783,7 @@
                                     </p:animClr>
                                     <p:set>
                                       <p:cBhvr>
-                                        <p:cTn id="37" dur="500" fill="hold"/>
+                                        <p:cTn id="61" dur="500" fill="hold"/>
                                         <p:tgtEl>
                                           <p:spTgt spid="15">
                                             <p:txEl>
@@ -23707,7 +26801,7 @@
                                     </p:set>
                                     <p:set>
                                       <p:cBhvr>
-                                        <p:cTn id="38" dur="500" fill="hold"/>
+                                        <p:cTn id="62" dur="500" fill="hold"/>
                                         <p:tgtEl>
                                           <p:spTgt spid="15">
                                             <p:txEl>
@@ -23727,14 +26821,14 @@
                                 </p:cTn>
                               </p:par>
                               <p:par>
-                                <p:cTn id="39" presetID="19" presetClass="emph" presetSubtype="0" fill="hold" nodeType="withEffect">
+                                <p:cTn id="63" presetID="19" presetClass="emph" presetSubtype="0" fill="hold" nodeType="withEffect">
                                   <p:stCondLst>
                                     <p:cond delay="800"/>
                                   </p:stCondLst>
                                   <p:childTnLst>
                                     <p:animClr clrSpc="rgb" dir="cw">
                                       <p:cBhvr override="childStyle">
-                                        <p:cTn id="40" dur="500" fill="hold"/>
+                                        <p:cTn id="64" dur="500" fill="hold"/>
                                         <p:tgtEl>
                                           <p:spTgt spid="15">
                                             <p:txEl>
@@ -23752,7 +26846,7 @@
                                     </p:animClr>
                                     <p:animClr clrSpc="rgb" dir="cw">
                                       <p:cBhvr>
-                                        <p:cTn id="41" dur="500" fill="hold"/>
+                                        <p:cTn id="65" dur="500" fill="hold"/>
                                         <p:tgtEl>
                                           <p:spTgt spid="15">
                                             <p:txEl>
@@ -23770,7 +26864,7 @@
                                     </p:animClr>
                                     <p:set>
                                       <p:cBhvr>
-                                        <p:cTn id="42" dur="500" fill="hold"/>
+                                        <p:cTn id="66" dur="500" fill="hold"/>
                                         <p:tgtEl>
                                           <p:spTgt spid="15">
                                             <p:txEl>
@@ -23788,7 +26882,7 @@
                                     </p:set>
                                     <p:set>
                                       <p:cBhvr>
-                                        <p:cTn id="43" dur="500" fill="hold"/>
+                                        <p:cTn id="67" dur="500" fill="hold"/>
                                         <p:tgtEl>
                                           <p:spTgt spid="15">
                                             <p:txEl>
@@ -23808,14 +26902,14 @@
                                 </p:cTn>
                               </p:par>
                               <p:par>
-                                <p:cTn id="44" presetID="22" presetClass="entr" presetSubtype="1" fill="hold" nodeType="withEffect">
+                                <p:cTn id="68" presetID="22" presetClass="entr" presetSubtype="1" fill="hold" nodeType="withEffect">
                                   <p:stCondLst>
                                     <p:cond delay="1000"/>
                                   </p:stCondLst>
                                   <p:childTnLst>
                                     <p:set>
                                       <p:cBhvr>
-                                        <p:cTn id="45" dur="1" fill="hold">
+                                        <p:cTn id="69" dur="1" fill="hold">
                                           <p:stCondLst>
                                             <p:cond delay="0"/>
                                           </p:stCondLst>
@@ -23837,7 +26931,7 @@
                                     </p:set>
                                     <p:animEffect transition="in" filter="wipe(up)">
                                       <p:cBhvr>
-                                        <p:cTn id="46" dur="500"/>
+                                        <p:cTn id="70" dur="500"/>
                                         <p:tgtEl>
                                           <p:spTgt spid="15">
                                             <p:txEl>
@@ -23851,14 +26945,14 @@
                                 </p:cTn>
                               </p:par>
                               <p:par>
-                                <p:cTn id="47" presetID="22" presetClass="entr" presetSubtype="1" fill="hold" nodeType="withEffect">
+                                <p:cTn id="71" presetID="22" presetClass="entr" presetSubtype="1" fill="hold" nodeType="withEffect">
                                   <p:stCondLst>
                                     <p:cond delay="1200"/>
                                   </p:stCondLst>
                                   <p:childTnLst>
                                     <p:set>
                                       <p:cBhvr>
-                                        <p:cTn id="48" dur="1" fill="hold">
+                                        <p:cTn id="72" dur="1" fill="hold">
                                           <p:stCondLst>
                                             <p:cond delay="0"/>
                                           </p:stCondLst>
@@ -23880,7 +26974,7 @@
                                     </p:set>
                                     <p:animEffect transition="in" filter="wipe(up)">
                                       <p:cBhvr>
-                                        <p:cTn id="49" dur="500"/>
+                                        <p:cTn id="73" dur="500"/>
                                         <p:tgtEl>
                                           <p:spTgt spid="15">
                                             <p:txEl>
@@ -23894,14 +26988,14 @@
                                 </p:cTn>
                               </p:par>
                               <p:par>
-                                <p:cTn id="50" presetID="1" presetClass="entr" presetSubtype="0" fill="hold" nodeType="withEffect">
+                                <p:cTn id="74" presetID="1" presetClass="entr" presetSubtype="0" fill="hold" nodeType="withEffect">
                                   <p:stCondLst>
                                     <p:cond delay="2000"/>
                                   </p:stCondLst>
                                   <p:childTnLst>
                                     <p:set>
                                       <p:cBhvr>
-                                        <p:cTn id="51" dur="1" fill="hold">
+                                        <p:cTn id="75" dur="1" fill="hold">
                                           <p:stCondLst>
                                             <p:cond delay="0"/>
                                           </p:stCondLst>
@@ -23925,14 +27019,14 @@
                                 </p:cTn>
                               </p:par>
                               <p:par>
-                                <p:cTn id="52" presetID="1" presetClass="exit" presetSubtype="0" fill="hold" grpId="0" nodeType="withEffect">
+                                <p:cTn id="76" presetID="1" presetClass="exit" presetSubtype="0" fill="hold" grpId="0" nodeType="withEffect">
                                   <p:stCondLst>
-                                    <p:cond delay="700"/>
+                                    <p:cond delay="1200"/>
                                   </p:stCondLst>
                                   <p:childTnLst>
                                     <p:set>
                                       <p:cBhvr>
-                                        <p:cTn id="53" dur="1" fill="hold">
+                                        <p:cTn id="77" dur="1" fill="hold">
                                           <p:stCondLst>
                                             <p:cond delay="0"/>
                                           </p:stCondLst>
@@ -23956,14 +27050,14 @@
                                 </p:cTn>
                               </p:par>
                               <p:par>
-                                <p:cTn id="54" presetID="1" presetClass="exit" presetSubtype="0" fill="hold" grpId="0" nodeType="withEffect">
+                                <p:cTn id="78" presetID="1" presetClass="exit" presetSubtype="0" fill="hold" grpId="0" nodeType="withEffect">
                                   <p:stCondLst>
-                                    <p:cond delay="700"/>
+                                    <p:cond delay="1200"/>
                                   </p:stCondLst>
                                   <p:childTnLst>
                                     <p:set>
                                       <p:cBhvr>
-                                        <p:cTn id="55" dur="1" fill="hold">
+                                        <p:cTn id="79" dur="1" fill="hold">
                                           <p:stCondLst>
                                             <p:cond delay="0"/>
                                           </p:stCondLst>
@@ -23986,24 +27080,15 @@
                                   </p:childTnLst>
                                 </p:cTn>
                               </p:par>
-                            </p:childTnLst>
-                          </p:cTn>
-                        </p:par>
-                        <p:par>
-                          <p:cTn id="56" fill="hold">
-                            <p:stCondLst>
-                              <p:cond delay="2000"/>
-                            </p:stCondLst>
-                            <p:childTnLst>
                               <p:par>
-                                <p:cTn id="57" presetID="1" presetClass="exit" presetSubtype="0" fill="hold" grpId="0" nodeType="afterEffect">
+                                <p:cTn id="80" presetID="1" presetClass="exit" presetSubtype="0" fill="hold" grpId="0" nodeType="withEffect">
                                   <p:stCondLst>
-                                    <p:cond delay="0"/>
+                                    <p:cond delay="2000"/>
                                   </p:stCondLst>
                                   <p:childTnLst>
                                     <p:set>
                                       <p:cBhvr>
-                                        <p:cTn id="58" dur="1" fill="hold">
+                                        <p:cTn id="81" dur="1" fill="hold">
                                           <p:stCondLst>
                                             <p:cond delay="0"/>
                                           </p:stCondLst>
@@ -24056,9 +27141,10 @@
     <p:bldLst>
       <p:bldP spid="24" grpId="0" animBg="1"/>
       <p:bldP spid="24" grpId="1" animBg="1"/>
-      <p:bldP spid="4" grpId="0" build="allAtOnce"/>
+      <p:bldP spid="4" grpId="0" uiExpand="1" build="allAtOnce"/>
       <p:bldP spid="39" grpId="0" animBg="1"/>
       <p:bldP spid="39" grpId="1" animBg="1"/>
+      <p:bldP spid="13" grpId="0" build="allAtOnce"/>
     </p:bldLst>
   </p:timing>
 </p:sld>

--- a/Deliverables/Presentation1.pptx
+++ b/Deliverables/Presentation1.pptx
@@ -5,7 +5,7 @@
     <p:sldMasterId id="2147483648" r:id="rId1"/>
   </p:sldMasterIdLst>
   <p:notesMasterIdLst>
-    <p:notesMasterId r:id="rId19"/>
+    <p:notesMasterId r:id="rId18"/>
   </p:notesMasterIdLst>
   <p:sldIdLst>
     <p:sldId id="256" r:id="rId2"/>
@@ -24,14 +24,17 @@
     <p:sldId id="262" r:id="rId15"/>
     <p:sldId id="269" r:id="rId16"/>
     <p:sldId id="263" r:id="rId17"/>
-    <p:sldId id="271" r:id="rId18"/>
   </p:sldIdLst>
   <p:sldSz cx="12192000" cy="6858000"/>
   <p:notesSz cx="6858000" cy="9144000"/>
   <p:embeddedFontLst>
     <p:embeddedFont>
       <p:font typeface="Kumbh Sans" pitchFamily="2" charset="0"/>
-      <p:regular r:id="rId20"/>
+      <p:regular r:id="rId19"/>
+      <p:bold r:id="rId20"/>
+    </p:embeddedFont>
+    <p:embeddedFont>
+      <p:font typeface="Kumbh Sans SemiBold" pitchFamily="2" charset="0"/>
       <p:bold r:id="rId21"/>
     </p:embeddedFont>
   </p:embeddedFontLst>
@@ -142,7 +145,7 @@
 <p1510:revInfo xmlns:a="http://schemas.openxmlformats.org/drawingml/2006/main" xmlns:r="http://schemas.openxmlformats.org/officeDocument/2006/relationships" xmlns:p1510="http://schemas.microsoft.com/office/powerpoint/2015/10/main">
   <p1510:revLst>
     <p1510:client id="{2940A192-0FD3-4679-B782-39515230B446}" v="272" dt="2026-09-16T18:38:35.183"/>
-    <p1510:client id="{EADFFEA0-CC63-45EF-97E4-5A80CDB68182}" v="1745" dt="2026-09-17T17:57:23.057"/>
+    <p1510:client id="{EADFFEA0-CC63-45EF-97E4-5A80CDB68182}" v="1807" dt="2026-09-17T18:32:20.419"/>
   </p1510:revLst>
 </p1510:revInfo>
 </file>
@@ -152,7 +155,7 @@
   <pc:docChgLst>
     <pc:chgData name="Steve Mutrux" userId="4fa98d0c-dc66-4728-b09b-a88e22e95094" providerId="ADAL" clId="{421BD283-33D8-4C6C-821F-71755E863FA2}"/>
     <pc:docChg chg="undo custSel addSld delSld modSld sldOrd">
-      <pc:chgData name="Steve Mutrux" userId="4fa98d0c-dc66-4728-b09b-a88e22e95094" providerId="ADAL" clId="{421BD283-33D8-4C6C-821F-71755E863FA2}" dt="2026-09-17T17:59:39.962" v="5183" actId="1076"/>
+      <pc:chgData name="Steve Mutrux" userId="4fa98d0c-dc66-4728-b09b-a88e22e95094" providerId="ADAL" clId="{421BD283-33D8-4C6C-821F-71755E863FA2}" dt="2026-09-17T18:32:43.712" v="5292" actId="1036"/>
       <pc:docMkLst>
         <pc:docMk/>
       </pc:docMkLst>
@@ -482,7 +485,7 @@
         </pc:grpChg>
       </pc:sldChg>
       <pc:sldChg chg="addSp delSp modSp add mod ord modTransition modAnim">
-        <pc:chgData name="Steve Mutrux" userId="4fa98d0c-dc66-4728-b09b-a88e22e95094" providerId="ADAL" clId="{421BD283-33D8-4C6C-821F-71755E863FA2}" dt="2026-09-16T15:22:15.053" v="4690"/>
+        <pc:chgData name="Steve Mutrux" userId="4fa98d0c-dc66-4728-b09b-a88e22e95094" providerId="ADAL" clId="{421BD283-33D8-4C6C-821F-71755E863FA2}" dt="2026-09-17T18:05:10.212" v="5205" actId="20577"/>
         <pc:sldMkLst>
           <pc:docMk/>
           <pc:sldMk cId="3444687766" sldId="260"/>
@@ -504,7 +507,7 @@
           </ac:spMkLst>
         </pc:spChg>
         <pc:spChg chg="add mod">
-          <ac:chgData name="Steve Mutrux" userId="4fa98d0c-dc66-4728-b09b-a88e22e95094" providerId="ADAL" clId="{421BD283-33D8-4C6C-821F-71755E863FA2}" dt="2026-09-16T15:16:53.093" v="4684" actId="20577"/>
+          <ac:chgData name="Steve Mutrux" userId="4fa98d0c-dc66-4728-b09b-a88e22e95094" providerId="ADAL" clId="{421BD283-33D8-4C6C-821F-71755E863FA2}" dt="2026-09-17T18:05:10.212" v="5205" actId="20577"/>
           <ac:spMkLst>
             <pc:docMk/>
             <pc:sldMk cId="3444687766" sldId="260"/>
@@ -673,7 +676,7 @@
         </pc:grpChg>
       </pc:sldChg>
       <pc:sldChg chg="addSp delSp modSp add mod modTransition addAnim delAnim modAnim modNotesTx">
-        <pc:chgData name="Steve Mutrux" userId="4fa98d0c-dc66-4728-b09b-a88e22e95094" providerId="ADAL" clId="{421BD283-33D8-4C6C-821F-71755E863FA2}" dt="2026-09-17T17:29:59.649" v="4771" actId="20577"/>
+        <pc:chgData name="Steve Mutrux" userId="4fa98d0c-dc66-4728-b09b-a88e22e95094" providerId="ADAL" clId="{421BD283-33D8-4C6C-821F-71755E863FA2}" dt="2026-09-17T18:23:01.889" v="5235"/>
         <pc:sldMkLst>
           <pc:docMk/>
           <pc:sldMk cId="4190029259" sldId="261"/>
@@ -764,6 +767,14 @@
             <pc:docMk/>
             <pc:sldMk cId="4190029259" sldId="261"/>
             <ac:spMk id="13" creationId="{D215D108-DE09-DD98-B693-86573D2B5F59}"/>
+          </ac:spMkLst>
+        </pc:spChg>
+        <pc:spChg chg="add mod">
+          <ac:chgData name="Steve Mutrux" userId="4fa98d0c-dc66-4728-b09b-a88e22e95094" providerId="ADAL" clId="{421BD283-33D8-4C6C-821F-71755E863FA2}" dt="2026-09-17T18:21:50.529" v="5231" actId="1036"/>
+          <ac:spMkLst>
+            <pc:docMk/>
+            <pc:sldMk cId="4190029259" sldId="261"/>
+            <ac:spMk id="15" creationId="{371B18D3-D66D-246F-ADDA-BEA5981F37AE}"/>
           </ac:spMkLst>
         </pc:spChg>
         <pc:spChg chg="add del mod">
@@ -950,15 +961,23 @@
             <ac:grpSpMk id="39" creationId="{7C9560F7-8264-7EF2-E259-3151A7DA378D}"/>
           </ac:grpSpMkLst>
         </pc:grpChg>
+        <pc:picChg chg="add mod">
+          <ac:chgData name="Steve Mutrux" userId="4fa98d0c-dc66-4728-b09b-a88e22e95094" providerId="ADAL" clId="{421BD283-33D8-4C6C-821F-71755E863FA2}" dt="2026-09-17T18:21:02.149" v="5220" actId="1076"/>
+          <ac:picMkLst>
+            <pc:docMk/>
+            <pc:sldMk cId="4190029259" sldId="261"/>
+            <ac:picMk id="14" creationId="{387C92B2-EE40-6CBB-BD04-2055150745E3}"/>
+          </ac:picMkLst>
+        </pc:picChg>
       </pc:sldChg>
       <pc:sldChg chg="addSp delSp modSp add mod modTransition modAnim">
-        <pc:chgData name="Steve Mutrux" userId="4fa98d0c-dc66-4728-b09b-a88e22e95094" providerId="ADAL" clId="{421BD283-33D8-4C6C-821F-71755E863FA2}" dt="2026-09-17T17:59:39.962" v="5183" actId="1076"/>
+        <pc:chgData name="Steve Mutrux" userId="4fa98d0c-dc66-4728-b09b-a88e22e95094" providerId="ADAL" clId="{421BD283-33D8-4C6C-821F-71755E863FA2}" dt="2026-09-17T18:31:50.337" v="5283"/>
         <pc:sldMkLst>
           <pc:docMk/>
           <pc:sldMk cId="1179066660" sldId="262"/>
         </pc:sldMkLst>
-        <pc:spChg chg="add mod">
-          <ac:chgData name="Steve Mutrux" userId="4fa98d0c-dc66-4728-b09b-a88e22e95094" providerId="ADAL" clId="{421BD283-33D8-4C6C-821F-71755E863FA2}" dt="2026-09-16T12:54:11.577" v="4060" actId="207"/>
+        <pc:spChg chg="add mod ord">
+          <ac:chgData name="Steve Mutrux" userId="4fa98d0c-dc66-4728-b09b-a88e22e95094" providerId="ADAL" clId="{421BD283-33D8-4C6C-821F-71755E863FA2}" dt="2026-09-17T18:26:25.637" v="5251" actId="167"/>
           <ac:spMkLst>
             <pc:docMk/>
             <pc:sldMk cId="1179066660" sldId="262"/>
@@ -981,8 +1000,8 @@
             <ac:spMk id="4" creationId="{454DAE8C-0239-F0A4-BA7E-4FE0FF2D9897}"/>
           </ac:spMkLst>
         </pc:spChg>
-        <pc:spChg chg="mod">
-          <ac:chgData name="Steve Mutrux" userId="4fa98d0c-dc66-4728-b09b-a88e22e95094" providerId="ADAL" clId="{421BD283-33D8-4C6C-821F-71755E863FA2}" dt="2026-09-16T12:53:48.110" v="4054"/>
+        <pc:spChg chg="mod ord">
+          <ac:chgData name="Steve Mutrux" userId="4fa98d0c-dc66-4728-b09b-a88e22e95094" providerId="ADAL" clId="{421BD283-33D8-4C6C-821F-71755E863FA2}" dt="2026-09-17T18:26:33.719" v="5252" actId="167"/>
           <ac:spMkLst>
             <pc:docMk/>
             <pc:sldMk cId="1179066660" sldId="262"/>
@@ -995,6 +1014,14 @@
             <pc:docMk/>
             <pc:sldMk cId="1179066660" sldId="262"/>
             <ac:spMk id="6" creationId="{0CDADB92-84C5-A652-539F-1C8F5047D3A6}"/>
+          </ac:spMkLst>
+        </pc:spChg>
+        <pc:spChg chg="mod ord">
+          <ac:chgData name="Steve Mutrux" userId="4fa98d0c-dc66-4728-b09b-a88e22e95094" providerId="ADAL" clId="{421BD283-33D8-4C6C-821F-71755E863FA2}" dt="2026-09-17T18:27:11.032" v="5258" actId="167"/>
+          <ac:spMkLst>
+            <pc:docMk/>
+            <pc:sldMk cId="1179066660" sldId="262"/>
+            <ac:spMk id="6" creationId="{AEB2168F-CCF1-991D-5D41-6794E45BDF72}"/>
           </ac:spMkLst>
         </pc:spChg>
         <pc:spChg chg="mod">
@@ -1037,8 +1064,8 @@
             <ac:spMk id="13" creationId="{DEF5A2AF-EC07-834B-96C9-F52BF5B58A31}"/>
           </ac:spMkLst>
         </pc:spChg>
-        <pc:spChg chg="add mod">
-          <ac:chgData name="Steve Mutrux" userId="4fa98d0c-dc66-4728-b09b-a88e22e95094" providerId="ADAL" clId="{421BD283-33D8-4C6C-821F-71755E863FA2}" dt="2026-09-17T17:48:36.118" v="5108" actId="14100"/>
+        <pc:spChg chg="add del mod">
+          <ac:chgData name="Steve Mutrux" userId="4fa98d0c-dc66-4728-b09b-a88e22e95094" providerId="ADAL" clId="{421BD283-33D8-4C6C-821F-71755E863FA2}" dt="2026-09-17T18:00:06.611" v="5187" actId="1076"/>
           <ac:spMkLst>
             <pc:docMk/>
             <pc:sldMk cId="1179066660" sldId="262"/>
@@ -1126,7 +1153,7 @@
           </ac:spMkLst>
         </pc:spChg>
         <pc:grpChg chg="add mod ord">
-          <ac:chgData name="Steve Mutrux" userId="4fa98d0c-dc66-4728-b09b-a88e22e95094" providerId="ADAL" clId="{421BD283-33D8-4C6C-821F-71755E863FA2}" dt="2026-09-16T12:55:19.955" v="4069" actId="1036"/>
+          <ac:chgData name="Steve Mutrux" userId="4fa98d0c-dc66-4728-b09b-a88e22e95094" providerId="ADAL" clId="{421BD283-33D8-4C6C-821F-71755E863FA2}" dt="2026-09-17T18:26:47.148" v="5255" actId="167"/>
           <ac:grpSpMkLst>
             <pc:docMk/>
             <pc:sldMk cId="1179066660" sldId="262"/>
@@ -1182,7 +1209,7 @@
           </ac:grpSpMkLst>
         </pc:grpChg>
         <pc:graphicFrameChg chg="add mod modGraphic">
-          <ac:chgData name="Steve Mutrux" userId="4fa98d0c-dc66-4728-b09b-a88e22e95094" providerId="ADAL" clId="{421BD283-33D8-4C6C-821F-71755E863FA2}" dt="2026-09-17T17:56:49.185" v="5167" actId="20577"/>
+          <ac:chgData name="Steve Mutrux" userId="4fa98d0c-dc66-4728-b09b-a88e22e95094" providerId="ADAL" clId="{421BD283-33D8-4C6C-821F-71755E863FA2}" dt="2026-09-17T18:06:30.506" v="5209" actId="2711"/>
           <ac:graphicFrameMkLst>
             <pc:docMk/>
             <pc:sldMk cId="1179066660" sldId="262"/>
@@ -1190,8 +1217,8 @@
           </ac:graphicFrameMkLst>
         </pc:graphicFrameChg>
       </pc:sldChg>
-      <pc:sldChg chg="addSp delSp modSp add mod">
-        <pc:chgData name="Steve Mutrux" userId="4fa98d0c-dc66-4728-b09b-a88e22e95094" providerId="ADAL" clId="{421BD283-33D8-4C6C-821F-71755E863FA2}" dt="2026-09-16T00:46:05.458" v="912" actId="207"/>
+      <pc:sldChg chg="addSp delSp modSp add mod modTransition">
+        <pc:chgData name="Steve Mutrux" userId="4fa98d0c-dc66-4728-b09b-a88e22e95094" providerId="ADAL" clId="{421BD283-33D8-4C6C-821F-71755E863FA2}" dt="2026-09-17T18:12:08.424" v="5212"/>
         <pc:sldMkLst>
           <pc:docMk/>
           <pc:sldMk cId="2229155277" sldId="263"/>
@@ -1212,8 +1239,8 @@
             <ac:spMk id="4" creationId="{202A19DB-42DD-70EE-502D-F38B63917B61}"/>
           </ac:spMkLst>
         </pc:spChg>
-        <pc:spChg chg="add mod">
-          <ac:chgData name="Steve Mutrux" userId="4fa98d0c-dc66-4728-b09b-a88e22e95094" providerId="ADAL" clId="{421BD283-33D8-4C6C-821F-71755E863FA2}" dt="2026-09-16T00:46:05.458" v="912" actId="207"/>
+        <pc:spChg chg="add del mod">
+          <ac:chgData name="Steve Mutrux" userId="4fa98d0c-dc66-4728-b09b-a88e22e95094" providerId="ADAL" clId="{421BD283-33D8-4C6C-821F-71755E863FA2}" dt="2026-09-17T18:12:02.580" v="5210" actId="478"/>
           <ac:spMkLst>
             <pc:docMk/>
             <pc:sldMk cId="2229155277" sldId="263"/>
@@ -1308,8 +1335,8 @@
           </ac:spMkLst>
         </pc:spChg>
       </pc:sldChg>
-      <pc:sldChg chg="addSp delSp modSp add mod modAnim modNotesTx">
-        <pc:chgData name="Steve Mutrux" userId="4fa98d0c-dc66-4728-b09b-a88e22e95094" providerId="ADAL" clId="{421BD283-33D8-4C6C-821F-71755E863FA2}" dt="2026-09-16T11:20:21.614" v="3204" actId="1035"/>
+      <pc:sldChg chg="addSp delSp modSp add mod modTransition modAnim modNotesTx">
+        <pc:chgData name="Steve Mutrux" userId="4fa98d0c-dc66-4728-b09b-a88e22e95094" providerId="ADAL" clId="{421BD283-33D8-4C6C-821F-71755E863FA2}" dt="2026-09-17T18:13:03.669" v="5215"/>
         <pc:sldMkLst>
           <pc:docMk/>
           <pc:sldMk cId="353601395" sldId="266"/>
@@ -1427,8 +1454,8 @@
           </ac:grpSpMkLst>
         </pc:grpChg>
       </pc:sldChg>
-      <pc:sldChg chg="addSp delSp modSp add mod modAnim modNotesTx">
-        <pc:chgData name="Steve Mutrux" userId="4fa98d0c-dc66-4728-b09b-a88e22e95094" providerId="ADAL" clId="{421BD283-33D8-4C6C-821F-71755E863FA2}" dt="2026-09-16T11:20:54.556" v="3206" actId="1035"/>
+      <pc:sldChg chg="addSp delSp modSp add mod modTransition modAnim modNotesTx">
+        <pc:chgData name="Steve Mutrux" userId="4fa98d0c-dc66-4728-b09b-a88e22e95094" providerId="ADAL" clId="{421BD283-33D8-4C6C-821F-71755E863FA2}" dt="2026-09-17T18:13:06.438" v="5216"/>
         <pc:sldMkLst>
           <pc:docMk/>
           <pc:sldMk cId="557364214" sldId="267"/>
@@ -1538,8 +1565,8 @@
           </ac:grpSpMkLst>
         </pc:grpChg>
       </pc:sldChg>
-      <pc:sldChg chg="addSp delSp modSp add mod modAnim modNotesTx">
-        <pc:chgData name="Steve Mutrux" userId="4fa98d0c-dc66-4728-b09b-a88e22e95094" providerId="ADAL" clId="{421BD283-33D8-4C6C-821F-71755E863FA2}" dt="2026-09-16T11:54:25.710" v="3455" actId="1076"/>
+      <pc:sldChg chg="addSp delSp modSp add mod modTransition modAnim modNotesTx">
+        <pc:chgData name="Steve Mutrux" userId="4fa98d0c-dc66-4728-b09b-a88e22e95094" providerId="ADAL" clId="{421BD283-33D8-4C6C-821F-71755E863FA2}" dt="2026-09-17T18:13:08.592" v="5217"/>
         <pc:sldMkLst>
           <pc:docMk/>
           <pc:sldMk cId="3893094920" sldId="268"/>
@@ -1682,7 +1709,7 @@
         </pc:picChg>
       </pc:sldChg>
       <pc:sldChg chg="addSp delSp modSp add mod modAnim">
-        <pc:chgData name="Steve Mutrux" userId="4fa98d0c-dc66-4728-b09b-a88e22e95094" providerId="ADAL" clId="{421BD283-33D8-4C6C-821F-71755E863FA2}" dt="2026-09-16T13:08:23.999" v="4176" actId="1036"/>
+        <pc:chgData name="Steve Mutrux" userId="4fa98d0c-dc66-4728-b09b-a88e22e95094" providerId="ADAL" clId="{421BD283-33D8-4C6C-821F-71755E863FA2}" dt="2026-09-17T18:32:43.712" v="5292" actId="1036"/>
         <pc:sldMkLst>
           <pc:docMk/>
           <pc:sldMk cId="1755182162" sldId="269"/>
@@ -1725,6 +1752,14 @@
             <pc:docMk/>
             <pc:sldMk cId="1755182162" sldId="269"/>
             <ac:spMk id="6" creationId="{DE0AABFC-72E2-9D06-FC3C-5D2C8EFA51D3}"/>
+          </ac:spMkLst>
+        </pc:spChg>
+        <pc:spChg chg="mod">
+          <ac:chgData name="Steve Mutrux" userId="4fa98d0c-dc66-4728-b09b-a88e22e95094" providerId="ADAL" clId="{421BD283-33D8-4C6C-821F-71755E863FA2}" dt="2026-09-17T18:32:43.712" v="5292" actId="1036"/>
+          <ac:spMkLst>
+            <pc:docMk/>
+            <pc:sldMk cId="1755182162" sldId="269"/>
+            <ac:spMk id="8" creationId="{920A0F4F-D15B-3088-F2A1-AD48A979E786}"/>
           </ac:spMkLst>
         </pc:spChg>
         <pc:spChg chg="add del mod">
@@ -1831,8 +1866,8 @@
           </ac:spMkLst>
         </pc:spChg>
       </pc:sldChg>
-      <pc:sldChg chg="delSp modSp add mod">
-        <pc:chgData name="Steve Mutrux" userId="4fa98d0c-dc66-4728-b09b-a88e22e95094" providerId="ADAL" clId="{421BD283-33D8-4C6C-821F-71755E863FA2}" dt="2026-09-16T00:43:04.454" v="870" actId="478"/>
+      <pc:sldChg chg="delSp modSp add del mod">
+        <pc:chgData name="Steve Mutrux" userId="4fa98d0c-dc66-4728-b09b-a88e22e95094" providerId="ADAL" clId="{421BD283-33D8-4C6C-821F-71755E863FA2}" dt="2026-09-17T18:12:04.346" v="5211" actId="47"/>
         <pc:sldMkLst>
           <pc:docMk/>
           <pc:sldMk cId="1557603729" sldId="271"/>
@@ -1989,8 +2024,8 @@
           </ac:grpSpMkLst>
         </pc:grpChg>
       </pc:sldChg>
-      <pc:sldChg chg="addSp modSp add mod modAnim modNotesTx">
-        <pc:chgData name="Steve Mutrux" userId="4fa98d0c-dc66-4728-b09b-a88e22e95094" providerId="ADAL" clId="{421BD283-33D8-4C6C-821F-71755E863FA2}" dt="2026-09-16T11:19:32.067" v="3202" actId="1035"/>
+      <pc:sldChg chg="addSp modSp add mod modTransition modAnim modNotesTx">
+        <pc:chgData name="Steve Mutrux" userId="4fa98d0c-dc66-4728-b09b-a88e22e95094" providerId="ADAL" clId="{421BD283-33D8-4C6C-821F-71755E863FA2}" dt="2026-09-17T18:13:01.302" v="5214"/>
         <pc:sldMkLst>
           <pc:docMk/>
           <pc:sldMk cId="3925825761" sldId="273"/>
@@ -2069,7 +2104,7 @@
         </pc:grpChg>
       </pc:sldChg>
       <pc:sldChg chg="addSp delSp modSp add mod delAnim modAnim modNotesTx">
-        <pc:chgData name="Steve Mutrux" userId="4fa98d0c-dc66-4728-b09b-a88e22e95094" providerId="ADAL" clId="{421BD283-33D8-4C6C-821F-71755E863FA2}" dt="2026-09-17T17:29:17.683" v="4770" actId="20577"/>
+        <pc:chgData name="Steve Mutrux" userId="4fa98d0c-dc66-4728-b09b-a88e22e95094" providerId="ADAL" clId="{421BD283-33D8-4C6C-821F-71755E863FA2}" dt="2026-09-17T18:12:57.173" v="5213"/>
         <pc:sldMkLst>
           <pc:docMk/>
           <pc:sldMk cId="859702855" sldId="274"/>
@@ -10463,7 +10498,7 @@
                 <a:latin typeface="Kumbh Sans" pitchFamily="2" charset="0"/>
                 <a:cs typeface="Kumbh Sans" pitchFamily="2" charset="0"/>
               </a:rPr>
-              <a:t>$1,440</a:t>
+              <a:t>$1,728</a:t>
             </a:r>
           </a:p>
         </p:txBody>
@@ -15495,6 +15530,85 @@
           </a:p>
         </p:txBody>
       </p:sp>
+      <p:pic>
+        <p:nvPicPr>
+          <p:cNvPr id="14" name="Picture 13">
+            <a:extLst>
+              <a:ext uri="{FF2B5EF4-FFF2-40B4-BE49-F238E27FC236}">
+                <a16:creationId xmlns:a16="http://schemas.microsoft.com/office/drawing/2014/main" id="{387C92B2-EE40-6CBB-BD04-2055150745E3}"/>
+              </a:ext>
+            </a:extLst>
+          </p:cNvPr>
+          <p:cNvPicPr>
+            <a:picLocks noChangeAspect="1"/>
+          </p:cNvPicPr>
+          <p:nvPr/>
+        </p:nvPicPr>
+        <p:blipFill>
+          <a:blip r:embed="rId3">
+            <a:extLst>
+              <a:ext uri="{28A0092B-C50C-407E-A947-70E740481C1C}">
+                <a14:useLocalDpi xmlns:a14="http://schemas.microsoft.com/office/drawing/2010/main" val="0"/>
+              </a:ext>
+            </a:extLst>
+          </a:blip>
+          <a:stretch>
+            <a:fillRect/>
+          </a:stretch>
+        </p:blipFill>
+        <p:spPr>
+          <a:xfrm>
+            <a:off x="3402800" y="1771869"/>
+            <a:ext cx="7967662" cy="3206425"/>
+          </a:xfrm>
+          <a:prstGeom prst="rect">
+            <a:avLst/>
+          </a:prstGeom>
+        </p:spPr>
+      </p:pic>
+      <p:sp>
+        <p:nvSpPr>
+          <p:cNvPr id="15" name="TextBox 14">
+            <a:extLst>
+              <a:ext uri="{FF2B5EF4-FFF2-40B4-BE49-F238E27FC236}">
+                <a16:creationId xmlns:a16="http://schemas.microsoft.com/office/drawing/2014/main" id="{371B18D3-D66D-246F-ADDA-BEA5981F37AE}"/>
+              </a:ext>
+            </a:extLst>
+          </p:cNvPr>
+          <p:cNvSpPr txBox="1"/>
+          <p:nvPr/>
+        </p:nvSpPr>
+        <p:spPr>
+          <a:xfrm>
+            <a:off x="6178865" y="868422"/>
+            <a:ext cx="2209259" cy="721929"/>
+          </a:xfrm>
+          <a:prstGeom prst="rect">
+            <a:avLst/>
+          </a:prstGeom>
+          <a:noFill/>
+        </p:spPr>
+        <p:txBody>
+          <a:bodyPr wrap="none" rtlCol="0">
+            <a:spAutoFit/>
+          </a:bodyPr>
+          <a:lstStyle/>
+          <a:p>
+            <a:pPr algn="ctr">
+              <a:lnSpc>
+                <a:spcPct val="200000"/>
+              </a:lnSpc>
+            </a:pPr>
+            <a:r>
+              <a:rPr lang="en-CA" sz="2400" dirty="0">
+                <a:latin typeface="Kumbh Sans" pitchFamily="2" charset="0"/>
+                <a:cs typeface="Kumbh Sans" pitchFamily="2" charset="0"/>
+              </a:rPr>
+              <a:t>NCR Manager</a:t>
+            </a:r>
+          </a:p>
+        </p:txBody>
+      </p:sp>
     </p:spTree>
     <p:extLst>
       <p:ext uri="{BB962C8B-B14F-4D97-AF65-F5344CB8AC3E}">
@@ -15808,14 +15922,84 @@
                                 </p:cTn>
                               </p:par>
                               <p:par>
-                                <p:cTn id="22" presetID="1" presetClass="entr" presetSubtype="0" fill="hold" grpId="0" nodeType="withEffect">
+                                <p:cTn id="22" presetID="10" presetClass="exit" presetSubtype="0" fill="hold" nodeType="withEffect">
+                                  <p:stCondLst>
+                                    <p:cond delay="0"/>
+                                  </p:stCondLst>
+                                  <p:childTnLst>
+                                    <p:animEffect transition="out" filter="fade">
+                                      <p:cBhvr>
+                                        <p:cTn id="23" dur="500"/>
+                                        <p:tgtEl>
+                                          <p:spTgt spid="14"/>
+                                        </p:tgtEl>
+                                      </p:cBhvr>
+                                    </p:animEffect>
+                                    <p:set>
+                                      <p:cBhvr>
+                                        <p:cTn id="24" dur="1" fill="hold">
+                                          <p:stCondLst>
+                                            <p:cond delay="499"/>
+                                          </p:stCondLst>
+                                        </p:cTn>
+                                        <p:tgtEl>
+                                          <p:spTgt spid="14"/>
+                                        </p:tgtEl>
+                                        <p:attrNameLst>
+                                          <p:attrName>style.visibility</p:attrName>
+                                        </p:attrNameLst>
+                                      </p:cBhvr>
+                                      <p:to>
+                                        <p:strVal val="hidden"/>
+                                      </p:to>
+                                    </p:set>
+                                  </p:childTnLst>
+                                </p:cTn>
+                              </p:par>
+                              <p:par>
+                                <p:cTn id="25" presetID="10" presetClass="exit" presetSubtype="0" fill="hold" grpId="0" nodeType="withEffect">
+                                  <p:stCondLst>
+                                    <p:cond delay="0"/>
+                                  </p:stCondLst>
+                                  <p:childTnLst>
+                                    <p:animEffect transition="out" filter="fade">
+                                      <p:cBhvr>
+                                        <p:cTn id="26" dur="500"/>
+                                        <p:tgtEl>
+                                          <p:spTgt spid="15"/>
+                                        </p:tgtEl>
+                                      </p:cBhvr>
+                                    </p:animEffect>
+                                    <p:set>
+                                      <p:cBhvr>
+                                        <p:cTn id="27" dur="1" fill="hold">
+                                          <p:stCondLst>
+                                            <p:cond delay="499"/>
+                                          </p:stCondLst>
+                                        </p:cTn>
+                                        <p:tgtEl>
+                                          <p:spTgt spid="15"/>
+                                        </p:tgtEl>
+                                        <p:attrNameLst>
+                                          <p:attrName>style.visibility</p:attrName>
+                                        </p:attrNameLst>
+                                      </p:cBhvr>
+                                      <p:to>
+                                        <p:strVal val="hidden"/>
+                                      </p:to>
+                                    </p:set>
+                                  </p:childTnLst>
+                                </p:cTn>
+                              </p:par>
+                              <p:par>
+                                <p:cTn id="28" presetID="1" presetClass="entr" presetSubtype="0" fill="hold" grpId="0" nodeType="withEffect">
                                   <p:stCondLst>
                                     <p:cond delay="0"/>
                                   </p:stCondLst>
                                   <p:childTnLst>
                                     <p:set>
                                       <p:cBhvr>
-                                        <p:cTn id="23" dur="1" fill="hold">
+                                        <p:cTn id="29" dur="1" fill="hold">
                                           <p:stCondLst>
                                             <p:cond delay="0"/>
                                           </p:stCondLst>
@@ -15835,14 +16019,14 @@
                                 </p:cTn>
                               </p:par>
                               <p:par>
-                                <p:cTn id="24" presetID="1" presetClass="entr" presetSubtype="0" fill="hold" grpId="0" nodeType="withEffect">
+                                <p:cTn id="30" presetID="1" presetClass="entr" presetSubtype="0" fill="hold" grpId="0" nodeType="withEffect">
                                   <p:stCondLst>
                                     <p:cond delay="0"/>
                                   </p:stCondLst>
                                   <p:childTnLst>
                                     <p:set>
                                       <p:cBhvr>
-                                        <p:cTn id="25" dur="1" fill="hold">
+                                        <p:cTn id="31" dur="1" fill="hold">
                                           <p:stCondLst>
                                             <p:cond delay="0"/>
                                           </p:stCondLst>
@@ -15862,14 +16046,14 @@
                                 </p:cTn>
                               </p:par>
                               <p:par>
-                                <p:cTn id="26" presetID="1" presetClass="entr" presetSubtype="0" fill="hold" nodeType="withEffect">
+                                <p:cTn id="32" presetID="1" presetClass="entr" presetSubtype="0" fill="hold" nodeType="withEffect">
                                   <p:stCondLst>
                                     <p:cond delay="0"/>
                                   </p:stCondLst>
                                   <p:childTnLst>
                                     <p:set>
                                       <p:cBhvr>
-                                        <p:cTn id="27" dur="1" fill="hold">
+                                        <p:cTn id="33" dur="1" fill="hold">
                                           <p:stCondLst>
                                             <p:cond delay="0"/>
                                           </p:stCondLst>
@@ -15889,14 +16073,14 @@
                                 </p:cTn>
                               </p:par>
                               <p:par>
-                                <p:cTn id="28" presetID="1" presetClass="entr" presetSubtype="0" fill="hold" nodeType="withEffect">
+                                <p:cTn id="34" presetID="1" presetClass="entr" presetSubtype="0" fill="hold" nodeType="withEffect">
                                   <p:stCondLst>
                                     <p:cond delay="0"/>
                                   </p:stCondLst>
                                   <p:childTnLst>
                                     <p:set>
                                       <p:cBhvr>
-                                        <p:cTn id="29" dur="1" fill="hold">
+                                        <p:cTn id="35" dur="1" fill="hold">
                                           <p:stCondLst>
                                             <p:cond delay="0"/>
                                           </p:stCondLst>
@@ -15916,14 +16100,14 @@
                                 </p:cTn>
                               </p:par>
                               <p:par>
-                                <p:cTn id="30" presetID="42" presetClass="path" presetSubtype="0" accel="50000" decel="50000" fill="hold" grpId="1" nodeType="withEffect">
+                                <p:cTn id="36" presetID="42" presetClass="path" presetSubtype="0" accel="50000" decel="50000" fill="hold" grpId="1" nodeType="withEffect">
                                   <p:stCondLst>
                                     <p:cond delay="0"/>
                                   </p:stCondLst>
                                   <p:childTnLst>
                                     <p:animMotion origin="layout" path="M -2.29167E-6 1.11022E-16 L -2.29167E-6 0.10278 " pathEditMode="relative" rAng="0" ptsTypes="AA">
                                       <p:cBhvr>
-                                        <p:cTn id="31" dur="2000" fill="hold"/>
+                                        <p:cTn id="37" dur="2000" fill="hold"/>
                                         <p:tgtEl>
                                           <p:spTgt spid="25"/>
                                         </p:tgtEl>
@@ -15938,14 +16122,14 @@
                                 </p:cTn>
                               </p:par>
                               <p:par>
-                                <p:cTn id="32" presetID="42" presetClass="path" presetSubtype="0" accel="50000" decel="50000" fill="hold" grpId="1" nodeType="withEffect">
+                                <p:cTn id="38" presetID="42" presetClass="path" presetSubtype="0" accel="50000" decel="50000" fill="hold" grpId="1" nodeType="withEffect">
                                   <p:stCondLst>
                                     <p:cond delay="0"/>
                                   </p:stCondLst>
                                   <p:childTnLst>
                                     <p:animMotion origin="layout" path="M -2.29167E-6 3.7037E-6 L -2.29167E-6 0.18726 " pathEditMode="relative" rAng="0" ptsTypes="AA">
                                       <p:cBhvr>
-                                        <p:cTn id="33" dur="2000" fill="hold"/>
+                                        <p:cTn id="39" dur="2000" fill="hold"/>
                                         <p:tgtEl>
                                           <p:spTgt spid="23"/>
                                         </p:tgtEl>
@@ -15960,14 +16144,14 @@
                                 </p:cTn>
                               </p:par>
                               <p:par>
-                                <p:cTn id="34" presetID="42" presetClass="path" presetSubtype="0" accel="50000" decel="50000" fill="hold" nodeType="withEffect">
+                                <p:cTn id="40" presetID="42" presetClass="path" presetSubtype="0" accel="50000" decel="50000" fill="hold" nodeType="withEffect">
                                   <p:stCondLst>
                                     <p:cond delay="0"/>
                                   </p:stCondLst>
                                   <p:childTnLst>
                                     <p:animMotion origin="layout" path="M -4.375E-6 4.81481E-6 L -4.375E-6 0.18773 " pathEditMode="relative" rAng="0" ptsTypes="AA">
                                       <p:cBhvr>
-                                        <p:cTn id="35" dur="2000" fill="hold"/>
+                                        <p:cTn id="41" dur="2000" fill="hold"/>
                                         <p:tgtEl>
                                           <p:spTgt spid="34"/>
                                         </p:tgtEl>
@@ -15982,14 +16166,14 @@
                                 </p:cTn>
                               </p:par>
                               <p:par>
-                                <p:cTn id="36" presetID="42" presetClass="path" presetSubtype="0" accel="50000" decel="50000" fill="hold" nodeType="withEffect">
+                                <p:cTn id="42" presetID="42" presetClass="path" presetSubtype="0" accel="50000" decel="50000" fill="hold" nodeType="withEffect">
                                   <p:stCondLst>
                                     <p:cond delay="0"/>
                                   </p:stCondLst>
                                   <p:childTnLst>
                                     <p:animMotion origin="layout" path="M -4.375E-6 -4.07407E-6 L -4.375E-6 0.10232 " pathEditMode="relative" rAng="0" ptsTypes="AA">
                                       <p:cBhvr>
-                                        <p:cTn id="37" dur="2000" fill="hold"/>
+                                        <p:cTn id="43" dur="2000" fill="hold"/>
                                         <p:tgtEl>
                                           <p:spTgt spid="35"/>
                                         </p:tgtEl>
@@ -16000,78 +16184,6 @@
                                       </p:cBhvr>
                                       <p:rCtr x="0" y="5116"/>
                                     </p:animMotion>
-                                  </p:childTnLst>
-                                </p:cTn>
-                              </p:par>
-                            </p:childTnLst>
-                          </p:cTn>
-                        </p:par>
-                        <p:par>
-                          <p:cTn id="38" fill="hold">
-                            <p:stCondLst>
-                              <p:cond delay="2000"/>
-                            </p:stCondLst>
-                            <p:childTnLst>
-                              <p:par>
-                                <p:cTn id="39" presetID="1" presetClass="exit" presetSubtype="0" fill="hold" grpId="2" nodeType="afterEffect">
-                                  <p:stCondLst>
-                                    <p:cond delay="0"/>
-                                  </p:stCondLst>
-                                  <p:childTnLst>
-                                    <p:set>
-                                      <p:cBhvr>
-                                        <p:cTn id="40" dur="1" fill="hold">
-                                          <p:stCondLst>
-                                            <p:cond delay="0"/>
-                                          </p:stCondLst>
-                                        </p:cTn>
-                                        <p:tgtEl>
-                                          <p:spTgt spid="25"/>
-                                        </p:tgtEl>
-                                        <p:attrNameLst>
-                                          <p:attrName>style.visibility</p:attrName>
-                                        </p:attrNameLst>
-                                      </p:cBhvr>
-                                      <p:to>
-                                        <p:strVal val="hidden"/>
-                                      </p:to>
-                                    </p:set>
-                                  </p:childTnLst>
-                                </p:cTn>
-                              </p:par>
-                            </p:childTnLst>
-                          </p:cTn>
-                        </p:par>
-                        <p:par>
-                          <p:cTn id="41" fill="hold">
-                            <p:stCondLst>
-                              <p:cond delay="2000"/>
-                            </p:stCondLst>
-                            <p:childTnLst>
-                              <p:par>
-                                <p:cTn id="42" presetID="1" presetClass="exit" presetSubtype="0" fill="hold" grpId="2" nodeType="afterEffect">
-                                  <p:stCondLst>
-                                    <p:cond delay="0"/>
-                                  </p:stCondLst>
-                                  <p:childTnLst>
-                                    <p:set>
-                                      <p:cBhvr>
-                                        <p:cTn id="43" dur="1" fill="hold">
-                                          <p:stCondLst>
-                                            <p:cond delay="0"/>
-                                          </p:stCondLst>
-                                        </p:cTn>
-                                        <p:tgtEl>
-                                          <p:spTgt spid="23"/>
-                                        </p:tgtEl>
-                                        <p:attrNameLst>
-                                          <p:attrName>style.visibility</p:attrName>
-                                        </p:attrNameLst>
-                                      </p:cBhvr>
-                                      <p:to>
-                                        <p:strVal val="hidden"/>
-                                      </p:to>
-                                    </p:set>
                                   </p:childTnLst>
                                 </p:cTn>
                               </p:par>
@@ -16085,7 +16197,7 @@
                             </p:stCondLst>
                             <p:childTnLst>
                               <p:par>
-                                <p:cTn id="45" presetID="1" presetClass="exit" presetSubtype="0" fill="hold" nodeType="afterEffect">
+                                <p:cTn id="45" presetID="1" presetClass="exit" presetSubtype="0" fill="hold" grpId="2" nodeType="afterEffect">
                                   <p:stCondLst>
                                     <p:cond delay="0"/>
                                   </p:stCondLst>
@@ -16098,7 +16210,7 @@
                                           </p:stCondLst>
                                         </p:cTn>
                                         <p:tgtEl>
-                                          <p:spTgt spid="34"/>
+                                          <p:spTgt spid="25"/>
                                         </p:tgtEl>
                                         <p:attrNameLst>
                                           <p:attrName>style.visibility</p:attrName>
@@ -16121,7 +16233,7 @@
                             </p:stCondLst>
                             <p:childTnLst>
                               <p:par>
-                                <p:cTn id="48" presetID="1" presetClass="exit" presetSubtype="0" fill="hold" nodeType="afterEffect">
+                                <p:cTn id="48" presetID="1" presetClass="exit" presetSubtype="0" fill="hold" grpId="2" nodeType="afterEffect">
                                   <p:stCondLst>
                                     <p:cond delay="0"/>
                                   </p:stCondLst>
@@ -16129,6 +16241,78 @@
                                     <p:set>
                                       <p:cBhvr>
                                         <p:cTn id="49" dur="1" fill="hold">
+                                          <p:stCondLst>
+                                            <p:cond delay="0"/>
+                                          </p:stCondLst>
+                                        </p:cTn>
+                                        <p:tgtEl>
+                                          <p:spTgt spid="23"/>
+                                        </p:tgtEl>
+                                        <p:attrNameLst>
+                                          <p:attrName>style.visibility</p:attrName>
+                                        </p:attrNameLst>
+                                      </p:cBhvr>
+                                      <p:to>
+                                        <p:strVal val="hidden"/>
+                                      </p:to>
+                                    </p:set>
+                                  </p:childTnLst>
+                                </p:cTn>
+                              </p:par>
+                            </p:childTnLst>
+                          </p:cTn>
+                        </p:par>
+                        <p:par>
+                          <p:cTn id="50" fill="hold">
+                            <p:stCondLst>
+                              <p:cond delay="2000"/>
+                            </p:stCondLst>
+                            <p:childTnLst>
+                              <p:par>
+                                <p:cTn id="51" presetID="1" presetClass="exit" presetSubtype="0" fill="hold" nodeType="afterEffect">
+                                  <p:stCondLst>
+                                    <p:cond delay="0"/>
+                                  </p:stCondLst>
+                                  <p:childTnLst>
+                                    <p:set>
+                                      <p:cBhvr>
+                                        <p:cTn id="52" dur="1" fill="hold">
+                                          <p:stCondLst>
+                                            <p:cond delay="0"/>
+                                          </p:stCondLst>
+                                        </p:cTn>
+                                        <p:tgtEl>
+                                          <p:spTgt spid="34"/>
+                                        </p:tgtEl>
+                                        <p:attrNameLst>
+                                          <p:attrName>style.visibility</p:attrName>
+                                        </p:attrNameLst>
+                                      </p:cBhvr>
+                                      <p:to>
+                                        <p:strVal val="hidden"/>
+                                      </p:to>
+                                    </p:set>
+                                  </p:childTnLst>
+                                </p:cTn>
+                              </p:par>
+                            </p:childTnLst>
+                          </p:cTn>
+                        </p:par>
+                        <p:par>
+                          <p:cTn id="53" fill="hold">
+                            <p:stCondLst>
+                              <p:cond delay="2000"/>
+                            </p:stCondLst>
+                            <p:childTnLst>
+                              <p:par>
+                                <p:cTn id="54" presetID="1" presetClass="exit" presetSubtype="0" fill="hold" nodeType="afterEffect">
+                                  <p:stCondLst>
+                                    <p:cond delay="0"/>
+                                  </p:stCondLst>
+                                  <p:childTnLst>
+                                    <p:set>
+                                      <p:cBhvr>
+                                        <p:cTn id="55" dur="1" fill="hold">
                                           <p:stCondLst>
                                             <p:cond delay="0"/>
                                           </p:stCondLst>
@@ -16148,14 +16332,14 @@
                                 </p:cTn>
                               </p:par>
                               <p:par>
-                                <p:cTn id="50" presetID="1" presetClass="entr" presetSubtype="0" fill="hold" nodeType="withEffect">
+                                <p:cTn id="56" presetID="1" presetClass="entr" presetSubtype="0" fill="hold" nodeType="withEffect">
                                   <p:stCondLst>
                                     <p:cond delay="0"/>
                                   </p:stCondLst>
                                   <p:childTnLst>
                                     <p:set>
                                       <p:cBhvr>
-                                        <p:cTn id="51" dur="1" fill="hold">
+                                        <p:cTn id="57" dur="1" fill="hold">
                                           <p:stCondLst>
                                             <p:cond delay="0"/>
                                           </p:stCondLst>
@@ -16208,6 +16392,7 @@
       <p:bldP spid="25" grpId="0" animBg="1"/>
       <p:bldP spid="25" grpId="1" animBg="1"/>
       <p:bldP spid="25" grpId="2" animBg="1"/>
+      <p:bldP spid="15" grpId="0"/>
     </p:bldLst>
   </p:timing>
 </p:sld>
@@ -16250,7 +16435,7 @@
         </p:nvSpPr>
         <p:spPr>
           <a:xfrm>
-            <a:off x="331872" y="2282620"/>
+            <a:off x="331872" y="4852719"/>
             <a:ext cx="2887578" cy="714377"/>
           </a:xfrm>
           <a:prstGeom prst="roundRect">
@@ -16364,7 +16549,7 @@
             <a:lstStyle/>
             <a:p>
               <a:pPr algn="ctr"/>
-              <a:endParaRPr lang="en-CA"/>
+              <a:endParaRPr lang="en-CA" dirty="0"/>
             </a:p>
           </p:txBody>
         </p:sp>
@@ -16962,7 +17147,7 @@
           <p:nvPr>
             <p:extLst>
               <p:ext uri="{D42A27DB-BD31-4B8C-83A1-F6EECF244321}">
-                <p14:modId xmlns:p14="http://schemas.microsoft.com/office/powerpoint/2010/main" val="1599146616"/>
+                <p14:modId xmlns:p14="http://schemas.microsoft.com/office/powerpoint/2010/main" val="22152950"/>
               </p:ext>
             </p:extLst>
           </p:nvPr>
@@ -17013,7 +17198,10 @@
                     <a:bodyPr/>
                     <a:lstStyle/>
                     <a:p>
-                      <a:endParaRPr lang="en-CA" dirty="0"/>
+                      <a:endParaRPr lang="en-CA" b="0" dirty="0">
+                        <a:latin typeface="Kumbh Sans SemiBold" pitchFamily="2" charset="0"/>
+                        <a:cs typeface="Kumbh Sans SemiBold" pitchFamily="2" charset="0"/>
+                      </a:endParaRPr>
                     </a:p>
                   </a:txBody>
                   <a:tcPr>
@@ -17059,10 +17247,16 @@
                     <a:p>
                       <a:pPr algn="ctr"/>
                       <a:r>
-                        <a:rPr lang="en-CA" dirty="0" err="1"/>
+                        <a:rPr lang="en-CA" b="0" dirty="0" err="1">
+                          <a:latin typeface="Kumbh Sans SemiBold" pitchFamily="2" charset="0"/>
+                          <a:cs typeface="Kumbh Sans SemiBold" pitchFamily="2" charset="0"/>
+                        </a:rPr>
                         <a:t>MasterControl</a:t>
                       </a:r>
-                      <a:endParaRPr lang="en-CA" dirty="0"/>
+                      <a:endParaRPr lang="en-CA" b="0" dirty="0">
+                        <a:latin typeface="Kumbh Sans SemiBold" pitchFamily="2" charset="0"/>
+                        <a:cs typeface="Kumbh Sans SemiBold" pitchFamily="2" charset="0"/>
+                      </a:endParaRPr>
                     </a:p>
                   </a:txBody>
                   <a:tcPr anchor="ctr">
@@ -17118,10 +17312,16 @@
                     <a:p>
                       <a:pPr algn="ctr"/>
                       <a:r>
-                        <a:rPr lang="en-CA" dirty="0" err="1"/>
+                        <a:rPr lang="en-CA" b="0" dirty="0" err="1">
+                          <a:latin typeface="Kumbh Sans SemiBold" pitchFamily="2" charset="0"/>
+                          <a:cs typeface="Kumbh Sans SemiBold" pitchFamily="2" charset="0"/>
+                        </a:rPr>
                         <a:t>Mitti</a:t>
                       </a:r>
-                      <a:endParaRPr lang="en-CA" dirty="0"/>
+                      <a:endParaRPr lang="en-CA" b="0" dirty="0">
+                        <a:latin typeface="Kumbh Sans SemiBold" pitchFamily="2" charset="0"/>
+                        <a:cs typeface="Kumbh Sans SemiBold" pitchFamily="2" charset="0"/>
+                      </a:endParaRPr>
                     </a:p>
                   </a:txBody>
                   <a:tcPr anchor="ctr">
@@ -17179,7 +17379,10 @@
                     <a:p>
                       <a:pPr algn="ctr"/>
                       <a:r>
-                        <a:rPr lang="en-CA" dirty="0"/>
+                        <a:rPr lang="en-CA" b="0" dirty="0">
+                          <a:latin typeface="Kumbh Sans SemiBold" pitchFamily="2" charset="0"/>
+                          <a:cs typeface="Kumbh Sans SemiBold" pitchFamily="2" charset="0"/>
+                        </a:rPr>
                         <a:t>NCR Manager</a:t>
                       </a:r>
                     </a:p>
@@ -17244,7 +17447,10 @@
                     <a:p>
                       <a:pPr algn="ctr"/>
                       <a:r>
-                        <a:rPr lang="en-CA" dirty="0"/>
+                        <a:rPr lang="en-CA" b="0" dirty="0">
+                          <a:latin typeface="Kumbh Sans SemiBold" pitchFamily="2" charset="0"/>
+                          <a:cs typeface="Kumbh Sans SemiBold" pitchFamily="2" charset="0"/>
+                        </a:rPr>
                         <a:t>Setup Time</a:t>
                       </a:r>
                     </a:p>
@@ -17304,7 +17510,10 @@
                     <a:p>
                       <a:pPr algn="ctr"/>
                       <a:r>
-                        <a:rPr lang="en-CA" b="1" dirty="0"/>
+                        <a:rPr lang="en-CA" b="0" dirty="0">
+                          <a:latin typeface="Kumbh Sans SemiBold" pitchFamily="2" charset="0"/>
+                          <a:cs typeface="Kumbh Sans SemiBold" pitchFamily="2" charset="0"/>
+                        </a:rPr>
                         <a:t>1 – 3 Months</a:t>
                       </a:r>
                     </a:p>
@@ -17363,7 +17572,10 @@
                     <a:p>
                       <a:pPr algn="ctr"/>
                       <a:r>
-                        <a:rPr lang="en-CA" b="1" dirty="0"/>
+                        <a:rPr lang="en-CA" b="0" dirty="0">
+                          <a:latin typeface="Kumbh Sans SemiBold" pitchFamily="2" charset="0"/>
+                          <a:cs typeface="Kumbh Sans SemiBold" pitchFamily="2" charset="0"/>
+                        </a:rPr>
                         <a:t>8 Weeks</a:t>
                       </a:r>
                     </a:p>
@@ -17422,7 +17634,10 @@
                     <a:p>
                       <a:pPr algn="ctr"/>
                       <a:r>
-                        <a:rPr lang="en-CA" b="1" dirty="0"/>
+                        <a:rPr lang="en-CA" b="0" dirty="0">
+                          <a:latin typeface="Kumbh Sans SemiBold" pitchFamily="2" charset="0"/>
+                          <a:cs typeface="Kumbh Sans SemiBold" pitchFamily="2" charset="0"/>
+                        </a:rPr>
                         <a:t>4 - 5 Weeks</a:t>
                       </a:r>
                     </a:p>
@@ -17486,7 +17701,10 @@
                     <a:p>
                       <a:pPr algn="ctr"/>
                       <a:r>
-                        <a:rPr lang="en-CA" dirty="0"/>
+                        <a:rPr lang="en-CA" b="0" dirty="0">
+                          <a:latin typeface="Kumbh Sans SemiBold" pitchFamily="2" charset="0"/>
+                          <a:cs typeface="Kumbh Sans SemiBold" pitchFamily="2" charset="0"/>
+                        </a:rPr>
                         <a:t>Training Time</a:t>
                       </a:r>
                     </a:p>
@@ -17546,7 +17764,10 @@
                     <a:p>
                       <a:pPr algn="ctr"/>
                       <a:r>
-                        <a:rPr lang="en-CA" b="1" dirty="0"/>
+                        <a:rPr lang="en-CA" b="0" dirty="0">
+                          <a:latin typeface="Kumbh Sans SemiBold" pitchFamily="2" charset="0"/>
+                          <a:cs typeface="Kumbh Sans SemiBold" pitchFamily="2" charset="0"/>
+                        </a:rPr>
                         <a:t>1 Month</a:t>
                       </a:r>
                     </a:p>
@@ -17605,7 +17826,10 @@
                     <a:p>
                       <a:pPr algn="ctr"/>
                       <a:r>
-                        <a:rPr lang="en-CA" b="1" dirty="0"/>
+                        <a:rPr lang="en-CA" b="0" dirty="0">
+                          <a:latin typeface="Kumbh Sans SemiBold" pitchFamily="2" charset="0"/>
+                          <a:cs typeface="Kumbh Sans SemiBold" pitchFamily="2" charset="0"/>
+                        </a:rPr>
                         <a:t>1 Month</a:t>
                       </a:r>
                     </a:p>
@@ -17664,7 +17888,10 @@
                     <a:p>
                       <a:pPr algn="ctr"/>
                       <a:r>
-                        <a:rPr lang="en-CA" b="1" dirty="0"/>
+                        <a:rPr lang="en-CA" b="0" dirty="0">
+                          <a:latin typeface="Kumbh Sans SemiBold" pitchFamily="2" charset="0"/>
+                          <a:cs typeface="Kumbh Sans SemiBold" pitchFamily="2" charset="0"/>
+                        </a:rPr>
                         <a:t>1 Month</a:t>
                       </a:r>
                     </a:p>
@@ -17728,7 +17955,10 @@
                     <a:p>
                       <a:pPr algn="ctr"/>
                       <a:r>
-                        <a:rPr lang="en-CA" dirty="0"/>
+                        <a:rPr lang="en-CA" b="0" dirty="0">
+                          <a:latin typeface="Kumbh Sans SemiBold" pitchFamily="2" charset="0"/>
+                          <a:cs typeface="Kumbh Sans SemiBold" pitchFamily="2" charset="0"/>
+                        </a:rPr>
                         <a:t>Optional AI</a:t>
                       </a:r>
                     </a:p>
@@ -17788,13 +18018,15 @@
                     <a:p>
                       <a:pPr algn="ctr"/>
                       <a:r>
-                        <a:rPr lang="en-CA" b="1" dirty="0">
+                        <a:rPr lang="en-CA" b="0" dirty="0">
                           <a:solidFill>
                             <a:schemeClr val="accent1">
                               <a:lumMod val="60000"/>
                               <a:lumOff val="40000"/>
                             </a:schemeClr>
                           </a:solidFill>
+                          <a:latin typeface="Kumbh Sans SemiBold" pitchFamily="2" charset="0"/>
+                          <a:cs typeface="Kumbh Sans SemiBold" pitchFamily="2" charset="0"/>
                         </a:rPr>
                         <a:t>No</a:t>
                       </a:r>
@@ -17854,13 +18086,15 @@
                     <a:p>
                       <a:pPr algn="ctr"/>
                       <a:r>
-                        <a:rPr lang="en-CA" b="1" dirty="0">
+                        <a:rPr lang="en-CA" b="0" dirty="0">
                           <a:solidFill>
                             <a:schemeClr val="accent1">
                               <a:lumMod val="60000"/>
                               <a:lumOff val="40000"/>
                             </a:schemeClr>
                           </a:solidFill>
+                          <a:latin typeface="Kumbh Sans SemiBold" pitchFamily="2" charset="0"/>
+                          <a:cs typeface="Kumbh Sans SemiBold" pitchFamily="2" charset="0"/>
                         </a:rPr>
                         <a:t>No</a:t>
                       </a:r>
@@ -17920,10 +18154,12 @@
                     <a:p>
                       <a:pPr algn="ctr"/>
                       <a:r>
-                        <a:rPr lang="en-CA" b="1" dirty="0">
+                        <a:rPr lang="en-CA" b="0" dirty="0">
                           <a:solidFill>
                             <a:schemeClr val="accent6"/>
                           </a:solidFill>
+                          <a:latin typeface="Kumbh Sans SemiBold" pitchFamily="2" charset="0"/>
+                          <a:cs typeface="Kumbh Sans SemiBold" pitchFamily="2" charset="0"/>
                         </a:rPr>
                         <a:t>Yes</a:t>
                       </a:r>
@@ -17988,7 +18224,10 @@
                     <a:p>
                       <a:pPr algn="ctr"/>
                       <a:r>
-                        <a:rPr lang="en-CA" dirty="0"/>
+                        <a:rPr lang="en-CA" b="0" dirty="0">
+                          <a:latin typeface="Kumbh Sans SemiBold" pitchFamily="2" charset="0"/>
+                          <a:cs typeface="Kumbh Sans SemiBold" pitchFamily="2" charset="0"/>
+                        </a:rPr>
                         <a:t>Your Data</a:t>
                       </a:r>
                     </a:p>
@@ -18048,13 +18287,15 @@
                     <a:p>
                       <a:pPr algn="ctr"/>
                       <a:r>
-                        <a:rPr lang="en-CA" b="1" dirty="0">
+                        <a:rPr lang="en-CA" b="0" dirty="0">
                           <a:solidFill>
                             <a:schemeClr val="accent1">
                               <a:lumMod val="60000"/>
                               <a:lumOff val="40000"/>
                             </a:schemeClr>
                           </a:solidFill>
+                          <a:latin typeface="Kumbh Sans SemiBold" pitchFamily="2" charset="0"/>
+                          <a:cs typeface="Kumbh Sans SemiBold" pitchFamily="2" charset="0"/>
                         </a:rPr>
                         <a:t>No</a:t>
                       </a:r>
@@ -18114,13 +18355,15 @@
                     <a:p>
                       <a:pPr algn="ctr"/>
                       <a:r>
-                        <a:rPr lang="en-CA" b="1" dirty="0">
+                        <a:rPr lang="en-CA" b="0" dirty="0">
                           <a:solidFill>
                             <a:schemeClr val="accent1">
                               <a:lumMod val="60000"/>
                               <a:lumOff val="40000"/>
                             </a:schemeClr>
                           </a:solidFill>
+                          <a:latin typeface="Kumbh Sans SemiBold" pitchFamily="2" charset="0"/>
+                          <a:cs typeface="Kumbh Sans SemiBold" pitchFamily="2" charset="0"/>
                         </a:rPr>
                         <a:t>No</a:t>
                       </a:r>
@@ -18180,10 +18423,12 @@
                     <a:p>
                       <a:pPr algn="ctr"/>
                       <a:r>
-                        <a:rPr lang="en-CA" b="1" dirty="0">
+                        <a:rPr lang="en-CA" b="0" dirty="0">
                           <a:solidFill>
                             <a:schemeClr val="accent6"/>
                           </a:solidFill>
+                          <a:latin typeface="Kumbh Sans SemiBold" pitchFamily="2" charset="0"/>
+                          <a:cs typeface="Kumbh Sans SemiBold" pitchFamily="2" charset="0"/>
                         </a:rPr>
                         <a:t>Yes</a:t>
                       </a:r>
@@ -18248,7 +18493,10 @@
                     <a:p>
                       <a:pPr algn="ctr"/>
                       <a:r>
-                        <a:rPr lang="en-CA" dirty="0"/>
+                        <a:rPr lang="en-CA" b="0" dirty="0">
+                          <a:latin typeface="Kumbh Sans SemiBold" pitchFamily="2" charset="0"/>
+                          <a:cs typeface="Kumbh Sans SemiBold" pitchFamily="2" charset="0"/>
+                        </a:rPr>
                         <a:t>Price</a:t>
                       </a:r>
                     </a:p>
@@ -18306,7 +18554,10 @@
                     <a:p>
                       <a:pPr algn="ctr"/>
                       <a:r>
-                        <a:rPr lang="en-CA" b="1" dirty="0"/>
+                        <a:rPr lang="en-CA" b="0" dirty="0">
+                          <a:latin typeface="Kumbh Sans SemiBold" pitchFamily="2" charset="0"/>
+                          <a:cs typeface="Kumbh Sans SemiBold" pitchFamily="2" charset="0"/>
+                        </a:rPr>
                         <a:t>$21,000</a:t>
                       </a:r>
                     </a:p>
@@ -18363,7 +18614,10 @@
                     <a:p>
                       <a:pPr algn="ctr"/>
                       <a:r>
-                        <a:rPr lang="en-CA" b="1" dirty="0"/>
+                        <a:rPr lang="en-CA" b="0" dirty="0">
+                          <a:latin typeface="Kumbh Sans SemiBold" pitchFamily="2" charset="0"/>
+                          <a:cs typeface="Kumbh Sans SemiBold" pitchFamily="2" charset="0"/>
+                        </a:rPr>
                         <a:t>$1,728</a:t>
                       </a:r>
                     </a:p>
@@ -18420,7 +18674,10 @@
                     <a:p>
                       <a:pPr algn="ctr"/>
                       <a:r>
-                        <a:rPr lang="en-CA" b="1" dirty="0"/>
+                        <a:rPr lang="en-CA" b="0" dirty="0">
+                          <a:latin typeface="Kumbh Sans SemiBold" pitchFamily="2" charset="0"/>
+                          <a:cs typeface="Kumbh Sans SemiBold" pitchFamily="2" charset="0"/>
+                        </a:rPr>
                         <a:t>$500</a:t>
                       </a:r>
                     </a:p>
@@ -18987,42 +19244,43 @@
                             </p:stCondLst>
                             <p:childTnLst>
                               <p:par>
-                                <p:cTn id="5" presetID="42" presetClass="path" presetSubtype="0" accel="50000" decel="50000" fill="hold" nodeType="clickEffect">
+                                <p:cTn id="5" presetID="1" presetClass="entr" presetSubtype="0" fill="hold" grpId="0" nodeType="clickEffect">
                                   <p:stCondLst>
                                     <p:cond delay="0"/>
                                   </p:stCondLst>
                                   <p:childTnLst>
-                                    <p:animMotion origin="layout" path="M -2.29167E-6 -2.22222E-6 L -2.29167E-6 -0.37523 " pathEditMode="relative" rAng="0" ptsTypes="AA">
-                                      <p:cBhvr>
-                                        <p:cTn id="6" dur="2000" fill="hold"/>
-                                        <p:tgtEl>
-                                          <p:spTgt spid="3"/>
-                                        </p:tgtEl>
-                                        <p:attrNameLst>
-                                          <p:attrName>ppt_x</p:attrName>
-                                          <p:attrName>ppt_y</p:attrName>
-                                        </p:attrNameLst>
-                                      </p:cBhvr>
-                                      <p:rCtr x="0" y="-18773"/>
-                                    </p:animMotion>
+                                    <p:set>
+                                      <p:cBhvr>
+                                        <p:cTn id="6" dur="1" fill="hold">
+                                          <p:stCondLst>
+                                            <p:cond delay="0"/>
+                                          </p:stCondLst>
+                                        </p:cTn>
+                                        <p:tgtEl>
+                                          <p:spTgt spid="6"/>
+                                        </p:tgtEl>
+                                        <p:attrNameLst>
+                                          <p:attrName>style.visibility</p:attrName>
+                                        </p:attrNameLst>
+                                      </p:cBhvr>
+                                      <p:to>
+                                        <p:strVal val="visible"/>
+                                      </p:to>
+                                    </p:set>
                                   </p:childTnLst>
                                 </p:cTn>
                               </p:par>
                               <p:par>
-                                <p:cTn id="7" presetID="22" presetClass="exit" presetSubtype="4" fill="hold" nodeType="withEffect">
+                                <p:cTn id="7" presetID="10" presetClass="exit" presetSubtype="0" fill="hold" grpId="0" nodeType="withEffect">
                                   <p:stCondLst>
-                                    <p:cond delay="300"/>
+                                    <p:cond delay="0"/>
                                   </p:stCondLst>
                                   <p:childTnLst>
-                                    <p:animEffect transition="out" filter="wipe(down)">
-                                      <p:cBhvr>
-                                        <p:cTn id="8" dur="300"/>
-                                        <p:tgtEl>
-                                          <p:spTgt spid="2">
-                                            <p:txEl>
-                                              <p:pRg st="6" end="6"/>
-                                            </p:txEl>
-                                          </p:spTgt>
+                                    <p:animEffect transition="out" filter="fade">
+                                      <p:cBhvr>
+                                        <p:cTn id="8" dur="500"/>
+                                        <p:tgtEl>
+                                          <p:spTgt spid="13"/>
                                         </p:tgtEl>
                                       </p:cBhvr>
                                     </p:animEffect>
@@ -19030,15 +19288,11 @@
                                       <p:cBhvr>
                                         <p:cTn id="9" dur="1" fill="hold">
                                           <p:stCondLst>
-                                            <p:cond delay="299"/>
+                                            <p:cond delay="499"/>
                                           </p:stCondLst>
                                         </p:cTn>
                                         <p:tgtEl>
-                                          <p:spTgt spid="2">
-                                            <p:txEl>
-                                              <p:pRg st="6" end="6"/>
-                                            </p:txEl>
-                                          </p:spTgt>
+                                          <p:spTgt spid="13"/>
                                         </p:tgtEl>
                                         <p:attrNameLst>
                                           <p:attrName>style.visibility</p:attrName>
@@ -19052,20 +19306,16 @@
                                 </p:cTn>
                               </p:par>
                               <p:par>
-                                <p:cTn id="10" presetID="22" presetClass="exit" presetSubtype="4" fill="hold" nodeType="withEffect">
+                                <p:cTn id="10" presetID="10" presetClass="exit" presetSubtype="0" fill="hold" nodeType="withEffect">
                                   <p:stCondLst>
-                                    <p:cond delay="500"/>
+                                    <p:cond delay="0"/>
                                   </p:stCondLst>
                                   <p:childTnLst>
-                                    <p:animEffect transition="out" filter="wipe(down)">
-                                      <p:cBhvr>
-                                        <p:cTn id="11" dur="300"/>
-                                        <p:tgtEl>
-                                          <p:spTgt spid="2">
-                                            <p:txEl>
-                                              <p:pRg st="5" end="5"/>
-                                            </p:txEl>
-                                          </p:spTgt>
+                                    <p:animEffect transition="out" filter="fade">
+                                      <p:cBhvr>
+                                        <p:cTn id="11" dur="500"/>
+                                        <p:tgtEl>
+                                          <p:spTgt spid="3"/>
                                         </p:tgtEl>
                                       </p:cBhvr>
                                     </p:animEffect>
@@ -19073,15 +19323,11 @@
                                       <p:cBhvr>
                                         <p:cTn id="12" dur="1" fill="hold">
                                           <p:stCondLst>
-                                            <p:cond delay="299"/>
+                                            <p:cond delay="499"/>
                                           </p:stCondLst>
                                         </p:cTn>
                                         <p:tgtEl>
-                                          <p:spTgt spid="2">
-                                            <p:txEl>
-                                              <p:pRg st="5" end="5"/>
-                                            </p:txEl>
-                                          </p:spTgt>
+                                          <p:spTgt spid="3"/>
                                         </p:tgtEl>
                                         <p:attrNameLst>
                                           <p:attrName>style.visibility</p:attrName>
@@ -19095,20 +19341,16 @@
                                 </p:cTn>
                               </p:par>
                               <p:par>
-                                <p:cTn id="13" presetID="22" presetClass="exit" presetSubtype="4" fill="hold" nodeType="withEffect">
+                                <p:cTn id="13" presetID="10" presetClass="exit" presetSubtype="0" fill="hold" nodeType="withEffect">
                                   <p:stCondLst>
-                                    <p:cond delay="800"/>
+                                    <p:cond delay="0"/>
                                   </p:stCondLst>
                                   <p:childTnLst>
-                                    <p:animEffect transition="out" filter="wipe(down)">
-                                      <p:cBhvr>
-                                        <p:cTn id="14" dur="300"/>
-                                        <p:tgtEl>
-                                          <p:spTgt spid="2">
-                                            <p:txEl>
-                                              <p:pRg st="4" end="4"/>
-                                            </p:txEl>
-                                          </p:spTgt>
+                                    <p:animEffect transition="out" filter="fade">
+                                      <p:cBhvr>
+                                        <p:cTn id="14" dur="500"/>
+                                        <p:tgtEl>
+                                          <p:spTgt spid="21"/>
                                         </p:tgtEl>
                                       </p:cBhvr>
                                     </p:animEffect>
@@ -19116,15 +19358,11 @@
                                       <p:cBhvr>
                                         <p:cTn id="15" dur="1" fill="hold">
                                           <p:stCondLst>
-                                            <p:cond delay="299"/>
+                                            <p:cond delay="499"/>
                                           </p:stCondLst>
                                         </p:cTn>
                                         <p:tgtEl>
-                                          <p:spTgt spid="2">
-                                            <p:txEl>
-                                              <p:pRg st="4" end="4"/>
-                                            </p:txEl>
-                                          </p:spTgt>
+                                          <p:spTgt spid="21"/>
                                         </p:tgtEl>
                                         <p:attrNameLst>
                                           <p:attrName>style.visibility</p:attrName>
@@ -19138,20 +19376,16 @@
                                 </p:cTn>
                               </p:par>
                               <p:par>
-                                <p:cTn id="16" presetID="22" presetClass="exit" presetSubtype="4" fill="hold" nodeType="withEffect">
+                                <p:cTn id="16" presetID="10" presetClass="exit" presetSubtype="0" fill="hold" nodeType="withEffect">
                                   <p:stCondLst>
-                                    <p:cond delay="1000"/>
+                                    <p:cond delay="0"/>
                                   </p:stCondLst>
                                   <p:childTnLst>
-                                    <p:animEffect transition="out" filter="wipe(down)">
-                                      <p:cBhvr>
-                                        <p:cTn id="17" dur="300"/>
-                                        <p:tgtEl>
-                                          <p:spTgt spid="2">
-                                            <p:txEl>
-                                              <p:pRg st="3" end="3"/>
-                                            </p:txEl>
-                                          </p:spTgt>
+                                    <p:animEffect transition="out" filter="fade">
+                                      <p:cBhvr>
+                                        <p:cTn id="17" dur="500"/>
+                                        <p:tgtEl>
+                                          <p:spTgt spid="27"/>
                                         </p:tgtEl>
                                       </p:cBhvr>
                                     </p:animEffect>
@@ -19159,15 +19393,11 @@
                                       <p:cBhvr>
                                         <p:cTn id="18" dur="1" fill="hold">
                                           <p:stCondLst>
-                                            <p:cond delay="299"/>
+                                            <p:cond delay="499"/>
                                           </p:stCondLst>
                                         </p:cTn>
                                         <p:tgtEl>
-                                          <p:spTgt spid="2">
-                                            <p:txEl>
-                                              <p:pRg st="3" end="3"/>
-                                            </p:txEl>
-                                          </p:spTgt>
+                                          <p:spTgt spid="27"/>
                                         </p:tgtEl>
                                         <p:attrNameLst>
                                           <p:attrName>style.visibility</p:attrName>
@@ -19181,20 +19411,16 @@
                                 </p:cTn>
                               </p:par>
                               <p:par>
-                                <p:cTn id="19" presetID="22" presetClass="exit" presetSubtype="4" fill="hold" nodeType="withEffect">
+                                <p:cTn id="19" presetID="10" presetClass="exit" presetSubtype="0" fill="hold" nodeType="withEffect">
                                   <p:stCondLst>
-                                    <p:cond delay="1200"/>
+                                    <p:cond delay="0"/>
                                   </p:stCondLst>
                                   <p:childTnLst>
-                                    <p:animEffect transition="out" filter="wipe(down)">
-                                      <p:cBhvr>
-                                        <p:cTn id="20" dur="300"/>
-                                        <p:tgtEl>
-                                          <p:spTgt spid="2">
-                                            <p:txEl>
-                                              <p:pRg st="2" end="2"/>
-                                            </p:txEl>
-                                          </p:spTgt>
+                                    <p:animEffect transition="out" filter="fade">
+                                      <p:cBhvr>
+                                        <p:cTn id="20" dur="500"/>
+                                        <p:tgtEl>
+                                          <p:spTgt spid="24"/>
                                         </p:tgtEl>
                                       </p:cBhvr>
                                     </p:animEffect>
@@ -19202,15 +19428,11 @@
                                       <p:cBhvr>
                                         <p:cTn id="21" dur="1" fill="hold">
                                           <p:stCondLst>
-                                            <p:cond delay="299"/>
+                                            <p:cond delay="499"/>
                                           </p:stCondLst>
                                         </p:cTn>
                                         <p:tgtEl>
-                                          <p:spTgt spid="2">
-                                            <p:txEl>
-                                              <p:pRg st="2" end="2"/>
-                                            </p:txEl>
-                                          </p:spTgt>
+                                          <p:spTgt spid="24"/>
                                         </p:tgtEl>
                                         <p:attrNameLst>
                                           <p:attrName>style.visibility</p:attrName>
@@ -19224,14 +19446,356 @@
                                 </p:cTn>
                               </p:par>
                               <p:par>
-                                <p:cTn id="22" presetID="2" presetClass="entr" presetSubtype="4" decel="100000" fill="hold" nodeType="withEffect">
+                                <p:cTn id="22" presetID="10" presetClass="exit" presetSubtype="0" fill="hold" nodeType="withEffect">
                                   <p:stCondLst>
-                                    <p:cond delay="800"/>
+                                    <p:cond delay="0"/>
+                                  </p:stCondLst>
+                                  <p:childTnLst>
+                                    <p:animEffect transition="out" filter="fade">
+                                      <p:cBhvr>
+                                        <p:cTn id="23" dur="500"/>
+                                        <p:tgtEl>
+                                          <p:spTgt spid="12"/>
+                                        </p:tgtEl>
+                                      </p:cBhvr>
+                                    </p:animEffect>
+                                    <p:set>
+                                      <p:cBhvr>
+                                        <p:cTn id="24" dur="1" fill="hold">
+                                          <p:stCondLst>
+                                            <p:cond delay="499"/>
+                                          </p:stCondLst>
+                                        </p:cTn>
+                                        <p:tgtEl>
+                                          <p:spTgt spid="12"/>
+                                        </p:tgtEl>
+                                        <p:attrNameLst>
+                                          <p:attrName>style.visibility</p:attrName>
+                                        </p:attrNameLst>
+                                      </p:cBhvr>
+                                      <p:to>
+                                        <p:strVal val="hidden"/>
+                                      </p:to>
+                                    </p:set>
+                                  </p:childTnLst>
+                                </p:cTn>
+                              </p:par>
+                              <p:par>
+                                <p:cTn id="25" presetID="10" presetClass="exit" presetSubtype="0" fill="hold" grpId="0" nodeType="withEffect">
+                                  <p:stCondLst>
+                                    <p:cond delay="0"/>
+                                  </p:stCondLst>
+                                  <p:childTnLst>
+                                    <p:animEffect transition="out" filter="fade">
+                                      <p:cBhvr>
+                                        <p:cTn id="26" dur="500"/>
+                                        <p:tgtEl>
+                                          <p:spTgt spid="14"/>
+                                        </p:tgtEl>
+                                      </p:cBhvr>
+                                    </p:animEffect>
+                                    <p:set>
+                                      <p:cBhvr>
+                                        <p:cTn id="27" dur="1" fill="hold">
+                                          <p:stCondLst>
+                                            <p:cond delay="499"/>
+                                          </p:stCondLst>
+                                        </p:cTn>
+                                        <p:tgtEl>
+                                          <p:spTgt spid="14"/>
+                                        </p:tgtEl>
+                                        <p:attrNameLst>
+                                          <p:attrName>style.visibility</p:attrName>
+                                        </p:attrNameLst>
+                                      </p:cBhvr>
+                                      <p:to>
+                                        <p:strVal val="hidden"/>
+                                      </p:to>
+                                    </p:set>
+                                  </p:childTnLst>
+                                </p:cTn>
+                              </p:par>
+                              <p:par>
+                                <p:cTn id="28" presetID="10" presetClass="exit" presetSubtype="0" fill="hold" nodeType="withEffect">
+                                  <p:stCondLst>
+                                    <p:cond delay="0"/>
+                                  </p:stCondLst>
+                                  <p:childTnLst>
+                                    <p:animEffect transition="out" filter="fade">
+                                      <p:cBhvr>
+                                        <p:cTn id="29" dur="500"/>
+                                        <p:tgtEl>
+                                          <p:spTgt spid="3"/>
+                                        </p:tgtEl>
+                                      </p:cBhvr>
+                                    </p:animEffect>
+                                    <p:set>
+                                      <p:cBhvr>
+                                        <p:cTn id="30" dur="1" fill="hold">
+                                          <p:stCondLst>
+                                            <p:cond delay="499"/>
+                                          </p:stCondLst>
+                                        </p:cTn>
+                                        <p:tgtEl>
+                                          <p:spTgt spid="3"/>
+                                        </p:tgtEl>
+                                        <p:attrNameLst>
+                                          <p:attrName>style.visibility</p:attrName>
+                                        </p:attrNameLst>
+                                      </p:cBhvr>
+                                      <p:to>
+                                        <p:strVal val="hidden"/>
+                                      </p:to>
+                                    </p:set>
+                                  </p:childTnLst>
+                                </p:cTn>
+                              </p:par>
+                              <p:par>
+                                <p:cTn id="31" presetID="42" presetClass="path" presetSubtype="0" accel="50000" decel="50000" fill="hold" grpId="1" nodeType="withEffect">
+                                  <p:stCondLst>
+                                    <p:cond delay="300"/>
+                                  </p:stCondLst>
+                                  <p:childTnLst>
+                                    <p:animMotion origin="layout" path="M -2.91667E-6 -2.22222E-6 L -2.91667E-6 -0.37662 " pathEditMode="relative" rAng="0" ptsTypes="AA">
+                                      <p:cBhvr>
+                                        <p:cTn id="32" dur="1700" fill="hold"/>
+                                        <p:tgtEl>
+                                          <p:spTgt spid="6"/>
+                                        </p:tgtEl>
+                                        <p:attrNameLst>
+                                          <p:attrName>ppt_x</p:attrName>
+                                          <p:attrName>ppt_y</p:attrName>
+                                        </p:attrNameLst>
+                                      </p:cBhvr>
+                                      <p:rCtr x="0" y="-18843"/>
+                                    </p:animMotion>
+                                  </p:childTnLst>
+                                </p:cTn>
+                              </p:par>
+                              <p:par>
+                                <p:cTn id="33" presetID="22" presetClass="exit" presetSubtype="4" fill="hold" nodeType="withEffect">
+                                  <p:stCondLst>
+                                    <p:cond delay="500"/>
+                                  </p:stCondLst>
+                                  <p:childTnLst>
+                                    <p:animEffect transition="out" filter="wipe(down)">
+                                      <p:cBhvr>
+                                        <p:cTn id="34" dur="300"/>
+                                        <p:tgtEl>
+                                          <p:spTgt spid="2">
+                                            <p:txEl>
+                                              <p:pRg st="6" end="6"/>
+                                            </p:txEl>
+                                          </p:spTgt>
+                                        </p:tgtEl>
+                                      </p:cBhvr>
+                                    </p:animEffect>
+                                    <p:set>
+                                      <p:cBhvr>
+                                        <p:cTn id="35" dur="1" fill="hold">
+                                          <p:stCondLst>
+                                            <p:cond delay="299"/>
+                                          </p:stCondLst>
+                                        </p:cTn>
+                                        <p:tgtEl>
+                                          <p:spTgt spid="2">
+                                            <p:txEl>
+                                              <p:pRg st="6" end="6"/>
+                                            </p:txEl>
+                                          </p:spTgt>
+                                        </p:tgtEl>
+                                        <p:attrNameLst>
+                                          <p:attrName>style.visibility</p:attrName>
+                                        </p:attrNameLst>
+                                      </p:cBhvr>
+                                      <p:to>
+                                        <p:strVal val="hidden"/>
+                                      </p:to>
+                                    </p:set>
+                                  </p:childTnLst>
+                                </p:cTn>
+                              </p:par>
+                              <p:par>
+                                <p:cTn id="36" presetID="22" presetClass="exit" presetSubtype="4" fill="hold" nodeType="withEffect">
+                                  <p:stCondLst>
+                                    <p:cond delay="700"/>
+                                  </p:stCondLst>
+                                  <p:childTnLst>
+                                    <p:animEffect transition="out" filter="wipe(down)">
+                                      <p:cBhvr>
+                                        <p:cTn id="37" dur="300"/>
+                                        <p:tgtEl>
+                                          <p:spTgt spid="2">
+                                            <p:txEl>
+                                              <p:pRg st="5" end="5"/>
+                                            </p:txEl>
+                                          </p:spTgt>
+                                        </p:tgtEl>
+                                      </p:cBhvr>
+                                    </p:animEffect>
+                                    <p:set>
+                                      <p:cBhvr>
+                                        <p:cTn id="38" dur="1" fill="hold">
+                                          <p:stCondLst>
+                                            <p:cond delay="299"/>
+                                          </p:stCondLst>
+                                        </p:cTn>
+                                        <p:tgtEl>
+                                          <p:spTgt spid="2">
+                                            <p:txEl>
+                                              <p:pRg st="5" end="5"/>
+                                            </p:txEl>
+                                          </p:spTgt>
+                                        </p:tgtEl>
+                                        <p:attrNameLst>
+                                          <p:attrName>style.visibility</p:attrName>
+                                        </p:attrNameLst>
+                                      </p:cBhvr>
+                                      <p:to>
+                                        <p:strVal val="hidden"/>
+                                      </p:to>
+                                    </p:set>
+                                  </p:childTnLst>
+                                </p:cTn>
+                              </p:par>
+                              <p:par>
+                                <p:cTn id="39" presetID="22" presetClass="exit" presetSubtype="4" fill="hold" nodeType="withEffect">
+                                  <p:stCondLst>
+                                    <p:cond delay="1000"/>
+                                  </p:stCondLst>
+                                  <p:childTnLst>
+                                    <p:animEffect transition="out" filter="wipe(down)">
+                                      <p:cBhvr>
+                                        <p:cTn id="40" dur="300"/>
+                                        <p:tgtEl>
+                                          <p:spTgt spid="2">
+                                            <p:txEl>
+                                              <p:pRg st="4" end="4"/>
+                                            </p:txEl>
+                                          </p:spTgt>
+                                        </p:tgtEl>
+                                      </p:cBhvr>
+                                    </p:animEffect>
+                                    <p:set>
+                                      <p:cBhvr>
+                                        <p:cTn id="41" dur="1" fill="hold">
+                                          <p:stCondLst>
+                                            <p:cond delay="299"/>
+                                          </p:stCondLst>
+                                        </p:cTn>
+                                        <p:tgtEl>
+                                          <p:spTgt spid="2">
+                                            <p:txEl>
+                                              <p:pRg st="4" end="4"/>
+                                            </p:txEl>
+                                          </p:spTgt>
+                                        </p:tgtEl>
+                                        <p:attrNameLst>
+                                          <p:attrName>style.visibility</p:attrName>
+                                        </p:attrNameLst>
+                                      </p:cBhvr>
+                                      <p:to>
+                                        <p:strVal val="hidden"/>
+                                      </p:to>
+                                    </p:set>
+                                  </p:childTnLst>
+                                </p:cTn>
+                              </p:par>
+                              <p:par>
+                                <p:cTn id="42" presetID="22" presetClass="exit" presetSubtype="4" fill="hold" nodeType="withEffect">
+                                  <p:stCondLst>
+                                    <p:cond delay="1200"/>
+                                  </p:stCondLst>
+                                  <p:childTnLst>
+                                    <p:animEffect transition="out" filter="wipe(down)">
+                                      <p:cBhvr>
+                                        <p:cTn id="43" dur="300"/>
+                                        <p:tgtEl>
+                                          <p:spTgt spid="2">
+                                            <p:txEl>
+                                              <p:pRg st="3" end="3"/>
+                                            </p:txEl>
+                                          </p:spTgt>
+                                        </p:tgtEl>
+                                      </p:cBhvr>
+                                    </p:animEffect>
+                                    <p:set>
+                                      <p:cBhvr>
+                                        <p:cTn id="44" dur="1" fill="hold">
+                                          <p:stCondLst>
+                                            <p:cond delay="299"/>
+                                          </p:stCondLst>
+                                        </p:cTn>
+                                        <p:tgtEl>
+                                          <p:spTgt spid="2">
+                                            <p:txEl>
+                                              <p:pRg st="3" end="3"/>
+                                            </p:txEl>
+                                          </p:spTgt>
+                                        </p:tgtEl>
+                                        <p:attrNameLst>
+                                          <p:attrName>style.visibility</p:attrName>
+                                        </p:attrNameLst>
+                                      </p:cBhvr>
+                                      <p:to>
+                                        <p:strVal val="hidden"/>
+                                      </p:to>
+                                    </p:set>
+                                  </p:childTnLst>
+                                </p:cTn>
+                              </p:par>
+                              <p:par>
+                                <p:cTn id="45" presetID="22" presetClass="exit" presetSubtype="4" fill="hold" nodeType="withEffect">
+                                  <p:stCondLst>
+                                    <p:cond delay="1400"/>
+                                  </p:stCondLst>
+                                  <p:childTnLst>
+                                    <p:animEffect transition="out" filter="wipe(down)">
+                                      <p:cBhvr>
+                                        <p:cTn id="46" dur="300"/>
+                                        <p:tgtEl>
+                                          <p:spTgt spid="2">
+                                            <p:txEl>
+                                              <p:pRg st="2" end="2"/>
+                                            </p:txEl>
+                                          </p:spTgt>
+                                        </p:tgtEl>
+                                      </p:cBhvr>
+                                    </p:animEffect>
+                                    <p:set>
+                                      <p:cBhvr>
+                                        <p:cTn id="47" dur="1" fill="hold">
+                                          <p:stCondLst>
+                                            <p:cond delay="299"/>
+                                          </p:stCondLst>
+                                        </p:cTn>
+                                        <p:tgtEl>
+                                          <p:spTgt spid="2">
+                                            <p:txEl>
+                                              <p:pRg st="2" end="2"/>
+                                            </p:txEl>
+                                          </p:spTgt>
+                                        </p:tgtEl>
+                                        <p:attrNameLst>
+                                          <p:attrName>style.visibility</p:attrName>
+                                        </p:attrNameLst>
+                                      </p:cBhvr>
+                                      <p:to>
+                                        <p:strVal val="hidden"/>
+                                      </p:to>
+                                    </p:set>
+                                  </p:childTnLst>
+                                </p:cTn>
+                              </p:par>
+                              <p:par>
+                                <p:cTn id="48" presetID="2" presetClass="entr" presetSubtype="4" decel="100000" fill="hold" nodeType="withEffect">
+                                  <p:stCondLst>
+                                    <p:cond delay="700"/>
                                   </p:stCondLst>
                                   <p:childTnLst>
                                     <p:set>
                                       <p:cBhvr>
-                                        <p:cTn id="23" dur="1" fill="hold">
+                                        <p:cTn id="49" dur="1" fill="hold">
                                           <p:stCondLst>
                                             <p:cond delay="0"/>
                                           </p:stCondLst>
@@ -19253,7 +19817,7 @@
                                     </p:set>
                                     <p:anim calcmode="lin" valueType="num">
                                       <p:cBhvr additive="base">
-                                        <p:cTn id="24" dur="1200" fill="hold"/>
+                                        <p:cTn id="50" dur="1400" fill="hold"/>
                                         <p:tgtEl>
                                           <p:spTgt spid="15">
                                             <p:txEl>
@@ -19280,7 +19844,7 @@
                                     </p:anim>
                                     <p:anim calcmode="lin" valueType="num">
                                       <p:cBhvr additive="base">
-                                        <p:cTn id="25" dur="1200" fill="hold"/>
+                                        <p:cTn id="51" dur="1400" fill="hold"/>
                                         <p:tgtEl>
                                           <p:spTgt spid="15">
                                             <p:txEl>
@@ -19309,14 +19873,14 @@
                                 </p:cTn>
                               </p:par>
                               <p:par>
-                                <p:cTn id="26" presetID="19" presetClass="emph" presetSubtype="0" fill="hold" nodeType="withEffect">
+                                <p:cTn id="52" presetID="19" presetClass="emph" presetSubtype="0" fill="hold" nodeType="withEffect">
                                   <p:stCondLst>
                                     <p:cond delay="900"/>
                                   </p:stCondLst>
                                   <p:childTnLst>
                                     <p:animClr clrSpc="rgb" dir="cw">
                                       <p:cBhvr override="childStyle">
-                                        <p:cTn id="27" dur="500" fill="hold"/>
+                                        <p:cTn id="53" dur="500" fill="hold"/>
                                         <p:tgtEl>
                                           <p:spTgt spid="2">
                                             <p:txEl>
@@ -19334,7 +19898,7 @@
                                     </p:animClr>
                                     <p:animClr clrSpc="rgb" dir="cw">
                                       <p:cBhvr>
-                                        <p:cTn id="28" dur="500" fill="hold"/>
+                                        <p:cTn id="54" dur="500" fill="hold"/>
                                         <p:tgtEl>
                                           <p:spTgt spid="2">
                                             <p:txEl>
@@ -19352,7 +19916,7 @@
                                     </p:animClr>
                                     <p:set>
                                       <p:cBhvr>
-                                        <p:cTn id="29" dur="500" fill="hold"/>
+                                        <p:cTn id="55" dur="500" fill="hold"/>
                                         <p:tgtEl>
                                           <p:spTgt spid="2">
                                             <p:txEl>
@@ -19370,7 +19934,7 @@
                                     </p:set>
                                     <p:set>
                                       <p:cBhvr>
-                                        <p:cTn id="30" dur="500" fill="hold"/>
+                                        <p:cTn id="56" dur="500" fill="hold"/>
                                         <p:tgtEl>
                                           <p:spTgt spid="2">
                                             <p:txEl>
@@ -19390,14 +19954,14 @@
                                 </p:cTn>
                               </p:par>
                               <p:par>
-                                <p:cTn id="31" presetID="1" presetClass="exit" presetSubtype="0" fill="hold" nodeType="withEffect">
+                                <p:cTn id="57" presetID="1" presetClass="exit" presetSubtype="0" fill="hold" nodeType="withEffect">
                                   <p:stCondLst>
                                     <p:cond delay="900"/>
                                   </p:stCondLst>
                                   <p:childTnLst>
                                     <p:set>
                                       <p:cBhvr>
-                                        <p:cTn id="32" dur="1" fill="hold">
+                                        <p:cTn id="58" dur="1" fill="hold">
                                           <p:stCondLst>
                                             <p:cond delay="0"/>
                                           </p:stCondLst>
@@ -19421,14 +19985,14 @@
                                 </p:cTn>
                               </p:par>
                               <p:par>
-                                <p:cTn id="33" presetID="19" presetClass="emph" presetSubtype="0" fill="hold" nodeType="withEffect">
+                                <p:cTn id="59" presetID="19" presetClass="emph" presetSubtype="0" fill="hold" nodeType="withEffect">
                                   <p:stCondLst>
                                     <p:cond delay="1200"/>
                                   </p:stCondLst>
                                   <p:childTnLst>
                                     <p:animClr clrSpc="rgb" dir="cw">
                                       <p:cBhvr override="childStyle">
-                                        <p:cTn id="34" dur="500" fill="hold"/>
+                                        <p:cTn id="60" dur="500" fill="hold"/>
                                         <p:tgtEl>
                                           <p:spTgt spid="15">
                                             <p:txEl>
@@ -19446,7 +20010,7 @@
                                     </p:animClr>
                                     <p:animClr clrSpc="rgb" dir="cw">
                                       <p:cBhvr>
-                                        <p:cTn id="35" dur="500" fill="hold"/>
+                                        <p:cTn id="61" dur="500" fill="hold"/>
                                         <p:tgtEl>
                                           <p:spTgt spid="15">
                                             <p:txEl>
@@ -19464,7 +20028,7 @@
                                     </p:animClr>
                                     <p:set>
                                       <p:cBhvr>
-                                        <p:cTn id="36" dur="500" fill="hold"/>
+                                        <p:cTn id="62" dur="500" fill="hold"/>
                                         <p:tgtEl>
                                           <p:spTgt spid="15">
                                             <p:txEl>
@@ -19482,7 +20046,7 @@
                                     </p:set>
                                     <p:set>
                                       <p:cBhvr>
-                                        <p:cTn id="37" dur="500" fill="hold"/>
+                                        <p:cTn id="63" dur="500" fill="hold"/>
                                         <p:tgtEl>
                                           <p:spTgt spid="15">
                                             <p:txEl>
@@ -19496,103 +20060,6 @@
                                       </p:cBhvr>
                                       <p:to>
                                         <p:strVal val="true"/>
-                                      </p:to>
-                                    </p:set>
-                                  </p:childTnLst>
-                                </p:cTn>
-                              </p:par>
-                              <p:par>
-                                <p:cTn id="38" presetID="1" presetClass="entr" presetSubtype="0" fill="hold" grpId="0" nodeType="withEffect">
-                                  <p:stCondLst>
-                                    <p:cond delay="1800"/>
-                                  </p:stCondLst>
-                                  <p:childTnLst>
-                                    <p:set>
-                                      <p:cBhvr>
-                                        <p:cTn id="39" dur="1" fill="hold">
-                                          <p:stCondLst>
-                                            <p:cond delay="0"/>
-                                          </p:stCondLst>
-                                        </p:cTn>
-                                        <p:tgtEl>
-                                          <p:spTgt spid="6"/>
-                                        </p:tgtEl>
-                                        <p:attrNameLst>
-                                          <p:attrName>style.visibility</p:attrName>
-                                        </p:attrNameLst>
-                                      </p:cBhvr>
-                                      <p:to>
-                                        <p:strVal val="visible"/>
-                                      </p:to>
-                                    </p:set>
-                                  </p:childTnLst>
-                                </p:cTn>
-                              </p:par>
-                              <p:par>
-                                <p:cTn id="40" presetID="10" presetClass="exit" presetSubtype="0" fill="hold" grpId="0" nodeType="withEffect">
-                                  <p:stCondLst>
-                                    <p:cond delay="1800"/>
-                                  </p:stCondLst>
-                                  <p:childTnLst>
-                                    <p:animEffect transition="out" filter="fade">
-                                      <p:cBhvr>
-                                        <p:cTn id="41" dur="500"/>
-                                        <p:tgtEl>
-                                          <p:spTgt spid="13"/>
-                                        </p:tgtEl>
-                                      </p:cBhvr>
-                                    </p:animEffect>
-                                    <p:set>
-                                      <p:cBhvr>
-                                        <p:cTn id="42" dur="1" fill="hold">
-                                          <p:stCondLst>
-                                            <p:cond delay="499"/>
-                                          </p:stCondLst>
-                                        </p:cTn>
-                                        <p:tgtEl>
-                                          <p:spTgt spid="13"/>
-                                        </p:tgtEl>
-                                        <p:attrNameLst>
-                                          <p:attrName>style.visibility</p:attrName>
-                                        </p:attrNameLst>
-                                      </p:cBhvr>
-                                      <p:to>
-                                        <p:strVal val="hidden"/>
-                                      </p:to>
-                                    </p:set>
-                                  </p:childTnLst>
-                                </p:cTn>
-                              </p:par>
-                              <p:par>
-                                <p:cTn id="43" presetID="10" presetClass="exit" presetSubtype="0" fill="hold" nodeType="withEffect">
-                                  <p:stCondLst>
-                                    <p:cond delay="1800"/>
-                                  </p:stCondLst>
-                                  <p:childTnLst>
-                                    <p:animEffect transition="out" filter="fade">
-                                      <p:cBhvr>
-                                        <p:cTn id="44" dur="500"/>
-                                        <p:tgtEl>
-                                          <p:spTgt spid="3"/>
-                                        </p:tgtEl>
-                                      </p:cBhvr>
-                                    </p:animEffect>
-                                    <p:set>
-                                      <p:cBhvr>
-                                        <p:cTn id="45" dur="1" fill="hold">
-                                          <p:stCondLst>
-                                            <p:cond delay="499"/>
-                                          </p:stCondLst>
-                                        </p:cTn>
-                                        <p:tgtEl>
-                                          <p:spTgt spid="3"/>
-                                        </p:tgtEl>
-                                        <p:attrNameLst>
-                                          <p:attrName>style.visibility</p:attrName>
-                                        </p:attrNameLst>
-                                      </p:cBhvr>
-                                      <p:to>
-                                        <p:strVal val="hidden"/>
                                       </p:to>
                                     </p:set>
                                   </p:childTnLst>
@@ -19627,7 +20094,9 @@
     </p:tnLst>
     <p:bldLst>
       <p:bldP spid="6" grpId="0" animBg="1"/>
+      <p:bldP spid="6" grpId="1" animBg="1"/>
       <p:bldP spid="13" grpId="0" animBg="1"/>
+      <p:bldP spid="14" grpId="0" animBg="1"/>
     </p:bldLst>
   </p:timing>
 </p:sld>
@@ -19670,7 +20139,7 @@
         </p:nvSpPr>
         <p:spPr>
           <a:xfrm>
-            <a:off x="331872" y="2282620"/>
+            <a:off x="331872" y="2268332"/>
             <a:ext cx="2887578" cy="714377"/>
           </a:xfrm>
           <a:prstGeom prst="roundRect">
@@ -19805,84 +20274,6 @@
   <p:clrMapOvr>
     <a:masterClrMapping/>
   </p:clrMapOvr>
-  <p:timing>
-    <p:tnLst>
-      <p:par>
-        <p:cTn id="1" dur="indefinite" restart="never" nodeType="tmRoot">
-          <p:childTnLst>
-            <p:seq concurrent="1" nextAc="seek">
-              <p:cTn id="2" dur="indefinite" nodeType="mainSeq">
-                <p:childTnLst>
-                  <p:par>
-                    <p:cTn id="3" fill="hold">
-                      <p:stCondLst>
-                        <p:cond delay="indefinite"/>
-                      </p:stCondLst>
-                      <p:childTnLst>
-                        <p:par>
-                          <p:cTn id="4" fill="hold">
-                            <p:stCondLst>
-                              <p:cond delay="0"/>
-                            </p:stCondLst>
-                            <p:childTnLst>
-                              <p:par>
-                                <p:cTn id="5" presetID="1" presetClass="entr" presetSubtype="0" fill="hold" grpId="0" nodeType="clickEffect">
-                                  <p:stCondLst>
-                                    <p:cond delay="0"/>
-                                  </p:stCondLst>
-                                  <p:childTnLst>
-                                    <p:set>
-                                      <p:cBhvr>
-                                        <p:cTn id="6" dur="1" fill="hold">
-                                          <p:stCondLst>
-                                            <p:cond delay="0"/>
-                                          </p:stCondLst>
-                                        </p:cTn>
-                                        <p:tgtEl>
-                                          <p:spTgt spid="8"/>
-                                        </p:tgtEl>
-                                        <p:attrNameLst>
-                                          <p:attrName>style.visibility</p:attrName>
-                                        </p:attrNameLst>
-                                      </p:cBhvr>
-                                      <p:to>
-                                        <p:strVal val="visible"/>
-                                      </p:to>
-                                    </p:set>
-                                  </p:childTnLst>
-                                </p:cTn>
-                              </p:par>
-                            </p:childTnLst>
-                          </p:cTn>
-                        </p:par>
-                      </p:childTnLst>
-                    </p:cTn>
-                  </p:par>
-                </p:childTnLst>
-              </p:cTn>
-              <p:prevCondLst>
-                <p:cond evt="onPrev" delay="0">
-                  <p:tgtEl>
-                    <p:sldTgt/>
-                  </p:tgtEl>
-                </p:cond>
-              </p:prevCondLst>
-              <p:nextCondLst>
-                <p:cond evt="onNext" delay="0">
-                  <p:tgtEl>
-                    <p:sldTgt/>
-                  </p:tgtEl>
-                </p:cond>
-              </p:nextCondLst>
-            </p:seq>
-          </p:childTnLst>
-        </p:cTn>
-      </p:par>
-    </p:tnLst>
-    <p:bldLst>
-      <p:bldP spid="8" grpId="0" animBg="1"/>
-    </p:bldLst>
-  </p:timing>
 </p:sld>
 </file>
 
@@ -19909,89 +20300,6 @@
           <a:chExt cx="0" cy="0"/>
         </a:xfrm>
       </p:grpSpPr>
-      <p:sp>
-        <p:nvSpPr>
-          <p:cNvPr id="6" name="TextBox 5">
-            <a:extLst>
-              <a:ext uri="{FF2B5EF4-FFF2-40B4-BE49-F238E27FC236}">
-                <a16:creationId xmlns:a16="http://schemas.microsoft.com/office/drawing/2014/main" id="{3781749F-2DE4-6052-FCC1-9E1C1554116A}"/>
-              </a:ext>
-            </a:extLst>
-          </p:cNvPr>
-          <p:cNvSpPr txBox="1"/>
-          <p:nvPr/>
-        </p:nvSpPr>
-        <p:spPr>
-          <a:xfrm>
-            <a:off x="440111" y="376344"/>
-            <a:ext cx="1588897" cy="2550378"/>
-          </a:xfrm>
-          <a:prstGeom prst="rect">
-            <a:avLst/>
-          </a:prstGeom>
-          <a:noFill/>
-        </p:spPr>
-        <p:txBody>
-          <a:bodyPr wrap="none" rtlCol="0">
-            <a:spAutoFit/>
-          </a:bodyPr>
-          <a:lstStyle/>
-          <a:p>
-            <a:pPr>
-              <a:lnSpc>
-                <a:spcPct val="200000"/>
-              </a:lnSpc>
-            </a:pPr>
-            <a:r>
-              <a:rPr lang="en-CA" sz="2800" dirty="0">
-                <a:solidFill>
-                  <a:schemeClr val="tx1">
-                    <a:lumMod val="25000"/>
-                    <a:lumOff val="75000"/>
-                  </a:schemeClr>
-                </a:solidFill>
-                <a:latin typeface="Kumbh Sans" pitchFamily="2" charset="0"/>
-                <a:cs typeface="Kumbh Sans" pitchFamily="2" charset="0"/>
-              </a:rPr>
-              <a:t>Adestria</a:t>
-            </a:r>
-          </a:p>
-          <a:p>
-            <a:pPr>
-              <a:lnSpc>
-                <a:spcPct val="200000"/>
-              </a:lnSpc>
-            </a:pPr>
-            <a:r>
-              <a:rPr lang="en-CA" sz="2800" dirty="0">
-                <a:solidFill>
-                  <a:schemeClr val="tx1">
-                    <a:lumMod val="25000"/>
-                    <a:lumOff val="75000"/>
-                  </a:schemeClr>
-                </a:solidFill>
-                <a:latin typeface="Kumbh Sans" pitchFamily="2" charset="0"/>
-                <a:cs typeface="Kumbh Sans" pitchFamily="2" charset="0"/>
-              </a:rPr>
-              <a:t>Project</a:t>
-            </a:r>
-          </a:p>
-          <a:p>
-            <a:pPr>
-              <a:lnSpc>
-                <a:spcPct val="200000"/>
-              </a:lnSpc>
-            </a:pPr>
-            <a:r>
-              <a:rPr lang="en-CA" sz="2800" dirty="0">
-                <a:latin typeface="Kumbh Sans" pitchFamily="2" charset="0"/>
-                <a:cs typeface="Kumbh Sans" pitchFamily="2" charset="0"/>
-              </a:rPr>
-              <a:t>Q &amp; A</a:t>
-            </a:r>
-          </a:p>
-        </p:txBody>
-      </p:sp>
     </p:spTree>
     <p:extLst>
       <p:ext uri="{BB962C8B-B14F-4D97-AF65-F5344CB8AC3E}">
@@ -20002,42 +20310,18 @@
   <p:clrMapOvr>
     <a:masterClrMapping/>
   </p:clrMapOvr>
-</p:sld>
-</file>
-
-<file path=ppt/slides/slide17.xml><?xml version="1.0" encoding="utf-8"?>
-<p:sld xmlns:a="http://schemas.openxmlformats.org/drawingml/2006/main" xmlns:r="http://schemas.openxmlformats.org/officeDocument/2006/relationships" xmlns:p="http://schemas.openxmlformats.org/presentationml/2006/main">
-  <p:cSld>
-    <p:spTree>
-      <p:nvGrpSpPr>
-        <p:cNvPr id="1" name="">
-          <a:extLst>
-            <a:ext uri="{FF2B5EF4-FFF2-40B4-BE49-F238E27FC236}">
-              <a16:creationId xmlns:a16="http://schemas.microsoft.com/office/drawing/2014/main" id="{D906F22D-BE40-925B-D0B4-154AD0607E50}"/>
-            </a:ext>
-          </a:extLst>
-        </p:cNvPr>
-        <p:cNvGrpSpPr/>
-        <p:nvPr/>
-      </p:nvGrpSpPr>
-      <p:grpSpPr>
-        <a:xfrm>
-          <a:off x="0" y="0"/>
-          <a:ext cx="0" cy="0"/>
-          <a:chOff x="0" y="0"/>
-          <a:chExt cx="0" cy="0"/>
-        </a:xfrm>
-      </p:grpSpPr>
-    </p:spTree>
-    <p:extLst>
-      <p:ext uri="{BB962C8B-B14F-4D97-AF65-F5344CB8AC3E}">
-        <p14:creationId xmlns:p14="http://schemas.microsoft.com/office/powerpoint/2010/main" val="1557603729"/>
-      </p:ext>
-    </p:extLst>
-  </p:cSld>
-  <p:clrMapOvr>
-    <a:masterClrMapping/>
-  </p:clrMapOvr>
+  <mc:AlternateContent xmlns:mc="http://schemas.openxmlformats.org/markup-compatibility/2006">
+    <mc:Choice xmlns:p14="http://schemas.microsoft.com/office/powerpoint/2010/main" Requires="p14">
+      <p:transition spd="med" p14:dur="700">
+        <p:fade/>
+      </p:transition>
+    </mc:Choice>
+    <mc:Fallback>
+      <p:transition spd="med">
+        <p:fade/>
+      </p:transition>
+    </mc:Fallback>
+  </mc:AlternateContent>
 </p:sld>
 </file>
 
@@ -25025,153 +25309,6 @@
                       </p:childTnLst>
                     </p:cTn>
                   </p:par>
-                  <p:par>
-                    <p:cTn id="54" fill="hold">
-                      <p:stCondLst>
-                        <p:cond delay="indefinite"/>
-                      </p:stCondLst>
-                      <p:childTnLst>
-                        <p:par>
-                          <p:cTn id="55" fill="hold">
-                            <p:stCondLst>
-                              <p:cond delay="0"/>
-                            </p:stCondLst>
-                            <p:childTnLst>
-                              <p:par>
-                                <p:cTn id="56" presetID="10" presetClass="exit" presetSubtype="0" fill="hold" grpId="0" nodeType="clickEffect">
-                                  <p:stCondLst>
-                                    <p:cond delay="0"/>
-                                  </p:stCondLst>
-                                  <p:childTnLst>
-                                    <p:animEffect transition="out" filter="fade">
-                                      <p:cBhvr>
-                                        <p:cTn id="57" dur="500"/>
-                                        <p:tgtEl>
-                                          <p:spTgt spid="2">
-                                            <p:txEl>
-                                              <p:pRg st="0" end="0"/>
-                                            </p:txEl>
-                                          </p:spTgt>
-                                        </p:tgtEl>
-                                      </p:cBhvr>
-                                    </p:animEffect>
-                                    <p:set>
-                                      <p:cBhvr>
-                                        <p:cTn id="58" dur="1" fill="hold">
-                                          <p:stCondLst>
-                                            <p:cond delay="499"/>
-                                          </p:stCondLst>
-                                        </p:cTn>
-                                        <p:tgtEl>
-                                          <p:spTgt spid="2">
-                                            <p:txEl>
-                                              <p:pRg st="0" end="0"/>
-                                            </p:txEl>
-                                          </p:spTgt>
-                                        </p:tgtEl>
-                                        <p:attrNameLst>
-                                          <p:attrName>style.visibility</p:attrName>
-                                        </p:attrNameLst>
-                                      </p:cBhvr>
-                                      <p:to>
-                                        <p:strVal val="hidden"/>
-                                      </p:to>
-                                    </p:set>
-                                  </p:childTnLst>
-                                </p:cTn>
-                              </p:par>
-                              <p:par>
-                                <p:cTn id="59" presetID="10" presetClass="exit" presetSubtype="0" fill="hold" grpId="0" nodeType="withEffect">
-                                  <p:stCondLst>
-                                    <p:cond delay="0"/>
-                                  </p:stCondLst>
-                                  <p:childTnLst>
-                                    <p:animEffect transition="out" filter="fade">
-                                      <p:cBhvr>
-                                        <p:cTn id="60" dur="500"/>
-                                        <p:tgtEl>
-                                          <p:spTgt spid="2">
-                                            <p:txEl>
-                                              <p:pRg st="1" end="1"/>
-                                            </p:txEl>
-                                          </p:spTgt>
-                                        </p:tgtEl>
-                                      </p:cBhvr>
-                                    </p:animEffect>
-                                    <p:set>
-                                      <p:cBhvr>
-                                        <p:cTn id="61" dur="1" fill="hold">
-                                          <p:stCondLst>
-                                            <p:cond delay="499"/>
-                                          </p:stCondLst>
-                                        </p:cTn>
-                                        <p:tgtEl>
-                                          <p:spTgt spid="2">
-                                            <p:txEl>
-                                              <p:pRg st="1" end="1"/>
-                                            </p:txEl>
-                                          </p:spTgt>
-                                        </p:tgtEl>
-                                        <p:attrNameLst>
-                                          <p:attrName>style.visibility</p:attrName>
-                                        </p:attrNameLst>
-                                      </p:cBhvr>
-                                      <p:to>
-                                        <p:strVal val="hidden"/>
-                                      </p:to>
-                                    </p:set>
-                                  </p:childTnLst>
-                                </p:cTn>
-                              </p:par>
-                              <p:par>
-                                <p:cTn id="62" presetID="10" presetClass="exit" presetSubtype="0" fill="hold" grpId="0" nodeType="withEffect">
-                                  <p:stCondLst>
-                                    <p:cond delay="0"/>
-                                  </p:stCondLst>
-                                  <p:childTnLst>
-                                    <p:animEffect transition="out" filter="fade">
-                                      <p:cBhvr>
-                                        <p:cTn id="63" dur="500"/>
-                                        <p:tgtEl>
-                                          <p:spTgt spid="2">
-                                            <p:txEl>
-                                              <p:pRg st="2" end="2"/>
-                                            </p:txEl>
-                                          </p:spTgt>
-                                        </p:tgtEl>
-                                      </p:cBhvr>
-                                    </p:animEffect>
-                                    <p:set>
-                                      <p:cBhvr>
-                                        <p:cTn id="64" dur="1" fill="hold">
-                                          <p:stCondLst>
-                                            <p:cond delay="499"/>
-                                          </p:stCondLst>
-                                        </p:cTn>
-                                        <p:tgtEl>
-                                          <p:spTgt spid="2">
-                                            <p:txEl>
-                                              <p:pRg st="2" end="2"/>
-                                            </p:txEl>
-                                          </p:spTgt>
-                                        </p:tgtEl>
-                                        <p:attrNameLst>
-                                          <p:attrName>style.visibility</p:attrName>
-                                        </p:attrNameLst>
-                                      </p:cBhvr>
-                                      <p:to>
-                                        <p:strVal val="hidden"/>
-                                      </p:to>
-                                    </p:set>
-                                  </p:childTnLst>
-                                </p:cTn>
-                              </p:par>
-                            </p:childTnLst>
-                          </p:cTn>
-                        </p:par>
-                      </p:childTnLst>
-                    </p:cTn>
-                  </p:par>
                 </p:childTnLst>
               </p:cTn>
               <p:prevCondLst>
@@ -25196,7 +25333,6 @@
     <p:bldLst>
       <p:bldP spid="11" grpId="0" animBg="1"/>
       <p:bldP spid="3" grpId="0"/>
-      <p:bldP spid="2" grpId="0" build="allAtOnce"/>
     </p:bldLst>
   </p:timing>
 </p:sld>
@@ -25844,6 +25980,18 @@
   <p:clrMapOvr>
     <a:masterClrMapping/>
   </p:clrMapOvr>
+  <mc:AlternateContent xmlns:mc="http://schemas.openxmlformats.org/markup-compatibility/2006">
+    <mc:Choice xmlns:p14="http://schemas.microsoft.com/office/powerpoint/2010/main" Requires="p14">
+      <p:transition spd="med" p14:dur="700">
+        <p:fade/>
+      </p:transition>
+    </mc:Choice>
+    <mc:Fallback>
+      <p:transition spd="med">
+        <p:fade/>
+      </p:transition>
+    </mc:Fallback>
+  </mc:AlternateContent>
   <p:timing>
     <p:tnLst>
       <p:par>
@@ -26744,6 +26892,18 @@
   <p:clrMapOvr>
     <a:masterClrMapping/>
   </p:clrMapOvr>
+  <mc:AlternateContent xmlns:mc="http://schemas.openxmlformats.org/markup-compatibility/2006">
+    <mc:Choice xmlns:p14="http://schemas.microsoft.com/office/powerpoint/2010/main" Requires="p14">
+      <p:transition spd="med" p14:dur="700">
+        <p:fade/>
+      </p:transition>
+    </mc:Choice>
+    <mc:Fallback>
+      <p:transition spd="med">
+        <p:fade/>
+      </p:transition>
+    </mc:Fallback>
+  </mc:AlternateContent>
   <p:timing>
     <p:tnLst>
       <p:par>
@@ -27597,6 +27757,18 @@
   <p:clrMapOvr>
     <a:masterClrMapping/>
   </p:clrMapOvr>
+  <mc:AlternateContent xmlns:mc="http://schemas.openxmlformats.org/markup-compatibility/2006">
+    <mc:Choice xmlns:p14="http://schemas.microsoft.com/office/powerpoint/2010/main" Requires="p14">
+      <p:transition spd="med" p14:dur="700">
+        <p:fade/>
+      </p:transition>
+    </mc:Choice>
+    <mc:Fallback>
+      <p:transition spd="med">
+        <p:fade/>
+      </p:transition>
+    </mc:Fallback>
+  </mc:AlternateContent>
   <p:timing>
     <p:tnLst>
       <p:par>
@@ -28656,6 +28828,18 @@
   <p:clrMapOvr>
     <a:masterClrMapping/>
   </p:clrMapOvr>
+  <mc:AlternateContent xmlns:mc="http://schemas.openxmlformats.org/markup-compatibility/2006">
+    <mc:Choice xmlns:p14="http://schemas.microsoft.com/office/powerpoint/2010/main" Requires="p14">
+      <p:transition spd="med" p14:dur="700">
+        <p:fade/>
+      </p:transition>
+    </mc:Choice>
+    <mc:Fallback>
+      <p:transition spd="med">
+        <p:fade/>
+      </p:transition>
+    </mc:Fallback>
+  </mc:AlternateContent>
   <p:timing>
     <p:tnLst>
       <p:par>

--- a/Deliverables/Presentation1.pptx
+++ b/Deliverables/Presentation1.pptx
@@ -5,7 +5,7 @@
     <p:sldMasterId id="2147483648" r:id="rId1"/>
   </p:sldMasterIdLst>
   <p:notesMasterIdLst>
-    <p:notesMasterId r:id="rId18"/>
+    <p:notesMasterId r:id="rId19"/>
   </p:notesMasterIdLst>
   <p:sldIdLst>
     <p:sldId id="256" r:id="rId2"/>
@@ -21,21 +21,22 @@
     <p:sldId id="260" r:id="rId12"/>
     <p:sldId id="276" r:id="rId13"/>
     <p:sldId id="261" r:id="rId14"/>
-    <p:sldId id="262" r:id="rId15"/>
-    <p:sldId id="269" r:id="rId16"/>
-    <p:sldId id="263" r:id="rId17"/>
+    <p:sldId id="277" r:id="rId15"/>
+    <p:sldId id="262" r:id="rId16"/>
+    <p:sldId id="269" r:id="rId17"/>
+    <p:sldId id="263" r:id="rId18"/>
   </p:sldIdLst>
   <p:sldSz cx="12192000" cy="6858000"/>
   <p:notesSz cx="6858000" cy="9144000"/>
   <p:embeddedFontLst>
     <p:embeddedFont>
       <p:font typeface="Kumbh Sans" pitchFamily="2" charset="0"/>
-      <p:regular r:id="rId19"/>
-      <p:bold r:id="rId20"/>
+      <p:regular r:id="rId20"/>
+      <p:bold r:id="rId21"/>
     </p:embeddedFont>
     <p:embeddedFont>
       <p:font typeface="Kumbh Sans SemiBold" pitchFamily="2" charset="0"/>
-      <p:bold r:id="rId21"/>
+      <p:bold r:id="rId22"/>
     </p:embeddedFont>
   </p:embeddedFontLst>
   <p:defaultTextStyle>
@@ -144,8 +145,7 @@
 <file path=ppt/revisionInfo.xml><?xml version="1.0" encoding="utf-8"?>
 <p1510:revInfo xmlns:a="http://schemas.openxmlformats.org/drawingml/2006/main" xmlns:r="http://schemas.openxmlformats.org/officeDocument/2006/relationships" xmlns:p1510="http://schemas.microsoft.com/office/powerpoint/2015/10/main">
   <p1510:revLst>
-    <p1510:client id="{2940A192-0FD3-4679-B782-39515230B446}" v="272" dt="2026-09-16T18:38:35.183"/>
-    <p1510:client id="{EADFFEA0-CC63-45EF-97E4-5A80CDB68182}" v="1807" dt="2026-09-17T18:32:20.419"/>
+    <p1510:client id="{EADFFEA0-CC63-45EF-97E4-5A80CDB68182}" v="1982" dt="2026-09-18T13:41:02.534"/>
   </p1510:revLst>
 </p1510:revInfo>
 </file>
@@ -155,7 +155,7 @@
   <pc:docChgLst>
     <pc:chgData name="Steve Mutrux" userId="4fa98d0c-dc66-4728-b09b-a88e22e95094" providerId="ADAL" clId="{421BD283-33D8-4C6C-821F-71755E863FA2}"/>
     <pc:docChg chg="undo custSel addSld delSld modSld sldOrd">
-      <pc:chgData name="Steve Mutrux" userId="4fa98d0c-dc66-4728-b09b-a88e22e95094" providerId="ADAL" clId="{421BD283-33D8-4C6C-821F-71755E863FA2}" dt="2026-09-17T18:32:43.712" v="5292" actId="1036"/>
+      <pc:chgData name="Steve Mutrux" userId="4fa98d0c-dc66-4728-b09b-a88e22e95094" providerId="ADAL" clId="{421BD283-33D8-4C6C-821F-71755E863FA2}" dt="2026-09-18T13:41:02.534" v="5531"/>
       <pc:docMkLst>
         <pc:docMk/>
       </pc:docMkLst>
@@ -196,60 +196,12 @@
           <pc:docMk/>
           <pc:sldMk cId="2816041415" sldId="257"/>
         </pc:sldMkLst>
-        <pc:spChg chg="del mod">
-          <ac:chgData name="Steve Mutrux" userId="4fa98d0c-dc66-4728-b09b-a88e22e95094" providerId="ADAL" clId="{421BD283-33D8-4C6C-821F-71755E863FA2}" dt="2026-09-16T00:46:31.976" v="922" actId="478"/>
-          <ac:spMkLst>
-            <pc:docMk/>
-            <pc:sldMk cId="2816041415" sldId="257"/>
-            <ac:spMk id="2" creationId="{46678232-D860-76CE-77D5-D9F21C5850EF}"/>
-          </ac:spMkLst>
-        </pc:spChg>
         <pc:spChg chg="add mod ord">
           <ac:chgData name="Steve Mutrux" userId="4fa98d0c-dc66-4728-b09b-a88e22e95094" providerId="ADAL" clId="{421BD283-33D8-4C6C-821F-71755E863FA2}" dt="2026-09-16T11:08:27.951" v="3156" actId="207"/>
           <ac:spMkLst>
             <pc:docMk/>
             <pc:sldMk cId="2816041415" sldId="257"/>
             <ac:spMk id="4" creationId="{FF2203D6-CADD-8886-994B-15E5019085A9}"/>
-          </ac:spMkLst>
-        </pc:spChg>
-        <pc:spChg chg="add del mod">
-          <ac:chgData name="Steve Mutrux" userId="4fa98d0c-dc66-4728-b09b-a88e22e95094" providerId="ADAL" clId="{421BD283-33D8-4C6C-821F-71755E863FA2}" dt="2026-09-16T01:03:58.801" v="1038" actId="478"/>
-          <ac:spMkLst>
-            <pc:docMk/>
-            <pc:sldMk cId="2816041415" sldId="257"/>
-            <ac:spMk id="6" creationId="{C410810D-A989-74D7-F0EB-6BE5858E3F6A}"/>
-          </ac:spMkLst>
-        </pc:spChg>
-        <pc:spChg chg="add del mod">
-          <ac:chgData name="Steve Mutrux" userId="4fa98d0c-dc66-4728-b09b-a88e22e95094" providerId="ADAL" clId="{421BD283-33D8-4C6C-821F-71755E863FA2}" dt="2026-09-16T01:03:18.802" v="1036" actId="478"/>
-          <ac:spMkLst>
-            <pc:docMk/>
-            <pc:sldMk cId="2816041415" sldId="257"/>
-            <ac:spMk id="7" creationId="{3261E8B8-4A5D-BECA-1304-E8332AAE561A}"/>
-          </ac:spMkLst>
-        </pc:spChg>
-        <pc:spChg chg="add del mod topLvl">
-          <ac:chgData name="Steve Mutrux" userId="4fa98d0c-dc66-4728-b09b-a88e22e95094" providerId="ADAL" clId="{421BD283-33D8-4C6C-821F-71755E863FA2}" dt="2026-09-16T01:11:16.400" v="1106" actId="478"/>
-          <ac:spMkLst>
-            <pc:docMk/>
-            <pc:sldMk cId="2816041415" sldId="257"/>
-            <ac:spMk id="9" creationId="{FAEF5536-44D2-9012-9C74-2886C3A8524B}"/>
-          </ac:spMkLst>
-        </pc:spChg>
-        <pc:spChg chg="add del mod topLvl">
-          <ac:chgData name="Steve Mutrux" userId="4fa98d0c-dc66-4728-b09b-a88e22e95094" providerId="ADAL" clId="{421BD283-33D8-4C6C-821F-71755E863FA2}" dt="2026-09-16T01:11:14.839" v="1105" actId="478"/>
-          <ac:spMkLst>
-            <pc:docMk/>
-            <pc:sldMk cId="2816041415" sldId="257"/>
-            <ac:spMk id="11" creationId="{E786029E-8D13-42CC-AFB7-93C737CF5FB5}"/>
-          </ac:spMkLst>
-        </pc:spChg>
-        <pc:spChg chg="add del mod topLvl">
-          <ac:chgData name="Steve Mutrux" userId="4fa98d0c-dc66-4728-b09b-a88e22e95094" providerId="ADAL" clId="{421BD283-33D8-4C6C-821F-71755E863FA2}" dt="2026-09-16T01:11:14.839" v="1105" actId="478"/>
-          <ac:spMkLst>
-            <pc:docMk/>
-            <pc:sldMk cId="2816041415" sldId="257"/>
-            <ac:spMk id="13" creationId="{68683EA2-9224-6664-E087-6B86DAA4A1C0}"/>
           </ac:spMkLst>
         </pc:spChg>
         <pc:spChg chg="add mod ord">
@@ -300,14 +252,6 @@
             <ac:grpSpMk id="2" creationId="{86DE5357-82AC-D117-E1C8-6C68EB834E4A}"/>
           </ac:grpSpMkLst>
         </pc:grpChg>
-        <pc:grpChg chg="add del mod">
-          <ac:chgData name="Steve Mutrux" userId="4fa98d0c-dc66-4728-b09b-a88e22e95094" providerId="ADAL" clId="{421BD283-33D8-4C6C-821F-71755E863FA2}" dt="2026-09-16T01:06:19.504" v="1065" actId="165"/>
-          <ac:grpSpMkLst>
-            <pc:docMk/>
-            <pc:sldMk cId="2816041415" sldId="257"/>
-            <ac:grpSpMk id="14" creationId="{73DF0394-079E-F5AC-B018-B56745238E9B}"/>
-          </ac:grpSpMkLst>
-        </pc:grpChg>
         <pc:grpChg chg="add mod ord">
           <ac:chgData name="Steve Mutrux" userId="4fa98d0c-dc66-4728-b09b-a88e22e95094" providerId="ADAL" clId="{421BD283-33D8-4C6C-821F-71755E863FA2}" dt="2026-09-16T11:12:11.278" v="3175" actId="164"/>
           <ac:grpSpMkLst>
@@ -326,27 +270,11 @@
         </pc:picChg>
       </pc:sldChg>
       <pc:sldChg chg="addSp delSp modSp add mod modAnim modNotesTx">
-        <pc:chgData name="Steve Mutrux" userId="4fa98d0c-dc66-4728-b09b-a88e22e95094" providerId="ADAL" clId="{421BD283-33D8-4C6C-821F-71755E863FA2}" dt="2026-09-16T02:47:48.323" v="3073"/>
+        <pc:chgData name="Steve Mutrux" userId="4fa98d0c-dc66-4728-b09b-a88e22e95094" providerId="ADAL" clId="{421BD283-33D8-4C6C-821F-71755E863FA2}" dt="2026-09-18T12:54:34.559" v="5306" actId="1076"/>
         <pc:sldMkLst>
           <pc:docMk/>
           <pc:sldMk cId="518144185" sldId="258"/>
         </pc:sldMkLst>
-        <pc:spChg chg="del mod">
-          <ac:chgData name="Steve Mutrux" userId="4fa98d0c-dc66-4728-b09b-a88e22e95094" providerId="ADAL" clId="{421BD283-33D8-4C6C-821F-71755E863FA2}" dt="2026-09-16T00:46:35.289" v="923" actId="478"/>
-          <ac:spMkLst>
-            <pc:docMk/>
-            <pc:sldMk cId="518144185" sldId="258"/>
-            <ac:spMk id="2" creationId="{C7943069-6591-7336-398B-719327BAD466}"/>
-          </ac:spMkLst>
-        </pc:spChg>
-        <pc:spChg chg="add del mod ord">
-          <ac:chgData name="Steve Mutrux" userId="4fa98d0c-dc66-4728-b09b-a88e22e95094" providerId="ADAL" clId="{421BD283-33D8-4C6C-821F-71755E863FA2}" dt="2026-09-16T01:41:19.114" v="2580"/>
-          <ac:spMkLst>
-            <pc:docMk/>
-            <pc:sldMk cId="518144185" sldId="258"/>
-            <ac:spMk id="4" creationId="{4179717D-B637-2B0D-B9EF-712078DD12DB}"/>
-          </ac:spMkLst>
-        </pc:spChg>
         <pc:spChg chg="add mod">
           <ac:chgData name="Steve Mutrux" userId="4fa98d0c-dc66-4728-b09b-a88e22e95094" providerId="ADAL" clId="{421BD283-33D8-4C6C-821F-71755E863FA2}" dt="2026-09-16T00:47:48.017" v="925" actId="2711"/>
           <ac:spMkLst>
@@ -355,24 +283,8 @@
             <ac:spMk id="5" creationId="{DB1A1787-4F3B-4026-9478-2D29155C7AD4}"/>
           </ac:spMkLst>
         </pc:spChg>
-        <pc:spChg chg="add del mod">
-          <ac:chgData name="Steve Mutrux" userId="4fa98d0c-dc66-4728-b09b-a88e22e95094" providerId="ADAL" clId="{421BD283-33D8-4C6C-821F-71755E863FA2}" dt="2026-09-16T01:32:58.829" v="2270" actId="478"/>
-          <ac:spMkLst>
-            <pc:docMk/>
-            <pc:sldMk cId="518144185" sldId="258"/>
-            <ac:spMk id="6" creationId="{F30D305D-9660-BFE0-D543-CD5D129E965D}"/>
-          </ac:spMkLst>
-        </pc:spChg>
-        <pc:spChg chg="add del mod">
-          <ac:chgData name="Steve Mutrux" userId="4fa98d0c-dc66-4728-b09b-a88e22e95094" providerId="ADAL" clId="{421BD283-33D8-4C6C-821F-71755E863FA2}" dt="2026-09-16T01:34:24.418" v="2280" actId="478"/>
-          <ac:spMkLst>
-            <pc:docMk/>
-            <pc:sldMk cId="518144185" sldId="258"/>
-            <ac:spMk id="8" creationId="{4420A185-84EB-DED9-0C78-E7C60A358624}"/>
-          </ac:spMkLst>
-        </pc:spChg>
         <pc:spChg chg="add mod">
-          <ac:chgData name="Steve Mutrux" userId="4fa98d0c-dc66-4728-b09b-a88e22e95094" providerId="ADAL" clId="{421BD283-33D8-4C6C-821F-71755E863FA2}" dt="2026-09-16T01:44:44.516" v="2607" actId="20577"/>
+          <ac:chgData name="Steve Mutrux" userId="4fa98d0c-dc66-4728-b09b-a88e22e95094" providerId="ADAL" clId="{421BD283-33D8-4C6C-821F-71755E863FA2}" dt="2026-09-18T12:54:03.764" v="5303" actId="1076"/>
           <ac:spMkLst>
             <pc:docMk/>
             <pc:sldMk cId="518144185" sldId="258"/>
@@ -403,24 +315,8 @@
             <ac:spMk id="13" creationId="{12E49B19-956E-922D-815D-8303E8A1343F}"/>
           </ac:spMkLst>
         </pc:spChg>
-        <pc:spChg chg="add del mod">
-          <ac:chgData name="Steve Mutrux" userId="4fa98d0c-dc66-4728-b09b-a88e22e95094" providerId="ADAL" clId="{421BD283-33D8-4C6C-821F-71755E863FA2}" dt="2026-09-16T01:46:37.054" v="2657" actId="21"/>
-          <ac:spMkLst>
-            <pc:docMk/>
-            <pc:sldMk cId="518144185" sldId="258"/>
-            <ac:spMk id="15" creationId="{44A84756-8249-7168-7DA3-B3CFCE071452}"/>
-          </ac:spMkLst>
-        </pc:spChg>
-        <pc:spChg chg="add del mod">
-          <ac:chgData name="Steve Mutrux" userId="4fa98d0c-dc66-4728-b09b-a88e22e95094" providerId="ADAL" clId="{421BD283-33D8-4C6C-821F-71755E863FA2}" dt="2026-09-16T01:46:37.054" v="2657" actId="21"/>
-          <ac:spMkLst>
-            <pc:docMk/>
-            <pc:sldMk cId="518144185" sldId="258"/>
-            <ac:spMk id="17" creationId="{AC29BAEA-85E2-CE44-DFD8-33264295EAFB}"/>
-          </ac:spMkLst>
-        </pc:spChg>
         <pc:spChg chg="add mod">
-          <ac:chgData name="Steve Mutrux" userId="4fa98d0c-dc66-4728-b09b-a88e22e95094" providerId="ADAL" clId="{421BD283-33D8-4C6C-821F-71755E863FA2}" dt="2026-09-16T02:07:30.283" v="2884" actId="1076"/>
+          <ac:chgData name="Steve Mutrux" userId="4fa98d0c-dc66-4728-b09b-a88e22e95094" providerId="ADAL" clId="{421BD283-33D8-4C6C-821F-71755E863FA2}" dt="2026-09-18T12:52:49.667" v="5293" actId="2711"/>
           <ac:spMkLst>
             <pc:docMk/>
             <pc:sldMk cId="518144185" sldId="258"/>
@@ -436,7 +332,7 @@
           </ac:spMkLst>
         </pc:spChg>
         <pc:spChg chg="add mod">
-          <ac:chgData name="Steve Mutrux" userId="4fa98d0c-dc66-4728-b09b-a88e22e95094" providerId="ADAL" clId="{421BD283-33D8-4C6C-821F-71755E863FA2}" dt="2026-09-16T02:07:30.283" v="2884" actId="1076"/>
+          <ac:chgData name="Steve Mutrux" userId="4fa98d0c-dc66-4728-b09b-a88e22e95094" providerId="ADAL" clId="{421BD283-33D8-4C6C-821F-71755E863FA2}" dt="2026-09-18T12:52:56.949" v="5294" actId="2711"/>
           <ac:spMkLst>
             <pc:docMk/>
             <pc:sldMk cId="518144185" sldId="258"/>
@@ -444,7 +340,7 @@
           </ac:spMkLst>
         </pc:spChg>
         <pc:spChg chg="add mod">
-          <ac:chgData name="Steve Mutrux" userId="4fa98d0c-dc66-4728-b09b-a88e22e95094" providerId="ADAL" clId="{421BD283-33D8-4C6C-821F-71755E863FA2}" dt="2026-09-16T02:07:30.283" v="2884" actId="1076"/>
+          <ac:chgData name="Steve Mutrux" userId="4fa98d0c-dc66-4728-b09b-a88e22e95094" providerId="ADAL" clId="{421BD283-33D8-4C6C-821F-71755E863FA2}" dt="2026-09-18T12:52:56.949" v="5294" actId="2711"/>
           <ac:spMkLst>
             <pc:docMk/>
             <pc:sldMk cId="518144185" sldId="258"/>
@@ -452,7 +348,7 @@
           </ac:spMkLst>
         </pc:spChg>
         <pc:spChg chg="add mod">
-          <ac:chgData name="Steve Mutrux" userId="4fa98d0c-dc66-4728-b09b-a88e22e95094" providerId="ADAL" clId="{421BD283-33D8-4C6C-821F-71755E863FA2}" dt="2026-09-16T02:07:30.283" v="2884" actId="1076"/>
+          <ac:chgData name="Steve Mutrux" userId="4fa98d0c-dc66-4728-b09b-a88e22e95094" providerId="ADAL" clId="{421BD283-33D8-4C6C-821F-71755E863FA2}" dt="2026-09-18T12:52:56.949" v="5294" actId="2711"/>
           <ac:spMkLst>
             <pc:docMk/>
             <pc:sldMk cId="518144185" sldId="258"/>
@@ -460,7 +356,7 @@
           </ac:spMkLst>
         </pc:spChg>
         <pc:spChg chg="add mod">
-          <ac:chgData name="Steve Mutrux" userId="4fa98d0c-dc66-4728-b09b-a88e22e95094" providerId="ADAL" clId="{421BD283-33D8-4C6C-821F-71755E863FA2}" dt="2026-09-16T02:07:30.283" v="2884" actId="1076"/>
+          <ac:chgData name="Steve Mutrux" userId="4fa98d0c-dc66-4728-b09b-a88e22e95094" providerId="ADAL" clId="{421BD283-33D8-4C6C-821F-71755E863FA2}" dt="2026-09-18T12:54:31.130" v="5305" actId="1076"/>
           <ac:spMkLst>
             <pc:docMk/>
             <pc:sldMk cId="518144185" sldId="258"/>
@@ -468,7 +364,7 @@
           </ac:spMkLst>
         </pc:spChg>
         <pc:spChg chg="add mod">
-          <ac:chgData name="Steve Mutrux" userId="4fa98d0c-dc66-4728-b09b-a88e22e95094" providerId="ADAL" clId="{421BD283-33D8-4C6C-821F-71755E863FA2}" dt="2026-09-16T02:07:30.283" v="2884" actId="1076"/>
+          <ac:chgData name="Steve Mutrux" userId="4fa98d0c-dc66-4728-b09b-a88e22e95094" providerId="ADAL" clId="{421BD283-33D8-4C6C-821F-71755E863FA2}" dt="2026-09-18T12:54:34.559" v="5306" actId="1076"/>
           <ac:spMkLst>
             <pc:docMk/>
             <pc:sldMk cId="518144185" sldId="258"/>
@@ -490,36 +386,12 @@
           <pc:docMk/>
           <pc:sldMk cId="3444687766" sldId="260"/>
         </pc:sldMkLst>
-        <pc:spChg chg="del mod">
-          <ac:chgData name="Steve Mutrux" userId="4fa98d0c-dc66-4728-b09b-a88e22e95094" providerId="ADAL" clId="{421BD283-33D8-4C6C-821F-71755E863FA2}" dt="2026-09-16T00:46:15.741" v="916" actId="478"/>
-          <ac:spMkLst>
-            <pc:docMk/>
-            <pc:sldMk cId="3444687766" sldId="260"/>
-            <ac:spMk id="2" creationId="{002E2CC7-570D-FDB3-3281-85D5D28B2E70}"/>
-          </ac:spMkLst>
-        </pc:spChg>
-        <pc:spChg chg="add mod">
-          <ac:chgData name="Steve Mutrux" userId="4fa98d0c-dc66-4728-b09b-a88e22e95094" providerId="ADAL" clId="{421BD283-33D8-4C6C-821F-71755E863FA2}" dt="2026-09-16T15:08:22.939" v="4538"/>
-          <ac:spMkLst>
-            <pc:docMk/>
-            <pc:sldMk cId="3444687766" sldId="260"/>
-            <ac:spMk id="2" creationId="{691C4877-3DAD-6CAA-ED51-1E15F5891382}"/>
-          </ac:spMkLst>
-        </pc:spChg>
         <pc:spChg chg="add mod">
           <ac:chgData name="Steve Mutrux" userId="4fa98d0c-dc66-4728-b09b-a88e22e95094" providerId="ADAL" clId="{421BD283-33D8-4C6C-821F-71755E863FA2}" dt="2026-09-17T18:05:10.212" v="5205" actId="20577"/>
           <ac:spMkLst>
             <pc:docMk/>
             <pc:sldMk cId="3444687766" sldId="260"/>
             <ac:spMk id="3" creationId="{5F97503A-9C72-47A2-2CA8-09144AD4223D}"/>
-          </ac:spMkLst>
-        </pc:spChg>
-        <pc:spChg chg="mod">
-          <ac:chgData name="Steve Mutrux" userId="4fa98d0c-dc66-4728-b09b-a88e22e95094" providerId="ADAL" clId="{421BD283-33D8-4C6C-821F-71755E863FA2}" dt="2026-09-16T11:58:01.971" v="3483" actId="14100"/>
-          <ac:spMkLst>
-            <pc:docMk/>
-            <pc:sldMk cId="3444687766" sldId="260"/>
-            <ac:spMk id="3" creationId="{F0AC75C3-D900-D841-B78D-2A1D1677A633}"/>
           </ac:spMkLst>
         </pc:spChg>
         <pc:spChg chg="add mod ord">
@@ -536,38 +408,6 @@
             <pc:docMk/>
             <pc:sldMk cId="3444687766" sldId="260"/>
             <ac:spMk id="5" creationId="{E0D86D48-4A11-51EE-D37F-9B0D8E07F58B}"/>
-          </ac:spMkLst>
-        </pc:spChg>
-        <pc:spChg chg="mod">
-          <ac:chgData name="Steve Mutrux" userId="4fa98d0c-dc66-4728-b09b-a88e22e95094" providerId="ADAL" clId="{421BD283-33D8-4C6C-821F-71755E863FA2}" dt="2026-09-16T11:55:46.486" v="3460"/>
-          <ac:spMkLst>
-            <pc:docMk/>
-            <pc:sldMk cId="3444687766" sldId="260"/>
-            <ac:spMk id="7" creationId="{BF7235CB-A883-A271-6DE2-5F16525B620E}"/>
-          </ac:spMkLst>
-        </pc:spChg>
-        <pc:spChg chg="mod">
-          <ac:chgData name="Steve Mutrux" userId="4fa98d0c-dc66-4728-b09b-a88e22e95094" providerId="ADAL" clId="{421BD283-33D8-4C6C-821F-71755E863FA2}" dt="2026-09-16T11:55:46.486" v="3460"/>
-          <ac:spMkLst>
-            <pc:docMk/>
-            <pc:sldMk cId="3444687766" sldId="260"/>
-            <ac:spMk id="8" creationId="{FB8386EE-B837-D805-5371-59DFE3A39A54}"/>
-          </ac:spMkLst>
-        </pc:spChg>
-        <pc:spChg chg="mod">
-          <ac:chgData name="Steve Mutrux" userId="4fa98d0c-dc66-4728-b09b-a88e22e95094" providerId="ADAL" clId="{421BD283-33D8-4C6C-821F-71755E863FA2}" dt="2026-09-16T11:58:27.537" v="3488" actId="1076"/>
-          <ac:spMkLst>
-            <pc:docMk/>
-            <pc:sldMk cId="3444687766" sldId="260"/>
-            <ac:spMk id="9" creationId="{4BC384DA-B5A9-A2C3-80E9-6C83E5BF28BB}"/>
-          </ac:spMkLst>
-        </pc:spChg>
-        <pc:spChg chg="mod">
-          <ac:chgData name="Steve Mutrux" userId="4fa98d0c-dc66-4728-b09b-a88e22e95094" providerId="ADAL" clId="{421BD283-33D8-4C6C-821F-71755E863FA2}" dt="2026-09-16T11:58:24.099" v="3487" actId="1076"/>
-          <ac:spMkLst>
-            <pc:docMk/>
-            <pc:sldMk cId="3444687766" sldId="260"/>
-            <ac:spMk id="10" creationId="{6E43F294-A723-9C2D-9117-3EAFCB8D7DD4}"/>
           </ac:spMkLst>
         </pc:spChg>
         <pc:spChg chg="add mod ord">
@@ -626,30 +466,6 @@
             <ac:spMk id="19" creationId="{A3A086A8-319C-7CA8-C41D-78D47E1C5605}"/>
           </ac:spMkLst>
         </pc:spChg>
-        <pc:grpChg chg="add del mod ord">
-          <ac:chgData name="Steve Mutrux" userId="4fa98d0c-dc66-4728-b09b-a88e22e95094" providerId="ADAL" clId="{421BD283-33D8-4C6C-821F-71755E863FA2}" dt="2026-09-16T12:28:36.433" v="3715" actId="478"/>
-          <ac:grpSpMkLst>
-            <pc:docMk/>
-            <pc:sldMk cId="3444687766" sldId="260"/>
-            <ac:grpSpMk id="2" creationId="{B3BE51AA-CD21-FF1C-65C4-A34C48469377}"/>
-          </ac:grpSpMkLst>
-        </pc:grpChg>
-        <pc:grpChg chg="mod">
-          <ac:chgData name="Steve Mutrux" userId="4fa98d0c-dc66-4728-b09b-a88e22e95094" providerId="ADAL" clId="{421BD283-33D8-4C6C-821F-71755E863FA2}" dt="2026-09-16T11:55:46.486" v="3460"/>
-          <ac:grpSpMkLst>
-            <pc:docMk/>
-            <pc:sldMk cId="3444687766" sldId="260"/>
-            <ac:grpSpMk id="5" creationId="{8502D639-0220-4089-B432-B8558923B3C1}"/>
-          </ac:grpSpMkLst>
-        </pc:grpChg>
-        <pc:grpChg chg="mod">
-          <ac:chgData name="Steve Mutrux" userId="4fa98d0c-dc66-4728-b09b-a88e22e95094" providerId="ADAL" clId="{421BD283-33D8-4C6C-821F-71755E863FA2}" dt="2026-09-16T11:55:46.486" v="3460"/>
-          <ac:grpSpMkLst>
-            <pc:docMk/>
-            <pc:sldMk cId="3444687766" sldId="260"/>
-            <ac:grpSpMk id="6" creationId="{19E43BAC-DCCF-D719-04C1-CCDA01A414D3}"/>
-          </ac:grpSpMkLst>
-        </pc:grpChg>
         <pc:grpChg chg="add mod">
           <ac:chgData name="Steve Mutrux" userId="4fa98d0c-dc66-4728-b09b-a88e22e95094" providerId="ADAL" clId="{421BD283-33D8-4C6C-821F-71755E863FA2}" dt="2026-09-16T12:30:25.388" v="3773" actId="164"/>
           <ac:grpSpMkLst>
@@ -676,7 +492,7 @@
         </pc:grpChg>
       </pc:sldChg>
       <pc:sldChg chg="addSp delSp modSp add mod modTransition addAnim delAnim modAnim modNotesTx">
-        <pc:chgData name="Steve Mutrux" userId="4fa98d0c-dc66-4728-b09b-a88e22e95094" providerId="ADAL" clId="{421BD283-33D8-4C6C-821F-71755E863FA2}" dt="2026-09-17T18:23:01.889" v="5235"/>
+        <pc:chgData name="Steve Mutrux" userId="4fa98d0c-dc66-4728-b09b-a88e22e95094" providerId="ADAL" clId="{421BD283-33D8-4C6C-821F-71755E863FA2}" dt="2026-09-18T13:28:10.567" v="5446"/>
         <pc:sldMkLst>
           <pc:docMk/>
           <pc:sldMk cId="4190029259" sldId="261"/>
@@ -689,14 +505,6 @@
             <ac:spMk id="2" creationId="{097F8CB8-172B-C3E2-E664-5B2BAC96AAEF}"/>
           </ac:spMkLst>
         </pc:spChg>
-        <pc:spChg chg="del">
-          <ac:chgData name="Steve Mutrux" userId="4fa98d0c-dc66-4728-b09b-a88e22e95094" providerId="ADAL" clId="{421BD283-33D8-4C6C-821F-71755E863FA2}" dt="2026-09-16T00:46:11.904" v="914" actId="478"/>
-          <ac:spMkLst>
-            <pc:docMk/>
-            <pc:sldMk cId="4190029259" sldId="261"/>
-            <ac:spMk id="2" creationId="{EB45249E-3CD1-3B49-F9CF-AF33CD9279A1}"/>
-          </ac:spMkLst>
-        </pc:spChg>
         <pc:spChg chg="mod">
           <ac:chgData name="Steve Mutrux" userId="4fa98d0c-dc66-4728-b09b-a88e22e95094" providerId="ADAL" clId="{421BD283-33D8-4C6C-821F-71755E863FA2}" dt="2026-09-16T12:38:25.637" v="3856"/>
           <ac:spMkLst>
@@ -705,28 +513,12 @@
             <ac:spMk id="4" creationId="{64A2287E-B2C1-FB3E-1734-1B1DDDD4AFB5}"/>
           </ac:spMkLst>
         </pc:spChg>
-        <pc:spChg chg="add del">
-          <ac:chgData name="Steve Mutrux" userId="4fa98d0c-dc66-4728-b09b-a88e22e95094" providerId="ADAL" clId="{421BD283-33D8-4C6C-821F-71755E863FA2}" dt="2026-09-16T00:42:24.116" v="855" actId="478"/>
-          <ac:spMkLst>
-            <pc:docMk/>
-            <pc:sldMk cId="4190029259" sldId="261"/>
-            <ac:spMk id="4" creationId="{86ABD23B-52C3-0A87-E606-1F99B12A92D7}"/>
-          </ac:spMkLst>
-        </pc:spChg>
         <pc:spChg chg="mod">
           <ac:chgData name="Steve Mutrux" userId="4fa98d0c-dc66-4728-b09b-a88e22e95094" providerId="ADAL" clId="{421BD283-33D8-4C6C-821F-71755E863FA2}" dt="2026-09-16T12:38:25.637" v="3856"/>
           <ac:spMkLst>
             <pc:docMk/>
             <pc:sldMk cId="4190029259" sldId="261"/>
             <ac:spMk id="5" creationId="{2DDA9094-A605-CBC0-4948-76D8615752C1}"/>
-          </ac:spMkLst>
-        </pc:spChg>
-        <pc:spChg chg="add del mod">
-          <ac:chgData name="Steve Mutrux" userId="4fa98d0c-dc66-4728-b09b-a88e22e95094" providerId="ADAL" clId="{421BD283-33D8-4C6C-821F-71755E863FA2}" dt="2026-09-16T12:37:31.420" v="3843" actId="478"/>
-          <ac:spMkLst>
-            <pc:docMk/>
-            <pc:sldMk cId="4190029259" sldId="261"/>
-            <ac:spMk id="6" creationId="{C26F907F-3A16-3C95-A3C0-1A0D83238263}"/>
           </ac:spMkLst>
         </pc:spChg>
         <pc:spChg chg="mod">
@@ -777,38 +569,6 @@
             <ac:spMk id="15" creationId="{371B18D3-D66D-246F-ADDA-BEA5981F37AE}"/>
           </ac:spMkLst>
         </pc:spChg>
-        <pc:spChg chg="add del mod">
-          <ac:chgData name="Steve Mutrux" userId="4fa98d0c-dc66-4728-b09b-a88e22e95094" providerId="ADAL" clId="{421BD283-33D8-4C6C-821F-71755E863FA2}" dt="2026-09-16T12:41:09.381" v="3879" actId="478"/>
-          <ac:spMkLst>
-            <pc:docMk/>
-            <pc:sldMk cId="4190029259" sldId="261"/>
-            <ac:spMk id="15" creationId="{E8AC0F8B-75D9-6940-D2C6-15D7200CBF96}"/>
-          </ac:spMkLst>
-        </pc:spChg>
-        <pc:spChg chg="add del mod">
-          <ac:chgData name="Steve Mutrux" userId="4fa98d0c-dc66-4728-b09b-a88e22e95094" providerId="ADAL" clId="{421BD283-33D8-4C6C-821F-71755E863FA2}" dt="2026-09-16T12:41:10.088" v="3880" actId="478"/>
-          <ac:spMkLst>
-            <pc:docMk/>
-            <pc:sldMk cId="4190029259" sldId="261"/>
-            <ac:spMk id="17" creationId="{B77C07AD-A18F-C228-4CB7-289C48CC9D50}"/>
-          </ac:spMkLst>
-        </pc:spChg>
-        <pc:spChg chg="add del mod">
-          <ac:chgData name="Steve Mutrux" userId="4fa98d0c-dc66-4728-b09b-a88e22e95094" providerId="ADAL" clId="{421BD283-33D8-4C6C-821F-71755E863FA2}" dt="2026-09-16T12:41:12.820" v="3882" actId="478"/>
-          <ac:spMkLst>
-            <pc:docMk/>
-            <pc:sldMk cId="4190029259" sldId="261"/>
-            <ac:spMk id="19" creationId="{6025D1BC-186D-5E9A-8EFC-D3D3544AC95C}"/>
-          </ac:spMkLst>
-        </pc:spChg>
-        <pc:spChg chg="add del mod">
-          <ac:chgData name="Steve Mutrux" userId="4fa98d0c-dc66-4728-b09b-a88e22e95094" providerId="ADAL" clId="{421BD283-33D8-4C6C-821F-71755E863FA2}" dt="2026-09-16T12:41:11.370" v="3881" actId="478"/>
-          <ac:spMkLst>
-            <pc:docMk/>
-            <pc:sldMk cId="4190029259" sldId="261"/>
-            <ac:spMk id="21" creationId="{C56B7234-588E-45B2-37AF-971B195666C1}"/>
-          </ac:spMkLst>
-        </pc:spChg>
         <pc:spChg chg="add mod ord">
           <ac:chgData name="Steve Mutrux" userId="4fa98d0c-dc66-4728-b09b-a88e22e95094" providerId="ADAL" clId="{421BD283-33D8-4C6C-821F-71755E863FA2}" dt="2026-09-16T12:50:09.573" v="4018" actId="1076"/>
           <ac:spMkLst>
@@ -857,46 +617,6 @@
             <ac:spMk id="33" creationId="{4B152BFB-E6B2-11F8-DBCF-BD54BFF33630}"/>
           </ac:spMkLst>
         </pc:spChg>
-        <pc:spChg chg="mod">
-          <ac:chgData name="Steve Mutrux" userId="4fa98d0c-dc66-4728-b09b-a88e22e95094" providerId="ADAL" clId="{421BD283-33D8-4C6C-821F-71755E863FA2}" dt="2026-09-16T12:45:45.433" v="3916"/>
-          <ac:spMkLst>
-            <pc:docMk/>
-            <pc:sldMk cId="4190029259" sldId="261"/>
-            <ac:spMk id="37" creationId="{E14BB88B-0E96-59B3-6EF0-279E58A2B8ED}"/>
-          </ac:spMkLst>
-        </pc:spChg>
-        <pc:spChg chg="mod">
-          <ac:chgData name="Steve Mutrux" userId="4fa98d0c-dc66-4728-b09b-a88e22e95094" providerId="ADAL" clId="{421BD283-33D8-4C6C-821F-71755E863FA2}" dt="2026-09-16T12:45:45.433" v="3916"/>
-          <ac:spMkLst>
-            <pc:docMk/>
-            <pc:sldMk cId="4190029259" sldId="261"/>
-            <ac:spMk id="40" creationId="{34B31535-460B-ADF4-80F4-ACC7134B73F9}"/>
-          </ac:spMkLst>
-        </pc:spChg>
-        <pc:spChg chg="mod">
-          <ac:chgData name="Steve Mutrux" userId="4fa98d0c-dc66-4728-b09b-a88e22e95094" providerId="ADAL" clId="{421BD283-33D8-4C6C-821F-71755E863FA2}" dt="2026-09-16T12:45:45.433" v="3916"/>
-          <ac:spMkLst>
-            <pc:docMk/>
-            <pc:sldMk cId="4190029259" sldId="261"/>
-            <ac:spMk id="41" creationId="{27FEF0EB-867D-16D0-15C2-CD3994E3BBDE}"/>
-          </ac:spMkLst>
-        </pc:spChg>
-        <pc:spChg chg="mod">
-          <ac:chgData name="Steve Mutrux" userId="4fa98d0c-dc66-4728-b09b-a88e22e95094" providerId="ADAL" clId="{421BD283-33D8-4C6C-821F-71755E863FA2}" dt="2026-09-16T12:45:45.433" v="3916"/>
-          <ac:spMkLst>
-            <pc:docMk/>
-            <pc:sldMk cId="4190029259" sldId="261"/>
-            <ac:spMk id="42" creationId="{647F243E-B534-9042-3F18-1A8B8362CD16}"/>
-          </ac:spMkLst>
-        </pc:spChg>
-        <pc:spChg chg="mod">
-          <ac:chgData name="Steve Mutrux" userId="4fa98d0c-dc66-4728-b09b-a88e22e95094" providerId="ADAL" clId="{421BD283-33D8-4C6C-821F-71755E863FA2}" dt="2026-09-16T12:45:45.433" v="3916"/>
-          <ac:spMkLst>
-            <pc:docMk/>
-            <pc:sldMk cId="4190029259" sldId="261"/>
-            <ac:spMk id="43" creationId="{E3193F3F-9BF7-FAB2-D152-4360CC438B1F}"/>
-          </ac:spMkLst>
-        </pc:spChg>
         <pc:grpChg chg="add mod ord">
           <ac:chgData name="Steve Mutrux" userId="4fa98d0c-dc66-4728-b09b-a88e22e95094" providerId="ADAL" clId="{421BD283-33D8-4C6C-821F-71755E863FA2}" dt="2026-09-16T12:49:47.107" v="4002" actId="167"/>
           <ac:grpSpMkLst>
@@ -937,28 +657,12 @@
             <ac:grpSpMk id="35" creationId="{02C07118-8895-9FC1-B116-BC0E252E5B47}"/>
           </ac:grpSpMkLst>
         </pc:grpChg>
-        <pc:grpChg chg="add mod ord">
-          <ac:chgData name="Steve Mutrux" userId="4fa98d0c-dc66-4728-b09b-a88e22e95094" providerId="ADAL" clId="{421BD283-33D8-4C6C-821F-71755E863FA2}" dt="2026-09-16T12:46:41.590" v="3946" actId="1035"/>
+        <pc:grpChg chg="add del mod ord">
+          <ac:chgData name="Steve Mutrux" userId="4fa98d0c-dc66-4728-b09b-a88e22e95094" providerId="ADAL" clId="{421BD283-33D8-4C6C-821F-71755E863FA2}" dt="2026-09-18T13:27:17.206" v="5434" actId="478"/>
           <ac:grpSpMkLst>
             <pc:docMk/>
             <pc:sldMk cId="4190029259" sldId="261"/>
             <ac:grpSpMk id="36" creationId="{678ED05D-2A4B-61AA-076B-C0C666BA3F7F}"/>
-          </ac:grpSpMkLst>
-        </pc:grpChg>
-        <pc:grpChg chg="mod">
-          <ac:chgData name="Steve Mutrux" userId="4fa98d0c-dc66-4728-b09b-a88e22e95094" providerId="ADAL" clId="{421BD283-33D8-4C6C-821F-71755E863FA2}" dt="2026-09-16T12:45:45.433" v="3916"/>
-          <ac:grpSpMkLst>
-            <pc:docMk/>
-            <pc:sldMk cId="4190029259" sldId="261"/>
-            <ac:grpSpMk id="38" creationId="{927BA3C9-6617-CB9C-8987-32C8B8373228}"/>
-          </ac:grpSpMkLst>
-        </pc:grpChg>
-        <pc:grpChg chg="mod">
-          <ac:chgData name="Steve Mutrux" userId="4fa98d0c-dc66-4728-b09b-a88e22e95094" providerId="ADAL" clId="{421BD283-33D8-4C6C-821F-71755E863FA2}" dt="2026-09-16T12:45:45.433" v="3916"/>
-          <ac:grpSpMkLst>
-            <pc:docMk/>
-            <pc:sldMk cId="4190029259" sldId="261"/>
-            <ac:grpSpMk id="39" creationId="{7C9560F7-8264-7EF2-E259-3151A7DA378D}"/>
           </ac:grpSpMkLst>
         </pc:grpChg>
         <pc:picChg chg="add mod">
@@ -970,8 +674,8 @@
           </ac:picMkLst>
         </pc:picChg>
       </pc:sldChg>
-      <pc:sldChg chg="addSp delSp modSp add mod modTransition modAnim">
-        <pc:chgData name="Steve Mutrux" userId="4fa98d0c-dc66-4728-b09b-a88e22e95094" providerId="ADAL" clId="{421BD283-33D8-4C6C-821F-71755E863FA2}" dt="2026-09-17T18:31:50.337" v="5283"/>
+      <pc:sldChg chg="addSp delSp modSp add mod modTransition delAnim modAnim">
+        <pc:chgData name="Steve Mutrux" userId="4fa98d0c-dc66-4728-b09b-a88e22e95094" providerId="ADAL" clId="{421BD283-33D8-4C6C-821F-71755E863FA2}" dt="2026-09-18T13:41:02.534" v="5531"/>
         <pc:sldMkLst>
           <pc:docMk/>
           <pc:sldMk cId="1179066660" sldId="262"/>
@@ -984,36 +688,12 @@
             <ac:spMk id="2" creationId="{0BF92EDD-8888-E08D-FA4D-6A5E72D683AA}"/>
           </ac:spMkLst>
         </pc:spChg>
-        <pc:spChg chg="del">
-          <ac:chgData name="Steve Mutrux" userId="4fa98d0c-dc66-4728-b09b-a88e22e95094" providerId="ADAL" clId="{421BD283-33D8-4C6C-821F-71755E863FA2}" dt="2026-09-16T00:46:09.571" v="913" actId="478"/>
-          <ac:spMkLst>
-            <pc:docMk/>
-            <pc:sldMk cId="1179066660" sldId="262"/>
-            <ac:spMk id="2" creationId="{FB7C1DAA-388D-15E8-746C-4763F989A8BD}"/>
-          </ac:spMkLst>
-        </pc:spChg>
-        <pc:spChg chg="add del">
-          <ac:chgData name="Steve Mutrux" userId="4fa98d0c-dc66-4728-b09b-a88e22e95094" providerId="ADAL" clId="{421BD283-33D8-4C6C-821F-71755E863FA2}" dt="2026-09-16T00:42:27.997" v="857" actId="478"/>
-          <ac:spMkLst>
-            <pc:docMk/>
-            <pc:sldMk cId="1179066660" sldId="262"/>
-            <ac:spMk id="4" creationId="{454DAE8C-0239-F0A4-BA7E-4FE0FF2D9897}"/>
-          </ac:spMkLst>
-        </pc:spChg>
         <pc:spChg chg="mod ord">
           <ac:chgData name="Steve Mutrux" userId="4fa98d0c-dc66-4728-b09b-a88e22e95094" providerId="ADAL" clId="{421BD283-33D8-4C6C-821F-71755E863FA2}" dt="2026-09-17T18:26:33.719" v="5252" actId="167"/>
           <ac:spMkLst>
             <pc:docMk/>
             <pc:sldMk cId="1179066660" sldId="262"/>
             <ac:spMk id="4" creationId="{7B5338A2-686D-30BB-18B5-63EF3F6596C5}"/>
-          </ac:spMkLst>
-        </pc:spChg>
-        <pc:spChg chg="add del mod">
-          <ac:chgData name="Steve Mutrux" userId="4fa98d0c-dc66-4728-b09b-a88e22e95094" providerId="ADAL" clId="{421BD283-33D8-4C6C-821F-71755E863FA2}" dt="2026-09-16T12:37:36.048" v="3845" actId="478"/>
-          <ac:spMkLst>
-            <pc:docMk/>
-            <pc:sldMk cId="1179066660" sldId="262"/>
-            <ac:spMk id="6" creationId="{0CDADB92-84C5-A652-539F-1C8F5047D3A6}"/>
           </ac:spMkLst>
         </pc:spChg>
         <pc:spChg chg="mod ord">
@@ -1078,6 +758,22 @@
             <pc:docMk/>
             <pc:sldMk cId="1179066660" sldId="262"/>
             <ac:spMk id="15" creationId="{32AA332A-1FE7-6F8E-7382-0C05C5898DEB}"/>
+          </ac:spMkLst>
+        </pc:spChg>
+        <pc:spChg chg="add del mod">
+          <ac:chgData name="Steve Mutrux" userId="4fa98d0c-dc66-4728-b09b-a88e22e95094" providerId="ADAL" clId="{421BD283-33D8-4C6C-821F-71755E863FA2}" dt="2026-09-18T13:35:58.605" v="5498" actId="478"/>
+          <ac:spMkLst>
+            <pc:docMk/>
+            <pc:sldMk cId="1179066660" sldId="262"/>
+            <ac:spMk id="16" creationId="{53D74E12-2C2B-3942-AD34-533E4F469E04}"/>
+          </ac:spMkLst>
+        </pc:spChg>
+        <pc:spChg chg="add mod">
+          <ac:chgData name="Steve Mutrux" userId="4fa98d0c-dc66-4728-b09b-a88e22e95094" providerId="ADAL" clId="{421BD283-33D8-4C6C-821F-71755E863FA2}" dt="2026-09-18T13:36:39.419" v="5500" actId="1076"/>
+          <ac:spMkLst>
+            <pc:docMk/>
+            <pc:sldMk cId="1179066660" sldId="262"/>
+            <ac:spMk id="17" creationId="{0566E6FD-1225-A001-B1DE-97A48C17A76C}"/>
           </ac:spMkLst>
         </pc:spChg>
         <pc:spChg chg="add del mod">
@@ -1223,115 +919,12 @@
           <pc:docMk/>
           <pc:sldMk cId="2229155277" sldId="263"/>
         </pc:sldMkLst>
-        <pc:spChg chg="del">
-          <ac:chgData name="Steve Mutrux" userId="4fa98d0c-dc66-4728-b09b-a88e22e95094" providerId="ADAL" clId="{421BD283-33D8-4C6C-821F-71755E863FA2}" dt="2026-09-16T00:43:06.714" v="871" actId="478"/>
-          <ac:spMkLst>
-            <pc:docMk/>
-            <pc:sldMk cId="2229155277" sldId="263"/>
-            <ac:spMk id="2" creationId="{9E689793-48BC-E89A-D94F-DE97837489B8}"/>
-          </ac:spMkLst>
-        </pc:spChg>
-        <pc:spChg chg="add del">
-          <ac:chgData name="Steve Mutrux" userId="4fa98d0c-dc66-4728-b09b-a88e22e95094" providerId="ADAL" clId="{421BD283-33D8-4C6C-821F-71755E863FA2}" dt="2026-09-16T00:42:33.831" v="861" actId="478"/>
-          <ac:spMkLst>
-            <pc:docMk/>
-            <pc:sldMk cId="2229155277" sldId="263"/>
-            <ac:spMk id="4" creationId="{202A19DB-42DD-70EE-502D-F38B63917B61}"/>
-          </ac:spMkLst>
-        </pc:spChg>
         <pc:spChg chg="add del mod">
           <ac:chgData name="Steve Mutrux" userId="4fa98d0c-dc66-4728-b09b-a88e22e95094" providerId="ADAL" clId="{421BD283-33D8-4C6C-821F-71755E863FA2}" dt="2026-09-17T18:12:02.580" v="5210" actId="478"/>
           <ac:spMkLst>
             <pc:docMk/>
             <pc:sldMk cId="2229155277" sldId="263"/>
             <ac:spMk id="6" creationId="{3781749F-2DE4-6052-FCC1-9E1C1554116A}"/>
-          </ac:spMkLst>
-        </pc:spChg>
-      </pc:sldChg>
-      <pc:sldChg chg="addSp delSp modSp add del mod addAnim delAnim modAnim">
-        <pc:chgData name="Steve Mutrux" userId="4fa98d0c-dc66-4728-b09b-a88e22e95094" providerId="ADAL" clId="{421BD283-33D8-4C6C-821F-71755E863FA2}" dt="2026-09-16T02:08:34.656" v="2886" actId="47"/>
-        <pc:sldMkLst>
-          <pc:docMk/>
-          <pc:sldMk cId="2553109476" sldId="265"/>
-        </pc:sldMkLst>
-        <pc:spChg chg="del mod">
-          <ac:chgData name="Steve Mutrux" userId="4fa98d0c-dc66-4728-b09b-a88e22e95094" providerId="ADAL" clId="{421BD283-33D8-4C6C-821F-71755E863FA2}" dt="2026-09-16T00:46:27.819" v="920" actId="478"/>
-          <ac:spMkLst>
-            <pc:docMk/>
-            <pc:sldMk cId="2553109476" sldId="265"/>
-            <ac:spMk id="2" creationId="{9019CA75-AE86-96E8-F266-96497A23FD87}"/>
-          </ac:spMkLst>
-        </pc:spChg>
-        <pc:spChg chg="add del mod">
-          <ac:chgData name="Steve Mutrux" userId="4fa98d0c-dc66-4728-b09b-a88e22e95094" providerId="ADAL" clId="{421BD283-33D8-4C6C-821F-71755E863FA2}" dt="2026-09-16T01:46:29.971" v="2655" actId="478"/>
-          <ac:spMkLst>
-            <pc:docMk/>
-            <pc:sldMk cId="2553109476" sldId="265"/>
-            <ac:spMk id="4" creationId="{487D995F-8AAC-6993-74EB-723E6B5C0BFF}"/>
-          </ac:spMkLst>
-        </pc:spChg>
-        <pc:spChg chg="add del mod">
-          <ac:chgData name="Steve Mutrux" userId="4fa98d0c-dc66-4728-b09b-a88e22e95094" providerId="ADAL" clId="{421BD283-33D8-4C6C-821F-71755E863FA2}" dt="2026-09-16T01:46:31.802" v="2656" actId="478"/>
-          <ac:spMkLst>
-            <pc:docMk/>
-            <pc:sldMk cId="2553109476" sldId="265"/>
-            <ac:spMk id="5" creationId="{CC915FDB-49B9-2B7E-78DD-B03D9C91E7BB}"/>
-          </ac:spMkLst>
-        </pc:spChg>
-        <pc:spChg chg="add mod">
-          <ac:chgData name="Steve Mutrux" userId="4fa98d0c-dc66-4728-b09b-a88e22e95094" providerId="ADAL" clId="{421BD283-33D8-4C6C-821F-71755E863FA2}" dt="2026-09-16T01:48:58.599" v="2674" actId="1076"/>
-          <ac:spMkLst>
-            <pc:docMk/>
-            <pc:sldMk cId="2553109476" sldId="265"/>
-            <ac:spMk id="6" creationId="{61D39F87-CA97-9841-1740-3A707FCB0820}"/>
-          </ac:spMkLst>
-        </pc:spChg>
-        <pc:spChg chg="add mod">
-          <ac:chgData name="Steve Mutrux" userId="4fa98d0c-dc66-4728-b09b-a88e22e95094" providerId="ADAL" clId="{421BD283-33D8-4C6C-821F-71755E863FA2}" dt="2026-09-16T01:48:58.599" v="2674" actId="1076"/>
-          <ac:spMkLst>
-            <pc:docMk/>
-            <pc:sldMk cId="2553109476" sldId="265"/>
-            <ac:spMk id="8" creationId="{D2CAF332-5168-1014-A2BD-160BABC51106}"/>
-          </ac:spMkLst>
-        </pc:spChg>
-        <pc:spChg chg="add mod">
-          <ac:chgData name="Steve Mutrux" userId="4fa98d0c-dc66-4728-b09b-a88e22e95094" providerId="ADAL" clId="{421BD283-33D8-4C6C-821F-71755E863FA2}" dt="2026-09-16T02:05:29.497" v="2880" actId="1076"/>
-          <ac:spMkLst>
-            <pc:docMk/>
-            <pc:sldMk cId="2553109476" sldId="265"/>
-            <ac:spMk id="9" creationId="{C08C61C3-61B5-0EF2-19EE-F7A6E4779A21}"/>
-          </ac:spMkLst>
-        </pc:spChg>
-        <pc:spChg chg="add mod">
-          <ac:chgData name="Steve Mutrux" userId="4fa98d0c-dc66-4728-b09b-a88e22e95094" providerId="ADAL" clId="{421BD283-33D8-4C6C-821F-71755E863FA2}" dt="2026-09-16T02:05:29.497" v="2880" actId="1076"/>
-          <ac:spMkLst>
-            <pc:docMk/>
-            <pc:sldMk cId="2553109476" sldId="265"/>
-            <ac:spMk id="11" creationId="{EFE92541-AAEA-62B9-4C58-46C0C2B56148}"/>
-          </ac:spMkLst>
-        </pc:spChg>
-        <pc:spChg chg="add mod">
-          <ac:chgData name="Steve Mutrux" userId="4fa98d0c-dc66-4728-b09b-a88e22e95094" providerId="ADAL" clId="{421BD283-33D8-4C6C-821F-71755E863FA2}" dt="2026-09-16T02:05:29.497" v="2880" actId="1076"/>
-          <ac:spMkLst>
-            <pc:docMk/>
-            <pc:sldMk cId="2553109476" sldId="265"/>
-            <ac:spMk id="13" creationId="{C70B50C0-42DE-9FB3-0CDD-78007CFF07ED}"/>
-          </ac:spMkLst>
-        </pc:spChg>
-        <pc:spChg chg="add mod">
-          <ac:chgData name="Steve Mutrux" userId="4fa98d0c-dc66-4728-b09b-a88e22e95094" providerId="ADAL" clId="{421BD283-33D8-4C6C-821F-71755E863FA2}" dt="2026-09-16T02:05:29.497" v="2880" actId="1076"/>
-          <ac:spMkLst>
-            <pc:docMk/>
-            <pc:sldMk cId="2553109476" sldId="265"/>
-            <ac:spMk id="15" creationId="{37045FA2-1A16-FF5A-C8E5-885FD071F442}"/>
-          </ac:spMkLst>
-        </pc:spChg>
-        <pc:spChg chg="add mod">
-          <ac:chgData name="Steve Mutrux" userId="4fa98d0c-dc66-4728-b09b-a88e22e95094" providerId="ADAL" clId="{421BD283-33D8-4C6C-821F-71755E863FA2}" dt="2026-09-16T02:05:29.497" v="2880" actId="1076"/>
-          <ac:spMkLst>
-            <pc:docMk/>
-            <pc:sldMk cId="2553109476" sldId="265"/>
-            <ac:spMk id="17" creationId="{23F0DB1B-0A97-0CF7-C61A-82BBCBC2417E}"/>
           </ac:spMkLst>
         </pc:spChg>
       </pc:sldChg>
@@ -1349,36 +942,12 @@
             <ac:spMk id="2" creationId="{B41E6B40-CEDD-5E91-E2C3-A10C4F95297F}"/>
           </ac:spMkLst>
         </pc:spChg>
-        <pc:spChg chg="del mod">
-          <ac:chgData name="Steve Mutrux" userId="4fa98d0c-dc66-4728-b09b-a88e22e95094" providerId="ADAL" clId="{421BD283-33D8-4C6C-821F-71755E863FA2}" dt="2026-09-16T00:46:26.334" v="919" actId="478"/>
-          <ac:spMkLst>
-            <pc:docMk/>
-            <pc:sldMk cId="353601395" sldId="266"/>
-            <ac:spMk id="2" creationId="{F8626D69-4F4F-76B2-E4FB-EA5B5DF367A4}"/>
-          </ac:spMkLst>
-        </pc:spChg>
-        <pc:spChg chg="add mod">
-          <ac:chgData name="Steve Mutrux" userId="4fa98d0c-dc66-4728-b09b-a88e22e95094" providerId="ADAL" clId="{421BD283-33D8-4C6C-821F-71755E863FA2}" dt="2026-09-16T00:47:55.663" v="927" actId="2711"/>
-          <ac:spMkLst>
-            <pc:docMk/>
-            <pc:sldMk cId="353601395" sldId="266"/>
-            <ac:spMk id="4" creationId="{62300D51-2B10-B557-82F3-8A6662DF3624}"/>
-          </ac:spMkLst>
-        </pc:spChg>
         <pc:spChg chg="mod">
           <ac:chgData name="Steve Mutrux" userId="4fa98d0c-dc66-4728-b09b-a88e22e95094" providerId="ADAL" clId="{421BD283-33D8-4C6C-821F-71755E863FA2}" dt="2026-09-16T10:49:43.544" v="3076" actId="164"/>
           <ac:spMkLst>
             <pc:docMk/>
             <pc:sldMk cId="353601395" sldId="266"/>
             <ac:spMk id="5" creationId="{E0080525-2089-AE64-FE91-F3DE28817197}"/>
-          </ac:spMkLst>
-        </pc:spChg>
-        <pc:spChg chg="add del mod">
-          <ac:chgData name="Steve Mutrux" userId="4fa98d0c-dc66-4728-b09b-a88e22e95094" providerId="ADAL" clId="{421BD283-33D8-4C6C-821F-71755E863FA2}" dt="2026-09-16T00:36:14.750" v="705" actId="478"/>
-          <ac:spMkLst>
-            <pc:docMk/>
-            <pc:sldMk cId="353601395" sldId="266"/>
-            <ac:spMk id="5" creationId="{F48311E2-530A-88F3-A0F2-5F0110403BE1}"/>
           </ac:spMkLst>
         </pc:spChg>
         <pc:spChg chg="add mod">
@@ -1437,14 +1006,6 @@
             <ac:grpSpMk id="8" creationId="{6527594B-E4E4-7101-447D-FF3E322E113F}"/>
           </ac:grpSpMkLst>
         </pc:grpChg>
-        <pc:grpChg chg="add mod">
-          <ac:chgData name="Steve Mutrux" userId="4fa98d0c-dc66-4728-b09b-a88e22e95094" providerId="ADAL" clId="{421BD283-33D8-4C6C-821F-71755E863FA2}" dt="2026-09-16T10:49:43.544" v="3076" actId="164"/>
-          <ac:grpSpMkLst>
-            <pc:docMk/>
-            <pc:sldMk cId="353601395" sldId="266"/>
-            <ac:grpSpMk id="12" creationId="{9A540C8D-235A-5BDA-8C4D-4637D29BA67E}"/>
-          </ac:grpSpMkLst>
-        </pc:grpChg>
         <pc:grpChg chg="add mod ord">
           <ac:chgData name="Steve Mutrux" userId="4fa98d0c-dc66-4728-b09b-a88e22e95094" providerId="ADAL" clId="{421BD283-33D8-4C6C-821F-71755E863FA2}" dt="2026-09-16T11:20:21.614" v="3204" actId="1035"/>
           <ac:grpSpMkLst>
@@ -1460,36 +1021,12 @@
           <pc:docMk/>
           <pc:sldMk cId="557364214" sldId="267"/>
         </pc:sldMkLst>
-        <pc:spChg chg="del mod">
-          <ac:chgData name="Steve Mutrux" userId="4fa98d0c-dc66-4728-b09b-a88e22e95094" providerId="ADAL" clId="{421BD283-33D8-4C6C-821F-71755E863FA2}" dt="2026-09-16T00:46:24.274" v="918" actId="478"/>
-          <ac:spMkLst>
-            <pc:docMk/>
-            <pc:sldMk cId="557364214" sldId="267"/>
-            <ac:spMk id="2" creationId="{394BDA26-D74C-5390-5839-09EEB9016D38}"/>
-          </ac:spMkLst>
-        </pc:spChg>
         <pc:spChg chg="mod">
           <ac:chgData name="Steve Mutrux" userId="4fa98d0c-dc66-4728-b09b-a88e22e95094" providerId="ADAL" clId="{421BD283-33D8-4C6C-821F-71755E863FA2}" dt="2026-09-16T10:59:39.836" v="3123"/>
           <ac:spMkLst>
             <pc:docMk/>
             <pc:sldMk cId="557364214" sldId="267"/>
             <ac:spMk id="3" creationId="{F99D84A3-D329-9508-AD3B-65C0C4D1A8D7}"/>
-          </ac:spMkLst>
-        </pc:spChg>
-        <pc:spChg chg="add mod">
-          <ac:chgData name="Steve Mutrux" userId="4fa98d0c-dc66-4728-b09b-a88e22e95094" providerId="ADAL" clId="{421BD283-33D8-4C6C-821F-71755E863FA2}" dt="2026-09-16T00:48:02.005" v="929" actId="2711"/>
-          <ac:spMkLst>
-            <pc:docMk/>
-            <pc:sldMk cId="557364214" sldId="267"/>
-            <ac:spMk id="4" creationId="{D33647DA-DFAA-FEB8-E5A2-61DBE5F52AC1}"/>
-          </ac:spMkLst>
-        </pc:spChg>
-        <pc:spChg chg="add del mod">
-          <ac:chgData name="Steve Mutrux" userId="4fa98d0c-dc66-4728-b09b-a88e22e95094" providerId="ADAL" clId="{421BD283-33D8-4C6C-821F-71755E863FA2}" dt="2026-09-16T00:36:25.032" v="707" actId="478"/>
-          <ac:spMkLst>
-            <pc:docMk/>
-            <pc:sldMk cId="557364214" sldId="267"/>
-            <ac:spMk id="5" creationId="{12223178-2D4D-92AC-AE08-E324647AB193}"/>
           </ac:spMkLst>
         </pc:spChg>
         <pc:spChg chg="add mod">
@@ -1571,14 +1108,6 @@
           <pc:docMk/>
           <pc:sldMk cId="3893094920" sldId="268"/>
         </pc:sldMkLst>
-        <pc:spChg chg="del mod">
-          <ac:chgData name="Steve Mutrux" userId="4fa98d0c-dc66-4728-b09b-a88e22e95094" providerId="ADAL" clId="{421BD283-33D8-4C6C-821F-71755E863FA2}" dt="2026-09-16T00:46:20.737" v="917" actId="478"/>
-          <ac:spMkLst>
-            <pc:docMk/>
-            <pc:sldMk cId="3893094920" sldId="268"/>
-            <ac:spMk id="2" creationId="{5745D002-DA86-69FC-73CA-295EFFA512FA}"/>
-          </ac:spMkLst>
-        </pc:spChg>
         <pc:spChg chg="mod">
           <ac:chgData name="Steve Mutrux" userId="4fa98d0c-dc66-4728-b09b-a88e22e95094" providerId="ADAL" clId="{421BD283-33D8-4C6C-821F-71755E863FA2}" dt="2026-09-16T11:15:33.876" v="3184"/>
           <ac:spMkLst>
@@ -1593,14 +1122,6 @@
             <pc:docMk/>
             <pc:sldMk cId="3893094920" sldId="268"/>
             <ac:spMk id="4" creationId="{417B9F22-9B70-7974-674D-300CF5BE5CE0}"/>
-          </ac:spMkLst>
-        </pc:spChg>
-        <pc:spChg chg="add del mod">
-          <ac:chgData name="Steve Mutrux" userId="4fa98d0c-dc66-4728-b09b-a88e22e95094" providerId="ADAL" clId="{421BD283-33D8-4C6C-821F-71755E863FA2}" dt="2026-09-16T00:39:05.901" v="726" actId="478"/>
-          <ac:spMkLst>
-            <pc:docMk/>
-            <pc:sldMk cId="3893094920" sldId="268"/>
-            <ac:spMk id="5" creationId="{3F61CD58-FAF9-4198-A045-50D19461C2D1}"/>
           </ac:spMkLst>
         </pc:spChg>
         <pc:spChg chg="add mod">
@@ -1651,14 +1172,6 @@
             <ac:spMk id="12" creationId="{29B8C763-2DAA-F09B-C359-3E60819D6471}"/>
           </ac:spMkLst>
         </pc:spChg>
-        <pc:spChg chg="add del mod">
-          <ac:chgData name="Steve Mutrux" userId="4fa98d0c-dc66-4728-b09b-a88e22e95094" providerId="ADAL" clId="{421BD283-33D8-4C6C-821F-71755E863FA2}" dt="2026-09-16T11:43:35.324" v="3391" actId="478"/>
-          <ac:spMkLst>
-            <pc:docMk/>
-            <pc:sldMk cId="3893094920" sldId="268"/>
-            <ac:spMk id="16" creationId="{3743ACCA-66B3-D565-E029-33BBF5324BA0}"/>
-          </ac:spMkLst>
-        </pc:spChg>
         <pc:spChg chg="add mod">
           <ac:chgData name="Steve Mutrux" userId="4fa98d0c-dc66-4728-b09b-a88e22e95094" providerId="ADAL" clId="{421BD283-33D8-4C6C-821F-71755E863FA2}" dt="2026-09-16T11:50:29.684" v="3438" actId="207"/>
           <ac:spMkLst>
@@ -1699,14 +1212,6 @@
             <ac:grpSpMk id="7" creationId="{1BE5028B-5031-1BE7-7089-59F9FD58FFA3}"/>
           </ac:grpSpMkLst>
         </pc:grpChg>
-        <pc:picChg chg="add del mod">
-          <ac:chgData name="Steve Mutrux" userId="4fa98d0c-dc66-4728-b09b-a88e22e95094" providerId="ADAL" clId="{421BD283-33D8-4C6C-821F-71755E863FA2}" dt="2026-09-16T11:39:51.178" v="3352" actId="478"/>
-          <ac:picMkLst>
-            <pc:docMk/>
-            <pc:sldMk cId="3893094920" sldId="268"/>
-            <ac:picMk id="14" creationId="{613D9C09-344F-A6FC-EACD-21A9CD75039B}"/>
-          </ac:picMkLst>
-        </pc:picChg>
       </pc:sldChg>
       <pc:sldChg chg="addSp delSp modSp add mod modAnim">
         <pc:chgData name="Steve Mutrux" userId="4fa98d0c-dc66-4728-b09b-a88e22e95094" providerId="ADAL" clId="{421BD283-33D8-4C6C-821F-71755E863FA2}" dt="2026-09-17T18:32:43.712" v="5292" actId="1036"/>
@@ -1722,147 +1227,12 @@
             <ac:spMk id="2" creationId="{0C417CA4-9EEC-ECD8-CD9E-98428D852E50}"/>
           </ac:spMkLst>
         </pc:spChg>
-        <pc:spChg chg="del mod">
-          <ac:chgData name="Steve Mutrux" userId="4fa98d0c-dc66-4728-b09b-a88e22e95094" providerId="ADAL" clId="{421BD283-33D8-4C6C-821F-71755E863FA2}" dt="2026-09-16T00:43:08.967" v="872" actId="478"/>
-          <ac:spMkLst>
-            <pc:docMk/>
-            <pc:sldMk cId="1755182162" sldId="269"/>
-            <ac:spMk id="2" creationId="{98899C46-9E05-9DC8-C426-2C65F1A4E528}"/>
-          </ac:spMkLst>
-        </pc:spChg>
-        <pc:spChg chg="mod">
-          <ac:chgData name="Steve Mutrux" userId="4fa98d0c-dc66-4728-b09b-a88e22e95094" providerId="ADAL" clId="{421BD283-33D8-4C6C-821F-71755E863FA2}" dt="2026-09-16T13:07:27.413" v="4167"/>
-          <ac:spMkLst>
-            <pc:docMk/>
-            <pc:sldMk cId="1755182162" sldId="269"/>
-            <ac:spMk id="4" creationId="{17E330E2-C7BB-9957-1BD0-BD5B3A2EA6C8}"/>
-          </ac:spMkLst>
-        </pc:spChg>
-        <pc:spChg chg="add del">
-          <ac:chgData name="Steve Mutrux" userId="4fa98d0c-dc66-4728-b09b-a88e22e95094" providerId="ADAL" clId="{421BD283-33D8-4C6C-821F-71755E863FA2}" dt="2026-09-16T00:42:30.834" v="859" actId="478"/>
-          <ac:spMkLst>
-            <pc:docMk/>
-            <pc:sldMk cId="1755182162" sldId="269"/>
-            <ac:spMk id="4" creationId="{9D074477-3D77-AC6D-5F95-C6900C660E61}"/>
-          </ac:spMkLst>
-        </pc:spChg>
-        <pc:spChg chg="add del mod">
-          <ac:chgData name="Steve Mutrux" userId="4fa98d0c-dc66-4728-b09b-a88e22e95094" providerId="ADAL" clId="{421BD283-33D8-4C6C-821F-71755E863FA2}" dt="2026-09-16T12:37:52.508" v="3848" actId="478"/>
-          <ac:spMkLst>
-            <pc:docMk/>
-            <pc:sldMk cId="1755182162" sldId="269"/>
-            <ac:spMk id="6" creationId="{DE0AABFC-72E2-9D06-FC3C-5D2C8EFA51D3}"/>
-          </ac:spMkLst>
-        </pc:spChg>
         <pc:spChg chg="mod">
           <ac:chgData name="Steve Mutrux" userId="4fa98d0c-dc66-4728-b09b-a88e22e95094" providerId="ADAL" clId="{421BD283-33D8-4C6C-821F-71755E863FA2}" dt="2026-09-17T18:32:43.712" v="5292" actId="1036"/>
           <ac:spMkLst>
             <pc:docMk/>
             <pc:sldMk cId="1755182162" sldId="269"/>
             <ac:spMk id="8" creationId="{920A0F4F-D15B-3088-F2A1-AD48A979E786}"/>
-          </ac:spMkLst>
-        </pc:spChg>
-        <pc:spChg chg="add del mod">
-          <ac:chgData name="Steve Mutrux" userId="4fa98d0c-dc66-4728-b09b-a88e22e95094" providerId="ADAL" clId="{421BD283-33D8-4C6C-821F-71755E863FA2}" dt="2026-09-16T12:37:54.125" v="3850" actId="478"/>
-          <ac:spMkLst>
-            <pc:docMk/>
-            <pc:sldMk cId="1755182162" sldId="269"/>
-            <ac:spMk id="8" creationId="{99DF9151-06C6-FF03-633D-97C04C35ADF6}"/>
-          </ac:spMkLst>
-        </pc:spChg>
-        <pc:spChg chg="mod">
-          <ac:chgData name="Steve Mutrux" userId="4fa98d0c-dc66-4728-b09b-a88e22e95094" providerId="ADAL" clId="{421BD283-33D8-4C6C-821F-71755E863FA2}" dt="2026-09-16T13:07:27.413" v="4167"/>
-          <ac:spMkLst>
-            <pc:docMk/>
-            <pc:sldMk cId="1755182162" sldId="269"/>
-            <ac:spMk id="9" creationId="{8FB2219D-8984-6D14-3575-2AC897E844C2}"/>
-          </ac:spMkLst>
-        </pc:spChg>
-        <pc:spChg chg="mod">
-          <ac:chgData name="Steve Mutrux" userId="4fa98d0c-dc66-4728-b09b-a88e22e95094" providerId="ADAL" clId="{421BD283-33D8-4C6C-821F-71755E863FA2}" dt="2026-09-16T13:07:27.413" v="4167"/>
-          <ac:spMkLst>
-            <pc:docMk/>
-            <pc:sldMk cId="1755182162" sldId="269"/>
-            <ac:spMk id="10" creationId="{864B431D-FFF2-BAF2-ECD8-1A79B480132A}"/>
-          </ac:spMkLst>
-        </pc:spChg>
-        <pc:spChg chg="mod">
-          <ac:chgData name="Steve Mutrux" userId="4fa98d0c-dc66-4728-b09b-a88e22e95094" providerId="ADAL" clId="{421BD283-33D8-4C6C-821F-71755E863FA2}" dt="2026-09-16T13:07:27.413" v="4167"/>
-          <ac:spMkLst>
-            <pc:docMk/>
-            <pc:sldMk cId="1755182162" sldId="269"/>
-            <ac:spMk id="11" creationId="{2E0C468E-BF5D-E9DD-8973-2FFF3345D124}"/>
-          </ac:spMkLst>
-        </pc:spChg>
-        <pc:spChg chg="mod">
-          <ac:chgData name="Steve Mutrux" userId="4fa98d0c-dc66-4728-b09b-a88e22e95094" providerId="ADAL" clId="{421BD283-33D8-4C6C-821F-71755E863FA2}" dt="2026-09-16T13:07:27.413" v="4167"/>
-          <ac:spMkLst>
-            <pc:docMk/>
-            <pc:sldMk cId="1755182162" sldId="269"/>
-            <ac:spMk id="12" creationId="{BF9A3129-E99F-6B05-03CD-19E31BE66FC7}"/>
-          </ac:spMkLst>
-        </pc:spChg>
-        <pc:spChg chg="add mod">
-          <ac:chgData name="Steve Mutrux" userId="4fa98d0c-dc66-4728-b09b-a88e22e95094" providerId="ADAL" clId="{421BD283-33D8-4C6C-821F-71755E863FA2}" dt="2026-09-16T13:07:27.413" v="4167"/>
-          <ac:spMkLst>
-            <pc:docMk/>
-            <pc:sldMk cId="1755182162" sldId="269"/>
-            <ac:spMk id="13" creationId="{B324D36C-FBFE-738A-83C4-97AE78C8DC8D}"/>
-          </ac:spMkLst>
-        </pc:spChg>
-        <pc:grpChg chg="add mod ord">
-          <ac:chgData name="Steve Mutrux" userId="4fa98d0c-dc66-4728-b09b-a88e22e95094" providerId="ADAL" clId="{421BD283-33D8-4C6C-821F-71755E863FA2}" dt="2026-09-16T13:08:23.999" v="4176" actId="1036"/>
-          <ac:grpSpMkLst>
-            <pc:docMk/>
-            <pc:sldMk cId="1755182162" sldId="269"/>
-            <ac:grpSpMk id="3" creationId="{4AE5FAE7-F862-FFE2-1177-1977843DEE5E}"/>
-          </ac:grpSpMkLst>
-        </pc:grpChg>
-        <pc:grpChg chg="mod">
-          <ac:chgData name="Steve Mutrux" userId="4fa98d0c-dc66-4728-b09b-a88e22e95094" providerId="ADAL" clId="{421BD283-33D8-4C6C-821F-71755E863FA2}" dt="2026-09-16T13:07:27.413" v="4167"/>
-          <ac:grpSpMkLst>
-            <pc:docMk/>
-            <pc:sldMk cId="1755182162" sldId="269"/>
-            <ac:grpSpMk id="5" creationId="{C966A62F-07A6-3C53-CA5D-26D82C71F993}"/>
-          </ac:grpSpMkLst>
-        </pc:grpChg>
-        <pc:grpChg chg="mod">
-          <ac:chgData name="Steve Mutrux" userId="4fa98d0c-dc66-4728-b09b-a88e22e95094" providerId="ADAL" clId="{421BD283-33D8-4C6C-821F-71755E863FA2}" dt="2026-09-16T13:07:27.413" v="4167"/>
-          <ac:grpSpMkLst>
-            <pc:docMk/>
-            <pc:sldMk cId="1755182162" sldId="269"/>
-            <ac:grpSpMk id="7" creationId="{BE6D4B4F-EA40-EFCE-3EBE-A6B9E3703E70}"/>
-          </ac:grpSpMkLst>
-        </pc:grpChg>
-      </pc:sldChg>
-      <pc:sldChg chg="addSp delSp modSp add del mod ord">
-        <pc:chgData name="Steve Mutrux" userId="4fa98d0c-dc66-4728-b09b-a88e22e95094" providerId="ADAL" clId="{421BD283-33D8-4C6C-821F-71755E863FA2}" dt="2026-09-16T11:55:24.750" v="3457" actId="47"/>
-        <pc:sldMkLst>
-          <pc:docMk/>
-          <pc:sldMk cId="2049535269" sldId="270"/>
-        </pc:sldMkLst>
-        <pc:spChg chg="del mod">
-          <ac:chgData name="Steve Mutrux" userId="4fa98d0c-dc66-4728-b09b-a88e22e95094" providerId="ADAL" clId="{421BD283-33D8-4C6C-821F-71755E863FA2}" dt="2026-09-16T00:39:08.755" v="728" actId="478"/>
-          <ac:spMkLst>
-            <pc:docMk/>
-            <pc:sldMk cId="2049535269" sldId="270"/>
-            <ac:spMk id="2" creationId="{28A7DA79-A174-410A-3A18-3A2891D7BA9C}"/>
-          </ac:spMkLst>
-        </pc:spChg>
-        <pc:spChg chg="add del mod">
-          <ac:chgData name="Steve Mutrux" userId="4fa98d0c-dc66-4728-b09b-a88e22e95094" providerId="ADAL" clId="{421BD283-33D8-4C6C-821F-71755E863FA2}" dt="2026-09-16T11:55:21.524" v="3456" actId="478"/>
-          <ac:spMkLst>
-            <pc:docMk/>
-            <pc:sldMk cId="2049535269" sldId="270"/>
-            <ac:spMk id="4" creationId="{93D1B975-23AA-D332-2B01-31BE712CDC3A}"/>
-          </ac:spMkLst>
-        </pc:spChg>
-        <pc:spChg chg="add mod">
-          <ac:chgData name="Steve Mutrux" userId="4fa98d0c-dc66-4728-b09b-a88e22e95094" providerId="ADAL" clId="{421BD283-33D8-4C6C-821F-71755E863FA2}" dt="2026-09-16T00:49:00.986" v="935" actId="207"/>
-          <ac:spMkLst>
-            <pc:docMk/>
-            <pc:sldMk cId="2049535269" sldId="270"/>
-            <ac:spMk id="5" creationId="{C0C4D05C-8AD1-4702-C50E-A96CC6F600F5}"/>
           </ac:spMkLst>
         </pc:spChg>
       </pc:sldChg>
@@ -1872,14 +1242,6 @@
           <pc:docMk/>
           <pc:sldMk cId="1557603729" sldId="271"/>
         </pc:sldMkLst>
-        <pc:spChg chg="del mod">
-          <ac:chgData name="Steve Mutrux" userId="4fa98d0c-dc66-4728-b09b-a88e22e95094" providerId="ADAL" clId="{421BD283-33D8-4C6C-821F-71755E863FA2}" dt="2026-09-16T00:43:04.454" v="870" actId="478"/>
-          <ac:spMkLst>
-            <pc:docMk/>
-            <pc:sldMk cId="1557603729" sldId="271"/>
-            <ac:spMk id="2" creationId="{5B048899-C536-5880-E201-0706C75C8AF2}"/>
-          </ac:spMkLst>
-        </pc:spChg>
       </pc:sldChg>
       <pc:sldChg chg="addSp delSp modSp add mod ord modTransition addAnim delAnim modAnim">
         <pc:chgData name="Steve Mutrux" userId="4fa98d0c-dc66-4728-b09b-a88e22e95094" providerId="ADAL" clId="{421BD283-33D8-4C6C-821F-71755E863FA2}" dt="2026-09-16T15:12:57.325" v="4601" actId="20577"/>
@@ -1887,14 +1249,6 @@
           <pc:docMk/>
           <pc:sldMk cId="1194673410" sldId="272"/>
         </pc:sldMkLst>
-        <pc:spChg chg="del">
-          <ac:chgData name="Steve Mutrux" userId="4fa98d0c-dc66-4728-b09b-a88e22e95094" providerId="ADAL" clId="{421BD283-33D8-4C6C-821F-71755E863FA2}" dt="2026-09-16T00:46:14.001" v="915" actId="478"/>
-          <ac:spMkLst>
-            <pc:docMk/>
-            <pc:sldMk cId="1194673410" sldId="272"/>
-            <ac:spMk id="2" creationId="{939024A9-D0D1-B303-54D7-9B51CE76A009}"/>
-          </ac:spMkLst>
-        </pc:spChg>
         <pc:spChg chg="mod">
           <ac:chgData name="Steve Mutrux" userId="4fa98d0c-dc66-4728-b09b-a88e22e95094" providerId="ADAL" clId="{421BD283-33D8-4C6C-821F-71755E863FA2}" dt="2026-09-16T12:37:14.742" v="3840"/>
           <ac:spMkLst>
@@ -1911,36 +1265,12 @@
             <ac:spMk id="4" creationId="{3B4D9C07-AB84-F380-DB8D-F89B4514320F}"/>
           </ac:spMkLst>
         </pc:spChg>
-        <pc:spChg chg="add del mod">
-          <ac:chgData name="Steve Mutrux" userId="4fa98d0c-dc66-4728-b09b-a88e22e95094" providerId="ADAL" clId="{421BD283-33D8-4C6C-821F-71755E863FA2}" dt="2026-09-16T00:42:19.867" v="853" actId="478"/>
-          <ac:spMkLst>
-            <pc:docMk/>
-            <pc:sldMk cId="1194673410" sldId="272"/>
-            <ac:spMk id="4" creationId="{64A8FB32-00B1-B038-6ABD-C376D8B9CD8A}"/>
-          </ac:spMkLst>
-        </pc:spChg>
-        <pc:spChg chg="add del">
-          <ac:chgData name="Steve Mutrux" userId="4fa98d0c-dc66-4728-b09b-a88e22e95094" providerId="ADAL" clId="{421BD283-33D8-4C6C-821F-71755E863FA2}" dt="2026-09-16T00:39:13.953" v="733" actId="22"/>
-          <ac:spMkLst>
-            <pc:docMk/>
-            <pc:sldMk cId="1194673410" sldId="272"/>
-            <ac:spMk id="6" creationId="{6B180316-7B74-BE2C-6203-1CA10C2658DF}"/>
-          </ac:spMkLst>
-        </pc:spChg>
         <pc:spChg chg="mod">
           <ac:chgData name="Steve Mutrux" userId="4fa98d0c-dc66-4728-b09b-a88e22e95094" providerId="ADAL" clId="{421BD283-33D8-4C6C-821F-71755E863FA2}" dt="2026-09-16T12:37:14.742" v="3840"/>
           <ac:spMkLst>
             <pc:docMk/>
             <pc:sldMk cId="1194673410" sldId="272"/>
             <ac:spMk id="7" creationId="{401B0EFA-3ABB-A0C0-4A92-30CDDB9D660C}"/>
-          </ac:spMkLst>
-        </pc:spChg>
-        <pc:spChg chg="add del mod">
-          <ac:chgData name="Steve Mutrux" userId="4fa98d0c-dc66-4728-b09b-a88e22e95094" providerId="ADAL" clId="{421BD283-33D8-4C6C-821F-71755E863FA2}" dt="2026-09-16T12:37:24.303" v="3841" actId="478"/>
-          <ac:spMkLst>
-            <pc:docMk/>
-            <pc:sldMk cId="1194673410" sldId="272"/>
-            <ac:spMk id="8" creationId="{6D7F7FB9-948B-2F04-F5F0-3961BF3B13D4}"/>
           </ac:spMkLst>
         </pc:spChg>
         <pc:spChg chg="add mod">
@@ -2025,7 +1355,7 @@
         </pc:grpChg>
       </pc:sldChg>
       <pc:sldChg chg="addSp modSp add mod modTransition modAnim modNotesTx">
-        <pc:chgData name="Steve Mutrux" userId="4fa98d0c-dc66-4728-b09b-a88e22e95094" providerId="ADAL" clId="{421BD283-33D8-4C6C-821F-71755E863FA2}" dt="2026-09-17T18:13:01.302" v="5214"/>
+        <pc:chgData name="Steve Mutrux" userId="4fa98d0c-dc66-4728-b09b-a88e22e95094" providerId="ADAL" clId="{421BD283-33D8-4C6C-821F-71755E863FA2}" dt="2026-09-18T13:07:30.878" v="5377" actId="20577"/>
         <pc:sldMkLst>
           <pc:docMk/>
           <pc:sldMk cId="3925825761" sldId="273"/>
@@ -2078,12 +1408,20 @@
             <ac:spMk id="11" creationId="{E025BE1E-2CB8-69B3-6BA0-3467CFC07D78}"/>
           </ac:spMkLst>
         </pc:spChg>
-        <pc:spChg chg="add">
-          <ac:chgData name="Steve Mutrux" userId="4fa98d0c-dc66-4728-b09b-a88e22e95094" providerId="ADAL" clId="{421BD283-33D8-4C6C-821F-71755E863FA2}" dt="2026-09-16T10:59:01.665" v="3121" actId="22"/>
+        <pc:spChg chg="add mod">
+          <ac:chgData name="Steve Mutrux" userId="4fa98d0c-dc66-4728-b09b-a88e22e95094" providerId="ADAL" clId="{421BD283-33D8-4C6C-821F-71755E863FA2}" dt="2026-09-18T13:06:08.536" v="5313"/>
           <ac:spMkLst>
             <pc:docMk/>
             <pc:sldMk cId="3925825761" sldId="273"/>
-            <ac:spMk id="13" creationId="{A83B4F55-9AA6-B35F-8AE6-E69B5CA807AD}"/>
+            <ac:spMk id="12" creationId="{E30B574F-F47B-4F5A-373F-0556028B16A8}"/>
+          </ac:spMkLst>
+        </pc:spChg>
+        <pc:spChg chg="add mod">
+          <ac:chgData name="Steve Mutrux" userId="4fa98d0c-dc66-4728-b09b-a88e22e95094" providerId="ADAL" clId="{421BD283-33D8-4C6C-821F-71755E863FA2}" dt="2026-09-18T13:07:10.437" v="5376" actId="20577"/>
+          <ac:spMkLst>
+            <pc:docMk/>
+            <pc:sldMk cId="3925825761" sldId="273"/>
+            <ac:spMk id="13" creationId="{B8742619-7F61-460A-E048-5628FDF4AD01}"/>
           </ac:spMkLst>
         </pc:spChg>
         <pc:grpChg chg="add mod ord">
@@ -2141,14 +1479,6 @@
             <ac:spMk id="7" creationId="{B4A8BA7C-8C7E-202C-DF5F-646269DBFFF3}"/>
           </ac:spMkLst>
         </pc:spChg>
-        <pc:spChg chg="add">
-          <ac:chgData name="Steve Mutrux" userId="4fa98d0c-dc66-4728-b09b-a88e22e95094" providerId="ADAL" clId="{421BD283-33D8-4C6C-821F-71755E863FA2}" dt="2026-09-16T10:59:03.334" v="3122" actId="22"/>
-          <ac:spMkLst>
-            <pc:docMk/>
-            <pc:sldMk cId="859702855" sldId="274"/>
-            <ac:spMk id="8" creationId="{34A4E6D7-12E2-CDB7-3EAA-1C672D1D7E69}"/>
-          </ac:spMkLst>
-        </pc:spChg>
         <pc:spChg chg="ord">
           <ac:chgData name="Steve Mutrux" userId="4fa98d0c-dc66-4728-b09b-a88e22e95094" providerId="ADAL" clId="{421BD283-33D8-4C6C-821F-71755E863FA2}" dt="2026-09-16T02:11:51.270" v="2916" actId="167"/>
           <ac:spMkLst>
@@ -2163,62 +1493,6 @@
             <pc:docMk/>
             <pc:sldMk cId="859702855" sldId="274"/>
             <ac:spMk id="11" creationId="{01FD20CE-420D-5D93-0EE6-EC9658D1E720}"/>
-          </ac:spMkLst>
-        </pc:spChg>
-        <pc:spChg chg="del mod">
-          <ac:chgData name="Steve Mutrux" userId="4fa98d0c-dc66-4728-b09b-a88e22e95094" providerId="ADAL" clId="{421BD283-33D8-4C6C-821F-71755E863FA2}" dt="2026-09-16T02:08:39.108" v="2889" actId="478"/>
-          <ac:spMkLst>
-            <pc:docMk/>
-            <pc:sldMk cId="859702855" sldId="274"/>
-            <ac:spMk id="18" creationId="{3288F7ED-2806-9B1F-B32B-CB7C59B37C2B}"/>
-          </ac:spMkLst>
-        </pc:spChg>
-        <pc:spChg chg="del">
-          <ac:chgData name="Steve Mutrux" userId="4fa98d0c-dc66-4728-b09b-a88e22e95094" providerId="ADAL" clId="{421BD283-33D8-4C6C-821F-71755E863FA2}" dt="2026-09-16T02:08:41.758" v="2892" actId="478"/>
-          <ac:spMkLst>
-            <pc:docMk/>
-            <pc:sldMk cId="859702855" sldId="274"/>
-            <ac:spMk id="19" creationId="{C94A94E7-DDB7-3325-1AEA-1A201F538B5C}"/>
-          </ac:spMkLst>
-        </pc:spChg>
-        <pc:spChg chg="del">
-          <ac:chgData name="Steve Mutrux" userId="4fa98d0c-dc66-4728-b09b-a88e22e95094" providerId="ADAL" clId="{421BD283-33D8-4C6C-821F-71755E863FA2}" dt="2026-09-16T02:08:41.051" v="2891" actId="478"/>
-          <ac:spMkLst>
-            <pc:docMk/>
-            <pc:sldMk cId="859702855" sldId="274"/>
-            <ac:spMk id="20" creationId="{5980DB84-AECE-13E2-9066-0C115732599E}"/>
-          </ac:spMkLst>
-        </pc:spChg>
-        <pc:spChg chg="del">
-          <ac:chgData name="Steve Mutrux" userId="4fa98d0c-dc66-4728-b09b-a88e22e95094" providerId="ADAL" clId="{421BD283-33D8-4C6C-821F-71755E863FA2}" dt="2026-09-16T02:08:43.032" v="2893" actId="478"/>
-          <ac:spMkLst>
-            <pc:docMk/>
-            <pc:sldMk cId="859702855" sldId="274"/>
-            <ac:spMk id="21" creationId="{095E80ED-3582-BEB8-866C-476BD40548A5}"/>
-          </ac:spMkLst>
-        </pc:spChg>
-        <pc:spChg chg="del">
-          <ac:chgData name="Steve Mutrux" userId="4fa98d0c-dc66-4728-b09b-a88e22e95094" providerId="ADAL" clId="{421BD283-33D8-4C6C-821F-71755E863FA2}" dt="2026-09-16T02:08:44.321" v="2895" actId="478"/>
-          <ac:spMkLst>
-            <pc:docMk/>
-            <pc:sldMk cId="859702855" sldId="274"/>
-            <ac:spMk id="22" creationId="{C2BB10E2-8380-7431-56F7-929B0BDA422C}"/>
-          </ac:spMkLst>
-        </pc:spChg>
-        <pc:spChg chg="del">
-          <ac:chgData name="Steve Mutrux" userId="4fa98d0c-dc66-4728-b09b-a88e22e95094" providerId="ADAL" clId="{421BD283-33D8-4C6C-821F-71755E863FA2}" dt="2026-09-16T02:08:40.108" v="2890" actId="478"/>
-          <ac:spMkLst>
-            <pc:docMk/>
-            <pc:sldMk cId="859702855" sldId="274"/>
-            <ac:spMk id="23" creationId="{B456D9DD-B0E7-2CC1-7A73-32F948777BEE}"/>
-          </ac:spMkLst>
-        </pc:spChg>
-        <pc:spChg chg="del">
-          <ac:chgData name="Steve Mutrux" userId="4fa98d0c-dc66-4728-b09b-a88e22e95094" providerId="ADAL" clId="{421BD283-33D8-4C6C-821F-71755E863FA2}" dt="2026-09-16T02:08:43.717" v="2894" actId="478"/>
-          <ac:spMkLst>
-            <pc:docMk/>
-            <pc:sldMk cId="859702855" sldId="274"/>
-            <ac:spMk id="24" creationId="{E1864E2E-F8F9-C970-D221-B315584E2BE0}"/>
           </ac:spMkLst>
         </pc:spChg>
         <pc:grpChg chg="add mod">
@@ -2300,22 +1574,6 @@
             <ac:spMk id="11" creationId="{86CD9824-3652-9E7A-9200-E55A24490667}"/>
           </ac:spMkLst>
         </pc:spChg>
-        <pc:spChg chg="add del mod">
-          <ac:chgData name="Steve Mutrux" userId="4fa98d0c-dc66-4728-b09b-a88e22e95094" providerId="ADAL" clId="{421BD283-33D8-4C6C-821F-71755E863FA2}" dt="2026-09-16T14:46:44.967" v="4291" actId="478"/>
-          <ac:spMkLst>
-            <pc:docMk/>
-            <pc:sldMk cId="1282376480" sldId="275"/>
-            <ac:spMk id="12" creationId="{7365D203-7450-4585-FA21-1D2F0D181061}"/>
-          </ac:spMkLst>
-        </pc:spChg>
-        <pc:spChg chg="add del">
-          <ac:chgData name="Steve Mutrux" userId="4fa98d0c-dc66-4728-b09b-a88e22e95094" providerId="ADAL" clId="{421BD283-33D8-4C6C-821F-71755E863FA2}" dt="2026-09-16T12:00:20.735" v="3516" actId="22"/>
-          <ac:spMkLst>
-            <pc:docMk/>
-            <pc:sldMk cId="1282376480" sldId="275"/>
-            <ac:spMk id="13" creationId="{2990AC67-FCBD-4F2C-5BAF-E46B8946B354}"/>
-          </ac:spMkLst>
-        </pc:spChg>
         <pc:spChg chg="add mod">
           <ac:chgData name="Steve Mutrux" userId="4fa98d0c-dc66-4728-b09b-a88e22e95094" providerId="ADAL" clId="{421BD283-33D8-4C6C-821F-71755E863FA2}" dt="2026-09-16T14:53:42.755" v="4325" actId="313"/>
           <ac:spMkLst>
@@ -2330,54 +1588,6 @@
             <pc:docMk/>
             <pc:sldMk cId="1282376480" sldId="275"/>
             <ac:spMk id="15" creationId="{2A102AA6-30F9-B970-B5F0-47685C884BF3}"/>
-          </ac:spMkLst>
-        </pc:spChg>
-        <pc:spChg chg="add del mod ord">
-          <ac:chgData name="Steve Mutrux" userId="4fa98d0c-dc66-4728-b09b-a88e22e95094" providerId="ADAL" clId="{421BD283-33D8-4C6C-821F-71755E863FA2}" dt="2026-09-16T12:23:55.409" v="3690" actId="478"/>
-          <ac:spMkLst>
-            <pc:docMk/>
-            <pc:sldMk cId="1282376480" sldId="275"/>
-            <ac:spMk id="16" creationId="{C2C564DB-1FBC-25D3-A6AE-EA74E62E6576}"/>
-          </ac:spMkLst>
-        </pc:spChg>
-        <pc:spChg chg="mod">
-          <ac:chgData name="Steve Mutrux" userId="4fa98d0c-dc66-4728-b09b-a88e22e95094" providerId="ADAL" clId="{421BD283-33D8-4C6C-821F-71755E863FA2}" dt="2026-09-16T12:11:17.292" v="3597"/>
-          <ac:spMkLst>
-            <pc:docMk/>
-            <pc:sldMk cId="1282376480" sldId="275"/>
-            <ac:spMk id="18" creationId="{2810B617-BD47-182C-8C87-AFAF91D9166A}"/>
-          </ac:spMkLst>
-        </pc:spChg>
-        <pc:spChg chg="mod">
-          <ac:chgData name="Steve Mutrux" userId="4fa98d0c-dc66-4728-b09b-a88e22e95094" providerId="ADAL" clId="{421BD283-33D8-4C6C-821F-71755E863FA2}" dt="2026-09-16T12:11:17.292" v="3597"/>
-          <ac:spMkLst>
-            <pc:docMk/>
-            <pc:sldMk cId="1282376480" sldId="275"/>
-            <ac:spMk id="19" creationId="{73B48DB9-038F-C992-748E-1D496A439FF8}"/>
-          </ac:spMkLst>
-        </pc:spChg>
-        <pc:spChg chg="mod">
-          <ac:chgData name="Steve Mutrux" userId="4fa98d0c-dc66-4728-b09b-a88e22e95094" providerId="ADAL" clId="{421BD283-33D8-4C6C-821F-71755E863FA2}" dt="2026-09-16T12:11:17.292" v="3597"/>
-          <ac:spMkLst>
-            <pc:docMk/>
-            <pc:sldMk cId="1282376480" sldId="275"/>
-            <ac:spMk id="21" creationId="{D12486B1-1989-A189-8D57-ECAA2EE48907}"/>
-          </ac:spMkLst>
-        </pc:spChg>
-        <pc:spChg chg="mod">
-          <ac:chgData name="Steve Mutrux" userId="4fa98d0c-dc66-4728-b09b-a88e22e95094" providerId="ADAL" clId="{421BD283-33D8-4C6C-821F-71755E863FA2}" dt="2026-09-16T12:11:17.292" v="3597"/>
-          <ac:spMkLst>
-            <pc:docMk/>
-            <pc:sldMk cId="1282376480" sldId="275"/>
-            <ac:spMk id="22" creationId="{59F01C92-0195-6DB9-FB70-BF6565E25C5C}"/>
-          </ac:spMkLst>
-        </pc:spChg>
-        <pc:spChg chg="add mod ord">
-          <ac:chgData name="Steve Mutrux" userId="4fa98d0c-dc66-4728-b09b-a88e22e95094" providerId="ADAL" clId="{421BD283-33D8-4C6C-821F-71755E863FA2}" dt="2026-09-16T12:22:16.495" v="3681" actId="1076"/>
-          <ac:spMkLst>
-            <pc:docMk/>
-            <pc:sldMk cId="1282376480" sldId="275"/>
-            <ac:spMk id="23" creationId="{E436A718-8358-EAE3-992C-1ECF351B3D76}"/>
           </ac:spMkLst>
         </pc:spChg>
         <pc:spChg chg="add mod ord">
@@ -2420,46 +1630,6 @@
             <ac:spMk id="30" creationId="{229478A4-1D16-02FA-C421-497AC729E0B4}"/>
           </ac:spMkLst>
         </pc:spChg>
-        <pc:spChg chg="mod">
-          <ac:chgData name="Steve Mutrux" userId="4fa98d0c-dc66-4728-b09b-a88e22e95094" providerId="ADAL" clId="{421BD283-33D8-4C6C-821F-71755E863FA2}" dt="2026-09-16T12:24:58.707" v="3699"/>
-          <ac:spMkLst>
-            <pc:docMk/>
-            <pc:sldMk cId="1282376480" sldId="275"/>
-            <ac:spMk id="32" creationId="{9EA8A073-09E8-0C56-5722-A0079B637CBC}"/>
-          </ac:spMkLst>
-        </pc:spChg>
-        <pc:spChg chg="mod">
-          <ac:chgData name="Steve Mutrux" userId="4fa98d0c-dc66-4728-b09b-a88e22e95094" providerId="ADAL" clId="{421BD283-33D8-4C6C-821F-71755E863FA2}" dt="2026-09-16T12:24:58.707" v="3699"/>
-          <ac:spMkLst>
-            <pc:docMk/>
-            <pc:sldMk cId="1282376480" sldId="275"/>
-            <ac:spMk id="35" creationId="{F3381747-274F-E391-0C0E-7F24940037C7}"/>
-          </ac:spMkLst>
-        </pc:spChg>
-        <pc:spChg chg="mod">
-          <ac:chgData name="Steve Mutrux" userId="4fa98d0c-dc66-4728-b09b-a88e22e95094" providerId="ADAL" clId="{421BD283-33D8-4C6C-821F-71755E863FA2}" dt="2026-09-16T12:24:58.707" v="3699"/>
-          <ac:spMkLst>
-            <pc:docMk/>
-            <pc:sldMk cId="1282376480" sldId="275"/>
-            <ac:spMk id="36" creationId="{07732835-D478-6AED-CFD5-49483D5C18FC}"/>
-          </ac:spMkLst>
-        </pc:spChg>
-        <pc:spChg chg="mod">
-          <ac:chgData name="Steve Mutrux" userId="4fa98d0c-dc66-4728-b09b-a88e22e95094" providerId="ADAL" clId="{421BD283-33D8-4C6C-821F-71755E863FA2}" dt="2026-09-16T12:24:58.707" v="3699"/>
-          <ac:spMkLst>
-            <pc:docMk/>
-            <pc:sldMk cId="1282376480" sldId="275"/>
-            <ac:spMk id="37" creationId="{592D5ECC-9393-CD51-1B41-31CFF0C8BED4}"/>
-          </ac:spMkLst>
-        </pc:spChg>
-        <pc:spChg chg="mod">
-          <ac:chgData name="Steve Mutrux" userId="4fa98d0c-dc66-4728-b09b-a88e22e95094" providerId="ADAL" clId="{421BD283-33D8-4C6C-821F-71755E863FA2}" dt="2026-09-16T12:24:58.707" v="3699"/>
-          <ac:spMkLst>
-            <pc:docMk/>
-            <pc:sldMk cId="1282376480" sldId="275"/>
-            <ac:spMk id="38" creationId="{1C50DB5E-EB88-8BCE-9F19-DD7D53E314AE}"/>
-          </ac:spMkLst>
-        </pc:spChg>
         <pc:spChg chg="add mod">
           <ac:chgData name="Steve Mutrux" userId="4fa98d0c-dc66-4728-b09b-a88e22e95094" providerId="ADAL" clId="{421BD283-33D8-4C6C-821F-71755E863FA2}" dt="2026-09-16T12:25:24.487" v="3704" actId="1076"/>
           <ac:spMkLst>
@@ -2492,22 +1662,6 @@
             <ac:grpSpMk id="6" creationId="{C5A3E71C-2C37-F475-DC4F-8D6D7009C8BC}"/>
           </ac:grpSpMkLst>
         </pc:grpChg>
-        <pc:grpChg chg="add del mod ord">
-          <ac:chgData name="Steve Mutrux" userId="4fa98d0c-dc66-4728-b09b-a88e22e95094" providerId="ADAL" clId="{421BD283-33D8-4C6C-821F-71755E863FA2}" dt="2026-09-16T12:23:55.409" v="3690" actId="478"/>
-          <ac:grpSpMkLst>
-            <pc:docMk/>
-            <pc:sldMk cId="1282376480" sldId="275"/>
-            <ac:grpSpMk id="17" creationId="{BF539E30-565E-CF84-2687-8CEFE76F5106}"/>
-          </ac:grpSpMkLst>
-        </pc:grpChg>
-        <pc:grpChg chg="add del mod ord">
-          <ac:chgData name="Steve Mutrux" userId="4fa98d0c-dc66-4728-b09b-a88e22e95094" providerId="ADAL" clId="{421BD283-33D8-4C6C-821F-71755E863FA2}" dt="2026-09-16T12:23:55.409" v="3690" actId="478"/>
-          <ac:grpSpMkLst>
-            <pc:docMk/>
-            <pc:sldMk cId="1282376480" sldId="275"/>
-            <ac:grpSpMk id="20" creationId="{7F01BE72-3A0B-8F2A-A6E2-8EED937232C1}"/>
-          </ac:grpSpMkLst>
-        </pc:grpChg>
         <pc:grpChg chg="add mod ord">
           <ac:chgData name="Steve Mutrux" userId="4fa98d0c-dc66-4728-b09b-a88e22e95094" providerId="ADAL" clId="{421BD283-33D8-4C6C-821F-71755E863FA2}" dt="2026-09-16T12:24:17.142" v="3695" actId="167"/>
           <ac:grpSpMkLst>
@@ -2524,30 +1678,28 @@
             <ac:grpSpMk id="28" creationId="{1695E878-11B6-9BA7-CB67-A5E9C59FCFD7}"/>
           </ac:grpSpMkLst>
         </pc:grpChg>
-        <pc:grpChg chg="add del mod">
-          <ac:chgData name="Steve Mutrux" userId="4fa98d0c-dc66-4728-b09b-a88e22e95094" providerId="ADAL" clId="{421BD283-33D8-4C6C-821F-71755E863FA2}" dt="2026-09-16T12:25:08.750" v="3701" actId="478"/>
-          <ac:grpSpMkLst>
+      </pc:sldChg>
+      <pc:sldChg chg="modSp add mod">
+        <pc:chgData name="Steve Mutrux" userId="4fa98d0c-dc66-4728-b09b-a88e22e95094" providerId="ADAL" clId="{421BD283-33D8-4C6C-821F-71755E863FA2}" dt="2026-09-18T13:26:25.551" v="5430" actId="1038"/>
+        <pc:sldMkLst>
+          <pc:docMk/>
+          <pc:sldMk cId="2234467840" sldId="277"/>
+        </pc:sldMkLst>
+        <pc:picChg chg="mod">
+          <ac:chgData name="Steve Mutrux" userId="4fa98d0c-dc66-4728-b09b-a88e22e95094" providerId="ADAL" clId="{421BD283-33D8-4C6C-821F-71755E863FA2}" dt="2026-09-18T13:26:25.551" v="5430" actId="1038"/>
+          <ac:picMkLst>
             <pc:docMk/>
-            <pc:sldMk cId="1282376480" sldId="275"/>
-            <ac:grpSpMk id="31" creationId="{3D8FAB52-3D18-E0B2-3D74-BA5D5C52AD4C}"/>
-          </ac:grpSpMkLst>
-        </pc:grpChg>
-        <pc:grpChg chg="mod">
-          <ac:chgData name="Steve Mutrux" userId="4fa98d0c-dc66-4728-b09b-a88e22e95094" providerId="ADAL" clId="{421BD283-33D8-4C6C-821F-71755E863FA2}" dt="2026-09-16T12:24:58.707" v="3699"/>
-          <ac:grpSpMkLst>
-            <pc:docMk/>
-            <pc:sldMk cId="1282376480" sldId="275"/>
-            <ac:grpSpMk id="33" creationId="{84E88F88-5CC0-31C2-113D-12B3B4F64E90}"/>
-          </ac:grpSpMkLst>
-        </pc:grpChg>
-        <pc:grpChg chg="mod">
-          <ac:chgData name="Steve Mutrux" userId="4fa98d0c-dc66-4728-b09b-a88e22e95094" providerId="ADAL" clId="{421BD283-33D8-4C6C-821F-71755E863FA2}" dt="2026-09-16T12:24:58.707" v="3699"/>
-          <ac:grpSpMkLst>
-            <pc:docMk/>
-            <pc:sldMk cId="1282376480" sldId="275"/>
-            <ac:grpSpMk id="34" creationId="{60BE5842-29D4-7D9A-B0A8-9F8E433669E9}"/>
-          </ac:grpSpMkLst>
-        </pc:grpChg>
+            <pc:sldMk cId="2234467840" sldId="277"/>
+            <ac:picMk id="14" creationId="{21B69710-7364-55BB-57A9-EA2F37650EA3}"/>
+          </ac:picMkLst>
+        </pc:picChg>
+      </pc:sldChg>
+      <pc:sldChg chg="add del">
+        <pc:chgData name="Steve Mutrux" userId="4fa98d0c-dc66-4728-b09b-a88e22e95094" providerId="ADAL" clId="{421BD283-33D8-4C6C-821F-71755E863FA2}" dt="2026-09-18T13:08:14.503" v="5379"/>
+        <pc:sldMkLst>
+          <pc:docMk/>
+          <pc:sldMk cId="3625860367" sldId="277"/>
+        </pc:sldMkLst>
       </pc:sldChg>
     </pc:docChg>
   </pc:docChgLst>
@@ -2625,22 +1777,6 @@
           <pc:docMk/>
           <pc:sldMk cId="4190029259" sldId="261"/>
         </pc:sldMkLst>
-        <pc:spChg chg="add del mod">
-          <ac:chgData name="Steve Mutrux" userId="4fa98d0c-dc66-4728-b09b-a88e22e95094" providerId="ADAL" clId="{49582639-0C98-48DF-B1BF-6D8A1DF6014B}" dt="2026-09-16T18:10:59.135" v="251" actId="478"/>
-          <ac:spMkLst>
-            <pc:docMk/>
-            <pc:sldMk cId="4190029259" sldId="261"/>
-            <ac:spMk id="6" creationId="{FB30F6FA-7C2A-AE1A-7D4F-93596AF37B8B}"/>
-          </ac:spMkLst>
-        </pc:spChg>
-        <pc:spChg chg="add del mod">
-          <ac:chgData name="Steve Mutrux" userId="4fa98d0c-dc66-4728-b09b-a88e22e95094" providerId="ADAL" clId="{49582639-0C98-48DF-B1BF-6D8A1DF6014B}" dt="2026-09-16T18:11:01.689" v="252" actId="478"/>
-          <ac:spMkLst>
-            <pc:docMk/>
-            <pc:sldMk cId="4190029259" sldId="261"/>
-            <ac:spMk id="14" creationId="{0F545FEC-2A17-5DFA-CE8E-F918F6BC8395}"/>
-          </ac:spMkLst>
-        </pc:spChg>
       </pc:sldChg>
       <pc:sldChg chg="addSp modSp mod modAnim">
         <pc:chgData name="Steve Mutrux" userId="4fa98d0c-dc66-4728-b09b-a88e22e95094" providerId="ADAL" clId="{49582639-0C98-48DF-B1BF-6D8A1DF6014B}" dt="2026-09-16T18:20:24.411" v="279"/>
@@ -2663,14 +1799,6 @@
           <pc:docMk/>
           <pc:sldMk cId="353601395" sldId="266"/>
         </pc:sldMkLst>
-        <pc:spChg chg="del">
-          <ac:chgData name="Steve Mutrux" userId="4fa98d0c-dc66-4728-b09b-a88e22e95094" providerId="ADAL" clId="{49582639-0C98-48DF-B1BF-6D8A1DF6014B}" dt="2026-09-16T18:21:13.552" v="287" actId="478"/>
-          <ac:spMkLst>
-            <pc:docMk/>
-            <pc:sldMk cId="353601395" sldId="266"/>
-            <ac:spMk id="4" creationId="{62300D51-2B10-B557-82F3-8A6662DF3624}"/>
-          </ac:spMkLst>
-        </pc:spChg>
         <pc:spChg chg="mod">
           <ac:chgData name="Steve Mutrux" userId="4fa98d0c-dc66-4728-b09b-a88e22e95094" providerId="ADAL" clId="{49582639-0C98-48DF-B1BF-6D8A1DF6014B}" dt="2026-09-16T18:30:27.233" v="317" actId="20577"/>
           <ac:spMkLst>
@@ -2686,14 +1814,6 @@
           <pc:docMk/>
           <pc:sldMk cId="557364214" sldId="267"/>
         </pc:sldMkLst>
-        <pc:spChg chg="del">
-          <ac:chgData name="Steve Mutrux" userId="4fa98d0c-dc66-4728-b09b-a88e22e95094" providerId="ADAL" clId="{49582639-0C98-48DF-B1BF-6D8A1DF6014B}" dt="2026-09-16T18:21:17.419" v="288" actId="478"/>
-          <ac:spMkLst>
-            <pc:docMk/>
-            <pc:sldMk cId="557364214" sldId="267"/>
-            <ac:spMk id="4" creationId="{D33647DA-DFAA-FEB8-E5A2-61DBE5F52AC1}"/>
-          </ac:spMkLst>
-        </pc:spChg>
       </pc:sldChg>
       <pc:sldChg chg="modSp modAnim">
         <pc:chgData name="Steve Mutrux" userId="4fa98d0c-dc66-4728-b09b-a88e22e95094" providerId="ADAL" clId="{49582639-0C98-48DF-B1BF-6D8A1DF6014B}" dt="2026-09-16T18:34:32.447" v="360" actId="20577"/>
@@ -2732,22 +1852,6 @@
             <ac:spMk id="8" creationId="{920A0F4F-D15B-3088-F2A1-AD48A979E786}"/>
           </ac:spMkLst>
         </pc:spChg>
-        <pc:spChg chg="del">
-          <ac:chgData name="Steve Mutrux" userId="4fa98d0c-dc66-4728-b09b-a88e22e95094" providerId="ADAL" clId="{49582639-0C98-48DF-B1BF-6D8A1DF6014B}" dt="2026-09-16T18:20:35.863" v="280" actId="478"/>
-          <ac:spMkLst>
-            <pc:docMk/>
-            <pc:sldMk cId="1755182162" sldId="269"/>
-            <ac:spMk id="13" creationId="{B324D36C-FBFE-738A-83C4-97AE78C8DC8D}"/>
-          </ac:spMkLst>
-        </pc:spChg>
-        <pc:grpChg chg="del ord">
-          <ac:chgData name="Steve Mutrux" userId="4fa98d0c-dc66-4728-b09b-a88e22e95094" providerId="ADAL" clId="{49582639-0C98-48DF-B1BF-6D8A1DF6014B}" dt="2026-09-16T18:20:38.971" v="281" actId="478"/>
-          <ac:grpSpMkLst>
-            <pc:docMk/>
-            <pc:sldMk cId="1755182162" sldId="269"/>
-            <ac:grpSpMk id="3" creationId="{4AE5FAE7-F862-FFE2-1177-1977843DEE5E}"/>
-          </ac:grpSpMkLst>
-        </pc:grpChg>
       </pc:sldChg>
       <pc:sldChg chg="modSp">
         <pc:chgData name="Steve Mutrux" userId="4fa98d0c-dc66-4728-b09b-a88e22e95094" providerId="ADAL" clId="{49582639-0C98-48DF-B1BF-6D8A1DF6014B}" dt="2026-09-16T18:32:24.894" v="324" actId="20577"/>
@@ -2770,14 +1874,6 @@
           <pc:docMk/>
           <pc:sldMk cId="3925825761" sldId="273"/>
         </pc:sldMkLst>
-        <pc:spChg chg="del">
-          <ac:chgData name="Steve Mutrux" userId="4fa98d0c-dc66-4728-b09b-a88e22e95094" providerId="ADAL" clId="{49582639-0C98-48DF-B1BF-6D8A1DF6014B}" dt="2026-09-16T18:21:10.228" v="286" actId="478"/>
-          <ac:spMkLst>
-            <pc:docMk/>
-            <pc:sldMk cId="3925825761" sldId="273"/>
-            <ac:spMk id="13" creationId="{A83B4F55-9AA6-B35F-8AE6-E69B5CA807AD}"/>
-          </ac:spMkLst>
-        </pc:spChg>
       </pc:sldChg>
       <pc:sldChg chg="addSp delSp mod">
         <pc:chgData name="Steve Mutrux" userId="4fa98d0c-dc66-4728-b09b-a88e22e95094" providerId="ADAL" clId="{49582639-0C98-48DF-B1BF-6D8A1DF6014B}" dt="2026-09-16T18:21:06.956" v="285" actId="478"/>
@@ -2785,14 +1881,6 @@
           <pc:docMk/>
           <pc:sldMk cId="859702855" sldId="274"/>
         </pc:sldMkLst>
-        <pc:spChg chg="del">
-          <ac:chgData name="Steve Mutrux" userId="4fa98d0c-dc66-4728-b09b-a88e22e95094" providerId="ADAL" clId="{49582639-0C98-48DF-B1BF-6D8A1DF6014B}" dt="2026-09-16T18:21:06.956" v="285" actId="478"/>
-          <ac:spMkLst>
-            <pc:docMk/>
-            <pc:sldMk cId="859702855" sldId="274"/>
-            <ac:spMk id="8" creationId="{34A4E6D7-12E2-CDB7-3EAA-1C672D1D7E69}"/>
-          </ac:spMkLst>
-        </pc:spChg>
         <pc:spChg chg="add del">
           <ac:chgData name="Steve Mutrux" userId="4fa98d0c-dc66-4728-b09b-a88e22e95094" providerId="ADAL" clId="{49582639-0C98-48DF-B1BF-6D8A1DF6014B}" dt="2026-09-16T18:21:04.590" v="284" actId="478"/>
           <ac:spMkLst>
@@ -2839,14 +1927,6 @@
             <ac:spMk id="14" creationId="{522C4567-BFDC-142E-9934-AA95548A232B}"/>
           </ac:spMkLst>
         </pc:spChg>
-        <pc:grpChg chg="del">
-          <ac:chgData name="Steve Mutrux" userId="4fa98d0c-dc66-4728-b09b-a88e22e95094" providerId="ADAL" clId="{49582639-0C98-48DF-B1BF-6D8A1DF6014B}" dt="2026-09-16T18:11:28.170" v="255" actId="478"/>
-          <ac:grpSpMkLst>
-            <pc:docMk/>
-            <pc:sldMk cId="1400023611" sldId="276"/>
-            <ac:grpSpMk id="36" creationId="{24947A3E-5160-A827-D45E-E49850CC4C24}"/>
-          </ac:grpSpMkLst>
-        </pc:grpChg>
       </pc:sldChg>
     </pc:docChg>
   </pc:docChgLst>
@@ -2935,7 +2015,7 @@
           <a:p>
             <a:fld id="{30F4E063-30EE-4103-AD49-D9727BB8755E}" type="datetimeFigureOut">
               <a:rPr lang="en-CA" smtClean="0"/>
-              <a:t>2026-09-17</a:t>
+              <a:t>2026-09-18</a:t>
             </a:fld>
             <a:endParaRPr lang="en-CA"/>
           </a:p>
@@ -3528,6 +2608,114 @@
   <p:cSld>
     <p:spTree>
       <p:nvGrpSpPr>
+        <p:cNvPr id="1" name="">
+          <a:extLst>
+            <a:ext uri="{FF2B5EF4-FFF2-40B4-BE49-F238E27FC236}">
+              <a16:creationId xmlns:a16="http://schemas.microsoft.com/office/drawing/2014/main" id="{68EDC82B-28DB-DCA7-BAD1-47D382DADE9C}"/>
+            </a:ext>
+          </a:extLst>
+        </p:cNvPr>
+        <p:cNvGrpSpPr/>
+        <p:nvPr/>
+      </p:nvGrpSpPr>
+      <p:grpSpPr>
+        <a:xfrm>
+          <a:off x="0" y="0"/>
+          <a:ext cx="0" cy="0"/>
+          <a:chOff x="0" y="0"/>
+          <a:chExt cx="0" cy="0"/>
+        </a:xfrm>
+      </p:grpSpPr>
+      <p:sp>
+        <p:nvSpPr>
+          <p:cNvPr id="2" name="Slide Image Placeholder 1">
+            <a:extLst>
+              <a:ext uri="{FF2B5EF4-FFF2-40B4-BE49-F238E27FC236}">
+                <a16:creationId xmlns:a16="http://schemas.microsoft.com/office/drawing/2014/main" id="{68DA80F2-5701-D283-04B1-BBE432CC24D1}"/>
+              </a:ext>
+            </a:extLst>
+          </p:cNvPr>
+          <p:cNvSpPr>
+            <a:spLocks noGrp="1" noRot="1" noChangeAspect="1"/>
+          </p:cNvSpPr>
+          <p:nvPr>
+            <p:ph type="sldImg"/>
+          </p:nvPr>
+        </p:nvSpPr>
+        <p:spPr/>
+      </p:sp>
+      <p:sp>
+        <p:nvSpPr>
+          <p:cNvPr id="3" name="Notes Placeholder 2">
+            <a:extLst>
+              <a:ext uri="{FF2B5EF4-FFF2-40B4-BE49-F238E27FC236}">
+                <a16:creationId xmlns:a16="http://schemas.microsoft.com/office/drawing/2014/main" id="{A7BA9D81-36E6-663F-9AE9-38CC857141D0}"/>
+              </a:ext>
+            </a:extLst>
+          </p:cNvPr>
+          <p:cNvSpPr>
+            <a:spLocks noGrp="1"/>
+          </p:cNvSpPr>
+          <p:nvPr>
+            <p:ph type="body" idx="1"/>
+          </p:nvPr>
+        </p:nvSpPr>
+        <p:spPr/>
+        <p:txBody>
+          <a:bodyPr/>
+          <a:lstStyle/>
+          <a:p>
+            <a:endParaRPr lang="en-CA" dirty="0"/>
+          </a:p>
+        </p:txBody>
+      </p:sp>
+      <p:sp>
+        <p:nvSpPr>
+          <p:cNvPr id="4" name="Slide Number Placeholder 3">
+            <a:extLst>
+              <a:ext uri="{FF2B5EF4-FFF2-40B4-BE49-F238E27FC236}">
+                <a16:creationId xmlns:a16="http://schemas.microsoft.com/office/drawing/2014/main" id="{2122672B-E5B6-DB38-F9B4-435EA42DCA18}"/>
+              </a:ext>
+            </a:extLst>
+          </p:cNvPr>
+          <p:cNvSpPr>
+            <a:spLocks noGrp="1"/>
+          </p:cNvSpPr>
+          <p:nvPr>
+            <p:ph type="sldNum" sz="quarter" idx="5"/>
+          </p:nvPr>
+        </p:nvSpPr>
+        <p:spPr/>
+        <p:txBody>
+          <a:bodyPr/>
+          <a:lstStyle/>
+          <a:p>
+            <a:fld id="{47B22D95-B55A-456E-B882-ED519B72F1D2}" type="slidenum">
+              <a:rPr lang="en-CA" smtClean="0"/>
+              <a:t>14</a:t>
+            </a:fld>
+            <a:endParaRPr lang="en-CA"/>
+          </a:p>
+        </p:txBody>
+      </p:sp>
+    </p:spTree>
+    <p:extLst>
+      <p:ext uri="{BB962C8B-B14F-4D97-AF65-F5344CB8AC3E}">
+        <p14:creationId xmlns:p14="http://schemas.microsoft.com/office/powerpoint/2010/main" val="3227539684"/>
+      </p:ext>
+    </p:extLst>
+  </p:cSld>
+  <p:clrMapOvr>
+    <a:masterClrMapping/>
+  </p:clrMapOvr>
+</p:notes>
+</file>
+
+<file path=ppt/notesSlides/notesSlide13.xml><?xml version="1.0" encoding="utf-8"?>
+<p:notes xmlns:a="http://schemas.openxmlformats.org/drawingml/2006/main" xmlns:r="http://schemas.openxmlformats.org/officeDocument/2006/relationships" xmlns:p="http://schemas.openxmlformats.org/presentationml/2006/main">
+  <p:cSld>
+    <p:spTree>
+      <p:nvGrpSpPr>
         <p:cNvPr id="1" name=""/>
         <p:cNvGrpSpPr/>
         <p:nvPr/>
@@ -3588,7 +2776,7 @@
           <a:p>
             <a:fld id="{47B22D95-B55A-456E-B882-ED519B72F1D2}" type="slidenum">
               <a:rPr lang="en-CA" smtClean="0"/>
-              <a:t>14</a:t>
+              <a:t>15</a:t>
             </a:fld>
             <a:endParaRPr lang="en-CA"/>
           </a:p>
@@ -3847,30 +3035,19 @@
           <a:bodyPr/>
           <a:lstStyle/>
           <a:p>
-            <a:pPr marL="0" marR="0" lvl="0" indent="0" algn="l" defTabSz="914400" rtl="0" eaLnBrk="1" fontAlgn="auto" latinLnBrk="0" hangingPunct="1">
-              <a:lnSpc>
-                <a:spcPct val="100000"/>
-              </a:lnSpc>
-              <a:spcBef>
-                <a:spcPts val="0"/>
-              </a:spcBef>
-              <a:spcAft>
-                <a:spcPts val="0"/>
-              </a:spcAft>
-              <a:buClrTx/>
-              <a:buSzTx/>
-              <a:buFontTx/>
-              <a:buNone/>
-              <a:tabLst/>
-              <a:defRPr/>
-            </a:pPr>
+            <a:pPr lvl="0" fontAlgn="base"/>
             <a:r>
-              <a:rPr lang="en-CA" dirty="0"/>
-              <a:t>Blurb about Kayla</a:t>
+              <a:rPr lang="en-CA" sz="1200" b="0" i="0" kern="1200" dirty="0">
+                <a:solidFill>
+                  <a:schemeClr val="tx1"/>
+                </a:solidFill>
+                <a:effectLst/>
+                <a:latin typeface="+mn-lt"/>
+                <a:ea typeface="+mn-ea"/>
+                <a:cs typeface="+mn-cs"/>
+              </a:rPr>
+              <a:t>Web Dev, Integrated Systems Dev Design Compliance Standards &amp; Accessibility</a:t>
             </a:r>
-          </a:p>
-          <a:p>
-            <a:endParaRPr lang="en-CA" dirty="0"/>
           </a:p>
         </p:txBody>
       </p:sp>
@@ -4656,7 +3833,7 @@
           <a:p>
             <a:fld id="{5740B982-0E6D-4C64-AE1B-DA9749EF130C}" type="datetimeFigureOut">
               <a:rPr lang="en-CA" smtClean="0"/>
-              <a:t>2026-09-17</a:t>
+              <a:t>2026-09-18</a:t>
             </a:fld>
             <a:endParaRPr lang="en-CA"/>
           </a:p>
@@ -4856,7 +4033,7 @@
           <a:p>
             <a:fld id="{5740B982-0E6D-4C64-AE1B-DA9749EF130C}" type="datetimeFigureOut">
               <a:rPr lang="en-CA" smtClean="0"/>
-              <a:t>2026-09-17</a:t>
+              <a:t>2026-09-18</a:t>
             </a:fld>
             <a:endParaRPr lang="en-CA"/>
           </a:p>
@@ -5066,7 +4243,7 @@
           <a:p>
             <a:fld id="{5740B982-0E6D-4C64-AE1B-DA9749EF130C}" type="datetimeFigureOut">
               <a:rPr lang="en-CA" smtClean="0"/>
-              <a:t>2026-09-17</a:t>
+              <a:t>2026-09-18</a:t>
             </a:fld>
             <a:endParaRPr lang="en-CA"/>
           </a:p>
@@ -5266,7 +4443,7 @@
           <a:p>
             <a:fld id="{5740B982-0E6D-4C64-AE1B-DA9749EF130C}" type="datetimeFigureOut">
               <a:rPr lang="en-CA" smtClean="0"/>
-              <a:t>2026-09-17</a:t>
+              <a:t>2026-09-18</a:t>
             </a:fld>
             <a:endParaRPr lang="en-CA"/>
           </a:p>
@@ -5542,7 +4719,7 @@
           <a:p>
             <a:fld id="{5740B982-0E6D-4C64-AE1B-DA9749EF130C}" type="datetimeFigureOut">
               <a:rPr lang="en-CA" smtClean="0"/>
-              <a:t>2026-09-17</a:t>
+              <a:t>2026-09-18</a:t>
             </a:fld>
             <a:endParaRPr lang="en-CA"/>
           </a:p>
@@ -5810,7 +4987,7 @@
           <a:p>
             <a:fld id="{5740B982-0E6D-4C64-AE1B-DA9749EF130C}" type="datetimeFigureOut">
               <a:rPr lang="en-CA" smtClean="0"/>
-              <a:t>2026-09-17</a:t>
+              <a:t>2026-09-18</a:t>
             </a:fld>
             <a:endParaRPr lang="en-CA"/>
           </a:p>
@@ -6225,7 +5402,7 @@
           <a:p>
             <a:fld id="{5740B982-0E6D-4C64-AE1B-DA9749EF130C}" type="datetimeFigureOut">
               <a:rPr lang="en-CA" smtClean="0"/>
-              <a:t>2026-09-17</a:t>
+              <a:t>2026-09-18</a:t>
             </a:fld>
             <a:endParaRPr lang="en-CA"/>
           </a:p>
@@ -6367,7 +5544,7 @@
           <a:p>
             <a:fld id="{5740B982-0E6D-4C64-AE1B-DA9749EF130C}" type="datetimeFigureOut">
               <a:rPr lang="en-CA" smtClean="0"/>
-              <a:t>2026-09-17</a:t>
+              <a:t>2026-09-18</a:t>
             </a:fld>
             <a:endParaRPr lang="en-CA"/>
           </a:p>
@@ -6480,7 +5657,7 @@
           <a:p>
             <a:fld id="{5740B982-0E6D-4C64-AE1B-DA9749EF130C}" type="datetimeFigureOut">
               <a:rPr lang="en-CA" smtClean="0"/>
-              <a:t>2026-09-17</a:t>
+              <a:t>2026-09-18</a:t>
             </a:fld>
             <a:endParaRPr lang="en-CA"/>
           </a:p>
@@ -6793,7 +5970,7 @@
           <a:p>
             <a:fld id="{5740B982-0E6D-4C64-AE1B-DA9749EF130C}" type="datetimeFigureOut">
               <a:rPr lang="en-CA" smtClean="0"/>
-              <a:t>2026-09-17</a:t>
+              <a:t>2026-09-18</a:t>
             </a:fld>
             <a:endParaRPr lang="en-CA"/>
           </a:p>
@@ -7082,7 +6259,7 @@
           <a:p>
             <a:fld id="{5740B982-0E6D-4C64-AE1B-DA9749EF130C}" type="datetimeFigureOut">
               <a:rPr lang="en-CA" smtClean="0"/>
-              <a:t>2026-09-17</a:t>
+              <a:t>2026-09-18</a:t>
             </a:fld>
             <a:endParaRPr lang="en-CA"/>
           </a:p>
@@ -7325,7 +6502,7 @@
           <a:p>
             <a:fld id="{5740B982-0E6D-4C64-AE1B-DA9749EF130C}" type="datetimeFigureOut">
               <a:rPr lang="en-CA" smtClean="0"/>
-              <a:t>2026-09-17</a:t>
+              <a:t>2026-09-18</a:t>
             </a:fld>
             <a:endParaRPr lang="en-CA"/>
           </a:p>
@@ -14567,355 +13744,6 @@
           </p:sp>
         </p:grpSp>
       </p:grpSp>
-      <p:grpSp>
-        <p:nvGrpSpPr>
-          <p:cNvPr id="36" name="Group 35">
-            <a:extLst>
-              <a:ext uri="{FF2B5EF4-FFF2-40B4-BE49-F238E27FC236}">
-                <a16:creationId xmlns:a16="http://schemas.microsoft.com/office/drawing/2014/main" id="{678ED05D-2A4B-61AA-076B-C0C666BA3F7F}"/>
-              </a:ext>
-            </a:extLst>
-          </p:cNvPr>
-          <p:cNvGrpSpPr/>
-          <p:nvPr/>
-        </p:nvGrpSpPr>
-        <p:grpSpPr>
-          <a:xfrm>
-            <a:off x="331869" y="4552224"/>
-            <a:ext cx="2878053" cy="1317253"/>
-            <a:chOff x="331871" y="1155279"/>
-            <a:chExt cx="2878053" cy="1317253"/>
-          </a:xfrm>
-        </p:grpSpPr>
-        <p:sp>
-          <p:nvSpPr>
-            <p:cNvPr id="37" name="Rectangle: Rounded Corners 36">
-              <a:extLst>
-                <a:ext uri="{FF2B5EF4-FFF2-40B4-BE49-F238E27FC236}">
-                  <a16:creationId xmlns:a16="http://schemas.microsoft.com/office/drawing/2014/main" id="{E14BB88B-0E96-59B3-6EF0-279E58A2B8ED}"/>
-                </a:ext>
-              </a:extLst>
-            </p:cNvPr>
-            <p:cNvSpPr/>
-            <p:nvPr/>
-          </p:nvSpPr>
-          <p:spPr>
-            <a:xfrm>
-              <a:off x="331871" y="1458117"/>
-              <a:ext cx="2878053" cy="714377"/>
-            </a:xfrm>
-            <a:prstGeom prst="roundRect">
-              <a:avLst>
-                <a:gd name="adj" fmla="val 11544"/>
-              </a:avLst>
-            </a:prstGeom>
-            <a:solidFill>
-              <a:schemeClr val="bg1">
-                <a:lumMod val="90000"/>
-              </a:schemeClr>
-            </a:solidFill>
-            <a:ln>
-              <a:noFill/>
-            </a:ln>
-          </p:spPr>
-          <p:style>
-            <a:lnRef idx="2">
-              <a:schemeClr val="accent1">
-                <a:shade val="15000"/>
-              </a:schemeClr>
-            </a:lnRef>
-            <a:fillRef idx="1">
-              <a:schemeClr val="accent1"/>
-            </a:fillRef>
-            <a:effectRef idx="0">
-              <a:schemeClr val="accent1"/>
-            </a:effectRef>
-            <a:fontRef idx="minor">
-              <a:schemeClr val="lt1"/>
-            </a:fontRef>
-          </p:style>
-          <p:txBody>
-            <a:bodyPr rtlCol="0" anchor="ctr"/>
-            <a:lstStyle/>
-            <a:p>
-              <a:pPr algn="ctr"/>
-              <a:endParaRPr lang="en-CA"/>
-            </a:p>
-          </p:txBody>
-        </p:sp>
-        <p:grpSp>
-          <p:nvGrpSpPr>
-            <p:cNvPr id="38" name="Group 37">
-              <a:extLst>
-                <a:ext uri="{FF2B5EF4-FFF2-40B4-BE49-F238E27FC236}">
-                  <a16:creationId xmlns:a16="http://schemas.microsoft.com/office/drawing/2014/main" id="{927BA3C9-6617-CB9C-8987-32C8B8373228}"/>
-                </a:ext>
-              </a:extLst>
-            </p:cNvPr>
-            <p:cNvGrpSpPr/>
-            <p:nvPr/>
-          </p:nvGrpSpPr>
-          <p:grpSpPr>
-            <a:xfrm>
-              <a:off x="2703597" y="2172494"/>
-              <a:ext cx="300037" cy="300038"/>
-              <a:chOff x="1234559" y="4745831"/>
-              <a:chExt cx="300037" cy="300038"/>
-            </a:xfrm>
-          </p:grpSpPr>
-          <p:sp>
-            <p:nvSpPr>
-              <p:cNvPr id="42" name="Rectangle 41">
-                <a:extLst>
-                  <a:ext uri="{FF2B5EF4-FFF2-40B4-BE49-F238E27FC236}">
-                    <a16:creationId xmlns:a16="http://schemas.microsoft.com/office/drawing/2014/main" id="{647F243E-B534-9042-3F18-1A8B8362CD16}"/>
-                  </a:ext>
-                </a:extLst>
-              </p:cNvPr>
-              <p:cNvSpPr/>
-              <p:nvPr/>
-            </p:nvSpPr>
-            <p:spPr>
-              <a:xfrm>
-                <a:off x="1234559" y="4745832"/>
-                <a:ext cx="300037" cy="300037"/>
-              </a:xfrm>
-              <a:prstGeom prst="rect">
-                <a:avLst/>
-              </a:prstGeom>
-              <a:gradFill flip="none" rotWithShape="1">
-                <a:gsLst>
-                  <a:gs pos="68000">
-                    <a:schemeClr val="bg1"/>
-                  </a:gs>
-                  <a:gs pos="83000">
-                    <a:schemeClr val="bg1">
-                      <a:lumMod val="90000"/>
-                    </a:schemeClr>
-                  </a:gs>
-                </a:gsLst>
-                <a:lin ang="18900000" scaled="1"/>
-                <a:tileRect/>
-              </a:gradFill>
-              <a:ln>
-                <a:noFill/>
-              </a:ln>
-            </p:spPr>
-            <p:style>
-              <a:lnRef idx="2">
-                <a:schemeClr val="accent1">
-                  <a:shade val="15000"/>
-                </a:schemeClr>
-              </a:lnRef>
-              <a:fillRef idx="1">
-                <a:schemeClr val="accent1"/>
-              </a:fillRef>
-              <a:effectRef idx="0">
-                <a:schemeClr val="accent1"/>
-              </a:effectRef>
-              <a:fontRef idx="minor">
-                <a:schemeClr val="lt1"/>
-              </a:fontRef>
-            </p:style>
-            <p:txBody>
-              <a:bodyPr rtlCol="0" anchor="ctr"/>
-              <a:lstStyle/>
-              <a:p>
-                <a:pPr algn="ctr"/>
-                <a:endParaRPr lang="en-CA" dirty="0"/>
-              </a:p>
-            </p:txBody>
-          </p:sp>
-          <p:sp>
-            <p:nvSpPr>
-              <p:cNvPr id="43" name="Oval 42">
-                <a:extLst>
-                  <a:ext uri="{FF2B5EF4-FFF2-40B4-BE49-F238E27FC236}">
-                    <a16:creationId xmlns:a16="http://schemas.microsoft.com/office/drawing/2014/main" id="{E3193F3F-9BF7-FAB2-D152-4360CC438B1F}"/>
-                  </a:ext>
-                </a:extLst>
-              </p:cNvPr>
-              <p:cNvSpPr/>
-              <p:nvPr/>
-            </p:nvSpPr>
-            <p:spPr>
-              <a:xfrm>
-                <a:off x="1234559" y="4745831"/>
-                <a:ext cx="300036" cy="300037"/>
-              </a:xfrm>
-              <a:prstGeom prst="ellipse">
-                <a:avLst/>
-              </a:prstGeom>
-              <a:solidFill>
-                <a:schemeClr val="bg1"/>
-              </a:solidFill>
-              <a:ln>
-                <a:noFill/>
-              </a:ln>
-            </p:spPr>
-            <p:style>
-              <a:lnRef idx="2">
-                <a:schemeClr val="accent1">
-                  <a:shade val="15000"/>
-                </a:schemeClr>
-              </a:lnRef>
-              <a:fillRef idx="1">
-                <a:schemeClr val="accent1"/>
-              </a:fillRef>
-              <a:effectRef idx="0">
-                <a:schemeClr val="accent1"/>
-              </a:effectRef>
-              <a:fontRef idx="minor">
-                <a:schemeClr val="lt1"/>
-              </a:fontRef>
-            </p:style>
-            <p:txBody>
-              <a:bodyPr rtlCol="0" anchor="ctr"/>
-              <a:lstStyle/>
-              <a:p>
-                <a:pPr algn="ctr"/>
-                <a:endParaRPr lang="en-CA"/>
-              </a:p>
-            </p:txBody>
-          </p:sp>
-        </p:grpSp>
-        <p:grpSp>
-          <p:nvGrpSpPr>
-            <p:cNvPr id="39" name="Group 38">
-              <a:extLst>
-                <a:ext uri="{FF2B5EF4-FFF2-40B4-BE49-F238E27FC236}">
-                  <a16:creationId xmlns:a16="http://schemas.microsoft.com/office/drawing/2014/main" id="{7C9560F7-8264-7EF2-E259-3151A7DA378D}"/>
-                </a:ext>
-              </a:extLst>
-            </p:cNvPr>
-            <p:cNvGrpSpPr/>
-            <p:nvPr/>
-          </p:nvGrpSpPr>
-          <p:grpSpPr>
-            <a:xfrm rot="5400000">
-              <a:off x="2702405" y="1156469"/>
-              <a:ext cx="302418" cy="300038"/>
-              <a:chOff x="1232178" y="4745831"/>
-              <a:chExt cx="302418" cy="300038"/>
-            </a:xfrm>
-          </p:grpSpPr>
-          <p:sp>
-            <p:nvSpPr>
-              <p:cNvPr id="40" name="Rectangle 39">
-                <a:extLst>
-                  <a:ext uri="{FF2B5EF4-FFF2-40B4-BE49-F238E27FC236}">
-                    <a16:creationId xmlns:a16="http://schemas.microsoft.com/office/drawing/2014/main" id="{34B31535-460B-ADF4-80F4-ACC7134B73F9}"/>
-                  </a:ext>
-                </a:extLst>
-              </p:cNvPr>
-              <p:cNvSpPr/>
-              <p:nvPr/>
-            </p:nvSpPr>
-            <p:spPr>
-              <a:xfrm>
-                <a:off x="1234559" y="4745832"/>
-                <a:ext cx="300037" cy="300037"/>
-              </a:xfrm>
-              <a:prstGeom prst="rect">
-                <a:avLst/>
-              </a:prstGeom>
-              <a:gradFill flip="none" rotWithShape="1">
-                <a:gsLst>
-                  <a:gs pos="68000">
-                    <a:schemeClr val="bg1"/>
-                  </a:gs>
-                  <a:gs pos="83000">
-                    <a:schemeClr val="bg1">
-                      <a:lumMod val="90000"/>
-                    </a:schemeClr>
-                  </a:gs>
-                </a:gsLst>
-                <a:lin ang="18900000" scaled="1"/>
-                <a:tileRect/>
-              </a:gradFill>
-              <a:ln>
-                <a:noFill/>
-              </a:ln>
-            </p:spPr>
-            <p:style>
-              <a:lnRef idx="2">
-                <a:schemeClr val="accent1">
-                  <a:shade val="15000"/>
-                </a:schemeClr>
-              </a:lnRef>
-              <a:fillRef idx="1">
-                <a:schemeClr val="accent1"/>
-              </a:fillRef>
-              <a:effectRef idx="0">
-                <a:schemeClr val="accent1"/>
-              </a:effectRef>
-              <a:fontRef idx="minor">
-                <a:schemeClr val="lt1"/>
-              </a:fontRef>
-            </p:style>
-            <p:txBody>
-              <a:bodyPr rtlCol="0" anchor="ctr"/>
-              <a:lstStyle/>
-              <a:p>
-                <a:pPr algn="ctr"/>
-                <a:endParaRPr lang="en-CA" dirty="0"/>
-              </a:p>
-            </p:txBody>
-          </p:sp>
-          <p:sp>
-            <p:nvSpPr>
-              <p:cNvPr id="41" name="Oval 40">
-                <a:extLst>
-                  <a:ext uri="{FF2B5EF4-FFF2-40B4-BE49-F238E27FC236}">
-                    <a16:creationId xmlns:a16="http://schemas.microsoft.com/office/drawing/2014/main" id="{27FEF0EB-867D-16D0-15C2-CD3994E3BBDE}"/>
-                  </a:ext>
-                </a:extLst>
-              </p:cNvPr>
-              <p:cNvSpPr/>
-              <p:nvPr/>
-            </p:nvSpPr>
-            <p:spPr>
-              <a:xfrm>
-                <a:off x="1232178" y="4745831"/>
-                <a:ext cx="300036" cy="300037"/>
-              </a:xfrm>
-              <a:prstGeom prst="ellipse">
-                <a:avLst/>
-              </a:prstGeom>
-              <a:solidFill>
-                <a:schemeClr val="bg1"/>
-              </a:solidFill>
-              <a:ln>
-                <a:noFill/>
-              </a:ln>
-            </p:spPr>
-            <p:style>
-              <a:lnRef idx="2">
-                <a:schemeClr val="accent1">
-                  <a:shade val="15000"/>
-                </a:schemeClr>
-              </a:lnRef>
-              <a:fillRef idx="1">
-                <a:schemeClr val="accent1"/>
-              </a:fillRef>
-              <a:effectRef idx="0">
-                <a:schemeClr val="accent1"/>
-              </a:effectRef>
-              <a:fontRef idx="minor">
-                <a:schemeClr val="lt1"/>
-              </a:fontRef>
-            </p:style>
-            <p:txBody>
-              <a:bodyPr rtlCol="0" anchor="ctr"/>
-              <a:lstStyle/>
-              <a:p>
-                <a:pPr algn="ctr"/>
-                <a:endParaRPr lang="en-CA" dirty="0"/>
-              </a:p>
-            </p:txBody>
-          </p:sp>
-        </p:grpSp>
-      </p:grpSp>
       <p:sp>
         <p:nvSpPr>
           <p:cNvPr id="23" name="Rectangle: Rounded Corners 22">
@@ -15631,6 +14459,1500 @@
       </p:transition>
     </mc:Fallback>
   </mc:AlternateContent>
+</p:sld>
+</file>
+
+<file path=ppt/slides/slide14.xml><?xml version="1.0" encoding="utf-8"?>
+<p:sld xmlns:a="http://schemas.openxmlformats.org/drawingml/2006/main" xmlns:r="http://schemas.openxmlformats.org/officeDocument/2006/relationships" xmlns:p="http://schemas.openxmlformats.org/presentationml/2006/main">
+  <p:cSld>
+    <p:spTree>
+      <p:nvGrpSpPr>
+        <p:cNvPr id="1" name="">
+          <a:extLst>
+            <a:ext uri="{FF2B5EF4-FFF2-40B4-BE49-F238E27FC236}">
+              <a16:creationId xmlns:a16="http://schemas.microsoft.com/office/drawing/2014/main" id="{FE3CA761-6332-D697-45A9-6414A625114B}"/>
+            </a:ext>
+          </a:extLst>
+        </p:cNvPr>
+        <p:cNvGrpSpPr/>
+        <p:nvPr/>
+      </p:nvGrpSpPr>
+      <p:grpSpPr>
+        <a:xfrm>
+          <a:off x="0" y="0"/>
+          <a:ext cx="0" cy="0"/>
+          <a:chOff x="0" y="0"/>
+          <a:chExt cx="0" cy="0"/>
+        </a:xfrm>
+      </p:grpSpPr>
+      <p:grpSp>
+        <p:nvGrpSpPr>
+          <p:cNvPr id="3" name="Group 2">
+            <a:extLst>
+              <a:ext uri="{FF2B5EF4-FFF2-40B4-BE49-F238E27FC236}">
+                <a16:creationId xmlns:a16="http://schemas.microsoft.com/office/drawing/2014/main" id="{C437E05A-9B5D-9A0A-9596-4DFCACD3936E}"/>
+              </a:ext>
+            </a:extLst>
+          </p:cNvPr>
+          <p:cNvGrpSpPr/>
+          <p:nvPr/>
+        </p:nvGrpSpPr>
+        <p:grpSpPr>
+          <a:xfrm>
+            <a:off x="331871" y="3259018"/>
+            <a:ext cx="2878053" cy="1897867"/>
+            <a:chOff x="331871" y="1982044"/>
+            <a:chExt cx="2878053" cy="1897867"/>
+          </a:xfrm>
+        </p:grpSpPr>
+        <p:sp>
+          <p:nvSpPr>
+            <p:cNvPr id="4" name="Rectangle: Rounded Corners 3">
+              <a:extLst>
+                <a:ext uri="{FF2B5EF4-FFF2-40B4-BE49-F238E27FC236}">
+                  <a16:creationId xmlns:a16="http://schemas.microsoft.com/office/drawing/2014/main" id="{E6190A6E-05CE-0C02-43CF-92C5A2E9D605}"/>
+                </a:ext>
+              </a:extLst>
+            </p:cNvPr>
+            <p:cNvSpPr/>
+            <p:nvPr/>
+          </p:nvSpPr>
+          <p:spPr>
+            <a:xfrm>
+              <a:off x="331871" y="2282082"/>
+              <a:ext cx="2878053" cy="714377"/>
+            </a:xfrm>
+            <a:prstGeom prst="roundRect">
+              <a:avLst>
+                <a:gd name="adj" fmla="val 11544"/>
+              </a:avLst>
+            </a:prstGeom>
+            <a:solidFill>
+              <a:schemeClr val="bg1">
+                <a:lumMod val="90000"/>
+              </a:schemeClr>
+            </a:solidFill>
+            <a:ln>
+              <a:noFill/>
+            </a:ln>
+          </p:spPr>
+          <p:style>
+            <a:lnRef idx="2">
+              <a:schemeClr val="accent1">
+                <a:shade val="15000"/>
+              </a:schemeClr>
+            </a:lnRef>
+            <a:fillRef idx="1">
+              <a:schemeClr val="accent1"/>
+            </a:fillRef>
+            <a:effectRef idx="0">
+              <a:schemeClr val="accent1"/>
+            </a:effectRef>
+            <a:fontRef idx="minor">
+              <a:schemeClr val="lt1"/>
+            </a:fontRef>
+          </p:style>
+          <p:txBody>
+            <a:bodyPr rtlCol="0" anchor="ctr"/>
+            <a:lstStyle/>
+            <a:p>
+              <a:pPr algn="ctr"/>
+              <a:endParaRPr lang="en-CA" dirty="0"/>
+            </a:p>
+          </p:txBody>
+        </p:sp>
+        <p:sp>
+          <p:nvSpPr>
+            <p:cNvPr id="5" name="Rectangle: Rounded Corners 4">
+              <a:extLst>
+                <a:ext uri="{FF2B5EF4-FFF2-40B4-BE49-F238E27FC236}">
+                  <a16:creationId xmlns:a16="http://schemas.microsoft.com/office/drawing/2014/main" id="{D4EB98AC-9A0C-C6EE-A76E-0053BAF40C86}"/>
+                </a:ext>
+              </a:extLst>
+            </p:cNvPr>
+            <p:cNvSpPr/>
+            <p:nvPr/>
+          </p:nvSpPr>
+          <p:spPr>
+            <a:xfrm>
+              <a:off x="331871" y="2865497"/>
+              <a:ext cx="2878053" cy="714377"/>
+            </a:xfrm>
+            <a:prstGeom prst="roundRect">
+              <a:avLst>
+                <a:gd name="adj" fmla="val 11544"/>
+              </a:avLst>
+            </a:prstGeom>
+            <a:solidFill>
+              <a:schemeClr val="bg1">
+                <a:lumMod val="90000"/>
+              </a:schemeClr>
+            </a:solidFill>
+            <a:ln>
+              <a:noFill/>
+            </a:ln>
+          </p:spPr>
+          <p:style>
+            <a:lnRef idx="2">
+              <a:schemeClr val="accent1">
+                <a:shade val="15000"/>
+              </a:schemeClr>
+            </a:lnRef>
+            <a:fillRef idx="1">
+              <a:schemeClr val="accent1"/>
+            </a:fillRef>
+            <a:effectRef idx="0">
+              <a:schemeClr val="accent1"/>
+            </a:effectRef>
+            <a:fontRef idx="minor">
+              <a:schemeClr val="lt1"/>
+            </a:fontRef>
+          </p:style>
+          <p:txBody>
+            <a:bodyPr rtlCol="0" anchor="ctr"/>
+            <a:lstStyle/>
+            <a:p>
+              <a:pPr algn="ctr"/>
+              <a:endParaRPr lang="en-CA" dirty="0"/>
+            </a:p>
+          </p:txBody>
+        </p:sp>
+        <p:grpSp>
+          <p:nvGrpSpPr>
+            <p:cNvPr id="7" name="Group 6">
+              <a:extLst>
+                <a:ext uri="{FF2B5EF4-FFF2-40B4-BE49-F238E27FC236}">
+                  <a16:creationId xmlns:a16="http://schemas.microsoft.com/office/drawing/2014/main" id="{1994C13D-BA22-2099-B531-02FDA2170AAA}"/>
+                </a:ext>
+              </a:extLst>
+            </p:cNvPr>
+            <p:cNvGrpSpPr/>
+            <p:nvPr/>
+          </p:nvGrpSpPr>
+          <p:grpSpPr>
+            <a:xfrm>
+              <a:off x="2703596" y="3579873"/>
+              <a:ext cx="300037" cy="300038"/>
+              <a:chOff x="1234558" y="4788693"/>
+              <a:chExt cx="300037" cy="300038"/>
+            </a:xfrm>
+          </p:grpSpPr>
+          <p:sp>
+            <p:nvSpPr>
+              <p:cNvPr id="11" name="Rectangle 10">
+                <a:extLst>
+                  <a:ext uri="{FF2B5EF4-FFF2-40B4-BE49-F238E27FC236}">
+                    <a16:creationId xmlns:a16="http://schemas.microsoft.com/office/drawing/2014/main" id="{5FD3CDB5-BF54-3F1B-1B68-1249BEFD53BA}"/>
+                  </a:ext>
+                </a:extLst>
+              </p:cNvPr>
+              <p:cNvSpPr/>
+              <p:nvPr/>
+            </p:nvSpPr>
+            <p:spPr>
+              <a:xfrm>
+                <a:off x="1234558" y="4788694"/>
+                <a:ext cx="300037" cy="300037"/>
+              </a:xfrm>
+              <a:prstGeom prst="rect">
+                <a:avLst/>
+              </a:prstGeom>
+              <a:gradFill flip="none" rotWithShape="1">
+                <a:gsLst>
+                  <a:gs pos="68000">
+                    <a:schemeClr val="bg1"/>
+                  </a:gs>
+                  <a:gs pos="83000">
+                    <a:schemeClr val="bg1">
+                      <a:lumMod val="90000"/>
+                    </a:schemeClr>
+                  </a:gs>
+                </a:gsLst>
+                <a:lin ang="18900000" scaled="1"/>
+                <a:tileRect/>
+              </a:gradFill>
+              <a:ln>
+                <a:noFill/>
+              </a:ln>
+            </p:spPr>
+            <p:style>
+              <a:lnRef idx="2">
+                <a:schemeClr val="accent1">
+                  <a:shade val="15000"/>
+                </a:schemeClr>
+              </a:lnRef>
+              <a:fillRef idx="1">
+                <a:schemeClr val="accent1"/>
+              </a:fillRef>
+              <a:effectRef idx="0">
+                <a:schemeClr val="accent1"/>
+              </a:effectRef>
+              <a:fontRef idx="minor">
+                <a:schemeClr val="lt1"/>
+              </a:fontRef>
+            </p:style>
+            <p:txBody>
+              <a:bodyPr rtlCol="0" anchor="ctr"/>
+              <a:lstStyle/>
+              <a:p>
+                <a:pPr algn="ctr"/>
+                <a:endParaRPr lang="en-CA" dirty="0"/>
+              </a:p>
+            </p:txBody>
+          </p:sp>
+          <p:sp>
+            <p:nvSpPr>
+              <p:cNvPr id="12" name="Oval 11">
+                <a:extLst>
+                  <a:ext uri="{FF2B5EF4-FFF2-40B4-BE49-F238E27FC236}">
+                    <a16:creationId xmlns:a16="http://schemas.microsoft.com/office/drawing/2014/main" id="{E53C9ED4-605A-11F8-51F7-CC37011F52E7}"/>
+                  </a:ext>
+                </a:extLst>
+              </p:cNvPr>
+              <p:cNvSpPr/>
+              <p:nvPr/>
+            </p:nvSpPr>
+            <p:spPr>
+              <a:xfrm>
+                <a:off x="1234559" y="4788693"/>
+                <a:ext cx="300036" cy="300037"/>
+              </a:xfrm>
+              <a:prstGeom prst="ellipse">
+                <a:avLst/>
+              </a:prstGeom>
+              <a:solidFill>
+                <a:schemeClr val="bg1"/>
+              </a:solidFill>
+              <a:ln>
+                <a:noFill/>
+              </a:ln>
+            </p:spPr>
+            <p:style>
+              <a:lnRef idx="2">
+                <a:schemeClr val="accent1">
+                  <a:shade val="15000"/>
+                </a:schemeClr>
+              </a:lnRef>
+              <a:fillRef idx="1">
+                <a:schemeClr val="accent1"/>
+              </a:fillRef>
+              <a:effectRef idx="0">
+                <a:schemeClr val="accent1"/>
+              </a:effectRef>
+              <a:fontRef idx="minor">
+                <a:schemeClr val="lt1"/>
+              </a:fontRef>
+            </p:style>
+            <p:txBody>
+              <a:bodyPr rtlCol="0" anchor="ctr"/>
+              <a:lstStyle/>
+              <a:p>
+                <a:pPr algn="ctr"/>
+                <a:endParaRPr lang="en-CA"/>
+              </a:p>
+            </p:txBody>
+          </p:sp>
+        </p:grpSp>
+        <p:grpSp>
+          <p:nvGrpSpPr>
+            <p:cNvPr id="8" name="Group 7">
+              <a:extLst>
+                <a:ext uri="{FF2B5EF4-FFF2-40B4-BE49-F238E27FC236}">
+                  <a16:creationId xmlns:a16="http://schemas.microsoft.com/office/drawing/2014/main" id="{4D824D53-F9E6-8A93-6317-C5BC120DC7A0}"/>
+                </a:ext>
+              </a:extLst>
+            </p:cNvPr>
+            <p:cNvGrpSpPr/>
+            <p:nvPr/>
+          </p:nvGrpSpPr>
+          <p:grpSpPr>
+            <a:xfrm rot="5400000">
+              <a:off x="2703597" y="1982044"/>
+              <a:ext cx="300037" cy="300038"/>
+              <a:chOff x="1201626" y="4745841"/>
+              <a:chExt cx="300037" cy="300038"/>
+            </a:xfrm>
+          </p:grpSpPr>
+          <p:sp>
+            <p:nvSpPr>
+              <p:cNvPr id="9" name="Rectangle 8">
+                <a:extLst>
+                  <a:ext uri="{FF2B5EF4-FFF2-40B4-BE49-F238E27FC236}">
+                    <a16:creationId xmlns:a16="http://schemas.microsoft.com/office/drawing/2014/main" id="{E6A3102D-C6FF-E455-6F6F-56BBB38980F0}"/>
+                  </a:ext>
+                </a:extLst>
+              </p:cNvPr>
+              <p:cNvSpPr/>
+              <p:nvPr/>
+            </p:nvSpPr>
+            <p:spPr>
+              <a:xfrm>
+                <a:off x="1201626" y="4745841"/>
+                <a:ext cx="300037" cy="300037"/>
+              </a:xfrm>
+              <a:prstGeom prst="rect">
+                <a:avLst/>
+              </a:prstGeom>
+              <a:gradFill flip="none" rotWithShape="1">
+                <a:gsLst>
+                  <a:gs pos="68000">
+                    <a:schemeClr val="bg1"/>
+                  </a:gs>
+                  <a:gs pos="83000">
+                    <a:schemeClr val="bg1">
+                      <a:lumMod val="90000"/>
+                    </a:schemeClr>
+                  </a:gs>
+                </a:gsLst>
+                <a:lin ang="18900000" scaled="1"/>
+                <a:tileRect/>
+              </a:gradFill>
+              <a:ln>
+                <a:noFill/>
+              </a:ln>
+            </p:spPr>
+            <p:style>
+              <a:lnRef idx="2">
+                <a:schemeClr val="accent1">
+                  <a:shade val="15000"/>
+                </a:schemeClr>
+              </a:lnRef>
+              <a:fillRef idx="1">
+                <a:schemeClr val="accent1"/>
+              </a:fillRef>
+              <a:effectRef idx="0">
+                <a:schemeClr val="accent1"/>
+              </a:effectRef>
+              <a:fontRef idx="minor">
+                <a:schemeClr val="lt1"/>
+              </a:fontRef>
+            </p:style>
+            <p:txBody>
+              <a:bodyPr rtlCol="0" anchor="ctr"/>
+              <a:lstStyle/>
+              <a:p>
+                <a:pPr algn="ctr"/>
+                <a:endParaRPr lang="en-CA" dirty="0"/>
+              </a:p>
+            </p:txBody>
+          </p:sp>
+          <p:sp>
+            <p:nvSpPr>
+              <p:cNvPr id="10" name="Oval 9">
+                <a:extLst>
+                  <a:ext uri="{FF2B5EF4-FFF2-40B4-BE49-F238E27FC236}">
+                    <a16:creationId xmlns:a16="http://schemas.microsoft.com/office/drawing/2014/main" id="{C318BAF6-5024-EAF3-331D-0262AD486266}"/>
+                  </a:ext>
+                </a:extLst>
+              </p:cNvPr>
+              <p:cNvSpPr/>
+              <p:nvPr/>
+            </p:nvSpPr>
+            <p:spPr>
+              <a:xfrm>
+                <a:off x="1201627" y="4745842"/>
+                <a:ext cx="300036" cy="300037"/>
+              </a:xfrm>
+              <a:prstGeom prst="ellipse">
+                <a:avLst/>
+              </a:prstGeom>
+              <a:solidFill>
+                <a:schemeClr val="bg1"/>
+              </a:solidFill>
+              <a:ln>
+                <a:noFill/>
+              </a:ln>
+            </p:spPr>
+            <p:style>
+              <a:lnRef idx="2">
+                <a:schemeClr val="accent1">
+                  <a:shade val="15000"/>
+                </a:schemeClr>
+              </a:lnRef>
+              <a:fillRef idx="1">
+                <a:schemeClr val="accent1"/>
+              </a:fillRef>
+              <a:effectRef idx="0">
+                <a:schemeClr val="accent1"/>
+              </a:effectRef>
+              <a:fontRef idx="minor">
+                <a:schemeClr val="lt1"/>
+              </a:fontRef>
+            </p:style>
+            <p:txBody>
+              <a:bodyPr rtlCol="0" anchor="ctr"/>
+              <a:lstStyle/>
+              <a:p>
+                <a:pPr algn="ctr"/>
+                <a:endParaRPr lang="en-CA"/>
+              </a:p>
+            </p:txBody>
+          </p:sp>
+        </p:grpSp>
+      </p:grpSp>
+      <p:grpSp>
+        <p:nvGrpSpPr>
+          <p:cNvPr id="36" name="Group 35">
+            <a:extLst>
+              <a:ext uri="{FF2B5EF4-FFF2-40B4-BE49-F238E27FC236}">
+                <a16:creationId xmlns:a16="http://schemas.microsoft.com/office/drawing/2014/main" id="{31B6E62A-7559-F139-3E9B-0DE93838FC5B}"/>
+              </a:ext>
+            </a:extLst>
+          </p:cNvPr>
+          <p:cNvGrpSpPr/>
+          <p:nvPr/>
+        </p:nvGrpSpPr>
+        <p:grpSpPr>
+          <a:xfrm>
+            <a:off x="331869" y="4552224"/>
+            <a:ext cx="2878053" cy="1317253"/>
+            <a:chOff x="331871" y="1155279"/>
+            <a:chExt cx="2878053" cy="1317253"/>
+          </a:xfrm>
+        </p:grpSpPr>
+        <p:sp>
+          <p:nvSpPr>
+            <p:cNvPr id="37" name="Rectangle: Rounded Corners 36">
+              <a:extLst>
+                <a:ext uri="{FF2B5EF4-FFF2-40B4-BE49-F238E27FC236}">
+                  <a16:creationId xmlns:a16="http://schemas.microsoft.com/office/drawing/2014/main" id="{531FA97E-1B77-B909-0436-8F3DD59EEE03}"/>
+                </a:ext>
+              </a:extLst>
+            </p:cNvPr>
+            <p:cNvSpPr/>
+            <p:nvPr/>
+          </p:nvSpPr>
+          <p:spPr>
+            <a:xfrm>
+              <a:off x="331871" y="1458117"/>
+              <a:ext cx="2878053" cy="714377"/>
+            </a:xfrm>
+            <a:prstGeom prst="roundRect">
+              <a:avLst>
+                <a:gd name="adj" fmla="val 11544"/>
+              </a:avLst>
+            </a:prstGeom>
+            <a:solidFill>
+              <a:schemeClr val="bg1">
+                <a:lumMod val="90000"/>
+              </a:schemeClr>
+            </a:solidFill>
+            <a:ln>
+              <a:noFill/>
+            </a:ln>
+          </p:spPr>
+          <p:style>
+            <a:lnRef idx="2">
+              <a:schemeClr val="accent1">
+                <a:shade val="15000"/>
+              </a:schemeClr>
+            </a:lnRef>
+            <a:fillRef idx="1">
+              <a:schemeClr val="accent1"/>
+            </a:fillRef>
+            <a:effectRef idx="0">
+              <a:schemeClr val="accent1"/>
+            </a:effectRef>
+            <a:fontRef idx="minor">
+              <a:schemeClr val="lt1"/>
+            </a:fontRef>
+          </p:style>
+          <p:txBody>
+            <a:bodyPr rtlCol="0" anchor="ctr"/>
+            <a:lstStyle/>
+            <a:p>
+              <a:pPr algn="ctr"/>
+              <a:endParaRPr lang="en-CA"/>
+            </a:p>
+          </p:txBody>
+        </p:sp>
+        <p:grpSp>
+          <p:nvGrpSpPr>
+            <p:cNvPr id="38" name="Group 37">
+              <a:extLst>
+                <a:ext uri="{FF2B5EF4-FFF2-40B4-BE49-F238E27FC236}">
+                  <a16:creationId xmlns:a16="http://schemas.microsoft.com/office/drawing/2014/main" id="{99EA239F-292B-763B-4097-DD65C398CF37}"/>
+                </a:ext>
+              </a:extLst>
+            </p:cNvPr>
+            <p:cNvGrpSpPr/>
+            <p:nvPr/>
+          </p:nvGrpSpPr>
+          <p:grpSpPr>
+            <a:xfrm>
+              <a:off x="2703597" y="2172494"/>
+              <a:ext cx="300037" cy="300038"/>
+              <a:chOff x="1234559" y="4745831"/>
+              <a:chExt cx="300037" cy="300038"/>
+            </a:xfrm>
+          </p:grpSpPr>
+          <p:sp>
+            <p:nvSpPr>
+              <p:cNvPr id="42" name="Rectangle 41">
+                <a:extLst>
+                  <a:ext uri="{FF2B5EF4-FFF2-40B4-BE49-F238E27FC236}">
+                    <a16:creationId xmlns:a16="http://schemas.microsoft.com/office/drawing/2014/main" id="{82162502-06A8-C58C-4B15-616BDDC86496}"/>
+                  </a:ext>
+                </a:extLst>
+              </p:cNvPr>
+              <p:cNvSpPr/>
+              <p:nvPr/>
+            </p:nvSpPr>
+            <p:spPr>
+              <a:xfrm>
+                <a:off x="1234559" y="4745832"/>
+                <a:ext cx="300037" cy="300037"/>
+              </a:xfrm>
+              <a:prstGeom prst="rect">
+                <a:avLst/>
+              </a:prstGeom>
+              <a:gradFill flip="none" rotWithShape="1">
+                <a:gsLst>
+                  <a:gs pos="68000">
+                    <a:schemeClr val="bg1"/>
+                  </a:gs>
+                  <a:gs pos="83000">
+                    <a:schemeClr val="bg1">
+                      <a:lumMod val="90000"/>
+                    </a:schemeClr>
+                  </a:gs>
+                </a:gsLst>
+                <a:lin ang="18900000" scaled="1"/>
+                <a:tileRect/>
+              </a:gradFill>
+              <a:ln>
+                <a:noFill/>
+              </a:ln>
+            </p:spPr>
+            <p:style>
+              <a:lnRef idx="2">
+                <a:schemeClr val="accent1">
+                  <a:shade val="15000"/>
+                </a:schemeClr>
+              </a:lnRef>
+              <a:fillRef idx="1">
+                <a:schemeClr val="accent1"/>
+              </a:fillRef>
+              <a:effectRef idx="0">
+                <a:schemeClr val="accent1"/>
+              </a:effectRef>
+              <a:fontRef idx="minor">
+                <a:schemeClr val="lt1"/>
+              </a:fontRef>
+            </p:style>
+            <p:txBody>
+              <a:bodyPr rtlCol="0" anchor="ctr"/>
+              <a:lstStyle/>
+              <a:p>
+                <a:pPr algn="ctr"/>
+                <a:endParaRPr lang="en-CA" dirty="0"/>
+              </a:p>
+            </p:txBody>
+          </p:sp>
+          <p:sp>
+            <p:nvSpPr>
+              <p:cNvPr id="43" name="Oval 42">
+                <a:extLst>
+                  <a:ext uri="{FF2B5EF4-FFF2-40B4-BE49-F238E27FC236}">
+                    <a16:creationId xmlns:a16="http://schemas.microsoft.com/office/drawing/2014/main" id="{D4EC82CD-5565-5BC3-6F58-64776960EA3C}"/>
+                  </a:ext>
+                </a:extLst>
+              </p:cNvPr>
+              <p:cNvSpPr/>
+              <p:nvPr/>
+            </p:nvSpPr>
+            <p:spPr>
+              <a:xfrm>
+                <a:off x="1234559" y="4745831"/>
+                <a:ext cx="300036" cy="300037"/>
+              </a:xfrm>
+              <a:prstGeom prst="ellipse">
+                <a:avLst/>
+              </a:prstGeom>
+              <a:solidFill>
+                <a:schemeClr val="bg1"/>
+              </a:solidFill>
+              <a:ln>
+                <a:noFill/>
+              </a:ln>
+            </p:spPr>
+            <p:style>
+              <a:lnRef idx="2">
+                <a:schemeClr val="accent1">
+                  <a:shade val="15000"/>
+                </a:schemeClr>
+              </a:lnRef>
+              <a:fillRef idx="1">
+                <a:schemeClr val="accent1"/>
+              </a:fillRef>
+              <a:effectRef idx="0">
+                <a:schemeClr val="accent1"/>
+              </a:effectRef>
+              <a:fontRef idx="minor">
+                <a:schemeClr val="lt1"/>
+              </a:fontRef>
+            </p:style>
+            <p:txBody>
+              <a:bodyPr rtlCol="0" anchor="ctr"/>
+              <a:lstStyle/>
+              <a:p>
+                <a:pPr algn="ctr"/>
+                <a:endParaRPr lang="en-CA"/>
+              </a:p>
+            </p:txBody>
+          </p:sp>
+        </p:grpSp>
+        <p:grpSp>
+          <p:nvGrpSpPr>
+            <p:cNvPr id="39" name="Group 38">
+              <a:extLst>
+                <a:ext uri="{FF2B5EF4-FFF2-40B4-BE49-F238E27FC236}">
+                  <a16:creationId xmlns:a16="http://schemas.microsoft.com/office/drawing/2014/main" id="{21E00D15-5933-5DD6-D41E-C987D088AAE8}"/>
+                </a:ext>
+              </a:extLst>
+            </p:cNvPr>
+            <p:cNvGrpSpPr/>
+            <p:nvPr/>
+          </p:nvGrpSpPr>
+          <p:grpSpPr>
+            <a:xfrm rot="5400000">
+              <a:off x="2702405" y="1156469"/>
+              <a:ext cx="302418" cy="300038"/>
+              <a:chOff x="1232178" y="4745831"/>
+              <a:chExt cx="302418" cy="300038"/>
+            </a:xfrm>
+          </p:grpSpPr>
+          <p:sp>
+            <p:nvSpPr>
+              <p:cNvPr id="40" name="Rectangle 39">
+                <a:extLst>
+                  <a:ext uri="{FF2B5EF4-FFF2-40B4-BE49-F238E27FC236}">
+                    <a16:creationId xmlns:a16="http://schemas.microsoft.com/office/drawing/2014/main" id="{DA346C77-6E08-01CD-D3B1-57F57C7A32AE}"/>
+                  </a:ext>
+                </a:extLst>
+              </p:cNvPr>
+              <p:cNvSpPr/>
+              <p:nvPr/>
+            </p:nvSpPr>
+            <p:spPr>
+              <a:xfrm>
+                <a:off x="1234559" y="4745832"/>
+                <a:ext cx="300037" cy="300037"/>
+              </a:xfrm>
+              <a:prstGeom prst="rect">
+                <a:avLst/>
+              </a:prstGeom>
+              <a:gradFill flip="none" rotWithShape="1">
+                <a:gsLst>
+                  <a:gs pos="68000">
+                    <a:schemeClr val="bg1"/>
+                  </a:gs>
+                  <a:gs pos="83000">
+                    <a:schemeClr val="bg1">
+                      <a:lumMod val="90000"/>
+                    </a:schemeClr>
+                  </a:gs>
+                </a:gsLst>
+                <a:lin ang="18900000" scaled="1"/>
+                <a:tileRect/>
+              </a:gradFill>
+              <a:ln>
+                <a:noFill/>
+              </a:ln>
+            </p:spPr>
+            <p:style>
+              <a:lnRef idx="2">
+                <a:schemeClr val="accent1">
+                  <a:shade val="15000"/>
+                </a:schemeClr>
+              </a:lnRef>
+              <a:fillRef idx="1">
+                <a:schemeClr val="accent1"/>
+              </a:fillRef>
+              <a:effectRef idx="0">
+                <a:schemeClr val="accent1"/>
+              </a:effectRef>
+              <a:fontRef idx="minor">
+                <a:schemeClr val="lt1"/>
+              </a:fontRef>
+            </p:style>
+            <p:txBody>
+              <a:bodyPr rtlCol="0" anchor="ctr"/>
+              <a:lstStyle/>
+              <a:p>
+                <a:pPr algn="ctr"/>
+                <a:endParaRPr lang="en-CA" dirty="0"/>
+              </a:p>
+            </p:txBody>
+          </p:sp>
+          <p:sp>
+            <p:nvSpPr>
+              <p:cNvPr id="41" name="Oval 40">
+                <a:extLst>
+                  <a:ext uri="{FF2B5EF4-FFF2-40B4-BE49-F238E27FC236}">
+                    <a16:creationId xmlns:a16="http://schemas.microsoft.com/office/drawing/2014/main" id="{77F9D16A-5F06-EF1F-CB57-C4C72767B597}"/>
+                  </a:ext>
+                </a:extLst>
+              </p:cNvPr>
+              <p:cNvSpPr/>
+              <p:nvPr/>
+            </p:nvSpPr>
+            <p:spPr>
+              <a:xfrm>
+                <a:off x="1232178" y="4745831"/>
+                <a:ext cx="300036" cy="300037"/>
+              </a:xfrm>
+              <a:prstGeom prst="ellipse">
+                <a:avLst/>
+              </a:prstGeom>
+              <a:solidFill>
+                <a:schemeClr val="bg1"/>
+              </a:solidFill>
+              <a:ln>
+                <a:noFill/>
+              </a:ln>
+            </p:spPr>
+            <p:style>
+              <a:lnRef idx="2">
+                <a:schemeClr val="accent1">
+                  <a:shade val="15000"/>
+                </a:schemeClr>
+              </a:lnRef>
+              <a:fillRef idx="1">
+                <a:schemeClr val="accent1"/>
+              </a:fillRef>
+              <a:effectRef idx="0">
+                <a:schemeClr val="accent1"/>
+              </a:effectRef>
+              <a:fontRef idx="minor">
+                <a:schemeClr val="lt1"/>
+              </a:fontRef>
+            </p:style>
+            <p:txBody>
+              <a:bodyPr rtlCol="0" anchor="ctr"/>
+              <a:lstStyle/>
+              <a:p>
+                <a:pPr algn="ctr"/>
+                <a:endParaRPr lang="en-CA" dirty="0"/>
+              </a:p>
+            </p:txBody>
+          </p:sp>
+        </p:grpSp>
+      </p:grpSp>
+      <p:sp>
+        <p:nvSpPr>
+          <p:cNvPr id="23" name="Rectangle: Rounded Corners 22">
+            <a:extLst>
+              <a:ext uri="{FF2B5EF4-FFF2-40B4-BE49-F238E27FC236}">
+                <a16:creationId xmlns:a16="http://schemas.microsoft.com/office/drawing/2014/main" id="{F9D74AA4-4607-9A9B-FC87-368CA06C835C}"/>
+              </a:ext>
+            </a:extLst>
+          </p:cNvPr>
+          <p:cNvSpPr/>
+          <p:nvPr/>
+        </p:nvSpPr>
+        <p:spPr>
+          <a:xfrm>
+            <a:off x="331868" y="3560842"/>
+            <a:ext cx="2878053" cy="714377"/>
+          </a:xfrm>
+          <a:prstGeom prst="roundRect">
+            <a:avLst>
+              <a:gd name="adj" fmla="val 11544"/>
+            </a:avLst>
+          </a:prstGeom>
+          <a:solidFill>
+            <a:schemeClr val="bg1">
+              <a:lumMod val="90000"/>
+            </a:schemeClr>
+          </a:solidFill>
+          <a:ln>
+            <a:noFill/>
+          </a:ln>
+        </p:spPr>
+        <p:style>
+          <a:lnRef idx="2">
+            <a:schemeClr val="accent1">
+              <a:shade val="15000"/>
+            </a:schemeClr>
+          </a:lnRef>
+          <a:fillRef idx="1">
+            <a:schemeClr val="accent1"/>
+          </a:fillRef>
+          <a:effectRef idx="0">
+            <a:schemeClr val="accent1"/>
+          </a:effectRef>
+          <a:fontRef idx="minor">
+            <a:schemeClr val="lt1"/>
+          </a:fontRef>
+        </p:style>
+        <p:txBody>
+          <a:bodyPr rtlCol="0" anchor="ctr"/>
+          <a:lstStyle/>
+          <a:p>
+            <a:pPr algn="ctr"/>
+            <a:endParaRPr lang="en-CA" dirty="0"/>
+          </a:p>
+        </p:txBody>
+      </p:sp>
+      <p:sp>
+        <p:nvSpPr>
+          <p:cNvPr id="13" name="Rectangle: Rounded Corners 12">
+            <a:extLst>
+              <a:ext uri="{FF2B5EF4-FFF2-40B4-BE49-F238E27FC236}">
+                <a16:creationId xmlns:a16="http://schemas.microsoft.com/office/drawing/2014/main" id="{E6E07665-7409-0299-D2C7-08CB2B17259B}"/>
+              </a:ext>
+            </a:extLst>
+          </p:cNvPr>
+          <p:cNvSpPr/>
+          <p:nvPr/>
+        </p:nvSpPr>
+        <p:spPr>
+          <a:xfrm>
+            <a:off x="3003634" y="585785"/>
+            <a:ext cx="8559716" cy="5686427"/>
+          </a:xfrm>
+          <a:prstGeom prst="roundRect">
+            <a:avLst>
+              <a:gd name="adj" fmla="val 2513"/>
+            </a:avLst>
+          </a:prstGeom>
+          <a:solidFill>
+            <a:schemeClr val="bg1">
+              <a:lumMod val="90000"/>
+            </a:schemeClr>
+          </a:solidFill>
+          <a:ln>
+            <a:noFill/>
+          </a:ln>
+        </p:spPr>
+        <p:style>
+          <a:lnRef idx="2">
+            <a:schemeClr val="accent1">
+              <a:shade val="15000"/>
+            </a:schemeClr>
+          </a:lnRef>
+          <a:fillRef idx="1">
+            <a:schemeClr val="accent1"/>
+          </a:fillRef>
+          <a:effectRef idx="0">
+            <a:schemeClr val="accent1"/>
+          </a:effectRef>
+          <a:fontRef idx="minor">
+            <a:schemeClr val="lt1"/>
+          </a:fontRef>
+        </p:style>
+        <p:txBody>
+          <a:bodyPr rtlCol="0" anchor="ctr"/>
+          <a:lstStyle/>
+          <a:p>
+            <a:pPr algn="ctr"/>
+            <a:endParaRPr lang="en-CA" dirty="0"/>
+          </a:p>
+        </p:txBody>
+      </p:sp>
+      <p:sp>
+        <p:nvSpPr>
+          <p:cNvPr id="25" name="Rectangle: Rounded Corners 24">
+            <a:extLst>
+              <a:ext uri="{FF2B5EF4-FFF2-40B4-BE49-F238E27FC236}">
+                <a16:creationId xmlns:a16="http://schemas.microsoft.com/office/drawing/2014/main" id="{51998040-9F67-F5D5-B3BE-3768259C3986}"/>
+              </a:ext>
+            </a:extLst>
+          </p:cNvPr>
+          <p:cNvSpPr/>
+          <p:nvPr/>
+        </p:nvSpPr>
+        <p:spPr>
+          <a:xfrm>
+            <a:off x="331865" y="4142891"/>
+            <a:ext cx="2878053" cy="714377"/>
+          </a:xfrm>
+          <a:prstGeom prst="roundRect">
+            <a:avLst>
+              <a:gd name="adj" fmla="val 11544"/>
+            </a:avLst>
+          </a:prstGeom>
+          <a:solidFill>
+            <a:schemeClr val="bg1">
+              <a:lumMod val="90000"/>
+            </a:schemeClr>
+          </a:solidFill>
+          <a:ln>
+            <a:noFill/>
+          </a:ln>
+        </p:spPr>
+        <p:style>
+          <a:lnRef idx="2">
+            <a:schemeClr val="accent1">
+              <a:shade val="15000"/>
+            </a:schemeClr>
+          </a:lnRef>
+          <a:fillRef idx="1">
+            <a:schemeClr val="accent1"/>
+          </a:fillRef>
+          <a:effectRef idx="0">
+            <a:schemeClr val="accent1"/>
+          </a:effectRef>
+          <a:fontRef idx="minor">
+            <a:schemeClr val="lt1"/>
+          </a:fontRef>
+        </p:style>
+        <p:txBody>
+          <a:bodyPr rtlCol="0" anchor="ctr"/>
+          <a:lstStyle/>
+          <a:p>
+            <a:pPr algn="ctr"/>
+            <a:endParaRPr lang="en-CA" dirty="0"/>
+          </a:p>
+        </p:txBody>
+      </p:sp>
+      <p:grpSp>
+        <p:nvGrpSpPr>
+          <p:cNvPr id="35" name="Group 34">
+            <a:extLst>
+              <a:ext uri="{FF2B5EF4-FFF2-40B4-BE49-F238E27FC236}">
+                <a16:creationId xmlns:a16="http://schemas.microsoft.com/office/drawing/2014/main" id="{463DC4A3-A39B-4E5B-6690-CCEBAB13C8DA}"/>
+              </a:ext>
+            </a:extLst>
+          </p:cNvPr>
+          <p:cNvGrpSpPr/>
+          <p:nvPr/>
+        </p:nvGrpSpPr>
+        <p:grpSpPr>
+          <a:xfrm>
+            <a:off x="2703587" y="4858611"/>
+            <a:ext cx="300037" cy="300038"/>
+            <a:chOff x="2703595" y="4869547"/>
+            <a:chExt cx="300037" cy="300038"/>
+          </a:xfrm>
+        </p:grpSpPr>
+        <p:sp>
+          <p:nvSpPr>
+            <p:cNvPr id="27" name="Rectangle 26">
+              <a:extLst>
+                <a:ext uri="{FF2B5EF4-FFF2-40B4-BE49-F238E27FC236}">
+                  <a16:creationId xmlns:a16="http://schemas.microsoft.com/office/drawing/2014/main" id="{0CF1DFEC-2DBA-9208-2482-4D6A1C9EE649}"/>
+                </a:ext>
+              </a:extLst>
+            </p:cNvPr>
+            <p:cNvSpPr/>
+            <p:nvPr/>
+          </p:nvSpPr>
+          <p:spPr>
+            <a:xfrm>
+              <a:off x="2703595" y="4869548"/>
+              <a:ext cx="300037" cy="300037"/>
+            </a:xfrm>
+            <a:prstGeom prst="rect">
+              <a:avLst/>
+            </a:prstGeom>
+            <a:gradFill flip="none" rotWithShape="1">
+              <a:gsLst>
+                <a:gs pos="68000">
+                  <a:schemeClr val="bg1"/>
+                </a:gs>
+                <a:gs pos="83000">
+                  <a:schemeClr val="bg1">
+                    <a:lumMod val="90000"/>
+                  </a:schemeClr>
+                </a:gs>
+              </a:gsLst>
+              <a:lin ang="18900000" scaled="1"/>
+              <a:tileRect/>
+            </a:gradFill>
+            <a:ln>
+              <a:noFill/>
+            </a:ln>
+          </p:spPr>
+          <p:style>
+            <a:lnRef idx="2">
+              <a:schemeClr val="accent1">
+                <a:shade val="15000"/>
+              </a:schemeClr>
+            </a:lnRef>
+            <a:fillRef idx="1">
+              <a:schemeClr val="accent1"/>
+            </a:fillRef>
+            <a:effectRef idx="0">
+              <a:schemeClr val="accent1"/>
+            </a:effectRef>
+            <a:fontRef idx="minor">
+              <a:schemeClr val="lt1"/>
+            </a:fontRef>
+          </p:style>
+          <p:txBody>
+            <a:bodyPr rtlCol="0" anchor="ctr"/>
+            <a:lstStyle/>
+            <a:p>
+              <a:pPr algn="ctr"/>
+              <a:endParaRPr lang="en-CA" dirty="0"/>
+            </a:p>
+          </p:txBody>
+        </p:sp>
+        <p:sp>
+          <p:nvSpPr>
+            <p:cNvPr id="29" name="Oval 28">
+              <a:extLst>
+                <a:ext uri="{FF2B5EF4-FFF2-40B4-BE49-F238E27FC236}">
+                  <a16:creationId xmlns:a16="http://schemas.microsoft.com/office/drawing/2014/main" id="{66DFE403-1C7C-C8F3-9877-A80D20C114FF}"/>
+                </a:ext>
+              </a:extLst>
+            </p:cNvPr>
+            <p:cNvSpPr/>
+            <p:nvPr/>
+          </p:nvSpPr>
+          <p:spPr>
+            <a:xfrm>
+              <a:off x="2703596" y="4869547"/>
+              <a:ext cx="300036" cy="300037"/>
+            </a:xfrm>
+            <a:prstGeom prst="ellipse">
+              <a:avLst/>
+            </a:prstGeom>
+            <a:solidFill>
+              <a:schemeClr val="bg1"/>
+            </a:solidFill>
+            <a:ln>
+              <a:noFill/>
+            </a:ln>
+          </p:spPr>
+          <p:style>
+            <a:lnRef idx="2">
+              <a:schemeClr val="accent1">
+                <a:shade val="15000"/>
+              </a:schemeClr>
+            </a:lnRef>
+            <a:fillRef idx="1">
+              <a:schemeClr val="accent1"/>
+            </a:fillRef>
+            <a:effectRef idx="0">
+              <a:schemeClr val="accent1"/>
+            </a:effectRef>
+            <a:fontRef idx="minor">
+              <a:schemeClr val="lt1"/>
+            </a:fontRef>
+          </p:style>
+          <p:txBody>
+            <a:bodyPr rtlCol="0" anchor="ctr"/>
+            <a:lstStyle/>
+            <a:p>
+              <a:pPr algn="ctr"/>
+              <a:endParaRPr lang="en-CA"/>
+            </a:p>
+          </p:txBody>
+        </p:sp>
+      </p:grpSp>
+      <p:grpSp>
+        <p:nvGrpSpPr>
+          <p:cNvPr id="34" name="Group 33">
+            <a:extLst>
+              <a:ext uri="{FF2B5EF4-FFF2-40B4-BE49-F238E27FC236}">
+                <a16:creationId xmlns:a16="http://schemas.microsoft.com/office/drawing/2014/main" id="{14B38CD1-EE2E-950A-9DA5-54F3E61632D3}"/>
+              </a:ext>
+            </a:extLst>
+          </p:cNvPr>
+          <p:cNvGrpSpPr/>
+          <p:nvPr/>
+        </p:nvGrpSpPr>
+        <p:grpSpPr>
+          <a:xfrm>
+            <a:off x="2703595" y="3263292"/>
+            <a:ext cx="300039" cy="300037"/>
+            <a:chOff x="2703595" y="3271719"/>
+            <a:chExt cx="300039" cy="300037"/>
+          </a:xfrm>
+        </p:grpSpPr>
+        <p:sp>
+          <p:nvSpPr>
+            <p:cNvPr id="31" name="Rectangle 30">
+              <a:extLst>
+                <a:ext uri="{FF2B5EF4-FFF2-40B4-BE49-F238E27FC236}">
+                  <a16:creationId xmlns:a16="http://schemas.microsoft.com/office/drawing/2014/main" id="{C4B82AEB-6F05-FFA7-A11F-2DC293FAA675}"/>
+                </a:ext>
+              </a:extLst>
+            </p:cNvPr>
+            <p:cNvSpPr/>
+            <p:nvPr/>
+          </p:nvSpPr>
+          <p:spPr>
+            <a:xfrm rot="5400000">
+              <a:off x="2703597" y="3271719"/>
+              <a:ext cx="300037" cy="300037"/>
+            </a:xfrm>
+            <a:prstGeom prst="rect">
+              <a:avLst/>
+            </a:prstGeom>
+            <a:gradFill flip="none" rotWithShape="1">
+              <a:gsLst>
+                <a:gs pos="68000">
+                  <a:schemeClr val="bg1"/>
+                </a:gs>
+                <a:gs pos="83000">
+                  <a:schemeClr val="bg1">
+                    <a:lumMod val="90000"/>
+                  </a:schemeClr>
+                </a:gs>
+              </a:gsLst>
+              <a:lin ang="18900000" scaled="1"/>
+              <a:tileRect/>
+            </a:gradFill>
+            <a:ln>
+              <a:noFill/>
+            </a:ln>
+          </p:spPr>
+          <p:style>
+            <a:lnRef idx="2">
+              <a:schemeClr val="accent1">
+                <a:shade val="15000"/>
+              </a:schemeClr>
+            </a:lnRef>
+            <a:fillRef idx="1">
+              <a:schemeClr val="accent1"/>
+            </a:fillRef>
+            <a:effectRef idx="0">
+              <a:schemeClr val="accent1"/>
+            </a:effectRef>
+            <a:fontRef idx="minor">
+              <a:schemeClr val="lt1"/>
+            </a:fontRef>
+          </p:style>
+          <p:txBody>
+            <a:bodyPr rtlCol="0" anchor="ctr"/>
+            <a:lstStyle/>
+            <a:p>
+              <a:pPr algn="ctr"/>
+              <a:endParaRPr lang="en-CA" dirty="0"/>
+            </a:p>
+          </p:txBody>
+        </p:sp>
+        <p:sp>
+          <p:nvSpPr>
+            <p:cNvPr id="33" name="Oval 32">
+              <a:extLst>
+                <a:ext uri="{FF2B5EF4-FFF2-40B4-BE49-F238E27FC236}">
+                  <a16:creationId xmlns:a16="http://schemas.microsoft.com/office/drawing/2014/main" id="{4F3A035A-B9C1-EBA1-906E-B743932C3145}"/>
+                </a:ext>
+              </a:extLst>
+            </p:cNvPr>
+            <p:cNvSpPr/>
+            <p:nvPr/>
+          </p:nvSpPr>
+          <p:spPr>
+            <a:xfrm rot="5400000">
+              <a:off x="2703596" y="3271719"/>
+              <a:ext cx="300036" cy="300037"/>
+            </a:xfrm>
+            <a:prstGeom prst="ellipse">
+              <a:avLst/>
+            </a:prstGeom>
+            <a:solidFill>
+              <a:schemeClr val="bg1"/>
+            </a:solidFill>
+            <a:ln>
+              <a:noFill/>
+            </a:ln>
+          </p:spPr>
+          <p:style>
+            <a:lnRef idx="2">
+              <a:schemeClr val="accent1">
+                <a:shade val="15000"/>
+              </a:schemeClr>
+            </a:lnRef>
+            <a:fillRef idx="1">
+              <a:schemeClr val="accent1"/>
+            </a:fillRef>
+            <a:effectRef idx="0">
+              <a:schemeClr val="accent1"/>
+            </a:effectRef>
+            <a:fontRef idx="minor">
+              <a:schemeClr val="lt1"/>
+            </a:fontRef>
+          </p:style>
+          <p:txBody>
+            <a:bodyPr rtlCol="0" anchor="ctr"/>
+            <a:lstStyle/>
+            <a:p>
+              <a:pPr algn="ctr"/>
+              <a:endParaRPr lang="en-CA"/>
+            </a:p>
+          </p:txBody>
+        </p:sp>
+      </p:grpSp>
+      <p:sp>
+        <p:nvSpPr>
+          <p:cNvPr id="2" name="TextBox 1">
+            <a:extLst>
+              <a:ext uri="{FF2B5EF4-FFF2-40B4-BE49-F238E27FC236}">
+                <a16:creationId xmlns:a16="http://schemas.microsoft.com/office/drawing/2014/main" id="{BE62EA9C-DB1F-1B50-8801-ADDC7A45F796}"/>
+              </a:ext>
+            </a:extLst>
+          </p:cNvPr>
+          <p:cNvSpPr txBox="1"/>
+          <p:nvPr/>
+        </p:nvSpPr>
+        <p:spPr>
+          <a:xfrm>
+            <a:off x="440111" y="376344"/>
+            <a:ext cx="2563522" cy="5997476"/>
+          </a:xfrm>
+          <a:prstGeom prst="rect">
+            <a:avLst/>
+          </a:prstGeom>
+          <a:noFill/>
+        </p:spPr>
+        <p:txBody>
+          <a:bodyPr wrap="none" rtlCol="0">
+            <a:spAutoFit/>
+          </a:bodyPr>
+          <a:lstStyle/>
+          <a:p>
+            <a:pPr>
+              <a:lnSpc>
+                <a:spcPct val="200000"/>
+              </a:lnSpc>
+            </a:pPr>
+            <a:r>
+              <a:rPr lang="en-CA" sz="2800" dirty="0">
+                <a:solidFill>
+                  <a:schemeClr val="tx1">
+                    <a:lumMod val="25000"/>
+                    <a:lumOff val="75000"/>
+                  </a:schemeClr>
+                </a:solidFill>
+                <a:latin typeface="Kumbh Sans" pitchFamily="2" charset="0"/>
+                <a:cs typeface="Kumbh Sans" pitchFamily="2" charset="0"/>
+              </a:rPr>
+              <a:t>Adestria</a:t>
+            </a:r>
+          </a:p>
+          <a:p>
+            <a:pPr>
+              <a:lnSpc>
+                <a:spcPct val="200000"/>
+              </a:lnSpc>
+            </a:pPr>
+            <a:r>
+              <a:rPr lang="en-CA" sz="2800" dirty="0">
+                <a:latin typeface="Kumbh Sans" pitchFamily="2" charset="0"/>
+                <a:cs typeface="Kumbh Sans" pitchFamily="2" charset="0"/>
+              </a:rPr>
+              <a:t>Project</a:t>
+            </a:r>
+          </a:p>
+          <a:p>
+            <a:pPr>
+              <a:lnSpc>
+                <a:spcPct val="200000"/>
+              </a:lnSpc>
+            </a:pPr>
+            <a:r>
+              <a:rPr lang="en-CA" sz="2800" dirty="0">
+                <a:solidFill>
+                  <a:schemeClr val="tx1">
+                    <a:lumMod val="25000"/>
+                    <a:lumOff val="75000"/>
+                  </a:schemeClr>
+                </a:solidFill>
+                <a:latin typeface="Kumbh Sans" pitchFamily="2" charset="0"/>
+                <a:cs typeface="Kumbh Sans" pitchFamily="2" charset="0"/>
+              </a:rPr>
+              <a:t>    Existing </a:t>
+            </a:r>
+          </a:p>
+          <a:p>
+            <a:r>
+              <a:rPr lang="en-CA" sz="2800" dirty="0">
+                <a:solidFill>
+                  <a:schemeClr val="tx1">
+                    <a:lumMod val="25000"/>
+                    <a:lumOff val="75000"/>
+                  </a:schemeClr>
+                </a:solidFill>
+                <a:latin typeface="Kumbh Sans" pitchFamily="2" charset="0"/>
+                <a:cs typeface="Kumbh Sans" pitchFamily="2" charset="0"/>
+              </a:rPr>
+              <a:t>    Solutions</a:t>
+            </a:r>
+          </a:p>
+          <a:p>
+            <a:pPr>
+              <a:lnSpc>
+                <a:spcPct val="200000"/>
+              </a:lnSpc>
+            </a:pPr>
+            <a:r>
+              <a:rPr lang="en-CA" sz="2800" dirty="0">
+                <a:solidFill>
+                  <a:schemeClr val="tx1">
+                    <a:lumMod val="25000"/>
+                    <a:lumOff val="75000"/>
+                  </a:schemeClr>
+                </a:solidFill>
+                <a:latin typeface="Kumbh Sans" pitchFamily="2" charset="0"/>
+                <a:cs typeface="Kumbh Sans" pitchFamily="2" charset="0"/>
+              </a:rPr>
+              <a:t>    </a:t>
+            </a:r>
+            <a:r>
+              <a:rPr lang="en-CA" sz="2800" dirty="0">
+                <a:latin typeface="Kumbh Sans" pitchFamily="2" charset="0"/>
+                <a:cs typeface="Kumbh Sans" pitchFamily="2" charset="0"/>
+              </a:rPr>
+              <a:t>Custom</a:t>
+            </a:r>
+          </a:p>
+          <a:p>
+            <a:r>
+              <a:rPr lang="en-CA" sz="2800" dirty="0">
+                <a:latin typeface="Kumbh Sans" pitchFamily="2" charset="0"/>
+                <a:cs typeface="Kumbh Sans" pitchFamily="2" charset="0"/>
+              </a:rPr>
+              <a:t>    Solution</a:t>
+            </a:r>
+          </a:p>
+          <a:p>
+            <a:pPr>
+              <a:lnSpc>
+                <a:spcPct val="200000"/>
+              </a:lnSpc>
+            </a:pPr>
+            <a:r>
+              <a:rPr lang="en-CA" sz="2800" dirty="0">
+                <a:solidFill>
+                  <a:schemeClr val="tx1">
+                    <a:lumMod val="25000"/>
+                    <a:lumOff val="75000"/>
+                  </a:schemeClr>
+                </a:solidFill>
+                <a:latin typeface="Kumbh Sans" pitchFamily="2" charset="0"/>
+                <a:cs typeface="Kumbh Sans" pitchFamily="2" charset="0"/>
+              </a:rPr>
+              <a:t>    Comparison</a:t>
+            </a:r>
+          </a:p>
+          <a:p>
+            <a:pPr>
+              <a:lnSpc>
+                <a:spcPct val="200000"/>
+              </a:lnSpc>
+            </a:pPr>
+            <a:r>
+              <a:rPr lang="en-CA" sz="2800" dirty="0">
+                <a:solidFill>
+                  <a:schemeClr val="tx1">
+                    <a:lumMod val="25000"/>
+                    <a:lumOff val="75000"/>
+                  </a:schemeClr>
+                </a:solidFill>
+                <a:latin typeface="Kumbh Sans" pitchFamily="2" charset="0"/>
+                <a:cs typeface="Kumbh Sans" pitchFamily="2" charset="0"/>
+              </a:rPr>
+              <a:t>Q &amp; A</a:t>
+            </a:r>
+          </a:p>
+        </p:txBody>
+      </p:sp>
+      <p:pic>
+        <p:nvPicPr>
+          <p:cNvPr id="14" name="Picture 13">
+            <a:extLst>
+              <a:ext uri="{FF2B5EF4-FFF2-40B4-BE49-F238E27FC236}">
+                <a16:creationId xmlns:a16="http://schemas.microsoft.com/office/drawing/2014/main" id="{21B69710-7364-55BB-57A9-EA2F37650EA3}"/>
+              </a:ext>
+            </a:extLst>
+          </p:cNvPr>
+          <p:cNvPicPr>
+            <a:picLocks noChangeAspect="1"/>
+          </p:cNvPicPr>
+          <p:nvPr/>
+        </p:nvPicPr>
+        <p:blipFill>
+          <a:blip r:embed="rId3">
+            <a:extLst>
+              <a:ext uri="{28A0092B-C50C-407E-A947-70E740481C1C}">
+                <a14:useLocalDpi xmlns:a14="http://schemas.microsoft.com/office/drawing/2010/main" val="0"/>
+              </a:ext>
+            </a:extLst>
+          </a:blip>
+          <a:srcRect/>
+          <a:stretch/>
+        </p:blipFill>
+        <p:spPr>
+          <a:xfrm>
+            <a:off x="3276600" y="922020"/>
+            <a:ext cx="8012301" cy="5067559"/>
+          </a:xfrm>
+          <a:prstGeom prst="rect">
+            <a:avLst/>
+          </a:prstGeom>
+        </p:spPr>
+      </p:pic>
+      <p:sp>
+        <p:nvSpPr>
+          <p:cNvPr id="15" name="TextBox 14">
+            <a:extLst>
+              <a:ext uri="{FF2B5EF4-FFF2-40B4-BE49-F238E27FC236}">
+                <a16:creationId xmlns:a16="http://schemas.microsoft.com/office/drawing/2014/main" id="{0CF5D8F1-B91A-3455-E4EC-2D0833ACFAF5}"/>
+              </a:ext>
+            </a:extLst>
+          </p:cNvPr>
+          <p:cNvSpPr txBox="1"/>
+          <p:nvPr/>
+        </p:nvSpPr>
+        <p:spPr>
+          <a:xfrm>
+            <a:off x="6178865" y="868422"/>
+            <a:ext cx="2209259" cy="721929"/>
+          </a:xfrm>
+          <a:prstGeom prst="rect">
+            <a:avLst/>
+          </a:prstGeom>
+          <a:noFill/>
+        </p:spPr>
+        <p:txBody>
+          <a:bodyPr wrap="none" rtlCol="0">
+            <a:spAutoFit/>
+          </a:bodyPr>
+          <a:lstStyle/>
+          <a:p>
+            <a:pPr algn="ctr">
+              <a:lnSpc>
+                <a:spcPct val="200000"/>
+              </a:lnSpc>
+            </a:pPr>
+            <a:r>
+              <a:rPr lang="en-CA" sz="2400" dirty="0">
+                <a:latin typeface="Kumbh Sans" pitchFamily="2" charset="0"/>
+                <a:cs typeface="Kumbh Sans" pitchFamily="2" charset="0"/>
+              </a:rPr>
+              <a:t>NCR Manager</a:t>
+            </a:r>
+          </a:p>
+        </p:txBody>
+      </p:sp>
+    </p:spTree>
+    <p:extLst>
+      <p:ext uri="{BB962C8B-B14F-4D97-AF65-F5344CB8AC3E}">
+        <p14:creationId xmlns:p14="http://schemas.microsoft.com/office/powerpoint/2010/main" val="2234467840"/>
+      </p:ext>
+    </p:extLst>
+  </p:cSld>
+  <p:clrMapOvr>
+    <a:masterClrMapping/>
+  </p:clrMapOvr>
+  <mc:AlternateContent xmlns:mc="http://schemas.openxmlformats.org/markup-compatibility/2006" xmlns:p14="http://schemas.microsoft.com/office/powerpoint/2010/main">
+    <mc:Choice Requires="p14">
+      <p:transition spd="med" p14:dur="700">
+        <p:fade/>
+      </p:transition>
+    </mc:Choice>
+    <mc:Fallback xmlns="">
+      <p:transition spd="med">
+        <p:fade/>
+      </p:transition>
+    </mc:Fallback>
+  </mc:AlternateContent>
   <p:timing>
     <p:tnLst>
       <p:par>
@@ -16398,7 +16720,7 @@
 </p:sld>
 </file>
 
-<file path=ppt/slides/slide14.xml><?xml version="1.0" encoding="utf-8"?>
+<file path=ppt/slides/slide15.xml><?xml version="1.0" encoding="utf-8"?>
 <p:sld xmlns:a="http://schemas.openxmlformats.org/drawingml/2006/main" xmlns:r="http://schemas.openxmlformats.org/officeDocument/2006/relationships" xmlns:p="http://schemas.openxmlformats.org/presentationml/2006/main">
   <p:cSld>
     <p:spTree>
@@ -19201,6 +19523,62 @@
           </p:txBody>
         </p:sp>
       </p:grpSp>
+      <p:sp>
+        <p:nvSpPr>
+          <p:cNvPr id="17" name="Rectangle: Rounded Corners 16">
+            <a:extLst>
+              <a:ext uri="{FF2B5EF4-FFF2-40B4-BE49-F238E27FC236}">
+                <a16:creationId xmlns:a16="http://schemas.microsoft.com/office/drawing/2014/main" id="{0566E6FD-1225-A001-B1DE-97A48C17A76C}"/>
+              </a:ext>
+            </a:extLst>
+          </p:cNvPr>
+          <p:cNvSpPr/>
+          <p:nvPr/>
+        </p:nvSpPr>
+        <p:spPr>
+          <a:xfrm>
+            <a:off x="3003634" y="582834"/>
+            <a:ext cx="8559716" cy="5686427"/>
+          </a:xfrm>
+          <a:prstGeom prst="roundRect">
+            <a:avLst>
+              <a:gd name="adj" fmla="val 2513"/>
+            </a:avLst>
+          </a:prstGeom>
+          <a:solidFill>
+            <a:schemeClr val="bg1">
+              <a:lumMod val="90000"/>
+            </a:schemeClr>
+          </a:solidFill>
+          <a:ln>
+            <a:noFill/>
+          </a:ln>
+        </p:spPr>
+        <p:style>
+          <a:lnRef idx="2">
+            <a:schemeClr val="accent1">
+              <a:shade val="15000"/>
+            </a:schemeClr>
+          </a:lnRef>
+          <a:fillRef idx="1">
+            <a:schemeClr val="accent1"/>
+          </a:fillRef>
+          <a:effectRef idx="0">
+            <a:schemeClr val="accent1"/>
+          </a:effectRef>
+          <a:fontRef idx="minor">
+            <a:schemeClr val="lt1"/>
+          </a:fontRef>
+        </p:style>
+        <p:txBody>
+          <a:bodyPr rtlCol="0" anchor="ctr"/>
+          <a:lstStyle/>
+          <a:p>
+            <a:pPr algn="ctr"/>
+            <a:endParaRPr lang="en-CA" dirty="0"/>
+          </a:p>
+        </p:txBody>
+      </p:sp>
     </p:spTree>
     <p:extLst>
       <p:ext uri="{BB962C8B-B14F-4D97-AF65-F5344CB8AC3E}">
@@ -19211,13 +19589,13 @@
   <p:clrMapOvr>
     <a:masterClrMapping/>
   </p:clrMapOvr>
-  <mc:AlternateContent xmlns:mc="http://schemas.openxmlformats.org/markup-compatibility/2006">
-    <mc:Choice xmlns:p14="http://schemas.microsoft.com/office/powerpoint/2010/main" Requires="p14">
+  <mc:AlternateContent xmlns:mc="http://schemas.openxmlformats.org/markup-compatibility/2006" xmlns:p14="http://schemas.microsoft.com/office/powerpoint/2010/main">
+    <mc:Choice Requires="p14">
       <p:transition spd="med" p14:dur="700">
         <p:fade/>
       </p:transition>
     </mc:Choice>
-    <mc:Fallback>
+    <mc:Fallback xmlns="">
       <p:transition spd="med">
         <p:fade/>
       </p:transition>
@@ -19244,7 +19622,7 @@
                             </p:stCondLst>
                             <p:childTnLst>
                               <p:par>
-                                <p:cTn id="5" presetID="1" presetClass="entr" presetSubtype="0" fill="hold" grpId="0" nodeType="clickEffect">
+                                <p:cTn id="5" presetID="10" presetClass="entr" presetSubtype="0" fill="hold" grpId="0" nodeType="clickEffect">
                                   <p:stCondLst>
                                     <p:cond delay="0"/>
                                   </p:stCondLst>
@@ -19252,6 +19630,50 @@
                                     <p:set>
                                       <p:cBhvr>
                                         <p:cTn id="6" dur="1" fill="hold">
+                                          <p:stCondLst>
+                                            <p:cond delay="0"/>
+                                          </p:stCondLst>
+                                        </p:cTn>
+                                        <p:tgtEl>
+                                          <p:spTgt spid="17"/>
+                                        </p:tgtEl>
+                                        <p:attrNameLst>
+                                          <p:attrName>style.visibility</p:attrName>
+                                        </p:attrNameLst>
+                                      </p:cBhvr>
+                                      <p:to>
+                                        <p:strVal val="visible"/>
+                                      </p:to>
+                                    </p:set>
+                                    <p:animEffect transition="in" filter="fade">
+                                      <p:cBhvr>
+                                        <p:cTn id="7" dur="500"/>
+                                        <p:tgtEl>
+                                          <p:spTgt spid="17"/>
+                                        </p:tgtEl>
+                                      </p:cBhvr>
+                                    </p:animEffect>
+                                  </p:childTnLst>
+                                </p:cTn>
+                              </p:par>
+                            </p:childTnLst>
+                          </p:cTn>
+                        </p:par>
+                        <p:par>
+                          <p:cTn id="8" fill="hold">
+                            <p:stCondLst>
+                              <p:cond delay="500"/>
+                            </p:stCondLst>
+                            <p:childTnLst>
+                              <p:par>
+                                <p:cTn id="9" presetID="1" presetClass="entr" presetSubtype="0" fill="hold" grpId="0" nodeType="afterEffect">
+                                  <p:stCondLst>
+                                    <p:cond delay="0"/>
+                                  </p:stCondLst>
+                                  <p:childTnLst>
+                                    <p:set>
+                                      <p:cBhvr>
+                                        <p:cTn id="10" dur="1" fill="hold">
                                           <p:stCondLst>
                                             <p:cond delay="0"/>
                                           </p:stCondLst>
@@ -19271,28 +19693,28 @@
                                 </p:cTn>
                               </p:par>
                               <p:par>
-                                <p:cTn id="7" presetID="10" presetClass="exit" presetSubtype="0" fill="hold" grpId="0" nodeType="withEffect">
+                                <p:cTn id="11" presetID="10" presetClass="exit" presetSubtype="0" fill="hold" grpId="1" nodeType="withEffect">
                                   <p:stCondLst>
                                     <p:cond delay="0"/>
                                   </p:stCondLst>
                                   <p:childTnLst>
                                     <p:animEffect transition="out" filter="fade">
                                       <p:cBhvr>
-                                        <p:cTn id="8" dur="500"/>
-                                        <p:tgtEl>
-                                          <p:spTgt spid="13"/>
+                                        <p:cTn id="12" dur="500"/>
+                                        <p:tgtEl>
+                                          <p:spTgt spid="17"/>
                                         </p:tgtEl>
                                       </p:cBhvr>
                                     </p:animEffect>
                                     <p:set>
                                       <p:cBhvr>
-                                        <p:cTn id="9" dur="1" fill="hold">
+                                        <p:cTn id="13" dur="1" fill="hold">
                                           <p:stCondLst>
                                             <p:cond delay="499"/>
                                           </p:stCondLst>
                                         </p:cTn>
                                         <p:tgtEl>
-                                          <p:spTgt spid="13"/>
+                                          <p:spTgt spid="17"/>
                                         </p:tgtEl>
                                         <p:attrNameLst>
                                           <p:attrName>style.visibility</p:attrName>
@@ -19306,63 +19728,20 @@
                                 </p:cTn>
                               </p:par>
                               <p:par>
-                                <p:cTn id="10" presetID="10" presetClass="exit" presetSubtype="0" fill="hold" nodeType="withEffect">
+                                <p:cTn id="14" presetID="1" presetClass="exit" presetSubtype="0" fill="hold" grpId="0" nodeType="withEffect">
                                   <p:stCondLst>
                                     <p:cond delay="0"/>
                                   </p:stCondLst>
                                   <p:childTnLst>
-                                    <p:animEffect transition="out" filter="fade">
-                                      <p:cBhvr>
-                                        <p:cTn id="11" dur="500"/>
-                                        <p:tgtEl>
-                                          <p:spTgt spid="3"/>
-                                        </p:tgtEl>
-                                      </p:cBhvr>
-                                    </p:animEffect>
                                     <p:set>
                                       <p:cBhvr>
-                                        <p:cTn id="12" dur="1" fill="hold">
+                                        <p:cTn id="15" dur="1" fill="hold">
                                           <p:stCondLst>
-                                            <p:cond delay="499"/>
+                                            <p:cond delay="0"/>
                                           </p:stCondLst>
                                         </p:cTn>
                                         <p:tgtEl>
-                                          <p:spTgt spid="3"/>
-                                        </p:tgtEl>
-                                        <p:attrNameLst>
-                                          <p:attrName>style.visibility</p:attrName>
-                                        </p:attrNameLst>
-                                      </p:cBhvr>
-                                      <p:to>
-                                        <p:strVal val="hidden"/>
-                                      </p:to>
-                                    </p:set>
-                                  </p:childTnLst>
-                                </p:cTn>
-                              </p:par>
-                              <p:par>
-                                <p:cTn id="13" presetID="10" presetClass="exit" presetSubtype="0" fill="hold" nodeType="withEffect">
-                                  <p:stCondLst>
-                                    <p:cond delay="0"/>
-                                  </p:stCondLst>
-                                  <p:childTnLst>
-                                    <p:animEffect transition="out" filter="fade">
-                                      <p:cBhvr>
-                                        <p:cTn id="14" dur="500"/>
-                                        <p:tgtEl>
-                                          <p:spTgt spid="21"/>
-                                        </p:tgtEl>
-                                      </p:cBhvr>
-                                    </p:animEffect>
-                                    <p:set>
-                                      <p:cBhvr>
-                                        <p:cTn id="15" dur="1" fill="hold">
-                                          <p:stCondLst>
-                                            <p:cond delay="499"/>
-                                          </p:stCondLst>
-                                        </p:cTn>
-                                        <p:tgtEl>
-                                          <p:spTgt spid="21"/>
+                                          <p:spTgt spid="13"/>
                                         </p:tgtEl>
                                         <p:attrNameLst>
                                           <p:attrName>style.visibility</p:attrName>
@@ -19385,7 +19764,7 @@
                                       <p:cBhvr>
                                         <p:cTn id="17" dur="500"/>
                                         <p:tgtEl>
-                                          <p:spTgt spid="27"/>
+                                          <p:spTgt spid="3"/>
                                         </p:tgtEl>
                                       </p:cBhvr>
                                     </p:animEffect>
@@ -19397,7 +19776,7 @@
                                           </p:stCondLst>
                                         </p:cTn>
                                         <p:tgtEl>
-                                          <p:spTgt spid="27"/>
+                                          <p:spTgt spid="3"/>
                                         </p:tgtEl>
                                         <p:attrNameLst>
                                           <p:attrName>style.visibility</p:attrName>
@@ -19411,28 +19790,20 @@
                                 </p:cTn>
                               </p:par>
                               <p:par>
-                                <p:cTn id="19" presetID="10" presetClass="exit" presetSubtype="0" fill="hold" nodeType="withEffect">
+                                <p:cTn id="19" presetID="1" presetClass="exit" presetSubtype="0" fill="hold" nodeType="withEffect">
                                   <p:stCondLst>
                                     <p:cond delay="0"/>
                                   </p:stCondLst>
                                   <p:childTnLst>
-                                    <p:animEffect transition="out" filter="fade">
-                                      <p:cBhvr>
-                                        <p:cTn id="20" dur="500"/>
-                                        <p:tgtEl>
-                                          <p:spTgt spid="24"/>
-                                        </p:tgtEl>
-                                      </p:cBhvr>
-                                    </p:animEffect>
                                     <p:set>
                                       <p:cBhvr>
-                                        <p:cTn id="21" dur="1" fill="hold">
+                                        <p:cTn id="20" dur="1" fill="hold">
                                           <p:stCondLst>
-                                            <p:cond delay="499"/>
+                                            <p:cond delay="0"/>
                                           </p:stCondLst>
                                         </p:cTn>
                                         <p:tgtEl>
-                                          <p:spTgt spid="24"/>
+                                          <p:spTgt spid="21"/>
                                         </p:tgtEl>
                                         <p:attrNameLst>
                                           <p:attrName>style.visibility</p:attrName>
@@ -19446,28 +19817,20 @@
                                 </p:cTn>
                               </p:par>
                               <p:par>
-                                <p:cTn id="22" presetID="10" presetClass="exit" presetSubtype="0" fill="hold" nodeType="withEffect">
+                                <p:cTn id="21" presetID="1" presetClass="exit" presetSubtype="0" fill="hold" nodeType="withEffect">
                                   <p:stCondLst>
                                     <p:cond delay="0"/>
                                   </p:stCondLst>
                                   <p:childTnLst>
-                                    <p:animEffect transition="out" filter="fade">
-                                      <p:cBhvr>
-                                        <p:cTn id="23" dur="500"/>
-                                        <p:tgtEl>
-                                          <p:spTgt spid="12"/>
-                                        </p:tgtEl>
-                                      </p:cBhvr>
-                                    </p:animEffect>
                                     <p:set>
                                       <p:cBhvr>
-                                        <p:cTn id="24" dur="1" fill="hold">
+                                        <p:cTn id="22" dur="1" fill="hold">
                                           <p:stCondLst>
-                                            <p:cond delay="499"/>
+                                            <p:cond delay="0"/>
                                           </p:stCondLst>
                                         </p:cTn>
                                         <p:tgtEl>
-                                          <p:spTgt spid="12"/>
+                                          <p:spTgt spid="27"/>
                                         </p:tgtEl>
                                         <p:attrNameLst>
                                           <p:attrName>style.visibility</p:attrName>
@@ -19481,28 +19844,20 @@
                                 </p:cTn>
                               </p:par>
                               <p:par>
-                                <p:cTn id="25" presetID="10" presetClass="exit" presetSubtype="0" fill="hold" grpId="0" nodeType="withEffect">
+                                <p:cTn id="23" presetID="1" presetClass="exit" presetSubtype="0" fill="hold" nodeType="withEffect">
                                   <p:stCondLst>
                                     <p:cond delay="0"/>
                                   </p:stCondLst>
                                   <p:childTnLst>
-                                    <p:animEffect transition="out" filter="fade">
-                                      <p:cBhvr>
-                                        <p:cTn id="26" dur="500"/>
-                                        <p:tgtEl>
-                                          <p:spTgt spid="14"/>
-                                        </p:tgtEl>
-                                      </p:cBhvr>
-                                    </p:animEffect>
                                     <p:set>
                                       <p:cBhvr>
-                                        <p:cTn id="27" dur="1" fill="hold">
+                                        <p:cTn id="24" dur="1" fill="hold">
                                           <p:stCondLst>
-                                            <p:cond delay="499"/>
+                                            <p:cond delay="0"/>
                                           </p:stCondLst>
                                         </p:cTn>
                                         <p:tgtEl>
-                                          <p:spTgt spid="14"/>
+                                          <p:spTgt spid="24"/>
                                         </p:tgtEl>
                                         <p:attrNameLst>
                                           <p:attrName>style.visibility</p:attrName>
@@ -19516,28 +19871,20 @@
                                 </p:cTn>
                               </p:par>
                               <p:par>
-                                <p:cTn id="28" presetID="10" presetClass="exit" presetSubtype="0" fill="hold" nodeType="withEffect">
+                                <p:cTn id="25" presetID="1" presetClass="exit" presetSubtype="0" fill="hold" nodeType="withEffect">
                                   <p:stCondLst>
                                     <p:cond delay="0"/>
                                   </p:stCondLst>
                                   <p:childTnLst>
-                                    <p:animEffect transition="out" filter="fade">
-                                      <p:cBhvr>
-                                        <p:cTn id="29" dur="500"/>
-                                        <p:tgtEl>
-                                          <p:spTgt spid="3"/>
-                                        </p:tgtEl>
-                                      </p:cBhvr>
-                                    </p:animEffect>
                                     <p:set>
                                       <p:cBhvr>
-                                        <p:cTn id="30" dur="1" fill="hold">
+                                        <p:cTn id="26" dur="1" fill="hold">
                                           <p:stCondLst>
-                                            <p:cond delay="499"/>
+                                            <p:cond delay="0"/>
                                           </p:stCondLst>
                                         </p:cTn>
                                         <p:tgtEl>
-                                          <p:spTgt spid="3"/>
+                                          <p:spTgt spid="12"/>
                                         </p:tgtEl>
                                         <p:attrNameLst>
                                           <p:attrName>style.visibility</p:attrName>
@@ -19551,58 +19898,20 @@
                                 </p:cTn>
                               </p:par>
                               <p:par>
-                                <p:cTn id="31" presetID="42" presetClass="path" presetSubtype="0" accel="50000" decel="50000" fill="hold" grpId="1" nodeType="withEffect">
+                                <p:cTn id="27" presetID="1" presetClass="exit" presetSubtype="0" fill="hold" grpId="0" nodeType="withEffect">
                                   <p:stCondLst>
-                                    <p:cond delay="300"/>
+                                    <p:cond delay="0"/>
                                   </p:stCondLst>
                                   <p:childTnLst>
-                                    <p:animMotion origin="layout" path="M -2.91667E-6 -2.22222E-6 L -2.91667E-6 -0.37662 " pathEditMode="relative" rAng="0" ptsTypes="AA">
-                                      <p:cBhvr>
-                                        <p:cTn id="32" dur="1700" fill="hold"/>
-                                        <p:tgtEl>
-                                          <p:spTgt spid="6"/>
-                                        </p:tgtEl>
-                                        <p:attrNameLst>
-                                          <p:attrName>ppt_x</p:attrName>
-                                          <p:attrName>ppt_y</p:attrName>
-                                        </p:attrNameLst>
-                                      </p:cBhvr>
-                                      <p:rCtr x="0" y="-18843"/>
-                                    </p:animMotion>
-                                  </p:childTnLst>
-                                </p:cTn>
-                              </p:par>
-                              <p:par>
-                                <p:cTn id="33" presetID="22" presetClass="exit" presetSubtype="4" fill="hold" nodeType="withEffect">
-                                  <p:stCondLst>
-                                    <p:cond delay="500"/>
-                                  </p:stCondLst>
-                                  <p:childTnLst>
-                                    <p:animEffect transition="out" filter="wipe(down)">
-                                      <p:cBhvr>
-                                        <p:cTn id="34" dur="300"/>
-                                        <p:tgtEl>
-                                          <p:spTgt spid="2">
-                                            <p:txEl>
-                                              <p:pRg st="6" end="6"/>
-                                            </p:txEl>
-                                          </p:spTgt>
-                                        </p:tgtEl>
-                                      </p:cBhvr>
-                                    </p:animEffect>
                                     <p:set>
                                       <p:cBhvr>
-                                        <p:cTn id="35" dur="1" fill="hold">
+                                        <p:cTn id="28" dur="1" fill="hold">
                                           <p:stCondLst>
-                                            <p:cond delay="299"/>
+                                            <p:cond delay="0"/>
                                           </p:stCondLst>
                                         </p:cTn>
                                         <p:tgtEl>
-                                          <p:spTgt spid="2">
-                                            <p:txEl>
-                                              <p:pRg st="6" end="6"/>
-                                            </p:txEl>
-                                          </p:spTgt>
+                                          <p:spTgt spid="14"/>
                                         </p:tgtEl>
                                         <p:attrNameLst>
                                           <p:attrName>style.visibility</p:attrName>
@@ -19616,36 +19925,28 @@
                                 </p:cTn>
                               </p:par>
                               <p:par>
-                                <p:cTn id="36" presetID="22" presetClass="exit" presetSubtype="4" fill="hold" nodeType="withEffect">
+                                <p:cTn id="29" presetID="10" presetClass="exit" presetSubtype="0" fill="hold" nodeType="withEffect">
                                   <p:stCondLst>
-                                    <p:cond delay="700"/>
+                                    <p:cond delay="0"/>
                                   </p:stCondLst>
                                   <p:childTnLst>
-                                    <p:animEffect transition="out" filter="wipe(down)">
-                                      <p:cBhvr>
-                                        <p:cTn id="37" dur="300"/>
-                                        <p:tgtEl>
-                                          <p:spTgt spid="2">
-                                            <p:txEl>
-                                              <p:pRg st="5" end="5"/>
-                                            </p:txEl>
-                                          </p:spTgt>
+                                    <p:animEffect transition="out" filter="fade">
+                                      <p:cBhvr>
+                                        <p:cTn id="30" dur="500"/>
+                                        <p:tgtEl>
+                                          <p:spTgt spid="3"/>
                                         </p:tgtEl>
                                       </p:cBhvr>
                                     </p:animEffect>
                                     <p:set>
                                       <p:cBhvr>
-                                        <p:cTn id="38" dur="1" fill="hold">
+                                        <p:cTn id="31" dur="1" fill="hold">
                                           <p:stCondLst>
-                                            <p:cond delay="299"/>
+                                            <p:cond delay="499"/>
                                           </p:stCondLst>
                                         </p:cTn>
                                         <p:tgtEl>
-                                          <p:spTgt spid="2">
-                                            <p:txEl>
-                                              <p:pRg st="5" end="5"/>
-                                            </p:txEl>
-                                          </p:spTgt>
+                                          <p:spTgt spid="3"/>
                                         </p:tgtEl>
                                         <p:attrNameLst>
                                           <p:attrName>style.visibility</p:attrName>
@@ -19659,18 +19960,40 @@
                                 </p:cTn>
                               </p:par>
                               <p:par>
-                                <p:cTn id="39" presetID="22" presetClass="exit" presetSubtype="4" fill="hold" nodeType="withEffect">
+                                <p:cTn id="32" presetID="42" presetClass="path" presetSubtype="0" accel="50000" decel="50000" fill="hold" grpId="1" nodeType="withEffect">
                                   <p:stCondLst>
-                                    <p:cond delay="1000"/>
+                                    <p:cond delay="300"/>
+                                  </p:stCondLst>
+                                  <p:childTnLst>
+                                    <p:animMotion origin="layout" path="M -2.91667E-6 -2.22222E-6 L -2.91667E-6 -0.37662 " pathEditMode="relative" rAng="0" ptsTypes="AA">
+                                      <p:cBhvr>
+                                        <p:cTn id="33" dur="1700" fill="hold"/>
+                                        <p:tgtEl>
+                                          <p:spTgt spid="6"/>
+                                        </p:tgtEl>
+                                        <p:attrNameLst>
+                                          <p:attrName>ppt_x</p:attrName>
+                                          <p:attrName>ppt_y</p:attrName>
+                                        </p:attrNameLst>
+                                      </p:cBhvr>
+                                      <p:rCtr x="0" y="-18843"/>
+                                    </p:animMotion>
+                                  </p:childTnLst>
+                                </p:cTn>
+                              </p:par>
+                              <p:par>
+                                <p:cTn id="34" presetID="22" presetClass="exit" presetSubtype="4" fill="hold" nodeType="withEffect">
+                                  <p:stCondLst>
+                                    <p:cond delay="500"/>
                                   </p:stCondLst>
                                   <p:childTnLst>
                                     <p:animEffect transition="out" filter="wipe(down)">
                                       <p:cBhvr>
-                                        <p:cTn id="40" dur="300"/>
+                                        <p:cTn id="35" dur="300"/>
                                         <p:tgtEl>
                                           <p:spTgt spid="2">
                                             <p:txEl>
-                                              <p:pRg st="4" end="4"/>
+                                              <p:pRg st="6" end="6"/>
                                             </p:txEl>
                                           </p:spTgt>
                                         </p:tgtEl>
@@ -19678,7 +20001,7 @@
                                     </p:animEffect>
                                     <p:set>
                                       <p:cBhvr>
-                                        <p:cTn id="41" dur="1" fill="hold">
+                                        <p:cTn id="36" dur="1" fill="hold">
                                           <p:stCondLst>
                                             <p:cond delay="299"/>
                                           </p:stCondLst>
@@ -19686,7 +20009,7 @@
                                         <p:tgtEl>
                                           <p:spTgt spid="2">
                                             <p:txEl>
-                                              <p:pRg st="4" end="4"/>
+                                              <p:pRg st="6" end="6"/>
                                             </p:txEl>
                                           </p:spTgt>
                                         </p:tgtEl>
@@ -19702,18 +20025,18 @@
                                 </p:cTn>
                               </p:par>
                               <p:par>
-                                <p:cTn id="42" presetID="22" presetClass="exit" presetSubtype="4" fill="hold" nodeType="withEffect">
+                                <p:cTn id="37" presetID="22" presetClass="exit" presetSubtype="4" fill="hold" nodeType="withEffect">
                                   <p:stCondLst>
-                                    <p:cond delay="1200"/>
+                                    <p:cond delay="700"/>
                                   </p:stCondLst>
                                   <p:childTnLst>
                                     <p:animEffect transition="out" filter="wipe(down)">
                                       <p:cBhvr>
-                                        <p:cTn id="43" dur="300"/>
+                                        <p:cTn id="38" dur="300"/>
                                         <p:tgtEl>
                                           <p:spTgt spid="2">
                                             <p:txEl>
-                                              <p:pRg st="3" end="3"/>
+                                              <p:pRg st="5" end="5"/>
                                             </p:txEl>
                                           </p:spTgt>
                                         </p:tgtEl>
@@ -19721,7 +20044,7 @@
                                     </p:animEffect>
                                     <p:set>
                                       <p:cBhvr>
-                                        <p:cTn id="44" dur="1" fill="hold">
+                                        <p:cTn id="39" dur="1" fill="hold">
                                           <p:stCondLst>
                                             <p:cond delay="299"/>
                                           </p:stCondLst>
@@ -19729,7 +20052,7 @@
                                         <p:tgtEl>
                                           <p:spTgt spid="2">
                                             <p:txEl>
-                                              <p:pRg st="3" end="3"/>
+                                              <p:pRg st="5" end="5"/>
                                             </p:txEl>
                                           </p:spTgt>
                                         </p:tgtEl>
@@ -19745,18 +20068,18 @@
                                 </p:cTn>
                               </p:par>
                               <p:par>
-                                <p:cTn id="45" presetID="22" presetClass="exit" presetSubtype="4" fill="hold" nodeType="withEffect">
+                                <p:cTn id="40" presetID="22" presetClass="exit" presetSubtype="4" fill="hold" nodeType="withEffect">
                                   <p:stCondLst>
-                                    <p:cond delay="1400"/>
+                                    <p:cond delay="1000"/>
                                   </p:stCondLst>
                                   <p:childTnLst>
                                     <p:animEffect transition="out" filter="wipe(down)">
                                       <p:cBhvr>
-                                        <p:cTn id="46" dur="300"/>
+                                        <p:cTn id="41" dur="300"/>
                                         <p:tgtEl>
                                           <p:spTgt spid="2">
                                             <p:txEl>
-                                              <p:pRg st="2" end="2"/>
+                                              <p:pRg st="4" end="4"/>
                                             </p:txEl>
                                           </p:spTgt>
                                         </p:tgtEl>
@@ -19764,7 +20087,7 @@
                                     </p:animEffect>
                                     <p:set>
                                       <p:cBhvr>
-                                        <p:cTn id="47" dur="1" fill="hold">
+                                        <p:cTn id="42" dur="1" fill="hold">
                                           <p:stCondLst>
                                             <p:cond delay="299"/>
                                           </p:stCondLst>
@@ -19772,7 +20095,7 @@
                                         <p:tgtEl>
                                           <p:spTgt spid="2">
                                             <p:txEl>
-                                              <p:pRg st="2" end="2"/>
+                                              <p:pRg st="4" end="4"/>
                                             </p:txEl>
                                           </p:spTgt>
                                         </p:tgtEl>
@@ -19788,14 +20111,100 @@
                                 </p:cTn>
                               </p:par>
                               <p:par>
-                                <p:cTn id="48" presetID="2" presetClass="entr" presetSubtype="4" decel="100000" fill="hold" nodeType="withEffect">
+                                <p:cTn id="43" presetID="22" presetClass="exit" presetSubtype="4" fill="hold" nodeType="withEffect">
+                                  <p:stCondLst>
+                                    <p:cond delay="1200"/>
+                                  </p:stCondLst>
+                                  <p:childTnLst>
+                                    <p:animEffect transition="out" filter="wipe(down)">
+                                      <p:cBhvr>
+                                        <p:cTn id="44" dur="300"/>
+                                        <p:tgtEl>
+                                          <p:spTgt spid="2">
+                                            <p:txEl>
+                                              <p:pRg st="3" end="3"/>
+                                            </p:txEl>
+                                          </p:spTgt>
+                                        </p:tgtEl>
+                                      </p:cBhvr>
+                                    </p:animEffect>
+                                    <p:set>
+                                      <p:cBhvr>
+                                        <p:cTn id="45" dur="1" fill="hold">
+                                          <p:stCondLst>
+                                            <p:cond delay="299"/>
+                                          </p:stCondLst>
+                                        </p:cTn>
+                                        <p:tgtEl>
+                                          <p:spTgt spid="2">
+                                            <p:txEl>
+                                              <p:pRg st="3" end="3"/>
+                                            </p:txEl>
+                                          </p:spTgt>
+                                        </p:tgtEl>
+                                        <p:attrNameLst>
+                                          <p:attrName>style.visibility</p:attrName>
+                                        </p:attrNameLst>
+                                      </p:cBhvr>
+                                      <p:to>
+                                        <p:strVal val="hidden"/>
+                                      </p:to>
+                                    </p:set>
+                                  </p:childTnLst>
+                                </p:cTn>
+                              </p:par>
+                              <p:par>
+                                <p:cTn id="46" presetID="22" presetClass="exit" presetSubtype="4" fill="hold" nodeType="withEffect">
+                                  <p:stCondLst>
+                                    <p:cond delay="1400"/>
+                                  </p:stCondLst>
+                                  <p:childTnLst>
+                                    <p:animEffect transition="out" filter="wipe(down)">
+                                      <p:cBhvr>
+                                        <p:cTn id="47" dur="300"/>
+                                        <p:tgtEl>
+                                          <p:spTgt spid="2">
+                                            <p:txEl>
+                                              <p:pRg st="2" end="2"/>
+                                            </p:txEl>
+                                          </p:spTgt>
+                                        </p:tgtEl>
+                                      </p:cBhvr>
+                                    </p:animEffect>
+                                    <p:set>
+                                      <p:cBhvr>
+                                        <p:cTn id="48" dur="1" fill="hold">
+                                          <p:stCondLst>
+                                            <p:cond delay="299"/>
+                                          </p:stCondLst>
+                                        </p:cTn>
+                                        <p:tgtEl>
+                                          <p:spTgt spid="2">
+                                            <p:txEl>
+                                              <p:pRg st="2" end="2"/>
+                                            </p:txEl>
+                                          </p:spTgt>
+                                        </p:tgtEl>
+                                        <p:attrNameLst>
+                                          <p:attrName>style.visibility</p:attrName>
+                                        </p:attrNameLst>
+                                      </p:cBhvr>
+                                      <p:to>
+                                        <p:strVal val="hidden"/>
+                                      </p:to>
+                                    </p:set>
+                                  </p:childTnLst>
+                                </p:cTn>
+                              </p:par>
+                              <p:par>
+                                <p:cTn id="49" presetID="2" presetClass="entr" presetSubtype="4" decel="100000" fill="hold" nodeType="withEffect">
                                   <p:stCondLst>
                                     <p:cond delay="700"/>
                                   </p:stCondLst>
                                   <p:childTnLst>
                                     <p:set>
                                       <p:cBhvr>
-                                        <p:cTn id="49" dur="1" fill="hold">
+                                        <p:cTn id="50" dur="1" fill="hold">
                                           <p:stCondLst>
                                             <p:cond delay="0"/>
                                           </p:stCondLst>
@@ -19817,7 +20226,7 @@
                                     </p:set>
                                     <p:anim calcmode="lin" valueType="num">
                                       <p:cBhvr additive="base">
-                                        <p:cTn id="50" dur="1400" fill="hold"/>
+                                        <p:cTn id="51" dur="1400" fill="hold"/>
                                         <p:tgtEl>
                                           <p:spTgt spid="15">
                                             <p:txEl>
@@ -19844,7 +20253,7 @@
                                     </p:anim>
                                     <p:anim calcmode="lin" valueType="num">
                                       <p:cBhvr additive="base">
-                                        <p:cTn id="51" dur="1400" fill="hold"/>
+                                        <p:cTn id="52" dur="1400" fill="hold"/>
                                         <p:tgtEl>
                                           <p:spTgt spid="15">
                                             <p:txEl>
@@ -19873,14 +20282,14 @@
                                 </p:cTn>
                               </p:par>
                               <p:par>
-                                <p:cTn id="52" presetID="19" presetClass="emph" presetSubtype="0" fill="hold" nodeType="withEffect">
+                                <p:cTn id="53" presetID="19" presetClass="emph" presetSubtype="0" fill="hold" nodeType="withEffect">
                                   <p:stCondLst>
                                     <p:cond delay="900"/>
                                   </p:stCondLst>
                                   <p:childTnLst>
                                     <p:animClr clrSpc="rgb" dir="cw">
                                       <p:cBhvr override="childStyle">
-                                        <p:cTn id="53" dur="500" fill="hold"/>
+                                        <p:cTn id="54" dur="500" fill="hold"/>
                                         <p:tgtEl>
                                           <p:spTgt spid="2">
                                             <p:txEl>
@@ -19898,7 +20307,7 @@
                                     </p:animClr>
                                     <p:animClr clrSpc="rgb" dir="cw">
                                       <p:cBhvr>
-                                        <p:cTn id="54" dur="500" fill="hold"/>
+                                        <p:cTn id="55" dur="500" fill="hold"/>
                                         <p:tgtEl>
                                           <p:spTgt spid="2">
                                             <p:txEl>
@@ -19916,7 +20325,7 @@
                                     </p:animClr>
                                     <p:set>
                                       <p:cBhvr>
-                                        <p:cTn id="55" dur="500" fill="hold"/>
+                                        <p:cTn id="56" dur="500" fill="hold"/>
                                         <p:tgtEl>
                                           <p:spTgt spid="2">
                                             <p:txEl>
@@ -19934,7 +20343,7 @@
                                     </p:set>
                                     <p:set>
                                       <p:cBhvr>
-                                        <p:cTn id="56" dur="500" fill="hold"/>
+                                        <p:cTn id="57" dur="500" fill="hold"/>
                                         <p:tgtEl>
                                           <p:spTgt spid="2">
                                             <p:txEl>
@@ -19954,14 +20363,14 @@
                                 </p:cTn>
                               </p:par>
                               <p:par>
-                                <p:cTn id="57" presetID="1" presetClass="exit" presetSubtype="0" fill="hold" nodeType="withEffect">
+                                <p:cTn id="58" presetID="1" presetClass="exit" presetSubtype="0" fill="hold" nodeType="withEffect">
                                   <p:stCondLst>
                                     <p:cond delay="900"/>
                                   </p:stCondLst>
                                   <p:childTnLst>
                                     <p:set>
                                       <p:cBhvr>
-                                        <p:cTn id="58" dur="1" fill="hold">
+                                        <p:cTn id="59" dur="1" fill="hold">
                                           <p:stCondLst>
                                             <p:cond delay="0"/>
                                           </p:stCondLst>
@@ -19985,14 +20394,14 @@
                                 </p:cTn>
                               </p:par>
                               <p:par>
-                                <p:cTn id="59" presetID="19" presetClass="emph" presetSubtype="0" fill="hold" nodeType="withEffect">
+                                <p:cTn id="60" presetID="19" presetClass="emph" presetSubtype="0" fill="hold" nodeType="withEffect">
                                   <p:stCondLst>
                                     <p:cond delay="1200"/>
                                   </p:stCondLst>
                                   <p:childTnLst>
                                     <p:animClr clrSpc="rgb" dir="cw">
                                       <p:cBhvr override="childStyle">
-                                        <p:cTn id="60" dur="500" fill="hold"/>
+                                        <p:cTn id="61" dur="500" fill="hold"/>
                                         <p:tgtEl>
                                           <p:spTgt spid="15">
                                             <p:txEl>
@@ -20010,7 +20419,7 @@
                                     </p:animClr>
                                     <p:animClr clrSpc="rgb" dir="cw">
                                       <p:cBhvr>
-                                        <p:cTn id="61" dur="500" fill="hold"/>
+                                        <p:cTn id="62" dur="500" fill="hold"/>
                                         <p:tgtEl>
                                           <p:spTgt spid="15">
                                             <p:txEl>
@@ -20028,7 +20437,7 @@
                                     </p:animClr>
                                     <p:set>
                                       <p:cBhvr>
-                                        <p:cTn id="62" dur="500" fill="hold"/>
+                                        <p:cTn id="63" dur="500" fill="hold"/>
                                         <p:tgtEl>
                                           <p:spTgt spid="15">
                                             <p:txEl>
@@ -20046,7 +20455,7 @@
                                     </p:set>
                                     <p:set>
                                       <p:cBhvr>
-                                        <p:cTn id="63" dur="500" fill="hold"/>
+                                        <p:cTn id="64" dur="500" fill="hold"/>
                                         <p:tgtEl>
                                           <p:spTgt spid="15">
                                             <p:txEl>
@@ -20097,12 +20506,14 @@
       <p:bldP spid="6" grpId="1" animBg="1"/>
       <p:bldP spid="13" grpId="0" animBg="1"/>
       <p:bldP spid="14" grpId="0" animBg="1"/>
+      <p:bldP spid="17" grpId="0" animBg="1"/>
+      <p:bldP spid="17" grpId="1" animBg="1"/>
     </p:bldLst>
   </p:timing>
 </p:sld>
 </file>
 
-<file path=ppt/slides/slide15.xml><?xml version="1.0" encoding="utf-8"?>
+<file path=ppt/slides/slide16.xml><?xml version="1.0" encoding="utf-8"?>
 <p:sld xmlns:a="http://schemas.openxmlformats.org/drawingml/2006/main" xmlns:r="http://schemas.openxmlformats.org/officeDocument/2006/relationships" xmlns:p="http://schemas.openxmlformats.org/presentationml/2006/main">
   <p:cSld>
     <p:spTree>
@@ -20277,7 +20688,7 @@
 </p:sld>
 </file>
 
-<file path=ppt/slides/slide16.xml><?xml version="1.0" encoding="utf-8"?>
+<file path=ppt/slides/slide17.xml><?xml version="1.0" encoding="utf-8"?>
 <p:sld xmlns:a="http://schemas.openxmlformats.org/drawingml/2006/main" xmlns:r="http://schemas.openxmlformats.org/officeDocument/2006/relationships" xmlns:p="http://schemas.openxmlformats.org/presentationml/2006/main">
   <p:cSld>
     <p:spTree>
@@ -20310,13 +20721,13 @@
   <p:clrMapOvr>
     <a:masterClrMapping/>
   </p:clrMapOvr>
-  <mc:AlternateContent xmlns:mc="http://schemas.openxmlformats.org/markup-compatibility/2006">
-    <mc:Choice xmlns:p14="http://schemas.microsoft.com/office/powerpoint/2010/main" Requires="p14">
+  <mc:AlternateContent xmlns:mc="http://schemas.openxmlformats.org/markup-compatibility/2006" xmlns:p14="http://schemas.microsoft.com/office/powerpoint/2010/main">
+    <mc:Choice Requires="p14">
       <p:transition spd="med" p14:dur="700">
         <p:fade/>
       </p:transition>
     </mc:Choice>
-    <mc:Fallback>
+    <mc:Fallback xmlns="">
       <p:transition spd="med">
         <p:fade/>
       </p:transition>
@@ -22393,8 +22804,8 @@
         </p:nvSpPr>
         <p:spPr>
           <a:xfrm>
-            <a:off x="5416550" y="3199884"/>
-            <a:ext cx="1273105" cy="923330"/>
+            <a:off x="5338003" y="3199884"/>
+            <a:ext cx="1351652" cy="923330"/>
           </a:xfrm>
           <a:prstGeom prst="rect">
             <a:avLst/>
@@ -22409,21 +22820,30 @@
           <a:p>
             <a:pPr algn="r"/>
             <a:r>
-              <a:rPr lang="en-CA" dirty="0"/>
+              <a:rPr lang="en-CA" dirty="0">
+                <a:latin typeface="Kumbh Sans" pitchFamily="2" charset="0"/>
+                <a:cs typeface="Kumbh Sans" pitchFamily="2" charset="0"/>
+              </a:rPr>
               <a:t>Create</a:t>
             </a:r>
           </a:p>
           <a:p>
             <a:pPr algn="r"/>
             <a:r>
-              <a:rPr lang="en-CA" dirty="0"/>
+              <a:rPr lang="en-CA" dirty="0">
+                <a:latin typeface="Kumbh Sans" pitchFamily="2" charset="0"/>
+                <a:cs typeface="Kumbh Sans" pitchFamily="2" charset="0"/>
+              </a:rPr>
               <a:t>Develop</a:t>
             </a:r>
           </a:p>
           <a:p>
             <a:pPr algn="r"/>
             <a:r>
-              <a:rPr lang="en-CA" dirty="0"/>
+              <a:rPr lang="en-CA" dirty="0">
+                <a:latin typeface="Kumbh Sans" pitchFamily="2" charset="0"/>
+                <a:cs typeface="Kumbh Sans" pitchFamily="2" charset="0"/>
+              </a:rPr>
               <a:t>Implement</a:t>
             </a:r>
           </a:p>
@@ -22479,7 +22899,7 @@
         <p:spPr>
           <a:xfrm>
             <a:off x="5766249" y="3198336"/>
-            <a:ext cx="925253" cy="369332"/>
+            <a:ext cx="995785" cy="369332"/>
           </a:xfrm>
           <a:prstGeom prst="rect">
             <a:avLst/>
@@ -22493,7 +22913,10 @@
           <a:lstStyle/>
           <a:p>
             <a:r>
-              <a:rPr lang="en-CA" dirty="0"/>
+              <a:rPr lang="en-CA" dirty="0">
+                <a:latin typeface="Kumbh Sans" pitchFamily="2" charset="0"/>
+                <a:cs typeface="Kumbh Sans" pitchFamily="2" charset="0"/>
+              </a:rPr>
               <a:t>Expand</a:t>
             </a:r>
           </a:p>
@@ -22514,7 +22937,7 @@
         <p:spPr>
           <a:xfrm>
             <a:off x="6689655" y="3198336"/>
-            <a:ext cx="1059906" cy="369332"/>
+            <a:ext cx="1111202" cy="369332"/>
           </a:xfrm>
           <a:prstGeom prst="rect">
             <a:avLst/>
@@ -22528,7 +22951,10 @@
           <a:lstStyle/>
           <a:p>
             <a:r>
-              <a:rPr lang="en-CA" dirty="0"/>
+              <a:rPr lang="en-CA" dirty="0">
+                <a:latin typeface="Kumbh Sans" pitchFamily="2" charset="0"/>
+                <a:cs typeface="Kumbh Sans" pitchFamily="2" charset="0"/>
+              </a:rPr>
               <a:t>Enhance</a:t>
             </a:r>
           </a:p>
@@ -22549,7 +22975,7 @@
         <p:spPr>
           <a:xfrm>
             <a:off x="7747714" y="3198336"/>
-            <a:ext cx="1268361" cy="369332"/>
+            <a:ext cx="1343638" cy="369332"/>
           </a:xfrm>
           <a:prstGeom prst="rect">
             <a:avLst/>
@@ -22563,7 +22989,10 @@
           <a:lstStyle/>
           <a:p>
             <a:r>
-              <a:rPr lang="en-CA" dirty="0"/>
+              <a:rPr lang="en-CA" dirty="0">
+                <a:latin typeface="Kumbh Sans" pitchFamily="2" charset="0"/>
+                <a:cs typeface="Kumbh Sans" pitchFamily="2" charset="0"/>
+              </a:rPr>
               <a:t>Streamline</a:t>
             </a:r>
           </a:p>
@@ -22583,8 +23012,8 @@
         </p:nvSpPr>
         <p:spPr>
           <a:xfrm>
-            <a:off x="6542820" y="3199884"/>
-            <a:ext cx="293670" cy="369332"/>
+            <a:off x="6598246" y="3198336"/>
+            <a:ext cx="248786" cy="369332"/>
           </a:xfrm>
           <a:prstGeom prst="rect">
             <a:avLst/>
@@ -22598,7 +23027,10 @@
           <a:lstStyle/>
           <a:p>
             <a:r>
-              <a:rPr lang="en-CA" dirty="0"/>
+              <a:rPr lang="en-CA" b="1" dirty="0">
+                <a:latin typeface="Kumbh Sans" pitchFamily="2" charset="0"/>
+                <a:cs typeface="Kumbh Sans" pitchFamily="2" charset="0"/>
+              </a:rPr>
               <a:t>•</a:t>
             </a:r>
           </a:p>
@@ -22618,8 +23050,8 @@
         </p:nvSpPr>
         <p:spPr>
           <a:xfrm>
-            <a:off x="7599032" y="3198336"/>
-            <a:ext cx="293670" cy="369332"/>
+            <a:off x="7645021" y="3198336"/>
+            <a:ext cx="248786" cy="369332"/>
           </a:xfrm>
           <a:prstGeom prst="rect">
             <a:avLst/>
@@ -22633,7 +23065,10 @@
           <a:lstStyle/>
           <a:p>
             <a:r>
-              <a:rPr lang="en-CA" dirty="0"/>
+              <a:rPr lang="en-CA" b="1" dirty="0">
+                <a:latin typeface="Kumbh Sans" pitchFamily="2" charset="0"/>
+                <a:cs typeface="Kumbh Sans" pitchFamily="2" charset="0"/>
+              </a:rPr>
               <a:t>•</a:t>
             </a:r>
           </a:p>
@@ -25970,6 +26405,83 @@
           </a:p>
         </p:txBody>
       </p:sp>
+      <p:sp>
+        <p:nvSpPr>
+          <p:cNvPr id="13" name="TextBox 12">
+            <a:extLst>
+              <a:ext uri="{FF2B5EF4-FFF2-40B4-BE49-F238E27FC236}">
+                <a16:creationId xmlns:a16="http://schemas.microsoft.com/office/drawing/2014/main" id="{B8742619-7F61-460A-E048-5628FDF4AD01}"/>
+              </a:ext>
+            </a:extLst>
+          </p:cNvPr>
+          <p:cNvSpPr txBox="1"/>
+          <p:nvPr/>
+        </p:nvSpPr>
+        <p:spPr>
+          <a:xfrm>
+            <a:off x="5491491" y="2227699"/>
+            <a:ext cx="4650632" cy="1848070"/>
+          </a:xfrm>
+          <a:prstGeom prst="rect">
+            <a:avLst/>
+          </a:prstGeom>
+          <a:noFill/>
+        </p:spPr>
+        <p:txBody>
+          <a:bodyPr wrap="none" rtlCol="0">
+            <a:spAutoFit/>
+          </a:bodyPr>
+          <a:lstStyle/>
+          <a:p>
+            <a:pPr marL="285750" indent="-285750">
+              <a:lnSpc>
+                <a:spcPct val="200000"/>
+              </a:lnSpc>
+              <a:buFont typeface="Arial" panose="020B0604020202020204" pitchFamily="34" charset="0"/>
+              <a:buChar char="•"/>
+            </a:pPr>
+            <a:r>
+              <a:rPr lang="en-CA" sz="2000" dirty="0">
+                <a:latin typeface="Kumbh Sans" pitchFamily="2" charset="0"/>
+                <a:cs typeface="Kumbh Sans" pitchFamily="2" charset="0"/>
+              </a:rPr>
+              <a:t>Web Dev, Integrated Systems Dev</a:t>
+            </a:r>
+          </a:p>
+          <a:p>
+            <a:pPr marL="285750" indent="-285750">
+              <a:lnSpc>
+                <a:spcPct val="200000"/>
+              </a:lnSpc>
+              <a:buFont typeface="Arial" panose="020B0604020202020204" pitchFamily="34" charset="0"/>
+              <a:buChar char="•"/>
+            </a:pPr>
+            <a:r>
+              <a:rPr lang="en-CA" sz="2000" dirty="0">
+                <a:latin typeface="Kumbh Sans" pitchFamily="2" charset="0"/>
+                <a:cs typeface="Kumbh Sans" pitchFamily="2" charset="0"/>
+              </a:rPr>
+              <a:t>Design Compliance</a:t>
+            </a:r>
+          </a:p>
+          <a:p>
+            <a:pPr marL="285750" indent="-285750">
+              <a:lnSpc>
+                <a:spcPct val="200000"/>
+              </a:lnSpc>
+              <a:buFont typeface="Arial" panose="020B0604020202020204" pitchFamily="34" charset="0"/>
+              <a:buChar char="•"/>
+            </a:pPr>
+            <a:r>
+              <a:rPr lang="en-CA" sz="2000" dirty="0">
+                <a:latin typeface="Kumbh Sans" pitchFamily="2" charset="0"/>
+                <a:cs typeface="Kumbh Sans" pitchFamily="2" charset="0"/>
+              </a:rPr>
+              <a:t>Standards &amp; Accessibility</a:t>
+            </a:r>
+          </a:p>
+        </p:txBody>
+      </p:sp>
     </p:spTree>
     <p:extLst>
       <p:ext uri="{BB962C8B-B14F-4D97-AF65-F5344CB8AC3E}">
@@ -25980,13 +26492,13 @@
   <p:clrMapOvr>
     <a:masterClrMapping/>
   </p:clrMapOvr>
-  <mc:AlternateContent xmlns:mc="http://schemas.openxmlformats.org/markup-compatibility/2006">
-    <mc:Choice xmlns:p14="http://schemas.microsoft.com/office/powerpoint/2010/main" Requires="p14">
+  <mc:AlternateContent xmlns:mc="http://schemas.openxmlformats.org/markup-compatibility/2006" xmlns:p14="http://schemas.microsoft.com/office/powerpoint/2010/main">
+    <mc:Choice Requires="p14">
       <p:transition spd="med" p14:dur="700">
         <p:fade/>
       </p:transition>
     </mc:Choice>
-    <mc:Fallback>
+    <mc:Fallback xmlns="">
       <p:transition spd="med">
         <p:fade/>
       </p:transition>
@@ -26227,6 +26739,351 @@
                                         <p:cTn id="20" dur="500" fill="hold"/>
                                         <p:tgtEl>
                                           <p:spTgt spid="5">
+                                            <p:txEl>
+                                              <p:pRg st="1" end="1"/>
+                                            </p:txEl>
+                                          </p:spTgt>
+                                        </p:tgtEl>
+                                        <p:attrNameLst>
+                                          <p:attrName>fill.on</p:attrName>
+                                        </p:attrNameLst>
+                                      </p:cBhvr>
+                                      <p:to>
+                                        <p:strVal val="true"/>
+                                      </p:to>
+                                    </p:set>
+                                  </p:childTnLst>
+                                </p:cTn>
+                              </p:par>
+                            </p:childTnLst>
+                          </p:cTn>
+                        </p:par>
+                      </p:childTnLst>
+                    </p:cTn>
+                  </p:par>
+                  <p:par>
+                    <p:cTn id="21" fill="hold">
+                      <p:stCondLst>
+                        <p:cond delay="indefinite"/>
+                      </p:stCondLst>
+                      <p:childTnLst>
+                        <p:par>
+                          <p:cTn id="22" fill="hold">
+                            <p:stCondLst>
+                              <p:cond delay="0"/>
+                            </p:stCondLst>
+                            <p:childTnLst>
+                              <p:par>
+                                <p:cTn id="23" presetID="10" presetClass="entr" presetSubtype="0" fill="hold" nodeType="clickEffect">
+                                  <p:stCondLst>
+                                    <p:cond delay="0"/>
+                                  </p:stCondLst>
+                                  <p:childTnLst>
+                                    <p:set>
+                                      <p:cBhvr>
+                                        <p:cTn id="24" dur="1" fill="hold">
+                                          <p:stCondLst>
+                                            <p:cond delay="0"/>
+                                          </p:stCondLst>
+                                        </p:cTn>
+                                        <p:tgtEl>
+                                          <p:spTgt spid="13">
+                                            <p:txEl>
+                                              <p:pRg st="0" end="0"/>
+                                            </p:txEl>
+                                          </p:spTgt>
+                                        </p:tgtEl>
+                                        <p:attrNameLst>
+                                          <p:attrName>style.visibility</p:attrName>
+                                        </p:attrNameLst>
+                                      </p:cBhvr>
+                                      <p:to>
+                                        <p:strVal val="visible"/>
+                                      </p:to>
+                                    </p:set>
+                                    <p:animEffect transition="in" filter="fade">
+                                      <p:cBhvr>
+                                        <p:cTn id="25" dur="500"/>
+                                        <p:tgtEl>
+                                          <p:spTgt spid="13">
+                                            <p:txEl>
+                                              <p:pRg st="0" end="0"/>
+                                            </p:txEl>
+                                          </p:spTgt>
+                                        </p:tgtEl>
+                                      </p:cBhvr>
+                                    </p:animEffect>
+                                  </p:childTnLst>
+                                </p:cTn>
+                              </p:par>
+                            </p:childTnLst>
+                          </p:cTn>
+                        </p:par>
+                      </p:childTnLst>
+                    </p:cTn>
+                  </p:par>
+                  <p:par>
+                    <p:cTn id="26" fill="hold">
+                      <p:stCondLst>
+                        <p:cond delay="indefinite"/>
+                      </p:stCondLst>
+                      <p:childTnLst>
+                        <p:par>
+                          <p:cTn id="27" fill="hold">
+                            <p:stCondLst>
+                              <p:cond delay="0"/>
+                            </p:stCondLst>
+                            <p:childTnLst>
+                              <p:par>
+                                <p:cTn id="28" presetID="10" presetClass="entr" presetSubtype="0" fill="hold" nodeType="clickEffect">
+                                  <p:stCondLst>
+                                    <p:cond delay="0"/>
+                                  </p:stCondLst>
+                                  <p:childTnLst>
+                                    <p:set>
+                                      <p:cBhvr>
+                                        <p:cTn id="29" dur="1" fill="hold">
+                                          <p:stCondLst>
+                                            <p:cond delay="0"/>
+                                          </p:stCondLst>
+                                        </p:cTn>
+                                        <p:tgtEl>
+                                          <p:spTgt spid="13">
+                                            <p:txEl>
+                                              <p:pRg st="1" end="1"/>
+                                            </p:txEl>
+                                          </p:spTgt>
+                                        </p:tgtEl>
+                                        <p:attrNameLst>
+                                          <p:attrName>style.visibility</p:attrName>
+                                        </p:attrNameLst>
+                                      </p:cBhvr>
+                                      <p:to>
+                                        <p:strVal val="visible"/>
+                                      </p:to>
+                                    </p:set>
+                                    <p:animEffect transition="in" filter="fade">
+                                      <p:cBhvr>
+                                        <p:cTn id="30" dur="500"/>
+                                        <p:tgtEl>
+                                          <p:spTgt spid="13">
+                                            <p:txEl>
+                                              <p:pRg st="1" end="1"/>
+                                            </p:txEl>
+                                          </p:spTgt>
+                                        </p:tgtEl>
+                                      </p:cBhvr>
+                                    </p:animEffect>
+                                  </p:childTnLst>
+                                </p:cTn>
+                              </p:par>
+                              <p:par>
+                                <p:cTn id="31" presetID="19" presetClass="emph" presetSubtype="0" fill="hold" nodeType="withEffect">
+                                  <p:stCondLst>
+                                    <p:cond delay="0"/>
+                                  </p:stCondLst>
+                                  <p:childTnLst>
+                                    <p:animClr clrSpc="rgb" dir="cw">
+                                      <p:cBhvr override="childStyle">
+                                        <p:cTn id="32" dur="500" fill="hold"/>
+                                        <p:tgtEl>
+                                          <p:spTgt spid="13">
+                                            <p:txEl>
+                                              <p:pRg st="0" end="0"/>
+                                            </p:txEl>
+                                          </p:spTgt>
+                                        </p:tgtEl>
+                                        <p:attrNameLst>
+                                          <p:attrName>style.color</p:attrName>
+                                        </p:attrNameLst>
+                                      </p:cBhvr>
+                                      <p:to>
+                                        <a:srgbClr val="96CDF8"/>
+                                      </p:to>
+                                    </p:animClr>
+                                    <p:animClr clrSpc="rgb" dir="cw">
+                                      <p:cBhvr>
+                                        <p:cTn id="33" dur="500" fill="hold"/>
+                                        <p:tgtEl>
+                                          <p:spTgt spid="13">
+                                            <p:txEl>
+                                              <p:pRg st="0" end="0"/>
+                                            </p:txEl>
+                                          </p:spTgt>
+                                        </p:tgtEl>
+                                        <p:attrNameLst>
+                                          <p:attrName>fillcolor</p:attrName>
+                                        </p:attrNameLst>
+                                      </p:cBhvr>
+                                      <p:to>
+                                        <a:srgbClr val="96CDF8"/>
+                                      </p:to>
+                                    </p:animClr>
+                                    <p:set>
+                                      <p:cBhvr>
+                                        <p:cTn id="34" dur="500" fill="hold"/>
+                                        <p:tgtEl>
+                                          <p:spTgt spid="13">
+                                            <p:txEl>
+                                              <p:pRg st="0" end="0"/>
+                                            </p:txEl>
+                                          </p:spTgt>
+                                        </p:tgtEl>
+                                        <p:attrNameLst>
+                                          <p:attrName>fill.type</p:attrName>
+                                        </p:attrNameLst>
+                                      </p:cBhvr>
+                                      <p:to>
+                                        <p:strVal val="solid"/>
+                                      </p:to>
+                                    </p:set>
+                                    <p:set>
+                                      <p:cBhvr>
+                                        <p:cTn id="35" dur="500" fill="hold"/>
+                                        <p:tgtEl>
+                                          <p:spTgt spid="13">
+                                            <p:txEl>
+                                              <p:pRg st="0" end="0"/>
+                                            </p:txEl>
+                                          </p:spTgt>
+                                        </p:tgtEl>
+                                        <p:attrNameLst>
+                                          <p:attrName>fill.on</p:attrName>
+                                        </p:attrNameLst>
+                                      </p:cBhvr>
+                                      <p:to>
+                                        <p:strVal val="true"/>
+                                      </p:to>
+                                    </p:set>
+                                  </p:childTnLst>
+                                </p:cTn>
+                              </p:par>
+                            </p:childTnLst>
+                          </p:cTn>
+                        </p:par>
+                      </p:childTnLst>
+                    </p:cTn>
+                  </p:par>
+                  <p:par>
+                    <p:cTn id="36" fill="hold">
+                      <p:stCondLst>
+                        <p:cond delay="indefinite"/>
+                      </p:stCondLst>
+                      <p:childTnLst>
+                        <p:par>
+                          <p:cTn id="37" fill="hold">
+                            <p:stCondLst>
+                              <p:cond delay="0"/>
+                            </p:stCondLst>
+                            <p:childTnLst>
+                              <p:par>
+                                <p:cTn id="38" presetID="10" presetClass="entr" presetSubtype="0" fill="hold" nodeType="clickEffect">
+                                  <p:stCondLst>
+                                    <p:cond delay="0"/>
+                                  </p:stCondLst>
+                                  <p:childTnLst>
+                                    <p:set>
+                                      <p:cBhvr>
+                                        <p:cTn id="39" dur="1" fill="hold">
+                                          <p:stCondLst>
+                                            <p:cond delay="0"/>
+                                          </p:stCondLst>
+                                        </p:cTn>
+                                        <p:tgtEl>
+                                          <p:spTgt spid="13">
+                                            <p:txEl>
+                                              <p:pRg st="2" end="2"/>
+                                            </p:txEl>
+                                          </p:spTgt>
+                                        </p:tgtEl>
+                                        <p:attrNameLst>
+                                          <p:attrName>style.visibility</p:attrName>
+                                        </p:attrNameLst>
+                                      </p:cBhvr>
+                                      <p:to>
+                                        <p:strVal val="visible"/>
+                                      </p:to>
+                                    </p:set>
+                                    <p:animEffect transition="in" filter="fade">
+                                      <p:cBhvr>
+                                        <p:cTn id="40" dur="500"/>
+                                        <p:tgtEl>
+                                          <p:spTgt spid="13">
+                                            <p:txEl>
+                                              <p:pRg st="2" end="2"/>
+                                            </p:txEl>
+                                          </p:spTgt>
+                                        </p:tgtEl>
+                                      </p:cBhvr>
+                                    </p:animEffect>
+                                  </p:childTnLst>
+                                </p:cTn>
+                              </p:par>
+                              <p:par>
+                                <p:cTn id="41" presetID="19" presetClass="emph" presetSubtype="0" fill="hold" nodeType="withEffect">
+                                  <p:stCondLst>
+                                    <p:cond delay="0"/>
+                                  </p:stCondLst>
+                                  <p:childTnLst>
+                                    <p:animClr clrSpc="rgb" dir="cw">
+                                      <p:cBhvr override="childStyle">
+                                        <p:cTn id="42" dur="500" fill="hold"/>
+                                        <p:tgtEl>
+                                          <p:spTgt spid="13">
+                                            <p:txEl>
+                                              <p:pRg st="1" end="1"/>
+                                            </p:txEl>
+                                          </p:spTgt>
+                                        </p:tgtEl>
+                                        <p:attrNameLst>
+                                          <p:attrName>style.color</p:attrName>
+                                        </p:attrNameLst>
+                                      </p:cBhvr>
+                                      <p:to>
+                                        <a:srgbClr val="96CDF8"/>
+                                      </p:to>
+                                    </p:animClr>
+                                    <p:animClr clrSpc="rgb" dir="cw">
+                                      <p:cBhvr>
+                                        <p:cTn id="43" dur="500" fill="hold"/>
+                                        <p:tgtEl>
+                                          <p:spTgt spid="13">
+                                            <p:txEl>
+                                              <p:pRg st="1" end="1"/>
+                                            </p:txEl>
+                                          </p:spTgt>
+                                        </p:tgtEl>
+                                        <p:attrNameLst>
+                                          <p:attrName>fillcolor</p:attrName>
+                                        </p:attrNameLst>
+                                      </p:cBhvr>
+                                      <p:to>
+                                        <a:srgbClr val="96CDF8"/>
+                                      </p:to>
+                                    </p:animClr>
+                                    <p:set>
+                                      <p:cBhvr>
+                                        <p:cTn id="44" dur="500" fill="hold"/>
+                                        <p:tgtEl>
+                                          <p:spTgt spid="13">
+                                            <p:txEl>
+                                              <p:pRg st="1" end="1"/>
+                                            </p:txEl>
+                                          </p:spTgt>
+                                        </p:tgtEl>
+                                        <p:attrNameLst>
+                                          <p:attrName>fill.type</p:attrName>
+                                        </p:attrNameLst>
+                                      </p:cBhvr>
+                                      <p:to>
+                                        <p:strVal val="solid"/>
+                                      </p:to>
+                                    </p:set>
+                                    <p:set>
+                                      <p:cBhvr>
+                                        <p:cTn id="45" dur="500" fill="hold"/>
+                                        <p:tgtEl>
+                                          <p:spTgt spid="13">
                                             <p:txEl>
                                               <p:pRg st="1" end="1"/>
                                             </p:txEl>
@@ -26892,13 +27749,13 @@
   <p:clrMapOvr>
     <a:masterClrMapping/>
   </p:clrMapOvr>
-  <mc:AlternateContent xmlns:mc="http://schemas.openxmlformats.org/markup-compatibility/2006">
-    <mc:Choice xmlns:p14="http://schemas.microsoft.com/office/powerpoint/2010/main" Requires="p14">
+  <mc:AlternateContent xmlns:mc="http://schemas.openxmlformats.org/markup-compatibility/2006" xmlns:p14="http://schemas.microsoft.com/office/powerpoint/2010/main">
+    <mc:Choice Requires="p14">
       <p:transition spd="med" p14:dur="700">
         <p:fade/>
       </p:transition>
     </mc:Choice>
-    <mc:Fallback>
+    <mc:Fallback xmlns="">
       <p:transition spd="med">
         <p:fade/>
       </p:transition>
@@ -27757,13 +28614,13 @@
   <p:clrMapOvr>
     <a:masterClrMapping/>
   </p:clrMapOvr>
-  <mc:AlternateContent xmlns:mc="http://schemas.openxmlformats.org/markup-compatibility/2006">
-    <mc:Choice xmlns:p14="http://schemas.microsoft.com/office/powerpoint/2010/main" Requires="p14">
+  <mc:AlternateContent xmlns:mc="http://schemas.openxmlformats.org/markup-compatibility/2006" xmlns:p14="http://schemas.microsoft.com/office/powerpoint/2010/main">
+    <mc:Choice Requires="p14">
       <p:transition spd="med" p14:dur="700">
         <p:fade/>
       </p:transition>
     </mc:Choice>
-    <mc:Fallback>
+    <mc:Fallback xmlns="">
       <p:transition spd="med">
         <p:fade/>
       </p:transition>
@@ -28828,13 +29685,13 @@
   <p:clrMapOvr>
     <a:masterClrMapping/>
   </p:clrMapOvr>
-  <mc:AlternateContent xmlns:mc="http://schemas.openxmlformats.org/markup-compatibility/2006">
-    <mc:Choice xmlns:p14="http://schemas.microsoft.com/office/powerpoint/2010/main" Requires="p14">
+  <mc:AlternateContent xmlns:mc="http://schemas.openxmlformats.org/markup-compatibility/2006" xmlns:p14="http://schemas.microsoft.com/office/powerpoint/2010/main">
+    <mc:Choice Requires="p14">
       <p:transition spd="med" p14:dur="700">
         <p:fade/>
       </p:transition>
     </mc:Choice>
-    <mc:Fallback>
+    <mc:Fallback xmlns="">
       <p:transition spd="med">
         <p:fade/>
       </p:transition>

--- a/Deliverables/Presentation1.pptx
+++ b/Deliverables/Presentation1.pptx
@@ -145,7 +145,7 @@
 <file path=ppt/revisionInfo.xml><?xml version="1.0" encoding="utf-8"?>
 <p1510:revInfo xmlns:a="http://schemas.openxmlformats.org/drawingml/2006/main" xmlns:r="http://schemas.openxmlformats.org/officeDocument/2006/relationships" xmlns:p1510="http://schemas.microsoft.com/office/powerpoint/2015/10/main">
   <p1510:revLst>
-    <p1510:client id="{EADFFEA0-CC63-45EF-97E4-5A80CDB68182}" v="1982" dt="2026-09-18T13:41:02.534"/>
+    <p1510:client id="{EADFFEA0-CC63-45EF-97E4-5A80CDB68182}" v="2179" dt="2026-09-18T15:54:06.335"/>
   </p1510:revLst>
 </p1510:revInfo>
 </file>
@@ -155,7 +155,7 @@
   <pc:docChgLst>
     <pc:chgData name="Steve Mutrux" userId="4fa98d0c-dc66-4728-b09b-a88e22e95094" providerId="ADAL" clId="{421BD283-33D8-4C6C-821F-71755E863FA2}"/>
     <pc:docChg chg="undo custSel addSld delSld modSld sldOrd">
-      <pc:chgData name="Steve Mutrux" userId="4fa98d0c-dc66-4728-b09b-a88e22e95094" providerId="ADAL" clId="{421BD283-33D8-4C6C-821F-71755E863FA2}" dt="2026-09-18T13:41:02.534" v="5531"/>
+      <pc:chgData name="Steve Mutrux" userId="4fa98d0c-dc66-4728-b09b-a88e22e95094" providerId="ADAL" clId="{421BD283-33D8-4C6C-821F-71755E863FA2}" dt="2026-09-18T15:54:06.335" v="5792" actId="20577"/>
       <pc:docMkLst>
         <pc:docMk/>
       </pc:docMkLst>
@@ -928,8 +928,8 @@
           </ac:spMkLst>
         </pc:spChg>
       </pc:sldChg>
-      <pc:sldChg chg="addSp delSp modSp add mod modTransition modAnim modNotesTx">
-        <pc:chgData name="Steve Mutrux" userId="4fa98d0c-dc66-4728-b09b-a88e22e95094" providerId="ADAL" clId="{421BD283-33D8-4C6C-821F-71755E863FA2}" dt="2026-09-17T18:13:03.669" v="5215"/>
+      <pc:sldChg chg="addSp delSp modSp add mod modTransition delAnim modAnim modNotesTx">
+        <pc:chgData name="Steve Mutrux" userId="4fa98d0c-dc66-4728-b09b-a88e22e95094" providerId="ADAL" clId="{421BD283-33D8-4C6C-821F-71755E863FA2}" dt="2026-09-18T15:54:06.335" v="5792" actId="20577"/>
         <pc:sldMkLst>
           <pc:docMk/>
           <pc:sldMk cId="353601395" sldId="266"/>
@@ -942,6 +942,14 @@
             <ac:spMk id="2" creationId="{B41E6B40-CEDD-5E91-E2C3-A10C4F95297F}"/>
           </ac:spMkLst>
         </pc:spChg>
+        <pc:spChg chg="add del mod">
+          <ac:chgData name="Steve Mutrux" userId="4fa98d0c-dc66-4728-b09b-a88e22e95094" providerId="ADAL" clId="{421BD283-33D8-4C6C-821F-71755E863FA2}" dt="2026-09-18T15:46:47.272" v="5657" actId="21"/>
+          <ac:spMkLst>
+            <pc:docMk/>
+            <pc:sldMk cId="353601395" sldId="266"/>
+            <ac:spMk id="4" creationId="{FCB0987B-36F3-8A6F-1B24-CA8B0A4ABC95}"/>
+          </ac:spMkLst>
+        </pc:spChg>
         <pc:spChg chg="mod">
           <ac:chgData name="Steve Mutrux" userId="4fa98d0c-dc66-4728-b09b-a88e22e95094" providerId="ADAL" clId="{421BD283-33D8-4C6C-821F-71755E863FA2}" dt="2026-09-16T10:49:43.544" v="3076" actId="164"/>
           <ac:spMkLst>
@@ -951,7 +959,7 @@
           </ac:spMkLst>
         </pc:spChg>
         <pc:spChg chg="add mod">
-          <ac:chgData name="Steve Mutrux" userId="4fa98d0c-dc66-4728-b09b-a88e22e95094" providerId="ADAL" clId="{421BD283-33D8-4C6C-821F-71755E863FA2}" dt="2026-09-16T00:48:53.540" v="932" actId="207"/>
+          <ac:chgData name="Steve Mutrux" userId="4fa98d0c-dc66-4728-b09b-a88e22e95094" providerId="ADAL" clId="{421BD283-33D8-4C6C-821F-71755E863FA2}" dt="2026-09-18T15:40:48.200" v="5575" actId="6549"/>
           <ac:spMkLst>
             <pc:docMk/>
             <pc:sldMk cId="353601395" sldId="266"/>
@@ -990,6 +998,14 @@
             <ac:spMk id="11" creationId="{A26D522C-4AAD-E5D8-E163-D78AC7FA3FEC}"/>
           </ac:spMkLst>
         </pc:spChg>
+        <pc:spChg chg="add mod">
+          <ac:chgData name="Steve Mutrux" userId="4fa98d0c-dc66-4728-b09b-a88e22e95094" providerId="ADAL" clId="{421BD283-33D8-4C6C-821F-71755E863FA2}" dt="2026-09-18T15:54:06.335" v="5792" actId="20577"/>
+          <ac:spMkLst>
+            <pc:docMk/>
+            <pc:sldMk cId="353601395" sldId="266"/>
+            <ac:spMk id="12" creationId="{A8ECB029-F628-7E2F-9B86-3C1773F06379}"/>
+          </ac:spMkLst>
+        </pc:spChg>
         <pc:grpChg chg="add mod">
           <ac:chgData name="Steve Mutrux" userId="4fa98d0c-dc66-4728-b09b-a88e22e95094" providerId="ADAL" clId="{421BD283-33D8-4C6C-821F-71755E863FA2}" dt="2026-09-16T10:49:51.828" v="3077" actId="164"/>
           <ac:grpSpMkLst>
@@ -1016,7 +1032,7 @@
         </pc:grpChg>
       </pc:sldChg>
       <pc:sldChg chg="addSp delSp modSp add mod modTransition modAnim modNotesTx">
-        <pc:chgData name="Steve Mutrux" userId="4fa98d0c-dc66-4728-b09b-a88e22e95094" providerId="ADAL" clId="{421BD283-33D8-4C6C-821F-71755E863FA2}" dt="2026-09-17T18:13:06.438" v="5216"/>
+        <pc:chgData name="Steve Mutrux" userId="4fa98d0c-dc66-4728-b09b-a88e22e95094" providerId="ADAL" clId="{421BD283-33D8-4C6C-821F-71755E863FA2}" dt="2026-09-18T15:49:23.448" v="5710" actId="1036"/>
         <pc:sldMkLst>
           <pc:docMk/>
           <pc:sldMk cId="557364214" sldId="267"/>
@@ -1030,7 +1046,15 @@
           </ac:spMkLst>
         </pc:spChg>
         <pc:spChg chg="add mod">
-          <ac:chgData name="Steve Mutrux" userId="4fa98d0c-dc66-4728-b09b-a88e22e95094" providerId="ADAL" clId="{421BD283-33D8-4C6C-821F-71755E863FA2}" dt="2026-09-16T00:48:56.149" v="933" actId="207"/>
+          <ac:chgData name="Steve Mutrux" userId="4fa98d0c-dc66-4728-b09b-a88e22e95094" providerId="ADAL" clId="{421BD283-33D8-4C6C-821F-71755E863FA2}" dt="2026-09-18T15:48:20.686" v="5709" actId="6549"/>
+          <ac:spMkLst>
+            <pc:docMk/>
+            <pc:sldMk cId="557364214" sldId="267"/>
+            <ac:spMk id="4" creationId="{FCB0987B-36F3-8A6F-1B24-CA8B0A4ABC95}"/>
+          </ac:spMkLst>
+        </pc:spChg>
+        <pc:spChg chg="add mod">
+          <ac:chgData name="Steve Mutrux" userId="4fa98d0c-dc66-4728-b09b-a88e22e95094" providerId="ADAL" clId="{421BD283-33D8-4C6C-821F-71755E863FA2}" dt="2026-09-18T15:41:09.303" v="5593" actId="20577"/>
           <ac:spMkLst>
             <pc:docMk/>
             <pc:sldMk cId="557364214" sldId="267"/>
@@ -1038,7 +1062,7 @@
           </ac:spMkLst>
         </pc:spChg>
         <pc:spChg chg="mod">
-          <ac:chgData name="Steve Mutrux" userId="4fa98d0c-dc66-4728-b09b-a88e22e95094" providerId="ADAL" clId="{421BD283-33D8-4C6C-821F-71755E863FA2}" dt="2026-09-16T10:59:39.836" v="3123"/>
+          <ac:chgData name="Steve Mutrux" userId="4fa98d0c-dc66-4728-b09b-a88e22e95094" providerId="ADAL" clId="{421BD283-33D8-4C6C-821F-71755E863FA2}" dt="2026-09-18T15:49:23.448" v="5710" actId="1036"/>
           <ac:spMkLst>
             <pc:docMk/>
             <pc:sldMk cId="557364214" sldId="267"/>
@@ -1103,7 +1127,7 @@
         </pc:grpChg>
       </pc:sldChg>
       <pc:sldChg chg="addSp delSp modSp add mod modTransition modAnim modNotesTx">
-        <pc:chgData name="Steve Mutrux" userId="4fa98d0c-dc66-4728-b09b-a88e22e95094" providerId="ADAL" clId="{421BD283-33D8-4C6C-821F-71755E863FA2}" dt="2026-09-17T18:13:08.592" v="5217"/>
+        <pc:chgData name="Steve Mutrux" userId="4fa98d0c-dc66-4728-b09b-a88e22e95094" providerId="ADAL" clId="{421BD283-33D8-4C6C-821F-71755E863FA2}" dt="2026-09-18T15:41:42.062" v="5609" actId="20577"/>
         <pc:sldMkLst>
           <pc:docMk/>
           <pc:sldMk cId="3893094920" sldId="268"/>
@@ -1125,7 +1149,7 @@
           </ac:spMkLst>
         </pc:spChg>
         <pc:spChg chg="add mod">
-          <ac:chgData name="Steve Mutrux" userId="4fa98d0c-dc66-4728-b09b-a88e22e95094" providerId="ADAL" clId="{421BD283-33D8-4C6C-821F-71755E863FA2}" dt="2026-09-16T00:48:58.410" v="934" actId="207"/>
+          <ac:chgData name="Steve Mutrux" userId="4fa98d0c-dc66-4728-b09b-a88e22e95094" providerId="ADAL" clId="{421BD283-33D8-4C6C-821F-71755E863FA2}" dt="2026-09-18T15:41:42.062" v="5609" actId="20577"/>
           <ac:spMkLst>
             <pc:docMk/>
             <pc:sldMk cId="3893094920" sldId="268"/>
@@ -1355,7 +1379,7 @@
         </pc:grpChg>
       </pc:sldChg>
       <pc:sldChg chg="addSp modSp add mod modTransition modAnim modNotesTx">
-        <pc:chgData name="Steve Mutrux" userId="4fa98d0c-dc66-4728-b09b-a88e22e95094" providerId="ADAL" clId="{421BD283-33D8-4C6C-821F-71755E863FA2}" dt="2026-09-18T13:07:30.878" v="5377" actId="20577"/>
+        <pc:chgData name="Steve Mutrux" userId="4fa98d0c-dc66-4728-b09b-a88e22e95094" providerId="ADAL" clId="{421BD283-33D8-4C6C-821F-71755E863FA2}" dt="2026-09-18T15:45:45.863" v="5655" actId="20577"/>
         <pc:sldMkLst>
           <pc:docMk/>
           <pc:sldMk cId="3925825761" sldId="273"/>
@@ -1374,6 +1398,14 @@
             <pc:docMk/>
             <pc:sldMk cId="3925825761" sldId="273"/>
             <ac:spMk id="3" creationId="{3509C406-746C-2D41-7411-CAD9A5B245CC}"/>
+          </ac:spMkLst>
+        </pc:spChg>
+        <pc:spChg chg="mod">
+          <ac:chgData name="Steve Mutrux" userId="4fa98d0c-dc66-4728-b09b-a88e22e95094" providerId="ADAL" clId="{421BD283-33D8-4C6C-821F-71755E863FA2}" dt="2026-09-18T15:40:29.674" v="5561" actId="20577"/>
+          <ac:spMkLst>
+            <pc:docMk/>
+            <pc:sldMk cId="3925825761" sldId="273"/>
+            <ac:spMk id="5" creationId="{32AB9166-2446-17C2-01D2-CCA23D7EB405}"/>
           </ac:spMkLst>
         </pc:spChg>
         <pc:spChg chg="mod">
@@ -1417,7 +1449,7 @@
           </ac:spMkLst>
         </pc:spChg>
         <pc:spChg chg="add mod">
-          <ac:chgData name="Steve Mutrux" userId="4fa98d0c-dc66-4728-b09b-a88e22e95094" providerId="ADAL" clId="{421BD283-33D8-4C6C-821F-71755E863FA2}" dt="2026-09-18T13:07:10.437" v="5376" actId="20577"/>
+          <ac:chgData name="Steve Mutrux" userId="4fa98d0c-dc66-4728-b09b-a88e22e95094" providerId="ADAL" clId="{421BD283-33D8-4C6C-821F-71755E863FA2}" dt="2026-09-18T15:45:35.377" v="5653"/>
           <ac:spMkLst>
             <pc:docMk/>
             <pc:sldMk cId="3925825761" sldId="273"/>
@@ -1442,21 +1474,21 @@
         </pc:grpChg>
       </pc:sldChg>
       <pc:sldChg chg="addSp delSp modSp add mod delAnim modAnim modNotesTx">
-        <pc:chgData name="Steve Mutrux" userId="4fa98d0c-dc66-4728-b09b-a88e22e95094" providerId="ADAL" clId="{421BD283-33D8-4C6C-821F-71755E863FA2}" dt="2026-09-17T18:12:57.173" v="5213"/>
+        <pc:chgData name="Steve Mutrux" userId="4fa98d0c-dc66-4728-b09b-a88e22e95094" providerId="ADAL" clId="{421BD283-33D8-4C6C-821F-71755E863FA2}" dt="2026-09-18T15:45:39.498" v="5654" actId="20577"/>
         <pc:sldMkLst>
           <pc:docMk/>
           <pc:sldMk cId="859702855" sldId="274"/>
         </pc:sldMkLst>
         <pc:spChg chg="add mod">
-          <ac:chgData name="Steve Mutrux" userId="4fa98d0c-dc66-4728-b09b-a88e22e95094" providerId="ADAL" clId="{421BD283-33D8-4C6C-821F-71755E863FA2}" dt="2026-09-17T17:29:17.683" v="4770" actId="20577"/>
+          <ac:chgData name="Steve Mutrux" userId="4fa98d0c-dc66-4728-b09b-a88e22e95094" providerId="ADAL" clId="{421BD283-33D8-4C6C-821F-71755E863FA2}" dt="2026-09-18T15:45:39.498" v="5654" actId="20577"/>
           <ac:spMkLst>
             <pc:docMk/>
             <pc:sldMk cId="859702855" sldId="274"/>
             <ac:spMk id="2" creationId="{D46ED73F-A2B7-C52F-965C-210379FFFA48}"/>
           </ac:spMkLst>
         </pc:spChg>
-        <pc:spChg chg="add ord">
-          <ac:chgData name="Steve Mutrux" userId="4fa98d0c-dc66-4728-b09b-a88e22e95094" providerId="ADAL" clId="{421BD283-33D8-4C6C-821F-71755E863FA2}" dt="2026-09-16T02:09:26.719" v="2900" actId="167"/>
+        <pc:spChg chg="add mod ord">
+          <ac:chgData name="Steve Mutrux" userId="4fa98d0c-dc66-4728-b09b-a88e22e95094" providerId="ADAL" clId="{421BD283-33D8-4C6C-821F-71755E863FA2}" dt="2026-09-18T15:40:09.909" v="5547" actId="20577"/>
           <ac:spMkLst>
             <pc:docMk/>
             <pc:sldMk cId="859702855" sldId="274"/>
@@ -2857,6 +2889,127 @@
           <a:bodyPr/>
           <a:lstStyle/>
           <a:p>
+            <a:pPr marL="0" marR="0" lvl="0" indent="0" algn="l" defTabSz="914400" rtl="0" eaLnBrk="1" fontAlgn="auto" latinLnBrk="0" hangingPunct="1">
+              <a:lnSpc>
+                <a:spcPct val="100000"/>
+              </a:lnSpc>
+              <a:spcBef>
+                <a:spcPts val="0"/>
+              </a:spcBef>
+              <a:spcAft>
+                <a:spcPts val="0"/>
+              </a:spcAft>
+              <a:buClrTx/>
+              <a:buSzTx/>
+              <a:buFontTx/>
+              <a:buNone/>
+              <a:tabLst/>
+              <a:defRPr/>
+            </a:pPr>
+            <a:r>
+              <a:rPr lang="en-CA" sz="1200" b="0" i="0" kern="1200" dirty="0">
+                <a:solidFill>
+                  <a:schemeClr val="tx1"/>
+                </a:solidFill>
+                <a:effectLst/>
+                <a:latin typeface="+mn-lt"/>
+                <a:ea typeface="+mn-ea"/>
+                <a:cs typeface="+mn-cs"/>
+              </a:rPr>
+              <a:t>Web Dev, Integrated Systems Dev Design Compliance Standards &amp; Accessibility</a:t>
+            </a:r>
+          </a:p>
+          <a:p>
+            <a:endParaRPr lang="en-CA" dirty="0"/>
+          </a:p>
+        </p:txBody>
+      </p:sp>
+      <p:sp>
+        <p:nvSpPr>
+          <p:cNvPr id="4" name="Slide Number Placeholder 3">
+            <a:extLst>
+              <a:ext uri="{FF2B5EF4-FFF2-40B4-BE49-F238E27FC236}">
+                <a16:creationId xmlns:a16="http://schemas.microsoft.com/office/drawing/2014/main" id="{F8C3E0DF-3FE2-CE6A-2AE1-C89C81560A2E}"/>
+              </a:ext>
+            </a:extLst>
+          </p:cNvPr>
+          <p:cNvSpPr>
+            <a:spLocks noGrp="1"/>
+          </p:cNvSpPr>
+          <p:nvPr>
+            <p:ph type="sldNum" sz="quarter" idx="5"/>
+          </p:nvPr>
+        </p:nvSpPr>
+        <p:spPr/>
+        <p:txBody>
+          <a:bodyPr/>
+          <a:lstStyle/>
+          <a:p>
+            <a:fld id="{47B22D95-B55A-456E-B882-ED519B72F1D2}" type="slidenum">
+              <a:rPr lang="en-CA" smtClean="0"/>
+              <a:t>4</a:t>
+            </a:fld>
+            <a:endParaRPr lang="en-CA"/>
+          </a:p>
+        </p:txBody>
+      </p:sp>
+    </p:spTree>
+    <p:extLst>
+      <p:ext uri="{BB962C8B-B14F-4D97-AF65-F5344CB8AC3E}">
+        <p14:creationId xmlns:p14="http://schemas.microsoft.com/office/powerpoint/2010/main" val="3642970906"/>
+      </p:ext>
+    </p:extLst>
+  </p:cSld>
+  <p:clrMapOvr>
+    <a:masterClrMapping/>
+  </p:clrMapOvr>
+</p:notes>
+</file>
+
+<file path=ppt/notesSlides/notesSlide3.xml><?xml version="1.0" encoding="utf-8"?>
+<p:notes xmlns:a="http://schemas.openxmlformats.org/drawingml/2006/main" xmlns:r="http://schemas.openxmlformats.org/officeDocument/2006/relationships" xmlns:p="http://schemas.openxmlformats.org/presentationml/2006/main">
+  <p:cSld>
+    <p:spTree>
+      <p:nvGrpSpPr>
+        <p:cNvPr id="1" name=""/>
+        <p:cNvGrpSpPr/>
+        <p:nvPr/>
+      </p:nvGrpSpPr>
+      <p:grpSpPr>
+        <a:xfrm>
+          <a:off x="0" y="0"/>
+          <a:ext cx="0" cy="0"/>
+          <a:chOff x="0" y="0"/>
+          <a:chExt cx="0" cy="0"/>
+        </a:xfrm>
+      </p:grpSpPr>
+      <p:sp>
+        <p:nvSpPr>
+          <p:cNvPr id="2" name="Slide Image Placeholder 1"/>
+          <p:cNvSpPr>
+            <a:spLocks noGrp="1" noRot="1" noChangeAspect="1"/>
+          </p:cNvSpPr>
+          <p:nvPr>
+            <p:ph type="sldImg"/>
+          </p:nvPr>
+        </p:nvSpPr>
+        <p:spPr/>
+      </p:sp>
+      <p:sp>
+        <p:nvSpPr>
+          <p:cNvPr id="3" name="Notes Placeholder 2"/>
+          <p:cNvSpPr>
+            <a:spLocks noGrp="1"/>
+          </p:cNvSpPr>
+          <p:nvPr>
+            <p:ph type="body" idx="1"/>
+          </p:nvPr>
+        </p:nvSpPr>
+        <p:spPr/>
+        <p:txBody>
+          <a:bodyPr/>
+          <a:lstStyle/>
+          <a:p>
             <a:r>
               <a:rPr lang="en-CA" sz="1200" b="0" i="0" kern="1200" dirty="0">
                 <a:solidFill>
@@ -2947,107 +3100,17 @@
             </a:r>
             <a:endParaRPr lang="en-CA" dirty="0"/>
           </a:p>
-        </p:txBody>
-      </p:sp>
-      <p:sp>
-        <p:nvSpPr>
-          <p:cNvPr id="4" name="Slide Number Placeholder 3">
-            <a:extLst>
-              <a:ext uri="{FF2B5EF4-FFF2-40B4-BE49-F238E27FC236}">
-                <a16:creationId xmlns:a16="http://schemas.microsoft.com/office/drawing/2014/main" id="{F8C3E0DF-3FE2-CE6A-2AE1-C89C81560A2E}"/>
-              </a:ext>
-            </a:extLst>
-          </p:cNvPr>
-          <p:cNvSpPr>
-            <a:spLocks noGrp="1"/>
-          </p:cNvSpPr>
-          <p:nvPr>
-            <p:ph type="sldNum" sz="quarter" idx="5"/>
-          </p:nvPr>
-        </p:nvSpPr>
-        <p:spPr/>
-        <p:txBody>
-          <a:bodyPr/>
-          <a:lstStyle/>
-          <a:p>
-            <a:fld id="{47B22D95-B55A-456E-B882-ED519B72F1D2}" type="slidenum">
-              <a:rPr lang="en-CA" smtClean="0"/>
-              <a:t>4</a:t>
-            </a:fld>
-            <a:endParaRPr lang="en-CA"/>
-          </a:p>
-        </p:txBody>
-      </p:sp>
-    </p:spTree>
-    <p:extLst>
-      <p:ext uri="{BB962C8B-B14F-4D97-AF65-F5344CB8AC3E}">
-        <p14:creationId xmlns:p14="http://schemas.microsoft.com/office/powerpoint/2010/main" val="3642970906"/>
-      </p:ext>
-    </p:extLst>
-  </p:cSld>
-  <p:clrMapOvr>
-    <a:masterClrMapping/>
-  </p:clrMapOvr>
-</p:notes>
-</file>
-
-<file path=ppt/notesSlides/notesSlide3.xml><?xml version="1.0" encoding="utf-8"?>
-<p:notes xmlns:a="http://schemas.openxmlformats.org/drawingml/2006/main" xmlns:r="http://schemas.openxmlformats.org/officeDocument/2006/relationships" xmlns:p="http://schemas.openxmlformats.org/presentationml/2006/main">
-  <p:cSld>
-    <p:spTree>
-      <p:nvGrpSpPr>
-        <p:cNvPr id="1" name=""/>
-        <p:cNvGrpSpPr/>
-        <p:nvPr/>
-      </p:nvGrpSpPr>
-      <p:grpSpPr>
-        <a:xfrm>
-          <a:off x="0" y="0"/>
-          <a:ext cx="0" cy="0"/>
-          <a:chOff x="0" y="0"/>
-          <a:chExt cx="0" cy="0"/>
-        </a:xfrm>
-      </p:grpSpPr>
-      <p:sp>
-        <p:nvSpPr>
-          <p:cNvPr id="2" name="Slide Image Placeholder 1"/>
-          <p:cNvSpPr>
-            <a:spLocks noGrp="1" noRot="1" noChangeAspect="1"/>
-          </p:cNvSpPr>
-          <p:nvPr>
-            <p:ph type="sldImg"/>
-          </p:nvPr>
-        </p:nvSpPr>
-        <p:spPr/>
-      </p:sp>
-      <p:sp>
-        <p:nvSpPr>
-          <p:cNvPr id="3" name="Notes Placeholder 2"/>
-          <p:cNvSpPr>
-            <a:spLocks noGrp="1"/>
-          </p:cNvSpPr>
-          <p:nvPr>
-            <p:ph type="body" idx="1"/>
-          </p:nvPr>
-        </p:nvSpPr>
-        <p:spPr/>
-        <p:txBody>
-          <a:bodyPr/>
-          <a:lstStyle/>
           <a:p>
             <a:pPr lvl="0" fontAlgn="base"/>
-            <a:r>
-              <a:rPr lang="en-CA" sz="1200" b="0" i="0" kern="1200" dirty="0">
-                <a:solidFill>
-                  <a:schemeClr val="tx1"/>
-                </a:solidFill>
-                <a:effectLst/>
-                <a:latin typeface="+mn-lt"/>
-                <a:ea typeface="+mn-ea"/>
-                <a:cs typeface="+mn-cs"/>
-              </a:rPr>
-              <a:t>Web Dev, Integrated Systems Dev Design Compliance Standards &amp; Accessibility</a:t>
-            </a:r>
+            <a:endParaRPr lang="en-CA" sz="1200" b="0" i="0" kern="1200" dirty="0">
+              <a:solidFill>
+                <a:schemeClr val="tx1"/>
+              </a:solidFill>
+              <a:effectLst/>
+              <a:latin typeface="+mn-lt"/>
+              <a:ea typeface="+mn-ea"/>
+              <a:cs typeface="+mn-cs"/>
+            </a:endParaRPr>
           </a:p>
         </p:txBody>
       </p:sp>
@@ -3149,11 +3212,151 @@
               <a:defRPr/>
             </a:pPr>
             <a:r>
-              <a:rPr lang="en-CA" dirty="0"/>
-              <a:t>Blurb about Edin</a:t>
+              <a:rPr lang="en-CA" sz="1200" b="0" i="0" kern="1200" dirty="0">
+                <a:solidFill>
+                  <a:schemeClr val="tx1"/>
+                </a:solidFill>
+                <a:effectLst/>
+                <a:latin typeface="+mn-lt"/>
+                <a:ea typeface="+mn-ea"/>
+                <a:cs typeface="+mn-cs"/>
+              </a:rPr>
+              <a:t>Past Experience: Created a website for a book store in St. Catherine's with a database, online purchases, and activity tracking. Created games using </a:t>
+            </a:r>
+            <a:r>
+              <a:rPr lang="en-CA" sz="1200" b="0" i="0" kern="1200" dirty="0" err="1">
+                <a:solidFill>
+                  <a:schemeClr val="tx1"/>
+                </a:solidFill>
+                <a:effectLst/>
+                <a:latin typeface="+mn-lt"/>
+                <a:ea typeface="+mn-ea"/>
+                <a:cs typeface="+mn-cs"/>
+              </a:rPr>
+              <a:t>lua</a:t>
+            </a:r>
+            <a:r>
+              <a:rPr lang="en-CA" sz="1200" b="0" i="0" kern="1200" dirty="0">
+                <a:solidFill>
+                  <a:schemeClr val="tx1"/>
+                </a:solidFill>
+                <a:effectLst/>
+                <a:latin typeface="+mn-lt"/>
+                <a:ea typeface="+mn-ea"/>
+                <a:cs typeface="+mn-cs"/>
+              </a:rPr>
+              <a:t>, python, C#, and websites using html, </a:t>
+            </a:r>
+            <a:r>
+              <a:rPr lang="en-CA" sz="1200" b="0" i="0" kern="1200" dirty="0" err="1">
+                <a:solidFill>
+                  <a:schemeClr val="tx1"/>
+                </a:solidFill>
+                <a:effectLst/>
+                <a:latin typeface="+mn-lt"/>
+                <a:ea typeface="+mn-ea"/>
+                <a:cs typeface="+mn-cs"/>
+              </a:rPr>
+              <a:t>css</a:t>
+            </a:r>
+            <a:r>
+              <a:rPr lang="en-CA" sz="1200" b="0" i="0" kern="1200" dirty="0">
+                <a:solidFill>
+                  <a:schemeClr val="tx1"/>
+                </a:solidFill>
+                <a:effectLst/>
+                <a:latin typeface="+mn-lt"/>
+                <a:ea typeface="+mn-ea"/>
+                <a:cs typeface="+mn-cs"/>
+              </a:rPr>
+              <a:t>, and </a:t>
+            </a:r>
+            <a:r>
+              <a:rPr lang="en-CA" sz="1200" b="0" i="0" kern="1200" dirty="0" err="1">
+                <a:solidFill>
+                  <a:schemeClr val="tx1"/>
+                </a:solidFill>
+                <a:effectLst/>
+                <a:latin typeface="+mn-lt"/>
+                <a:ea typeface="+mn-ea"/>
+                <a:cs typeface="+mn-cs"/>
+              </a:rPr>
+              <a:t>javascript</a:t>
+            </a:r>
+            <a:r>
+              <a:rPr lang="en-CA" sz="1200" b="0" i="0" kern="1200" dirty="0">
+                <a:solidFill>
+                  <a:schemeClr val="tx1"/>
+                </a:solidFill>
+                <a:effectLst/>
+                <a:latin typeface="+mn-lt"/>
+                <a:ea typeface="+mn-ea"/>
+                <a:cs typeface="+mn-cs"/>
+              </a:rPr>
+              <a:t> for personal use. </a:t>
             </a:r>
           </a:p>
           <a:p>
+            <a:pPr marL="0" marR="0" lvl="0" indent="0" algn="l" defTabSz="914400" rtl="0" eaLnBrk="1" fontAlgn="auto" latinLnBrk="0" hangingPunct="1">
+              <a:lnSpc>
+                <a:spcPct val="100000"/>
+              </a:lnSpc>
+              <a:spcBef>
+                <a:spcPts val="0"/>
+              </a:spcBef>
+              <a:spcAft>
+                <a:spcPts val="0"/>
+              </a:spcAft>
+              <a:buClrTx/>
+              <a:buSzTx/>
+              <a:buFontTx/>
+              <a:buNone/>
+              <a:tabLst/>
+              <a:defRPr/>
+            </a:pPr>
+            <a:r>
+              <a:rPr lang="en-CA" sz="1200" b="0" i="0" kern="1200" dirty="0">
+                <a:solidFill>
+                  <a:schemeClr val="tx1"/>
+                </a:solidFill>
+                <a:effectLst/>
+                <a:latin typeface="+mn-lt"/>
+                <a:ea typeface="+mn-ea"/>
+                <a:cs typeface="+mn-cs"/>
+              </a:rPr>
+              <a:t>Role: Communications </a:t>
+            </a:r>
+          </a:p>
+          <a:p>
+            <a:pPr marL="0" marR="0" lvl="0" indent="0" algn="l" defTabSz="914400" rtl="0" eaLnBrk="1" fontAlgn="auto" latinLnBrk="0" hangingPunct="1">
+              <a:lnSpc>
+                <a:spcPct val="100000"/>
+              </a:lnSpc>
+              <a:spcBef>
+                <a:spcPts val="0"/>
+              </a:spcBef>
+              <a:spcAft>
+                <a:spcPts val="0"/>
+              </a:spcAft>
+              <a:buClrTx/>
+              <a:buSzTx/>
+              <a:buFontTx/>
+              <a:buNone/>
+              <a:tabLst/>
+              <a:defRPr/>
+            </a:pPr>
+            <a:r>
+              <a:rPr lang="en-CA" sz="1200" b="0" i="0" kern="1200" dirty="0">
+                <a:solidFill>
+                  <a:schemeClr val="tx1"/>
+                </a:solidFill>
+                <a:effectLst/>
+                <a:latin typeface="+mn-lt"/>
+                <a:ea typeface="+mn-ea"/>
+                <a:cs typeface="+mn-cs"/>
+              </a:rPr>
+              <a:t>Expectations: I want everyone to get better at working in a team professionally.</a:t>
+            </a:r>
             <a:endParaRPr lang="en-CA" dirty="0"/>
           </a:p>
         </p:txBody>
@@ -3238,26 +3441,48 @@
           <a:bodyPr/>
           <a:lstStyle/>
           <a:p>
-            <a:pPr marL="0" marR="0" lvl="0" indent="0" algn="l" defTabSz="914400" rtl="0" eaLnBrk="1" fontAlgn="auto" latinLnBrk="0" hangingPunct="1">
-              <a:lnSpc>
-                <a:spcPct val="100000"/>
-              </a:lnSpc>
-              <a:spcBef>
-                <a:spcPts val="0"/>
-              </a:spcBef>
-              <a:spcAft>
-                <a:spcPts val="0"/>
-              </a:spcAft>
-              <a:buClrTx/>
-              <a:buSzTx/>
-              <a:buFontTx/>
-              <a:buNone/>
-              <a:tabLst/>
-              <a:defRPr/>
-            </a:pPr>
+            <a:pPr lvl="0" fontAlgn="base"/>
             <a:r>
-              <a:rPr lang="en-CA" dirty="0"/>
-              <a:t>Blurb about Jake</a:t>
+              <a:rPr lang="en-CA" sz="1200" b="0" i="0" kern="1200" dirty="0">
+                <a:solidFill>
+                  <a:schemeClr val="tx1"/>
+                </a:solidFill>
+                <a:effectLst/>
+                <a:latin typeface="+mn-lt"/>
+                <a:ea typeface="+mn-ea"/>
+                <a:cs typeface="+mn-cs"/>
+              </a:rPr>
+              <a:t>Past Experience: Gacko designs - Worked with clients to design and develop a modern automotive website 6 Years of Personal Projects - Such as, Gambling Site, Type speed calculator </a:t>
+            </a:r>
+          </a:p>
+          <a:p>
+            <a:pPr lvl="0" fontAlgn="base"/>
+            <a:r>
+              <a:rPr lang="en-CA" sz="1200" b="0" i="0" kern="1200" dirty="0">
+                <a:solidFill>
+                  <a:schemeClr val="tx1"/>
+                </a:solidFill>
+                <a:effectLst/>
+                <a:latin typeface="+mn-lt"/>
+                <a:ea typeface="+mn-ea"/>
+                <a:cs typeface="+mn-cs"/>
+              </a:rPr>
+              <a:t>Role: Lead Developer </a:t>
+            </a:r>
+          </a:p>
+          <a:p>
+            <a:pPr lvl="0" fontAlgn="base"/>
+            <a:r>
+              <a:rPr lang="en-CA" sz="1200" b="0" i="0" kern="1200" dirty="0">
+                <a:solidFill>
+                  <a:schemeClr val="tx1"/>
+                </a:solidFill>
+                <a:effectLst/>
+                <a:latin typeface="+mn-lt"/>
+                <a:ea typeface="+mn-ea"/>
+                <a:cs typeface="+mn-cs"/>
+              </a:rPr>
+              <a:t>Expectations: Through this project I expect to lead a team throughout the development process and learn how to be a better leader </a:t>
             </a:r>
           </a:p>
           <a:p>
@@ -24644,7 +24869,7 @@
                 <a:latin typeface="Kumbh Sans" pitchFamily="2" charset="0"/>
                 <a:cs typeface="Kumbh Sans" pitchFamily="2" charset="0"/>
               </a:rPr>
-              <a:t>    Jack</a:t>
+              <a:t>    Kayla</a:t>
             </a:r>
           </a:p>
           <a:p>
@@ -24664,7 +24889,7 @@
                 <a:latin typeface="Kumbh Sans" pitchFamily="2" charset="0"/>
                 <a:cs typeface="Kumbh Sans" pitchFamily="2" charset="0"/>
               </a:rPr>
-              <a:t>    Kayla</a:t>
+              <a:t>    Jack</a:t>
             </a:r>
           </a:p>
           <a:p>
@@ -24997,7 +25222,7 @@
         <p:spPr>
           <a:xfrm>
             <a:off x="5491491" y="2227699"/>
-            <a:ext cx="4584909" cy="1848070"/>
+            <a:ext cx="4588115" cy="1848070"/>
           </a:xfrm>
           <a:prstGeom prst="rect">
             <a:avLst/>
@@ -25038,7 +25263,7 @@
                 <a:latin typeface="Kumbh Sans" pitchFamily="2" charset="0"/>
                 <a:cs typeface="Kumbh Sans" pitchFamily="2" charset="0"/>
               </a:rPr>
-              <a:t>Backend Dev</a:t>
+              <a:t>Design Compliance</a:t>
             </a:r>
           </a:p>
           <a:p>
@@ -25054,7 +25279,7 @@
                 <a:latin typeface="Kumbh Sans" pitchFamily="2" charset="0"/>
                 <a:cs typeface="Kumbh Sans" pitchFamily="2" charset="0"/>
               </a:rPr>
-              <a:t>Excellent Professional Database</a:t>
+              <a:t>Excellent Standards &amp; Accessibility</a:t>
             </a:r>
           </a:p>
         </p:txBody>
@@ -26207,7 +26432,7 @@
         <p:spPr>
           <a:xfrm>
             <a:off x="440111" y="376344"/>
-            <a:ext cx="1588897" cy="5997476"/>
+            <a:ext cx="1636987" cy="5997476"/>
           </a:xfrm>
           <a:prstGeom prst="rect">
             <a:avLst/>
@@ -26244,7 +26469,7 @@
                 <a:latin typeface="Kumbh Sans" pitchFamily="2" charset="0"/>
                 <a:cs typeface="Kumbh Sans" pitchFamily="2" charset="0"/>
               </a:rPr>
-              <a:t>    Jack</a:t>
+              <a:t>    Kayla</a:t>
             </a:r>
           </a:p>
           <a:p>
@@ -26264,7 +26489,7 @@
                 <a:latin typeface="Kumbh Sans" pitchFamily="2" charset="0"/>
                 <a:cs typeface="Kumbh Sans" pitchFamily="2" charset="0"/>
               </a:rPr>
-              <a:t>    Kayla</a:t>
+              <a:t>    Jack</a:t>
             </a:r>
           </a:p>
           <a:p>
@@ -26420,7 +26645,7 @@
         <p:spPr>
           <a:xfrm>
             <a:off x="5491491" y="2227699"/>
-            <a:ext cx="4650632" cy="1848070"/>
+            <a:ext cx="4588115" cy="1848070"/>
           </a:xfrm>
           <a:prstGeom prst="rect">
             <a:avLst/>
@@ -26461,7 +26686,7 @@
                 <a:latin typeface="Kumbh Sans" pitchFamily="2" charset="0"/>
                 <a:cs typeface="Kumbh Sans" pitchFamily="2" charset="0"/>
               </a:rPr>
-              <a:t>Design Compliance</a:t>
+              <a:t>Backend Dev</a:t>
             </a:r>
           </a:p>
           <a:p>
@@ -26477,7 +26702,7 @@
                 <a:latin typeface="Kumbh Sans" pitchFamily="2" charset="0"/>
                 <a:cs typeface="Kumbh Sans" pitchFamily="2" charset="0"/>
               </a:rPr>
-              <a:t>Standards &amp; Accessibility</a:t>
+              <a:t>Excellent Professional Database</a:t>
             </a:r>
           </a:p>
         </p:txBody>
@@ -27627,7 +27852,7 @@
                 <a:latin typeface="Kumbh Sans" pitchFamily="2" charset="0"/>
                 <a:cs typeface="Kumbh Sans" pitchFamily="2" charset="0"/>
               </a:rPr>
-              <a:t>Jack</a:t>
+              <a:t>Kayla</a:t>
             </a:r>
           </a:p>
           <a:p>
@@ -27654,7 +27879,7 @@
                 <a:latin typeface="Kumbh Sans" pitchFamily="2" charset="0"/>
                 <a:cs typeface="Kumbh Sans" pitchFamily="2" charset="0"/>
               </a:rPr>
-              <a:t>Kayla</a:t>
+              <a:t>Jack</a:t>
             </a:r>
           </a:p>
           <a:p>
@@ -27739,6 +27964,87 @@
           </a:p>
         </p:txBody>
       </p:sp>
+      <p:sp>
+        <p:nvSpPr>
+          <p:cNvPr id="12" name="TextBox 11">
+            <a:extLst>
+              <a:ext uri="{FF2B5EF4-FFF2-40B4-BE49-F238E27FC236}">
+                <a16:creationId xmlns:a16="http://schemas.microsoft.com/office/drawing/2014/main" id="{A8ECB029-F628-7E2F-9B86-3C1773F06379}"/>
+              </a:ext>
+            </a:extLst>
+          </p:cNvPr>
+          <p:cNvSpPr txBox="1"/>
+          <p:nvPr/>
+        </p:nvSpPr>
+        <p:spPr>
+          <a:xfrm>
+            <a:off x="5491491" y="2227699"/>
+            <a:ext cx="4584909" cy="1848070"/>
+          </a:xfrm>
+          <a:prstGeom prst="rect">
+            <a:avLst/>
+          </a:prstGeom>
+          <a:noFill/>
+        </p:spPr>
+        <p:txBody>
+          <a:bodyPr wrap="none" rtlCol="0">
+            <a:spAutoFit/>
+          </a:bodyPr>
+          <a:lstStyle/>
+          <a:p>
+            <a:pPr marL="285750" indent="-285750">
+              <a:lnSpc>
+                <a:spcPct val="200000"/>
+              </a:lnSpc>
+              <a:buFont typeface="Arial" panose="020B0604020202020204" pitchFamily="34" charset="0"/>
+              <a:buChar char="•"/>
+            </a:pPr>
+            <a:r>
+              <a:rPr lang="en-CA" sz="2000" dirty="0">
+                <a:latin typeface="Kumbh Sans" pitchFamily="2" charset="0"/>
+                <a:cs typeface="Kumbh Sans" pitchFamily="2" charset="0"/>
+              </a:rPr>
+              <a:t>Web Dev, Integrated Systems Dev</a:t>
+            </a:r>
+          </a:p>
+          <a:p>
+            <a:pPr marL="285750" indent="-285750">
+              <a:lnSpc>
+                <a:spcPct val="200000"/>
+              </a:lnSpc>
+              <a:buFont typeface="Arial" panose="020B0604020202020204" pitchFamily="34" charset="0"/>
+              <a:buChar char="•"/>
+            </a:pPr>
+            <a:r>
+              <a:rPr lang="en-CA" sz="2000" dirty="0">
+                <a:latin typeface="Kumbh Sans" pitchFamily="2" charset="0"/>
+                <a:cs typeface="Kumbh Sans" pitchFamily="2" charset="0"/>
+              </a:rPr>
+              <a:t>Communications Manager</a:t>
+            </a:r>
+          </a:p>
+          <a:p>
+            <a:pPr marL="285750" indent="-285750">
+              <a:lnSpc>
+                <a:spcPct val="200000"/>
+              </a:lnSpc>
+              <a:buFont typeface="Arial" panose="020B0604020202020204" pitchFamily="34" charset="0"/>
+              <a:buChar char="•"/>
+            </a:pPr>
+            <a:r>
+              <a:rPr lang="en-CA" sz="2000">
+                <a:latin typeface="Kumbh Sans" pitchFamily="2" charset="0"/>
+                <a:cs typeface="Kumbh Sans" pitchFamily="2" charset="0"/>
+              </a:rPr>
+              <a:t>Improve Teamwork Skills</a:t>
+            </a:r>
+            <a:endParaRPr lang="en-CA" sz="2000" dirty="0">
+              <a:latin typeface="Kumbh Sans" pitchFamily="2" charset="0"/>
+              <a:cs typeface="Kumbh Sans" pitchFamily="2" charset="0"/>
+            </a:endParaRPr>
+          </a:p>
+        </p:txBody>
+      </p:sp>
     </p:spTree>
     <p:extLst>
       <p:ext uri="{BB962C8B-B14F-4D97-AF65-F5344CB8AC3E}">
@@ -27954,6 +28260,351 @@
                                           <p:spTgt spid="6">
                                             <p:txEl>
                                               <p:pRg st="3" end="3"/>
+                                            </p:txEl>
+                                          </p:spTgt>
+                                        </p:tgtEl>
+                                        <p:attrNameLst>
+                                          <p:attrName>fill.on</p:attrName>
+                                        </p:attrNameLst>
+                                      </p:cBhvr>
+                                      <p:to>
+                                        <p:strVal val="true"/>
+                                      </p:to>
+                                    </p:set>
+                                  </p:childTnLst>
+                                </p:cTn>
+                              </p:par>
+                            </p:childTnLst>
+                          </p:cTn>
+                        </p:par>
+                      </p:childTnLst>
+                    </p:cTn>
+                  </p:par>
+                  <p:par>
+                    <p:cTn id="17" fill="hold">
+                      <p:stCondLst>
+                        <p:cond delay="indefinite"/>
+                      </p:stCondLst>
+                      <p:childTnLst>
+                        <p:par>
+                          <p:cTn id="18" fill="hold">
+                            <p:stCondLst>
+                              <p:cond delay="0"/>
+                            </p:stCondLst>
+                            <p:childTnLst>
+                              <p:par>
+                                <p:cTn id="19" presetID="10" presetClass="entr" presetSubtype="0" fill="hold" nodeType="clickEffect">
+                                  <p:stCondLst>
+                                    <p:cond delay="0"/>
+                                  </p:stCondLst>
+                                  <p:childTnLst>
+                                    <p:set>
+                                      <p:cBhvr>
+                                        <p:cTn id="20" dur="1" fill="hold">
+                                          <p:stCondLst>
+                                            <p:cond delay="0"/>
+                                          </p:stCondLst>
+                                        </p:cTn>
+                                        <p:tgtEl>
+                                          <p:spTgt spid="12">
+                                            <p:txEl>
+                                              <p:pRg st="0" end="0"/>
+                                            </p:txEl>
+                                          </p:spTgt>
+                                        </p:tgtEl>
+                                        <p:attrNameLst>
+                                          <p:attrName>style.visibility</p:attrName>
+                                        </p:attrNameLst>
+                                      </p:cBhvr>
+                                      <p:to>
+                                        <p:strVal val="visible"/>
+                                      </p:to>
+                                    </p:set>
+                                    <p:animEffect transition="in" filter="fade">
+                                      <p:cBhvr>
+                                        <p:cTn id="21" dur="500"/>
+                                        <p:tgtEl>
+                                          <p:spTgt spid="12">
+                                            <p:txEl>
+                                              <p:pRg st="0" end="0"/>
+                                            </p:txEl>
+                                          </p:spTgt>
+                                        </p:tgtEl>
+                                      </p:cBhvr>
+                                    </p:animEffect>
+                                  </p:childTnLst>
+                                </p:cTn>
+                              </p:par>
+                            </p:childTnLst>
+                          </p:cTn>
+                        </p:par>
+                      </p:childTnLst>
+                    </p:cTn>
+                  </p:par>
+                  <p:par>
+                    <p:cTn id="22" fill="hold">
+                      <p:stCondLst>
+                        <p:cond delay="indefinite"/>
+                      </p:stCondLst>
+                      <p:childTnLst>
+                        <p:par>
+                          <p:cTn id="23" fill="hold">
+                            <p:stCondLst>
+                              <p:cond delay="0"/>
+                            </p:stCondLst>
+                            <p:childTnLst>
+                              <p:par>
+                                <p:cTn id="24" presetID="10" presetClass="entr" presetSubtype="0" fill="hold" nodeType="clickEffect">
+                                  <p:stCondLst>
+                                    <p:cond delay="0"/>
+                                  </p:stCondLst>
+                                  <p:childTnLst>
+                                    <p:set>
+                                      <p:cBhvr>
+                                        <p:cTn id="25" dur="1" fill="hold">
+                                          <p:stCondLst>
+                                            <p:cond delay="0"/>
+                                          </p:stCondLst>
+                                        </p:cTn>
+                                        <p:tgtEl>
+                                          <p:spTgt spid="12">
+                                            <p:txEl>
+                                              <p:pRg st="1" end="1"/>
+                                            </p:txEl>
+                                          </p:spTgt>
+                                        </p:tgtEl>
+                                        <p:attrNameLst>
+                                          <p:attrName>style.visibility</p:attrName>
+                                        </p:attrNameLst>
+                                      </p:cBhvr>
+                                      <p:to>
+                                        <p:strVal val="visible"/>
+                                      </p:to>
+                                    </p:set>
+                                    <p:animEffect transition="in" filter="fade">
+                                      <p:cBhvr>
+                                        <p:cTn id="26" dur="500"/>
+                                        <p:tgtEl>
+                                          <p:spTgt spid="12">
+                                            <p:txEl>
+                                              <p:pRg st="1" end="1"/>
+                                            </p:txEl>
+                                          </p:spTgt>
+                                        </p:tgtEl>
+                                      </p:cBhvr>
+                                    </p:animEffect>
+                                  </p:childTnLst>
+                                </p:cTn>
+                              </p:par>
+                              <p:par>
+                                <p:cTn id="27" presetID="19" presetClass="emph" presetSubtype="0" fill="hold" nodeType="withEffect">
+                                  <p:stCondLst>
+                                    <p:cond delay="0"/>
+                                  </p:stCondLst>
+                                  <p:childTnLst>
+                                    <p:animClr clrSpc="rgb" dir="cw">
+                                      <p:cBhvr override="childStyle">
+                                        <p:cTn id="28" dur="500" fill="hold"/>
+                                        <p:tgtEl>
+                                          <p:spTgt spid="12">
+                                            <p:txEl>
+                                              <p:pRg st="0" end="0"/>
+                                            </p:txEl>
+                                          </p:spTgt>
+                                        </p:tgtEl>
+                                        <p:attrNameLst>
+                                          <p:attrName>style.color</p:attrName>
+                                        </p:attrNameLst>
+                                      </p:cBhvr>
+                                      <p:to>
+                                        <a:srgbClr val="96CDF8"/>
+                                      </p:to>
+                                    </p:animClr>
+                                    <p:animClr clrSpc="rgb" dir="cw">
+                                      <p:cBhvr>
+                                        <p:cTn id="29" dur="500" fill="hold"/>
+                                        <p:tgtEl>
+                                          <p:spTgt spid="12">
+                                            <p:txEl>
+                                              <p:pRg st="0" end="0"/>
+                                            </p:txEl>
+                                          </p:spTgt>
+                                        </p:tgtEl>
+                                        <p:attrNameLst>
+                                          <p:attrName>fillcolor</p:attrName>
+                                        </p:attrNameLst>
+                                      </p:cBhvr>
+                                      <p:to>
+                                        <a:srgbClr val="96CDF8"/>
+                                      </p:to>
+                                    </p:animClr>
+                                    <p:set>
+                                      <p:cBhvr>
+                                        <p:cTn id="30" dur="500" fill="hold"/>
+                                        <p:tgtEl>
+                                          <p:spTgt spid="12">
+                                            <p:txEl>
+                                              <p:pRg st="0" end="0"/>
+                                            </p:txEl>
+                                          </p:spTgt>
+                                        </p:tgtEl>
+                                        <p:attrNameLst>
+                                          <p:attrName>fill.type</p:attrName>
+                                        </p:attrNameLst>
+                                      </p:cBhvr>
+                                      <p:to>
+                                        <p:strVal val="solid"/>
+                                      </p:to>
+                                    </p:set>
+                                    <p:set>
+                                      <p:cBhvr>
+                                        <p:cTn id="31" dur="500" fill="hold"/>
+                                        <p:tgtEl>
+                                          <p:spTgt spid="12">
+                                            <p:txEl>
+                                              <p:pRg st="0" end="0"/>
+                                            </p:txEl>
+                                          </p:spTgt>
+                                        </p:tgtEl>
+                                        <p:attrNameLst>
+                                          <p:attrName>fill.on</p:attrName>
+                                        </p:attrNameLst>
+                                      </p:cBhvr>
+                                      <p:to>
+                                        <p:strVal val="true"/>
+                                      </p:to>
+                                    </p:set>
+                                  </p:childTnLst>
+                                </p:cTn>
+                              </p:par>
+                            </p:childTnLst>
+                          </p:cTn>
+                        </p:par>
+                      </p:childTnLst>
+                    </p:cTn>
+                  </p:par>
+                  <p:par>
+                    <p:cTn id="32" fill="hold">
+                      <p:stCondLst>
+                        <p:cond delay="indefinite"/>
+                      </p:stCondLst>
+                      <p:childTnLst>
+                        <p:par>
+                          <p:cTn id="33" fill="hold">
+                            <p:stCondLst>
+                              <p:cond delay="0"/>
+                            </p:stCondLst>
+                            <p:childTnLst>
+                              <p:par>
+                                <p:cTn id="34" presetID="10" presetClass="entr" presetSubtype="0" fill="hold" nodeType="clickEffect">
+                                  <p:stCondLst>
+                                    <p:cond delay="0"/>
+                                  </p:stCondLst>
+                                  <p:childTnLst>
+                                    <p:set>
+                                      <p:cBhvr>
+                                        <p:cTn id="35" dur="1" fill="hold">
+                                          <p:stCondLst>
+                                            <p:cond delay="0"/>
+                                          </p:stCondLst>
+                                        </p:cTn>
+                                        <p:tgtEl>
+                                          <p:spTgt spid="12">
+                                            <p:txEl>
+                                              <p:pRg st="2" end="2"/>
+                                            </p:txEl>
+                                          </p:spTgt>
+                                        </p:tgtEl>
+                                        <p:attrNameLst>
+                                          <p:attrName>style.visibility</p:attrName>
+                                        </p:attrNameLst>
+                                      </p:cBhvr>
+                                      <p:to>
+                                        <p:strVal val="visible"/>
+                                      </p:to>
+                                    </p:set>
+                                    <p:animEffect transition="in" filter="fade">
+                                      <p:cBhvr>
+                                        <p:cTn id="36" dur="500"/>
+                                        <p:tgtEl>
+                                          <p:spTgt spid="12">
+                                            <p:txEl>
+                                              <p:pRg st="2" end="2"/>
+                                            </p:txEl>
+                                          </p:spTgt>
+                                        </p:tgtEl>
+                                      </p:cBhvr>
+                                    </p:animEffect>
+                                  </p:childTnLst>
+                                </p:cTn>
+                              </p:par>
+                              <p:par>
+                                <p:cTn id="37" presetID="19" presetClass="emph" presetSubtype="0" fill="hold" nodeType="withEffect">
+                                  <p:stCondLst>
+                                    <p:cond delay="0"/>
+                                  </p:stCondLst>
+                                  <p:childTnLst>
+                                    <p:animClr clrSpc="rgb" dir="cw">
+                                      <p:cBhvr override="childStyle">
+                                        <p:cTn id="38" dur="500" fill="hold"/>
+                                        <p:tgtEl>
+                                          <p:spTgt spid="12">
+                                            <p:txEl>
+                                              <p:pRg st="1" end="1"/>
+                                            </p:txEl>
+                                          </p:spTgt>
+                                        </p:tgtEl>
+                                        <p:attrNameLst>
+                                          <p:attrName>style.color</p:attrName>
+                                        </p:attrNameLst>
+                                      </p:cBhvr>
+                                      <p:to>
+                                        <a:srgbClr val="96CDF8"/>
+                                      </p:to>
+                                    </p:animClr>
+                                    <p:animClr clrSpc="rgb" dir="cw">
+                                      <p:cBhvr>
+                                        <p:cTn id="39" dur="500" fill="hold"/>
+                                        <p:tgtEl>
+                                          <p:spTgt spid="12">
+                                            <p:txEl>
+                                              <p:pRg st="1" end="1"/>
+                                            </p:txEl>
+                                          </p:spTgt>
+                                        </p:tgtEl>
+                                        <p:attrNameLst>
+                                          <p:attrName>fillcolor</p:attrName>
+                                        </p:attrNameLst>
+                                      </p:cBhvr>
+                                      <p:to>
+                                        <a:srgbClr val="96CDF8"/>
+                                      </p:to>
+                                    </p:animClr>
+                                    <p:set>
+                                      <p:cBhvr>
+                                        <p:cTn id="40" dur="500" fill="hold"/>
+                                        <p:tgtEl>
+                                          <p:spTgt spid="12">
+                                            <p:txEl>
+                                              <p:pRg st="1" end="1"/>
+                                            </p:txEl>
+                                          </p:spTgt>
+                                        </p:tgtEl>
+                                        <p:attrNameLst>
+                                          <p:attrName>fill.type</p:attrName>
+                                        </p:attrNameLst>
+                                      </p:cBhvr>
+                                      <p:to>
+                                        <p:strVal val="solid"/>
+                                      </p:to>
+                                    </p:set>
+                                    <p:set>
+                                      <p:cBhvr>
+                                        <p:cTn id="41" dur="500" fill="hold"/>
+                                        <p:tgtEl>
+                                          <p:spTgt spid="12">
+                                            <p:txEl>
+                                              <p:pRg st="1" end="1"/>
                                             </p:txEl>
                                           </p:spTgt>
                                         </p:tgtEl>
@@ -28248,10 +28899,10 @@
           </p:nvGrpSpPr>
           <p:grpSpPr>
             <a:xfrm rot="5400000">
-              <a:off x="2702405" y="1156469"/>
-              <a:ext cx="302418" cy="300038"/>
+              <a:off x="2701215" y="1157660"/>
+              <a:ext cx="304799" cy="300038"/>
               <a:chOff x="1232178" y="4745831"/>
-              <a:chExt cx="302418" cy="300038"/>
+              <a:chExt cx="304799" cy="300038"/>
             </a:xfrm>
           </p:grpSpPr>
           <p:sp>
@@ -28268,7 +28919,7 @@
             </p:nvSpPr>
             <p:spPr>
               <a:xfrm>
-                <a:off x="1234559" y="4745832"/>
+                <a:off x="1236940" y="4745832"/>
                 <a:ext cx="300037" cy="300037"/>
               </a:xfrm>
               <a:prstGeom prst="rect">
@@ -28492,7 +29143,7 @@
                 <a:latin typeface="Kumbh Sans" pitchFamily="2" charset="0"/>
                 <a:cs typeface="Kumbh Sans" pitchFamily="2" charset="0"/>
               </a:rPr>
-              <a:t>Jack</a:t>
+              <a:t>Kayla</a:t>
             </a:r>
           </a:p>
           <a:p>
@@ -28512,7 +29163,7 @@
                 <a:latin typeface="Kumbh Sans" pitchFamily="2" charset="0"/>
                 <a:cs typeface="Kumbh Sans" pitchFamily="2" charset="0"/>
               </a:rPr>
-              <a:t>    Kayla</a:t>
+              <a:t>    Jack</a:t>
             </a:r>
           </a:p>
           <a:p>
@@ -28604,6 +29255,83 @@
           </a:p>
         </p:txBody>
       </p:sp>
+      <p:sp>
+        <p:nvSpPr>
+          <p:cNvPr id="4" name="TextBox 3">
+            <a:extLst>
+              <a:ext uri="{FF2B5EF4-FFF2-40B4-BE49-F238E27FC236}">
+                <a16:creationId xmlns:a16="http://schemas.microsoft.com/office/drawing/2014/main" id="{FCB0987B-36F3-8A6F-1B24-CA8B0A4ABC95}"/>
+              </a:ext>
+            </a:extLst>
+          </p:cNvPr>
+          <p:cNvSpPr txBox="1"/>
+          <p:nvPr/>
+        </p:nvSpPr>
+        <p:spPr>
+          <a:xfrm>
+            <a:off x="5491491" y="2227699"/>
+            <a:ext cx="3504486" cy="1848070"/>
+          </a:xfrm>
+          <a:prstGeom prst="rect">
+            <a:avLst/>
+          </a:prstGeom>
+          <a:noFill/>
+        </p:spPr>
+        <p:txBody>
+          <a:bodyPr wrap="none" rtlCol="0">
+            <a:spAutoFit/>
+          </a:bodyPr>
+          <a:lstStyle/>
+          <a:p>
+            <a:pPr marL="285750" indent="-285750">
+              <a:lnSpc>
+                <a:spcPct val="200000"/>
+              </a:lnSpc>
+              <a:buFont typeface="Arial" panose="020B0604020202020204" pitchFamily="34" charset="0"/>
+              <a:buChar char="•"/>
+            </a:pPr>
+            <a:r>
+              <a:rPr lang="en-CA" sz="2000" dirty="0">
+                <a:latin typeface="Kumbh Sans" pitchFamily="2" charset="0"/>
+                <a:cs typeface="Kumbh Sans" pitchFamily="2" charset="0"/>
+              </a:rPr>
+              <a:t>Experienced Web Dev</a:t>
+            </a:r>
+          </a:p>
+          <a:p>
+            <a:pPr marL="285750" indent="-285750">
+              <a:lnSpc>
+                <a:spcPct val="200000"/>
+              </a:lnSpc>
+              <a:buFont typeface="Arial" panose="020B0604020202020204" pitchFamily="34" charset="0"/>
+              <a:buChar char="•"/>
+            </a:pPr>
+            <a:r>
+              <a:rPr lang="en-CA" sz="2000" dirty="0">
+                <a:latin typeface="Kumbh Sans" pitchFamily="2" charset="0"/>
+                <a:cs typeface="Kumbh Sans" pitchFamily="2" charset="0"/>
+              </a:rPr>
+              <a:t>Lead Dev</a:t>
+            </a:r>
+          </a:p>
+          <a:p>
+            <a:pPr marL="285750" indent="-285750">
+              <a:lnSpc>
+                <a:spcPct val="200000"/>
+              </a:lnSpc>
+              <a:buFont typeface="Arial" panose="020B0604020202020204" pitchFamily="34" charset="0"/>
+              <a:buChar char="•"/>
+            </a:pPr>
+            <a:r>
+              <a:rPr lang="en-CA" sz="2000" dirty="0">
+                <a:latin typeface="Kumbh Sans" pitchFamily="2" charset="0"/>
+                <a:cs typeface="Kumbh Sans" pitchFamily="2" charset="0"/>
+              </a:rPr>
+              <a:t>Professionally Lead Team</a:t>
+            </a:r>
+          </a:p>
+        </p:txBody>
+      </p:sp>
     </p:spTree>
     <p:extLst>
       <p:ext uri="{BB962C8B-B14F-4D97-AF65-F5344CB8AC3E}">
@@ -28819,6 +29547,351 @@
                                           <p:spTgt spid="6">
                                             <p:txEl>
                                               <p:pRg st="4" end="4"/>
+                                            </p:txEl>
+                                          </p:spTgt>
+                                        </p:tgtEl>
+                                        <p:attrNameLst>
+                                          <p:attrName>fill.on</p:attrName>
+                                        </p:attrNameLst>
+                                      </p:cBhvr>
+                                      <p:to>
+                                        <p:strVal val="true"/>
+                                      </p:to>
+                                    </p:set>
+                                  </p:childTnLst>
+                                </p:cTn>
+                              </p:par>
+                            </p:childTnLst>
+                          </p:cTn>
+                        </p:par>
+                      </p:childTnLst>
+                    </p:cTn>
+                  </p:par>
+                  <p:par>
+                    <p:cTn id="17" fill="hold">
+                      <p:stCondLst>
+                        <p:cond delay="indefinite"/>
+                      </p:stCondLst>
+                      <p:childTnLst>
+                        <p:par>
+                          <p:cTn id="18" fill="hold">
+                            <p:stCondLst>
+                              <p:cond delay="0"/>
+                            </p:stCondLst>
+                            <p:childTnLst>
+                              <p:par>
+                                <p:cTn id="19" presetID="10" presetClass="entr" presetSubtype="0" fill="hold" nodeType="clickEffect">
+                                  <p:stCondLst>
+                                    <p:cond delay="0"/>
+                                  </p:stCondLst>
+                                  <p:childTnLst>
+                                    <p:set>
+                                      <p:cBhvr>
+                                        <p:cTn id="20" dur="1" fill="hold">
+                                          <p:stCondLst>
+                                            <p:cond delay="0"/>
+                                          </p:stCondLst>
+                                        </p:cTn>
+                                        <p:tgtEl>
+                                          <p:spTgt spid="4">
+                                            <p:txEl>
+                                              <p:pRg st="0" end="0"/>
+                                            </p:txEl>
+                                          </p:spTgt>
+                                        </p:tgtEl>
+                                        <p:attrNameLst>
+                                          <p:attrName>style.visibility</p:attrName>
+                                        </p:attrNameLst>
+                                      </p:cBhvr>
+                                      <p:to>
+                                        <p:strVal val="visible"/>
+                                      </p:to>
+                                    </p:set>
+                                    <p:animEffect transition="in" filter="fade">
+                                      <p:cBhvr>
+                                        <p:cTn id="21" dur="500"/>
+                                        <p:tgtEl>
+                                          <p:spTgt spid="4">
+                                            <p:txEl>
+                                              <p:pRg st="0" end="0"/>
+                                            </p:txEl>
+                                          </p:spTgt>
+                                        </p:tgtEl>
+                                      </p:cBhvr>
+                                    </p:animEffect>
+                                  </p:childTnLst>
+                                </p:cTn>
+                              </p:par>
+                            </p:childTnLst>
+                          </p:cTn>
+                        </p:par>
+                      </p:childTnLst>
+                    </p:cTn>
+                  </p:par>
+                  <p:par>
+                    <p:cTn id="22" fill="hold">
+                      <p:stCondLst>
+                        <p:cond delay="indefinite"/>
+                      </p:stCondLst>
+                      <p:childTnLst>
+                        <p:par>
+                          <p:cTn id="23" fill="hold">
+                            <p:stCondLst>
+                              <p:cond delay="0"/>
+                            </p:stCondLst>
+                            <p:childTnLst>
+                              <p:par>
+                                <p:cTn id="24" presetID="10" presetClass="entr" presetSubtype="0" fill="hold" nodeType="clickEffect">
+                                  <p:stCondLst>
+                                    <p:cond delay="0"/>
+                                  </p:stCondLst>
+                                  <p:childTnLst>
+                                    <p:set>
+                                      <p:cBhvr>
+                                        <p:cTn id="25" dur="1" fill="hold">
+                                          <p:stCondLst>
+                                            <p:cond delay="0"/>
+                                          </p:stCondLst>
+                                        </p:cTn>
+                                        <p:tgtEl>
+                                          <p:spTgt spid="4">
+                                            <p:txEl>
+                                              <p:pRg st="1" end="1"/>
+                                            </p:txEl>
+                                          </p:spTgt>
+                                        </p:tgtEl>
+                                        <p:attrNameLst>
+                                          <p:attrName>style.visibility</p:attrName>
+                                        </p:attrNameLst>
+                                      </p:cBhvr>
+                                      <p:to>
+                                        <p:strVal val="visible"/>
+                                      </p:to>
+                                    </p:set>
+                                    <p:animEffect transition="in" filter="fade">
+                                      <p:cBhvr>
+                                        <p:cTn id="26" dur="500"/>
+                                        <p:tgtEl>
+                                          <p:spTgt spid="4">
+                                            <p:txEl>
+                                              <p:pRg st="1" end="1"/>
+                                            </p:txEl>
+                                          </p:spTgt>
+                                        </p:tgtEl>
+                                      </p:cBhvr>
+                                    </p:animEffect>
+                                  </p:childTnLst>
+                                </p:cTn>
+                              </p:par>
+                              <p:par>
+                                <p:cTn id="27" presetID="19" presetClass="emph" presetSubtype="0" fill="hold" nodeType="withEffect">
+                                  <p:stCondLst>
+                                    <p:cond delay="0"/>
+                                  </p:stCondLst>
+                                  <p:childTnLst>
+                                    <p:animClr clrSpc="rgb" dir="cw">
+                                      <p:cBhvr override="childStyle">
+                                        <p:cTn id="28" dur="500" fill="hold"/>
+                                        <p:tgtEl>
+                                          <p:spTgt spid="4">
+                                            <p:txEl>
+                                              <p:pRg st="0" end="0"/>
+                                            </p:txEl>
+                                          </p:spTgt>
+                                        </p:tgtEl>
+                                        <p:attrNameLst>
+                                          <p:attrName>style.color</p:attrName>
+                                        </p:attrNameLst>
+                                      </p:cBhvr>
+                                      <p:to>
+                                        <a:srgbClr val="96CDF8"/>
+                                      </p:to>
+                                    </p:animClr>
+                                    <p:animClr clrSpc="rgb" dir="cw">
+                                      <p:cBhvr>
+                                        <p:cTn id="29" dur="500" fill="hold"/>
+                                        <p:tgtEl>
+                                          <p:spTgt spid="4">
+                                            <p:txEl>
+                                              <p:pRg st="0" end="0"/>
+                                            </p:txEl>
+                                          </p:spTgt>
+                                        </p:tgtEl>
+                                        <p:attrNameLst>
+                                          <p:attrName>fillcolor</p:attrName>
+                                        </p:attrNameLst>
+                                      </p:cBhvr>
+                                      <p:to>
+                                        <a:srgbClr val="96CDF8"/>
+                                      </p:to>
+                                    </p:animClr>
+                                    <p:set>
+                                      <p:cBhvr>
+                                        <p:cTn id="30" dur="500" fill="hold"/>
+                                        <p:tgtEl>
+                                          <p:spTgt spid="4">
+                                            <p:txEl>
+                                              <p:pRg st="0" end="0"/>
+                                            </p:txEl>
+                                          </p:spTgt>
+                                        </p:tgtEl>
+                                        <p:attrNameLst>
+                                          <p:attrName>fill.type</p:attrName>
+                                        </p:attrNameLst>
+                                      </p:cBhvr>
+                                      <p:to>
+                                        <p:strVal val="solid"/>
+                                      </p:to>
+                                    </p:set>
+                                    <p:set>
+                                      <p:cBhvr>
+                                        <p:cTn id="31" dur="500" fill="hold"/>
+                                        <p:tgtEl>
+                                          <p:spTgt spid="4">
+                                            <p:txEl>
+                                              <p:pRg st="0" end="0"/>
+                                            </p:txEl>
+                                          </p:spTgt>
+                                        </p:tgtEl>
+                                        <p:attrNameLst>
+                                          <p:attrName>fill.on</p:attrName>
+                                        </p:attrNameLst>
+                                      </p:cBhvr>
+                                      <p:to>
+                                        <p:strVal val="true"/>
+                                      </p:to>
+                                    </p:set>
+                                  </p:childTnLst>
+                                </p:cTn>
+                              </p:par>
+                            </p:childTnLst>
+                          </p:cTn>
+                        </p:par>
+                      </p:childTnLst>
+                    </p:cTn>
+                  </p:par>
+                  <p:par>
+                    <p:cTn id="32" fill="hold">
+                      <p:stCondLst>
+                        <p:cond delay="indefinite"/>
+                      </p:stCondLst>
+                      <p:childTnLst>
+                        <p:par>
+                          <p:cTn id="33" fill="hold">
+                            <p:stCondLst>
+                              <p:cond delay="0"/>
+                            </p:stCondLst>
+                            <p:childTnLst>
+                              <p:par>
+                                <p:cTn id="34" presetID="10" presetClass="entr" presetSubtype="0" fill="hold" nodeType="clickEffect">
+                                  <p:stCondLst>
+                                    <p:cond delay="0"/>
+                                  </p:stCondLst>
+                                  <p:childTnLst>
+                                    <p:set>
+                                      <p:cBhvr>
+                                        <p:cTn id="35" dur="1" fill="hold">
+                                          <p:stCondLst>
+                                            <p:cond delay="0"/>
+                                          </p:stCondLst>
+                                        </p:cTn>
+                                        <p:tgtEl>
+                                          <p:spTgt spid="4">
+                                            <p:txEl>
+                                              <p:pRg st="2" end="2"/>
+                                            </p:txEl>
+                                          </p:spTgt>
+                                        </p:tgtEl>
+                                        <p:attrNameLst>
+                                          <p:attrName>style.visibility</p:attrName>
+                                        </p:attrNameLst>
+                                      </p:cBhvr>
+                                      <p:to>
+                                        <p:strVal val="visible"/>
+                                      </p:to>
+                                    </p:set>
+                                    <p:animEffect transition="in" filter="fade">
+                                      <p:cBhvr>
+                                        <p:cTn id="36" dur="500"/>
+                                        <p:tgtEl>
+                                          <p:spTgt spid="4">
+                                            <p:txEl>
+                                              <p:pRg st="2" end="2"/>
+                                            </p:txEl>
+                                          </p:spTgt>
+                                        </p:tgtEl>
+                                      </p:cBhvr>
+                                    </p:animEffect>
+                                  </p:childTnLst>
+                                </p:cTn>
+                              </p:par>
+                              <p:par>
+                                <p:cTn id="37" presetID="19" presetClass="emph" presetSubtype="0" fill="hold" nodeType="withEffect">
+                                  <p:stCondLst>
+                                    <p:cond delay="0"/>
+                                  </p:stCondLst>
+                                  <p:childTnLst>
+                                    <p:animClr clrSpc="rgb" dir="cw">
+                                      <p:cBhvr override="childStyle">
+                                        <p:cTn id="38" dur="500" fill="hold"/>
+                                        <p:tgtEl>
+                                          <p:spTgt spid="4">
+                                            <p:txEl>
+                                              <p:pRg st="1" end="1"/>
+                                            </p:txEl>
+                                          </p:spTgt>
+                                        </p:tgtEl>
+                                        <p:attrNameLst>
+                                          <p:attrName>style.color</p:attrName>
+                                        </p:attrNameLst>
+                                      </p:cBhvr>
+                                      <p:to>
+                                        <a:srgbClr val="96CDF8"/>
+                                      </p:to>
+                                    </p:animClr>
+                                    <p:animClr clrSpc="rgb" dir="cw">
+                                      <p:cBhvr>
+                                        <p:cTn id="39" dur="500" fill="hold"/>
+                                        <p:tgtEl>
+                                          <p:spTgt spid="4">
+                                            <p:txEl>
+                                              <p:pRg st="1" end="1"/>
+                                            </p:txEl>
+                                          </p:spTgt>
+                                        </p:tgtEl>
+                                        <p:attrNameLst>
+                                          <p:attrName>fillcolor</p:attrName>
+                                        </p:attrNameLst>
+                                      </p:cBhvr>
+                                      <p:to>
+                                        <a:srgbClr val="96CDF8"/>
+                                      </p:to>
+                                    </p:animClr>
+                                    <p:set>
+                                      <p:cBhvr>
+                                        <p:cTn id="40" dur="500" fill="hold"/>
+                                        <p:tgtEl>
+                                          <p:spTgt spid="4">
+                                            <p:txEl>
+                                              <p:pRg st="1" end="1"/>
+                                            </p:txEl>
+                                          </p:spTgt>
+                                        </p:tgtEl>
+                                        <p:attrNameLst>
+                                          <p:attrName>fill.type</p:attrName>
+                                        </p:attrNameLst>
+                                      </p:cBhvr>
+                                      <p:to>
+                                        <p:strVal val="solid"/>
+                                      </p:to>
+                                    </p:set>
+                                    <p:set>
+                                      <p:cBhvr>
+                                        <p:cTn id="41" dur="500" fill="hold"/>
+                                        <p:tgtEl>
+                                          <p:spTgt spid="4">
+                                            <p:txEl>
+                                              <p:pRg st="1" end="1"/>
                                             </p:txEl>
                                           </p:spTgt>
                                         </p:tgtEl>
@@ -29490,7 +30563,7 @@
                 <a:latin typeface="Kumbh Sans" pitchFamily="2" charset="0"/>
                 <a:cs typeface="Kumbh Sans" pitchFamily="2" charset="0"/>
               </a:rPr>
-              <a:t>Jack</a:t>
+              <a:t>Kayla</a:t>
             </a:r>
           </a:p>
           <a:p>
@@ -29510,7 +30583,7 @@
                 <a:latin typeface="Kumbh Sans" pitchFamily="2" charset="0"/>
                 <a:cs typeface="Kumbh Sans" pitchFamily="2" charset="0"/>
               </a:rPr>
-              <a:t>    Kayla</a:t>
+              <a:t>    Jack</a:t>
             </a:r>
           </a:p>
           <a:p>

--- a/Deliverables/Presentation1.pptx
+++ b/Deliverables/Presentation1.pptx
@@ -145,7 +145,7 @@
 <file path=ppt/revisionInfo.xml><?xml version="1.0" encoding="utf-8"?>
 <p1510:revInfo xmlns:a="http://schemas.openxmlformats.org/drawingml/2006/main" xmlns:r="http://schemas.openxmlformats.org/officeDocument/2006/relationships" xmlns:p1510="http://schemas.microsoft.com/office/powerpoint/2015/10/main">
   <p1510:revLst>
-    <p1510:client id="{EADFFEA0-CC63-45EF-97E4-5A80CDB68182}" v="2179" dt="2026-09-18T15:54:06.335"/>
+    <p1510:client id="{EADFFEA0-CC63-45EF-97E4-5A80CDB68182}" v="2187" dt="2026-09-18T16:08:03.144"/>
   </p1510:revLst>
 </p1510:revInfo>
 </file>
@@ -155,7 +155,7 @@
   <pc:docChgLst>
     <pc:chgData name="Steve Mutrux" userId="4fa98d0c-dc66-4728-b09b-a88e22e95094" providerId="ADAL" clId="{421BD283-33D8-4C6C-821F-71755E863FA2}"/>
     <pc:docChg chg="undo custSel addSld delSld modSld sldOrd">
-      <pc:chgData name="Steve Mutrux" userId="4fa98d0c-dc66-4728-b09b-a88e22e95094" providerId="ADAL" clId="{421BD283-33D8-4C6C-821F-71755E863FA2}" dt="2026-09-18T15:54:06.335" v="5792" actId="20577"/>
+      <pc:chgData name="Steve Mutrux" userId="4fa98d0c-dc66-4728-b09b-a88e22e95094" providerId="ADAL" clId="{421BD283-33D8-4C6C-821F-71755E863FA2}" dt="2026-09-18T16:08:03.144" v="5804"/>
       <pc:docMkLst>
         <pc:docMk/>
       </pc:docMkLst>
@@ -381,13 +381,13 @@
         </pc:grpChg>
       </pc:sldChg>
       <pc:sldChg chg="addSp delSp modSp add mod ord modTransition modAnim">
-        <pc:chgData name="Steve Mutrux" userId="4fa98d0c-dc66-4728-b09b-a88e22e95094" providerId="ADAL" clId="{421BD283-33D8-4C6C-821F-71755E863FA2}" dt="2026-09-17T18:05:10.212" v="5205" actId="20577"/>
+        <pc:chgData name="Steve Mutrux" userId="4fa98d0c-dc66-4728-b09b-a88e22e95094" providerId="ADAL" clId="{421BD283-33D8-4C6C-821F-71755E863FA2}" dt="2026-09-18T16:08:01.364" v="5803" actId="20577"/>
         <pc:sldMkLst>
           <pc:docMk/>
           <pc:sldMk cId="3444687766" sldId="260"/>
         </pc:sldMkLst>
         <pc:spChg chg="add mod">
-          <ac:chgData name="Steve Mutrux" userId="4fa98d0c-dc66-4728-b09b-a88e22e95094" providerId="ADAL" clId="{421BD283-33D8-4C6C-821F-71755E863FA2}" dt="2026-09-17T18:05:10.212" v="5205" actId="20577"/>
+          <ac:chgData name="Steve Mutrux" userId="4fa98d0c-dc66-4728-b09b-a88e22e95094" providerId="ADAL" clId="{421BD283-33D8-4C6C-821F-71755E863FA2}" dt="2026-09-18T16:08:01.364" v="5803" actId="20577"/>
           <ac:spMkLst>
             <pc:docMk/>
             <pc:sldMk cId="3444687766" sldId="260"/>
@@ -675,7 +675,7 @@
         </pc:picChg>
       </pc:sldChg>
       <pc:sldChg chg="addSp delSp modSp add mod modTransition delAnim modAnim">
-        <pc:chgData name="Steve Mutrux" userId="4fa98d0c-dc66-4728-b09b-a88e22e95094" providerId="ADAL" clId="{421BD283-33D8-4C6C-821F-71755E863FA2}" dt="2026-09-18T13:41:02.534" v="5531"/>
+        <pc:chgData name="Steve Mutrux" userId="4fa98d0c-dc66-4728-b09b-a88e22e95094" providerId="ADAL" clId="{421BD283-33D8-4C6C-821F-71755E863FA2}" dt="2026-09-18T16:07:26.666" v="5796" actId="1076"/>
         <pc:sldMkLst>
           <pc:docMk/>
           <pc:sldMk cId="1179066660" sldId="262"/>
@@ -769,7 +769,7 @@
           </ac:spMkLst>
         </pc:spChg>
         <pc:spChg chg="add mod">
-          <ac:chgData name="Steve Mutrux" userId="4fa98d0c-dc66-4728-b09b-a88e22e95094" providerId="ADAL" clId="{421BD283-33D8-4C6C-821F-71755E863FA2}" dt="2026-09-18T13:36:39.419" v="5500" actId="1076"/>
+          <ac:chgData name="Steve Mutrux" userId="4fa98d0c-dc66-4728-b09b-a88e22e95094" providerId="ADAL" clId="{421BD283-33D8-4C6C-821F-71755E863FA2}" dt="2026-09-18T16:07:26.666" v="5796" actId="1076"/>
           <ac:spMkLst>
             <pc:docMk/>
             <pc:sldMk cId="1179066660" sldId="262"/>
@@ -905,7 +905,7 @@
           </ac:grpSpMkLst>
         </pc:grpChg>
         <pc:graphicFrameChg chg="add mod modGraphic">
-          <ac:chgData name="Steve Mutrux" userId="4fa98d0c-dc66-4728-b09b-a88e22e95094" providerId="ADAL" clId="{421BD283-33D8-4C6C-821F-71755E863FA2}" dt="2026-09-17T18:06:30.506" v="5209" actId="2711"/>
+          <ac:chgData name="Steve Mutrux" userId="4fa98d0c-dc66-4728-b09b-a88e22e95094" providerId="ADAL" clId="{421BD283-33D8-4C6C-821F-71755E863FA2}" dt="2026-09-18T16:07:21.208" v="5795" actId="20577"/>
           <ac:graphicFrameMkLst>
             <pc:docMk/>
             <pc:sldMk cId="1179066660" sldId="262"/>
@@ -1268,7 +1268,7 @@
         </pc:sldMkLst>
       </pc:sldChg>
       <pc:sldChg chg="addSp delSp modSp add mod ord modTransition addAnim delAnim modAnim">
-        <pc:chgData name="Steve Mutrux" userId="4fa98d0c-dc66-4728-b09b-a88e22e95094" providerId="ADAL" clId="{421BD283-33D8-4C6C-821F-71755E863FA2}" dt="2026-09-16T15:12:57.325" v="4601" actId="20577"/>
+        <pc:chgData name="Steve Mutrux" userId="4fa98d0c-dc66-4728-b09b-a88e22e95094" providerId="ADAL" clId="{421BD283-33D8-4C6C-821F-71755E863FA2}" dt="2026-09-18T16:07:58.166" v="5802"/>
         <pc:sldMkLst>
           <pc:docMk/>
           <pc:sldMk cId="1194673410" sldId="272"/>
@@ -1298,7 +1298,7 @@
           </ac:spMkLst>
         </pc:spChg>
         <pc:spChg chg="add mod">
-          <ac:chgData name="Steve Mutrux" userId="4fa98d0c-dc66-4728-b09b-a88e22e95094" providerId="ADAL" clId="{421BD283-33D8-4C6C-821F-71755E863FA2}" dt="2026-09-16T15:12:57.325" v="4601" actId="20577"/>
+          <ac:chgData name="Steve Mutrux" userId="4fa98d0c-dc66-4728-b09b-a88e22e95094" providerId="ADAL" clId="{421BD283-33D8-4C6C-821F-71755E863FA2}" dt="2026-09-18T16:07:58.166" v="5802"/>
           <ac:spMkLst>
             <pc:docMk/>
             <pc:sldMk cId="1194673410" sldId="272"/>
@@ -1710,6 +1710,21 @@
             <ac:grpSpMk id="28" creationId="{1695E878-11B6-9BA7-CB67-A5E9C59FCFD7}"/>
           </ac:grpSpMkLst>
         </pc:grpChg>
+      </pc:sldChg>
+      <pc:sldChg chg="modSp">
+        <pc:chgData name="Steve Mutrux" userId="4fa98d0c-dc66-4728-b09b-a88e22e95094" providerId="ADAL" clId="{421BD283-33D8-4C6C-821F-71755E863FA2}" dt="2026-09-18T16:08:03.144" v="5804"/>
+        <pc:sldMkLst>
+          <pc:docMk/>
+          <pc:sldMk cId="1400023611" sldId="276"/>
+        </pc:sldMkLst>
+        <pc:spChg chg="mod">
+          <ac:chgData name="Steve Mutrux" userId="4fa98d0c-dc66-4728-b09b-a88e22e95094" providerId="ADAL" clId="{421BD283-33D8-4C6C-821F-71755E863FA2}" dt="2026-09-18T16:08:03.144" v="5804"/>
+          <ac:spMkLst>
+            <pc:docMk/>
+            <pc:sldMk cId="1400023611" sldId="276"/>
+            <ac:spMk id="6" creationId="{76D68362-0CCA-0BAA-D074-09AD1EB32474}"/>
+          </ac:spMkLst>
+        </pc:spChg>
       </pc:sldChg>
       <pc:sldChg chg="modSp add mod">
         <pc:chgData name="Steve Mutrux" userId="4fa98d0c-dc66-4728-b09b-a88e22e95094" providerId="ADAL" clId="{421BD283-33D8-4C6C-821F-71755E863FA2}" dt="2026-09-18T13:26:25.551" v="5430" actId="1038"/>
@@ -8210,7 +8225,7 @@
                 <a:latin typeface="Kumbh Sans" pitchFamily="2" charset="0"/>
                 <a:cs typeface="Kumbh Sans" pitchFamily="2" charset="0"/>
               </a:rPr>
-              <a:t>$25,000</a:t>
+              <a:t>$25,000 /year</a:t>
             </a:r>
           </a:p>
         </p:txBody>
@@ -9900,7 +9915,7 @@
                 <a:latin typeface="Kumbh Sans" pitchFamily="2" charset="0"/>
                 <a:cs typeface="Kumbh Sans" pitchFamily="2" charset="0"/>
               </a:rPr>
-              <a:t>$1,728</a:t>
+              <a:t>$1,728 /year</a:t>
             </a:r>
           </a:p>
         </p:txBody>
@@ -12633,7 +12648,7 @@
                 <a:latin typeface="Kumbh Sans" pitchFamily="2" charset="0"/>
                 <a:cs typeface="Kumbh Sans" pitchFamily="2" charset="0"/>
               </a:rPr>
-              <a:t>$500</a:t>
+              <a:t>$500 /year</a:t>
             </a:r>
           </a:p>
         </p:txBody>
@@ -17694,7 +17709,7 @@
           <p:nvPr>
             <p:extLst>
               <p:ext uri="{D42A27DB-BD31-4B8C-83A1-F6EECF244321}">
-                <p14:modId xmlns:p14="http://schemas.microsoft.com/office/powerpoint/2010/main" val="22152950"/>
+                <p14:modId xmlns:p14="http://schemas.microsoft.com/office/powerpoint/2010/main" val="2658859036"/>
               </p:ext>
             </p:extLst>
           </p:nvPr>
@@ -19105,7 +19120,7 @@
                           <a:latin typeface="Kumbh Sans SemiBold" pitchFamily="2" charset="0"/>
                           <a:cs typeface="Kumbh Sans SemiBold" pitchFamily="2" charset="0"/>
                         </a:rPr>
-                        <a:t>$21,000</a:t>
+                        <a:t>$25,000</a:t>
                       </a:r>
                     </a:p>
                   </a:txBody>
@@ -19762,7 +19777,7 @@
         </p:nvSpPr>
         <p:spPr>
           <a:xfrm>
-            <a:off x="3003634" y="582834"/>
+            <a:off x="3003634" y="585784"/>
             <a:ext cx="8559716" cy="5686427"/>
           </a:xfrm>
           <a:prstGeom prst="roundRect">
@@ -28032,16 +28047,12 @@
               <a:buChar char="•"/>
             </a:pPr>
             <a:r>
-              <a:rPr lang="en-CA" sz="2000">
+              <a:rPr lang="en-CA" sz="2000" dirty="0">
                 <a:latin typeface="Kumbh Sans" pitchFamily="2" charset="0"/>
                 <a:cs typeface="Kumbh Sans" pitchFamily="2" charset="0"/>
               </a:rPr>
               <a:t>Improve Teamwork Skills</a:t>
             </a:r>
-            <a:endParaRPr lang="en-CA" sz="2000" dirty="0">
-              <a:latin typeface="Kumbh Sans" pitchFamily="2" charset="0"/>
-              <a:cs typeface="Kumbh Sans" pitchFamily="2" charset="0"/>
-            </a:endParaRPr>
           </a:p>
         </p:txBody>
       </p:sp>

--- a/Deliverables/Presentation1.pptx
+++ b/Deliverables/Presentation1.pptx
@@ -145,7 +145,7 @@
 <file path=ppt/revisionInfo.xml><?xml version="1.0" encoding="utf-8"?>
 <p1510:revInfo xmlns:a="http://schemas.openxmlformats.org/drawingml/2006/main" xmlns:r="http://schemas.openxmlformats.org/officeDocument/2006/relationships" xmlns:p1510="http://schemas.microsoft.com/office/powerpoint/2015/10/main">
   <p1510:revLst>
-    <p1510:client id="{EADFFEA0-CC63-45EF-97E4-5A80CDB68182}" v="2187" dt="2026-09-18T16:08:03.144"/>
+    <p1510:client id="{EADFFEA0-CC63-45EF-97E4-5A80CDB68182}" v="9" dt="2026-09-20T19:46:21.382"/>
   </p1510:revLst>
 </p1510:revInfo>
 </file>
@@ -155,7 +155,7 @@
   <pc:docChgLst>
     <pc:chgData name="Steve Mutrux" userId="4fa98d0c-dc66-4728-b09b-a88e22e95094" providerId="ADAL" clId="{421BD283-33D8-4C6C-821F-71755E863FA2}"/>
     <pc:docChg chg="undo custSel addSld delSld modSld sldOrd">
-      <pc:chgData name="Steve Mutrux" userId="4fa98d0c-dc66-4728-b09b-a88e22e95094" providerId="ADAL" clId="{421BD283-33D8-4C6C-821F-71755E863FA2}" dt="2026-09-18T16:08:03.144" v="5804"/>
+      <pc:chgData name="Steve Mutrux" userId="4fa98d0c-dc66-4728-b09b-a88e22e95094" providerId="ADAL" clId="{421BD283-33D8-4C6C-821F-71755E863FA2}" dt="2026-09-20T19:46:21.382" v="5814" actId="20577"/>
       <pc:docMkLst>
         <pc:docMk/>
       </pc:docMkLst>
@@ -657,14 +657,6 @@
             <ac:grpSpMk id="35" creationId="{02C07118-8895-9FC1-B116-BC0E252E5B47}"/>
           </ac:grpSpMkLst>
         </pc:grpChg>
-        <pc:grpChg chg="add del mod ord">
-          <ac:chgData name="Steve Mutrux" userId="4fa98d0c-dc66-4728-b09b-a88e22e95094" providerId="ADAL" clId="{421BD283-33D8-4C6C-821F-71755E863FA2}" dt="2026-09-18T13:27:17.206" v="5434" actId="478"/>
-          <ac:grpSpMkLst>
-            <pc:docMk/>
-            <pc:sldMk cId="4190029259" sldId="261"/>
-            <ac:grpSpMk id="36" creationId="{678ED05D-2A4B-61AA-076B-C0C666BA3F7F}"/>
-          </ac:grpSpMkLst>
-        </pc:grpChg>
         <pc:picChg chg="add mod">
           <ac:chgData name="Steve Mutrux" userId="4fa98d0c-dc66-4728-b09b-a88e22e95094" providerId="ADAL" clId="{421BD283-33D8-4C6C-821F-71755E863FA2}" dt="2026-09-17T18:21:02.149" v="5220" actId="1076"/>
           <ac:picMkLst>
@@ -760,44 +752,12 @@
             <ac:spMk id="15" creationId="{32AA332A-1FE7-6F8E-7382-0C05C5898DEB}"/>
           </ac:spMkLst>
         </pc:spChg>
-        <pc:spChg chg="add del mod">
-          <ac:chgData name="Steve Mutrux" userId="4fa98d0c-dc66-4728-b09b-a88e22e95094" providerId="ADAL" clId="{421BD283-33D8-4C6C-821F-71755E863FA2}" dt="2026-09-18T13:35:58.605" v="5498" actId="478"/>
-          <ac:spMkLst>
-            <pc:docMk/>
-            <pc:sldMk cId="1179066660" sldId="262"/>
-            <ac:spMk id="16" creationId="{53D74E12-2C2B-3942-AD34-533E4F469E04}"/>
-          </ac:spMkLst>
-        </pc:spChg>
         <pc:spChg chg="add mod">
           <ac:chgData name="Steve Mutrux" userId="4fa98d0c-dc66-4728-b09b-a88e22e95094" providerId="ADAL" clId="{421BD283-33D8-4C6C-821F-71755E863FA2}" dt="2026-09-18T16:07:26.666" v="5796" actId="1076"/>
           <ac:spMkLst>
             <pc:docMk/>
             <pc:sldMk cId="1179066660" sldId="262"/>
             <ac:spMk id="17" creationId="{0566E6FD-1225-A001-B1DE-97A48C17A76C}"/>
-          </ac:spMkLst>
-        </pc:spChg>
-        <pc:spChg chg="add del mod">
-          <ac:chgData name="Steve Mutrux" userId="4fa98d0c-dc66-4728-b09b-a88e22e95094" providerId="ADAL" clId="{421BD283-33D8-4C6C-821F-71755E863FA2}" dt="2026-09-17T17:53:03.592" v="5132" actId="478"/>
-          <ac:spMkLst>
-            <pc:docMk/>
-            <pc:sldMk cId="1179066660" sldId="262"/>
-            <ac:spMk id="17" creationId="{2147BB89-1B5C-92BB-C3AB-A9DAFE3D4FB0}"/>
-          </ac:spMkLst>
-        </pc:spChg>
-        <pc:spChg chg="mod">
-          <ac:chgData name="Steve Mutrux" userId="4fa98d0c-dc66-4728-b09b-a88e22e95094" providerId="ADAL" clId="{421BD283-33D8-4C6C-821F-71755E863FA2}" dt="2026-09-17T17:54:09.691" v="5139" actId="207"/>
-          <ac:spMkLst>
-            <pc:docMk/>
-            <pc:sldMk cId="1179066660" sldId="262"/>
-            <ac:spMk id="19" creationId="{D9C4B4E9-9EA3-686D-C6CC-2B6201D18F8C}"/>
-          </ac:spMkLst>
-        </pc:spChg>
-        <pc:spChg chg="mod">
-          <ac:chgData name="Steve Mutrux" userId="4fa98d0c-dc66-4728-b09b-a88e22e95094" providerId="ADAL" clId="{421BD283-33D8-4C6C-821F-71755E863FA2}" dt="2026-09-17T17:53:42.010" v="5137" actId="207"/>
-          <ac:spMkLst>
-            <pc:docMk/>
-            <pc:sldMk cId="1179066660" sldId="262"/>
-            <ac:spMk id="20" creationId="{F07693E3-3466-B569-3CDA-B9CDBEBF2AAE}"/>
           </ac:spMkLst>
         </pc:spChg>
         <pc:spChg chg="mod">
@@ -872,14 +832,6 @@
             <ac:grpSpMk id="7" creationId="{66A325DC-CDE0-8FBB-6D92-28EB1D05733E}"/>
           </ac:grpSpMkLst>
         </pc:grpChg>
-        <pc:grpChg chg="add del mod">
-          <ac:chgData name="Steve Mutrux" userId="4fa98d0c-dc66-4728-b09b-a88e22e95094" providerId="ADAL" clId="{421BD283-33D8-4C6C-821F-71755E863FA2}" dt="2026-09-17T17:54:53.324" v="5152" actId="478"/>
-          <ac:grpSpMkLst>
-            <pc:docMk/>
-            <pc:sldMk cId="1179066660" sldId="262"/>
-            <ac:grpSpMk id="18" creationId="{AAACF990-1D91-905F-3C25-51722C5C1F12}"/>
-          </ac:grpSpMkLst>
-        </pc:grpChg>
         <pc:grpChg chg="add mod">
           <ac:chgData name="Steve Mutrux" userId="4fa98d0c-dc66-4728-b09b-a88e22e95094" providerId="ADAL" clId="{421BD283-33D8-4C6C-821F-71755E863FA2}" dt="2026-09-17T17:58:40.912" v="5178" actId="1038"/>
           <ac:grpSpMkLst>
@@ -919,17 +871,9 @@
           <pc:docMk/>
           <pc:sldMk cId="2229155277" sldId="263"/>
         </pc:sldMkLst>
-        <pc:spChg chg="add del mod">
-          <ac:chgData name="Steve Mutrux" userId="4fa98d0c-dc66-4728-b09b-a88e22e95094" providerId="ADAL" clId="{421BD283-33D8-4C6C-821F-71755E863FA2}" dt="2026-09-17T18:12:02.580" v="5210" actId="478"/>
-          <ac:spMkLst>
-            <pc:docMk/>
-            <pc:sldMk cId="2229155277" sldId="263"/>
-            <ac:spMk id="6" creationId="{3781749F-2DE4-6052-FCC1-9E1C1554116A}"/>
-          </ac:spMkLst>
-        </pc:spChg>
       </pc:sldChg>
       <pc:sldChg chg="addSp delSp modSp add mod modTransition delAnim modAnim modNotesTx">
-        <pc:chgData name="Steve Mutrux" userId="4fa98d0c-dc66-4728-b09b-a88e22e95094" providerId="ADAL" clId="{421BD283-33D8-4C6C-821F-71755E863FA2}" dt="2026-09-18T15:54:06.335" v="5792" actId="20577"/>
+        <pc:chgData name="Steve Mutrux" userId="4fa98d0c-dc66-4728-b09b-a88e22e95094" providerId="ADAL" clId="{421BD283-33D8-4C6C-821F-71755E863FA2}" dt="2026-09-20T19:36:14.674" v="5805" actId="20577"/>
         <pc:sldMkLst>
           <pc:docMk/>
           <pc:sldMk cId="353601395" sldId="266"/>
@@ -940,14 +884,6 @@
             <pc:docMk/>
             <pc:sldMk cId="353601395" sldId="266"/>
             <ac:spMk id="2" creationId="{B41E6B40-CEDD-5E91-E2C3-A10C4F95297F}"/>
-          </ac:spMkLst>
-        </pc:spChg>
-        <pc:spChg chg="add del mod">
-          <ac:chgData name="Steve Mutrux" userId="4fa98d0c-dc66-4728-b09b-a88e22e95094" providerId="ADAL" clId="{421BD283-33D8-4C6C-821F-71755E863FA2}" dt="2026-09-18T15:46:47.272" v="5657" actId="21"/>
-          <ac:spMkLst>
-            <pc:docMk/>
-            <pc:sldMk cId="353601395" sldId="266"/>
-            <ac:spMk id="4" creationId="{FCB0987B-36F3-8A6F-1B24-CA8B0A4ABC95}"/>
           </ac:spMkLst>
         </pc:spChg>
         <pc:spChg chg="mod">
@@ -1127,7 +1063,7 @@
         </pc:grpChg>
       </pc:sldChg>
       <pc:sldChg chg="addSp delSp modSp add mod modTransition modAnim modNotesTx">
-        <pc:chgData name="Steve Mutrux" userId="4fa98d0c-dc66-4728-b09b-a88e22e95094" providerId="ADAL" clId="{421BD283-33D8-4C6C-821F-71755E863FA2}" dt="2026-09-18T15:41:42.062" v="5609" actId="20577"/>
+        <pc:chgData name="Steve Mutrux" userId="4fa98d0c-dc66-4728-b09b-a88e22e95094" providerId="ADAL" clId="{421BD283-33D8-4C6C-821F-71755E863FA2}" dt="2026-09-20T19:46:21.382" v="5814" actId="20577"/>
         <pc:sldMkLst>
           <pc:docMk/>
           <pc:sldMk cId="3893094920" sldId="268"/>
@@ -1141,7 +1077,7 @@
           </ac:spMkLst>
         </pc:spChg>
         <pc:spChg chg="add mod">
-          <ac:chgData name="Steve Mutrux" userId="4fa98d0c-dc66-4728-b09b-a88e22e95094" providerId="ADAL" clId="{421BD283-33D8-4C6C-821F-71755E863FA2}" dt="2026-09-16T11:33:53.560" v="3332" actId="2710"/>
+          <ac:chgData name="Steve Mutrux" userId="4fa98d0c-dc66-4728-b09b-a88e22e95094" providerId="ADAL" clId="{421BD283-33D8-4C6C-821F-71755E863FA2}" dt="2026-09-20T19:46:21.382" v="5814" actId="20577"/>
           <ac:spMkLst>
             <pc:docMk/>
             <pc:sldMk cId="3893094920" sldId="268"/>
@@ -1260,15 +1196,8 @@
           </ac:spMkLst>
         </pc:spChg>
       </pc:sldChg>
-      <pc:sldChg chg="delSp modSp add del mod">
-        <pc:chgData name="Steve Mutrux" userId="4fa98d0c-dc66-4728-b09b-a88e22e95094" providerId="ADAL" clId="{421BD283-33D8-4C6C-821F-71755E863FA2}" dt="2026-09-17T18:12:04.346" v="5211" actId="47"/>
-        <pc:sldMkLst>
-          <pc:docMk/>
-          <pc:sldMk cId="1557603729" sldId="271"/>
-        </pc:sldMkLst>
-      </pc:sldChg>
       <pc:sldChg chg="addSp delSp modSp add mod ord modTransition addAnim delAnim modAnim">
-        <pc:chgData name="Steve Mutrux" userId="4fa98d0c-dc66-4728-b09b-a88e22e95094" providerId="ADAL" clId="{421BD283-33D8-4C6C-821F-71755E863FA2}" dt="2026-09-18T16:07:58.166" v="5802"/>
+        <pc:chgData name="Steve Mutrux" userId="4fa98d0c-dc66-4728-b09b-a88e22e95094" providerId="ADAL" clId="{421BD283-33D8-4C6C-821F-71755E863FA2}" dt="2026-09-20T19:46:01.889" v="5810" actId="20577"/>
         <pc:sldMkLst>
           <pc:docMk/>
           <pc:sldMk cId="1194673410" sldId="272"/>
@@ -1298,7 +1227,7 @@
           </ac:spMkLst>
         </pc:spChg>
         <pc:spChg chg="add mod">
-          <ac:chgData name="Steve Mutrux" userId="4fa98d0c-dc66-4728-b09b-a88e22e95094" providerId="ADAL" clId="{421BD283-33D8-4C6C-821F-71755E863FA2}" dt="2026-09-18T16:07:58.166" v="5802"/>
+          <ac:chgData name="Steve Mutrux" userId="4fa98d0c-dc66-4728-b09b-a88e22e95094" providerId="ADAL" clId="{421BD283-33D8-4C6C-821F-71755E863FA2}" dt="2026-09-20T19:46:01.889" v="5810" actId="20577"/>
           <ac:spMkLst>
             <pc:docMk/>
             <pc:sldMk cId="1194673410" sldId="272"/>
@@ -1441,14 +1370,6 @@
           </ac:spMkLst>
         </pc:spChg>
         <pc:spChg chg="add mod">
-          <ac:chgData name="Steve Mutrux" userId="4fa98d0c-dc66-4728-b09b-a88e22e95094" providerId="ADAL" clId="{421BD283-33D8-4C6C-821F-71755E863FA2}" dt="2026-09-18T13:06:08.536" v="5313"/>
-          <ac:spMkLst>
-            <pc:docMk/>
-            <pc:sldMk cId="3925825761" sldId="273"/>
-            <ac:spMk id="12" creationId="{E30B574F-F47B-4F5A-373F-0556028B16A8}"/>
-          </ac:spMkLst>
-        </pc:spChg>
-        <pc:spChg chg="add mod">
           <ac:chgData name="Steve Mutrux" userId="4fa98d0c-dc66-4728-b09b-a88e22e95094" providerId="ADAL" clId="{421BD283-33D8-4C6C-821F-71755E863FA2}" dt="2026-09-18T15:45:35.377" v="5653"/>
           <ac:spMkLst>
             <pc:docMk/>
@@ -1545,7 +1466,7 @@
         </pc:grpChg>
       </pc:sldChg>
       <pc:sldChg chg="addSp delSp modSp add mod addAnim delAnim modAnim modNotesTx">
-        <pc:chgData name="Steve Mutrux" userId="4fa98d0c-dc66-4728-b09b-a88e22e95094" providerId="ADAL" clId="{421BD283-33D8-4C6C-821F-71755E863FA2}" dt="2026-09-16T15:07:12.291" v="4537"/>
+        <pc:chgData name="Steve Mutrux" userId="4fa98d0c-dc66-4728-b09b-a88e22e95094" providerId="ADAL" clId="{421BD283-33D8-4C6C-821F-71755E863FA2}" dt="2026-09-20T19:36:21.157" v="5806" actId="20577"/>
         <pc:sldMkLst>
           <pc:docMk/>
           <pc:sldMk cId="1282376480" sldId="275"/>
@@ -1712,13 +1633,13 @@
         </pc:grpChg>
       </pc:sldChg>
       <pc:sldChg chg="modSp">
-        <pc:chgData name="Steve Mutrux" userId="4fa98d0c-dc66-4728-b09b-a88e22e95094" providerId="ADAL" clId="{421BD283-33D8-4C6C-821F-71755E863FA2}" dt="2026-09-18T16:08:03.144" v="5804"/>
+        <pc:chgData name="Steve Mutrux" userId="4fa98d0c-dc66-4728-b09b-a88e22e95094" providerId="ADAL" clId="{421BD283-33D8-4C6C-821F-71755E863FA2}" dt="2026-09-20T19:45:52.018" v="5808" actId="20577"/>
         <pc:sldMkLst>
           <pc:docMk/>
           <pc:sldMk cId="1400023611" sldId="276"/>
         </pc:sldMkLst>
         <pc:spChg chg="mod">
-          <ac:chgData name="Steve Mutrux" userId="4fa98d0c-dc66-4728-b09b-a88e22e95094" providerId="ADAL" clId="{421BD283-33D8-4C6C-821F-71755E863FA2}" dt="2026-09-18T16:08:03.144" v="5804"/>
+          <ac:chgData name="Steve Mutrux" userId="4fa98d0c-dc66-4728-b09b-a88e22e95094" providerId="ADAL" clId="{421BD283-33D8-4C6C-821F-71755E863FA2}" dt="2026-09-20T19:45:52.018" v="5808" actId="20577"/>
           <ac:spMkLst>
             <pc:docMk/>
             <pc:sldMk cId="1400023611" sldId="276"/>
@@ -1740,13 +1661,6 @@
             <ac:picMk id="14" creationId="{21B69710-7364-55BB-57A9-EA2F37650EA3}"/>
           </ac:picMkLst>
         </pc:picChg>
-      </pc:sldChg>
-      <pc:sldChg chg="add del">
-        <pc:chgData name="Steve Mutrux" userId="4fa98d0c-dc66-4728-b09b-a88e22e95094" providerId="ADAL" clId="{421BD283-33D8-4C6C-821F-71755E863FA2}" dt="2026-09-18T13:08:14.503" v="5379"/>
-        <pc:sldMkLst>
-          <pc:docMk/>
-          <pc:sldMk cId="3625860367" sldId="277"/>
-        </pc:sldMkLst>
       </pc:sldChg>
     </pc:docChg>
   </pc:docChgLst>
@@ -2062,7 +1976,7 @@
           <a:p>
             <a:fld id="{30F4E063-30EE-4103-AD49-D9727BB8755E}" type="datetimeFigureOut">
               <a:rPr lang="en-CA" smtClean="0"/>
-              <a:t>2026-09-18</a:t>
+              <a:t>2026-09-20</a:t>
             </a:fld>
             <a:endParaRPr lang="en-CA"/>
           </a:p>
@@ -3035,31 +2949,7 @@
                 <a:ea typeface="+mn-ea"/>
                 <a:cs typeface="+mn-cs"/>
               </a:rPr>
-              <a:t>Past Experience: Worked previously with </a:t>
-            </a:r>
-            <a:r>
-              <a:rPr lang="en-CA" sz="1200" b="0" i="0" kern="1200" dirty="0" err="1">
-                <a:solidFill>
-                  <a:schemeClr val="tx1"/>
-                </a:solidFill>
-                <a:effectLst/>
-                <a:latin typeface="+mn-lt"/>
-                <a:ea typeface="+mn-ea"/>
-                <a:cs typeface="+mn-cs"/>
-              </a:rPr>
-              <a:t>Gakgo</a:t>
-            </a:r>
-            <a:r>
-              <a:rPr lang="en-CA" sz="1200" b="0" i="0" kern="1200" dirty="0">
-                <a:solidFill>
-                  <a:schemeClr val="tx1"/>
-                </a:solidFill>
-                <a:effectLst/>
-                <a:latin typeface="+mn-lt"/>
-                <a:ea typeface="+mn-ea"/>
-                <a:cs typeface="+mn-cs"/>
-              </a:rPr>
-              <a:t> Designs with a few of </a:t>
+              <a:t>Past Experience: Worked previously with Gacko Designs with a few of </a:t>
             </a:r>
             <a:r>
               <a:rPr lang="en-CA" sz="1200" b="0" i="0" kern="1200" dirty="0" err="1">
@@ -3236,7 +3126,7 @@
                 <a:ea typeface="+mn-ea"/>
                 <a:cs typeface="+mn-cs"/>
               </a:rPr>
-              <a:t>Past Experience: Created a website for a book store in St. Catherine's with a database, online purchases, and activity tracking. Created games using </a:t>
+              <a:t>Past Experience: Created a website for a book store in St. Catherines with a database, online purchases, and activity tracking. Created games using </a:t>
             </a:r>
             <a:r>
               <a:rPr lang="en-CA" sz="1200" b="0" i="0" kern="1200" dirty="0" err="1">
@@ -3710,13 +3600,8 @@
           <a:p>
             <a:r>
               <a:rPr lang="en-CA" dirty="0"/>
-              <a:t>Current situation/</a:t>
+              <a:t>Current situation/needs</a:t>
             </a:r>
-            <a:r>
-              <a:rPr lang="en-CA" dirty="0" err="1"/>
-              <a:t>needsc</a:t>
-            </a:r>
-            <a:endParaRPr lang="en-CA" dirty="0"/>
           </a:p>
         </p:txBody>
       </p:sp>
@@ -4073,7 +3958,7 @@
           <a:p>
             <a:fld id="{5740B982-0E6D-4C64-AE1B-DA9749EF130C}" type="datetimeFigureOut">
               <a:rPr lang="en-CA" smtClean="0"/>
-              <a:t>2026-09-18</a:t>
+              <a:t>2026-09-20</a:t>
             </a:fld>
             <a:endParaRPr lang="en-CA"/>
           </a:p>
@@ -4273,7 +4158,7 @@
           <a:p>
             <a:fld id="{5740B982-0E6D-4C64-AE1B-DA9749EF130C}" type="datetimeFigureOut">
               <a:rPr lang="en-CA" smtClean="0"/>
-              <a:t>2026-09-18</a:t>
+              <a:t>2026-09-20</a:t>
             </a:fld>
             <a:endParaRPr lang="en-CA"/>
           </a:p>
@@ -4483,7 +4368,7 @@
           <a:p>
             <a:fld id="{5740B982-0E6D-4C64-AE1B-DA9749EF130C}" type="datetimeFigureOut">
               <a:rPr lang="en-CA" smtClean="0"/>
-              <a:t>2026-09-18</a:t>
+              <a:t>2026-09-20</a:t>
             </a:fld>
             <a:endParaRPr lang="en-CA"/>
           </a:p>
@@ -4683,7 +4568,7 @@
           <a:p>
             <a:fld id="{5740B982-0E6D-4C64-AE1B-DA9749EF130C}" type="datetimeFigureOut">
               <a:rPr lang="en-CA" smtClean="0"/>
-              <a:t>2026-09-18</a:t>
+              <a:t>2026-09-20</a:t>
             </a:fld>
             <a:endParaRPr lang="en-CA"/>
           </a:p>
@@ -4959,7 +4844,7 @@
           <a:p>
             <a:fld id="{5740B982-0E6D-4C64-AE1B-DA9749EF130C}" type="datetimeFigureOut">
               <a:rPr lang="en-CA" smtClean="0"/>
-              <a:t>2026-09-18</a:t>
+              <a:t>2026-09-20</a:t>
             </a:fld>
             <a:endParaRPr lang="en-CA"/>
           </a:p>
@@ -5227,7 +5112,7 @@
           <a:p>
             <a:fld id="{5740B982-0E6D-4C64-AE1B-DA9749EF130C}" type="datetimeFigureOut">
               <a:rPr lang="en-CA" smtClean="0"/>
-              <a:t>2026-09-18</a:t>
+              <a:t>2026-09-20</a:t>
             </a:fld>
             <a:endParaRPr lang="en-CA"/>
           </a:p>
@@ -5642,7 +5527,7 @@
           <a:p>
             <a:fld id="{5740B982-0E6D-4C64-AE1B-DA9749EF130C}" type="datetimeFigureOut">
               <a:rPr lang="en-CA" smtClean="0"/>
-              <a:t>2026-09-18</a:t>
+              <a:t>2026-09-20</a:t>
             </a:fld>
             <a:endParaRPr lang="en-CA"/>
           </a:p>
@@ -5784,7 +5669,7 @@
           <a:p>
             <a:fld id="{5740B982-0E6D-4C64-AE1B-DA9749EF130C}" type="datetimeFigureOut">
               <a:rPr lang="en-CA" smtClean="0"/>
-              <a:t>2026-09-18</a:t>
+              <a:t>2026-09-20</a:t>
             </a:fld>
             <a:endParaRPr lang="en-CA"/>
           </a:p>
@@ -5897,7 +5782,7 @@
           <a:p>
             <a:fld id="{5740B982-0E6D-4C64-AE1B-DA9749EF130C}" type="datetimeFigureOut">
               <a:rPr lang="en-CA" smtClean="0"/>
-              <a:t>2026-09-18</a:t>
+              <a:t>2026-09-20</a:t>
             </a:fld>
             <a:endParaRPr lang="en-CA"/>
           </a:p>
@@ -6210,7 +6095,7 @@
           <a:p>
             <a:fld id="{5740B982-0E6D-4C64-AE1B-DA9749EF130C}" type="datetimeFigureOut">
               <a:rPr lang="en-CA" smtClean="0"/>
-              <a:t>2026-09-18</a:t>
+              <a:t>2026-09-20</a:t>
             </a:fld>
             <a:endParaRPr lang="en-CA"/>
           </a:p>
@@ -6499,7 +6384,7 @@
           <a:p>
             <a:fld id="{5740B982-0E6D-4C64-AE1B-DA9749EF130C}" type="datetimeFigureOut">
               <a:rPr lang="en-CA" smtClean="0"/>
-              <a:t>2026-09-18</a:t>
+              <a:t>2026-09-20</a:t>
             </a:fld>
             <a:endParaRPr lang="en-CA"/>
           </a:p>
@@ -6742,7 +6627,7 @@
           <a:p>
             <a:fld id="{5740B982-0E6D-4C64-AE1B-DA9749EF130C}" type="datetimeFigureOut">
               <a:rPr lang="en-CA" smtClean="0"/>
-              <a:t>2026-09-18</a:t>
+              <a:t>2026-09-20</a:t>
             </a:fld>
             <a:endParaRPr lang="en-CA"/>
           </a:p>
@@ -8120,7 +8005,7 @@
         <p:spPr>
           <a:xfrm>
             <a:off x="4360384" y="1664912"/>
-            <a:ext cx="5707012" cy="3694729"/>
+            <a:ext cx="5702202" cy="3694729"/>
           </a:xfrm>
           <a:prstGeom prst="rect">
             <a:avLst/>
@@ -8161,7 +8046,7 @@
                 <a:latin typeface="Kumbh Sans" pitchFamily="2" charset="0"/>
                 <a:cs typeface="Kumbh Sans" pitchFamily="2" charset="0"/>
               </a:rPr>
-              <a:t>Documentation, Training, Risk management</a:t>
+              <a:t>Documentation, Training, Risk Management</a:t>
             </a:r>
           </a:p>
           <a:p>
@@ -12543,7 +12428,7 @@
         <p:spPr>
           <a:xfrm>
             <a:off x="4360384" y="1664912"/>
-            <a:ext cx="4642618" cy="3694729"/>
+            <a:ext cx="4700326" cy="3694729"/>
           </a:xfrm>
           <a:prstGeom prst="rect">
             <a:avLst/>
@@ -12632,7 +12517,7 @@
                 <a:latin typeface="Kumbh Sans" pitchFamily="2" charset="0"/>
                 <a:cs typeface="Kumbh Sans" pitchFamily="2" charset="0"/>
               </a:rPr>
-              <a:t>Unlimited Storage, Auto-compress</a:t>
+              <a:t>Unlimited Storage, Auto-Compress</a:t>
             </a:r>
           </a:p>
           <a:p>
@@ -30500,12 +30385,30 @@
               <a:buChar char="•"/>
             </a:pPr>
             <a:r>
+              <a:rPr lang="en-CA" sz="2000">
+                <a:latin typeface="Kumbh Sans" pitchFamily="2" charset="0"/>
+                <a:cs typeface="Kumbh Sans" pitchFamily="2" charset="0"/>
+              </a:rPr>
+              <a:t>Let Go</a:t>
+            </a:r>
+            <a:r>
               <a:rPr lang="en-CA" sz="2000" dirty="0">
                 <a:latin typeface="Kumbh Sans" pitchFamily="2" charset="0"/>
                 <a:cs typeface="Kumbh Sans" pitchFamily="2" charset="0"/>
               </a:rPr>
-              <a:t>Let go, Let grow</a:t>
+              <a:t>, </a:t>
             </a:r>
+            <a:r>
+              <a:rPr lang="en-CA" sz="2000">
+                <a:latin typeface="Kumbh Sans" pitchFamily="2" charset="0"/>
+                <a:cs typeface="Kumbh Sans" pitchFamily="2" charset="0"/>
+              </a:rPr>
+              <a:t>Let Grow</a:t>
+            </a:r>
+            <a:endParaRPr lang="en-CA" sz="2000" dirty="0">
+              <a:latin typeface="Kumbh Sans" pitchFamily="2" charset="0"/>
+              <a:cs typeface="Kumbh Sans" pitchFamily="2" charset="0"/>
+            </a:endParaRPr>
           </a:p>
         </p:txBody>
       </p:sp>

--- a/Deliverables/Presentation1.pptx
+++ b/Deliverables/Presentation1.pptx
@@ -145,7 +145,7 @@
 <file path=ppt/revisionInfo.xml><?xml version="1.0" encoding="utf-8"?>
 <p1510:revInfo xmlns:a="http://schemas.openxmlformats.org/drawingml/2006/main" xmlns:r="http://schemas.openxmlformats.org/officeDocument/2006/relationships" xmlns:p1510="http://schemas.microsoft.com/office/powerpoint/2015/10/main">
   <p1510:revLst>
-    <p1510:client id="{EADFFEA0-CC63-45EF-97E4-5A80CDB68182}" v="9" dt="2026-09-20T19:46:21.382"/>
+    <p1510:client id="{EADFFEA0-CC63-45EF-97E4-5A80CDB68182}" v="11" dt="2026-09-21T02:54:40.667"/>
   </p1510:revLst>
 </p1510:revInfo>
 </file>
@@ -155,7 +155,7 @@
   <pc:docChgLst>
     <pc:chgData name="Steve Mutrux" userId="4fa98d0c-dc66-4728-b09b-a88e22e95094" providerId="ADAL" clId="{421BD283-33D8-4C6C-821F-71755E863FA2}"/>
     <pc:docChg chg="undo custSel addSld delSld modSld sldOrd">
-      <pc:chgData name="Steve Mutrux" userId="4fa98d0c-dc66-4728-b09b-a88e22e95094" providerId="ADAL" clId="{421BD283-33D8-4C6C-821F-71755E863FA2}" dt="2026-09-20T19:46:21.382" v="5814" actId="20577"/>
+      <pc:chgData name="Steve Mutrux" userId="4fa98d0c-dc66-4728-b09b-a88e22e95094" providerId="ADAL" clId="{421BD283-33D8-4C6C-821F-71755E863FA2}" dt="2026-09-21T02:54:48.271" v="5822" actId="1038"/>
       <pc:docMkLst>
         <pc:docMk/>
       </pc:docMkLst>
@@ -492,7 +492,7 @@
         </pc:grpChg>
       </pc:sldChg>
       <pc:sldChg chg="addSp delSp modSp add mod modTransition addAnim delAnim modAnim modNotesTx">
-        <pc:chgData name="Steve Mutrux" userId="4fa98d0c-dc66-4728-b09b-a88e22e95094" providerId="ADAL" clId="{421BD283-33D8-4C6C-821F-71755E863FA2}" dt="2026-09-18T13:28:10.567" v="5446"/>
+        <pc:chgData name="Steve Mutrux" userId="4fa98d0c-dc66-4728-b09b-a88e22e95094" providerId="ADAL" clId="{421BD283-33D8-4C6C-821F-71755E863FA2}" dt="2026-09-21T02:38:56.379" v="5815" actId="14826"/>
         <pc:sldMkLst>
           <pc:docMk/>
           <pc:sldMk cId="4190029259" sldId="261"/>
@@ -658,7 +658,7 @@
           </ac:grpSpMkLst>
         </pc:grpChg>
         <pc:picChg chg="add mod">
-          <ac:chgData name="Steve Mutrux" userId="4fa98d0c-dc66-4728-b09b-a88e22e95094" providerId="ADAL" clId="{421BD283-33D8-4C6C-821F-71755E863FA2}" dt="2026-09-17T18:21:02.149" v="5220" actId="1076"/>
+          <ac:chgData name="Steve Mutrux" userId="4fa98d0c-dc66-4728-b09b-a88e22e95094" providerId="ADAL" clId="{421BD283-33D8-4C6C-821F-71755E863FA2}" dt="2026-09-21T02:38:56.379" v="5815" actId="14826"/>
           <ac:picMkLst>
             <pc:docMk/>
             <pc:sldMk cId="4190029259" sldId="261"/>
@@ -1648,13 +1648,13 @@
         </pc:spChg>
       </pc:sldChg>
       <pc:sldChg chg="modSp add mod">
-        <pc:chgData name="Steve Mutrux" userId="4fa98d0c-dc66-4728-b09b-a88e22e95094" providerId="ADAL" clId="{421BD283-33D8-4C6C-821F-71755E863FA2}" dt="2026-09-18T13:26:25.551" v="5430" actId="1038"/>
+        <pc:chgData name="Steve Mutrux" userId="4fa98d0c-dc66-4728-b09b-a88e22e95094" providerId="ADAL" clId="{421BD283-33D8-4C6C-821F-71755E863FA2}" dt="2026-09-21T02:54:48.271" v="5822" actId="1038"/>
         <pc:sldMkLst>
           <pc:docMk/>
           <pc:sldMk cId="2234467840" sldId="277"/>
         </pc:sldMkLst>
         <pc:picChg chg="mod">
-          <ac:chgData name="Steve Mutrux" userId="4fa98d0c-dc66-4728-b09b-a88e22e95094" providerId="ADAL" clId="{421BD283-33D8-4C6C-821F-71755E863FA2}" dt="2026-09-18T13:26:25.551" v="5430" actId="1038"/>
+          <ac:chgData name="Steve Mutrux" userId="4fa98d0c-dc66-4728-b09b-a88e22e95094" providerId="ADAL" clId="{421BD283-33D8-4C6C-821F-71755E863FA2}" dt="2026-09-21T02:54:48.271" v="5822" actId="1038"/>
           <ac:picMkLst>
             <pc:docMk/>
             <pc:sldMk cId="2234467840" sldId="277"/>
@@ -14505,14 +14505,13 @@
               </a:ext>
             </a:extLst>
           </a:blip>
-          <a:stretch>
-            <a:fillRect/>
-          </a:stretch>
+          <a:srcRect/>
+          <a:stretch/>
         </p:blipFill>
         <p:spPr>
           <a:xfrm>
             <a:off x="3402800" y="1771869"/>
-            <a:ext cx="7967662" cy="3206425"/>
+            <a:ext cx="7967662" cy="3206424"/>
           </a:xfrm>
           <a:prstGeom prst="rect">
             <a:avLst/>
@@ -16005,8 +16004,8 @@
         </p:blipFill>
         <p:spPr>
           <a:xfrm>
-            <a:off x="3276600" y="922020"/>
-            <a:ext cx="8012301" cy="5067559"/>
+            <a:off x="3554048" y="922020"/>
+            <a:ext cx="7555373" cy="5067559"/>
           </a:xfrm>
           <a:prstGeom prst="rect">
             <a:avLst/>

--- a/Deliverables/Presentation1.pptx
+++ b/Deliverables/Presentation1.pptx
@@ -145,7 +145,7 @@
 <file path=ppt/revisionInfo.xml><?xml version="1.0" encoding="utf-8"?>
 <p1510:revInfo xmlns:a="http://schemas.openxmlformats.org/drawingml/2006/main" xmlns:r="http://schemas.openxmlformats.org/officeDocument/2006/relationships" xmlns:p1510="http://schemas.microsoft.com/office/powerpoint/2015/10/main">
   <p1510:revLst>
-    <p1510:client id="{EADFFEA0-CC63-45EF-97E4-5A80CDB68182}" v="11" dt="2026-09-21T02:54:40.667"/>
+    <p1510:client id="{EADFFEA0-CC63-45EF-97E4-5A80CDB68182}" v="12" dt="2026-09-21T10:37:03.825"/>
   </p1510:revLst>
 </p1510:revInfo>
 </file>
@@ -155,7 +155,7 @@
   <pc:docChgLst>
     <pc:chgData name="Steve Mutrux" userId="4fa98d0c-dc66-4728-b09b-a88e22e95094" providerId="ADAL" clId="{421BD283-33D8-4C6C-821F-71755E863FA2}"/>
     <pc:docChg chg="undo custSel addSld delSld modSld sldOrd">
-      <pc:chgData name="Steve Mutrux" userId="4fa98d0c-dc66-4728-b09b-a88e22e95094" providerId="ADAL" clId="{421BD283-33D8-4C6C-821F-71755E863FA2}" dt="2026-09-21T02:54:48.271" v="5822" actId="1038"/>
+      <pc:chgData name="Steve Mutrux" userId="4fa98d0c-dc66-4728-b09b-a88e22e95094" providerId="ADAL" clId="{421BD283-33D8-4C6C-821F-71755E863FA2}" dt="2026-09-21T10:37:25.030" v="5837" actId="14100"/>
       <pc:docMkLst>
         <pc:docMk/>
       </pc:docMkLst>
@@ -1648,13 +1648,13 @@
         </pc:spChg>
       </pc:sldChg>
       <pc:sldChg chg="modSp add mod">
-        <pc:chgData name="Steve Mutrux" userId="4fa98d0c-dc66-4728-b09b-a88e22e95094" providerId="ADAL" clId="{421BD283-33D8-4C6C-821F-71755E863FA2}" dt="2026-09-21T02:54:48.271" v="5822" actId="1038"/>
+        <pc:chgData name="Steve Mutrux" userId="4fa98d0c-dc66-4728-b09b-a88e22e95094" providerId="ADAL" clId="{421BD283-33D8-4C6C-821F-71755E863FA2}" dt="2026-09-21T10:37:25.030" v="5837" actId="14100"/>
         <pc:sldMkLst>
           <pc:docMk/>
           <pc:sldMk cId="2234467840" sldId="277"/>
         </pc:sldMkLst>
         <pc:picChg chg="mod">
-          <ac:chgData name="Steve Mutrux" userId="4fa98d0c-dc66-4728-b09b-a88e22e95094" providerId="ADAL" clId="{421BD283-33D8-4C6C-821F-71755E863FA2}" dt="2026-09-21T02:54:48.271" v="5822" actId="1038"/>
+          <ac:chgData name="Steve Mutrux" userId="4fa98d0c-dc66-4728-b09b-a88e22e95094" providerId="ADAL" clId="{421BD283-33D8-4C6C-821F-71755E863FA2}" dt="2026-09-21T10:37:25.030" v="5837" actId="14100"/>
           <ac:picMkLst>
             <pc:docMk/>
             <pc:sldMk cId="2234467840" sldId="277"/>
@@ -1976,7 +1976,7 @@
           <a:p>
             <a:fld id="{30F4E063-30EE-4103-AD49-D9727BB8755E}" type="datetimeFigureOut">
               <a:rPr lang="en-CA" smtClean="0"/>
-              <a:t>2026-09-20</a:t>
+              <a:t>2026-09-21</a:t>
             </a:fld>
             <a:endParaRPr lang="en-CA"/>
           </a:p>
@@ -3958,7 +3958,7 @@
           <a:p>
             <a:fld id="{5740B982-0E6D-4C64-AE1B-DA9749EF130C}" type="datetimeFigureOut">
               <a:rPr lang="en-CA" smtClean="0"/>
-              <a:t>2026-09-20</a:t>
+              <a:t>2026-09-21</a:t>
             </a:fld>
             <a:endParaRPr lang="en-CA"/>
           </a:p>
@@ -4158,7 +4158,7 @@
           <a:p>
             <a:fld id="{5740B982-0E6D-4C64-AE1B-DA9749EF130C}" type="datetimeFigureOut">
               <a:rPr lang="en-CA" smtClean="0"/>
-              <a:t>2026-09-20</a:t>
+              <a:t>2026-09-21</a:t>
             </a:fld>
             <a:endParaRPr lang="en-CA"/>
           </a:p>
@@ -4368,7 +4368,7 @@
           <a:p>
             <a:fld id="{5740B982-0E6D-4C64-AE1B-DA9749EF130C}" type="datetimeFigureOut">
               <a:rPr lang="en-CA" smtClean="0"/>
-              <a:t>2026-09-20</a:t>
+              <a:t>2026-09-21</a:t>
             </a:fld>
             <a:endParaRPr lang="en-CA"/>
           </a:p>
@@ -4568,7 +4568,7 @@
           <a:p>
             <a:fld id="{5740B982-0E6D-4C64-AE1B-DA9749EF130C}" type="datetimeFigureOut">
               <a:rPr lang="en-CA" smtClean="0"/>
-              <a:t>2026-09-20</a:t>
+              <a:t>2026-09-21</a:t>
             </a:fld>
             <a:endParaRPr lang="en-CA"/>
           </a:p>
@@ -4844,7 +4844,7 @@
           <a:p>
             <a:fld id="{5740B982-0E6D-4C64-AE1B-DA9749EF130C}" type="datetimeFigureOut">
               <a:rPr lang="en-CA" smtClean="0"/>
-              <a:t>2026-09-20</a:t>
+              <a:t>2026-09-21</a:t>
             </a:fld>
             <a:endParaRPr lang="en-CA"/>
           </a:p>
@@ -5112,7 +5112,7 @@
           <a:p>
             <a:fld id="{5740B982-0E6D-4C64-AE1B-DA9749EF130C}" type="datetimeFigureOut">
               <a:rPr lang="en-CA" smtClean="0"/>
-              <a:t>2026-09-20</a:t>
+              <a:t>2026-09-21</a:t>
             </a:fld>
             <a:endParaRPr lang="en-CA"/>
           </a:p>
@@ -5527,7 +5527,7 @@
           <a:p>
             <a:fld id="{5740B982-0E6D-4C64-AE1B-DA9749EF130C}" type="datetimeFigureOut">
               <a:rPr lang="en-CA" smtClean="0"/>
-              <a:t>2026-09-20</a:t>
+              <a:t>2026-09-21</a:t>
             </a:fld>
             <a:endParaRPr lang="en-CA"/>
           </a:p>
@@ -5669,7 +5669,7 @@
           <a:p>
             <a:fld id="{5740B982-0E6D-4C64-AE1B-DA9749EF130C}" type="datetimeFigureOut">
               <a:rPr lang="en-CA" smtClean="0"/>
-              <a:t>2026-09-20</a:t>
+              <a:t>2026-09-21</a:t>
             </a:fld>
             <a:endParaRPr lang="en-CA"/>
           </a:p>
@@ -5782,7 +5782,7 @@
           <a:p>
             <a:fld id="{5740B982-0E6D-4C64-AE1B-DA9749EF130C}" type="datetimeFigureOut">
               <a:rPr lang="en-CA" smtClean="0"/>
-              <a:t>2026-09-20</a:t>
+              <a:t>2026-09-21</a:t>
             </a:fld>
             <a:endParaRPr lang="en-CA"/>
           </a:p>
@@ -6095,7 +6095,7 @@
           <a:p>
             <a:fld id="{5740B982-0E6D-4C64-AE1B-DA9749EF130C}" type="datetimeFigureOut">
               <a:rPr lang="en-CA" smtClean="0"/>
-              <a:t>2026-09-20</a:t>
+              <a:t>2026-09-21</a:t>
             </a:fld>
             <a:endParaRPr lang="en-CA"/>
           </a:p>
@@ -6384,7 +6384,7 @@
           <a:p>
             <a:fld id="{5740B982-0E6D-4C64-AE1B-DA9749EF130C}" type="datetimeFigureOut">
               <a:rPr lang="en-CA" smtClean="0"/>
-              <a:t>2026-09-20</a:t>
+              <a:t>2026-09-21</a:t>
             </a:fld>
             <a:endParaRPr lang="en-CA"/>
           </a:p>
@@ -6627,7 +6627,7 @@
           <a:p>
             <a:fld id="{5740B982-0E6D-4C64-AE1B-DA9749EF130C}" type="datetimeFigureOut">
               <a:rPr lang="en-CA" smtClean="0"/>
-              <a:t>2026-09-20</a:t>
+              <a:t>2026-09-21</a:t>
             </a:fld>
             <a:endParaRPr lang="en-CA"/>
           </a:p>
@@ -16004,8 +16004,8 @@
         </p:blipFill>
         <p:spPr>
           <a:xfrm>
-            <a:off x="3554048" y="922020"/>
-            <a:ext cx="7555373" cy="5067559"/>
+            <a:off x="3526972" y="787500"/>
+            <a:ext cx="7527886" cy="5516214"/>
           </a:xfrm>
           <a:prstGeom prst="rect">
             <a:avLst/>

--- a/Deliverables/Presentation1.pptx
+++ b/Deliverables/Presentation1.pptx
@@ -145,7 +145,7 @@
 <file path=ppt/revisionInfo.xml><?xml version="1.0" encoding="utf-8"?>
 <p1510:revInfo xmlns:a="http://schemas.openxmlformats.org/drawingml/2006/main" xmlns:r="http://schemas.openxmlformats.org/officeDocument/2006/relationships" xmlns:p1510="http://schemas.microsoft.com/office/powerpoint/2015/10/main">
   <p1510:revLst>
-    <p1510:client id="{EADFFEA0-CC63-45EF-97E4-5A80CDB68182}" v="12" dt="2026-09-21T10:37:03.825"/>
+    <p1510:client id="{EADFFEA0-CC63-45EF-97E4-5A80CDB68182}" v="13" dt="2026-09-21T10:38:25.208"/>
   </p1510:revLst>
 </p1510:revInfo>
 </file>
@@ -155,7 +155,7 @@
   <pc:docChgLst>
     <pc:chgData name="Steve Mutrux" userId="4fa98d0c-dc66-4728-b09b-a88e22e95094" providerId="ADAL" clId="{421BD283-33D8-4C6C-821F-71755E863FA2}"/>
     <pc:docChg chg="undo custSel addSld delSld modSld sldOrd">
-      <pc:chgData name="Steve Mutrux" userId="4fa98d0c-dc66-4728-b09b-a88e22e95094" providerId="ADAL" clId="{421BD283-33D8-4C6C-821F-71755E863FA2}" dt="2026-09-21T10:37:25.030" v="5837" actId="14100"/>
+      <pc:chgData name="Steve Mutrux" userId="4fa98d0c-dc66-4728-b09b-a88e22e95094" providerId="ADAL" clId="{421BD283-33D8-4C6C-821F-71755E863FA2}" dt="2026-09-21T10:38:25.208" v="5838" actId="14826"/>
       <pc:docMkLst>
         <pc:docMk/>
       </pc:docMkLst>
@@ -492,7 +492,7 @@
         </pc:grpChg>
       </pc:sldChg>
       <pc:sldChg chg="addSp delSp modSp add mod modTransition addAnim delAnim modAnim modNotesTx">
-        <pc:chgData name="Steve Mutrux" userId="4fa98d0c-dc66-4728-b09b-a88e22e95094" providerId="ADAL" clId="{421BD283-33D8-4C6C-821F-71755E863FA2}" dt="2026-09-21T02:38:56.379" v="5815" actId="14826"/>
+        <pc:chgData name="Steve Mutrux" userId="4fa98d0c-dc66-4728-b09b-a88e22e95094" providerId="ADAL" clId="{421BD283-33D8-4C6C-821F-71755E863FA2}" dt="2026-09-21T10:38:25.208" v="5838" actId="14826"/>
         <pc:sldMkLst>
           <pc:docMk/>
           <pc:sldMk cId="4190029259" sldId="261"/>
@@ -658,7 +658,7 @@
           </ac:grpSpMkLst>
         </pc:grpChg>
         <pc:picChg chg="add mod">
-          <ac:chgData name="Steve Mutrux" userId="4fa98d0c-dc66-4728-b09b-a88e22e95094" providerId="ADAL" clId="{421BD283-33D8-4C6C-821F-71755E863FA2}" dt="2026-09-21T02:38:56.379" v="5815" actId="14826"/>
+          <ac:chgData name="Steve Mutrux" userId="4fa98d0c-dc66-4728-b09b-a88e22e95094" providerId="ADAL" clId="{421BD283-33D8-4C6C-821F-71755E863FA2}" dt="2026-09-21T10:38:25.208" v="5838" actId="14826"/>
           <ac:picMkLst>
             <pc:docMk/>
             <pc:sldMk cId="4190029259" sldId="261"/>
@@ -14510,8 +14510,8 @@
         </p:blipFill>
         <p:spPr>
           <a:xfrm>
-            <a:off x="3402800" y="1771869"/>
-            <a:ext cx="7967662" cy="3206424"/>
+            <a:off x="3514723" y="1771869"/>
+            <a:ext cx="7743816" cy="3206424"/>
           </a:xfrm>
           <a:prstGeom prst="rect">
             <a:avLst/>
